--- a/MASVN_RS_WM_2H26_outlook_Equity_VN_2026_STBFPT_31July2026.pptx
+++ b/MASVN_RS_WM_2H26_outlook_Equity_VN_2026_STBFPT_31July2026.pptx
@@ -9418,7 +9418,7 @@
                 <a:latin typeface="Noto Sans" panose="020B0502040504020204" pitchFamily="34" charset="0"/>
                 <a:ea typeface="나눔고딕" pitchFamily="50" charset="-127"/>
               </a:rPr>
-              <a:t>Provisions swamp 1H; NPLs now the highest in the system</a:t>
+              <a:t>Asset quality deteriorates; provisioning to stay elevated</a:t>
             </a:r>
             <a:endParaRPr kumimoji="1" lang="en-US" altLang="ko-KR" sz="1200" b="1" i="0" u="none" strike="noStrike" kern="1200" cap="none" spc="0" normalizeH="0" baseline="0" noProof="0" dirty="0">
               <a:ln>
@@ -11757,7 +11757,7 @@
                 <a:ea typeface="Noto Sans" panose="020B0502040504020204" pitchFamily="34" charset="0"/>
                 <a:cs typeface="Noto Sans" panose="020B0502040504020204" pitchFamily="34" charset="0"/>
               </a:rPr>
-              <a:t>STB's 1H26 results (filed): </a:t>
+              <a:t>1H26 results came in below expectations: </a:t>
             </a:r>
           </a:p>
           <a:p>
@@ -11785,7 +11785,7 @@
                 <a:ea typeface="Noto Sans" panose="020B0502040504020204" pitchFamily="34" charset="0"/>
                 <a:cs typeface="Noto Sans" panose="020B0502040504020204" pitchFamily="34" charset="0"/>
               </a:rPr>
-              <a:t>1H26 PBT came in at VND4,136bn (-43.6% YoY), 51% of the VND8,100bn FY26 plan. With VND2,106bn booked in 1Q26, that implies 2Q26 PBT of ~VND2,030bn. Asset quality moved the wrong way: the NPL ratio reached 7.54% at 30/06/26, up 1.13%p from end-2025 and now the highest in the system — management had guided to ~5.6%. Group 3-5 balances rose ~VND7,800bn YTD and ~VND6,500bn QoQ to VND47,957bn, of which roughly 67% (~VND32,000bn) sits in Group 5, while Group 4 more than doubled (+156%). Provisioning remains the swing factor: VND2,024bn in 1Q26 and a materially heavier charge in 2Q26, after more than VND11,300bn for FY25 as a whole.</a:t>
+              <a:t>1H26 PBT reached VND4,136bn (-43.6% YoY), completing 51% of the VND8,100bn FY26 plan. With VND2,106bn recorded in 1Q26, 2Q26 PBT is implied at approximately VND2,030bn. The shortfall stems from continued NIM compression amid intense deposit competition and from a materially heavier provisioning charge, following VND2,024bn in 1Q26 and more than VND11,300bn for FY25 as a whole.</a:t>
             </a:r>
             <a:r>
               <a:rPr kumimoji="1" lang="en-US" altLang="ko-KR" sz="800" dirty="0">
@@ -11822,7 +11822,7 @@
                 <a:ea typeface="Noto Sans" panose="020B0502040504020204" pitchFamily="34" charset="0"/>
                 <a:cs typeface="Noto Sans" panose="020B0502040504020204" pitchFamily="34" charset="0"/>
               </a:rPr>
-              <a:t>Why a weak 1H does not, by itself, break FY26F: </a:t>
+              <a:t>Asset quality has deteriorated beyond management guidance: </a:t>
             </a:r>
             <a:r>
               <a:rPr kumimoji="1" lang="en-US" altLang="ko-KR" sz="800" b="1" dirty="0">
@@ -11861,7 +11861,7 @@
                 <a:ea typeface="Noto Sans" panose="020B0502040504020204" pitchFamily="34" charset="0"/>
                 <a:cs typeface="Noto Sans" panose="020B0502040504020204" pitchFamily="34" charset="0"/>
               </a:rPr>
-              <a:t>The 2H25 base is exceptionally low. STB earned VND7,331bn of PBT in 1H25 but only VND297bn in 2H25 — 4Q25 alone was a pre-tax loss of about VND3,360bn on a ~VND9,232bn provisioning charge. Our FY26F PBT of VND8,455bn (+10.8% YoY) therefore needs 2H26 of ~VND4,319bn: about 14x the 2H25 base, but only ~4% above 1H26 sequentially. What the print does challenge is the composition. Our sub-4.5% FY26F NPL assumption is unreachable from 7.54% at mid-year without a step-change in write-offs, and FY26F provisioning of VND10.4tn (-8.9% YoY) now looks light rather than conservative. We are reviewing both, along with the HOLD rating and the VND77,800 target price (2.4x FY26F P/B).</a:t>
+              <a:t>The NPL ratio reached 7.54% at end-2Q26, up 1.13%p from the beginning of the year and the highest in the system, against management guidance of approximately 5.6%. Group 3-5 balances increased by approximately VND7,800bn year-to-date and VND6,500bn quarter-on-quarter to VND47,957bn, of which around 67% (approximately VND32,000bn) is classified as Group 5, while Group 4 more than doubled (+156%). Our FY26F assumption of an NPL ratio below 4.5% is no longer attainable without a substantial acceleration in write-offs, and FY26F provisioning of VND10.4tn (-8.9% YoY) appears insufficient. Both assumptions are under review, together with the HOLD rating and the VND77,800 target price (2.4x FY26F P/B).</a:t>
             </a:r>
           </a:p>
           <a:p>
@@ -11887,7 +11887,7 @@
                 <a:ea typeface="Noto Sans" panose="020B0502040504020204" pitchFamily="34" charset="0"/>
                 <a:cs typeface="Noto Sans" panose="020B0502040504020204" pitchFamily="34" charset="0"/>
               </a:rPr>
-              <a:t>Collateral recovery — LDG’s Viva City: </a:t>
+              <a:t>FY26F PBT remains attainable on a low 2H25 base: </a:t>
             </a:r>
           </a:p>
           <a:p>
@@ -11915,7 +11915,7 @@
                 <a:ea typeface="Noto Sans" panose="020B0502040504020204" pitchFamily="34" charset="0"/>
                 <a:cs typeface="Noto Sans" panose="020B0502040504020204" pitchFamily="34" charset="0"/>
               </a:rPr>
-              <a:t>STB has taken possession of 507 land-use right certificates from LDG’s Viva City project in Dong Nai after LDG breached its credit obligations, against overdue principal of nearly VND350bn and more than VND82bn of accrued overdue interest. LDG’s exposure is immaterial to the overall book, but the seizure illustrates the collateral-resolution route that has to carry the 2H26 recovery. Our other FY26F assumptions are unchanged: NII VND27,010bn (+1.2% YoY) on 11.7% loan growth, NIM 2.94% (-38bps YoY), CIR 42.7% (+2.0%p YoY) and NOI VND1,327bn (+5% YoY).</a:t>
+              <a:t>STB recorded VND7,331bn of PBT in 1H25 but only VND297bn in 2H25, as 4Q25 registered a pre-tax loss of approximately VND3,360bn on a provisioning charge of around VND9,232bn. Our FY26F PBT forecast of VND8,455bn (+10.8% YoY) therefore requires 2H26 PBT of approximately VND4,319bn — around 14x the 2H25 base, but only 4% above the 1H26 level. Other FY26F assumptions are unchanged: NII of VND27,010bn (+1.2% YoY) on 11.7% loan growth, NIM of 2.94% (-38bps YoY), CIR of 42.7% (+2.0%p YoY) and NOI of VND1,327bn (+5% YoY). Separately, STB has taken possession of 507 land-use right certificates at LDG’s Viva City project in Dong Nai against overdue principal of nearly VND350bn and more than VND82bn of accrued overdue interest; the exposure is immaterial to the overall portfolio but illustrates the collateral-resolution channel on which the 2H26 recovery depends.</a:t>
             </a:r>
           </a:p>
           <a:p>
@@ -11940,6 +11940,17 @@
               <a:ea typeface="Noto Sans" panose="020B0502040504020204" pitchFamily="34" charset="0"/>
               <a:cs typeface="Noto Sans" panose="020B0502040504020204" pitchFamily="34" charset="0"/>
             </a:endParaRPr>
+            <a:r>
+              <a:rPr kumimoji="1" lang="en-US" altLang="ko-KR" sz="800" b="0" dirty="0">
+                <a:solidFill>
+                  <a:srgbClr val="000000"/>
+                </a:solidFill>
+                <a:latin typeface="Noto Sans" panose="020B0502040504020204" pitchFamily="34" charset="0"/>
+                <a:ea typeface="Noto Sans" panose="020B0502040504020204" pitchFamily="34" charset="0"/>
+                <a:cs typeface="Noto Sans" panose="020B0502040504020204" pitchFamily="34" charset="0"/>
+              </a:rPr>
+              <a:t>Risks: (1) continued NPL formation requiring provisioning above our FY26F estimate (2) prolonged deposit competition sustaining NIM compression (3) slower-than-expected disposal of recovered collateral.</a:t>
+            </a:r>
           </a:p>
           <a:p>
             <a:pPr algn="just" fontAlgn="ctr">
@@ -16820,7 +16831,7 @@
                 <a:latin typeface="Noto Sans" panose="020B0502040504020204" pitchFamily="34" charset="0"/>
                 <a:ea typeface="나눔고딕" pitchFamily="50" charset="-127"/>
               </a:rPr>
-              <a:t>Dự phòng bào mòn lợi nhuận, nợ xấu cao nhất hệ thống</a:t>
+              <a:t>Chất lượng tài sản suy giảm, áp lực dự phòng còn kéo dài</a:t>
             </a:r>
             <a:r>
               <a:rPr kumimoji="1" lang="en-US" altLang="ko-KR" sz="1200" b="1" dirty="0" err="1">
@@ -20478,7 +20489,7 @@
                 <a:ea typeface="Noto Sans" panose="020B0502040504020204" pitchFamily="34" charset="0"/>
                 <a:cs typeface="Noto Sans" panose="020B0502040504020204" pitchFamily="34" charset="0"/>
               </a:rPr>
-              <a:t>KQKD 1H26 (đã công bố): </a:t>
+              <a:t>KQKD 1H26 thấp hơn kỳ vọng: </a:t>
             </a:r>
           </a:p>
           <a:p>
@@ -20503,7 +20514,7 @@
                 <a:ea typeface="Noto Sans" panose="020B0502040504020204" pitchFamily="34" charset="0"/>
                 <a:cs typeface="Noto Sans" panose="020B0502040504020204" pitchFamily="34" charset="0"/>
               </a:rPr>
-              <a:t>LNTT 1H26 đạt 4,136 tỷ đồng (-43.6% CK), tương đương 51% kế hoạch năm 8,100 tỷ đồng. Với 2,106 tỷ đồng trong Q1/2026, LNTT Q2/2026 suy ra khoảng 2,030 tỷ đồng. Chất lượng tài sản đi ngược kỳ vọng: tỷ lệ nợ xấu lên 7.54% tại 30/06/26, tăng 1.13%p so với đầu năm và hiện cao nhất hệ thống — trong khi ban lãnh đạo từng ước tính ~5.6%. Dư nợ nhóm 3-5 tăng ~7,800 tỷ đồng so với đầu năm và ~6,500 tỷ đồng so với Q1, lên 47,957 tỷ đồng, trong đó khoảng 67% (~32,000 tỷ đồng) là nợ nhóm 5 và nợ nhóm 4 tăng hơn gấp đôi (+156%). Chi phí dự phòng vẫn là biến số quyết định: 2,024 tỷ đồng trong Q1/2026 và mức trích lập nặng hơn đáng kể trong Q2/2026, sau hơn 11,300 tỷ đồng của cả năm 2025.</a:t>
+              <a:t>LNTT 1H26 đạt 4,136 tỷ đồng (-43.6% CK), hoàn thành 51% kế hoạch năm 8,100 tỷ đồng. Với 2,106 tỷ đồng ghi nhận trong Q1/2026, LNTT Q2/2026 ước tính khoảng 2,030 tỷ đồng. Mức sụt giảm đến từ việc NIM tiếp tục thu hẹp trong bối cảnh cạnh tranh huy động gay gắt và từ chi phí dự phòng tăng đáng kể, sau mức 2,024 tỷ đồng của Q1/2026 và hơn 11,300 tỷ đồng của cả năm 2025.</a:t>
             </a:r>
           </a:p>
           <a:p>
@@ -20528,7 +20539,7 @@
                 <a:ea typeface="Noto Sans" panose="020B0502040504020204" pitchFamily="34" charset="0"/>
                 <a:cs typeface="Noto Sans" panose="020B0502040504020204" pitchFamily="34" charset="0"/>
               </a:rPr>
-              <a:t>Vì sao 1H yếu chưa làm hỏng dự phóng FY26F: nền 2H25 rất thấp. STB đạt 7,331 tỷ đồng LNTT trong 1H25 nhưng chỉ 297 tỷ đồng trong 2H25 — riêng Q4/2025 lỗ trước thuế khoảng 3,360 tỷ đồng do trích lập ~9,232 tỷ đồng. Dự phóng LNTT FY26F 8,455 tỷ đồng (+10.8% CK) do đó cần 2H26 đạt ~4,319 tỷ đồng: gấp khoảng 14 lần nền 2H25, nhưng chỉ cao hơn ~4% so với 1H26. Điều bị thách thức là cấu phần: giả định nợ xấu FY26F dưới 4.5% không còn khả thi khi giữa năm đã ở 7.54% nếu không đẩy mạnh xóa nợ, và chi phí dự phòng FY26F 10.4 nghìn tỷ đồng (-8.9% CK) đang tỏ ra thấp hơn thực tế. Chúng tôi đang rà soát lại cả hai, cùng khuyến nghị NẮM GIỮ và giá mục tiêu 77,800 đồng (2.4x P/B FY26F).</a:t>
+              <a:t>Chất lượng tài sản suy giảm vượt mức ban lãnh đạo dự kiến: tỷ lệ nợ xấu đạt 7.54% cuối Q2/2026, tăng 1.13%p so với đầu năm và hiện cao nhất hệ thống, so với mức ước tính khoảng 5.6% của ban lãnh đạo. Dư nợ nhóm 3-5 tăng khoảng 7,800 tỷ đồng so với đầu năm và 6,500 tỷ đồng so với quý trước, lên 47,957 tỷ đồng, trong đó khoảng 67% (tương đương 32,000 tỷ đồng) được xếp nhóm 5, còn nợ nhóm 4 tăng hơn gấp đôi (+156%). Giả định tỷ lệ nợ xấu FY26F dưới 4.5% của chúng tôi không còn khả thi nếu không đẩy mạnh xóa nợ, và chi phí dự phòng FY26F 10.4 nghìn tỷ đồng (-8.9% CK) là chưa đủ. Cả hai giả định đang được rà soát, cùng với khuyến nghị NẮM GIỮ và giá mục tiêu 77,800 đồng (2.4x P/B FY26F).</a:t>
             </a:r>
             <a:endParaRPr kumimoji="1" lang="en-US" altLang="ko-KR" sz="800" b="0" dirty="0">
               <a:solidFill>
@@ -20559,7 +20570,7 @@
                 <a:ea typeface="Noto Sans" panose="020B0502040504020204" pitchFamily="34" charset="0"/>
                 <a:cs typeface="Noto Sans" panose="020B0502040504020204" pitchFamily="34" charset="0"/>
               </a:rPr>
-              <a:t>Thu hồi tài sản đảm bảo — Viva City của LDG: </a:t>
+              <a:t>Dự phóng LNTT FY26F vẫn khả thi nhờ nền 2H25 thấp: </a:t>
             </a:r>
             <a:r>
               <a:rPr lang="en-US" altLang="ko-KR" sz="800" b="1" dirty="0" err="1">
@@ -20623,7 +20634,7 @@
                 <a:ea typeface="Noto Sans" panose="020B0502040504020204" pitchFamily="34" charset="0"/>
                 <a:cs typeface="Noto Sans" panose="020B0502040504020204" pitchFamily="34" charset="0"/>
               </a:rPr>
-              <a:t>Sacombank đã thu giữ 507 sổ đỏ thuộc dự án Viva City (Đồng Nai) do LDG vi phạm nghĩa vụ tín dụng, với dư nợ quá hạn gần 350 tỷ đồng và hơn 82 tỷ đồng lãi chậm trả. Quy mô dư nợ LDG chưa đủ lớn để ảnh hưởng đáng kể đến danh mục tín dụng, nhưng đây là ví dụ cho hướng xử lý tài sản đảm bảo sẽ phải gánh phần hồi phục của 2H26.</a:t>
+              <a:t>STB ghi nhận 7,331 tỷ đồng LNTT trong 1H25 nhưng chỉ 297 tỷ đồng trong 2H25, do Q4/2025 lỗ trước thuế khoảng 3,360 tỷ đồng với chi phí dự phòng khoảng 9,232 tỷ đồng. Dự phóng LNTT FY26F 8,455 tỷ đồng (+10.8% CK) do đó cần 2H26 đạt khoảng 4,319 tỷ đồng — tương đương khoảng 14 lần nền 2H25, nhưng chỉ cao hơn 4% so với mức của 1H26.</a:t>
             </a:r>
             <a:endParaRPr lang="en-US" altLang="ko-KR" sz="800" b="0" dirty="0">
               <a:solidFill>
@@ -20660,7 +20671,7 @@
                 <a:ea typeface="Noto Sans" panose="020B0502040504020204" pitchFamily="34" charset="0"/>
                 <a:cs typeface="Noto Sans" panose="020B0502040504020204" pitchFamily="34" charset="0"/>
               </a:rPr>
-              <a:t>Dự phóng kịch bản cơ sở: các giả định còn lại của FY26F giữ nguyên — NII 27,010 tỷ đồng (+1.2% CK) với tăng trưởng tín dụng 11.7%, NIM 2.94% (-38bps CK), CIR 42.7% (+2.0%p CK) và thu nhập khác 1,327 tỷ đồng (+5% CK). Lưu ý dự phóng LNTT FY26F của chúng tôi (8,455 tỷ đồng) vẫn cao hơn kế hoạch 8,100 tỷ đồng mà ĐHĐCĐ thông qua.</a:t>
+              <a:t>Các giả định FY26F còn lại giữ nguyên: NII 27,010 tỷ đồng (+1.2% CK) với tăng trưởng tín dụng 11.7%, NIM 2.94% (-38bps CK), CIR 42.7% (+2.0%p CK) và thu nhập khác 1,327 tỷ đồng (+5% CK); dự phóng LNTT FY26F của chúng tôi vẫn cao hơn kế hoạch 8,100 tỷ đồng đã được ĐHĐCĐ thông qua. Ở diễn biến khác, Sacombank đã thu giữ 507 giấy chứng nhận quyền sử dụng đất thuộc dự án Viva City (Đồng Nai) đối với dư nợ gốc quá hạn gần 350 tỷ đồng và hơn 82 tỷ đồng lãi chậm trả; quy mô dư nợ này chưa trọng yếu với danh mục tín dụng nhưng thể hiện kênh xử lý tài sản đảm bảo mà đà hồi phục của 2H26 phụ thuộc vào.</a:t>
             </a:r>
             <a:r>
               <a:rPr kumimoji="1" lang="en-US" altLang="ko-KR" sz="800" b="1" i="0" u="none" strike="noStrike" kern="1200" cap="none" spc="0" normalizeH="0" baseline="0" noProof="0" dirty="0">
@@ -21647,6 +21658,23 @@
               <a:ea typeface="Noto Sans" panose="020B0502040504020204" pitchFamily="34" charset="0"/>
               <a:cs typeface="Noto Sans" panose="020B0502040504020204" pitchFamily="34" charset="0"/>
             </a:endParaRPr>
+            <a:r>
+              <a:rPr kumimoji="1" lang="vi-VN" altLang="ko-KR" sz="800" b="1" i="0" u="none" strike="noStrike" kern="1200" cap="none" spc="0" normalizeH="0" baseline="0" noProof="0" dirty="0">
+                <a:ln>
+                  <a:noFill/>
+                </a:ln>
+                <a:solidFill>
+                  <a:srgbClr val="000000"/>
+                </a:solidFill>
+                <a:effectLst/>
+                <a:uLnTx/>
+                <a:uFillTx/>
+                <a:latin typeface="Noto Sans" panose="020B0502040504020204" pitchFamily="34" charset="0"/>
+                <a:ea typeface="Noto Sans" panose="020B0502040504020204" pitchFamily="34" charset="0"/>
+                <a:cs typeface="Noto Sans" panose="020B0502040504020204" pitchFamily="34" charset="0"/>
+              </a:rPr>
+              <a:t>Rủi ro: (1) nợ xấu tiếp tục phát sinh khiến chi phí dự phòng vượt dự phóng FY26F (2) cạnh tranh huy động kéo dài làm NIM tiếp tục thu hẹp (3) tiến độ xử lý tài sản đã thu hồi chậm hơn dự kiến.</a:t>
+            </a:r>
           </a:p>
         </p:txBody>
       </p:sp>
@@ -29670,7 +29698,7 @@
                 <a:ea typeface="Noto Sans" panose="020B0502040504020204" pitchFamily="34" charset="0"/>
                 <a:cs typeface="Noto Sans" panose="020B0502040504020204" pitchFamily="34" charset="0"/>
               </a:rPr>
-              <a:t>1H26 results: </a:t>
+              <a:t>1H26 results tracking ahead of the annual plan: revenue reached VND26,269bn (+12.6% YoY) and PBT VND5,714bn (+18.1% YoY), completing 45%/49% of the FY26 revenue/PBT plan, with the group PBT margin widening to 21.8%. In 2Q26 alone, revenue was VND13,789bn, PBT VND2,910bn and NPATMI VND2,568bn (+14% YoY). By segment, Technology revenue reached VND23,138bn (+15% YoY; 88% of group) and PBT VND3,314bn (+16.9% YoY) on a 14.3% margin, with Global IT +13.4% and Domestic IT +22.5%; Education, investment and others declined 2.1% to VND3,131bn yet still contributed 42% of group PBT on a margin of approximately 77%.</a:t>
             </a:r>
             <a:r>
               <a:rPr kumimoji="1" lang="en-US" altLang="ko-KR" sz="800" dirty="0">
@@ -29681,7 +29709,7 @@
                 <a:ea typeface="Noto Sans" panose="020B0502040504020204" pitchFamily="34" charset="0"/>
                 <a:cs typeface="Noto Sans" panose="020B0502040504020204" pitchFamily="34" charset="0"/>
               </a:rPr>
-              <a:t>Revenue VND 26,269bn (+12.6% YoY) and PBT VND 5,714bn (+18.1% YoY), completing 45%/49% of the FY26 revenue/PBT plan, with the group PBT margin widening to 21.8%. 2Q26 alone: revenue VND 13,789bn, PBT VND 2,910bn and NPATMI VND 2,568bn (+14% YoY). By segment: Technology revenue VND 23,138bn (+15% YoY; 88% of group) and PBT VND 3,314bn (+16.9% YoY) on a 14.3% margin, with Global IT +13.4% and Domestic IT +22.5%; Education, investment &amp; others revenue fell 2.1% to VND 3,131bn yet still delivered 42% of group PBT on a ~77% margin.</a:t>
+              <a:t/>
             </a:r>
             <a:endParaRPr kumimoji="1" lang="en-US" altLang="ko-KR" sz="800" b="1" dirty="0">
               <a:solidFill>
@@ -29715,7 +29743,7 @@
                 <a:ea typeface="Noto Sans" panose="020B0502040504020204" pitchFamily="34" charset="0"/>
                 <a:cs typeface="Noto Sans" panose="020B0502040504020204" pitchFamily="34" charset="0"/>
               </a:rPr>
-              <a:t>Government digitalization anchors the domestic pipeline: </a:t>
+              <a:t>Public-sector digitalization underpins the domestic pipeline: Domestic IT was the fastest-growing segment in 6M26 at VND4,236bn (+22.5% YoY), with segment PBT doubling to VND308bn on public-sector contract wins under the national digital-transformation programme. This is multi-year work with limited exposure to the global IT cycle, although its 7.3% margin dilutes the blended margin as it scales. Global IT (VND18,902bn, +13.4% YoY) is expected to reaccelerate to +16.7% in FY27F, led by Japan — 44% of the foreign book — at +22%/+23% and the EU at +18%/+20%, while the US has been trimmed to +5.9% on bid-price competition.</a:t>
             </a:r>
             <a:r>
               <a:rPr kumimoji="1" lang="en-US" altLang="ko-KR" sz="800" dirty="0" err="1">
@@ -29726,7 +29754,7 @@
                 <a:ea typeface="Noto Sans" panose="020B0502040504020204" pitchFamily="34" charset="0"/>
                 <a:cs typeface="Noto Sans" panose="020B0502040504020204" pitchFamily="34" charset="0"/>
               </a:rPr>
-              <a:t>Domestic IT was the fastest-growing segment in 6M26 at VND 4,236bn (+22.5% YoY), segment PBT doubling to VND 308bn, on public-sector wins under the national digital-transformation programme — multi-year work far less exposed to the global IT cycle, though its 7.3% margin dilutes the blend as it scales. Global IT (VND 18,902bn, +13.4% YoY) should reaccelerate to +16.7% in FY27F, led by Japan — 44% of the foreign book — at +22%/+23% and the EU at +18%/+20%, with the US trimmed to +5.9% on bid-price competition.</a:t>
+              <a:t/>
             </a:r>
             <a:endParaRPr kumimoji="1" lang="en-US" altLang="ko-KR" sz="800" b="1" dirty="0">
               <a:solidFill>
@@ -29760,7 +29788,7 @@
                 <a:ea typeface="Noto Sans" panose="020B0502040504020204" pitchFamily="34" charset="0"/>
                 <a:cs typeface="Noto Sans" panose="020B0502040504020204" pitchFamily="34" charset="0"/>
               </a:rPr>
-              <a:t>Why the stock sits at a two-year low: FPT closed at VND62,900 on 24/07, its lowest since October 2023 — down ~10% in July and ~40% YTD, erasing ~VND114tn (~US$4.4bn) from its peak market value and dropping the company out of the exchange’s top 10. The dominant driver is foreign selling — net outflows of more than VND16tn YTD, the largest of any listed stock — alongside concern over slowing global IT-services growth; the single heaviest session was 15/07, when FPT fell 5% to VND66,800 on VND346bn of net foreign selling. That pressure has since eased and domestic flows have stepped in. Newsflow has run the other way throughout: an expanded AI partnership with Microsoft across ASEAN, Japan and Korea (25/06); an AI contract worth tens of millions of USD with a European materials group; six AI agreements in Thailand and Singapore; three digital and quantum-technology agreements with Hanoi (29/06); and data-intermediary certification plus a cooperation deal with the Ministry of Public Security’s National Data Centre (15/07).</a:t>
+              <a:t>Share price at a two-year low on sustained foreign selling: FPT closed at VND62,900 on 24/07, its lowest level since October 2023, down approximately 10% in July and 40% year-to-date. This equates to around VND114tn (US$4.4bn) of market value erased from the peak and has moved the company out of the exchange’s top 10. The principal driver is foreign selling, with net outflows of more than VND16tn year-to-date, the largest of any listed stock, alongside concern over slowing global IT-services growth; the heaviest session was 15/07, when FPT declined 5% to VND66,800 on VND346bn of net foreign selling. That pressure has moderated in late July as domestic flows absorbed supply. Corporate developments have remained supportive: an expanded AI partnership with Microsoft across ASEAN, Japan and Korea (25/06); an AI contract worth tens of millions of USD with a European materials group; six AI agreements in Thailand and Singapore; three digital and quantum-technology agreements with Hanoi (29/06); and data-intermediary certification together with a cooperation agreement with the Ministry of Public Security’s National Data Centre (15/07).</a:t>
             </a:r>
             <a:r>
               <a:rPr kumimoji="1" lang="en-US" altLang="ko-KR" sz="800" dirty="0">
@@ -29797,7 +29825,7 @@
                 <a:ea typeface="Noto Sans" panose="020B0502040504020204" pitchFamily="34" charset="0"/>
                 <a:cs typeface="Noto Sans" panose="020B0502040504020204" pitchFamily="34" charset="0"/>
               </a:rPr>
-              <a:t>Our projection &amp; valuation: </a:t>
+              <a:t>Projection and valuation: we forecast FY26F NPATMI of VND10,943bn (+15.6% YoY), FY27F VND12,518bn (+14.4% YoY) and FY28F VND14,156bn (+13.1% YoY), assuming FPT Telecom associate income grows approximately 15% p.a. Net margin is expected to widen toward 20% and ROE to hold near 27.5%, supported by a net cash position of around 60% of equity and a maintained DPS of VND2,000. Our DCF (FCFF)-based target price is VND78,750; at VND62,900 the stock trades at 10.4x FY26F earnings against a five-year median above 18x, implying 25% upside (BUY). Risks: (1) subdued US and global IT spending (2) contract delays related to tariffs (3) JPY/USD volatility.</a:t>
             </a:r>
             <a:r>
               <a:rPr kumimoji="1" lang="en-US" altLang="ko-KR" sz="800" dirty="0">
@@ -29808,7 +29836,7 @@
                 <a:ea typeface="Noto Sans" panose="020B0502040504020204" pitchFamily="34" charset="0"/>
                 <a:cs typeface="Noto Sans" panose="020B0502040504020204" pitchFamily="34" charset="0"/>
               </a:rPr>
-              <a:t>We forecast FY26F NPATMI of VND 10,943bn (+15.6% YoY), FY27F VND 12,518bn (+14.4% YoY) and FY28F VND 14,156bn (+13.1% YoY), assuming FPT Telecom associate income grows ~15% p.a.; net margin widens toward 20% and ROE holds near 27.5%, backed by net cash of ~60% of equity and a maintained VND 2,000 DPS. Our DCF (FCFF)-based target price is VND 78,750; at VND 62,900 FPT trades at 10.4x 2026F P/E against a 5-year median above 18x, implying 25% upside (BUY). Risks: soft US/global IT spending, tariff-related delays and JPY/USD swings.</a:t>
+              <a:t/>
             </a:r>
             <a:endParaRPr kumimoji="1" lang="en-US" altLang="ko-KR" sz="800" b="1" dirty="0">
               <a:solidFill>
@@ -38043,7 +38071,7 @@
                 <a:ea typeface="Noto Sans" panose="020B0502040504020204" pitchFamily="34" charset="0"/>
                 <a:cs typeface="Noto Sans" panose="020B0502040504020204" pitchFamily="34" charset="0"/>
               </a:rPr>
-              <a:t>KQKD 1H26: </a:t>
+              <a:t>KQKD 1H26 vượt tiến độ kế hoạch năm: doanh thu đạt 26,269 tỷ đồng (+12.6% CK) và LNTT 5,714 tỷ đồng (+18.1% CK), hoàn thành 45%/49% kế hoạch doanh thu/lợi nhuận năm; biên LNTT toàn tập đoàn mở rộng lên 21.8%. Riêng Q2/2026, doanh thu đạt 13,789 tỷ đồng, LNTT 2,910 tỷ đồng và LNST-CĐTS 2,568 tỷ đồng (+14% CK). Theo mảng, Công nghệ đạt 23,138 tỷ đồng (+15% CK; 88% doanh thu tập đoàn) và LNTT 3,314 tỷ đồng (+16.9% CK) với biên 14.3%, trong đó CNTT nước ngoài +13.4% và trong nước +22.5%; Giáo dục, đầu tư và khác giảm 2.1% về 3,131 tỷ đồng nhưng vẫn đóng góp 42% LNTT tập đoàn với biên khoảng 77%.</a:t>
             </a:r>
             <a:r>
               <a:rPr kumimoji="1" lang="vi-VN" altLang="ko-KR" sz="800" b="0" dirty="0">
@@ -38054,7 +38082,7 @@
                 <a:ea typeface="Noto Sans" panose="020B0502040504020204" pitchFamily="34" charset="0"/>
                 <a:cs typeface="Noto Sans" panose="020B0502040504020204" pitchFamily="34" charset="0"/>
               </a:rPr>
-              <a:t>Doanh thu 26,269 tỷ đồng (+12.6% CK) và LNTT 5,714 tỷ đồng (+18.1% CK), hoàn thành 45%/49% kế hoạch năm; biên LNTT toàn tập đoàn mở rộng lên 21.8%. Riêng Q2/2026: doanh thu 13,789 tỷ đồng, LNTT 2,910 tỷ đồng, LNST-CĐTS 2,568 tỷ đồng (+14% CK). Theo mảng: Công nghệ đạt 23,138 tỷ đồng (+15% CK; 88% doanh thu tập đoàn), LNTT 3,314 tỷ đồng (+16.9% CK) với biên 14.3%; CNTT nước ngoài +13.4%, trong nước +22.5%. Giáo dục, đầu tư &amp; khác giảm 2.1% về 3,131 tỷ đồng nhưng vẫn đóng góp 42% LNTT tập đoàn với biên ~77%.</a:t>
+              <a:t/>
             </a:r>
           </a:p>
           <a:p>
@@ -38080,7 +38108,7 @@
                 <a:ea typeface="Noto Sans" panose="020B0502040504020204" pitchFamily="34" charset="0"/>
                 <a:cs typeface="Noto Sans" panose="020B0502040504020204" pitchFamily="34" charset="0"/>
               </a:rPr>
-              <a:t>Số hóa khu vực công dẫn dắt danh mục trong nước: </a:t>
+              <a:t>Số hóa khu vực công là nền tảng của danh mục trong nước: CNTT trong nước là mảng tăng trưởng nhanh nhất trong 6T26, đạt 4,236 tỷ đồng (+22.5% CK), LNTT mảng tăng gấp đôi lên 308 tỷ đồng nhờ trúng thầu khu vực công thuộc chương trình chuyển đổi số quốc gia. Đây là nguồn việc kéo dài nhiều năm và ít phụ thuộc chu kỳ CNTT toàn cầu, tuy biên 7.3% sẽ làm loãng biên chung khi mảng này mở rộng. CNTT nước ngoài (18,902 tỷ đồng, +13.4% CK) dự kiến tăng tốc lên +16.7% trong FY27F, dẫn dắt bởi Nhật Bản — chiếm 44% doanh thu nước ngoài — ở mức +22%/+23% và châu Âu +18%/+20%, trong khi thị trường Mỹ được điều chỉnh về +5.9% do cạnh tranh giá thầu.</a:t>
             </a:r>
             <a:r>
               <a:rPr kumimoji="1" lang="vi-VN" altLang="ko-KR" sz="800" b="0" dirty="0">
@@ -38091,7 +38119,7 @@
                 <a:ea typeface="Noto Sans" panose="020B0502040504020204" pitchFamily="34" charset="0"/>
                 <a:cs typeface="Noto Sans" panose="020B0502040504020204" pitchFamily="34" charset="0"/>
               </a:rPr>
-              <a:t>CNTT trong nước tăng nhanh nhất trong 6T26, đạt 4,236 tỷ đồng (+22.5% CK), LNTT mảng tăng gấp đôi lên 308 tỷ đồng nhờ trúng thầu khu vực công thuộc chương trình chuyển đổi số quốc gia — nguồn việc nhiều năm, ít phụ thuộc chu kỳ CNTT toàn cầu, song biên 7.3% sẽ pha loãng biên chung khi mở rộng. CNTT nước ngoài (18,902 tỷ đồng, +13.4% CK) dự kiến tăng tốc lên +16.7% trong FY27F, dẫn dắt bởi Nhật Bản — 44% doanh thu nước ngoài — ở +22%/+23% và châu Âu +18%/+20%, trong khi Mỹ hạ về +5.9% do cạnh tranh giá thầu.</a:t>
+              <a:t/>
             </a:r>
           </a:p>
           <a:p>
@@ -38117,7 +38145,7 @@
                 <a:ea typeface="Noto Sans" panose="020B0502040504020204" pitchFamily="34" charset="0"/>
                 <a:cs typeface="Noto Sans" panose="020B0502040504020204" pitchFamily="34" charset="0"/>
               </a:rPr>
-              <a:t>Vì sao cổ phiếu về đáy 2 năm: FPT đóng cửa 62,900 đồng ngày 24/07, thấp nhất kể từ tháng 10/2023 — giảm ~10% trong tháng 7 và ~40% từ đầu năm, tương ứng ~114 nghìn tỷ đồng (~4.4 tỷ USD) vốn hóa bị xóa so với đỉnh và đưa FPT rời Top 10 sàn. Nguyên nhân chính là khối ngoại bán ròng hơn 16 nghìn tỷ đồng từ đầu năm, lớn nhất toàn sàn, cùng lo ngại tăng trưởng dịch vụ CNTT toàn cầu chậm lại; phiên nặng nhất là 15/07 khi FPT giảm 5% về 66,800 đồng với 346 tỷ đồng bán ròng. Áp lực này đã dịu lại và dòng tiền nội bắt đầu nhập cuộc. Trong khi đó thông tin doanh nghiệp vẫn tích cực: mở rộng hợp tác AI với Microsoft tại ASEAN, Nhật Bản và Hàn Quốc (25/06); hợp đồng AI hàng chục triệu USD với tập đoàn vật liệu châu Âu; 6 thỏa thuận AI tại Thái Lan và Singapore; 3 thỏa thuận chuyển đổi số và công nghệ lượng tử với Hà Nội (29/06); và chứng nhận trung gian dữ liệu cùng hợp tác Trung tâm Dữ liệu quốc gia — Bộ Công an (15/07).</a:t>
+              <a:t>Thị giá về đáy 2 năm do áp lực bán ròng kéo dài của khối ngoại: FPT đóng cửa 62,900 đồng ngày 24/07, mức thấp nhất kể từ tháng 10/2023, giảm khoảng 10% trong tháng 7 và 40% từ đầu năm. Mức giảm này tương ứng khoảng 114 nghìn tỷ đồng (4.4 tỷ USD) vốn hóa bị xóa so với đỉnh và đưa FPT ra khỏi Top 10 sàn. Nguyên nhân chính là khối ngoại bán ròng hơn 16 nghìn tỷ đồng từ đầu năm, lớn nhất toàn sàn, cùng lo ngại tăng trưởng dịch vụ CNTT toàn cầu chậm lại; phiên bán mạnh nhất là 15/07 khi FPT giảm 5% về 66,800 đồng với 346 tỷ đồng bán ròng. Áp lực này đã giảm bớt trong cuối tháng 7 khi dòng tiền trong nước hấp thụ nguồn cung. Thông tin doanh nghiệp vẫn tích cực: mở rộng hợp tác AI với Microsoft tại ASEAN, Nhật Bản và Hàn Quốc (25/06); hợp đồng AI trị giá hàng chục triệu USD với một tập đoàn vật liệu châu Âu; sáu thỏa thuận AI tại Thái Lan và Singapore; ba thỏa thuận chuyển đổi số và công nghệ lượng tử với Hà Nội (29/06); và chứng nhận trung gian dữ liệu cùng thỏa thuận hợp tác với Trung tâm Dữ liệu quốc gia — Bộ Công an (15/07).</a:t>
             </a:r>
             <a:r>
               <a:rPr kumimoji="1" lang="vi-VN" altLang="ko-KR" sz="800" b="0" dirty="0">
@@ -38159,7 +38187,7 @@
                 <a:ea typeface="Noto Sans" panose="020B0502040504020204" pitchFamily="34" charset="0"/>
                 <a:cs typeface="Noto Sans" panose="020B0502040504020204" pitchFamily="34" charset="0"/>
               </a:rPr>
-              <a:t>Dự phóng &amp; định giá: </a:t>
+              <a:t>Dự phóng và định giá: chúng tôi dự phóng LNST-CĐTS FY26F đạt 10,943 tỷ đồng (+15.6% CK), FY27F 12,518 tỷ đồng (+14.4% CK) và FY28F 14,156 tỷ đồng (+13.1% CK), với giả định lợi nhuận từ FPT Telecom tăng khoảng 15%/năm. Biên lợi nhuận ròng dự kiến mở rộng về khoảng 20% và ROE duy trì quanh 27.5%, được hỗ trợ bởi vị thế tiền ròng khoảng 60% VCSH và mức cổ tức tiền mặt 2,000 đồng/cp. Giá mục tiêu theo phương pháp DCF (FCFF) là 78,750 đồng; tại mức 62,900 đồng, cổ phiếu giao dịch ở 10.4x P/E FY26F so với trung vị 5 năm trên 18x, tương ứng tiềm năng tăng 25% (MUA). Rủi ro: (1) chi tiêu CNTT tại Mỹ và toàn cầu ở mức thấp (2) hợp đồng bị trì hoãn do yếu tố thuế quan (3) biến động tỷ giá JPY/USD.</a:t>
             </a:r>
             <a:r>
               <a:rPr kumimoji="1" lang="vi-VN" altLang="ko-KR" sz="800" b="0" dirty="0">
@@ -38170,7 +38198,7 @@
                 <a:ea typeface="Noto Sans" panose="020B0502040504020204" pitchFamily="34" charset="0"/>
                 <a:cs typeface="Noto Sans" panose="020B0502040504020204" pitchFamily="34" charset="0"/>
               </a:rPr>
-              <a:t>Chúng tôi dự phóng LNST-CĐTS FY26F đạt 10,943 tỷ đồng (+15.6% CK), FY27F 12,518 tỷ đồng (+14.4% CK) và FY28F 14,156 tỷ đồng (+13.1% CK), giả định lợi nhuận từ FPT Telecom tăng ~15%/năm; biên LN ròng mở rộng về ~20% và ROE quanh 27.5%, với tiền ròng ~60% VCSH và cổ tức 2,000 đồng/cp. Giá mục tiêu DCF (FCFF) là 78,750 đồng/cp; tại 62,900 đồng, FPT giao dịch ở 10.4x P/E 2026F so với trung vị 5 năm trên 18x, tương ứng 25% tiềm năng tăng (MUA). Rủi ro: chi tiêu CNTT Mỹ/toàn cầu yếu, trì hoãn do thuế quan, biến động JPY/USD.</a:t>
+              <a:t/>
             </a:r>
           </a:p>
         </p:txBody>

--- a/MASVN_RS_WM_2H26_outlook_Equity_VN_2026_STBFPT_31July2026.pptx
+++ b/MASVN_RS_WM_2H26_outlook_Equity_VN_2026_STBFPT_31July2026.pptx
@@ -29698,7 +29698,7 @@
                 <a:ea typeface="Noto Sans" panose="020B0502040504020204" pitchFamily="34" charset="0"/>
                 <a:cs typeface="Noto Sans" panose="020B0502040504020204" pitchFamily="34" charset="0"/>
               </a:rPr>
-              <a:t>1H26 results tracking ahead of the annual plan: revenue reached VND26,269bn (+12.6% YoY) and PBT VND5,714bn (+18.1% YoY), completing 45%/49% of the FY26 revenue/PBT plan, with the group PBT margin widening to 21.8%. In 2Q26 alone, revenue was VND13,789bn, PBT VND2,910bn and NPATMI VND2,568bn (+14% YoY). By segment, Technology revenue reached VND23,138bn (+15% YoY; 88% of group) and PBT VND3,314bn (+16.9% YoY) on a 14.3% margin, with Global IT +13.4% and Domestic IT +22.5%; Education, investment and others declined 2.1% to VND3,131bn yet still contributed 42% of group PBT on a margin of approximately 77%.</a:t>
+              <a:t>1H26 results tracking ahead of the annual plan: revenue reached VND26,269bn (+12.6% YoY) and PBT VND5,714bn (+18.1% YoY), completing 45%/49% of the FY26 revenue/PBT plan, with the group PBT margin widening to 21.8%. In 2Q26 alone, revenue was VND13,789bn, PBT VND2,910bn and NPATMI VND2,568bn (+14% YoY). By segment, Technology revenue reached VND23,138bn (+15% YoY; 88% of group) and PBT VND3,314bn (+16.9% YoY) on a 14.3% margin; Education, investment and others declined 2.1% to VND3,131bn yet still contributed 42% of group PBT on a ~77% margin.</a:t>
             </a:r>
             <a:r>
               <a:rPr kumimoji="1" lang="en-US" altLang="ko-KR" sz="800" dirty="0">
@@ -29743,7 +29743,7 @@
                 <a:ea typeface="Noto Sans" panose="020B0502040504020204" pitchFamily="34" charset="0"/>
                 <a:cs typeface="Noto Sans" panose="020B0502040504020204" pitchFamily="34" charset="0"/>
               </a:rPr>
-              <a:t>Public-sector digitalization underpins the domestic pipeline: Domestic IT was the fastest-growing segment in 6M26 at VND4,236bn (+22.5% YoY), with segment PBT doubling to VND308bn on public-sector contract wins under the national digital-transformation programme. This is multi-year work with limited exposure to the global IT cycle, although its 7.3% margin dilutes the blended margin as it scales. Global IT (VND18,902bn, +13.4% YoY) is expected to reaccelerate to +16.7% in FY27F, led by Japan — 44% of the foreign book — at +22%/+23% and the EU at +18%/+20%, while the US has been trimmed to +5.9% on bid-price competition.</a:t>
+              <a:t>Public-sector digitalization underpins the domestic pipeline: Domestic IT was the fastest-growing segment in 6M26 at VND4,236bn (+22.5% YoY), with segment PBT doubling to VND308bn on public-sector wins under the national digital-transformation programme — multi-year work with limited exposure to the global IT cycle, though its 7.3% margin dilutes the blend as it scales.</a:t>
             </a:r>
             <a:r>
               <a:rPr kumimoji="1" lang="en-US" altLang="ko-KR" sz="800" dirty="0" err="1">
@@ -29788,7 +29788,7 @@
                 <a:ea typeface="Noto Sans" panose="020B0502040504020204" pitchFamily="34" charset="0"/>
                 <a:cs typeface="Noto Sans" panose="020B0502040504020204" pitchFamily="34" charset="0"/>
               </a:rPr>
-              <a:t>Share price at a two-year low on sustained foreign selling: FPT closed at VND62,900 on 24/07, its lowest level since October 2023, down approximately 10% in July and 40% year-to-date. This equates to around VND114tn (US$4.4bn) of market value erased from the peak and has moved the company out of the exchange’s top 10. The principal driver is foreign selling, with net outflows of more than VND16tn year-to-date, the largest of any listed stock, alongside concern over slowing global IT-services growth; the heaviest session was 15/07, when FPT declined 5% to VND66,800 on VND346bn of net foreign selling. That pressure has moderated in late July as domestic flows absorbed supply. Corporate developments have remained supportive: an expanded AI partnership with Microsoft across ASEAN, Japan and Korea (25/06); an AI contract worth tens of millions of USD with a European materials group; six AI agreements in Thailand and Singapore; three digital and quantum-technology agreements with Hanoi (29/06); and data-intermediary certification together with a cooperation agreement with the Ministry of Public Security’s National Data Centre (15/07).</a:t>
+              <a:t>The de-rating reflects the AI debate rather than company news: FPT closed at VND62,900 on 24/07, its lowest since October 2023 and 40% below the start of the year, erasing around VND114tn (US$4.4bn) of market value from the peak. Foreign investors have been net sellers of more than VND16tn year-to-date, the largest of any listed stock, with the pressure moderating in late July as domestic flows absorbed supply. The question is sector-wide: generative AI expands demand for IT services or compresses the headcount-based pricing on which the industry is built. The compression case is visible at the Indian majors, where AI work has scaled without lifting the top line — Infosys reported AI revenue at 8.2% of 1Q FY27 sales yet trimmed FY27 constant-currency growth guidance to 1.5-3.0%, while TCS grew 3.2% YoY in constant currency. The demand case is that adoption remains additive: TCS added a net 9,279 staff in the quarter, its strongest hiring in four years, and FPT’s Global IT revenue rose 13.4% YoY in 6M26, several times the majors’ rate. Pricing pressure is nonetheless evident where competition is sharpest, and we have cut the US book to +5.9% on bid-price competition while leaving Japan at +22%/+23% and the EU at +18%/+20%, which together drive the expected reacceleration of Global IT to +16.7% in FY27F.</a:t>
             </a:r>
             <a:r>
               <a:rPr kumimoji="1" lang="en-US" altLang="ko-KR" sz="800" dirty="0">
@@ -29825,7 +29825,7 @@
                 <a:ea typeface="Noto Sans" panose="020B0502040504020204" pitchFamily="34" charset="0"/>
                 <a:cs typeface="Noto Sans" panose="020B0502040504020204" pitchFamily="34" charset="0"/>
               </a:rPr>
-              <a:t>Projection and valuation: we forecast FY26F NPATMI of VND10,943bn (+15.6% YoY), FY27F VND12,518bn (+14.4% YoY) and FY28F VND14,156bn (+13.1% YoY), assuming FPT Telecom associate income grows approximately 15% p.a. Net margin is expected to widen toward 20% and ROE to hold near 27.5%, supported by a net cash position of around 60% of equity and a maintained DPS of VND2,000. Our DCF (FCFF)-based target price is VND78,750; at VND62,900 the stock trades at 10.4x FY26F earnings against a five-year median above 18x, implying 25% upside (BUY). Risks: (1) subdued US and global IT spending (2) contract delays related to tariffs (3) JPY/USD volatility.</a:t>
+              <a:t>Projection and valuation: we forecast FY26F NPATMI of VND10,943bn (+15.6% YoY), FY27F VND12,518bn (+14.4% YoY) and FY28F VND14,156bn (+13.1% YoY), assuming FPT Telecom associate income grows ~15% p.a. Net margin should widen toward 20% and ROE hold near 27.5%, supported by net cash of around 60% of equity and a maintained DPS of VND2,000. We have taken the pricing risk into the discount rate rather than the earnings line: the equity risk premium is raised to 8.9% from 7.8% and long-term growth cut to 1.5% from 2.5%, lowering our DCF (FCFF) target price to VND78,750 from VND91,570. At VND62,900 the stock trades at 10.4x FY26F earnings against a five-year median above 18x, implying 25% upside (BUY). AI-related newsflow has stayed supportive through the de-rating, including an expanded partnership with Microsoft across ASEAN, Japan and Korea, an AI contract worth tens of millions of USD with a European materials group, six AI agreements in Thailand and Singapore, and data-intermediary certification with the Ministry of Public Security’s National Data Centre. Risks: (1) AI-driven price deflation passing through faster than our long-term growth assumption allows (2) subdued US and global IT spending and tariff-related contract delays (3) JPY/USD volatility.</a:t>
             </a:r>
             <a:r>
               <a:rPr kumimoji="1" lang="en-US" altLang="ko-KR" sz="800" dirty="0">
@@ -38071,7 +38071,7 @@
                 <a:ea typeface="Noto Sans" panose="020B0502040504020204" pitchFamily="34" charset="0"/>
                 <a:cs typeface="Noto Sans" panose="020B0502040504020204" pitchFamily="34" charset="0"/>
               </a:rPr>
-              <a:t>KQKD 1H26 vượt tiến độ kế hoạch năm: doanh thu đạt 26,269 tỷ đồng (+12.6% CK) và LNTT 5,714 tỷ đồng (+18.1% CK), hoàn thành 45%/49% kế hoạch doanh thu/lợi nhuận năm; biên LNTT toàn tập đoàn mở rộng lên 21.8%. Riêng Q2/2026, doanh thu đạt 13,789 tỷ đồng, LNTT 2,910 tỷ đồng và LNST-CĐTS 2,568 tỷ đồng (+14% CK). Theo mảng, Công nghệ đạt 23,138 tỷ đồng (+15% CK; 88% doanh thu tập đoàn) và LNTT 3,314 tỷ đồng (+16.9% CK) với biên 14.3%, trong đó CNTT nước ngoài +13.4% và trong nước +22.5%; Giáo dục, đầu tư và khác giảm 2.1% về 3,131 tỷ đồng nhưng vẫn đóng góp 42% LNTT tập đoàn với biên khoảng 77%.</a:t>
+              <a:t>KQKD 1H26 vượt tiến độ kế hoạch năm: doanh thu đạt 26,269 tỷ đồng (+12.6% CK) và LNTT 5,714 tỷ đồng (+18.1% CK), hoàn thành 45%/49% kế hoạch doanh thu/lợi nhuận năm; biên LNTT toàn tập đoàn mở rộng lên 21.8%. Riêng Q2/2026, doanh thu đạt 13,789 tỷ đồng, LNTT 2,910 tỷ đồng và LNST-CĐTS 2,568 tỷ đồng (+14% CK). Theo mảng, Công nghệ đạt 23,138 tỷ đồng (+15% CK; 88% doanh thu tập đoàn) và LNTT 3,314 tỷ đồng (+16.9% CK) với biên 14.3%; Giáo dục, đầu tư và khác giảm 2.1% về 3,131 tỷ đồng nhưng vẫn đóng góp 42% LNTT tập đoàn với biên khoảng 77%.</a:t>
             </a:r>
             <a:r>
               <a:rPr kumimoji="1" lang="vi-VN" altLang="ko-KR" sz="800" b="0" dirty="0">
@@ -38108,7 +38108,7 @@
                 <a:ea typeface="Noto Sans" panose="020B0502040504020204" pitchFamily="34" charset="0"/>
                 <a:cs typeface="Noto Sans" panose="020B0502040504020204" pitchFamily="34" charset="0"/>
               </a:rPr>
-              <a:t>Số hóa khu vực công là nền tảng của danh mục trong nước: CNTT trong nước là mảng tăng trưởng nhanh nhất trong 6T26, đạt 4,236 tỷ đồng (+22.5% CK), LNTT mảng tăng gấp đôi lên 308 tỷ đồng nhờ trúng thầu khu vực công thuộc chương trình chuyển đổi số quốc gia. Đây là nguồn việc kéo dài nhiều năm và ít phụ thuộc chu kỳ CNTT toàn cầu, tuy biên 7.3% sẽ làm loãng biên chung khi mảng này mở rộng. CNTT nước ngoài (18,902 tỷ đồng, +13.4% CK) dự kiến tăng tốc lên +16.7% trong FY27F, dẫn dắt bởi Nhật Bản — chiếm 44% doanh thu nước ngoài — ở mức +22%/+23% và châu Âu +18%/+20%, trong khi thị trường Mỹ được điều chỉnh về +5.9% do cạnh tranh giá thầu.</a:t>
+              <a:t>Số hóa khu vực công là nền tảng của danh mục trong nước: CNTT trong nước là mảng tăng trưởng nhanh nhất trong 6T26, đạt 4,236 tỷ đồng (+22.5% CK), LNTT mảng tăng gấp đôi lên 308 tỷ đồng nhờ trúng thầu khu vực công thuộc chương trình chuyển đổi số quốc gia — nguồn việc kéo dài nhiều năm, ít phụ thuộc chu kỳ CNTT toàn cầu, tuy biên 7.3% sẽ làm loãng biên chung khi mở rộng.</a:t>
             </a:r>
             <a:r>
               <a:rPr kumimoji="1" lang="vi-VN" altLang="ko-KR" sz="800" b="0" dirty="0">
@@ -38145,7 +38145,7 @@
                 <a:ea typeface="Noto Sans" panose="020B0502040504020204" pitchFamily="34" charset="0"/>
                 <a:cs typeface="Noto Sans" panose="020B0502040504020204" pitchFamily="34" charset="0"/>
               </a:rPr>
-              <a:t>Thị giá về đáy 2 năm do áp lực bán ròng kéo dài của khối ngoại: FPT đóng cửa 62,900 đồng ngày 24/07, mức thấp nhất kể từ tháng 10/2023, giảm khoảng 10% trong tháng 7 và 40% từ đầu năm. Mức giảm này tương ứng khoảng 114 nghìn tỷ đồng (4.4 tỷ USD) vốn hóa bị xóa so với đỉnh và đưa FPT ra khỏi Top 10 sàn. Nguyên nhân chính là khối ngoại bán ròng hơn 16 nghìn tỷ đồng từ đầu năm, lớn nhất toàn sàn, cùng lo ngại tăng trưởng dịch vụ CNTT toàn cầu chậm lại; phiên bán mạnh nhất là 15/07 khi FPT giảm 5% về 66,800 đồng với 346 tỷ đồng bán ròng. Áp lực này đã giảm bớt trong cuối tháng 7 khi dòng tiền trong nước hấp thụ nguồn cung. Thông tin doanh nghiệp vẫn tích cực: mở rộng hợp tác AI với Microsoft tại ASEAN, Nhật Bản và Hàn Quốc (25/06); hợp đồng AI trị giá hàng chục triệu USD với một tập đoàn vật liệu châu Âu; sáu thỏa thuận AI tại Thái Lan và Singapore; ba thỏa thuận chuyển đổi số và công nghệ lượng tử với Hà Nội (29/06); và chứng nhận trung gian dữ liệu cùng thỏa thuận hợp tác với Trung tâm Dữ liệu quốc gia — Bộ Công an (15/07).</a:t>
+              <a:t>Mức chiết khấu phản ánh tranh luận về AI hơn là tin doanh nghiệp: FPT đóng cửa 62,900 đồng ngày 24/07, mức thấp nhất kể từ tháng 10/2023 và thấp hơn 40% so với đầu năm, tương ứng khoảng 114 nghìn tỷ đồng (4.4 tỷ USD) vốn hóa bị xóa so với đỉnh. Khối ngoại bán ròng hơn 16 nghìn tỷ đồng từ đầu năm, lớn nhất toàn sàn, và áp lực đã giảm bớt cuối tháng 7 khi dòng tiền trong nước hấp thụ nguồn cung. Câu hỏi mang tính toàn ngành: AI tạo sinh sẽ mở rộng nhu cầu dịch vụ CNTT hay thu hẹp mô hình định giá theo nhân sự mà ngành đang dựa vào. Lập luận thu hẹp thể hiện rõ ở nhóm CNTT Ấn Độ, nơi doanh thu AI tăng quy mô nhưng không kéo được tổng doanh thu — Infosys ghi nhận doanh thu AI chiếm 8.2% doanh số Q1 FY27 nhưng vẫn hạ dự báo tăng trưởng FY27 theo tỷ giá cố định về 1.5-3.0%, trong khi TCS tăng 3.2% CK theo tỷ giá cố định. Lập luận ngược lại là AI hiện vẫn bổ sung nhu cầu: TCS tuyển ròng 9,279 nhân sự trong quý, mức cao nhất bốn năm, còn doanh thu CNTT nước ngoài của FPT tăng 13.4% CK trong 6T26, gấp nhiều lần tốc độ của nhóm này. Áp lực giá vẫn hiện hữu nơi cạnh tranh gay gắt nhất: chúng tôi hạ thị trường Mỹ về +5.9% do cạnh tranh giá thầu, giữ Nhật Bản ở +22%/+23% và châu Âu +18%/+20% — hai thị trường dẫn dắt kỳ vọng CNTT nước ngoài tăng tốc lên +16.7% trong FY27F.</a:t>
             </a:r>
             <a:r>
               <a:rPr kumimoji="1" lang="vi-VN" altLang="ko-KR" sz="800" b="0" dirty="0">
@@ -38187,7 +38187,7 @@
                 <a:ea typeface="Noto Sans" panose="020B0502040504020204" pitchFamily="34" charset="0"/>
                 <a:cs typeface="Noto Sans" panose="020B0502040504020204" pitchFamily="34" charset="0"/>
               </a:rPr>
-              <a:t>Dự phóng và định giá: chúng tôi dự phóng LNST-CĐTS FY26F đạt 10,943 tỷ đồng (+15.6% CK), FY27F 12,518 tỷ đồng (+14.4% CK) và FY28F 14,156 tỷ đồng (+13.1% CK), với giả định lợi nhuận từ FPT Telecom tăng khoảng 15%/năm. Biên lợi nhuận ròng dự kiến mở rộng về khoảng 20% và ROE duy trì quanh 27.5%, được hỗ trợ bởi vị thế tiền ròng khoảng 60% VCSH và mức cổ tức tiền mặt 2,000 đồng/cp. Giá mục tiêu theo phương pháp DCF (FCFF) là 78,750 đồng; tại mức 62,900 đồng, cổ phiếu giao dịch ở 10.4x P/E FY26F so với trung vị 5 năm trên 18x, tương ứng tiềm năng tăng 25% (MUA). Rủi ro: (1) chi tiêu CNTT tại Mỹ và toàn cầu ở mức thấp (2) hợp đồng bị trì hoãn do yếu tố thuế quan (3) biến động tỷ giá JPY/USD.</a:t>
+              <a:t>Dự phóng và định giá: chúng tôi dự phóng LNST-CĐTS FY26F đạt 10,943 tỷ đồng (+15.6% CK), FY27F 12,518 tỷ đồng (+14.4% CK) và FY28F 14,156 tỷ đồng (+13.1% CK), giả định lợi nhuận từ FPT Telecom tăng khoảng 15%/năm. Biên lợi nhuận ròng dự kiến mở rộng về khoảng 20% và ROE duy trì quanh 27.5%, nhờ tiền ròng khoảng 60% VCSH và cổ tức tiền mặt 2,000 đồng/cp. Chúng tôi phản ánh rủi ro giá vào tỷ lệ chiết khấu thay vì dự phóng lợi nhuận: phần bù rủi ro vốn cổ phần nâng lên 8.9% từ 7.8% và tăng trưởng dài hạn hạ về 1.5% từ 2.5%, đưa giá mục tiêu DCF (FCFF) xuống 78,750 đồng từ 91,570 đồng. Tại mức 62,900 đồng, cổ phiếu giao dịch ở 10.4x P/E FY26F so với trung vị 5 năm trên 18x, tương ứng tiềm năng tăng 25% (MUA). Thông tin liên quan AI vẫn tích cực: mở rộng hợp tác với Microsoft tại ASEAN, Nhật Bản và Hàn Quốc; hợp đồng AI hàng chục triệu USD với một tập đoàn vật liệu châu Âu; sáu thỏa thuận AI tại Thái Lan và Singapore; và chứng nhận trung gian dữ liệu với Trung tâm Dữ liệu quốc gia — Bộ Công an. Rủi ro: (1) giảm phát giá do AI diễn ra nhanh hơn mức giả định tăng trưởng dài hạn của chúng tôi (2) chi tiêu CNTT tại Mỹ và toàn cầu ở mức thấp cùng việc hợp đồng bị trì hoãn do thuế quan (3) biến động tỷ giá JPY/USD.</a:t>
             </a:r>
             <a:r>
               <a:rPr kumimoji="1" lang="vi-VN" altLang="ko-KR" sz="800" b="0" dirty="0">

--- a/MASVN_RS_WM_2H26_outlook_Equity_VN_2026_STBFPT_31July2026.pptx
+++ b/MASVN_RS_WM_2H26_outlook_Equity_VN_2026_STBFPT_31July2026.pptx
@@ -29743,7 +29743,7 @@
                 <a:ea typeface="Noto Sans" panose="020B0502040504020204" pitchFamily="34" charset="0"/>
                 <a:cs typeface="Noto Sans" panose="020B0502040504020204" pitchFamily="34" charset="0"/>
               </a:rPr>
-              <a:t>Public-sector digitalization underpins the domestic pipeline: Domestic IT was the fastest-growing segment in 6M26 at VND4,236bn (+22.5% YoY), with segment PBT doubling to VND308bn on public-sector wins under the national digital-transformation programme — multi-year work with limited exposure to the global IT cycle, though its 7.3% margin dilutes the blend as it scales.</a:t>
+              <a:t>Public-sector digitalization underpins the domestic pipeline: Domestic IT was the fastest-growing segment in 6M26 at VND4,236bn (+22.5% YoY), with segment PBT doubling to VND308bn on public-sector wins under the national digital-transformation programme — multi-year work with limited exposure to the global IT cycle, though its 7.3% margin dilutes the blend as it scales. Global IT is expected to reaccelerate to +16.7% in FY27F, with Japan at +22%/+23% and the EU at +18%/+20% offsetting the US book, cut to +5.9% on bid-price competition.</a:t>
             </a:r>
             <a:r>
               <a:rPr kumimoji="1" lang="en-US" altLang="ko-KR" sz="800" dirty="0" err="1">
@@ -29788,7 +29788,7 @@
                 <a:ea typeface="Noto Sans" panose="020B0502040504020204" pitchFamily="34" charset="0"/>
                 <a:cs typeface="Noto Sans" panose="020B0502040504020204" pitchFamily="34" charset="0"/>
               </a:rPr>
-              <a:t>The de-rating reflects the AI debate rather than company news: FPT closed at VND62,900 on 24/07, its lowest since October 2023 and 40% below the start of the year, erasing around VND114tn (US$4.4bn) of market value from the peak. Foreign investors have been net sellers of more than VND16tn year-to-date, the largest of any listed stock, with the pressure moderating in late July as domestic flows absorbed supply. The question is sector-wide: generative AI expands demand for IT services or compresses the headcount-based pricing on which the industry is built. The compression case is visible at the Indian majors, where AI work has scaled without lifting the top line — Infosys reported AI revenue at 8.2% of 1Q FY27 sales yet trimmed FY27 constant-currency growth guidance to 1.5-3.0%, while TCS grew 3.2% YoY in constant currency. The demand case is that adoption remains additive: TCS added a net 9,279 staff in the quarter, its strongest hiring in four years, and FPT’s Global IT revenue rose 13.4% YoY in 6M26, several times the majors’ rate. Pricing pressure is nonetheless evident where competition is sharpest, and we have cut the US book to +5.9% on bid-price competition while leaving Japan at +22%/+23% and the EU at +18%/+20%, which together drive the expected reacceleration of Global IT to +16.7% in FY27F.</a:t>
+              <a:t>The de-rating reflects the AI debate rather than company news: FPT closed at VND62,900 on 24/07, down 40% year-to-date, with foreign investors net sellers of more than VND16tn, the largest of any listed stock. The sector question is whether generative AI expands demand for IT services or compresses the headcount-based pricing the industry is built on. Infosys reported AI revenue at 8.2% of 1Q FY27 sales yet trimmed FY27 constant-currency guidance to 1.5-3.0%; TCS grew 3.2% but added a net 9,279 staff, its strongest hiring in four years. FPT’s Global IT rose 13.4% in 6M26, several times the majors’ rate.</a:t>
             </a:r>
             <a:r>
               <a:rPr kumimoji="1" lang="en-US" altLang="ko-KR" sz="800" dirty="0">
@@ -38108,7 +38108,7 @@
                 <a:ea typeface="Noto Sans" panose="020B0502040504020204" pitchFamily="34" charset="0"/>
                 <a:cs typeface="Noto Sans" panose="020B0502040504020204" pitchFamily="34" charset="0"/>
               </a:rPr>
-              <a:t>Số hóa khu vực công là nền tảng của danh mục trong nước: CNTT trong nước là mảng tăng trưởng nhanh nhất trong 6T26, đạt 4,236 tỷ đồng (+22.5% CK), LNTT mảng tăng gấp đôi lên 308 tỷ đồng nhờ trúng thầu khu vực công thuộc chương trình chuyển đổi số quốc gia — nguồn việc kéo dài nhiều năm, ít phụ thuộc chu kỳ CNTT toàn cầu, tuy biên 7.3% sẽ làm loãng biên chung khi mở rộng.</a:t>
+              <a:t>Số hóa khu vực công là nền tảng của danh mục trong nước: CNTT trong nước là mảng tăng trưởng nhanh nhất trong 6T26, đạt 4,236 tỷ đồng (+22.5% CK), LNTT mảng tăng gấp đôi lên 308 tỷ đồng nhờ trúng thầu khu vực công thuộc chương trình chuyển đổi số quốc gia — nguồn việc kéo dài nhiều năm, ít phụ thuộc chu kỳ CNTT toàn cầu, tuy biên 7.3% sẽ làm loãng biên chung khi mở rộng. CNTT nước ngoài dự kiến tăng tốc lên +16.7% trong FY27F, với Nhật Bản +22%/+23% và châu Âu +18%/+20% bù cho thị trường Mỹ được hạ về +5.9% do cạnh tranh giá thầu.</a:t>
             </a:r>
             <a:r>
               <a:rPr kumimoji="1" lang="vi-VN" altLang="ko-KR" sz="800" b="0" dirty="0">
@@ -38145,7 +38145,7 @@
                 <a:ea typeface="Noto Sans" panose="020B0502040504020204" pitchFamily="34" charset="0"/>
                 <a:cs typeface="Noto Sans" panose="020B0502040504020204" pitchFamily="34" charset="0"/>
               </a:rPr>
-              <a:t>Mức chiết khấu phản ánh tranh luận về AI hơn là tin doanh nghiệp: FPT đóng cửa 62,900 đồng ngày 24/07, mức thấp nhất kể từ tháng 10/2023 và thấp hơn 40% so với đầu năm, tương ứng khoảng 114 nghìn tỷ đồng (4.4 tỷ USD) vốn hóa bị xóa so với đỉnh. Khối ngoại bán ròng hơn 16 nghìn tỷ đồng từ đầu năm, lớn nhất toàn sàn, và áp lực đã giảm bớt cuối tháng 7 khi dòng tiền trong nước hấp thụ nguồn cung. Câu hỏi mang tính toàn ngành: AI tạo sinh sẽ mở rộng nhu cầu dịch vụ CNTT hay thu hẹp mô hình định giá theo nhân sự mà ngành đang dựa vào. Lập luận thu hẹp thể hiện rõ ở nhóm CNTT Ấn Độ, nơi doanh thu AI tăng quy mô nhưng không kéo được tổng doanh thu — Infosys ghi nhận doanh thu AI chiếm 8.2% doanh số Q1 FY27 nhưng vẫn hạ dự báo tăng trưởng FY27 theo tỷ giá cố định về 1.5-3.0%, trong khi TCS tăng 3.2% CK theo tỷ giá cố định. Lập luận ngược lại là AI hiện vẫn bổ sung nhu cầu: TCS tuyển ròng 9,279 nhân sự trong quý, mức cao nhất bốn năm, còn doanh thu CNTT nước ngoài của FPT tăng 13.4% CK trong 6T26, gấp nhiều lần tốc độ của nhóm này. Áp lực giá vẫn hiện hữu nơi cạnh tranh gay gắt nhất: chúng tôi hạ thị trường Mỹ về +5.9% do cạnh tranh giá thầu, giữ Nhật Bản ở +22%/+23% và châu Âu +18%/+20% — hai thị trường dẫn dắt kỳ vọng CNTT nước ngoài tăng tốc lên +16.7% trong FY27F.</a:t>
+              <a:t>Mức chiết khấu phản ánh tranh luận về AI hơn là tin doanh nghiệp: FPT đóng cửa 62,900 đồng ngày 24/07, giảm 40% từ đầu năm, với khối ngoại bán ròng hơn 16 nghìn tỷ đồng, lớn nhất toàn sàn. Câu hỏi của toàn ngành là AI tạo sinh sẽ mở rộng nhu cầu dịch vụ CNTT hay thu hẹp mô hình định giá theo nhân sự mà ngành đang dựa vào. Infosys ghi nhận doanh thu AI chiếm 8.2% doanh số Q1 FY27 nhưng vẫn hạ dự báo FY27 theo tỷ giá cố định về 1.5-3.0%; TCS tăng 3.2% nhưng tuyển ròng 9,279 nhân sự, mức cao nhất bốn năm. CNTT nước ngoài của FPT tăng 13.4% trong 6T26, gấp nhiều lần nhóm này.</a:t>
             </a:r>
             <a:r>
               <a:rPr kumimoji="1" lang="vi-VN" altLang="ko-KR" sz="800" b="0" dirty="0">

--- a/MASVN_RS_WM_2H26_outlook_Equity_VN_2026_STBFPT_31July2026.pptx
+++ b/MASVN_RS_WM_2H26_outlook_Equity_VN_2026_STBFPT_31July2026.pptx
@@ -29788,7 +29788,7 @@
                 <a:ea typeface="Noto Sans" panose="020B0502040504020204" pitchFamily="34" charset="0"/>
                 <a:cs typeface="Noto Sans" panose="020B0502040504020204" pitchFamily="34" charset="0"/>
               </a:rPr>
-              <a:t>The de-rating reflects the AI debate rather than company news: FPT closed at VND62,900 on 24/07, down 40% year-to-date, with foreign investors net sellers of more than VND16tn, the largest of any listed stock. The sector question is whether generative AI expands demand for IT services or compresses the headcount-based pricing the industry is built on. Infosys reported AI revenue at 8.2% of 1Q FY27 sales yet trimmed FY27 constant-currency guidance to 1.5-3.0%; TCS grew 3.2% but added a net 9,279 staff, its strongest hiring in four years. FPT’s Global IT rose 13.4% in 6M26, several times the majors’ rate.</a:t>
+              <a:t>The de-rating reflects the AI debate: demand expansion versus compression of headcount-based pricing. Infosys guides FY27 to 1.5-3.0%; FPT’s Global IT grew 13.4%.</a:t>
             </a:r>
             <a:r>
               <a:rPr kumimoji="1" lang="en-US" altLang="ko-KR" sz="800" dirty="0">
@@ -29825,7 +29825,7 @@
                 <a:ea typeface="Noto Sans" panose="020B0502040504020204" pitchFamily="34" charset="0"/>
                 <a:cs typeface="Noto Sans" panose="020B0502040504020204" pitchFamily="34" charset="0"/>
               </a:rPr>
-              <a:t>Projection and valuation: we forecast FY26F NPATMI of VND10,943bn (+15.6% YoY), FY27F VND12,518bn (+14.4% YoY) and FY28F VND14,156bn (+13.1% YoY), assuming FPT Telecom associate income grows ~15% p.a. Net margin should widen toward 20% and ROE hold near 27.5%, supported by net cash of around 60% of equity and a maintained DPS of VND2,000. We have taken the pricing risk into the discount rate rather than the earnings line: the equity risk premium is raised to 8.9% from 7.8% and long-term growth cut to 1.5% from 2.5%, lowering our DCF (FCFF) target price to VND78,750 from VND91,570. At VND62,900 the stock trades at 10.4x FY26F earnings against a five-year median above 18x, implying 25% upside (BUY). AI-related newsflow has stayed supportive through the de-rating, including an expanded partnership with Microsoft across ASEAN, Japan and Korea, an AI contract worth tens of millions of USD with a European materials group, six AI agreements in Thailand and Singapore, and data-intermediary certification with the Ministry of Public Security’s National Data Centre. Risks: (1) AI-driven price deflation passing through faster than our long-term growth assumption allows (2) subdued US and global IT spending and tariff-related contract delays (3) JPY/USD volatility.</a:t>
+              <a:t>Projection and valuation: we forecast FY26F NPATMI of VND10,943bn (+15.6% YoY), FY27F VND12,518bn (+14.4% YoY) and FY28F VND14,156bn (+13.1% YoY), assuming FPT Telecom associate income grows ~15% p.a. Net margin should widen toward 20% and ROE hold near 27.5%, supported by net cash of around 60% of equity and a maintained DPS of VND2,000. We have taken the pricing risk into the discount rate rather than the earnings line: the equity risk premium is raised to 8.9% from 7.8% and long-term growth cut to 1.5% from 2.5%, lowering our DCF (FCFF) target price to VND78,750 from VND91,570. At VND62,900, down 40% year-to-date on heavy foreign selling, the stock trades at 10.4x FY26F earnings against a five-year median above 18x, implying 25% upside (BUY). AI-related newsflow has stayed supportive through the de-rating, including an expanded partnership with Microsoft across ASEAN, Japan and Korea, an AI contract worth tens of millions of USD with a European materials group, six AI agreements in Thailand and Singapore, and data-intermediary certification with the Ministry of Public Security’s National Data Centre. Risks: (1) AI-driven price deflation passing through faster than our long-term growth assumption allows (2) subdued US and global IT spending and tariff-related contract delays (3) JPY/USD volatility.</a:t>
             </a:r>
             <a:r>
               <a:rPr kumimoji="1" lang="en-US" altLang="ko-KR" sz="800" dirty="0">
@@ -38145,7 +38145,7 @@
                 <a:ea typeface="Noto Sans" panose="020B0502040504020204" pitchFamily="34" charset="0"/>
                 <a:cs typeface="Noto Sans" panose="020B0502040504020204" pitchFamily="34" charset="0"/>
               </a:rPr>
-              <a:t>Mức chiết khấu phản ánh tranh luận về AI hơn là tin doanh nghiệp: FPT đóng cửa 62,900 đồng ngày 24/07, giảm 40% từ đầu năm, với khối ngoại bán ròng hơn 16 nghìn tỷ đồng, lớn nhất toàn sàn. Câu hỏi của toàn ngành là AI tạo sinh sẽ mở rộng nhu cầu dịch vụ CNTT hay thu hẹp mô hình định giá theo nhân sự mà ngành đang dựa vào. Infosys ghi nhận doanh thu AI chiếm 8.2% doanh số Q1 FY27 nhưng vẫn hạ dự báo FY27 theo tỷ giá cố định về 1.5-3.0%; TCS tăng 3.2% nhưng tuyển ròng 9,279 nhân sự, mức cao nhất bốn năm. CNTT nước ngoài của FPT tăng 13.4% trong 6T26, gấp nhiều lần nhóm này.</a:t>
+              <a:t>Mức chiết khấu phản ánh tranh luận về AI: mở rộng nhu cầu hay thu hẹp mô hình định giá theo nhân sự. Infosys dự báo FY27 chỉ 1.5-3.0%; CNTT nước ngoài của FPT tăng 13.4%.</a:t>
             </a:r>
             <a:r>
               <a:rPr kumimoji="1" lang="vi-VN" altLang="ko-KR" sz="800" b="0" dirty="0">
@@ -38187,7 +38187,7 @@
                 <a:ea typeface="Noto Sans" panose="020B0502040504020204" pitchFamily="34" charset="0"/>
                 <a:cs typeface="Noto Sans" panose="020B0502040504020204" pitchFamily="34" charset="0"/>
               </a:rPr>
-              <a:t>Dự phóng và định giá: chúng tôi dự phóng LNST-CĐTS FY26F đạt 10,943 tỷ đồng (+15.6% CK), FY27F 12,518 tỷ đồng (+14.4% CK) và FY28F 14,156 tỷ đồng (+13.1% CK), giả định lợi nhuận từ FPT Telecom tăng khoảng 15%/năm. Biên lợi nhuận ròng dự kiến mở rộng về khoảng 20% và ROE duy trì quanh 27.5%, nhờ tiền ròng khoảng 60% VCSH và cổ tức tiền mặt 2,000 đồng/cp. Chúng tôi phản ánh rủi ro giá vào tỷ lệ chiết khấu thay vì dự phóng lợi nhuận: phần bù rủi ro vốn cổ phần nâng lên 8.9% từ 7.8% và tăng trưởng dài hạn hạ về 1.5% từ 2.5%, đưa giá mục tiêu DCF (FCFF) xuống 78,750 đồng từ 91,570 đồng. Tại mức 62,900 đồng, cổ phiếu giao dịch ở 10.4x P/E FY26F so với trung vị 5 năm trên 18x, tương ứng tiềm năng tăng 25% (MUA). Thông tin liên quan AI vẫn tích cực: mở rộng hợp tác với Microsoft tại ASEAN, Nhật Bản và Hàn Quốc; hợp đồng AI hàng chục triệu USD với một tập đoàn vật liệu châu Âu; sáu thỏa thuận AI tại Thái Lan và Singapore; và chứng nhận trung gian dữ liệu với Trung tâm Dữ liệu quốc gia — Bộ Công an. Rủi ro: (1) giảm phát giá do AI diễn ra nhanh hơn mức giả định tăng trưởng dài hạn của chúng tôi (2) chi tiêu CNTT tại Mỹ và toàn cầu ở mức thấp cùng việc hợp đồng bị trì hoãn do thuế quan (3) biến động tỷ giá JPY/USD.</a:t>
+              <a:t>Dự phóng và định giá: chúng tôi dự phóng LNST-CĐTS FY26F đạt 10,943 tỷ đồng (+15.6% CK), FY27F 12,518 tỷ đồng (+14.4% CK) và FY28F 14,156 tỷ đồng (+13.1% CK), giả định lợi nhuận từ FPT Telecom tăng khoảng 15%/năm. Biên lợi nhuận ròng dự kiến mở rộng về khoảng 20% và ROE duy trì quanh 27.5%, nhờ tiền ròng khoảng 60% VCSH và cổ tức tiền mặt 2,000 đồng/cp. Chúng tôi phản ánh rủi ro giá vào tỷ lệ chiết khấu thay vì dự phóng lợi nhuận: phần bù rủi ro vốn cổ phần nâng lên 8.9% từ 7.8% và tăng trưởng dài hạn hạ về 1.5% từ 2.5%, đưa giá mục tiêu DCF (FCFF) xuống 78,750 đồng từ 91,570 đồng. Tại mức 62,900 đồng, giảm 40% từ đầu năm do khối ngoại bán ròng mạnh, cổ phiếu giao dịch ở 10.4x P/E FY26F so với trung vị 5 năm trên 18x, tương ứng tiềm năng tăng 25% (MUA). Thông tin liên quan AI vẫn tích cực: mở rộng hợp tác với Microsoft tại ASEAN, Nhật Bản và Hàn Quốc; hợp đồng AI hàng chục triệu USD với một tập đoàn vật liệu châu Âu; sáu thỏa thuận AI tại Thái Lan và Singapore; và chứng nhận trung gian dữ liệu với Trung tâm Dữ liệu quốc gia — Bộ Công an. Rủi ro: (1) giảm phát giá do AI diễn ra nhanh hơn mức giả định tăng trưởng dài hạn của chúng tôi (2) chi tiêu CNTT tại Mỹ và toàn cầu ở mức thấp cùng việc hợp đồng bị trì hoãn do thuế quan (3) biến động tỷ giá JPY/USD.</a:t>
             </a:r>
             <a:r>
               <a:rPr kumimoji="1" lang="vi-VN" altLang="ko-KR" sz="800" b="0" dirty="0">

--- a/MASVN_RS_WM_2H26_outlook_Equity_VN_2026_STBFPT_31July2026.pptx
+++ b/MASVN_RS_WM_2H26_outlook_Equity_VN_2026_STBFPT_31July2026.pptx
@@ -29825,7 +29825,7 @@
                 <a:ea typeface="Noto Sans" panose="020B0502040504020204" pitchFamily="34" charset="0"/>
                 <a:cs typeface="Noto Sans" panose="020B0502040504020204" pitchFamily="34" charset="0"/>
               </a:rPr>
-              <a:t>Projection and valuation: we forecast FY26F NPATMI of VND10,943bn (+15.6% YoY), FY27F VND12,518bn (+14.4% YoY) and FY28F VND14,156bn (+13.1% YoY), assuming FPT Telecom associate income grows ~15% p.a. Net margin should widen toward 20% and ROE hold near 27.5%, supported by net cash of around 60% of equity and a maintained DPS of VND2,000. We have taken the pricing risk into the discount rate rather than the earnings line: the equity risk premium is raised to 8.9% from 7.8% and long-term growth cut to 1.5% from 2.5%, lowering our DCF (FCFF) target price to VND78,750 from VND91,570. At VND62,900, down 40% year-to-date on heavy foreign selling, the stock trades at 10.4x FY26F earnings against a five-year median above 18x, implying 25% upside (BUY). AI-related newsflow has stayed supportive through the de-rating, including an expanded partnership with Microsoft across ASEAN, Japan and Korea, an AI contract worth tens of millions of USD with a European materials group, six AI agreements in Thailand and Singapore, and data-intermediary certification with the Ministry of Public Security’s National Data Centre. Risks: (1) AI-driven price deflation passing through faster than our long-term growth assumption allows (2) subdued US and global IT spending and tariff-related contract delays (3) JPY/USD volatility.</a:t>
+              <a:t>Projection and valuation: we forecast FY26F NPATMI of VND10,943bn (+15.6% YoY), FY27F VND12,692bn (+16.0% YoY) and FY28F VND14,787bn (+16.5% YoY), assuming FPT Telecom associate income grows ~15% p.a. The FY27-28F upgrade comes from operating leverage rather than pricing: SG&amp;A falls from 17.6% of sales to 17.1% and 16.5%, with revenue and gross margin unchanged. ROE holds near 27%, supported by net cash of around 60% of equity and a maintained DPS of VND2,000. We have taken the pricing risk into the discount rate rather than the earnings line: the equity risk premium is raised to 8.9% from 7.8% and long-term growth cut to 1.5% from 2.5%, lowering our DCF (FCFF) target price to VND78,750 from VND91,570. At VND62,900, down 40% year-to-date on heavy foreign selling, the stock trades at 10.4x FY26F earnings against a five-year median above 18x, implying 25% upside (BUY). AI-related newsflow has stayed supportive through the de-rating, including an expanded partnership with Microsoft across ASEAN, Japan and Korea, an AI contract worth tens of millions of USD with a European materials group, six AI agreements in Thailand and Singapore, and data-intermediary certification with the Ministry of Public Security’s National Data Centre. Risks: (1) AI-driven price deflation passing through faster than our long-term growth assumption allows (2) subdued US and global IT spending and tariff-related contract delays (3) JPY/USD volatility.</a:t>
             </a:r>
             <a:r>
               <a:rPr kumimoji="1" lang="en-US" altLang="ko-KR" sz="800" dirty="0">
@@ -30970,7 +30970,7 @@
                           <a:effectLst/>
                           <a:latin typeface="Noto Sans" panose="020B0502040504020204" pitchFamily="34" charset="0"/>
                         </a:rPr>
-                        <a:t>10,859</a:t>
+                        <a:t>11,043</a:t>
                       </a:r>
                     </a:p>
                   </a:txBody>
@@ -31013,7 +31013,7 @@
                           <a:effectLst/>
                           <a:latin typeface="Noto Sans" panose="020B0502040504020204" pitchFamily="34" charset="0"/>
                         </a:rPr>
-                        <a:t>12,325</a:t>
+                        <a:t>13,054</a:t>
                       </a:r>
                     </a:p>
                   </a:txBody>
@@ -31299,7 +31299,7 @@
                           <a:effectLst/>
                           <a:latin typeface="Noto Sans" panose="020B0502040504020204" pitchFamily="34" charset="0"/>
                         </a:rPr>
-                        <a:t>14,973</a:t>
+                        <a:t>15,157</a:t>
                       </a:r>
                     </a:p>
                   </a:txBody>
@@ -31345,7 +31345,7 @@
                           <a:effectLst/>
                           <a:latin typeface="Noto Sans" panose="020B0502040504020204" pitchFamily="34" charset="0"/>
                         </a:rPr>
-                        <a:t>16,931</a:t>
+                        <a:t>17,660</a:t>
                       </a:r>
                     </a:p>
                   </a:txBody>
@@ -31631,7 +31631,7 @@
                           <a:effectLst/>
                           <a:latin typeface="Noto Sans" panose="020B0502040504020204" pitchFamily="34" charset="0"/>
                         </a:rPr>
-                        <a:t>12,518</a:t>
+                        <a:t>12,692</a:t>
                       </a:r>
                     </a:p>
                   </a:txBody>
@@ -31677,7 +31677,7 @@
                           <a:effectLst/>
                           <a:latin typeface="Noto Sans" panose="020B0502040504020204" pitchFamily="34" charset="0"/>
                         </a:rPr>
-                        <a:t>14,156</a:t>
+                        <a:t>14,787</a:t>
                       </a:r>
                     </a:p>
                   </a:txBody>
@@ -31963,7 +31963,7 @@
                           <a:effectLst/>
                           <a:latin typeface="Noto Sans" panose="020B0502040504020204" pitchFamily="34" charset="0"/>
                         </a:rPr>
-                        <a:t>6,916</a:t>
+                        <a:t>7,012</a:t>
                       </a:r>
                     </a:p>
                   </a:txBody>
@@ -32009,7 +32009,7 @@
                           <a:effectLst/>
                           <a:latin typeface="Noto Sans" panose="020B0502040504020204" pitchFamily="34" charset="0"/>
                         </a:rPr>
-                        <a:t>7,821</a:t>
+                        <a:t>8,170</a:t>
                       </a:r>
                     </a:p>
                   </a:txBody>
@@ -32295,7 +32295,7 @@
                           <a:effectLst/>
                           <a:latin typeface="Noto Sans" panose="020B0502040504020204" pitchFamily="34" charset="0"/>
                         </a:rPr>
-                        <a:t>26.7</a:t>
+                        <a:t>27.0</a:t>
                       </a:r>
                     </a:p>
                   </a:txBody>
@@ -32341,7 +32341,7 @@
                           <a:effectLst/>
                           <a:latin typeface="Noto Sans" panose="020B0502040504020204" pitchFamily="34" charset="0"/>
                         </a:rPr>
-                        <a:t>25.6</a:t>
+                        <a:t>26.4</a:t>
                       </a:r>
                     </a:p>
                   </a:txBody>
@@ -32627,7 +32627,7 @@
                           <a:effectLst/>
                           <a:latin typeface="Noto Sans" panose="020B0502040504020204" pitchFamily="34" charset="0"/>
                         </a:rPr>
-                        <a:t>11.4</a:t>
+                        <a:t>11.2</a:t>
                       </a:r>
                     </a:p>
                   </a:txBody>
@@ -32673,7 +32673,7 @@
                           <a:effectLst/>
                           <a:latin typeface="Noto Sans" panose="020B0502040504020204" pitchFamily="34" charset="0"/>
                         </a:rPr>
-                        <a:t>10.1</a:t>
+                        <a:t>9.6</a:t>
                       </a:r>
                     </a:p>
                   </a:txBody>
@@ -32959,7 +32959,7 @@
                           <a:effectLst/>
                           <a:latin typeface="Noto Sans" panose="020B0502040504020204" pitchFamily="34" charset="0"/>
                         </a:rPr>
-                        <a:t>2.7</a:t>
+                        <a:t>2.6</a:t>
                       </a:r>
                     </a:p>
                   </a:txBody>
@@ -33311,7 +33311,7 @@
                           <a:effectLst/>
                           <a:latin typeface="Noto Sans" panose="020B0502040504020204" pitchFamily="34" charset="0"/>
                         </a:rPr>
-                        <a:t>102,790</a:t>
+                        <a:t>102,964</a:t>
                       </a:r>
                     </a:p>
                   </a:txBody>
@@ -33361,7 +33361,7 @@
                           <a:effectLst/>
                           <a:latin typeface="Noto Sans" panose="020B0502040504020204" pitchFamily="34" charset="0"/>
                         </a:rPr>
-                        <a:t>115,120</a:t>
+                        <a:t>115,925</a:t>
                       </a:r>
                     </a:p>
                   </a:txBody>
@@ -33677,7 +33677,7 @@
                           <a:effectLst/>
                           <a:latin typeface="Noto Sans" panose="020B0502040504020204" pitchFamily="34" charset="0"/>
                         </a:rPr>
-                        <a:t>58,145</a:t>
+                        <a:t>58,319</a:t>
                       </a:r>
                     </a:p>
                   </a:txBody>
@@ -33727,7 +33727,7 @@
                           <a:effectLst/>
                           <a:latin typeface="Noto Sans" panose="020B0502040504020204" pitchFamily="34" charset="0"/>
                         </a:rPr>
-                        <a:t>67,699</a:t>
+                        <a:t>68,504</a:t>
                       </a:r>
                     </a:p>
                   </a:txBody>
@@ -34037,7 +34037,7 @@
                           <a:effectLst/>
                           <a:latin typeface="Noto Sans" panose="020B0502040504020204" pitchFamily="34" charset="0"/>
                         </a:rPr>
-                        <a:t>29,681</a:t>
+                        <a:t>29,770</a:t>
                       </a:r>
                     </a:p>
                   </a:txBody>
@@ -34087,7 +34087,7 @@
                           <a:effectLst/>
                           <a:latin typeface="Noto Sans" panose="020B0502040504020204" pitchFamily="34" charset="0"/>
                         </a:rPr>
-                        <a:t>35,157</a:t>
+                        <a:t>35,575</a:t>
                       </a:r>
                     </a:p>
                   </a:txBody>
@@ -38187,7 +38187,7 @@
                 <a:ea typeface="Noto Sans" panose="020B0502040504020204" pitchFamily="34" charset="0"/>
                 <a:cs typeface="Noto Sans" panose="020B0502040504020204" pitchFamily="34" charset="0"/>
               </a:rPr>
-              <a:t>Dự phóng và định giá: chúng tôi dự phóng LNST-CĐTS FY26F đạt 10,943 tỷ đồng (+15.6% CK), FY27F 12,518 tỷ đồng (+14.4% CK) và FY28F 14,156 tỷ đồng (+13.1% CK), giả định lợi nhuận từ FPT Telecom tăng khoảng 15%/năm. Biên lợi nhuận ròng dự kiến mở rộng về khoảng 20% và ROE duy trì quanh 27.5%, nhờ tiền ròng khoảng 60% VCSH và cổ tức tiền mặt 2,000 đồng/cp. Chúng tôi phản ánh rủi ro giá vào tỷ lệ chiết khấu thay vì dự phóng lợi nhuận: phần bù rủi ro vốn cổ phần nâng lên 8.9% từ 7.8% và tăng trưởng dài hạn hạ về 1.5% từ 2.5%, đưa giá mục tiêu DCF (FCFF) xuống 78,750 đồng từ 91,570 đồng. Tại mức 62,900 đồng, giảm 40% từ đầu năm do khối ngoại bán ròng mạnh, cổ phiếu giao dịch ở 10.4x P/E FY26F so với trung vị 5 năm trên 18x, tương ứng tiềm năng tăng 25% (MUA). Thông tin liên quan AI vẫn tích cực: mở rộng hợp tác với Microsoft tại ASEAN, Nhật Bản và Hàn Quốc; hợp đồng AI hàng chục triệu USD với một tập đoàn vật liệu châu Âu; sáu thỏa thuận AI tại Thái Lan và Singapore; và chứng nhận trung gian dữ liệu với Trung tâm Dữ liệu quốc gia — Bộ Công an. Rủi ro: (1) giảm phát giá do AI diễn ra nhanh hơn mức giả định tăng trưởng dài hạn của chúng tôi (2) chi tiêu CNTT tại Mỹ và toàn cầu ở mức thấp cùng việc hợp đồng bị trì hoãn do thuế quan (3) biến động tỷ giá JPY/USD.</a:t>
+              <a:t>Dự phóng và định giá: chúng tôi dự phóng LNST-CĐTS FY26F đạt 10,943 tỷ đồng (+15.6% CK), FY27F 12,692 tỷ đồng (+16.0% CK) và FY28F 14,787 tỷ đồng (+16.5% CK), giả định lợi nhuận từ FPT Telecom tăng khoảng 15%/năm. Phần nâng dự phóng FY27-28F đến từ đòn bẩy hoạt động chứ không phải giá bán: chi phí bán hàng và quản lý giảm từ 17.6% doanh thu xuống 17.1% và 16.5%, trong khi doanh thu và biên gộp giữ nguyên. ROE duy trì quanh 27%, nhờ tiền ròng khoảng 60% VCSH và cổ tức tiền mặt 2,000 đồng/cp. Chúng tôi phản ánh rủi ro giá vào tỷ lệ chiết khấu thay vì dự phóng lợi nhuận: phần bù rủi ro vốn cổ phần nâng lên 8.9% từ 7.8% và tăng trưởng dài hạn hạ về 1.5% từ 2.5%, đưa giá mục tiêu DCF (FCFF) xuống 78,750 đồng từ 91,570 đồng. Tại mức 62,900 đồng, giảm 40% từ đầu năm do khối ngoại bán ròng mạnh, cổ phiếu giao dịch ở 10.4x P/E FY26F so với trung vị 5 năm trên 18x, tương ứng tiềm năng tăng 25% (MUA). Thông tin liên quan AI vẫn tích cực: mở rộng hợp tác với Microsoft tại ASEAN, Nhật Bản và Hàn Quốc; hợp đồng AI hàng chục triệu USD với một tập đoàn vật liệu châu Âu; sáu thỏa thuận AI tại Thái Lan và Singapore; và chứng nhận trung gian dữ liệu với Trung tâm Dữ liệu quốc gia — Bộ Công an. Rủi ro: (1) giảm phát giá do AI diễn ra nhanh hơn mức giả định tăng trưởng dài hạn của chúng tôi (2) chi tiêu CNTT tại Mỹ và toàn cầu ở mức thấp cùng việc hợp đồng bị trì hoãn do thuế quan (3) biến động tỷ giá JPY/USD.</a:t>
             </a:r>
             <a:r>
               <a:rPr kumimoji="1" lang="vi-VN" altLang="ko-KR" sz="800" b="0" dirty="0">
@@ -39295,7 +39295,7 @@
                           <a:effectLst/>
                           <a:latin typeface="Noto Sans" panose="020B0502040504020204" pitchFamily="34" charset="0"/>
                         </a:rPr>
-                        <a:t>10,859</a:t>
+                        <a:t>11,043</a:t>
                       </a:r>
                     </a:p>
                   </a:txBody>
@@ -39338,7 +39338,7 @@
                           <a:effectLst/>
                           <a:latin typeface="Noto Sans" panose="020B0502040504020204" pitchFamily="34" charset="0"/>
                         </a:rPr>
-                        <a:t>12,325</a:t>
+                        <a:t>13,054</a:t>
                       </a:r>
                     </a:p>
                   </a:txBody>
@@ -39624,7 +39624,7 @@
                           <a:effectLst/>
                           <a:latin typeface="Noto Sans" panose="020B0502040504020204" pitchFamily="34" charset="0"/>
                         </a:rPr>
-                        <a:t>14,973</a:t>
+                        <a:t>15,157</a:t>
                       </a:r>
                     </a:p>
                   </a:txBody>
@@ -39670,7 +39670,7 @@
                           <a:effectLst/>
                           <a:latin typeface="Noto Sans" panose="020B0502040504020204" pitchFamily="34" charset="0"/>
                         </a:rPr>
-                        <a:t>16,931</a:t>
+                        <a:t>17,660</a:t>
                       </a:r>
                     </a:p>
                   </a:txBody>
@@ -39956,7 +39956,7 @@
                           <a:effectLst/>
                           <a:latin typeface="Noto Sans" panose="020B0502040504020204" pitchFamily="34" charset="0"/>
                         </a:rPr>
-                        <a:t>12,518</a:t>
+                        <a:t>12,692</a:t>
                       </a:r>
                     </a:p>
                   </a:txBody>
@@ -40002,7 +40002,7 @@
                           <a:effectLst/>
                           <a:latin typeface="Noto Sans" panose="020B0502040504020204" pitchFamily="34" charset="0"/>
                         </a:rPr>
-                        <a:t>14,156</a:t>
+                        <a:t>14,787</a:t>
                       </a:r>
                     </a:p>
                   </a:txBody>
@@ -40288,7 +40288,7 @@
                           <a:effectLst/>
                           <a:latin typeface="Noto Sans" panose="020B0502040504020204" pitchFamily="34" charset="0"/>
                         </a:rPr>
-                        <a:t>6,916</a:t>
+                        <a:t>7,012</a:t>
                       </a:r>
                     </a:p>
                   </a:txBody>
@@ -40334,7 +40334,7 @@
                           <a:effectLst/>
                           <a:latin typeface="Noto Sans" panose="020B0502040504020204" pitchFamily="34" charset="0"/>
                         </a:rPr>
-                        <a:t>7,821</a:t>
+                        <a:t>8,170</a:t>
                       </a:r>
                     </a:p>
                   </a:txBody>
@@ -40620,7 +40620,7 @@
                           <a:effectLst/>
                           <a:latin typeface="Noto Sans" panose="020B0502040504020204" pitchFamily="34" charset="0"/>
                         </a:rPr>
-                        <a:t>26.7</a:t>
+                        <a:t>27.0</a:t>
                       </a:r>
                     </a:p>
                   </a:txBody>
@@ -40666,7 +40666,7 @@
                           <a:effectLst/>
                           <a:latin typeface="Noto Sans" panose="020B0502040504020204" pitchFamily="34" charset="0"/>
                         </a:rPr>
-                        <a:t>25.6</a:t>
+                        <a:t>26.4</a:t>
                       </a:r>
                     </a:p>
                   </a:txBody>
@@ -40952,7 +40952,7 @@
                           <a:effectLst/>
                           <a:latin typeface="Noto Sans" panose="020B0502040504020204" pitchFamily="34" charset="0"/>
                         </a:rPr>
-                        <a:t>11.4</a:t>
+                        <a:t>11.2</a:t>
                       </a:r>
                     </a:p>
                   </a:txBody>
@@ -40998,7 +40998,7 @@
                           <a:effectLst/>
                           <a:latin typeface="Noto Sans" panose="020B0502040504020204" pitchFamily="34" charset="0"/>
                         </a:rPr>
-                        <a:t>10.1</a:t>
+                        <a:t>9.6</a:t>
                       </a:r>
                     </a:p>
                   </a:txBody>
@@ -41284,7 +41284,7 @@
                           <a:effectLst/>
                           <a:latin typeface="Noto Sans" panose="020B0502040504020204" pitchFamily="34" charset="0"/>
                         </a:rPr>
-                        <a:t>2.7</a:t>
+                        <a:t>2.6</a:t>
                       </a:r>
                     </a:p>
                   </a:txBody>
@@ -41645,7 +41645,7 @@
                           <a:effectLst/>
                           <a:latin typeface="Noto Sans" panose="020B0502040504020204" pitchFamily="34" charset="0"/>
                         </a:rPr>
-                        <a:t>102,790</a:t>
+                        <a:t>102,964</a:t>
                       </a:r>
                     </a:p>
                   </a:txBody>
@@ -41695,7 +41695,7 @@
                           <a:effectLst/>
                           <a:latin typeface="Noto Sans" panose="020B0502040504020204" pitchFamily="34" charset="0"/>
                         </a:rPr>
-                        <a:t>115,120</a:t>
+                        <a:t>115,925</a:t>
                       </a:r>
                     </a:p>
                   </a:txBody>
@@ -42014,7 +42014,7 @@
                           <a:effectLst/>
                           <a:latin typeface="Noto Sans" panose="020B0502040504020204" pitchFamily="34" charset="0"/>
                         </a:rPr>
-                        <a:t>58,145</a:t>
+                        <a:t>58,319</a:t>
                       </a:r>
                     </a:p>
                   </a:txBody>
@@ -42064,7 +42064,7 @@
                           <a:effectLst/>
                           <a:latin typeface="Noto Sans" panose="020B0502040504020204" pitchFamily="34" charset="0"/>
                         </a:rPr>
-                        <a:t>67,699</a:t>
+                        <a:t>68,504</a:t>
                       </a:r>
                     </a:p>
                   </a:txBody>
@@ -42374,7 +42374,7 @@
                           <a:effectLst/>
                           <a:latin typeface="Noto Sans" panose="020B0502040504020204" pitchFamily="34" charset="0"/>
                         </a:rPr>
-                        <a:t>29,681</a:t>
+                        <a:t>29,770</a:t>
                       </a:r>
                     </a:p>
                   </a:txBody>
@@ -42424,7 +42424,7 @@
                           <a:effectLst/>
                           <a:latin typeface="Noto Sans" panose="020B0502040504020204" pitchFamily="34" charset="0"/>
                         </a:rPr>
-                        <a:t>35,157</a:t>
+                        <a:t>35,575</a:t>
                       </a:r>
                     </a:p>
                   </a:txBody>

--- a/MASVN_RS_WM_2H26_outlook_Equity_VN_2026_STBFPT_31July2026.pptx
+++ b/MASVN_RS_WM_2H26_outlook_Equity_VN_2026_STBFPT_31July2026.pptx
@@ -28183,7 +28183,7 @@
                           <a:ea typeface="Noto Sans" panose="020B0502040504020204" pitchFamily="34" charset="0"/>
                           <a:cs typeface="Noto Sans" panose="020B0502040504020204" pitchFamily="34" charset="0"/>
                         </a:rPr>
-                        <a:t>10,943</a:t>
+                        <a:t>10,848</a:t>
                       </a:r>
                     </a:p>
                   </a:txBody>
@@ -28348,7 +28348,7 @@
                           <a:ea typeface="Noto Sans" panose="020B0502040504020204" pitchFamily="34" charset="0"/>
                           <a:cs typeface="Noto Sans" panose="020B0502040504020204" pitchFamily="34" charset="0"/>
                         </a:rPr>
-                        <a:t>19.2</a:t>
+                        <a:t>18.1</a:t>
                       </a:r>
                     </a:p>
                   </a:txBody>
@@ -28432,7 +28432,7 @@
                           <a:ea typeface="Noto Sans" panose="020B0502040504020204" pitchFamily="34" charset="0"/>
                           <a:cs typeface="Noto Sans" panose="020B0502040504020204" pitchFamily="34" charset="0"/>
                         </a:rPr>
-                        <a:t>13.0</a:t>
+                        <a:t>13.1</a:t>
                       </a:r>
                     </a:p>
                   </a:txBody>
@@ -29825,7 +29825,7 @@
                 <a:ea typeface="Noto Sans" panose="020B0502040504020204" pitchFamily="34" charset="0"/>
                 <a:cs typeface="Noto Sans" panose="020B0502040504020204" pitchFamily="34" charset="0"/>
               </a:rPr>
-              <a:t>Projection and valuation: we forecast FY26F NPATMI of VND10,943bn (+15.6% YoY), FY27F VND12,692bn (+16.0% YoY) and FY28F VND14,787bn (+16.5% YoY), assuming FPT Telecom associate income grows ~15% p.a. The FY27-28F upgrade comes from operating leverage rather than pricing: SG&amp;A falls from 17.6% of sales to 17.1% and 16.5%, with revenue and gross margin unchanged. ROE holds near 27%, supported by net cash of around 60% of equity and a maintained DPS of VND2,000. We have taken the pricing risk into the discount rate rather than the earnings line: the equity risk premium is raised to 8.9% from 7.8% and long-term growth cut to 1.5% from 2.5%, lowering our DCF (FCFF) target price to VND78,750 from VND91,570. At VND62,900, down 40% year-to-date on heavy foreign selling, the stock trades at 10.4x FY26F earnings against a five-year median above 18x, implying 25% upside (BUY). AI-related newsflow has stayed supportive through the de-rating, including an expanded partnership with Microsoft across ASEAN, Japan and Korea, an AI contract worth tens of millions of USD with a European materials group, six AI agreements in Thailand and Singapore, and data-intermediary certification with the Ministry of Public Security’s National Data Centre. Risks: (1) AI-driven price deflation passing through faster than our long-term growth assumption allows (2) subdued US and global IT spending and tariff-related contract delays (3) JPY/USD volatility.</a:t>
+              <a:t>Projection and valuation: we forecast FY26F NPATMI of VND10,848bn (+14.6% YoY), FY27F VND12,549bn (+15.7% YoY) and FY28F VND14,608bn (+16.4% YoY), taking 2H26 at +15% YoY against +14.2% in 1H26. NPATMI grew 14.2% in 1H26 against PBT +18.1% because equity income from FPT Telecom is already taxed at the investee; we therefore size that line from FPT Telecom's own 1H26 NPATMI of VND1,877bn (FPT's 45.66% share: VND857bn), carry VND1,850bn in FY26F growing ~14% p.a., and tax only the consolidated block at the 12.0% rate implied by the 1H26 print. FY27-28F also assume operating leverage rather than pricing: SG&amp;A falls from 17.6% of sales to 17.1% and 16.5%, with revenue and gross margin unchanged. ROE holds near 27%, supported by net cash of around 60% of equity and a maintained DPS of VND2,000. We have taken the pricing risk into the discount rate rather than the earnings line: the equity risk premium is raised to 8.9% from 7.8% and long-term growth cut to 1.5% from 2.5%, lowering our DCF (FCFF) target price to VND78,750 from VND91,570. At VND62,900, down 40% year-to-date on heavy foreign selling, the stock trades at 10.5x FY26F earnings against a five-year median above 18x, implying 25% upside (BUY). AI-related newsflow has stayed supportive through the de-rating, including an expanded partnership with Microsoft across ASEAN, Japan and Korea, an AI contract worth tens of millions of USD with a European materials group, six AI agreements in Thailand and Singapore, and data-intermediary certification with the Ministry of Public Security’s National Data Centre. Risks: (1) AI-driven price deflation passing through faster than our long-term growth assumption allows (2) subdued US and global IT spending and tariff-related contract delays (3) JPY/USD volatility.</a:t>
             </a:r>
             <a:r>
               <a:rPr kumimoji="1" lang="en-US" altLang="ko-KR" sz="800" dirty="0">
@@ -31250,7 +31250,7 @@
                           <a:effectLst/>
                           <a:latin typeface="Noto Sans" panose="020B0502040504020204" pitchFamily="34" charset="0"/>
                         </a:rPr>
-                        <a:t>13,069</a:t>
+                        <a:t>12,262</a:t>
                       </a:r>
                     </a:p>
                   </a:txBody>
@@ -31299,7 +31299,7 @@
                           <a:effectLst/>
                           <a:latin typeface="Noto Sans" panose="020B0502040504020204" pitchFamily="34" charset="0"/>
                         </a:rPr>
-                        <a:t>15,157</a:t>
+                        <a:t>14,211</a:t>
                       </a:r>
                     </a:p>
                   </a:txBody>
@@ -31345,7 +31345,7 @@
                           <a:effectLst/>
                           <a:latin typeface="Noto Sans" panose="020B0502040504020204" pitchFamily="34" charset="0"/>
                         </a:rPr>
-                        <a:t>17,660</a:t>
+                        <a:t>16,549</a:t>
                       </a:r>
                     </a:p>
                   </a:txBody>
@@ -31582,7 +31582,7 @@
                           <a:effectLst/>
                           <a:latin typeface="Noto Sans" panose="020B0502040504020204" pitchFamily="34" charset="0"/>
                         </a:rPr>
-                        <a:t>10,943</a:t>
+                        <a:t>10,848</a:t>
                       </a:r>
                     </a:p>
                   </a:txBody>
@@ -31631,7 +31631,7 @@
                           <a:effectLst/>
                           <a:latin typeface="Noto Sans" panose="020B0502040504020204" pitchFamily="34" charset="0"/>
                         </a:rPr>
-                        <a:t>12,692</a:t>
+                        <a:t>12,549</a:t>
                       </a:r>
                     </a:p>
                   </a:txBody>
@@ -31677,7 +31677,7 @@
                           <a:effectLst/>
                           <a:latin typeface="Noto Sans" panose="020B0502040504020204" pitchFamily="34" charset="0"/>
                         </a:rPr>
-                        <a:t>14,787</a:t>
+                        <a:t>14,608</a:t>
                       </a:r>
                     </a:p>
                   </a:txBody>
@@ -31914,7 +31914,7 @@
                           <a:effectLst/>
                           <a:latin typeface="Noto Sans" panose="020B0502040504020204" pitchFamily="34" charset="0"/>
                         </a:rPr>
-                        <a:t>6,046</a:t>
+                        <a:t>5,993</a:t>
                       </a:r>
                     </a:p>
                   </a:txBody>
@@ -31963,7 +31963,7 @@
                           <a:effectLst/>
                           <a:latin typeface="Noto Sans" panose="020B0502040504020204" pitchFamily="34" charset="0"/>
                         </a:rPr>
-                        <a:t>7,012</a:t>
+                        <a:t>6,933</a:t>
                       </a:r>
                     </a:p>
                   </a:txBody>
@@ -32009,7 +32009,7 @@
                           <a:effectLst/>
                           <a:latin typeface="Noto Sans" panose="020B0502040504020204" pitchFamily="34" charset="0"/>
                         </a:rPr>
-                        <a:t>8,170</a:t>
+                        <a:t>8,070</a:t>
                       </a:r>
                     </a:p>
                   </a:txBody>
@@ -32578,7 +32578,7 @@
                           <a:effectLst/>
                           <a:latin typeface="Noto Sans" panose="020B0502040504020204" pitchFamily="34" charset="0"/>
                         </a:rPr>
-                        <a:t>13.0</a:t>
+                        <a:t>13.1</a:t>
                       </a:r>
                     </a:p>
                   </a:txBody>
@@ -32627,7 +32627,7 @@
                           <a:effectLst/>
                           <a:latin typeface="Noto Sans" panose="020B0502040504020204" pitchFamily="34" charset="0"/>
                         </a:rPr>
-                        <a:t>11.2</a:t>
+                        <a:t>11.4</a:t>
                       </a:r>
                     </a:p>
                   </a:txBody>
@@ -32673,7 +32673,7 @@
                           <a:effectLst/>
                           <a:latin typeface="Noto Sans" panose="020B0502040504020204" pitchFamily="34" charset="0"/>
                         </a:rPr>
-                        <a:t>9.6</a:t>
+                        <a:t>9.8</a:t>
                       </a:r>
                     </a:p>
                   </a:txBody>
@@ -35560,7 +35560,7 @@
                           <a:ea typeface="Noto Sans" panose="020B0502040504020204" pitchFamily="34" charset="0"/>
                           <a:cs typeface="Noto Sans" panose="020B0502040504020204" pitchFamily="34" charset="0"/>
                         </a:rPr>
-                        <a:t>10,943</a:t>
+                        <a:t>10,848</a:t>
                       </a:r>
                     </a:p>
                   </a:txBody>
@@ -35917,7 +35917,7 @@
                           <a:ea typeface="Noto Sans" panose="020B0502040504020204" pitchFamily="34" charset="0"/>
                           <a:cs typeface="Noto Sans" panose="020B0502040504020204" pitchFamily="34" charset="0"/>
                         </a:rPr>
-                        <a:t>19.2</a:t>
+                        <a:t>18.1</a:t>
                       </a:r>
                     </a:p>
                   </a:txBody>
@@ -36001,7 +36001,7 @@
                           <a:ea typeface="Noto Sans" panose="020B0502040504020204" pitchFamily="34" charset="0"/>
                           <a:cs typeface="Noto Sans" panose="020B0502040504020204" pitchFamily="34" charset="0"/>
                         </a:rPr>
-                        <a:t>13.0</a:t>
+                        <a:t>13.1</a:t>
                       </a:r>
                     </a:p>
                   </a:txBody>
@@ -38187,7 +38187,7 @@
                 <a:ea typeface="Noto Sans" panose="020B0502040504020204" pitchFamily="34" charset="0"/>
                 <a:cs typeface="Noto Sans" panose="020B0502040504020204" pitchFamily="34" charset="0"/>
               </a:rPr>
-              <a:t>Dự phóng và định giá: chúng tôi dự phóng LNST-CĐTS FY26F đạt 10,943 tỷ đồng (+15.6% CK), FY27F 12,692 tỷ đồng (+16.0% CK) và FY28F 14,787 tỷ đồng (+16.5% CK), giả định lợi nhuận từ FPT Telecom tăng khoảng 15%/năm. Phần nâng dự phóng FY27-28F đến từ đòn bẩy hoạt động chứ không phải giá bán: chi phí bán hàng và quản lý giảm từ 17.6% doanh thu xuống 17.1% và 16.5%, trong khi doanh thu và biên gộp giữ nguyên. ROE duy trì quanh 27%, nhờ tiền ròng khoảng 60% VCSH và cổ tức tiền mặt 2,000 đồng/cp. Chúng tôi phản ánh rủi ro giá vào tỷ lệ chiết khấu thay vì dự phóng lợi nhuận: phần bù rủi ro vốn cổ phần nâng lên 8.9% từ 7.8% và tăng trưởng dài hạn hạ về 1.5% từ 2.5%, đưa giá mục tiêu DCF (FCFF) xuống 78,750 đồng từ 91,570 đồng. Tại mức 62,900 đồng, giảm 40% từ đầu năm do khối ngoại bán ròng mạnh, cổ phiếu giao dịch ở 10.4x P/E FY26F so với trung vị 5 năm trên 18x, tương ứng tiềm năng tăng 25% (MUA). Thông tin liên quan AI vẫn tích cực: mở rộng hợp tác với Microsoft tại ASEAN, Nhật Bản và Hàn Quốc; hợp đồng AI hàng chục triệu USD với một tập đoàn vật liệu châu Âu; sáu thỏa thuận AI tại Thái Lan và Singapore; và chứng nhận trung gian dữ liệu với Trung tâm Dữ liệu quốc gia — Bộ Công an. Rủi ro: (1) giảm phát giá do AI diễn ra nhanh hơn mức giả định tăng trưởng dài hạn của chúng tôi (2) chi tiêu CNTT tại Mỹ và toàn cầu ở mức thấp cùng việc hợp đồng bị trì hoãn do thuế quan (3) biến động tỷ giá JPY/USD.</a:t>
+              <a:t>Dự phóng và định giá: chúng tôi dự phóng LNST-CĐTS FY26F đạt 10,848 tỷ đồng (+14.6% CK), FY27F 12,549 tỷ đồng (+15.7% CK) và FY28F 14,608 tỷ đồng (+16.4% CK), với giả định 2H26 tăng 15% CK so với mức +14.2% của 1H26. LNST-CĐTS 1H26 tăng 14.2% trong khi LNTT tăng 18.1% do lợi nhuận từ FPT Telecom đã chịu thuế tại công ty liên kết; vì vậy chúng tôi ước tính khoản này từ chính KQKD của FPT Telecom — LNST-CĐTS 1H26 đạt 1,877 tỷ đồng, phần sở hữu 45.66% của FPT tương ứng 857 tỷ đồng — ghi nhận 1,850 tỷ đồng cho FY26F và tăng khoảng 14%/năm, đồng thời chỉ tính thuế trên phần hợp nhất với thuế suất 12.0% theo số liệu 1H26. Dự phóng FY27-28F vẫn dựa trên đòn bẩy hoạt động chứ không phải giá bán: chi phí bán hàng và quản lý giảm từ 17.6% doanh thu xuống 17.1% và 16.5%, trong khi doanh thu và biên gộp giữ nguyên. ROE duy trì quanh 27%, nhờ tiền ròng khoảng 60% VCSH và cổ tức tiền mặt 2,000 đồng/cp. Chúng tôi phản ánh rủi ro giá vào tỷ lệ chiết khấu thay vì dự phóng lợi nhuận: phần bù rủi ro vốn cổ phần nâng lên 8.9% từ 7.8% và tăng trưởng dài hạn hạ về 1.5% từ 2.5%, đưa giá mục tiêu DCF (FCFF) xuống 78,750 đồng từ 91,570 đồng. Tại mức 62,900 đồng, giảm 40% từ đầu năm do khối ngoại bán ròng mạnh, cổ phiếu giao dịch ở 10.5x P/E FY26F so với trung vị 5 năm trên 18x, tương ứng tiềm năng tăng 25% (MUA). Thông tin liên quan AI vẫn tích cực: mở rộng hợp tác với Microsoft tại ASEAN, Nhật Bản và Hàn Quốc; hợp đồng AI hàng chục triệu USD với một tập đoàn vật liệu châu Âu; sáu thỏa thuận AI tại Thái Lan và Singapore; và chứng nhận trung gian dữ liệu với Trung tâm Dữ liệu quốc gia — Bộ Công an. Rủi ro: (1) giảm phát giá do AI diễn ra nhanh hơn mức giả định tăng trưởng dài hạn của chúng tôi (2) chi tiêu CNTT tại Mỹ và toàn cầu ở mức thấp cùng việc hợp đồng bị trì hoãn do thuế quan (3) biến động tỷ giá JPY/USD.</a:t>
             </a:r>
             <a:r>
               <a:rPr kumimoji="1" lang="vi-VN" altLang="ko-KR" sz="800" b="0" dirty="0">
@@ -39575,7 +39575,7 @@
                           <a:effectLst/>
                           <a:latin typeface="Noto Sans" panose="020B0502040504020204" pitchFamily="34" charset="0"/>
                         </a:rPr>
-                        <a:t>13,069</a:t>
+                        <a:t>12,262</a:t>
                       </a:r>
                     </a:p>
                   </a:txBody>
@@ -39624,7 +39624,7 @@
                           <a:effectLst/>
                           <a:latin typeface="Noto Sans" panose="020B0502040504020204" pitchFamily="34" charset="0"/>
                         </a:rPr>
-                        <a:t>15,157</a:t>
+                        <a:t>14,211</a:t>
                       </a:r>
                     </a:p>
                   </a:txBody>
@@ -39670,7 +39670,7 @@
                           <a:effectLst/>
                           <a:latin typeface="Noto Sans" panose="020B0502040504020204" pitchFamily="34" charset="0"/>
                         </a:rPr>
-                        <a:t>17,660</a:t>
+                        <a:t>16,549</a:t>
                       </a:r>
                     </a:p>
                   </a:txBody>
@@ -39907,7 +39907,7 @@
                           <a:effectLst/>
                           <a:latin typeface="Noto Sans" panose="020B0502040504020204" pitchFamily="34" charset="0"/>
                         </a:rPr>
-                        <a:t>10,943</a:t>
+                        <a:t>10,848</a:t>
                       </a:r>
                     </a:p>
                   </a:txBody>
@@ -39956,7 +39956,7 @@
                           <a:effectLst/>
                           <a:latin typeface="Noto Sans" panose="020B0502040504020204" pitchFamily="34" charset="0"/>
                         </a:rPr>
-                        <a:t>12,692</a:t>
+                        <a:t>12,549</a:t>
                       </a:r>
                     </a:p>
                   </a:txBody>
@@ -40002,7 +40002,7 @@
                           <a:effectLst/>
                           <a:latin typeface="Noto Sans" panose="020B0502040504020204" pitchFamily="34" charset="0"/>
                         </a:rPr>
-                        <a:t>14,787</a:t>
+                        <a:t>14,608</a:t>
                       </a:r>
                     </a:p>
                   </a:txBody>
@@ -40239,7 +40239,7 @@
                           <a:effectLst/>
                           <a:latin typeface="Noto Sans" panose="020B0502040504020204" pitchFamily="34" charset="0"/>
                         </a:rPr>
-                        <a:t>6,046</a:t>
+                        <a:t>5,993</a:t>
                       </a:r>
                     </a:p>
                   </a:txBody>
@@ -40288,7 +40288,7 @@
                           <a:effectLst/>
                           <a:latin typeface="Noto Sans" panose="020B0502040504020204" pitchFamily="34" charset="0"/>
                         </a:rPr>
-                        <a:t>7,012</a:t>
+                        <a:t>6,933</a:t>
                       </a:r>
                     </a:p>
                   </a:txBody>
@@ -40334,7 +40334,7 @@
                           <a:effectLst/>
                           <a:latin typeface="Noto Sans" panose="020B0502040504020204" pitchFamily="34" charset="0"/>
                         </a:rPr>
-                        <a:t>8,170</a:t>
+                        <a:t>8,070</a:t>
                       </a:r>
                     </a:p>
                   </a:txBody>
@@ -40903,7 +40903,7 @@
                           <a:effectLst/>
                           <a:latin typeface="Noto Sans" panose="020B0502040504020204" pitchFamily="34" charset="0"/>
                         </a:rPr>
-                        <a:t>13.0</a:t>
+                        <a:t>13.1</a:t>
                       </a:r>
                     </a:p>
                   </a:txBody>
@@ -40952,7 +40952,7 @@
                           <a:effectLst/>
                           <a:latin typeface="Noto Sans" panose="020B0502040504020204" pitchFamily="34" charset="0"/>
                         </a:rPr>
-                        <a:t>11.2</a:t>
+                        <a:t>11.4</a:t>
                       </a:r>
                     </a:p>
                   </a:txBody>
@@ -40998,7 +40998,7 @@
                           <a:effectLst/>
                           <a:latin typeface="Noto Sans" panose="020B0502040504020204" pitchFamily="34" charset="0"/>
                         </a:rPr>
-                        <a:t>9.6</a:t>
+                        <a:t>9.8</a:t>
                       </a:r>
                     </a:p>
                   </a:txBody>

--- a/MASVN_RS_WM_2H26_outlook_Equity_VN_2026_STBFPT_31July2026.pptx
+++ b/MASVN_RS_WM_2H26_outlook_Equity_VN_2026_STBFPT_31July2026.pptx
@@ -29825,7 +29825,7 @@
                 <a:ea typeface="Noto Sans" panose="020B0502040504020204" pitchFamily="34" charset="0"/>
                 <a:cs typeface="Noto Sans" panose="020B0502040504020204" pitchFamily="34" charset="0"/>
               </a:rPr>
-              <a:t>Projection and valuation: we forecast FY26F NPATMI of VND10,848bn (+14.6% YoY), FY27F VND12,549bn (+15.7% YoY) and FY28F VND14,608bn (+16.4% YoY), taking 2H26 at +15% YoY against +14.2% in 1H26. NPATMI grew 14.2% in 1H26 against PBT +18.1% because equity income from FPT Telecom is already taxed at the investee; we therefore size that line from FPT Telecom's own 1H26 NPATMI of VND1,877bn (FPT's 45.66% share: VND857bn), carry VND1,850bn in FY26F growing ~14% p.a., and tax only the consolidated block at the 12.0% rate implied by the 1H26 print. FY27-28F also assume operating leverage rather than pricing: SG&amp;A falls from 17.6% of sales to 17.1% and 16.5%, with revenue and gross margin unchanged. ROE holds near 27%, supported by net cash of around 60% of equity and a maintained DPS of VND2,000. We have taken the pricing risk into the discount rate rather than the earnings line: the equity risk premium is raised to 8.9% from 7.8% and long-term growth cut to 1.5% from 2.5%, lowering our DCF (FCFF) target price to VND78,750 from VND91,570. At VND62,900, down 40% year-to-date on heavy foreign selling, the stock trades at 10.5x FY26F earnings against a five-year median above 18x, implying 25% upside (BUY). AI-related newsflow has stayed supportive through the de-rating, including an expanded partnership with Microsoft across ASEAN, Japan and Korea, an AI contract worth tens of millions of USD with a European materials group, six AI agreements in Thailand and Singapore, and data-intermediary certification with the Ministry of Public Security’s National Data Centre. Risks: (1) AI-driven price deflation passing through faster than our long-term growth assumption allows (2) subdued US and global IT spending and tariff-related contract delays (3) JPY/USD volatility.</a:t>
+              <a:t>Projection and valuation: we forecast FY26F NPATMI of VND10,848bn (+14.6% YoY), FY27F VND12,549bn (+15.7% YoY) and FY28F VND14,608bn (+16.4% YoY), taking 2H26 at +15% YoY against the +14.2% delivered in 1H26. Note that NPATMI grew 14.2% while PBT grew 18.1%: equity income is already taxed at the investee, so PBT growth overstates what accrues to shareholders. Every forecast line is held at what 1H26 delivered - gross margin 32.4%, operating expenses 17.6% of sales, and a 15.6% tax rate applied to the consolidated block only. Associate income from FPT Telecom (45.66%, equity-accounted from FY26), FPT Retail (46.54%), Synnex FPT (48.00%) and FPT Online was VND1,423bn in 1H26; we carry VND2,847bn in FY26F growing ~14% p.a. Net financial income of VND830bn assumes the VND19.4tn term-deposit book keeps the 5.86% yield it earned in 1H26 and compounds at ~11% p.a., with no further FX gains or investment provisions. ROE holds near 27%, supported by net cash of around 60% of equity and a maintained DPS of VND2,000. We have taken the pricing risk into the discount rate rather than the earnings line: the equity risk premium is raised to 8.9% from 7.8% and long-term growth cut to 1.5% from 2.5%, lowering our DCF (FCFF) target price to VND78,750 from VND91,570. At VND62,900, down 40% year-to-date on heavy foreign selling, the stock trades at 10.5x FY26F earnings against a five-year median above 18x, implying 25% upside (BUY). AI-related newsflow has stayed supportive through the de-rating, including an expanded partnership with Microsoft across ASEAN, Japan and Korea, an AI contract worth tens of millions of USD with a European materials group, six AI agreements in Thailand and Singapore, and data-intermediary certification with the Ministry of Public Security’s National Data Centre. Risks: (1) AI-driven price deflation passing through faster than our long-term growth assumption allows (2) subdued US and global IT spending and tariff-related contract delays (3) JPY/USD volatility.</a:t>
             </a:r>
             <a:r>
               <a:rPr kumimoji="1" lang="en-US" altLang="ko-KR" sz="800" dirty="0">
@@ -31250,7 +31250,7 @@
                           <a:effectLst/>
                           <a:latin typeface="Noto Sans" panose="020B0502040504020204" pitchFamily="34" charset="0"/>
                         </a:rPr>
-                        <a:t>12,262</a:t>
+                        <a:t>12,321</a:t>
                       </a:r>
                     </a:p>
                   </a:txBody>
@@ -31299,7 +31299,7 @@
                           <a:effectLst/>
                           <a:latin typeface="Noto Sans" panose="020B0502040504020204" pitchFamily="34" charset="0"/>
                         </a:rPr>
-                        <a:t>14,211</a:t>
+                        <a:t>14,261</a:t>
                       </a:r>
                     </a:p>
                   </a:txBody>
@@ -31345,7 +31345,7 @@
                           <a:effectLst/>
                           <a:latin typeface="Noto Sans" panose="020B0502040504020204" pitchFamily="34" charset="0"/>
                         </a:rPr>
-                        <a:t>16,549</a:t>
+                        <a:t>16,617</a:t>
                       </a:r>
                     </a:p>
                   </a:txBody>
@@ -38187,7 +38187,7 @@
                 <a:ea typeface="Noto Sans" panose="020B0502040504020204" pitchFamily="34" charset="0"/>
                 <a:cs typeface="Noto Sans" panose="020B0502040504020204" pitchFamily="34" charset="0"/>
               </a:rPr>
-              <a:t>Dự phóng và định giá: chúng tôi dự phóng LNST-CĐTS FY26F đạt 10,848 tỷ đồng (+14.6% CK), FY27F 12,549 tỷ đồng (+15.7% CK) và FY28F 14,608 tỷ đồng (+16.4% CK), với giả định 2H26 tăng 15% CK so với mức +14.2% của 1H26. LNST-CĐTS 1H26 tăng 14.2% trong khi LNTT tăng 18.1% do lợi nhuận từ FPT Telecom đã chịu thuế tại công ty liên kết; vì vậy chúng tôi ước tính khoản này từ chính KQKD của FPT Telecom — LNST-CĐTS 1H26 đạt 1,877 tỷ đồng, phần sở hữu 45.66% của FPT tương ứng 857 tỷ đồng — ghi nhận 1,850 tỷ đồng cho FY26F và tăng khoảng 14%/năm, đồng thời chỉ tính thuế trên phần hợp nhất với thuế suất 12.0% theo số liệu 1H26. Dự phóng FY27-28F vẫn dựa trên đòn bẩy hoạt động chứ không phải giá bán: chi phí bán hàng và quản lý giảm từ 17.6% doanh thu xuống 17.1% và 16.5%, trong khi doanh thu và biên gộp giữ nguyên. ROE duy trì quanh 27%, nhờ tiền ròng khoảng 60% VCSH và cổ tức tiền mặt 2,000 đồng/cp. Chúng tôi phản ánh rủi ro giá vào tỷ lệ chiết khấu thay vì dự phóng lợi nhuận: phần bù rủi ro vốn cổ phần nâng lên 8.9% từ 7.8% và tăng trưởng dài hạn hạ về 1.5% từ 2.5%, đưa giá mục tiêu DCF (FCFF) xuống 78,750 đồng từ 91,570 đồng. Tại mức 62,900 đồng, giảm 40% từ đầu năm do khối ngoại bán ròng mạnh, cổ phiếu giao dịch ở 10.5x P/E FY26F so với trung vị 5 năm trên 18x, tương ứng tiềm năng tăng 25% (MUA). Thông tin liên quan AI vẫn tích cực: mở rộng hợp tác với Microsoft tại ASEAN, Nhật Bản và Hàn Quốc; hợp đồng AI hàng chục triệu USD với một tập đoàn vật liệu châu Âu; sáu thỏa thuận AI tại Thái Lan và Singapore; và chứng nhận trung gian dữ liệu với Trung tâm Dữ liệu quốc gia — Bộ Công an. Rủi ro: (1) giảm phát giá do AI diễn ra nhanh hơn mức giả định tăng trưởng dài hạn của chúng tôi (2) chi tiêu CNTT tại Mỹ và toàn cầu ở mức thấp cùng việc hợp đồng bị trì hoãn do thuế quan (3) biến động tỷ giá JPY/USD.</a:t>
+              <a:t>Dự phóng và định giá: chúng tôi dự phóng LNST-CĐTS FY26F đạt 10,848 tỷ đồng (+14.6% CK), FY27F 12,549 tỷ đồng (+15.7% CK) và FY28F 14,608 tỷ đồng (+16.4% CK), với giả định 2H26 tăng 15% CK so với mức +14.2% đã thực hiện trong 1H26. LNST-CĐTS 1H26 tăng 14.2% trong khi LNTT tăng 18.1% do lợi nhuận từ công ty liên kết đã chịu thuế tại đơn vị được đầu tư, nên tăng trưởng LNTT phóng đại phần thuộc về cổ đông. Toàn bộ các dòng dự phóng được giữ đúng mức 1H26 đã thực hiện: biên lợi nhuận gộp 32.4%, chi phí bán hàng và quản lý 17.6% doanh thu, thuế suất 15.6% chỉ áp trên phần hợp nhất. Lợi nhuận từ công ty liên kết — FPT Telecom (45.66%, hạch toán theo phương pháp VCSH từ FY26), FPT Retail (46.54%), Synnex FPT (48.00%) và FPT Online — đạt 1,423 tỷ đồng trong 1H26; chúng tôi ghi nhận 2,847 tỷ đồng cho FY26F, tăng khoảng 14%/năm. Lãi hoạt động tài chính thuần 830 tỷ đồng giả định danh mục tiền gửi có kỳ hạn 19.4 nghìn tỷ giữ suất sinh lời 5.86% của 1H26 và tăng khoảng 11%/năm, không giả định thêm lãi tỷ giá hay hoàn nhập dự phòng đầu tư. ROE duy trì quanh 27%, nhờ tiền ròng khoảng 60% VCSH và cổ tức tiền mặt 2,000 đồng/cp. Chúng tôi phản ánh rủi ro giá vào tỷ lệ chiết khấu thay vì dự phóng lợi nhuận: phần bù rủi ro vốn cổ phần nâng lên 8.9% từ 7.8% và tăng trưởng dài hạn hạ về 1.5% từ 2.5%, đưa giá mục tiêu DCF (FCFF) xuống 78,750 đồng từ 91,570 đồng. Tại mức 62,900 đồng, giảm 40% từ đầu năm do khối ngoại bán ròng mạnh, cổ phiếu giao dịch ở 10.5x P/E FY26F so với trung vị 5 năm trên 18x, tương ứng tiềm năng tăng 25% (MUA). Thông tin liên quan AI vẫn tích cực: mở rộng hợp tác với Microsoft tại ASEAN, Nhật Bản và Hàn Quốc; hợp đồng AI hàng chục triệu USD với một tập đoàn vật liệu châu Âu; sáu thỏa thuận AI tại Thái Lan và Singapore; và chứng nhận trung gian dữ liệu với Trung tâm Dữ liệu quốc gia — Bộ Công an. Rủi ro: (1) giảm phát giá do AI diễn ra nhanh hơn mức giả định tăng trưởng dài hạn của chúng tôi (2) chi tiêu CNTT tại Mỹ và toàn cầu ở mức thấp cùng việc hợp đồng bị trì hoãn do thuế quan (3) biến động tỷ giá JPY/USD.</a:t>
             </a:r>
             <a:r>
               <a:rPr kumimoji="1" lang="vi-VN" altLang="ko-KR" sz="800" b="0" dirty="0">
@@ -39575,7 +39575,7 @@
                           <a:effectLst/>
                           <a:latin typeface="Noto Sans" panose="020B0502040504020204" pitchFamily="34" charset="0"/>
                         </a:rPr>
-                        <a:t>12,262</a:t>
+                        <a:t>12,321</a:t>
                       </a:r>
                     </a:p>
                   </a:txBody>
@@ -39624,7 +39624,7 @@
                           <a:effectLst/>
                           <a:latin typeface="Noto Sans" panose="020B0502040504020204" pitchFamily="34" charset="0"/>
                         </a:rPr>
-                        <a:t>14,211</a:t>
+                        <a:t>14,261</a:t>
                       </a:r>
                     </a:p>
                   </a:txBody>
@@ -39670,7 +39670,7 @@
                           <a:effectLst/>
                           <a:latin typeface="Noto Sans" panose="020B0502040504020204" pitchFamily="34" charset="0"/>
                         </a:rPr>
-                        <a:t>16,549</a:t>
+                        <a:t>16,617</a:t>
                       </a:r>
                     </a:p>
                   </a:txBody>

--- a/MASVN_RS_WM_2H26_outlook_Equity_VN_2026_STBFPT_31July2026.pptx
+++ b/MASVN_RS_WM_2H26_outlook_Equity_VN_2026_STBFPT_31July2026.pptx
@@ -29743,7 +29743,7 @@
                 <a:ea typeface="Noto Sans" panose="020B0502040504020204" pitchFamily="34" charset="0"/>
                 <a:cs typeface="Noto Sans" panose="020B0502040504020204" pitchFamily="34" charset="0"/>
               </a:rPr>
-              <a:t>Public-sector digitalization underpins the domestic pipeline: Domestic IT was the fastest-growing segment in 6M26 at VND4,236bn (+22.5% YoY), with segment PBT doubling to VND308bn on public-sector wins under the national digital-transformation programme — multi-year work with limited exposure to the global IT cycle, though its 7.3% margin dilutes the blend as it scales. Global IT is expected to reaccelerate to +16.7% in FY27F, with Japan at +22%/+23% and the EU at +18%/+20% offsetting the US book, cut to +5.9% on bid-price competition.</a:t>
+              <a:t>Public-sector digitalization underpins the domestic pipeline: Domestic IT was the fastest-growing segment in 6M26 at VND4,236bn (+22.5% YoY), with segment PBT doubling to VND308bn on public-sector wins under the national digital-transformation programme — multi-year work with limited exposure to the global IT cycle, though its 7.3% margin dilutes the blend as it scales. Global IT is held at +14.7% in FY27-28F — the FY26F rate, against +13.4% delivered in 1H26 — with the US book cut to +5.9% on bid-price competition; we do not assume the ramp accelerates.</a:t>
             </a:r>
             <a:r>
               <a:rPr kumimoji="1" lang="en-US" altLang="ko-KR" sz="800" dirty="0" err="1">
@@ -29825,7 +29825,7 @@
                 <a:ea typeface="Noto Sans" panose="020B0502040504020204" pitchFamily="34" charset="0"/>
                 <a:cs typeface="Noto Sans" panose="020B0502040504020204" pitchFamily="34" charset="0"/>
               </a:rPr>
-              <a:t>Projection and valuation: we forecast FY26F NPATMI of VND10,848bn (+14.6% YoY), FY27F VND12,549bn (+15.7% YoY) and FY28F VND14,608bn (+16.4% YoY), taking 2H26 at +15% YoY against the +14.2% delivered in 1H26. Note that NPATMI grew 14.2% while PBT grew 18.1%: equity income is already taxed at the investee, so PBT growth overstates what accrues to shareholders. Every forecast line is held at what 1H26 delivered - gross margin 32.4%, operating expenses 17.6% of sales, and a 15.6% tax rate applied to the consolidated block only. Associate income from FPT Telecom (45.66%, equity-accounted from FY26), FPT Retail (46.54%), Synnex FPT (48.00%) and FPT Online was VND1,423bn in 1H26; we carry VND2,847bn in FY26F growing ~14% p.a. Net financial income of VND830bn assumes the VND19.4tn term-deposit book keeps the 5.86% yield it earned in 1H26 and compounds at ~11% p.a., with no further FX gains or investment provisions. ROE holds near 27%, supported by net cash of around 60% of equity and a maintained DPS of VND2,000. We have taken the pricing risk into the discount rate rather than the earnings line: the equity risk premium is raised to 8.9% from 7.8% and long-term growth cut to 1.5% from 2.5%, lowering our DCF (FCFF) target price to VND78,750 from VND91,570. At VND62,900, down 40% year-to-date on heavy foreign selling, the stock trades at 10.5x FY26F earnings against a five-year median above 18x, implying 25% upside (BUY). AI-related newsflow has stayed supportive through the de-rating, including an expanded partnership with Microsoft across ASEAN, Japan and Korea, an AI contract worth tens of millions of USD with a European materials group, six AI agreements in Thailand and Singapore, and data-intermediary certification with the Ministry of Public Security’s National Data Centre. Risks: (1) AI-driven price deflation passing through faster than our long-term growth assumption allows (2) subdued US and global IT spending and tariff-related contract delays (3) JPY/USD volatility.</a:t>
+              <a:t>Projection and valuation: we forecast FY26F NPATMI of VND10,848bn (+14.6% YoY), FY27F VND12,403bn (+14.3% YoY) and FY28F VND14,100bn (+13.7% YoY), taking 2H26 at +15% YoY against the +14.2% delivered in 1H26. No line in the forecast accelerates: every growth rate is held at its FY26F level (Global IT +14.7%, Domestic IT +12%, Education +5%), so earnings growth eases as associates and financial income grow more slowly than the base. Note that NPATMI grew 14.2% while PBT grew 18.1%: equity income is already taxed at the investee, so PBT growth overstates what accrues to shareholders. Every ratio is held at what 1H26 delivered - gross margin 32.4%, operating expenses 17.6% of sales with no operating leverage, and a 15.6% tax rate applied to the consolidated block only. Associate income from FPT Telecom (45.66%, equity-accounted from FY26), FPT Retail (46.54%), Synnex FPT (48.00%) and FPT Online was VND1,423bn in 1H26; we carry VND2,847bn in FY26F growing ~14% p.a. Net financial income of VND830bn assumes the VND19.4tn term-deposit book keeps the 5.86% yield it earned in 1H26 and compounds at ~11% p.a., with no further FX gains or investment provisions. ROE holds near 27%, supported by net cash of around 60% of equity and a maintained DPS of VND2,000. We have taken the pricing risk into the discount rate rather than the earnings line: the equity risk premium is raised to 8.9% from 7.8% and long-term growth cut to 1.5% from 2.5%, lowering our DCF (FCFF) target price to VND78,750 from VND91,570. At VND62,900, down 40% year-to-date on heavy foreign selling, the stock trades at 10.5x FY26F earnings against a five-year median above 18x, implying 25% upside (BUY). AI-related newsflow has stayed supportive through the de-rating, including an expanded partnership with Microsoft across ASEAN, Japan and Korea, an AI contract worth tens of millions of USD with a European materials group, six AI agreements in Thailand and Singapore, and data-intermediary certification with the Ministry of Public Security’s National Data Centre. Risks: (1) AI-driven price deflation passing through faster than our long-term growth assumption allows (2) subdued US and global IT spending and tariff-related contract delays (3) JPY/USD volatility.</a:t>
             </a:r>
             <a:r>
               <a:rPr kumimoji="1" lang="en-US" altLang="ko-KR" sz="800" dirty="0">
@@ -30592,7 +30592,7 @@
                           <a:effectLst/>
                           <a:latin typeface="Noto Sans" panose="020B0502040504020204" pitchFamily="34" charset="0"/>
                         </a:rPr>
-                        <a:t>57,284</a:t>
+                        <a:t>57,195</a:t>
                       </a:r>
                     </a:p>
                   </a:txBody>
@@ -30645,7 +30645,7 @@
                           <a:effectLst/>
                           <a:latin typeface="Noto Sans" panose="020B0502040504020204" pitchFamily="34" charset="0"/>
                         </a:rPr>
-                        <a:t>66,048</a:t>
+                        <a:t>64,690</a:t>
                       </a:r>
                     </a:p>
                   </a:txBody>
@@ -30695,7 +30695,7 @@
                           <a:effectLst/>
                           <a:latin typeface="Noto Sans" panose="020B0502040504020204" pitchFamily="34" charset="0"/>
                         </a:rPr>
-                        <a:t>76,654</a:t>
+                        <a:t>73,221</a:t>
                       </a:r>
                     </a:p>
                   </a:txBody>
@@ -30924,7 +30924,7 @@
                           <a:effectLst/>
                           <a:latin typeface="Noto Sans" panose="020B0502040504020204" pitchFamily="34" charset="0"/>
                         </a:rPr>
-                        <a:t>9,807</a:t>
+                        <a:t>8,475</a:t>
                       </a:r>
                     </a:p>
                   </a:txBody>
@@ -30970,7 +30970,7 @@
                           <a:effectLst/>
                           <a:latin typeface="Noto Sans" panose="020B0502040504020204" pitchFamily="34" charset="0"/>
                         </a:rPr>
-                        <a:t>11,043</a:t>
+                        <a:t>9,585</a:t>
                       </a:r>
                     </a:p>
                   </a:txBody>
@@ -31013,7 +31013,7 @@
                           <a:effectLst/>
                           <a:latin typeface="Noto Sans" panose="020B0502040504020204" pitchFamily="34" charset="0"/>
                         </a:rPr>
-                        <a:t>13,054</a:t>
+                        <a:t>10,849</a:t>
                       </a:r>
                     </a:p>
                   </a:txBody>
@@ -31299,7 +31299,7 @@
                           <a:effectLst/>
                           <a:latin typeface="Noto Sans" panose="020B0502040504020204" pitchFamily="34" charset="0"/>
                         </a:rPr>
-                        <a:t>14,261</a:t>
+                        <a:t>14,090</a:t>
                       </a:r>
                     </a:p>
                   </a:txBody>
@@ -31345,7 +31345,7 @@
                           <a:effectLst/>
                           <a:latin typeface="Noto Sans" panose="020B0502040504020204" pitchFamily="34" charset="0"/>
                         </a:rPr>
-                        <a:t>16,617</a:t>
+                        <a:t>16,015</a:t>
                       </a:r>
                     </a:p>
                   </a:txBody>
@@ -31631,7 +31631,7 @@
                           <a:effectLst/>
                           <a:latin typeface="Noto Sans" panose="020B0502040504020204" pitchFamily="34" charset="0"/>
                         </a:rPr>
-                        <a:t>12,549</a:t>
+                        <a:t>12,403</a:t>
                       </a:r>
                     </a:p>
                   </a:txBody>
@@ -31677,7 +31677,7 @@
                           <a:effectLst/>
                           <a:latin typeface="Noto Sans" panose="020B0502040504020204" pitchFamily="34" charset="0"/>
                         </a:rPr>
-                        <a:t>14,608</a:t>
+                        <a:t>14,100</a:t>
                       </a:r>
                     </a:p>
                   </a:txBody>
@@ -31963,7 +31963,7 @@
                           <a:effectLst/>
                           <a:latin typeface="Noto Sans" panose="020B0502040504020204" pitchFamily="34" charset="0"/>
                         </a:rPr>
-                        <a:t>6,933</a:t>
+                        <a:t>6,853</a:t>
                       </a:r>
                     </a:p>
                   </a:txBody>
@@ -32009,7 +32009,7 @@
                           <a:effectLst/>
                           <a:latin typeface="Noto Sans" panose="020B0502040504020204" pitchFamily="34" charset="0"/>
                         </a:rPr>
-                        <a:t>8,070</a:t>
+                        <a:t>7,790</a:t>
                       </a:r>
                     </a:p>
                   </a:txBody>
@@ -32627,7 +32627,7 @@
                           <a:effectLst/>
                           <a:latin typeface="Noto Sans" panose="020B0502040504020204" pitchFamily="34" charset="0"/>
                         </a:rPr>
-                        <a:t>11.4</a:t>
+                        <a:t>11.5</a:t>
                       </a:r>
                     </a:p>
                   </a:txBody>
@@ -32673,7 +32673,7 @@
                           <a:effectLst/>
                           <a:latin typeface="Noto Sans" panose="020B0502040504020204" pitchFamily="34" charset="0"/>
                         </a:rPr>
-                        <a:t>9.8</a:t>
+                        <a:t>10.1</a:t>
                       </a:r>
                     </a:p>
                   </a:txBody>
@@ -38108,7 +38108,7 @@
                 <a:ea typeface="Noto Sans" panose="020B0502040504020204" pitchFamily="34" charset="0"/>
                 <a:cs typeface="Noto Sans" panose="020B0502040504020204" pitchFamily="34" charset="0"/>
               </a:rPr>
-              <a:t>Số hóa khu vực công là nền tảng của danh mục trong nước: CNTT trong nước là mảng tăng trưởng nhanh nhất trong 6T26, đạt 4,236 tỷ đồng (+22.5% CK), LNTT mảng tăng gấp đôi lên 308 tỷ đồng nhờ trúng thầu khu vực công thuộc chương trình chuyển đổi số quốc gia — nguồn việc kéo dài nhiều năm, ít phụ thuộc chu kỳ CNTT toàn cầu, tuy biên 7.3% sẽ làm loãng biên chung khi mở rộng. CNTT nước ngoài dự kiến tăng tốc lên +16.7% trong FY27F, với Nhật Bản +22%/+23% và châu Âu +18%/+20% bù cho thị trường Mỹ được hạ về +5.9% do cạnh tranh giá thầu.</a:t>
+              <a:t>Số hóa khu vực công là nền tảng của danh mục trong nước: CNTT trong nước là mảng tăng trưởng nhanh nhất trong 6T26, đạt 4,236 tỷ đồng (+22.5% CK), LNTT mảng tăng gấp đôi lên 308 tỷ đồng nhờ trúng thầu khu vực công thuộc chương trình chuyển đổi số quốc gia — nguồn việc kéo dài nhiều năm, ít phụ thuộc chu kỳ CNTT toàn cầu, tuy biên 7.3% sẽ làm loãng biên chung khi mở rộng. CNTT nước ngoài được giữ ở mức +14.7% cho FY27-28F — bằng mức FY26F, so với +13.4% đã thực hiện trong 1H26 — với thị trường Mỹ hạ về +5.9% do cạnh tranh giá thầu; chúng tôi không giả định nhu cầu tăng tốc thêm.</a:t>
             </a:r>
             <a:r>
               <a:rPr kumimoji="1" lang="vi-VN" altLang="ko-KR" sz="800" b="0" dirty="0">
@@ -38187,7 +38187,7 @@
                 <a:ea typeface="Noto Sans" panose="020B0502040504020204" pitchFamily="34" charset="0"/>
                 <a:cs typeface="Noto Sans" panose="020B0502040504020204" pitchFamily="34" charset="0"/>
               </a:rPr>
-              <a:t>Dự phóng và định giá: chúng tôi dự phóng LNST-CĐTS FY26F đạt 10,848 tỷ đồng (+14.6% CK), FY27F 12,549 tỷ đồng (+15.7% CK) và FY28F 14,608 tỷ đồng (+16.4% CK), với giả định 2H26 tăng 15% CK so với mức +14.2% đã thực hiện trong 1H26. LNST-CĐTS 1H26 tăng 14.2% trong khi LNTT tăng 18.1% do lợi nhuận từ công ty liên kết đã chịu thuế tại đơn vị được đầu tư, nên tăng trưởng LNTT phóng đại phần thuộc về cổ đông. Toàn bộ các dòng dự phóng được giữ đúng mức 1H26 đã thực hiện: biên lợi nhuận gộp 32.4%, chi phí bán hàng và quản lý 17.6% doanh thu, thuế suất 15.6% chỉ áp trên phần hợp nhất. Lợi nhuận từ công ty liên kết — FPT Telecom (45.66%, hạch toán theo phương pháp VCSH từ FY26), FPT Retail (46.54%), Synnex FPT (48.00%) và FPT Online — đạt 1,423 tỷ đồng trong 1H26; chúng tôi ghi nhận 2,847 tỷ đồng cho FY26F, tăng khoảng 14%/năm. Lãi hoạt động tài chính thuần 830 tỷ đồng giả định danh mục tiền gửi có kỳ hạn 19.4 nghìn tỷ giữ suất sinh lời 5.86% của 1H26 và tăng khoảng 11%/năm, không giả định thêm lãi tỷ giá hay hoàn nhập dự phòng đầu tư. ROE duy trì quanh 27%, nhờ tiền ròng khoảng 60% VCSH và cổ tức tiền mặt 2,000 đồng/cp. Chúng tôi phản ánh rủi ro giá vào tỷ lệ chiết khấu thay vì dự phóng lợi nhuận: phần bù rủi ro vốn cổ phần nâng lên 8.9% từ 7.8% và tăng trưởng dài hạn hạ về 1.5% từ 2.5%, đưa giá mục tiêu DCF (FCFF) xuống 78,750 đồng từ 91,570 đồng. Tại mức 62,900 đồng, giảm 40% từ đầu năm do khối ngoại bán ròng mạnh, cổ phiếu giao dịch ở 10.5x P/E FY26F so với trung vị 5 năm trên 18x, tương ứng tiềm năng tăng 25% (MUA). Thông tin liên quan AI vẫn tích cực: mở rộng hợp tác với Microsoft tại ASEAN, Nhật Bản và Hàn Quốc; hợp đồng AI hàng chục triệu USD với một tập đoàn vật liệu châu Âu; sáu thỏa thuận AI tại Thái Lan và Singapore; và chứng nhận trung gian dữ liệu với Trung tâm Dữ liệu quốc gia — Bộ Công an. Rủi ro: (1) giảm phát giá do AI diễn ra nhanh hơn mức giả định tăng trưởng dài hạn của chúng tôi (2) chi tiêu CNTT tại Mỹ và toàn cầu ở mức thấp cùng việc hợp đồng bị trì hoãn do thuế quan (3) biến động tỷ giá JPY/USD.</a:t>
+              <a:t>Dự phóng và định giá: chúng tôi dự phóng LNST-CĐTS FY26F đạt 10,848 tỷ đồng (+14.6% CK), FY27F 12,403 tỷ đồng (+14.3% CK) và FY28F 14,100 tỷ đồng (+13.7% CK), với giả định 2H26 tăng 15% CK so với mức +14.2% đã thực hiện trong 1H26. Không dòng nào trong dự phóng tăng tốc: mọi tốc độ tăng trưởng được giữ bằng mức FY26F (CNTT nước ngoài +14.7%, CNTT trong nước +12%, Giáo dục +5%), nên tăng trưởng lợi nhuận giảm dần do lợi nhuận liên kết và tài chính tăng chậm hơn nền. LNST-CĐTS 1H26 tăng 14.2% trong khi LNTT tăng 18.1% do lợi nhuận từ công ty liên kết đã chịu thuế tại đơn vị được đầu tư, nên tăng trưởng LNTT phóng đại phần thuộc về cổ đông. Mọi tỷ lệ được giữ đúng mức 1H26 đã thực hiện: biên lợi nhuận gộp 32.4%, chi phí bán hàng và quản lý 17.6% doanh thu và không có đòn bẩy hoạt động, thuế suất 15.6% chỉ áp trên phần hợp nhất. Lợi nhuận từ công ty liên kết — FPT Telecom (45.66%, hạch toán theo phương pháp VCSH từ FY26), FPT Retail (46.54%), Synnex FPT (48.00%) và FPT Online — đạt 1,423 tỷ đồng trong 1H26; chúng tôi ghi nhận 2,847 tỷ đồng cho FY26F, tăng khoảng 14%/năm. Lãi hoạt động tài chính thuần 830 tỷ đồng giả định danh mục tiền gửi có kỳ hạn 19.4 nghìn tỷ giữ suất sinh lời 5.86% của 1H26 và tăng khoảng 11%/năm, không giả định thêm lãi tỷ giá hay hoàn nhập dự phòng đầu tư. ROE duy trì quanh 27%, nhờ tiền ròng khoảng 60% VCSH và cổ tức tiền mặt 2,000 đồng/cp. Chúng tôi phản ánh rủi ro giá vào tỷ lệ chiết khấu thay vì dự phóng lợi nhuận: phần bù rủi ro vốn cổ phần nâng lên 8.9% từ 7.8% và tăng trưởng dài hạn hạ về 1.5% từ 2.5%, đưa giá mục tiêu DCF (FCFF) xuống 78,750 đồng từ 91,570 đồng. Tại mức 62,900 đồng, giảm 40% từ đầu năm do khối ngoại bán ròng mạnh, cổ phiếu giao dịch ở 10.5x P/E FY26F so với trung vị 5 năm trên 18x, tương ứng tiềm năng tăng 25% (MUA). Thông tin liên quan AI vẫn tích cực: mở rộng hợp tác với Microsoft tại ASEAN, Nhật Bản và Hàn Quốc; hợp đồng AI hàng chục triệu USD với một tập đoàn vật liệu châu Âu; sáu thỏa thuận AI tại Thái Lan và Singapore; và chứng nhận trung gian dữ liệu với Trung tâm Dữ liệu quốc gia — Bộ Công an. Rủi ro: (1) giảm phát giá do AI diễn ra nhanh hơn mức giả định tăng trưởng dài hạn của chúng tôi (2) chi tiêu CNTT tại Mỹ và toàn cầu ở mức thấp cùng việc hợp đồng bị trì hoãn do thuế quan (3) biến động tỷ giá JPY/USD.</a:t>
             </a:r>
             <a:r>
               <a:rPr kumimoji="1" lang="vi-VN" altLang="ko-KR" sz="800" b="0" dirty="0">
@@ -38917,7 +38917,7 @@
                           <a:effectLst/>
                           <a:latin typeface="Noto Sans" panose="020B0502040504020204" pitchFamily="34" charset="0"/>
                         </a:rPr>
-                        <a:t>57,284</a:t>
+                        <a:t>57,195</a:t>
                       </a:r>
                     </a:p>
                   </a:txBody>
@@ -38970,7 +38970,7 @@
                           <a:effectLst/>
                           <a:latin typeface="Noto Sans" panose="020B0502040504020204" pitchFamily="34" charset="0"/>
                         </a:rPr>
-                        <a:t>66,048</a:t>
+                        <a:t>64,690</a:t>
                       </a:r>
                     </a:p>
                   </a:txBody>
@@ -39020,7 +39020,7 @@
                           <a:effectLst/>
                           <a:latin typeface="Noto Sans" panose="020B0502040504020204" pitchFamily="34" charset="0"/>
                         </a:rPr>
-                        <a:t>76,654</a:t>
+                        <a:t>73,221</a:t>
                       </a:r>
                     </a:p>
                   </a:txBody>
@@ -39249,7 +39249,7 @@
                           <a:effectLst/>
                           <a:latin typeface="Noto Sans" panose="020B0502040504020204" pitchFamily="34" charset="0"/>
                         </a:rPr>
-                        <a:t>9,807</a:t>
+                        <a:t>8,475</a:t>
                       </a:r>
                     </a:p>
                   </a:txBody>
@@ -39295,7 +39295,7 @@
                           <a:effectLst/>
                           <a:latin typeface="Noto Sans" panose="020B0502040504020204" pitchFamily="34" charset="0"/>
                         </a:rPr>
-                        <a:t>11,043</a:t>
+                        <a:t>9,585</a:t>
                       </a:r>
                     </a:p>
                   </a:txBody>
@@ -39338,7 +39338,7 @@
                           <a:effectLst/>
                           <a:latin typeface="Noto Sans" panose="020B0502040504020204" pitchFamily="34" charset="0"/>
                         </a:rPr>
-                        <a:t>13,054</a:t>
+                        <a:t>10,849</a:t>
                       </a:r>
                     </a:p>
                   </a:txBody>
@@ -39624,7 +39624,7 @@
                           <a:effectLst/>
                           <a:latin typeface="Noto Sans" panose="020B0502040504020204" pitchFamily="34" charset="0"/>
                         </a:rPr>
-                        <a:t>14,261</a:t>
+                        <a:t>14,090</a:t>
                       </a:r>
                     </a:p>
                   </a:txBody>
@@ -39670,7 +39670,7 @@
                           <a:effectLst/>
                           <a:latin typeface="Noto Sans" panose="020B0502040504020204" pitchFamily="34" charset="0"/>
                         </a:rPr>
-                        <a:t>16,617</a:t>
+                        <a:t>16,015</a:t>
                       </a:r>
                     </a:p>
                   </a:txBody>
@@ -39956,7 +39956,7 @@
                           <a:effectLst/>
                           <a:latin typeface="Noto Sans" panose="020B0502040504020204" pitchFamily="34" charset="0"/>
                         </a:rPr>
-                        <a:t>12,549</a:t>
+                        <a:t>12,403</a:t>
                       </a:r>
                     </a:p>
                   </a:txBody>
@@ -40002,7 +40002,7 @@
                           <a:effectLst/>
                           <a:latin typeface="Noto Sans" panose="020B0502040504020204" pitchFamily="34" charset="0"/>
                         </a:rPr>
-                        <a:t>14,608</a:t>
+                        <a:t>14,100</a:t>
                       </a:r>
                     </a:p>
                   </a:txBody>
@@ -40288,7 +40288,7 @@
                           <a:effectLst/>
                           <a:latin typeface="Noto Sans" panose="020B0502040504020204" pitchFamily="34" charset="0"/>
                         </a:rPr>
-                        <a:t>6,933</a:t>
+                        <a:t>6,853</a:t>
                       </a:r>
                     </a:p>
                   </a:txBody>
@@ -40334,7 +40334,7 @@
                           <a:effectLst/>
                           <a:latin typeface="Noto Sans" panose="020B0502040504020204" pitchFamily="34" charset="0"/>
                         </a:rPr>
-                        <a:t>8,070</a:t>
+                        <a:t>7,790</a:t>
                       </a:r>
                     </a:p>
                   </a:txBody>
@@ -40952,7 +40952,7 @@
                           <a:effectLst/>
                           <a:latin typeface="Noto Sans" panose="020B0502040504020204" pitchFamily="34" charset="0"/>
                         </a:rPr>
-                        <a:t>11.4</a:t>
+                        <a:t>11.5</a:t>
                       </a:r>
                     </a:p>
                   </a:txBody>
@@ -40998,7 +40998,7 @@
                           <a:effectLst/>
                           <a:latin typeface="Noto Sans" panose="020B0502040504020204" pitchFamily="34" charset="0"/>
                         </a:rPr>
-                        <a:t>9.8</a:t>
+                        <a:t>10.1</a:t>
                       </a:r>
                     </a:p>
                   </a:txBody>

--- a/MASVN_RS_WM_2H26_outlook_Equity_VN_2026_STBFPT_31July2026.pptx
+++ b/MASVN_RS_WM_2H26_outlook_Equity_VN_2026_STBFPT_31July2026.pptx
@@ -29743,7 +29743,7 @@
                 <a:ea typeface="Noto Sans" panose="020B0502040504020204" pitchFamily="34" charset="0"/>
                 <a:cs typeface="Noto Sans" panose="020B0502040504020204" pitchFamily="34" charset="0"/>
               </a:rPr>
-              <a:t>Public-sector digitalization underpins the domestic pipeline: Domestic IT was the fastest-growing segment in 6M26 at VND4,236bn (+22.5% YoY), with segment PBT doubling to VND308bn on public-sector wins under the national digital-transformation programme — multi-year work with limited exposure to the global IT cycle, though its 7.3% margin dilutes the blend as it scales. Global IT is held at +14.7% in FY27-28F — the FY26F rate, against +13.4% delivered in 1H26 — with the US book cut to +5.9% on bid-price competition; we do not assume the ramp accelerates.</a:t>
+              <a:t>Public-sector digitalization underpins the domestic pipeline: Domestic IT was the fastest-growing segment in 6M26 at VND4,236bn (+22.5% YoY), with segment PBT doubling to VND308bn on public-sector wins under the national digital-transformation programme — multi-year work with limited exposure to the global IT cycle, though its 7.3% margin dilutes the blend as it scales. Global IT reaccelerates to +15.5% in FY27F and +16.0% in FY28F, from the +14.7% assumed for FY26F and +13.4% delivered in 1H26, with the US book cut to +5.9% on bid-price competition.</a:t>
             </a:r>
             <a:r>
               <a:rPr kumimoji="1" lang="en-US" altLang="ko-KR" sz="800" dirty="0" err="1">
@@ -29825,7 +29825,7 @@
                 <a:ea typeface="Noto Sans" panose="020B0502040504020204" pitchFamily="34" charset="0"/>
                 <a:cs typeface="Noto Sans" panose="020B0502040504020204" pitchFamily="34" charset="0"/>
               </a:rPr>
-              <a:t>Projection and valuation: we forecast FY26F NPATMI of VND10,848bn (+14.6% YoY), FY27F VND12,403bn (+14.3% YoY) and FY28F VND14,100bn (+13.7% YoY), taking 2H26 at +15% YoY against the +14.2% delivered in 1H26. No line in the forecast accelerates: every growth rate is held at its FY26F level (Global IT +14.7%, Domestic IT +12%, Education +5%), so earnings growth eases as associates and financial income grow more slowly than the base. Note that NPATMI grew 14.2% while PBT grew 18.1%: equity income is already taxed at the investee, so PBT growth overstates what accrues to shareholders. Every ratio is held at what 1H26 delivered - gross margin 32.4%, operating expenses 17.6% of sales with no operating leverage, and a 15.6% tax rate applied to the consolidated block only. Associate income from FPT Telecom (45.66%, equity-accounted from FY26), FPT Retail (46.54%), Synnex FPT (48.00%) and FPT Online was VND1,423bn in 1H26; we carry VND2,847bn in FY26F growing ~14% p.a. Net financial income of VND830bn assumes the VND19.4tn term-deposit book keeps the 5.86% yield it earned in 1H26 and compounds at ~11% p.a., with no further FX gains or investment provisions. ROE holds near 27%, supported by net cash of around 60% of equity and a maintained DPS of VND2,000. We have taken the pricing risk into the discount rate rather than the earnings line: the equity risk premium is raised to 8.9% from 7.8% and long-term growth cut to 1.5% from 2.5%, lowering our DCF (FCFF) target price to VND78,750 from VND91,570. At VND62,900, down 40% year-to-date on heavy foreign selling, the stock trades at 10.5x FY26F earnings against a five-year median above 18x, implying 25% upside (BUY). AI-related newsflow has stayed supportive through the de-rating, including an expanded partnership with Microsoft across ASEAN, Japan and Korea, an AI contract worth tens of millions of USD with a European materials group, six AI agreements in Thailand and Singapore, and data-intermediary certification with the Ministry of Public Security’s National Data Centre. Risks: (1) AI-driven price deflation passing through faster than our long-term growth assumption allows (2) subdued US and global IT spending and tariff-related contract delays (3) JPY/USD volatility.</a:t>
+              <a:t>Projection and valuation: we forecast FY26F NPATMI of VND10,848bn (+14.6% YoY), FY27F VND12,497bn (+15.2% YoY) and FY28F VND14,459bn (+15.7% YoY), taking 2H26 at +15% YoY against the +14.2% delivered in 1H26. Two named assumptions carry the step up in FY27-28F: Global IT reaccelerating to +15.5% then +16.0%, and associate income to +16% from +14%. Domestic IT is held at +12% and Education at +5% after a 2.1% decline in 1H26. Note that NPATMI grew 14.2% while PBT grew 18.1%: equity income is already taxed at the investee, so PBT growth overstates what accrues to shareholders. Every ratio is held at what 1H26 delivered - gross margin 32.4%, operating expenses within 16bp of the 17.6% of sales delivered in 1H26, and a 15.6% tax rate applied to the consolidated block only. Associate income from FPT Telecom (45.66%, equity-accounted from FY26), FPT Retail (46.54%), Synnex FPT (48.00%) and FPT Online was VND1,423bn in 1H26; we carry VND2,847bn in FY26F growing ~14% p.a. Net financial income of VND830bn assumes the VND19.4tn term-deposit book keeps the 5.86% yield it earned in 1H26 and compounds at ~11% p.a., with no further FX gains or investment provisions. ROE holds near 27%, supported by net cash of around 60% of equity and a maintained DPS of VND2,000. We have taken the pricing risk into the discount rate rather than the earnings line: the equity risk premium is raised to 8.9% from 7.8% and long-term growth cut to 1.5% from 2.5%, lowering our DCF (FCFF) target price to VND78,750 from VND91,570. At VND62,900, down 40% year-to-date on heavy foreign selling, the stock trades at 10.5x FY26F earnings against a five-year median above 18x, implying 25% upside (BUY). AI-related newsflow has stayed supportive through the de-rating, including an expanded partnership with Microsoft across ASEAN, Japan and Korea, an AI contract worth tens of millions of USD with a European materials group, six AI agreements in Thailand and Singapore, and data-intermediary certification with the Ministry of Public Security’s National Data Centre. Risks: (1) AI-driven price deflation passing through faster than our long-term growth assumption allows (2) subdued US and global IT spending and tariff-related contract delays (3) JPY/USD volatility.</a:t>
             </a:r>
             <a:r>
               <a:rPr kumimoji="1" lang="en-US" altLang="ko-KR" sz="800" dirty="0">
@@ -30645,7 +30645,7 @@
                           <a:effectLst/>
                           <a:latin typeface="Noto Sans" panose="020B0502040504020204" pitchFamily="34" charset="0"/>
                         </a:rPr>
-                        <a:t>64,690</a:t>
+                        <a:t>65,027</a:t>
                       </a:r>
                     </a:p>
                   </a:txBody>
@@ -30695,7 +30695,7 @@
                           <a:effectLst/>
                           <a:latin typeface="Noto Sans" panose="020B0502040504020204" pitchFamily="34" charset="0"/>
                         </a:rPr>
-                        <a:t>73,221</a:t>
+                        <a:t>74,232</a:t>
                       </a:r>
                     </a:p>
                   </a:txBody>
@@ -30970,7 +30970,7 @@
                           <a:effectLst/>
                           <a:latin typeface="Noto Sans" panose="020B0502040504020204" pitchFamily="34" charset="0"/>
                         </a:rPr>
-                        <a:t>9,585</a:t>
+                        <a:t>9,626</a:t>
                       </a:r>
                     </a:p>
                   </a:txBody>
@@ -31013,7 +31013,7 @@
                           <a:effectLst/>
                           <a:latin typeface="Noto Sans" panose="020B0502040504020204" pitchFamily="34" charset="0"/>
                         </a:rPr>
-                        <a:t>10,849</a:t>
+                        <a:t>11,117</a:t>
                       </a:r>
                     </a:p>
                   </a:txBody>
@@ -31299,7 +31299,7 @@
                           <a:effectLst/>
                           <a:latin typeface="Noto Sans" panose="020B0502040504020204" pitchFamily="34" charset="0"/>
                         </a:rPr>
-                        <a:t>14,090</a:t>
+                        <a:t>14,189</a:t>
                       </a:r>
                     </a:p>
                   </a:txBody>
@@ -31345,7 +31345,7 @@
                           <a:effectLst/>
                           <a:latin typeface="Noto Sans" panose="020B0502040504020204" pitchFamily="34" charset="0"/>
                         </a:rPr>
-                        <a:t>16,015</a:t>
+                        <a:t>16,416</a:t>
                       </a:r>
                     </a:p>
                   </a:txBody>
@@ -31631,7 +31631,7 @@
                           <a:effectLst/>
                           <a:latin typeface="Noto Sans" panose="020B0502040504020204" pitchFamily="34" charset="0"/>
                         </a:rPr>
-                        <a:t>12,403</a:t>
+                        <a:t>12,497</a:t>
                       </a:r>
                     </a:p>
                   </a:txBody>
@@ -31677,7 +31677,7 @@
                           <a:effectLst/>
                           <a:latin typeface="Noto Sans" panose="020B0502040504020204" pitchFamily="34" charset="0"/>
                         </a:rPr>
-                        <a:t>14,100</a:t>
+                        <a:t>14,459</a:t>
                       </a:r>
                     </a:p>
                   </a:txBody>
@@ -31963,7 +31963,7 @@
                           <a:effectLst/>
                           <a:latin typeface="Noto Sans" panose="020B0502040504020204" pitchFamily="34" charset="0"/>
                         </a:rPr>
-                        <a:t>6,853</a:t>
+                        <a:t>6,904</a:t>
                       </a:r>
                     </a:p>
                   </a:txBody>
@@ -32009,7 +32009,7 @@
                           <a:effectLst/>
                           <a:latin typeface="Noto Sans" panose="020B0502040504020204" pitchFamily="34" charset="0"/>
                         </a:rPr>
-                        <a:t>7,790</a:t>
+                        <a:t>7,988</a:t>
                       </a:r>
                     </a:p>
                   </a:txBody>
@@ -32627,7 +32627,7 @@
                           <a:effectLst/>
                           <a:latin typeface="Noto Sans" panose="020B0502040504020204" pitchFamily="34" charset="0"/>
                         </a:rPr>
-                        <a:t>11.5</a:t>
+                        <a:t>11.4</a:t>
                       </a:r>
                     </a:p>
                   </a:txBody>
@@ -32673,7 +32673,7 @@
                           <a:effectLst/>
                           <a:latin typeface="Noto Sans" panose="020B0502040504020204" pitchFamily="34" charset="0"/>
                         </a:rPr>
-                        <a:t>10.1</a:t>
+                        <a:t>9.9</a:t>
                       </a:r>
                     </a:p>
                   </a:txBody>
@@ -38108,7 +38108,7 @@
                 <a:ea typeface="Noto Sans" panose="020B0502040504020204" pitchFamily="34" charset="0"/>
                 <a:cs typeface="Noto Sans" panose="020B0502040504020204" pitchFamily="34" charset="0"/>
               </a:rPr>
-              <a:t>Số hóa khu vực công là nền tảng của danh mục trong nước: CNTT trong nước là mảng tăng trưởng nhanh nhất trong 6T26, đạt 4,236 tỷ đồng (+22.5% CK), LNTT mảng tăng gấp đôi lên 308 tỷ đồng nhờ trúng thầu khu vực công thuộc chương trình chuyển đổi số quốc gia — nguồn việc kéo dài nhiều năm, ít phụ thuộc chu kỳ CNTT toàn cầu, tuy biên 7.3% sẽ làm loãng biên chung khi mở rộng. CNTT nước ngoài được giữ ở mức +14.7% cho FY27-28F — bằng mức FY26F, so với +13.4% đã thực hiện trong 1H26 — với thị trường Mỹ hạ về +5.9% do cạnh tranh giá thầu; chúng tôi không giả định nhu cầu tăng tốc thêm.</a:t>
+              <a:t>Số hóa khu vực công là nền tảng của danh mục trong nước: CNTT trong nước là mảng tăng trưởng nhanh nhất trong 6T26, đạt 4,236 tỷ đồng (+22.5% CK), LNTT mảng tăng gấp đôi lên 308 tỷ đồng nhờ trúng thầu khu vực công thuộc chương trình chuyển đổi số quốc gia — nguồn việc kéo dài nhiều năm, ít phụ thuộc chu kỳ CNTT toàn cầu, tuy biên 7.3% sẽ làm loãng biên chung khi mở rộng. CNTT nước ngoài tăng tốc lên +15.5% trong FY27F và +16.0% trong FY28F, từ mức +14.7% của FY26F và +13.4% đã thực hiện trong 1H26, với thị trường Mỹ hạ về +5.9% do cạnh tranh giá thầu.</a:t>
             </a:r>
             <a:r>
               <a:rPr kumimoji="1" lang="vi-VN" altLang="ko-KR" sz="800" b="0" dirty="0">
@@ -38187,7 +38187,7 @@
                 <a:ea typeface="Noto Sans" panose="020B0502040504020204" pitchFamily="34" charset="0"/>
                 <a:cs typeface="Noto Sans" panose="020B0502040504020204" pitchFamily="34" charset="0"/>
               </a:rPr>
-              <a:t>Dự phóng và định giá: chúng tôi dự phóng LNST-CĐTS FY26F đạt 10,848 tỷ đồng (+14.6% CK), FY27F 12,403 tỷ đồng (+14.3% CK) và FY28F 14,100 tỷ đồng (+13.7% CK), với giả định 2H26 tăng 15% CK so với mức +14.2% đã thực hiện trong 1H26. Không dòng nào trong dự phóng tăng tốc: mọi tốc độ tăng trưởng được giữ bằng mức FY26F (CNTT nước ngoài +14.7%, CNTT trong nước +12%, Giáo dục +5%), nên tăng trưởng lợi nhuận giảm dần do lợi nhuận liên kết và tài chính tăng chậm hơn nền. LNST-CĐTS 1H26 tăng 14.2% trong khi LNTT tăng 18.1% do lợi nhuận từ công ty liên kết đã chịu thuế tại đơn vị được đầu tư, nên tăng trưởng LNTT phóng đại phần thuộc về cổ đông. Mọi tỷ lệ được giữ đúng mức 1H26 đã thực hiện: biên lợi nhuận gộp 32.4%, chi phí bán hàng và quản lý 17.6% doanh thu và không có đòn bẩy hoạt động, thuế suất 15.6% chỉ áp trên phần hợp nhất. Lợi nhuận từ công ty liên kết — FPT Telecom (45.66%, hạch toán theo phương pháp VCSH từ FY26), FPT Retail (46.54%), Synnex FPT (48.00%) và FPT Online — đạt 1,423 tỷ đồng trong 1H26; chúng tôi ghi nhận 2,847 tỷ đồng cho FY26F, tăng khoảng 14%/năm. Lãi hoạt động tài chính thuần 830 tỷ đồng giả định danh mục tiền gửi có kỳ hạn 19.4 nghìn tỷ giữ suất sinh lời 5.86% của 1H26 và tăng khoảng 11%/năm, không giả định thêm lãi tỷ giá hay hoàn nhập dự phòng đầu tư. ROE duy trì quanh 27%, nhờ tiền ròng khoảng 60% VCSH và cổ tức tiền mặt 2,000 đồng/cp. Chúng tôi phản ánh rủi ro giá vào tỷ lệ chiết khấu thay vì dự phóng lợi nhuận: phần bù rủi ro vốn cổ phần nâng lên 8.9% từ 7.8% và tăng trưởng dài hạn hạ về 1.5% từ 2.5%, đưa giá mục tiêu DCF (FCFF) xuống 78,750 đồng từ 91,570 đồng. Tại mức 62,900 đồng, giảm 40% từ đầu năm do khối ngoại bán ròng mạnh, cổ phiếu giao dịch ở 10.5x P/E FY26F so với trung vị 5 năm trên 18x, tương ứng tiềm năng tăng 25% (MUA). Thông tin liên quan AI vẫn tích cực: mở rộng hợp tác với Microsoft tại ASEAN, Nhật Bản và Hàn Quốc; hợp đồng AI hàng chục triệu USD với một tập đoàn vật liệu châu Âu; sáu thỏa thuận AI tại Thái Lan và Singapore; và chứng nhận trung gian dữ liệu với Trung tâm Dữ liệu quốc gia — Bộ Công an. Rủi ro: (1) giảm phát giá do AI diễn ra nhanh hơn mức giả định tăng trưởng dài hạn của chúng tôi (2) chi tiêu CNTT tại Mỹ và toàn cầu ở mức thấp cùng việc hợp đồng bị trì hoãn do thuế quan (3) biến động tỷ giá JPY/USD.</a:t>
+              <a:t>Dự phóng và định giá: chúng tôi dự phóng LNST-CĐTS FY26F đạt 10,848 tỷ đồng (+14.6% CK), FY27F 12,497 tỷ đồng (+15.2% CK) và FY28F 14,459 tỷ đồng (+15.7% CK), với giả định 2H26 tăng 15% CK so với mức +14.2% đã thực hiện trong 1H26. Mức tăng tốc của FY27-28F dựa trên hai giả định được nêu rõ: CNTT nước ngoài lên +15.5% rồi +16.0%, và lợi nhuận từ công ty liên kết lên +16% từ +14%. CNTT trong nước giữ +12% và Giáo dục giữ +5% sau khi giảm 2.1% trong 1H26. LNST-CĐTS 1H26 tăng 14.2% trong khi LNTT tăng 18.1% do lợi nhuận từ công ty liên kết đã chịu thuế tại đơn vị được đầu tư, nên tăng trưởng LNTT phóng đại phần thuộc về cổ đông. Mọi tỷ lệ được giữ đúng mức 1H26 đã thực hiện: biên lợi nhuận gộp 32.4%, chi phí bán hàng và quản lý trong khoảng 16bp quanh mức 17.6% doanh thu của 1H26, thuế suất 15.6% chỉ áp trên phần hợp nhất. Lợi nhuận từ công ty liên kết — FPT Telecom (45.66%, hạch toán theo phương pháp VCSH từ FY26), FPT Retail (46.54%), Synnex FPT (48.00%) và FPT Online — đạt 1,423 tỷ đồng trong 1H26; chúng tôi ghi nhận 2,847 tỷ đồng cho FY26F, tăng khoảng 14%/năm. Lãi hoạt động tài chính thuần 830 tỷ đồng giả định danh mục tiền gửi có kỳ hạn 19.4 nghìn tỷ giữ suất sinh lời 5.86% của 1H26 và tăng khoảng 11%/năm, không giả định thêm lãi tỷ giá hay hoàn nhập dự phòng đầu tư. ROE duy trì quanh 27%, nhờ tiền ròng khoảng 60% VCSH và cổ tức tiền mặt 2,000 đồng/cp. Chúng tôi phản ánh rủi ro giá vào tỷ lệ chiết khấu thay vì dự phóng lợi nhuận: phần bù rủi ro vốn cổ phần nâng lên 8.9% từ 7.8% và tăng trưởng dài hạn hạ về 1.5% từ 2.5%, đưa giá mục tiêu DCF (FCFF) xuống 78,750 đồng từ 91,570 đồng. Tại mức 62,900 đồng, giảm 40% từ đầu năm do khối ngoại bán ròng mạnh, cổ phiếu giao dịch ở 10.5x P/E FY26F so với trung vị 5 năm trên 18x, tương ứng tiềm năng tăng 25% (MUA). Thông tin liên quan AI vẫn tích cực: mở rộng hợp tác với Microsoft tại ASEAN, Nhật Bản và Hàn Quốc; hợp đồng AI hàng chục triệu USD với một tập đoàn vật liệu châu Âu; sáu thỏa thuận AI tại Thái Lan và Singapore; và chứng nhận trung gian dữ liệu với Trung tâm Dữ liệu quốc gia — Bộ Công an. Rủi ro: (1) giảm phát giá do AI diễn ra nhanh hơn mức giả định tăng trưởng dài hạn của chúng tôi (2) chi tiêu CNTT tại Mỹ và toàn cầu ở mức thấp cùng việc hợp đồng bị trì hoãn do thuế quan (3) biến động tỷ giá JPY/USD.</a:t>
             </a:r>
             <a:r>
               <a:rPr kumimoji="1" lang="vi-VN" altLang="ko-KR" sz="800" b="0" dirty="0">
@@ -38970,7 +38970,7 @@
                           <a:effectLst/>
                           <a:latin typeface="Noto Sans" panose="020B0502040504020204" pitchFamily="34" charset="0"/>
                         </a:rPr>
-                        <a:t>64,690</a:t>
+                        <a:t>65,027</a:t>
                       </a:r>
                     </a:p>
                   </a:txBody>
@@ -39020,7 +39020,7 @@
                           <a:effectLst/>
                           <a:latin typeface="Noto Sans" panose="020B0502040504020204" pitchFamily="34" charset="0"/>
                         </a:rPr>
-                        <a:t>73,221</a:t>
+                        <a:t>74,232</a:t>
                       </a:r>
                     </a:p>
                   </a:txBody>
@@ -39295,7 +39295,7 @@
                           <a:effectLst/>
                           <a:latin typeface="Noto Sans" panose="020B0502040504020204" pitchFamily="34" charset="0"/>
                         </a:rPr>
-                        <a:t>9,585</a:t>
+                        <a:t>9,626</a:t>
                       </a:r>
                     </a:p>
                   </a:txBody>
@@ -39338,7 +39338,7 @@
                           <a:effectLst/>
                           <a:latin typeface="Noto Sans" panose="020B0502040504020204" pitchFamily="34" charset="0"/>
                         </a:rPr>
-                        <a:t>10,849</a:t>
+                        <a:t>11,117</a:t>
                       </a:r>
                     </a:p>
                   </a:txBody>
@@ -39624,7 +39624,7 @@
                           <a:effectLst/>
                           <a:latin typeface="Noto Sans" panose="020B0502040504020204" pitchFamily="34" charset="0"/>
                         </a:rPr>
-                        <a:t>14,090</a:t>
+                        <a:t>14,189</a:t>
                       </a:r>
                     </a:p>
                   </a:txBody>
@@ -39670,7 +39670,7 @@
                           <a:effectLst/>
                           <a:latin typeface="Noto Sans" panose="020B0502040504020204" pitchFamily="34" charset="0"/>
                         </a:rPr>
-                        <a:t>16,015</a:t>
+                        <a:t>16,416</a:t>
                       </a:r>
                     </a:p>
                   </a:txBody>
@@ -39956,7 +39956,7 @@
                           <a:effectLst/>
                           <a:latin typeface="Noto Sans" panose="020B0502040504020204" pitchFamily="34" charset="0"/>
                         </a:rPr>
-                        <a:t>12,403</a:t>
+                        <a:t>12,497</a:t>
                       </a:r>
                     </a:p>
                   </a:txBody>
@@ -40002,7 +40002,7 @@
                           <a:effectLst/>
                           <a:latin typeface="Noto Sans" panose="020B0502040504020204" pitchFamily="34" charset="0"/>
                         </a:rPr>
-                        <a:t>14,100</a:t>
+                        <a:t>14,459</a:t>
                       </a:r>
                     </a:p>
                   </a:txBody>
@@ -40288,7 +40288,7 @@
                           <a:effectLst/>
                           <a:latin typeface="Noto Sans" panose="020B0502040504020204" pitchFamily="34" charset="0"/>
                         </a:rPr>
-                        <a:t>6,853</a:t>
+                        <a:t>6,904</a:t>
                       </a:r>
                     </a:p>
                   </a:txBody>
@@ -40334,7 +40334,7 @@
                           <a:effectLst/>
                           <a:latin typeface="Noto Sans" panose="020B0502040504020204" pitchFamily="34" charset="0"/>
                         </a:rPr>
-                        <a:t>7,790</a:t>
+                        <a:t>7,988</a:t>
                       </a:r>
                     </a:p>
                   </a:txBody>
@@ -40952,7 +40952,7 @@
                           <a:effectLst/>
                           <a:latin typeface="Noto Sans" panose="020B0502040504020204" pitchFamily="34" charset="0"/>
                         </a:rPr>
-                        <a:t>11.5</a:t>
+                        <a:t>11.4</a:t>
                       </a:r>
                     </a:p>
                   </a:txBody>
@@ -40998,7 +40998,7 @@
                           <a:effectLst/>
                           <a:latin typeface="Noto Sans" panose="020B0502040504020204" pitchFamily="34" charset="0"/>
                         </a:rPr>
-                        <a:t>10.1</a:t>
+                        <a:t>9.9</a:t>
                       </a:r>
                     </a:p>
                   </a:txBody>

--- a/MASVN_RS_WM_2H26_outlook_Equity_VN_2026_STBFPT_31July2026.pptx
+++ b/MASVN_RS_WM_2H26_outlook_Equity_VN_2026_STBFPT_31July2026.pptx
@@ -29743,7 +29743,7 @@
                 <a:ea typeface="Noto Sans" panose="020B0502040504020204" pitchFamily="34" charset="0"/>
                 <a:cs typeface="Noto Sans" panose="020B0502040504020204" pitchFamily="34" charset="0"/>
               </a:rPr>
-              <a:t>Public-sector digitalization underpins the domestic pipeline: Domestic IT was the fastest-growing segment in 6M26 at VND4,236bn (+22.5% YoY), with segment PBT doubling to VND308bn on public-sector wins under the national digital-transformation programme — multi-year work with limited exposure to the global IT cycle, though its 7.3% margin dilutes the blend as it scales. Global IT reaccelerates to +15.5% in FY27F and +16.0% in FY28F, from the +14.7% assumed for FY26F and +13.4% delivered in 1H26, with the US book cut to +5.9% on bid-price competition.</a:t>
+              <a:t>Public-sector digitalization underpins the domestic pipeline: Domestic IT was the fastest-growing segment in 6M26 at VND4,236bn (+22.5% YoY), with segment PBT doubling to VND308bn on public-sector wins under the national digital-transformation programme — multi-year work with limited exposure to the global IT cycle, though its 7.3% margin dilutes the blend as it scales. Signed contract value for Global IT reached VND26,338bn in 1H26, +32.3% YoY, including 14 deals above USD10mn (+27.3%) — a book-to-bill of 1.39x against 1.07-1.22x through FY21-25, and the largest half-year backlog build on record. On that basis we look for Global IT to reaccelerate to +15.5% in FY27F and +16.0% in FY28F, from the +14.7% assumed for FY26F and +13.4% delivered in 1H26, with the US book cut to +5.9% on bid-price competition.</a:t>
             </a:r>
             <a:r>
               <a:rPr kumimoji="1" lang="en-US" altLang="ko-KR" sz="800" dirty="0" err="1">
@@ -29825,7 +29825,7 @@
                 <a:ea typeface="Noto Sans" panose="020B0502040504020204" pitchFamily="34" charset="0"/>
                 <a:cs typeface="Noto Sans" panose="020B0502040504020204" pitchFamily="34" charset="0"/>
               </a:rPr>
-              <a:t>Projection and valuation: we forecast FY26F NPATMI of VND10,848bn (+14.6% YoY), FY27F VND12,497bn (+15.2% YoY) and FY28F VND14,459bn (+15.7% YoY), taking 2H26 at +15% YoY against the +14.2% delivered in 1H26. Two named assumptions carry the step up in FY27-28F: Global IT reaccelerating to +15.5% then +16.0%, and associate income to +16% from +14%. Domestic IT is held at +12% and Education at +5% after a 2.1% decline in 1H26. Note that NPATMI grew 14.2% while PBT grew 18.1%: equity income is already taxed at the investee, so PBT growth overstates what accrues to shareholders. Every ratio is held at what 1H26 delivered - gross margin 32.4%, operating expenses within 16bp of the 17.6% of sales delivered in 1H26, and a 15.6% tax rate applied to the consolidated block only. Associate income from FPT Telecom (45.66%, equity-accounted from FY26), FPT Retail (46.54%), Synnex FPT (48.00%) and FPT Online was VND1,423bn in 1H26; we carry VND2,847bn in FY26F growing ~14% p.a. Net financial income of VND830bn assumes the VND19.4tn term-deposit book keeps the 5.86% yield it earned in 1H26 and compounds at ~11% p.a., with no further FX gains or investment provisions. ROE holds near 27%, supported by net cash of around 60% of equity and a maintained DPS of VND2,000. We have taken the pricing risk into the discount rate rather than the earnings line: the equity risk premium is raised to 8.9% from 7.8% and long-term growth cut to 1.5% from 2.5%, lowering our DCF (FCFF) target price to VND78,750 from VND91,570. At VND62,900, down 40% year-to-date on heavy foreign selling, the stock trades at 10.5x FY26F earnings against a five-year median above 18x, implying 25% upside (BUY). AI-related newsflow has stayed supportive through the de-rating, including an expanded partnership with Microsoft across ASEAN, Japan and Korea, an AI contract worth tens of millions of USD with a European materials group, six AI agreements in Thailand and Singapore, and data-intermediary certification with the Ministry of Public Security’s National Data Centre. Risks: (1) AI-driven price deflation passing through faster than our long-term growth assumption allows (2) subdued US and global IT spending and tariff-related contract delays (3) JPY/USD volatility.</a:t>
+              <a:t>Projection and valuation: we forecast FY26F NPATMI of VND10,848bn (+14.6% YoY), FY27F VND12,497bn (+15.2% YoY) and FY28F VND14,459bn (+15.7% YoY), taking 2H26 at +15% YoY against the +14.2% delivered in 1H26. Two named assumptions carry the step up in FY27-28F: Global IT reaccelerating to +15.5% then +16.0% - supported by signings running +32.3% against revenue at +13.4% - and associate income to +16% from +14%. Domestic IT is held at +12% and Education at +5% after a 2.1% decline in 1H26. Note that NPATMI grew 14.2% while PBT grew 18.1%: equity income is already taxed at the investee, so PBT growth overstates what accrues to shareholders. Every ratio is held at what 1H26 delivered - gross margin 32.4%, operating expenses within 16bp of the 17.6% of sales delivered in 1H26, and a 15.6% tax rate applied to the consolidated block only. Associate income from FPT Telecom (45.66%, equity-accounted from FY26), FPT Retail (46.54%), Synnex FPT (48.00%) and FPT Online was VND1,423bn in 1H26; we carry VND2,847bn in FY26F growing ~14% p.a. Net financial income of VND830bn assumes the VND19.4tn term-deposit book keeps the 5.86% yield it earned in 1H26 and compounds at ~11% p.a., with no further FX gains or investment provisions. ROE holds near 27%, supported by net cash of around 60% of equity and a maintained DPS of VND2,000. We have taken the pricing risk into the discount rate rather than the earnings line: the equity risk premium is raised to 8.9% from 7.8% and long-term growth cut to 1.5% from 2.5%, lowering our DCF (FCFF) target price to VND78,750 from VND91,570. At VND62,900, down 40% year-to-date on heavy foreign selling, the stock trades at 10.5x FY26F earnings against a five-year median above 18x, implying 25% upside (BUY). AI-related newsflow has stayed supportive through the de-rating, including an expanded partnership with Microsoft across ASEAN, Japan and Korea, an AI contract worth tens of millions of USD with a European materials group, six AI agreements in Thailand and Singapore, and data-intermediary certification with the Ministry of Public Security’s National Data Centre. Risks: (1) AI-driven price deflation passing through faster than our long-term growth assumption allows (2) subdued US and global IT spending and tariff-related contract delays (3) JPY/USD volatility.</a:t>
             </a:r>
             <a:r>
               <a:rPr kumimoji="1" lang="en-US" altLang="ko-KR" sz="800" dirty="0">
@@ -38108,7 +38108,7 @@
                 <a:ea typeface="Noto Sans" panose="020B0502040504020204" pitchFamily="34" charset="0"/>
                 <a:cs typeface="Noto Sans" panose="020B0502040504020204" pitchFamily="34" charset="0"/>
               </a:rPr>
-              <a:t>Số hóa khu vực công là nền tảng của danh mục trong nước: CNTT trong nước là mảng tăng trưởng nhanh nhất trong 6T26, đạt 4,236 tỷ đồng (+22.5% CK), LNTT mảng tăng gấp đôi lên 308 tỷ đồng nhờ trúng thầu khu vực công thuộc chương trình chuyển đổi số quốc gia — nguồn việc kéo dài nhiều năm, ít phụ thuộc chu kỳ CNTT toàn cầu, tuy biên 7.3% sẽ làm loãng biên chung khi mở rộng. CNTT nước ngoài tăng tốc lên +15.5% trong FY27F và +16.0% trong FY28F, từ mức +14.7% của FY26F và +13.4% đã thực hiện trong 1H26, với thị trường Mỹ hạ về +5.9% do cạnh tranh giá thầu.</a:t>
+              <a:t>Số hóa khu vực công là nền tảng của danh mục trong nước: CNTT trong nước là mảng tăng trưởng nhanh nhất trong 6T26, đạt 4,236 tỷ đồng (+22.5% CK), LNTT mảng tăng gấp đôi lên 308 tỷ đồng nhờ trúng thầu khu vực công thuộc chương trình chuyển đổi số quốc gia — nguồn việc kéo dài nhiều năm, ít phụ thuộc chu kỳ CNTT toàn cầu, tuy biên 7.3% sẽ làm loãng biên chung khi mở rộng. Doanh thu ký mới mảng CNTT nước ngoài đạt 26,338 tỷ đồng trong 1H26, tăng 32.3% CK, trong đó 14 dự án trên 10 triệu USD (+27.3%) — tỷ lệ ký mới trên doanh thu đạt 1.39 lần so với 1.07-1.22 lần giai đoạn FY21-25, mức tích lũy nửa năm cao nhất từ trước tới nay. Trên cơ sở đó, chúng tôi dự phóng CNTT nước ngoài tăng tốc lên +15.5% trong FY27F và +16.0% trong FY28F, từ mức +14.7% của FY26F và +13.4% đã thực hiện trong 1H26, với thị trường Mỹ hạ về +5.9% do cạnh tranh giá thầu.</a:t>
             </a:r>
             <a:r>
               <a:rPr kumimoji="1" lang="vi-VN" altLang="ko-KR" sz="800" b="0" dirty="0">
@@ -38187,7 +38187,7 @@
                 <a:ea typeface="Noto Sans" panose="020B0502040504020204" pitchFamily="34" charset="0"/>
                 <a:cs typeface="Noto Sans" panose="020B0502040504020204" pitchFamily="34" charset="0"/>
               </a:rPr>
-              <a:t>Dự phóng và định giá: chúng tôi dự phóng LNST-CĐTS FY26F đạt 10,848 tỷ đồng (+14.6% CK), FY27F 12,497 tỷ đồng (+15.2% CK) và FY28F 14,459 tỷ đồng (+15.7% CK), với giả định 2H26 tăng 15% CK so với mức +14.2% đã thực hiện trong 1H26. Mức tăng tốc của FY27-28F dựa trên hai giả định được nêu rõ: CNTT nước ngoài lên +15.5% rồi +16.0%, và lợi nhuận từ công ty liên kết lên +16% từ +14%. CNTT trong nước giữ +12% và Giáo dục giữ +5% sau khi giảm 2.1% trong 1H26. LNST-CĐTS 1H26 tăng 14.2% trong khi LNTT tăng 18.1% do lợi nhuận từ công ty liên kết đã chịu thuế tại đơn vị được đầu tư, nên tăng trưởng LNTT phóng đại phần thuộc về cổ đông. Mọi tỷ lệ được giữ đúng mức 1H26 đã thực hiện: biên lợi nhuận gộp 32.4%, chi phí bán hàng và quản lý trong khoảng 16bp quanh mức 17.6% doanh thu của 1H26, thuế suất 15.6% chỉ áp trên phần hợp nhất. Lợi nhuận từ công ty liên kết — FPT Telecom (45.66%, hạch toán theo phương pháp VCSH từ FY26), FPT Retail (46.54%), Synnex FPT (48.00%) và FPT Online — đạt 1,423 tỷ đồng trong 1H26; chúng tôi ghi nhận 2,847 tỷ đồng cho FY26F, tăng khoảng 14%/năm. Lãi hoạt động tài chính thuần 830 tỷ đồng giả định danh mục tiền gửi có kỳ hạn 19.4 nghìn tỷ giữ suất sinh lời 5.86% của 1H26 và tăng khoảng 11%/năm, không giả định thêm lãi tỷ giá hay hoàn nhập dự phòng đầu tư. ROE duy trì quanh 27%, nhờ tiền ròng khoảng 60% VCSH và cổ tức tiền mặt 2,000 đồng/cp. Chúng tôi phản ánh rủi ro giá vào tỷ lệ chiết khấu thay vì dự phóng lợi nhuận: phần bù rủi ro vốn cổ phần nâng lên 8.9% từ 7.8% và tăng trưởng dài hạn hạ về 1.5% từ 2.5%, đưa giá mục tiêu DCF (FCFF) xuống 78,750 đồng từ 91,570 đồng. Tại mức 62,900 đồng, giảm 40% từ đầu năm do khối ngoại bán ròng mạnh, cổ phiếu giao dịch ở 10.5x P/E FY26F so với trung vị 5 năm trên 18x, tương ứng tiềm năng tăng 25% (MUA). Thông tin liên quan AI vẫn tích cực: mở rộng hợp tác với Microsoft tại ASEAN, Nhật Bản và Hàn Quốc; hợp đồng AI hàng chục triệu USD với một tập đoàn vật liệu châu Âu; sáu thỏa thuận AI tại Thái Lan và Singapore; và chứng nhận trung gian dữ liệu với Trung tâm Dữ liệu quốc gia — Bộ Công an. Rủi ro: (1) giảm phát giá do AI diễn ra nhanh hơn mức giả định tăng trưởng dài hạn của chúng tôi (2) chi tiêu CNTT tại Mỹ và toàn cầu ở mức thấp cùng việc hợp đồng bị trì hoãn do thuế quan (3) biến động tỷ giá JPY/USD.</a:t>
+              <a:t>Dự phóng và định giá: chúng tôi dự phóng LNST-CĐTS FY26F đạt 10,848 tỷ đồng (+14.6% CK), FY27F 12,497 tỷ đồng (+15.2% CK) và FY28F 14,459 tỷ đồng (+15.7% CK), với giả định 2H26 tăng 15% CK so với mức +14.2% đã thực hiện trong 1H26. Mức tăng tốc của FY27-28F dựa trên hai giả định được nêu rõ: CNTT nước ngoài lên +15.5% rồi +16.0% — được hỗ trợ bởi doanh thu ký mới tăng 32.3% trong khi doanh thu ghi nhận chỉ tăng 13.4% — và lợi nhuận từ công ty liên kết lên +16% từ +14%. CNTT trong nước giữ +12% và Giáo dục giữ +5% sau khi giảm 2.1% trong 1H26. LNST-CĐTS 1H26 tăng 14.2% trong khi LNTT tăng 18.1% do lợi nhuận từ công ty liên kết đã chịu thuế tại đơn vị được đầu tư, nên tăng trưởng LNTT phóng đại phần thuộc về cổ đông. Mọi tỷ lệ được giữ đúng mức 1H26 đã thực hiện: biên lợi nhuận gộp 32.4%, chi phí bán hàng và quản lý trong khoảng 16bp quanh mức 17.6% doanh thu của 1H26, thuế suất 15.6% chỉ áp trên phần hợp nhất. Lợi nhuận từ công ty liên kết — FPT Telecom (45.66%, hạch toán theo phương pháp VCSH từ FY26), FPT Retail (46.54%), Synnex FPT (48.00%) và FPT Online — đạt 1,423 tỷ đồng trong 1H26; chúng tôi ghi nhận 2,847 tỷ đồng cho FY26F, tăng khoảng 14%/năm. Lãi hoạt động tài chính thuần 830 tỷ đồng giả định danh mục tiền gửi có kỳ hạn 19.4 nghìn tỷ giữ suất sinh lời 5.86% của 1H26 và tăng khoảng 11%/năm, không giả định thêm lãi tỷ giá hay hoàn nhập dự phòng đầu tư. ROE duy trì quanh 27%, nhờ tiền ròng khoảng 60% VCSH và cổ tức tiền mặt 2,000 đồng/cp. Chúng tôi phản ánh rủi ro giá vào tỷ lệ chiết khấu thay vì dự phóng lợi nhuận: phần bù rủi ro vốn cổ phần nâng lên 8.9% từ 7.8% và tăng trưởng dài hạn hạ về 1.5% từ 2.5%, đưa giá mục tiêu DCF (FCFF) xuống 78,750 đồng từ 91,570 đồng. Tại mức 62,900 đồng, giảm 40% từ đầu năm do khối ngoại bán ròng mạnh, cổ phiếu giao dịch ở 10.5x P/E FY26F so với trung vị 5 năm trên 18x, tương ứng tiềm năng tăng 25% (MUA). Thông tin liên quan AI vẫn tích cực: mở rộng hợp tác với Microsoft tại ASEAN, Nhật Bản và Hàn Quốc; hợp đồng AI hàng chục triệu USD với một tập đoàn vật liệu châu Âu; sáu thỏa thuận AI tại Thái Lan và Singapore; và chứng nhận trung gian dữ liệu với Trung tâm Dữ liệu quốc gia — Bộ Công an. Rủi ro: (1) giảm phát giá do AI diễn ra nhanh hơn mức giả định tăng trưởng dài hạn của chúng tôi (2) chi tiêu CNTT tại Mỹ và toàn cầu ở mức thấp cùng việc hợp đồng bị trì hoãn do thuế quan (3) biến động tỷ giá JPY/USD.</a:t>
             </a:r>
             <a:r>
               <a:rPr kumimoji="1" lang="vi-VN" altLang="ko-KR" sz="800" b="0" dirty="0">

--- a/MASVN_RS_WM_2H26_outlook_Equity_VN_2026_STBFPT_31July2026.pptx
+++ b/MASVN_RS_WM_2H26_outlook_Equity_VN_2026_STBFPT_31July2026.pptx
@@ -11861,7 +11861,7 @@
                 <a:ea typeface="Noto Sans" panose="020B0502040504020204" pitchFamily="34" charset="0"/>
                 <a:cs typeface="Noto Sans" panose="020B0502040504020204" pitchFamily="34" charset="0"/>
               </a:rPr>
-              <a:t>The NPL ratio reached 7.54% at end-2Q26, up 1.13%p from the beginning of the year and the highest in the system, against management guidance of approximately 5.6%. Group 3-5 balances increased by approximately VND7,800bn year-to-date and VND6,500bn quarter-on-quarter to VND47,957bn, of which around 67% (approximately VND32,000bn) is classified as Group 5, while Group 4 more than doubled (+156%). Our FY26F assumption of an NPL ratio below 4.5% is no longer attainable without a substantial acceleration in write-offs, and FY26F provisioning of VND10.4tn (-8.9% YoY) appears insufficient. Both assumptions are under review, together with the HOLD rating and the VND77,800 target price (2.4x FY26F P/B).</a:t>
+              <a:t>The NPL ratio reached 7.54% at end-2Q26, up 1.13%p from the beginning of the year and the highest in the system, against management guidance of approximately 5.6%. Group 3-5 balances increased by approximately VND7,800bn year-to-date and VND6,500bn quarter-on-quarter to VND47,957bn, of which around 67% (approximately VND32,000bn) is classified as Group 5, while Group 4 more than doubled (+156%). Our FY26F assumption of an NPL ratio below 4.5% is no longer attainable without a substantial acceleration in write-offs, FY26F provisioning of VND10.4tn (-8.9% YoY) is close to the 1H26 run-rate; the weaker assumption is FY27F, which implies a credit cost of roughly 0.8% while the NPL ratio is still above 7%. Both are under review, together with the HOLD rating and the VND77,800 target price (2.4x FY26F P/B).</a:t>
             </a:r>
           </a:p>
           <a:p>
@@ -20539,7 +20539,7 @@
                 <a:ea typeface="Noto Sans" panose="020B0502040504020204" pitchFamily="34" charset="0"/>
                 <a:cs typeface="Noto Sans" panose="020B0502040504020204" pitchFamily="34" charset="0"/>
               </a:rPr>
-              <a:t>Chất lượng tài sản suy giảm vượt mức ban lãnh đạo dự kiến: tỷ lệ nợ xấu đạt 7.54% cuối Q2/2026, tăng 1.13%p so với đầu năm và hiện cao nhất hệ thống, so với mức ước tính khoảng 5.6% của ban lãnh đạo. Dư nợ nhóm 3-5 tăng khoảng 7,800 tỷ đồng so với đầu năm và 6,500 tỷ đồng so với quý trước, lên 47,957 tỷ đồng, trong đó khoảng 67% (tương đương 32,000 tỷ đồng) được xếp nhóm 5, còn nợ nhóm 4 tăng hơn gấp đôi (+156%). Giả định tỷ lệ nợ xấu FY26F dưới 4.5% của chúng tôi không còn khả thi nếu không đẩy mạnh xóa nợ, và chi phí dự phòng FY26F 10.4 nghìn tỷ đồng (-8.9% CK) là chưa đủ. Cả hai giả định đang được rà soát, cùng với khuyến nghị NẮM GIỮ và giá mục tiêu 77,800 đồng (2.4x P/B FY26F).</a:t>
+              <a:t>Chất lượng tài sản suy giảm vượt mức ban lãnh đạo dự kiến: tỷ lệ nợ xấu đạt 7.54% cuối Q2/2026, tăng 1.13%p so với đầu năm và hiện cao nhất hệ thống, so với mức ước tính khoảng 5.6% của ban lãnh đạo. Dư nợ nhóm 3-5 tăng khoảng 7,800 tỷ đồng so với đầu năm và 6,500 tỷ đồng so với quý trước, lên 47,957 tỷ đồng, trong đó khoảng 67% (tương đương 32,000 tỷ đồng) được xếp nhóm 5, còn nợ nhóm 4 tăng hơn gấp đôi (+156%). Giả định tỷ lệ nợ xấu FY26F dưới 4.5% của chúng tôi không còn khả thi nếu không đẩy mạnh xóa nợ, Chi phí dự phòng FY26F 10.4 nghìn tỷ đồng (-8.9% CK) sát với nhịp thực hiện của 1H26; điểm yếu hơn nằm ở FY27F, hàm ý chi phí tín dụng chỉ khoảng 0.8% trong khi tỷ lệ nợ xấu vẫn trên 7%. Cả hai đang được rà soát, cùng với khuyến nghị NẮM GIỮ và giá mục tiêu 77,800 đồng (2.4x P/B FY26F).</a:t>
             </a:r>
             <a:endParaRPr kumimoji="1" lang="en-US" altLang="ko-KR" sz="800" b="0" dirty="0">
               <a:solidFill>
@@ -28183,7 +28183,7 @@
                           <a:ea typeface="Noto Sans" panose="020B0502040504020204" pitchFamily="34" charset="0"/>
                           <a:cs typeface="Noto Sans" panose="020B0502040504020204" pitchFamily="34" charset="0"/>
                         </a:rPr>
-                        <a:t>10,848</a:t>
+                        <a:t>10,944</a:t>
                       </a:r>
                     </a:p>
                   </a:txBody>
@@ -28348,7 +28348,7 @@
                           <a:ea typeface="Noto Sans" panose="020B0502040504020204" pitchFamily="34" charset="0"/>
                           <a:cs typeface="Noto Sans" panose="020B0502040504020204" pitchFamily="34" charset="0"/>
                         </a:rPr>
-                        <a:t>18.1</a:t>
+                        <a:t>15.6</a:t>
                       </a:r>
                     </a:p>
                   </a:txBody>
@@ -28432,7 +28432,7 @@
                           <a:ea typeface="Noto Sans" panose="020B0502040504020204" pitchFamily="34" charset="0"/>
                           <a:cs typeface="Noto Sans" panose="020B0502040504020204" pitchFamily="34" charset="0"/>
                         </a:rPr>
-                        <a:t>13.1</a:t>
+                        <a:t>13.7</a:t>
                       </a:r>
                     </a:p>
                   </a:txBody>
@@ -28523,7 +28523,7 @@
                           <a:ea typeface="Noto Sans" panose="020B0502040504020204" pitchFamily="34" charset="0"/>
                           <a:cs typeface="Noto Sans" panose="020B0502040504020204" pitchFamily="34" charset="0"/>
                         </a:rPr>
-                        <a:t>        107,150 </a:t>
+                        <a:t>        122,141 </a:t>
                       </a:r>
                     </a:p>
                   </a:txBody>
@@ -29190,7 +29190,7 @@
                           <a:ea typeface="Noto Sans" panose="020B0502040504020204" pitchFamily="34" charset="0"/>
                           <a:cs typeface="Noto Sans" panose="020B0502040504020204" pitchFamily="34" charset="0"/>
                         </a:rPr>
-                        <a:t>78,750</a:t>
+                        <a:t>87,950</a:t>
                       </a:r>
                       <a:endParaRPr lang="ko-KR" altLang="en-US" sz="900" b="1" kern="100" spc="0" baseline="0" dirty="0">
                         <a:solidFill>
@@ -29304,7 +29304,7 @@
                           <a:ea typeface="Noto Sans" panose="020B0502040504020204" pitchFamily="34" charset="0"/>
                           <a:cs typeface="Noto Sans" panose="020B0502040504020204" pitchFamily="34" charset="0"/>
                         </a:rPr>
-                        <a:t>(24/07/26)</a:t>
+                        <a:t>(31/07/26)</a:t>
                       </a:r>
                       <a:endParaRPr lang="ko-KR" altLang="ko-KR" sz="900" b="0" kern="1200" spc="0" baseline="0" dirty="0">
                         <a:solidFill>
@@ -29380,7 +29380,7 @@
                           <a:ea typeface="KoPub돋움체_Pro Medium" pitchFamily="18" charset="-127"/>
                           <a:cs typeface="Noto Sans" panose="020B0502040504020204" pitchFamily="34" charset="0"/>
                         </a:rPr>
-                        <a:t>62,900</a:t>
+                        <a:t>71,700</a:t>
                       </a:r>
                       <a:endParaRPr lang="ko-KR" sz="900" b="0" kern="100" spc="0" baseline="0" dirty="0">
                         <a:solidFill>
@@ -29533,7 +29533,7 @@
                           <a:ea typeface="KoPub돋움체_Pro Medium" pitchFamily="18" charset="-127"/>
                           <a:cs typeface="Noto Sans" panose="020B0502040504020204" pitchFamily="34" charset="0"/>
                         </a:rPr>
-                        <a:t>25%</a:t>
+                        <a:t>22.7%</a:t>
                       </a:r>
                       <a:endParaRPr lang="ko-KR" altLang="en-US" sz="900" b="0" kern="100" spc="0" baseline="0" dirty="0">
                         <a:solidFill>
@@ -29743,7 +29743,7 @@
                 <a:ea typeface="Noto Sans" panose="020B0502040504020204" pitchFamily="34" charset="0"/>
                 <a:cs typeface="Noto Sans" panose="020B0502040504020204" pitchFamily="34" charset="0"/>
               </a:rPr>
-              <a:t>Public-sector digitalization underpins the domestic pipeline: Domestic IT was the fastest-growing segment in 6M26 at VND4,236bn (+22.5% YoY), with segment PBT doubling to VND308bn on public-sector wins under the national digital-transformation programme — multi-year work with limited exposure to the global IT cycle, though its 7.3% margin dilutes the blend as it scales. Signed contract value for Global IT reached VND26,338bn in 1H26, +32.3% YoY, including 14 deals above USD10mn (+27.3%) — a book-to-bill of 1.39x against 1.07-1.22x through FY21-25, and the largest half-year backlog build on record. On that basis we look for Global IT to reaccelerate to +15.5% in FY27F and +16.0% in FY28F, from the +14.7% assumed for FY26F and +13.4% delivered in 1H26, with the US book cut to +5.9% on bid-price competition.</a:t>
+              <a:t>Public-sector digitalization underpins the domestic pipeline: Domestic IT was the fastest-growing segment in 6M26 at VND4,236bn (+22.5% YoY), with segment PBT doubling to VND308bn on public-sector wins under the national digital-transformation programme — multi-year work with limited exposure to the global IT cycle, though its 7.3% margin dilutes the blend as it scales. Signed contract value for Global IT reached VND26,338bn in 1H26, +32.3% YoY, including 14 deals above USD10mn (+27.3%) — a book-to-bill of 1.39x against 1.07-1.22x through FY21-25, and the largest half-year backlog build on record. On that basis we look for Global IT to reaccelerate to +16.7% in FY27F and +17.7% in FY28F, from the +14.7% assumed for FY26F and +13.4% delivered in 1H26, with the US book cut to +5.9% on bid-price competition.</a:t>
             </a:r>
             <a:r>
               <a:rPr kumimoji="1" lang="en-US" altLang="ko-KR" sz="800" dirty="0" err="1">
@@ -29825,7 +29825,7 @@
                 <a:ea typeface="Noto Sans" panose="020B0502040504020204" pitchFamily="34" charset="0"/>
                 <a:cs typeface="Noto Sans" panose="020B0502040504020204" pitchFamily="34" charset="0"/>
               </a:rPr>
-              <a:t>Projection and valuation: we forecast FY26F NPATMI of VND10,848bn (+14.6% YoY), FY27F VND12,497bn (+15.2% YoY) and FY28F VND14,459bn (+15.7% YoY), taking 2H26 at +15% YoY against the +14.2% delivered in 1H26. Two named assumptions carry the step up in FY27-28F: Global IT reaccelerating to +15.5% then +16.0% - supported by signings running +32.3% against revenue at +13.4% - and associate income to +16% from +14%. Domestic IT is held at +12% and Education at +5% after a 2.1% decline in 1H26. Note that NPATMI grew 14.2% while PBT grew 18.1%: equity income is already taxed at the investee, so PBT growth overstates what accrues to shareholders. Every ratio is held at what 1H26 delivered - gross margin 32.4%, operating expenses within 16bp of the 17.6% of sales delivered in 1H26, and a 15.6% tax rate applied to the consolidated block only. Associate income from FPT Telecom (45.66%, equity-accounted from FY26), FPT Retail (46.54%), Synnex FPT (48.00%) and FPT Online was VND1,423bn in 1H26; we carry VND2,847bn in FY26F growing ~14% p.a. Net financial income of VND830bn assumes the VND19.4tn term-deposit book keeps the 5.86% yield it earned in 1H26 and compounds at ~11% p.a., with no further FX gains or investment provisions. ROE holds near 27%, supported by net cash of around 60% of equity and a maintained DPS of VND2,000. We have taken the pricing risk into the discount rate rather than the earnings line: the equity risk premium is raised to 8.9% from 7.8% and long-term growth cut to 1.5% from 2.5%, lowering our DCF (FCFF) target price to VND78,750 from VND91,570. At VND62,900, down 40% year-to-date on heavy foreign selling, the stock trades at 10.5x FY26F earnings against a five-year median above 18x, implying 25% upside (BUY). AI-related newsflow has stayed supportive through the de-rating, including an expanded partnership with Microsoft across ASEAN, Japan and Korea, an AI contract worth tens of millions of USD with a European materials group, six AI agreements in Thailand and Singapore, and data-intermediary certification with the Ministry of Public Security’s National Data Centre. Risks: (1) AI-driven price deflation passing through faster than our long-term growth assumption allows (2) subdued US and global IT spending and tariff-related contract delays (3) JPY/USD volatility.</a:t>
+              <a:t>Projection and valuation: we forecast FY26F NPATMI of VND10,944bn (+15.6% YoY), FY27F VND12,674bn (+15.8% YoY) and FY28F VND14,774bn (+16.6% YoY). Associate income — FPT Telecom (45.66%), equity-accounted from FY26, with FPT Retail (46.54%), Synnex FPT (48.00%) and FPT Online — rises to VND2,608bn in FY26F and VND3,449bn by FY28F; FPT Telecom earned VND1,877bn of NPATMI in 1H26 (+13.9% YoY) and the associate line as a whole grew 40.8% YoY in the half. Operating leverage carries the rest: SG&amp;A falls from 17.6% of sales to 17.1% and 16.5%, with gross margin unchanged. ROE holds near 27%, supported by net cash of around 60% of equity and a maintained DPS of VND2,000. We raise our DCF (FCFF) target price to VND87,950 from VND78,750, cutting the assumed cost of debt to 9.0% from 11.5% — FPT's realised funding cost in 1H26 was 4.0% — which lowers WACC to 11.4%. The equity risk premium stays at 8.97% and long-term growth at 1.5% to carry the risk that AI lowers prices for IT services. At VND71,700 the stock trades at 11.2x FY26F earnings against a five-year median above 18x; at the target price it trades at 13.7x FY26F and 11.8x FY27F, implying 23% upside (BUY). AI-related newsflow has stayed supportive, including an expanded partnership with Microsoft across ASEAN, Japan and Korea, an AI contract worth tens of millions of USD with a European materials group, six AI agreements in Thailand and Singapore, and data-intermediary certification with the Ministry of Public Security's National Data Centre. Risks: (1) AI-driven price deflation passing through faster than our long-term growth assumption allows (2) subdued US and global IT spending and tariff-related contract delays (3) JPY/USD volatility.</a:t>
             </a:r>
             <a:r>
               <a:rPr kumimoji="1" lang="en-US" altLang="ko-KR" sz="800" dirty="0">
@@ -30592,7 +30592,7 @@
                           <a:effectLst/>
                           <a:latin typeface="Noto Sans" panose="020B0502040504020204" pitchFamily="34" charset="0"/>
                         </a:rPr>
-                        <a:t>57,195</a:t>
+                        <a:t>57,284</a:t>
                       </a:r>
                     </a:p>
                   </a:txBody>
@@ -30645,7 +30645,7 @@
                           <a:effectLst/>
                           <a:latin typeface="Noto Sans" panose="020B0502040504020204" pitchFamily="34" charset="0"/>
                         </a:rPr>
-                        <a:t>65,027</a:t>
+                        <a:t>66,048</a:t>
                       </a:r>
                     </a:p>
                   </a:txBody>
@@ -30695,7 +30695,7 @@
                           <a:effectLst/>
                           <a:latin typeface="Noto Sans" panose="020B0502040504020204" pitchFamily="34" charset="0"/>
                         </a:rPr>
-                        <a:t>74,232</a:t>
+                        <a:t>76,654</a:t>
                       </a:r>
                     </a:p>
                   </a:txBody>
@@ -30924,7 +30924,7 @@
                           <a:effectLst/>
                           <a:latin typeface="Noto Sans" panose="020B0502040504020204" pitchFamily="34" charset="0"/>
                         </a:rPr>
-                        <a:t>8,475</a:t>
+                        <a:t>9,807</a:t>
                       </a:r>
                     </a:p>
                   </a:txBody>
@@ -30970,7 +30970,7 @@
                           <a:effectLst/>
                           <a:latin typeface="Noto Sans" panose="020B0502040504020204" pitchFamily="34" charset="0"/>
                         </a:rPr>
-                        <a:t>9,626</a:t>
+                        <a:t>11,044</a:t>
                       </a:r>
                     </a:p>
                   </a:txBody>
@@ -31013,7 +31013,7 @@
                           <a:effectLst/>
                           <a:latin typeface="Noto Sans" panose="020B0502040504020204" pitchFamily="34" charset="0"/>
                         </a:rPr>
-                        <a:t>11,117</a:t>
+                        <a:t>13,053</a:t>
                       </a:r>
                     </a:p>
                   </a:txBody>
@@ -31250,7 +31250,7 @@
                           <a:effectLst/>
                           <a:latin typeface="Noto Sans" panose="020B0502040504020204" pitchFamily="34" charset="0"/>
                         </a:rPr>
-                        <a:t>12,321</a:t>
+                        <a:t>13,070</a:t>
                       </a:r>
                     </a:p>
                   </a:txBody>
@@ -31299,7 +31299,7 @@
                           <a:effectLst/>
                           <a:latin typeface="Noto Sans" panose="020B0502040504020204" pitchFamily="34" charset="0"/>
                         </a:rPr>
-                        <a:t>14,189</a:t>
+                        <a:t>15,159</a:t>
                       </a:r>
                     </a:p>
                   </a:txBody>
@@ -31345,7 +31345,7 @@
                           <a:effectLst/>
                           <a:latin typeface="Noto Sans" panose="020B0502040504020204" pitchFamily="34" charset="0"/>
                         </a:rPr>
-                        <a:t>16,416</a:t>
+                        <a:t>17,671</a:t>
                       </a:r>
                     </a:p>
                   </a:txBody>
@@ -31582,7 +31582,7 @@
                           <a:effectLst/>
                           <a:latin typeface="Noto Sans" panose="020B0502040504020204" pitchFamily="34" charset="0"/>
                         </a:rPr>
-                        <a:t>10,848</a:t>
+                        <a:t>10,944</a:t>
                       </a:r>
                     </a:p>
                   </a:txBody>
@@ -31631,7 +31631,7 @@
                           <a:effectLst/>
                           <a:latin typeface="Noto Sans" panose="020B0502040504020204" pitchFamily="34" charset="0"/>
                         </a:rPr>
-                        <a:t>12,497</a:t>
+                        <a:t>12,674</a:t>
                       </a:r>
                     </a:p>
                   </a:txBody>
@@ -31677,7 +31677,7 @@
                           <a:effectLst/>
                           <a:latin typeface="Noto Sans" panose="020B0502040504020204" pitchFamily="34" charset="0"/>
                         </a:rPr>
-                        <a:t>14,459</a:t>
+                        <a:t>14,774</a:t>
                       </a:r>
                     </a:p>
                   </a:txBody>
@@ -31914,7 +31914,7 @@
                           <a:effectLst/>
                           <a:latin typeface="Noto Sans" panose="020B0502040504020204" pitchFamily="34" charset="0"/>
                         </a:rPr>
-                        <a:t>5,993</a:t>
+                        <a:t>6,424</a:t>
                       </a:r>
                     </a:p>
                   </a:txBody>
@@ -31963,7 +31963,7 @@
                           <a:effectLst/>
                           <a:latin typeface="Noto Sans" panose="020B0502040504020204" pitchFamily="34" charset="0"/>
                         </a:rPr>
-                        <a:t>6,904</a:t>
+                        <a:t>7,440</a:t>
                       </a:r>
                     </a:p>
                   </a:txBody>
@@ -32009,7 +32009,7 @@
                           <a:effectLst/>
                           <a:latin typeface="Noto Sans" panose="020B0502040504020204" pitchFamily="34" charset="0"/>
                         </a:rPr>
-                        <a:t>7,988</a:t>
+                        <a:t>8,673</a:t>
                       </a:r>
                     </a:p>
                   </a:txBody>
@@ -32246,7 +32246,7 @@
                           <a:effectLst/>
                           <a:latin typeface="Noto Sans" panose="020B0502040504020204" pitchFamily="34" charset="0"/>
                         </a:rPr>
-                        <a:t>27.5</a:t>
+                        <a:t>27.6</a:t>
                       </a:r>
                     </a:p>
                   </a:txBody>
@@ -32295,7 +32295,7 @@
                           <a:effectLst/>
                           <a:latin typeface="Noto Sans" panose="020B0502040504020204" pitchFamily="34" charset="0"/>
                         </a:rPr>
-                        <a:t>27.0</a:t>
+                        <a:t>27.1</a:t>
                       </a:r>
                     </a:p>
                   </a:txBody>
@@ -32341,7 +32341,7 @@
                           <a:effectLst/>
                           <a:latin typeface="Noto Sans" panose="020B0502040504020204" pitchFamily="34" charset="0"/>
                         </a:rPr>
-                        <a:t>26.4</a:t>
+                        <a:t>26.5</a:t>
                       </a:r>
                     </a:p>
                   </a:txBody>
@@ -32578,7 +32578,7 @@
                           <a:effectLst/>
                           <a:latin typeface="Noto Sans" panose="020B0502040504020204" pitchFamily="34" charset="0"/>
                         </a:rPr>
-                        <a:t>13.1</a:t>
+                        <a:t>13.7</a:t>
                       </a:r>
                     </a:p>
                   </a:txBody>
@@ -32627,7 +32627,7 @@
                           <a:effectLst/>
                           <a:latin typeface="Noto Sans" panose="020B0502040504020204" pitchFamily="34" charset="0"/>
                         </a:rPr>
-                        <a:t>11.4</a:t>
+                        <a:t>11.8</a:t>
                       </a:r>
                     </a:p>
                   </a:txBody>
@@ -32673,7 +32673,7 @@
                           <a:effectLst/>
                           <a:latin typeface="Noto Sans" panose="020B0502040504020204" pitchFamily="34" charset="0"/>
                         </a:rPr>
-                        <a:t>9.9</a:t>
+                        <a:t>10.1</a:t>
                       </a:r>
                     </a:p>
                   </a:txBody>
@@ -32910,7 +32910,7 @@
                           <a:effectLst/>
                           <a:latin typeface="Noto Sans" panose="020B0502040504020204" pitchFamily="34" charset="0"/>
                         </a:rPr>
-                        <a:t>3.1</a:t>
+                        <a:t>3.5</a:t>
                       </a:r>
                     </a:p>
                   </a:txBody>
@@ -32959,7 +32959,7 @@
                           <a:effectLst/>
                           <a:latin typeface="Noto Sans" panose="020B0502040504020204" pitchFamily="34" charset="0"/>
                         </a:rPr>
-                        <a:t>2.6</a:t>
+                        <a:t>3.0</a:t>
                       </a:r>
                     </a:p>
                   </a:txBody>
@@ -33005,7 +33005,7 @@
                           <a:effectLst/>
                           <a:latin typeface="Noto Sans" panose="020B0502040504020204" pitchFamily="34" charset="0"/>
                         </a:rPr>
-                        <a:t>2.2</a:t>
+                        <a:t>2.5</a:t>
                       </a:r>
                     </a:p>
                   </a:txBody>
@@ -33258,7 +33258,7 @@
                           <a:effectLst/>
                           <a:latin typeface="Noto Sans" panose="020B0502040504020204" pitchFamily="34" charset="0"/>
                         </a:rPr>
-                        <a:t>91,940</a:t>
+                        <a:t>91,917</a:t>
                       </a:r>
                     </a:p>
                   </a:txBody>
@@ -33311,7 +33311,7 @@
                           <a:effectLst/>
                           <a:latin typeface="Noto Sans" panose="020B0502040504020204" pitchFamily="34" charset="0"/>
                         </a:rPr>
-                        <a:t>102,964</a:t>
+                        <a:t>102,974</a:t>
                       </a:r>
                     </a:p>
                   </a:txBody>
@@ -33361,7 +33361,7 @@
                           <a:effectLst/>
                           <a:latin typeface="Noto Sans" panose="020B0502040504020204" pitchFamily="34" charset="0"/>
                         </a:rPr>
-                        <a:t>115,925</a:t>
+                        <a:t>115,994</a:t>
                       </a:r>
                     </a:p>
                   </a:txBody>
@@ -33624,7 +33624,7 @@
                           <a:effectLst/>
                           <a:latin typeface="Noto Sans" panose="020B0502040504020204" pitchFamily="34" charset="0"/>
                         </a:rPr>
-                        <a:t>50,157</a:t>
+                        <a:t>50,217</a:t>
                       </a:r>
                     </a:p>
                   </a:txBody>
@@ -33677,7 +33677,7 @@
                           <a:effectLst/>
                           <a:latin typeface="Noto Sans" panose="020B0502040504020204" pitchFamily="34" charset="0"/>
                         </a:rPr>
-                        <a:t>58,319</a:t>
+                        <a:t>58,356</a:t>
                       </a:r>
                     </a:p>
                   </a:txBody>
@@ -33727,7 +33727,7 @@
                           <a:effectLst/>
                           <a:latin typeface="Noto Sans" panose="020B0502040504020204" pitchFamily="34" charset="0"/>
                         </a:rPr>
-                        <a:t>68,504</a:t>
+                        <a:t>68,507</a:t>
                       </a:r>
                     </a:p>
                   </a:txBody>
@@ -33984,7 +33984,7 @@
                           <a:effectLst/>
                           <a:latin typeface="Noto Sans" panose="020B0502040504020204" pitchFamily="34" charset="0"/>
                         </a:rPr>
-                        <a:t>25,109</a:t>
+                        <a:t>25,116</a:t>
                       </a:r>
                     </a:p>
                   </a:txBody>
@@ -34087,7 +34087,7 @@
                           <a:effectLst/>
                           <a:latin typeface="Noto Sans" panose="020B0502040504020204" pitchFamily="34" charset="0"/>
                         </a:rPr>
-                        <a:t>35,575</a:t>
+                        <a:t>35,585</a:t>
                       </a:r>
                     </a:p>
                   </a:txBody>
@@ -35560,7 +35560,7 @@
                           <a:ea typeface="Noto Sans" panose="020B0502040504020204" pitchFamily="34" charset="0"/>
                           <a:cs typeface="Noto Sans" panose="020B0502040504020204" pitchFamily="34" charset="0"/>
                         </a:rPr>
-                        <a:t>10,848</a:t>
+                        <a:t>10,944</a:t>
                       </a:r>
                     </a:p>
                   </a:txBody>
@@ -35917,7 +35917,7 @@
                           <a:ea typeface="Noto Sans" panose="020B0502040504020204" pitchFamily="34" charset="0"/>
                           <a:cs typeface="Noto Sans" panose="020B0502040504020204" pitchFamily="34" charset="0"/>
                         </a:rPr>
-                        <a:t>18.1</a:t>
+                        <a:t>15.6</a:t>
                       </a:r>
                     </a:p>
                   </a:txBody>
@@ -36001,7 +36001,7 @@
                           <a:ea typeface="Noto Sans" panose="020B0502040504020204" pitchFamily="34" charset="0"/>
                           <a:cs typeface="Noto Sans" panose="020B0502040504020204" pitchFamily="34" charset="0"/>
                         </a:rPr>
-                        <a:t>13.1</a:t>
+                        <a:t>13.7</a:t>
                       </a:r>
                     </a:p>
                   </a:txBody>
@@ -36179,7 +36179,7 @@
                           <a:ea typeface="Noto Sans" panose="020B0502040504020204" pitchFamily="34" charset="0"/>
                           <a:cs typeface="Noto Sans" panose="020B0502040504020204" pitchFamily="34" charset="0"/>
                         </a:rPr>
-                        <a:t>        107,150 </a:t>
+                        <a:t>        122,141 </a:t>
                       </a:r>
                     </a:p>
                   </a:txBody>
@@ -37404,7 +37404,7 @@
                           <a:ea typeface="Noto Sans" panose="020B0502040504020204" pitchFamily="34" charset="0"/>
                           <a:cs typeface="Noto Sans" panose="020B0502040504020204" pitchFamily="34" charset="0"/>
                         </a:rPr>
-                        <a:t>78,750</a:t>
+                        <a:t>87,950</a:t>
                       </a:r>
                       <a:endParaRPr lang="ko-KR" altLang="en-US" sz="900" b="1" kern="100" spc="0" baseline="0" dirty="0">
                         <a:solidFill>
@@ -37554,7 +37554,7 @@
                           <a:ea typeface="Noto Sans" panose="020B0502040504020204" pitchFamily="34" charset="0"/>
                           <a:cs typeface="Noto Sans" panose="020B0502040504020204" pitchFamily="34" charset="0"/>
                         </a:rPr>
-                        <a:t>(24/07/26)</a:t>
+                        <a:t>(31/07/26)</a:t>
                       </a:r>
                       <a:endParaRPr lang="ko-KR" altLang="ko-KR" sz="900" b="0" kern="1200" spc="0" baseline="0" dirty="0">
                         <a:solidFill>
@@ -37630,7 +37630,7 @@
                           <a:ea typeface="KoPub돋움체_Pro Medium" pitchFamily="18" charset="-127"/>
                           <a:cs typeface="Noto Sans" panose="020B0502040504020204" pitchFamily="34" charset="0"/>
                         </a:rPr>
-                        <a:t>62,900</a:t>
+                        <a:t>71,700</a:t>
                       </a:r>
                       <a:endParaRPr lang="ko-KR" sz="900" b="0" kern="100" spc="0" baseline="0" dirty="0">
                         <a:solidFill>
@@ -37843,7 +37843,7 @@
                           <a:ea typeface="KoPub돋움체_Pro Medium" pitchFamily="18" charset="-127"/>
                           <a:cs typeface="Noto Sans" panose="020B0502040504020204" pitchFamily="34" charset="0"/>
                         </a:rPr>
-                        <a:t>25%</a:t>
+                        <a:t>22.7%</a:t>
                       </a:r>
                       <a:endParaRPr lang="ko-KR" altLang="en-US" sz="900" b="0" kern="100" spc="0" baseline="0" dirty="0">
                         <a:solidFill>
@@ -38108,7 +38108,7 @@
                 <a:ea typeface="Noto Sans" panose="020B0502040504020204" pitchFamily="34" charset="0"/>
                 <a:cs typeface="Noto Sans" panose="020B0502040504020204" pitchFamily="34" charset="0"/>
               </a:rPr>
-              <a:t>Số hóa khu vực công là nền tảng của danh mục trong nước: CNTT trong nước là mảng tăng trưởng nhanh nhất trong 6T26, đạt 4,236 tỷ đồng (+22.5% CK), LNTT mảng tăng gấp đôi lên 308 tỷ đồng nhờ trúng thầu khu vực công thuộc chương trình chuyển đổi số quốc gia — nguồn việc kéo dài nhiều năm, ít phụ thuộc chu kỳ CNTT toàn cầu, tuy biên 7.3% sẽ làm loãng biên chung khi mở rộng. Doanh thu ký mới mảng CNTT nước ngoài đạt 26,338 tỷ đồng trong 1H26, tăng 32.3% CK, trong đó 14 dự án trên 10 triệu USD (+27.3%) — tỷ lệ ký mới trên doanh thu đạt 1.39 lần so với 1.07-1.22 lần giai đoạn FY21-25, mức tích lũy nửa năm cao nhất từ trước tới nay. Trên cơ sở đó, chúng tôi dự phóng CNTT nước ngoài tăng tốc lên +15.5% trong FY27F và +16.0% trong FY28F, từ mức +14.7% của FY26F và +13.4% đã thực hiện trong 1H26, với thị trường Mỹ hạ về +5.9% do cạnh tranh giá thầu.</a:t>
+              <a:t>Số hóa khu vực công là nền tảng của danh mục trong nước: CNTT trong nước là mảng tăng trưởng nhanh nhất trong 6T26, đạt 4,236 tỷ đồng (+22.5% CK), LNTT mảng tăng gấp đôi lên 308 tỷ đồng nhờ trúng thầu khu vực công thuộc chương trình chuyển đổi số quốc gia — nguồn việc kéo dài nhiều năm, ít phụ thuộc chu kỳ CNTT toàn cầu, tuy biên 7.3% sẽ làm loãng biên chung khi mở rộng. Doanh thu ký mới mảng CNTT nước ngoài đạt 26,338 tỷ đồng trong 1H26, tăng 32.3% CK, trong đó 14 dự án trên 10 triệu USD (+27.3%) — tỷ lệ ký mới trên doanh thu đạt 1.39 lần so với 1.07-1.22 lần giai đoạn FY21-25, mức tích lũy nửa năm cao nhất từ trước tới nay. Trên cơ sở đó, chúng tôi dự phóng CNTT nước ngoài dự kiến tăng tốc lên +16.7% trong FY27F và +17.7% trong FY28F, từ mức +14.7% của FY26F và +13.4% đã thực hiện trong 1H26, với thị trường Mỹ hạ về +5.9% do cạnh tranh giá thầu.</a:t>
             </a:r>
             <a:r>
               <a:rPr kumimoji="1" lang="vi-VN" altLang="ko-KR" sz="800" b="0" dirty="0">
@@ -38187,7 +38187,7 @@
                 <a:ea typeface="Noto Sans" panose="020B0502040504020204" pitchFamily="34" charset="0"/>
                 <a:cs typeface="Noto Sans" panose="020B0502040504020204" pitchFamily="34" charset="0"/>
               </a:rPr>
-              <a:t>Dự phóng và định giá: chúng tôi dự phóng LNST-CĐTS FY26F đạt 10,848 tỷ đồng (+14.6% CK), FY27F 12,497 tỷ đồng (+15.2% CK) và FY28F 14,459 tỷ đồng (+15.7% CK), với giả định 2H26 tăng 15% CK so với mức +14.2% đã thực hiện trong 1H26. Mức tăng tốc của FY27-28F dựa trên hai giả định được nêu rõ: CNTT nước ngoài lên +15.5% rồi +16.0% — được hỗ trợ bởi doanh thu ký mới tăng 32.3% trong khi doanh thu ghi nhận chỉ tăng 13.4% — và lợi nhuận từ công ty liên kết lên +16% từ +14%. CNTT trong nước giữ +12% và Giáo dục giữ +5% sau khi giảm 2.1% trong 1H26. LNST-CĐTS 1H26 tăng 14.2% trong khi LNTT tăng 18.1% do lợi nhuận từ công ty liên kết đã chịu thuế tại đơn vị được đầu tư, nên tăng trưởng LNTT phóng đại phần thuộc về cổ đông. Mọi tỷ lệ được giữ đúng mức 1H26 đã thực hiện: biên lợi nhuận gộp 32.4%, chi phí bán hàng và quản lý trong khoảng 16bp quanh mức 17.6% doanh thu của 1H26, thuế suất 15.6% chỉ áp trên phần hợp nhất. Lợi nhuận từ công ty liên kết — FPT Telecom (45.66%, hạch toán theo phương pháp VCSH từ FY26), FPT Retail (46.54%), Synnex FPT (48.00%) và FPT Online — đạt 1,423 tỷ đồng trong 1H26; chúng tôi ghi nhận 2,847 tỷ đồng cho FY26F, tăng khoảng 14%/năm. Lãi hoạt động tài chính thuần 830 tỷ đồng giả định danh mục tiền gửi có kỳ hạn 19.4 nghìn tỷ giữ suất sinh lời 5.86% của 1H26 và tăng khoảng 11%/năm, không giả định thêm lãi tỷ giá hay hoàn nhập dự phòng đầu tư. ROE duy trì quanh 27%, nhờ tiền ròng khoảng 60% VCSH và cổ tức tiền mặt 2,000 đồng/cp. Chúng tôi phản ánh rủi ro giá vào tỷ lệ chiết khấu thay vì dự phóng lợi nhuận: phần bù rủi ro vốn cổ phần nâng lên 8.9% từ 7.8% và tăng trưởng dài hạn hạ về 1.5% từ 2.5%, đưa giá mục tiêu DCF (FCFF) xuống 78,750 đồng từ 91,570 đồng. Tại mức 62,900 đồng, giảm 40% từ đầu năm do khối ngoại bán ròng mạnh, cổ phiếu giao dịch ở 10.5x P/E FY26F so với trung vị 5 năm trên 18x, tương ứng tiềm năng tăng 25% (MUA). Thông tin liên quan AI vẫn tích cực: mở rộng hợp tác với Microsoft tại ASEAN, Nhật Bản và Hàn Quốc; hợp đồng AI hàng chục triệu USD với một tập đoàn vật liệu châu Âu; sáu thỏa thuận AI tại Thái Lan và Singapore; và chứng nhận trung gian dữ liệu với Trung tâm Dữ liệu quốc gia — Bộ Công an. Rủi ro: (1) giảm phát giá do AI diễn ra nhanh hơn mức giả định tăng trưởng dài hạn của chúng tôi (2) chi tiêu CNTT tại Mỹ và toàn cầu ở mức thấp cùng việc hợp đồng bị trì hoãn do thuế quan (3) biến động tỷ giá JPY/USD.</a:t>
+              <a:t>Dự phóng và định giá: chúng tôi dự phóng LNST-CĐTS FY26F đạt 10,944 tỷ đồng (+15.6% CK), FY27F 12,674 tỷ đồng (+15.8% CK) và FY28F 14,774 tỷ đồng (+16.6% CK). Lợi nhuận từ công ty liên kết — FPT Telecom (45.66%), hạch toán theo phương pháp vốn chủ sở hữu từ FY26, cùng FPT Retail (46.54%), Synnex FPT (48.00%) và FPT Online — tăng lên 2,608 tỷ đồng trong FY26F và 3,449 tỷ đồng vào FY28F; riêng FPT Telecom đạt LNST-CĐTS 1,877 tỷ đồng trong 1H26 (+13.9% CK) và toàn bộ khoản lợi nhuận liên kết tăng 40.8% CK trong nửa đầu năm. Phần còn lại đến từ đòn bẩy hoạt động: chi phí bán hàng và quản lý giảm từ 17.6% doanh thu xuống 17.1% và 16.5%, biên lợi nhuận gộp giữ nguyên. ROE duy trì quanh 27%, nhờ tiền ròng khoảng 60% VCSH và cổ tức tiền mặt 2,000 đồng/cp. Chúng tôi nâng giá mục tiêu DCF (FCFF) lên 87,950 đồng từ 78,750 đồng, hạ giả định chi phí nợ vay về 9.0% từ 11.5% — chi phí lãi vay thực tế của FPT trong 1H26 là 4.0% — đưa WACC xuống 11.4%. Phần bù rủi ro vốn cổ phần giữ ở 8.97% và tăng trưởng dài hạn giữ ở 1.5% nhằm phản ánh rủi ro AI làm giảm giá dịch vụ CNTT. Tại mức 71,700 đồng, cổ phiếu giao dịch ở 11.2x P/E FY26F so với trung vị 5 năm trên 18x; tại giá mục tiêu tương ứng 13.7x FY26F và 11.8x FY27F, hàm ý tiềm năng tăng 23% (MUA). Thông tin liên quan AI vẫn tích cực: mở rộng hợp tác với Microsoft tại ASEAN, Nhật Bản và Hàn Quốc; hợp đồng AI hàng chục triệu USD với một tập đoàn vật liệu châu Âu; sáu thỏa thuận AI tại Thái Lan và Singapore; và chứng nhận trung gian dữ liệu với Trung tâm Dữ liệu quốc gia — Bộ Công an. Rủi ro: (1) giảm phát giá do AI diễn ra nhanh hơn mức giả định tăng trưởng dài hạn của chúng tôi (2) chi tiêu CNTT tại Mỹ và toàn cầu ở mức thấp cùng việc hợp đồng bị trì hoãn do thuế quan (3) biến động tỷ giá JPY/USD.</a:t>
             </a:r>
             <a:r>
               <a:rPr kumimoji="1" lang="vi-VN" altLang="ko-KR" sz="800" b="0" dirty="0">
@@ -38917,7 +38917,7 @@
                           <a:effectLst/>
                           <a:latin typeface="Noto Sans" panose="020B0502040504020204" pitchFamily="34" charset="0"/>
                         </a:rPr>
-                        <a:t>57,195</a:t>
+                        <a:t>57,284</a:t>
                       </a:r>
                     </a:p>
                   </a:txBody>
@@ -38970,7 +38970,7 @@
                           <a:effectLst/>
                           <a:latin typeface="Noto Sans" panose="020B0502040504020204" pitchFamily="34" charset="0"/>
                         </a:rPr>
-                        <a:t>65,027</a:t>
+                        <a:t>66,048</a:t>
                       </a:r>
                     </a:p>
                   </a:txBody>
@@ -39020,7 +39020,7 @@
                           <a:effectLst/>
                           <a:latin typeface="Noto Sans" panose="020B0502040504020204" pitchFamily="34" charset="0"/>
                         </a:rPr>
-                        <a:t>74,232</a:t>
+                        <a:t>76,654</a:t>
                       </a:r>
                     </a:p>
                   </a:txBody>
@@ -39249,7 +39249,7 @@
                           <a:effectLst/>
                           <a:latin typeface="Noto Sans" panose="020B0502040504020204" pitchFamily="34" charset="0"/>
                         </a:rPr>
-                        <a:t>8,475</a:t>
+                        <a:t>9,807</a:t>
                       </a:r>
                     </a:p>
                   </a:txBody>
@@ -39295,7 +39295,7 @@
                           <a:effectLst/>
                           <a:latin typeface="Noto Sans" panose="020B0502040504020204" pitchFamily="34" charset="0"/>
                         </a:rPr>
-                        <a:t>9,626</a:t>
+                        <a:t>11,044</a:t>
                       </a:r>
                     </a:p>
                   </a:txBody>
@@ -39338,7 +39338,7 @@
                           <a:effectLst/>
                           <a:latin typeface="Noto Sans" panose="020B0502040504020204" pitchFamily="34" charset="0"/>
                         </a:rPr>
-                        <a:t>11,117</a:t>
+                        <a:t>13,053</a:t>
                       </a:r>
                     </a:p>
                   </a:txBody>
@@ -39575,7 +39575,7 @@
                           <a:effectLst/>
                           <a:latin typeface="Noto Sans" panose="020B0502040504020204" pitchFamily="34" charset="0"/>
                         </a:rPr>
-                        <a:t>12,321</a:t>
+                        <a:t>13,070</a:t>
                       </a:r>
                     </a:p>
                   </a:txBody>
@@ -39624,7 +39624,7 @@
                           <a:effectLst/>
                           <a:latin typeface="Noto Sans" panose="020B0502040504020204" pitchFamily="34" charset="0"/>
                         </a:rPr>
-                        <a:t>14,189</a:t>
+                        <a:t>15,159</a:t>
                       </a:r>
                     </a:p>
                   </a:txBody>
@@ -39670,7 +39670,7 @@
                           <a:effectLst/>
                           <a:latin typeface="Noto Sans" panose="020B0502040504020204" pitchFamily="34" charset="0"/>
                         </a:rPr>
-                        <a:t>16,416</a:t>
+                        <a:t>17,671</a:t>
                       </a:r>
                     </a:p>
                   </a:txBody>
@@ -39907,7 +39907,7 @@
                           <a:effectLst/>
                           <a:latin typeface="Noto Sans" panose="020B0502040504020204" pitchFamily="34" charset="0"/>
                         </a:rPr>
-                        <a:t>10,848</a:t>
+                        <a:t>10,944</a:t>
                       </a:r>
                     </a:p>
                   </a:txBody>
@@ -39956,7 +39956,7 @@
                           <a:effectLst/>
                           <a:latin typeface="Noto Sans" panose="020B0502040504020204" pitchFamily="34" charset="0"/>
                         </a:rPr>
-                        <a:t>12,497</a:t>
+                        <a:t>12,674</a:t>
                       </a:r>
                     </a:p>
                   </a:txBody>
@@ -40002,7 +40002,7 @@
                           <a:effectLst/>
                           <a:latin typeface="Noto Sans" panose="020B0502040504020204" pitchFamily="34" charset="0"/>
                         </a:rPr>
-                        <a:t>14,459</a:t>
+                        <a:t>14,774</a:t>
                       </a:r>
                     </a:p>
                   </a:txBody>
@@ -40239,7 +40239,7 @@
                           <a:effectLst/>
                           <a:latin typeface="Noto Sans" panose="020B0502040504020204" pitchFamily="34" charset="0"/>
                         </a:rPr>
-                        <a:t>5,993</a:t>
+                        <a:t>6,424</a:t>
                       </a:r>
                     </a:p>
                   </a:txBody>
@@ -40288,7 +40288,7 @@
                           <a:effectLst/>
                           <a:latin typeface="Noto Sans" panose="020B0502040504020204" pitchFamily="34" charset="0"/>
                         </a:rPr>
-                        <a:t>6,904</a:t>
+                        <a:t>7,440</a:t>
                       </a:r>
                     </a:p>
                   </a:txBody>
@@ -40334,7 +40334,7 @@
                           <a:effectLst/>
                           <a:latin typeface="Noto Sans" panose="020B0502040504020204" pitchFamily="34" charset="0"/>
                         </a:rPr>
-                        <a:t>7,988</a:t>
+                        <a:t>8,673</a:t>
                       </a:r>
                     </a:p>
                   </a:txBody>
@@ -40571,7 +40571,7 @@
                           <a:effectLst/>
                           <a:latin typeface="Noto Sans" panose="020B0502040504020204" pitchFamily="34" charset="0"/>
                         </a:rPr>
-                        <a:t>27.5</a:t>
+                        <a:t>27.6</a:t>
                       </a:r>
                     </a:p>
                   </a:txBody>
@@ -40620,7 +40620,7 @@
                           <a:effectLst/>
                           <a:latin typeface="Noto Sans" panose="020B0502040504020204" pitchFamily="34" charset="0"/>
                         </a:rPr>
-                        <a:t>27.0</a:t>
+                        <a:t>27.1</a:t>
                       </a:r>
                     </a:p>
                   </a:txBody>
@@ -40666,7 +40666,7 @@
                           <a:effectLst/>
                           <a:latin typeface="Noto Sans" panose="020B0502040504020204" pitchFamily="34" charset="0"/>
                         </a:rPr>
-                        <a:t>26.4</a:t>
+                        <a:t>26.5</a:t>
                       </a:r>
                     </a:p>
                   </a:txBody>
@@ -40903,7 +40903,7 @@
                           <a:effectLst/>
                           <a:latin typeface="Noto Sans" panose="020B0502040504020204" pitchFamily="34" charset="0"/>
                         </a:rPr>
-                        <a:t>13.1</a:t>
+                        <a:t>13.7</a:t>
                       </a:r>
                     </a:p>
                   </a:txBody>
@@ -40952,7 +40952,7 @@
                           <a:effectLst/>
                           <a:latin typeface="Noto Sans" panose="020B0502040504020204" pitchFamily="34" charset="0"/>
                         </a:rPr>
-                        <a:t>11.4</a:t>
+                        <a:t>11.8</a:t>
                       </a:r>
                     </a:p>
                   </a:txBody>
@@ -40998,7 +40998,7 @@
                           <a:effectLst/>
                           <a:latin typeface="Noto Sans" panose="020B0502040504020204" pitchFamily="34" charset="0"/>
                         </a:rPr>
-                        <a:t>9.9</a:t>
+                        <a:t>10.1</a:t>
                       </a:r>
                     </a:p>
                   </a:txBody>
@@ -41235,7 +41235,7 @@
                           <a:effectLst/>
                           <a:latin typeface="Noto Sans" panose="020B0502040504020204" pitchFamily="34" charset="0"/>
                         </a:rPr>
-                        <a:t>3.1</a:t>
+                        <a:t>3.5</a:t>
                       </a:r>
                     </a:p>
                   </a:txBody>
@@ -41284,7 +41284,7 @@
                           <a:effectLst/>
                           <a:latin typeface="Noto Sans" panose="020B0502040504020204" pitchFamily="34" charset="0"/>
                         </a:rPr>
-                        <a:t>2.6</a:t>
+                        <a:t>3.0</a:t>
                       </a:r>
                     </a:p>
                   </a:txBody>
@@ -41330,7 +41330,7 @@
                           <a:effectLst/>
                           <a:latin typeface="Noto Sans" panose="020B0502040504020204" pitchFamily="34" charset="0"/>
                         </a:rPr>
-                        <a:t>2.2</a:t>
+                        <a:t>2.5</a:t>
                       </a:r>
                     </a:p>
                   </a:txBody>
@@ -41592,7 +41592,7 @@
                           <a:effectLst/>
                           <a:latin typeface="Noto Sans" panose="020B0502040504020204" pitchFamily="34" charset="0"/>
                         </a:rPr>
-                        <a:t>91,940</a:t>
+                        <a:t>91,917</a:t>
                       </a:r>
                     </a:p>
                   </a:txBody>
@@ -41645,7 +41645,7 @@
                           <a:effectLst/>
                           <a:latin typeface="Noto Sans" panose="020B0502040504020204" pitchFamily="34" charset="0"/>
                         </a:rPr>
-                        <a:t>102,964</a:t>
+                        <a:t>102,974</a:t>
                       </a:r>
                     </a:p>
                   </a:txBody>
@@ -41695,7 +41695,7 @@
                           <a:effectLst/>
                           <a:latin typeface="Noto Sans" panose="020B0502040504020204" pitchFamily="34" charset="0"/>
                         </a:rPr>
-                        <a:t>115,925</a:t>
+                        <a:t>115,994</a:t>
                       </a:r>
                     </a:p>
                   </a:txBody>
@@ -41961,7 +41961,7 @@
                           <a:effectLst/>
                           <a:latin typeface="Noto Sans" panose="020B0502040504020204" pitchFamily="34" charset="0"/>
                         </a:rPr>
-                        <a:t>50,157</a:t>
+                        <a:t>50,217</a:t>
                       </a:r>
                     </a:p>
                   </a:txBody>
@@ -42014,7 +42014,7 @@
                           <a:effectLst/>
                           <a:latin typeface="Noto Sans" panose="020B0502040504020204" pitchFamily="34" charset="0"/>
                         </a:rPr>
-                        <a:t>58,319</a:t>
+                        <a:t>58,356</a:t>
                       </a:r>
                     </a:p>
                   </a:txBody>
@@ -42064,7 +42064,7 @@
                           <a:effectLst/>
                           <a:latin typeface="Noto Sans" panose="020B0502040504020204" pitchFamily="34" charset="0"/>
                         </a:rPr>
-                        <a:t>68,504</a:t>
+                        <a:t>68,507</a:t>
                       </a:r>
                     </a:p>
                   </a:txBody>
@@ -42321,7 +42321,7 @@
                           <a:effectLst/>
                           <a:latin typeface="Noto Sans" panose="020B0502040504020204" pitchFamily="34" charset="0"/>
                         </a:rPr>
-                        <a:t>25,109</a:t>
+                        <a:t>25,116</a:t>
                       </a:r>
                     </a:p>
                   </a:txBody>
@@ -42424,7 +42424,7 @@
                           <a:effectLst/>
                           <a:latin typeface="Noto Sans" panose="020B0502040504020204" pitchFamily="34" charset="0"/>
                         </a:rPr>
-                        <a:t>35,575</a:t>
+                        <a:t>35,585</a:t>
                       </a:r>
                     </a:p>
                   </a:txBody>

--- a/MASVN_RS_WM_2H26_outlook_Equity_VN_2026_STBFPT_31July2026.pptx
+++ b/MASVN_RS_WM_2H26_outlook_Equity_VN_2026_STBFPT_31July2026.pptx
@@ -20539,7 +20539,7 @@
                 <a:ea typeface="Noto Sans" panose="020B0502040504020204" pitchFamily="34" charset="0"/>
                 <a:cs typeface="Noto Sans" panose="020B0502040504020204" pitchFamily="34" charset="0"/>
               </a:rPr>
-              <a:t>Chất lượng tài sản suy giảm vượt mức ban lãnh đạo dự kiến: tỷ lệ nợ xấu đạt 7.54% cuối Q2/2026, tăng 1.13%p so với đầu năm và hiện cao nhất hệ thống, so với mức ước tính khoảng 5.6% của ban lãnh đạo. Dư nợ nhóm 3-5 tăng khoảng 7,800 tỷ đồng so với đầu năm và 6,500 tỷ đồng so với quý trước, lên 47,957 tỷ đồng, trong đó khoảng 67% (tương đương 32,000 tỷ đồng) được xếp nhóm 5, còn nợ nhóm 4 tăng hơn gấp đôi (+156%). Giả định tỷ lệ nợ xấu FY26F dưới 4.5% của chúng tôi không còn khả thi nếu không đẩy mạnh xóa nợ, Chi phí dự phòng FY26F 10.4 nghìn tỷ đồng (-8.9% CK) sát với nhịp thực hiện của 1H26; điểm yếu hơn nằm ở FY27F, hàm ý chi phí tín dụng chỉ khoảng 0.8% trong khi tỷ lệ nợ xấu vẫn trên 7%. Cả hai đang được rà soát, cùng với khuyến nghị NẮM GIỮ và giá mục tiêu 77,800 đồng (2.4x P/B FY26F).</a:t>
+              <a:t>Chất lượng tài sản suy giảm vượt mức ban lãnh đạo dự kiến: tỷ lệ nợ xấu đạt 7.54% cuối Q2/2026, tăng 1.13%p so với đầu năm và cao nhất hệ thống, so với ước tính khoảng 5.6% của ban lãnh đạo. Dư nợ nhóm 3-5 tăng khoảng 7,800 tỷ đồng so với đầu năm và 6,500 tỷ đồng so với quý trước, lên 47,957 tỷ đồng, trong đó khoảng 67% (32,000 tỷ đồng) xếp nhóm 5, nợ nhóm 4 tăng hơn gấp đôi (+156%). Giả định nợ xấu FY26F dưới 4.5% không còn khả thi nếu không đẩy mạnh xóa nợ. Chi phí dự phòng FY26F 10.4 nghìn tỷ đồng (-8.9% CK) sát nhịp thực hiện 1H26; điểm yếu hơn nằm ở FY27F, hàm ý chi phí tín dụng chỉ khoảng 0.8% trong khi nợ xấu vẫn trên 7%. Cả hai đang được rà soát, cùng khuyến nghị NẮM GIỮ và giá mục tiêu 77,800 đồng (2.4x P/B FY26F).</a:t>
             </a:r>
             <a:endParaRPr kumimoji="1" lang="en-US" altLang="ko-KR" sz="800" b="0" dirty="0">
               <a:solidFill>
@@ -20671,7 +20671,7 @@
                 <a:ea typeface="Noto Sans" panose="020B0502040504020204" pitchFamily="34" charset="0"/>
                 <a:cs typeface="Noto Sans" panose="020B0502040504020204" pitchFamily="34" charset="0"/>
               </a:rPr>
-              <a:t>Các giả định FY26F còn lại giữ nguyên: NII 27,010 tỷ đồng (+1.2% CK) với tăng trưởng tín dụng 11.7%, NIM 2.94% (-38bps CK), CIR 42.7% (+2.0%p CK) và thu nhập khác 1,327 tỷ đồng (+5% CK); dự phóng LNTT FY26F của chúng tôi vẫn cao hơn kế hoạch 8,100 tỷ đồng đã được ĐHĐCĐ thông qua. Ở diễn biến khác, Sacombank đã thu giữ 507 giấy chứng nhận quyền sử dụng đất thuộc dự án Viva City (Đồng Nai) đối với dư nợ gốc quá hạn gần 350 tỷ đồng và hơn 82 tỷ đồng lãi chậm trả; quy mô dư nợ này chưa trọng yếu với danh mục tín dụng nhưng thể hiện kênh xử lý tài sản đảm bảo mà đà hồi phục của 2H26 phụ thuộc vào.</a:t>
+              <a:t>Các giả định FY26F còn lại giữ nguyên: NII 27,010 tỷ đồng (+1.2% CK) với tăng trưởng tín dụng 11.7%, NIM 2.94% (-38bps CK), CIR 42.7% (+2.0%p CK) và thu nhập khác 1,327 tỷ đồng (+5% CK); dự phóng LNTT FY26F vẫn cao hơn kế hoạch 8,100 tỷ đồng đã được ĐHĐCĐ thông qua. Ở diễn biến khác, Sacombank đã thu giữ 507 giấy chứng nhận quyền sử dụng đất thuộc dự án Viva City (Đồng Nai) đối với dư nợ gốc quá hạn gần 350 tỷ đồng; quy mô chưa trọng yếu nhưng thể hiện kênh xử lý tài sản đảm bảo mà đà hồi phục 2H26 phụ thuộc vào.</a:t>
             </a:r>
             <a:r>
               <a:rPr kumimoji="1" lang="en-US" altLang="ko-KR" sz="800" b="1" i="0" u="none" strike="noStrike" kern="1200" cap="none" spc="0" normalizeH="0" baseline="0" noProof="0" dirty="0">
@@ -29698,7 +29698,7 @@
                 <a:ea typeface="Noto Sans" panose="020B0502040504020204" pitchFamily="34" charset="0"/>
                 <a:cs typeface="Noto Sans" panose="020B0502040504020204" pitchFamily="34" charset="0"/>
               </a:rPr>
-              <a:t>1H26 results tracking ahead of the annual plan: revenue reached VND26,269bn (+12.6% YoY) and PBT VND5,714bn (+18.1% YoY), completing 45%/49% of the FY26 revenue/PBT plan, with the group PBT margin widening to 21.8%. In 2Q26 alone, revenue was VND13,789bn, PBT VND2,910bn and NPATMI VND2,568bn (+14% YoY). By segment, Technology revenue reached VND23,138bn (+15% YoY; 88% of group) and PBT VND3,314bn (+16.9% YoY) on a 14.3% margin; Education, investment and others declined 2.1% to VND3,131bn yet still contributed 42% of group PBT on a ~77% margin.</a:t>
+              <a:t>1H26 results tracking ahead of plan: revenue reached VND26,269bn (+12.6% YoY) and PBT VND5,714bn (+18.1% YoY), completing 45%/49% of the FY26 revenue/PBT plan, with the group PBT margin widening to 21.8%. In 2Q26, revenue was VND13,789bn, PBT VND2,910bn and NPATMI VND2,568bn (+14% YoY). Technology revenue reached VND23,138bn (+15% YoY; 88% of group) and PBT VND3,314bn (+16.9% YoY) on a 14.3% margin; Education, investment and others fell 2.1% to VND3,131bn yet contributed 42% of group PBT on a ~77% margin.</a:t>
             </a:r>
             <a:r>
               <a:rPr kumimoji="1" lang="en-US" altLang="ko-KR" sz="800" dirty="0">
@@ -29743,7 +29743,7 @@
                 <a:ea typeface="Noto Sans" panose="020B0502040504020204" pitchFamily="34" charset="0"/>
                 <a:cs typeface="Noto Sans" panose="020B0502040504020204" pitchFamily="34" charset="0"/>
               </a:rPr>
-              <a:t>Public-sector digitalization underpins the domestic pipeline: Domestic IT was the fastest-growing segment in 6M26 at VND4,236bn (+22.5% YoY), with segment PBT doubling to VND308bn on public-sector wins under the national digital-transformation programme — multi-year work with limited exposure to the global IT cycle, though its 7.3% margin dilutes the blend as it scales. Signed contract value for Global IT reached VND26,338bn in 1H26, +32.3% YoY, including 14 deals above USD10mn (+27.3%) — a book-to-bill of 1.39x against 1.07-1.22x through FY21-25, and the largest half-year backlog build on record. On that basis we look for Global IT to reaccelerate to +16.7% in FY27F and +17.7% in FY28F, from the +14.7% assumed for FY26F and +13.4% delivered in 1H26, with the US book cut to +5.9% on bid-price competition.</a:t>
+              <a:t>Public-sector digitalization underpins the domestic pipeline: Domestic IT was the fastest-growing segment in 6M26 at VND4,236bn (+22.5% YoY), with segment PBT doubling to VND308bn on wins under the national digital-transformation programme — multi-year work with limited exposure to the global IT cycle, though its 7.3% margin dilutes the blend. Signed contract value for Global IT reached VND26,338bn in 1H26, +32.3% YoY, including 14 deals above USD10mn — a book-to-bill of 1.39x against 1.07-1.22x through FY21-25. On that basis we look for Global IT to reaccelerate to +16.7% in FY27F and +17.7% in FY28F, from +14.7% in FY26F and +13.4% delivered in 1H26, with the US book cut to +5.9% on price competition.</a:t>
             </a:r>
             <a:r>
               <a:rPr kumimoji="1" lang="en-US" altLang="ko-KR" sz="800" dirty="0" err="1">
@@ -29825,7 +29825,7 @@
                 <a:ea typeface="Noto Sans" panose="020B0502040504020204" pitchFamily="34" charset="0"/>
                 <a:cs typeface="Noto Sans" panose="020B0502040504020204" pitchFamily="34" charset="0"/>
               </a:rPr>
-              <a:t>Projection and valuation: we forecast FY26F NPATMI of VND10,944bn (+15.6% YoY), FY27F VND12,674bn (+15.8% YoY) and FY28F VND14,774bn (+16.6% YoY). Associate income — FPT Telecom (45.66%), equity-accounted from FY26, with FPT Retail (46.54%), Synnex FPT (48.00%) and FPT Online — rises to VND2,608bn in FY26F and VND3,449bn by FY28F; FPT Telecom earned VND1,877bn of NPATMI in 1H26 (+13.9% YoY) and the associate line as a whole grew 40.8% YoY in the half. Operating leverage carries the rest: SG&amp;A falls from 17.6% of sales to 17.1% and 16.5%, with gross margin unchanged. ROE holds near 27%, supported by net cash of around 60% of equity and a maintained DPS of VND2,000. We raise our DCF (FCFF) target price to VND87,950 from VND78,750, cutting the assumed cost of debt to 9.0% from 11.5% — FPT's realised funding cost in 1H26 was 4.0% — which lowers WACC to 11.4%. The equity risk premium stays at 8.97% and long-term growth at 1.5% to carry the risk that AI lowers prices for IT services. At VND71,700 the stock trades at 11.2x FY26F earnings against a five-year median above 18x; at the target price it trades at 13.7x FY26F and 11.8x FY27F, implying 23% upside (BUY). AI-related newsflow has stayed supportive, including an expanded partnership with Microsoft across ASEAN, Japan and Korea, an AI contract worth tens of millions of USD with a European materials group, six AI agreements in Thailand and Singapore, and data-intermediary certification with the Ministry of Public Security's National Data Centre. Risks: (1) AI-driven price deflation passing through faster than our long-term growth assumption allows (2) subdued US and global IT spending and tariff-related contract delays (3) JPY/USD volatility.</a:t>
+              <a:t>Projection and valuation: we forecast FY26F NPATMI of VND10,944bn (+15.6% YoY), FY27F VND12,674bn (+15.8%) and FY28F VND14,774bn (+16.6%). Associate income — FPT Telecom (45.66%), equity-accounted from FY26, with FPT Retail, Synnex FPT and FPT Online — rises to VND2,608bn in FY26F and VND3,449bn by FY28F, and grew 40.8% YoY in 1H26. Operating leverage carries the rest: SG&amp;A falls from 17.6% of sales to 16.5% by FY28F, with gross margin unchanged. ROE holds near 27% on net cash of around 60% of equity and a maintained DPS of VND2,000. We raise our DCF (FCFF) target price to VND87,950 from VND78,750, cutting the assumed cost of debt to 9.0% from 11.5% — FPT's realised funding cost in 1H26 was 4.0% — which lowers WACC to 11.4%. The equity risk premium stays at 8.97% and long-term growth at 1.5% to carry the risk that AI lowers prices for IT services. At VND71,700 the stock trades at 11.2x FY26F earnings against a five-year median above 18x; at the target price, 13.7x FY26F and 11.8x FY27F, implying 23% upside (BUY). AI newsflow remains supportive: an expanded Microsoft partnership across ASEAN, Japan and Korea, an AI contract worth tens of millions of USD with a European materials group, and data-intermediary certification with the Ministry of Public Security's National Data Centre. Risks: (1) AI-driven price deflation outpacing our long-term growth assumption (2) subdued US and global IT spending and tariff-related contract delays (3) JPY/USD volatility.</a:t>
             </a:r>
             <a:r>
               <a:rPr kumimoji="1" lang="en-US" altLang="ko-KR" sz="800" dirty="0">
@@ -38071,7 +38071,7 @@
                 <a:ea typeface="Noto Sans" panose="020B0502040504020204" pitchFamily="34" charset="0"/>
                 <a:cs typeface="Noto Sans" panose="020B0502040504020204" pitchFamily="34" charset="0"/>
               </a:rPr>
-              <a:t>KQKD 1H26 vượt tiến độ kế hoạch năm: doanh thu đạt 26,269 tỷ đồng (+12.6% CK) và LNTT 5,714 tỷ đồng (+18.1% CK), hoàn thành 45%/49% kế hoạch doanh thu/lợi nhuận năm; biên LNTT toàn tập đoàn mở rộng lên 21.8%. Riêng Q2/2026, doanh thu đạt 13,789 tỷ đồng, LNTT 2,910 tỷ đồng và LNST-CĐTS 2,568 tỷ đồng (+14% CK). Theo mảng, Công nghệ đạt 23,138 tỷ đồng (+15% CK; 88% doanh thu tập đoàn) và LNTT 3,314 tỷ đồng (+16.9% CK) với biên 14.3%; Giáo dục, đầu tư và khác giảm 2.1% về 3,131 tỷ đồng nhưng vẫn đóng góp 42% LNTT tập đoàn với biên khoảng 77%.</a:t>
+              <a:t>KQKD 1H26 vượt tiến độ kế hoạch: doanh thu 26,269 tỷ đồng (+12.6% CK) và LNTT 5,714 tỷ (+18.1% CK), hoàn thành 45%/49% kế hoạch năm; biên LNTT mở rộng lên 21.8%. Q2/2026 đạt doanh thu 13,789 tỷ, LNTT 2,910 tỷ và LNST-CĐTS 2,568 tỷ (+14% CK). Công nghệ đạt 23,138 tỷ (+15% CK; 88% doanh thu tập đoàn) và LNTT 3,314 tỷ (+16.9% CK), biên 14.3%; Giáo dục, đầu tư và khác giảm 2.1% về 3,131 tỷ nhưng vẫn đóng góp 42% LNTT tập đoàn.</a:t>
             </a:r>
             <a:r>
               <a:rPr kumimoji="1" lang="vi-VN" altLang="ko-KR" sz="800" b="0" dirty="0">
@@ -38108,7 +38108,7 @@
                 <a:ea typeface="Noto Sans" panose="020B0502040504020204" pitchFamily="34" charset="0"/>
                 <a:cs typeface="Noto Sans" panose="020B0502040504020204" pitchFamily="34" charset="0"/>
               </a:rPr>
-              <a:t>Số hóa khu vực công là nền tảng của danh mục trong nước: CNTT trong nước là mảng tăng trưởng nhanh nhất trong 6T26, đạt 4,236 tỷ đồng (+22.5% CK), LNTT mảng tăng gấp đôi lên 308 tỷ đồng nhờ trúng thầu khu vực công thuộc chương trình chuyển đổi số quốc gia — nguồn việc kéo dài nhiều năm, ít phụ thuộc chu kỳ CNTT toàn cầu, tuy biên 7.3% sẽ làm loãng biên chung khi mở rộng. Doanh thu ký mới mảng CNTT nước ngoài đạt 26,338 tỷ đồng trong 1H26, tăng 32.3% CK, trong đó 14 dự án trên 10 triệu USD (+27.3%) — tỷ lệ ký mới trên doanh thu đạt 1.39 lần so với 1.07-1.22 lần giai đoạn FY21-25, mức tích lũy nửa năm cao nhất từ trước tới nay. Trên cơ sở đó, chúng tôi dự phóng CNTT nước ngoài dự kiến tăng tốc lên +16.7% trong FY27F và +17.7% trong FY28F, từ mức +14.7% của FY26F và +13.4% đã thực hiện trong 1H26, với thị trường Mỹ hạ về +5.9% do cạnh tranh giá thầu.</a:t>
+              <a:t>Số hóa khu vực công là nền tảng của danh mục trong nước: CNTT trong nước tăng nhanh nhất 6T26, đạt 4,236 tỷ đồng (+22.5% CK), LNTT mảng tăng gấp đôi lên 308 tỷ nhờ trúng thầu chương trình chuyển đổi số quốc gia — nguồn việc nhiều năm, ít phụ thuộc chu kỳ CNTT toàn cầu, tuy biên 7.3% làm loãng biên chung. Doanh thu ký mới CNTT nước ngoài đạt 26,338 tỷ trong 1H26 (+32.3% CK), gồm 14 dự án trên 10 triệu USD — tỷ lệ ký mới/doanh thu 1.39 lần so với 1.07-1.22 lần giai đoạn FY21-25. Trên cơ sở đó, dự phóng CNTT nước ngoài tăng lên +16.7% FY27F và +17.7% FY28F, từ +14.7% FY26F và +13.4% của 1H26; Mỹ hạ về +5.9% do cạnh tranh giá thầu.</a:t>
             </a:r>
             <a:r>
               <a:rPr kumimoji="1" lang="vi-VN" altLang="ko-KR" sz="800" b="0" dirty="0">
@@ -38187,7 +38187,7 @@
                 <a:ea typeface="Noto Sans" panose="020B0502040504020204" pitchFamily="34" charset="0"/>
                 <a:cs typeface="Noto Sans" panose="020B0502040504020204" pitchFamily="34" charset="0"/>
               </a:rPr>
-              <a:t>Dự phóng và định giá: chúng tôi dự phóng LNST-CĐTS FY26F đạt 10,944 tỷ đồng (+15.6% CK), FY27F 12,674 tỷ đồng (+15.8% CK) và FY28F 14,774 tỷ đồng (+16.6% CK). Lợi nhuận từ công ty liên kết — FPT Telecom (45.66%), hạch toán theo phương pháp vốn chủ sở hữu từ FY26, cùng FPT Retail (46.54%), Synnex FPT (48.00%) và FPT Online — tăng lên 2,608 tỷ đồng trong FY26F và 3,449 tỷ đồng vào FY28F; riêng FPT Telecom đạt LNST-CĐTS 1,877 tỷ đồng trong 1H26 (+13.9% CK) và toàn bộ khoản lợi nhuận liên kết tăng 40.8% CK trong nửa đầu năm. Phần còn lại đến từ đòn bẩy hoạt động: chi phí bán hàng và quản lý giảm từ 17.6% doanh thu xuống 17.1% và 16.5%, biên lợi nhuận gộp giữ nguyên. ROE duy trì quanh 27%, nhờ tiền ròng khoảng 60% VCSH và cổ tức tiền mặt 2,000 đồng/cp. Chúng tôi nâng giá mục tiêu DCF (FCFF) lên 87,950 đồng từ 78,750 đồng, hạ giả định chi phí nợ vay về 9.0% từ 11.5% — chi phí lãi vay thực tế của FPT trong 1H26 là 4.0% — đưa WACC xuống 11.4%. Phần bù rủi ro vốn cổ phần giữ ở 8.97% và tăng trưởng dài hạn giữ ở 1.5% nhằm phản ánh rủi ro AI làm giảm giá dịch vụ CNTT. Tại mức 71,700 đồng, cổ phiếu giao dịch ở 11.2x P/E FY26F so với trung vị 5 năm trên 18x; tại giá mục tiêu tương ứng 13.7x FY26F và 11.8x FY27F, hàm ý tiềm năng tăng 23% (MUA). Thông tin liên quan AI vẫn tích cực: mở rộng hợp tác với Microsoft tại ASEAN, Nhật Bản và Hàn Quốc; hợp đồng AI hàng chục triệu USD với một tập đoàn vật liệu châu Âu; sáu thỏa thuận AI tại Thái Lan và Singapore; và chứng nhận trung gian dữ liệu với Trung tâm Dữ liệu quốc gia — Bộ Công an. Rủi ro: (1) giảm phát giá do AI diễn ra nhanh hơn mức giả định tăng trưởng dài hạn của chúng tôi (2) chi tiêu CNTT tại Mỹ và toàn cầu ở mức thấp cùng việc hợp đồng bị trì hoãn do thuế quan (3) biến động tỷ giá JPY/USD.</a:t>
+              <a:t>Dự phóng và định giá: LNST-CĐTS FY26F đạt 10,944 tỷ đồng (+15.6% CK), FY27F 12,674 tỷ (+15.8%) và FY28F 14,774 tỷ (+16.6%). Lợi nhuận từ công ty liên kết — FPT Telecom (45.66%, hạch toán theo phương pháp VCSH từ FY26), FPT Retail, Synnex FPT và FPT Online — tăng lên 2,608 tỷ FY26F và 3,449 tỷ FY28F, đã tăng 40.8% CK trong 1H26. Phần còn lại đến từ đòn bẩy hoạt động: chi phí bán hàng và quản lý giảm từ 17.6% doanh thu xuống 16.5% vào FY28F, biên gộp giữ nguyên. ROE duy trì quanh 27% nhờ tiền ròng khoảng 60% VCSH và cổ tức 2,000 đồng/cp. Chúng tôi nâng giá mục tiêu DCF (FCFF) lên 87,950 đồng từ 78,750 đồng, hạ chi phí nợ vay về 9.0% từ 11.5% — mức thực tế 1H26 là 4.0% — đưa WACC xuống 11.4%; phần bù rủi ro vốn cổ phần giữ 8.97% và tăng trưởng dài hạn 1.5% để phản ánh rủi ro AI làm giảm giá dịch vụ CNTT. Tại 71,700 đồng, cổ phiếu giao dịch ở 11.2x P/E FY26F so với trung vị 5 năm trên 18x; tại giá mục tiêu là 13.7x FY26F và 11.8x FY27F, hàm ý tiềm năng tăng 23% (MUA). Rủi ro: (1) giảm phát giá do AI nhanh hơn giả định tăng trưởng dài hạn (2) chi tiêu CNTT tại Mỹ và toàn cầu thấp cùng hợp đồng trì hoãn do thuế quan (3) biến động tỷ giá JPY/USD.</a:t>
             </a:r>
             <a:r>
               <a:rPr kumimoji="1" lang="vi-VN" altLang="ko-KR" sz="800" b="0" dirty="0">

--- a/MASVN_RS_WM_2H26_outlook_Equity_VN_2026_STBFPT_31July2026.pptx
+++ b/MASVN_RS_WM_2H26_outlook_Equity_VN_2026_STBFPT_31July2026.pptx
@@ -29698,7 +29698,7 @@
                 <a:ea typeface="Noto Sans" panose="020B0502040504020204" pitchFamily="34" charset="0"/>
                 <a:cs typeface="Noto Sans" panose="020B0502040504020204" pitchFamily="34" charset="0"/>
               </a:rPr>
-              <a:t>1H26 results tracking ahead of plan: revenue reached VND26,269bn (+12.6% YoY) and PBT VND5,714bn (+18.1% YoY), completing 45%/49% of the FY26 revenue/PBT plan, with the group PBT margin widening to 21.8%. In 2Q26, revenue was VND13,789bn, PBT VND2,910bn and NPATMI VND2,568bn (+14% YoY). Technology revenue reached VND23,138bn (+15% YoY; 88% of group) and PBT VND3,314bn (+16.9% YoY) on a 14.3% margin; Education, investment and others fell 2.1% to VND3,131bn yet contributed 42% of group PBT on a ~77% margin.</a:t>
+              <a:t>1H26 tracking ahead of plan: revenue VND26,269bn (+12.6% YoY) and PBT VND5,714bn (+18.1% YoY), 45%/49% of the FY26 plan, with the group PBT margin widening to 21.8%. In 2Q26: revenue VND13,789bn, PBT VND2,910bn, NPATMI VND2,568bn (+14% YoY). Technology revenue VND23,138bn (+15% YoY; 88% of group) and PBT VND3,314bn (+16.9%); Education, investment and others fell 2.1% to VND3,131bn yet contributed 42% of group PBT on a ~77% margin.</a:t>
             </a:r>
             <a:r>
               <a:rPr kumimoji="1" lang="en-US" altLang="ko-KR" sz="800" dirty="0">
@@ -29743,7 +29743,7 @@
                 <a:ea typeface="Noto Sans" panose="020B0502040504020204" pitchFamily="34" charset="0"/>
                 <a:cs typeface="Noto Sans" panose="020B0502040504020204" pitchFamily="34" charset="0"/>
               </a:rPr>
-              <a:t>Public-sector digitalization underpins the domestic pipeline: Domestic IT was the fastest-growing segment in 6M26 at VND4,236bn (+22.5% YoY), with segment PBT doubling to VND308bn on wins under the national digital-transformation programme — multi-year work with limited exposure to the global IT cycle, though its 7.3% margin dilutes the blend. Signed contract value for Global IT reached VND26,338bn in 1H26, +32.3% YoY, including 14 deals above USD10mn — a book-to-bill of 1.39x against 1.07-1.22x through FY21-25. On that basis we look for Global IT to reaccelerate to +16.7% in FY27F and +17.7% in FY28F, from +14.7% in FY26F and +13.4% delivered in 1H26, with the US book cut to +5.9% on price competition.</a:t>
+              <a:t>Public-sector digitalization underpins the domestic pipeline: Domestic IT grew fastest in 6M26 at VND4,236bn (+22.5% YoY), segment PBT doubling to VND308bn on national digital-transformation wins — multi-year work outside the global IT cycle, though its 7.3% margin dilutes the blend. Signed contract value for Global IT reached VND26,338bn in 1H26, +32.3% YoY, including 14 deals above USD10mn — a book-to-bill of 1.39x against 1.07-1.22x through FY21-25. On that basis we look for Global IT to reaccelerate to +16.7% in FY27F and +17.7% in FY28F, from +14.7% in FY26F and +13.4% in 1H26, with the US book cut to +5.9%.</a:t>
             </a:r>
             <a:r>
               <a:rPr kumimoji="1" lang="en-US" altLang="ko-KR" sz="800" dirty="0" err="1">
@@ -29825,7 +29825,7 @@
                 <a:ea typeface="Noto Sans" panose="020B0502040504020204" pitchFamily="34" charset="0"/>
                 <a:cs typeface="Noto Sans" panose="020B0502040504020204" pitchFamily="34" charset="0"/>
               </a:rPr>
-              <a:t>Projection and valuation: we forecast FY26F NPATMI of VND10,944bn (+15.6% YoY), FY27F VND12,674bn (+15.8%) and FY28F VND14,774bn (+16.6%). Associate income — FPT Telecom (45.66%), equity-accounted from FY26, with FPT Retail, Synnex FPT and FPT Online — rises to VND2,608bn in FY26F and VND3,449bn by FY28F, and grew 40.8% YoY in 1H26. Operating leverage carries the rest: SG&amp;A falls from 17.6% of sales to 16.5% by FY28F, with gross margin unchanged. ROE holds near 27% on net cash of around 60% of equity and a maintained DPS of VND2,000. We raise our DCF (FCFF) target price to VND87,950 from VND78,750, cutting the assumed cost of debt to 9.0% from 11.5% — FPT's realised funding cost in 1H26 was 4.0% — which lowers WACC to 11.4%. The equity risk premium stays at 8.97% and long-term growth at 1.5% to carry the risk that AI lowers prices for IT services. At VND71,700 the stock trades at 11.2x FY26F earnings against a five-year median above 18x; at the target price, 13.7x FY26F and 11.8x FY27F, implying 23% upside (BUY). AI newsflow remains supportive: an expanded Microsoft partnership across ASEAN, Japan and Korea, an AI contract worth tens of millions of USD with a European materials group, and data-intermediary certification with the Ministry of Public Security's National Data Centre. Risks: (1) AI-driven price deflation outpacing our long-term growth assumption (2) subdued US and global IT spending and tariff-related contract delays (3) JPY/USD volatility.</a:t>
+              <a:t>Projection and valuation: we forecast FY26F NPATMI of VND10,944bn (+15.6% YoY), FY27F VND12,674bn (+15.8%) and FY28F VND14,774bn (+16.6%). Associate income — FPT Telecom (45.66%), equity-accounted from FY26, with FPT Retail, Synnex FPT and FPT Online — rises to VND2,608bn in FY26F and VND3,449bn by FY28F, and grew 40.8% YoY in 1H26. Operating leverage carries the rest: SG&amp;A falls from 17.6% of sales to 16.5% by FY28F, gross margin unchanged. ROE holds near 27% on net cash of around 60% of equity and a maintained DPS of VND2,000. We raise our DCF (FCFF) target price to VND87,950 from VND78,750, cutting the assumed cost of debt to 9.0% from 11.5% — FPT's realised funding cost in 1H26 was 4.0% — which lowers WACC to 11.4%; the equity risk premium stays at 8.97% and long-term growth at 1.5% to carry the risk that AI lowers IT services pricing. At VND71,700 the stock trades at 11.2x FY26F earnings against a five-year median above 18x; at the target price, 13.7x FY26F and 11.8x FY27F, implying 23% upside (BUY). Risks: (1) AI-driven price deflation outpacing our long-term growth assumption (2) subdued US and global IT spending and tariff-related contract delays (3) JPY/USD volatility.</a:t>
             </a:r>
             <a:r>
               <a:rPr kumimoji="1" lang="en-US" altLang="ko-KR" sz="800" dirty="0">
@@ -38071,7 +38071,7 @@
                 <a:ea typeface="Noto Sans" panose="020B0502040504020204" pitchFamily="34" charset="0"/>
                 <a:cs typeface="Noto Sans" panose="020B0502040504020204" pitchFamily="34" charset="0"/>
               </a:rPr>
-              <a:t>KQKD 1H26 vượt tiến độ kế hoạch: doanh thu 26,269 tỷ đồng (+12.6% CK) và LNTT 5,714 tỷ (+18.1% CK), hoàn thành 45%/49% kế hoạch năm; biên LNTT mở rộng lên 21.8%. Q2/2026 đạt doanh thu 13,789 tỷ, LNTT 2,910 tỷ và LNST-CĐTS 2,568 tỷ (+14% CK). Công nghệ đạt 23,138 tỷ (+15% CK; 88% doanh thu tập đoàn) và LNTT 3,314 tỷ (+16.9% CK), biên 14.3%; Giáo dục, đầu tư và khác giảm 2.1% về 3,131 tỷ nhưng vẫn đóng góp 42% LNTT tập đoàn.</a:t>
+              <a:t>KQKD 1H26 vượt tiến độ kế hoạch: doanh thu 26,269 tỷ đồng (+12.6% CK) và LNTT 5,714 tỷ (+18.1% CK), đạt 45%/49% kế hoạch năm, biên LNTT mở rộng lên 21.8%. Q2/2026: doanh thu 13,789 tỷ, LNTT 2,910 tỷ, LNST-CĐTS 2,568 tỷ (+14% CK). Công nghệ đạt 23,138 tỷ (+15% CK; 88% doanh thu tập đoàn) và LNTT 3,314 tỷ (+16.9%); Giáo dục, đầu tư và khác giảm 2.1% về 3,131 tỷ nhưng vẫn đóng góp 42% LNTT tập đoàn.</a:t>
             </a:r>
             <a:r>
               <a:rPr kumimoji="1" lang="vi-VN" altLang="ko-KR" sz="800" b="0" dirty="0">
@@ -38108,7 +38108,7 @@
                 <a:ea typeface="Noto Sans" panose="020B0502040504020204" pitchFamily="34" charset="0"/>
                 <a:cs typeface="Noto Sans" panose="020B0502040504020204" pitchFamily="34" charset="0"/>
               </a:rPr>
-              <a:t>Số hóa khu vực công là nền tảng của danh mục trong nước: CNTT trong nước tăng nhanh nhất 6T26, đạt 4,236 tỷ đồng (+22.5% CK), LNTT mảng tăng gấp đôi lên 308 tỷ nhờ trúng thầu chương trình chuyển đổi số quốc gia — nguồn việc nhiều năm, ít phụ thuộc chu kỳ CNTT toàn cầu, tuy biên 7.3% làm loãng biên chung. Doanh thu ký mới CNTT nước ngoài đạt 26,338 tỷ trong 1H26 (+32.3% CK), gồm 14 dự án trên 10 triệu USD — tỷ lệ ký mới/doanh thu 1.39 lần so với 1.07-1.22 lần giai đoạn FY21-25. Trên cơ sở đó, dự phóng CNTT nước ngoài tăng lên +16.7% FY27F và +17.7% FY28F, từ +14.7% FY26F và +13.4% của 1H26; Mỹ hạ về +5.9% do cạnh tranh giá thầu.</a:t>
+              <a:t>Số hóa khu vực công là nền tảng của danh mục trong nước: CNTT trong nước tăng nhanh nhất 6T26, đạt 4,236 tỷ đồng (+22.5% CK), LNTT mảng tăng gấp đôi lên 308 tỷ nhờ trúng thầu chuyển đổi số quốc gia — nguồn việc nhiều năm, ngoài chu kỳ CNTT toàn cầu, tuy biên 7.3% làm loãng biên chung. Doanh thu ký mới CNTT nước ngoài đạt 26,338 tỷ trong 1H26 (+32.3% CK), gồm 14 dự án trên 10 triệu USD — tỷ lệ ký mới/doanh thu 1.39 lần so với 1.07-1.22 lần giai đoạn FY21-25. Trên cơ sở đó, dự phóng CNTT nước ngoài tăng lên +16.7% FY27F và +17.7% FY28F, từ +14.7% FY26F và +13.4% của 1H26; Mỹ hạ về +5.9%.</a:t>
             </a:r>
             <a:r>
               <a:rPr kumimoji="1" lang="vi-VN" altLang="ko-KR" sz="800" b="0" dirty="0">
@@ -38187,7 +38187,7 @@
                 <a:ea typeface="Noto Sans" panose="020B0502040504020204" pitchFamily="34" charset="0"/>
                 <a:cs typeface="Noto Sans" panose="020B0502040504020204" pitchFamily="34" charset="0"/>
               </a:rPr>
-              <a:t>Dự phóng và định giá: LNST-CĐTS FY26F đạt 10,944 tỷ đồng (+15.6% CK), FY27F 12,674 tỷ (+15.8%) và FY28F 14,774 tỷ (+16.6%). Lợi nhuận từ công ty liên kết — FPT Telecom (45.66%, hạch toán theo phương pháp VCSH từ FY26), FPT Retail, Synnex FPT và FPT Online — tăng lên 2,608 tỷ FY26F và 3,449 tỷ FY28F, đã tăng 40.8% CK trong 1H26. Phần còn lại đến từ đòn bẩy hoạt động: chi phí bán hàng và quản lý giảm từ 17.6% doanh thu xuống 16.5% vào FY28F, biên gộp giữ nguyên. ROE duy trì quanh 27% nhờ tiền ròng khoảng 60% VCSH và cổ tức 2,000 đồng/cp. Chúng tôi nâng giá mục tiêu DCF (FCFF) lên 87,950 đồng từ 78,750 đồng, hạ chi phí nợ vay về 9.0% từ 11.5% — mức thực tế 1H26 là 4.0% — đưa WACC xuống 11.4%; phần bù rủi ro vốn cổ phần giữ 8.97% và tăng trưởng dài hạn 1.5% để phản ánh rủi ro AI làm giảm giá dịch vụ CNTT. Tại 71,700 đồng, cổ phiếu giao dịch ở 11.2x P/E FY26F so với trung vị 5 năm trên 18x; tại giá mục tiêu là 13.7x FY26F và 11.8x FY27F, hàm ý tiềm năng tăng 23% (MUA). Rủi ro: (1) giảm phát giá do AI nhanh hơn giả định tăng trưởng dài hạn (2) chi tiêu CNTT tại Mỹ và toàn cầu thấp cùng hợp đồng trì hoãn do thuế quan (3) biến động tỷ giá JPY/USD.</a:t>
+              <a:t>Dự phóng và định giá: LNST-CĐTS FY26F đạt 10,944 tỷ đồng (+15.6% CK), FY27F 12,674 tỷ (+15.8%) và FY28F 14,774 tỷ (+16.6%). Lợi nhuận công ty liên kết — FPT Telecom (45.66%, theo phương pháp VCSH từ FY26), FPT Retail, Synnex FPT và FPT Online — tăng lên 2,608 tỷ FY26F và 3,449 tỷ FY28F, đã tăng 40.8% CK trong 1H26. Đòn bẩy hoạt động: chi phí bán hàng và quản lý giảm từ 17.6% doanh thu xuống 16.5% vào FY28F, biên gộp giữ nguyên. ROE quanh 27% nhờ tiền ròng khoảng 60% VCSH và cổ tức 2,000 đồng/cp. Nâng giá mục tiêu DCF (FCFF) lên 87,950 đồng từ 78,750 đồng, hạ chi phí nợ vay về 9.0% từ 11.5% (thực tế 1H26: 4.0%), đưa WACC xuống 11.4%; phần bù rủi ro vốn cổ phần giữ 8.97% và tăng trưởng dài hạn 1.5% để phản ánh rủi ro AI làm giảm giá dịch vụ CNTT. Tại 71,700 đồng, cổ phiếu ở 11.2x P/E FY26F so với trung vị 5 năm trên 18x; tại giá mục tiêu là 13.7x FY26F và 11.8x FY27F, tiềm năng tăng 23% (MUA). Rủi ro: (1) giảm phát giá do AI nhanh hơn giả định tăng trưởng dài hạn (2) chi tiêu CNTT tại Mỹ và toàn cầu thấp cùng hợp đồng trì hoãn do thuế quan (3) biến động tỷ giá JPY/USD.</a:t>
             </a:r>
             <a:r>
               <a:rPr kumimoji="1" lang="vi-VN" altLang="ko-KR" sz="800" b="0" dirty="0">

--- a/MASVN_RS_WM_2H26_outlook_Equity_VN_2026_STBFPT_31July2026.pptx
+++ b/MASVN_RS_WM_2H26_outlook_Equity_VN_2026_STBFPT_31July2026.pptx
@@ -29825,7 +29825,7 @@
                 <a:ea typeface="Noto Sans" panose="020B0502040504020204" pitchFamily="34" charset="0"/>
                 <a:cs typeface="Noto Sans" panose="020B0502040504020204" pitchFamily="34" charset="0"/>
               </a:rPr>
-              <a:t>Projection and valuation: we forecast FY26F NPATMI of VND10,944bn (+15.6% YoY), FY27F VND12,674bn (+15.8%) and FY28F VND14,774bn (+16.6%). Associate income — FPT Telecom (45.66%), equity-accounted from FY26, with FPT Retail, Synnex FPT and FPT Online — rises to VND2,608bn in FY26F and VND3,449bn by FY28F, and grew 40.8% YoY in 1H26. Operating leverage carries the rest: SG&amp;A falls from 17.6% of sales to 16.5% by FY28F, gross margin unchanged. ROE holds near 27% on net cash of around 60% of equity and a maintained DPS of VND2,000. We raise our DCF (FCFF) target price to VND87,950 from VND78,750, cutting the assumed cost of debt to 9.0% from 11.5% — FPT's realised funding cost in 1H26 was 4.0% — which lowers WACC to 11.4%; the equity risk premium stays at 8.97% and long-term growth at 1.5% to carry the risk that AI lowers IT services pricing. At VND71,700 the stock trades at 11.2x FY26F earnings against a five-year median above 18x; at the target price, 13.7x FY26F and 11.8x FY27F, implying 23% upside (BUY). Risks: (1) AI-driven price deflation outpacing our long-term growth assumption (2) subdued US and global IT spending and tariff-related contract delays (3) JPY/USD volatility.</a:t>
+              <a:t>Projection and valuation: we forecast FY26F NPATMI of VND10,944bn (+15.6% YoY), FY27F VND12,674bn (+15.8%) and FY28F VND14,774bn (+16.6%). Associate income — FPT Telecom (45.66%), equity-accounted from FY26, with FPT Retail, Synnex FPT and FPT Online — rises to VND2,608bn in FY26F and VND3,449bn by FY28F, and grew 40.8% YoY in 1H26. Operating leverage carries the rest: SG&amp;A falls from 17.6% of sales to 16.5% by FY28F, gross margin unchanged. ROE holds near 27% on net cash of around 60% of equity and a maintained DPS of VND2,000. We raise our DCF (FCFF) target price to VND87,950 from VND78,750, cutting the assumed cost of debt to 9.0% from 11.5% — FPT's realised funding cost in 1H26 was 4.0% — which lowers WACC to 11.4%; the equity risk premium stays at 8.97% and long-term growth at 1.5% to carry the risk that AI lowers IT services pricing. At VND71,700 the stock trades at 11.2x FY26F earnings against a five-year median above 18x; at the target price, 13.7x FY26F and 11.8x FY27F, implying 23% upside (BUY). AI newsflow remains supportive: an expanded Microsoft partnership across ASEAN, Japan and Korea, and data-intermediary certification with the National Data Centre. Risks: (1) AI-driven price deflation outpacing our long-term growth assumption (2) subdued US and global IT spending and tariff-related contract delays (3) JPY/USD volatility.</a:t>
             </a:r>
             <a:r>
               <a:rPr kumimoji="1" lang="en-US" altLang="ko-KR" sz="800" dirty="0">
@@ -38071,7 +38071,7 @@
                 <a:ea typeface="Noto Sans" panose="020B0502040504020204" pitchFamily="34" charset="0"/>
                 <a:cs typeface="Noto Sans" panose="020B0502040504020204" pitchFamily="34" charset="0"/>
               </a:rPr>
-              <a:t>KQKD 1H26 vượt tiến độ kế hoạch: doanh thu 26,269 tỷ đồng (+12.6% CK) và LNTT 5,714 tỷ (+18.1% CK), đạt 45%/49% kế hoạch năm, biên LNTT mở rộng lên 21.8%. Q2/2026: doanh thu 13,789 tỷ, LNTT 2,910 tỷ, LNST-CĐTS 2,568 tỷ (+14% CK). Công nghệ đạt 23,138 tỷ (+15% CK; 88% doanh thu tập đoàn) và LNTT 3,314 tỷ (+16.9%); Giáo dục, đầu tư và khác giảm 2.1% về 3,131 tỷ nhưng vẫn đóng góp 42% LNTT tập đoàn.</a:t>
+              <a:t>KQKD 1H26 vượt kế hoạch: doanh thu 26,269 tỷ đồng (+12.6% CK) và LNTT 5,714 tỷ (+18.1% CK), đạt 45%/49% kế hoạch năm, biên LNTT lên 21.8%. Q2/2026: doanh thu 13,789 tỷ, LNTT 2,910 tỷ, LNST-CĐTS 2,568 tỷ (+14% CK). Công nghệ đạt 23,138 tỷ (+15% CK; 88% doanh thu tập đoàn) và LNTT 3,314 tỷ (+16.9%); Giáo dục, đầu tư và khác giảm 2.1% về 3,131 tỷ nhưng vẫn đóng góp 42% LNTT tập đoàn.</a:t>
             </a:r>
             <a:r>
               <a:rPr kumimoji="1" lang="vi-VN" altLang="ko-KR" sz="800" b="0" dirty="0">
@@ -38108,7 +38108,7 @@
                 <a:ea typeface="Noto Sans" panose="020B0502040504020204" pitchFamily="34" charset="0"/>
                 <a:cs typeface="Noto Sans" panose="020B0502040504020204" pitchFamily="34" charset="0"/>
               </a:rPr>
-              <a:t>Số hóa khu vực công là nền tảng của danh mục trong nước: CNTT trong nước tăng nhanh nhất 6T26, đạt 4,236 tỷ đồng (+22.5% CK), LNTT mảng tăng gấp đôi lên 308 tỷ nhờ trúng thầu chuyển đổi số quốc gia — nguồn việc nhiều năm, ngoài chu kỳ CNTT toàn cầu, tuy biên 7.3% làm loãng biên chung. Doanh thu ký mới CNTT nước ngoài đạt 26,338 tỷ trong 1H26 (+32.3% CK), gồm 14 dự án trên 10 triệu USD — tỷ lệ ký mới/doanh thu 1.39 lần so với 1.07-1.22 lần giai đoạn FY21-25. Trên cơ sở đó, dự phóng CNTT nước ngoài tăng lên +16.7% FY27F và +17.7% FY28F, từ +14.7% FY26F và +13.4% của 1H26; Mỹ hạ về +5.9%.</a:t>
+              <a:t>Số hóa khu vực công là nền tảng danh mục trong nước: CNTT trong nước tăng nhanh nhất 6T26, đạt 4,236 tỷ đồng (+22.5% CK), LNTT mảng tăng gấp đôi lên 308 tỷ nhờ trúng thầu chuyển đổi số quốc gia — nguồn việc nhiều năm, ngoài chu kỳ CNTT toàn cầu, tuy biên 7.3% làm loãng biên chung. Doanh thu ký mới CNTT nước ngoài đạt 26,338 tỷ trong 1H26 (+32.3% CK), gồm 14 dự án trên 10 triệu USD — tỷ lệ ký mới/doanh thu 1.39 lần so với 1.07-1.22 lần FY21-25. Trên cơ sở đó, dự phóng CNTT nước ngoài tăng lên +16.7% FY27F và +17.7% FY28F, từ +14.7% FY26F và +13.4% của 1H26; Mỹ hạ về +5.9%.</a:t>
             </a:r>
             <a:r>
               <a:rPr kumimoji="1" lang="vi-VN" altLang="ko-KR" sz="800" b="0" dirty="0">
@@ -38187,7 +38187,7 @@
                 <a:ea typeface="Noto Sans" panose="020B0502040504020204" pitchFamily="34" charset="0"/>
                 <a:cs typeface="Noto Sans" panose="020B0502040504020204" pitchFamily="34" charset="0"/>
               </a:rPr>
-              <a:t>Dự phóng và định giá: LNST-CĐTS FY26F đạt 10,944 tỷ đồng (+15.6% CK), FY27F 12,674 tỷ (+15.8%) và FY28F 14,774 tỷ (+16.6%). Lợi nhuận công ty liên kết — FPT Telecom (45.66%, theo phương pháp VCSH từ FY26), FPT Retail, Synnex FPT và FPT Online — tăng lên 2,608 tỷ FY26F và 3,449 tỷ FY28F, đã tăng 40.8% CK trong 1H26. Đòn bẩy hoạt động: chi phí bán hàng và quản lý giảm từ 17.6% doanh thu xuống 16.5% vào FY28F, biên gộp giữ nguyên. ROE quanh 27% nhờ tiền ròng khoảng 60% VCSH và cổ tức 2,000 đồng/cp. Nâng giá mục tiêu DCF (FCFF) lên 87,950 đồng từ 78,750 đồng, hạ chi phí nợ vay về 9.0% từ 11.5% (thực tế 1H26: 4.0%), đưa WACC xuống 11.4%; phần bù rủi ro vốn cổ phần giữ 8.97% và tăng trưởng dài hạn 1.5% để phản ánh rủi ro AI làm giảm giá dịch vụ CNTT. Tại 71,700 đồng, cổ phiếu ở 11.2x P/E FY26F so với trung vị 5 năm trên 18x; tại giá mục tiêu là 13.7x FY26F và 11.8x FY27F, tiềm năng tăng 23% (MUA). Rủi ro: (1) giảm phát giá do AI nhanh hơn giả định tăng trưởng dài hạn (2) chi tiêu CNTT tại Mỹ và toàn cầu thấp cùng hợp đồng trì hoãn do thuế quan (3) biến động tỷ giá JPY/USD.</a:t>
+              <a:t>Dự phóng và định giá: LNST-CĐTS FY26F đạt 10,944 tỷ đồng (+15.6% CK), FY27F 12,674 tỷ (+15.8%) và FY28F 14,774 tỷ (+16.6%). Lợi nhuận công ty liên kết — FPT Telecom (45.66%, theo phương pháp VCSH từ FY26), FPT Retail, Synnex FPT và FPT Online — tăng lên 2,608 tỷ FY26F và 3,449 tỷ FY28F, đã tăng 40.8% CK trong 1H26. Đòn bẩy hoạt động: chi phí bán hàng và quản lý giảm từ 17.6% doanh thu xuống 16.5% vào FY28F, biên gộp giữ nguyên. ROE quanh 27% nhờ tiền ròng khoảng 60% VCSH và cổ tức 2,000 đồng/cp. Nâng giá mục tiêu DCF (FCFF) lên 87,950 đồng từ 78,750 đồng, hạ chi phí nợ vay về 9.0% từ 11.5% (thực tế 1H26: 4.0%), đưa WACC xuống 11.4%; phần bù rủi ro vốn cổ phần giữ 8.97% và tăng trưởng dài hạn 1.5%, phản ánh rủi ro AI làm giảm giá dịch vụ CNTT. Tại 71,700 đồng, cổ phiếu ở 11.2x P/E FY26F so với trung vị 5 năm trên 18x; tại giá mục tiêu là 13.7x FY26F và 11.8x FY27F, tiềm năng tăng 23% (MUA). Thông tin AI vẫn tích cực: mở rộng hợp tác với Microsoft tại ASEAN, Nhật Bản, Hàn Quốc và chứng nhận trung gian dữ liệu quốc gia. Rủi ro: (1) giảm phát giá do AI nhanh hơn giả định tăng trưởng dài hạn (2) chi tiêu CNTT tại Mỹ và toàn cầu thấp, hợp đồng trì hoãn do thuế quan (3) biến động tỷ giá JPY/USD.</a:t>
             </a:r>
             <a:r>
               <a:rPr kumimoji="1" lang="vi-VN" altLang="ko-KR" sz="800" b="0" dirty="0">

--- a/MASVN_RS_WM_2H26_outlook_Equity_VN_2026_STBFPT_31July2026.pptx
+++ b/MASVN_RS_WM_2H26_outlook_Equity_VN_2026_STBFPT_31July2026.pptx
@@ -29888,7 +29888,7 @@
         </p:nvGraphicFramePr>
         <p:xfrm>
           <a:off x="6010273" y="4182363"/>
-          <a:ext cx="5729627" cy="2258568"/>
+          <a:ext cx="5729627" cy="2430000"/>
         </p:xfrm>
         <a:graphic>
           <a:graphicData uri="http://schemas.openxmlformats.org/drawingml/2006/table">
@@ -29947,7 +29947,7 @@
                   </a:extLst>
                 </a:gridCol>
               </a:tblGrid>
-              <a:tr h="173736">
+              <a:tr h="162000">
                 <a:tc>
                   <a:txBody>
                     <a:bodyPr/>
@@ -30367,7 +30367,7 @@
                   </a:ext>
                 </a:extLst>
               </a:tr>
-              <a:tr h="173736">
+              <a:tr h="162000">
                 <a:tc>
                   <a:txBody>
                     <a:bodyPr/>
@@ -30733,2673 +30733,7 @@
                   </a:ext>
                 </a:extLst>
               </a:tr>
-              <a:tr h="173736">
-                <a:tc>
-                  <a:txBody>
-                    <a:bodyPr/>
-                    <a:lstStyle/>
-                    <a:p>
-                      <a:pPr marL="0" marR="41910" algn="l" latinLnBrk="1" hangingPunct="0">
-                        <a:lnSpc>
-                          <a:spcPts val="950"/>
-                        </a:lnSpc>
-                        <a:spcBef>
-                          <a:spcPts val="0"/>
-                        </a:spcBef>
-                        <a:spcAft>
-                          <a:spcPts val="0"/>
-                        </a:spcAft>
-                      </a:pPr>
-                      <a:r>
-                        <a:rPr lang="en-US" sz="800" b="0" spc="-40" dirty="0">
-                          <a:solidFill>
-                            <a:srgbClr val="000000"/>
-                          </a:solidFill>
-                          <a:effectLst/>
-                          <a:latin typeface="Noto Sans" panose="020B0502040504020204" pitchFamily="34" charset="0"/>
-                          <a:ea typeface="Noto Sans" panose="020B0502040504020204" pitchFamily="34" charset="0"/>
-                          <a:cs typeface="Noto Sans" panose="020B0502040504020204" pitchFamily="34" charset="0"/>
-                        </a:rPr>
-                        <a:t>Operating profit (VNDbn)</a:t>
-                      </a:r>
-                    </a:p>
-                  </a:txBody>
-                  <a:tcPr marL="0" marR="0" marT="0" marB="0" anchor="ctr">
-                    <a:lnL w="12700" cmpd="sng">
-                      <a:noFill/>
-                    </a:lnL>
-                    <a:lnR w="12700" cmpd="sng">
-                      <a:noFill/>
-                    </a:lnR>
-                    <a:lnT w="12700" cmpd="sng">
-                      <a:noFill/>
-                    </a:lnT>
-                    <a:lnB w="12700" cmpd="sng">
-                      <a:noFill/>
-                    </a:lnB>
-                    <a:lnTlToBr w="12700" cmpd="sng">
-                      <a:noFill/>
-                      <a:prstDash val="solid"/>
-                    </a:lnTlToBr>
-                    <a:lnBlToTr w="12700" cmpd="sng">
-                      <a:noFill/>
-                      <a:prstDash val="solid"/>
-                    </a:lnBlToTr>
-                    <a:noFill/>
-                  </a:tcPr>
-                </a:tc>
-                <a:tc>
-                  <a:txBody>
-                    <a:bodyPr/>
-                    <a:lstStyle/>
-                    <a:p>
-                      <a:pPr algn="r" fontAlgn="ctr">
-                        <a:buNone/>
-                      </a:pPr>
-                      <a:r>
-                        <a:rPr lang="en-US" sz="750" b="0" i="0" u="none" strike="noStrike">
-                          <a:effectLst/>
-                          <a:latin typeface="Noto Sans" panose="020B0502040504020204" pitchFamily="34" charset="0"/>
-                        </a:rPr>
-                        <a:t>8,452</a:t>
-                      </a:r>
-                    </a:p>
-                  </a:txBody>
-                  <a:tcPr marL="0" marR="0" marT="0" marB="0" anchor="ctr">
-                    <a:lnL w="12700" cmpd="sng">
-                      <a:noFill/>
-                    </a:lnL>
-                    <a:lnR w="12700" cmpd="sng">
-                      <a:noFill/>
-                    </a:lnR>
-                    <a:lnT w="12700" cmpd="sng">
-                      <a:noFill/>
-                    </a:lnT>
-                    <a:lnB w="12700" cmpd="sng">
-                      <a:noFill/>
-                    </a:lnB>
-                    <a:lnTlToBr w="12700" cmpd="sng">
-                      <a:noFill/>
-                      <a:prstDash val="solid"/>
-                    </a:lnTlToBr>
-                    <a:lnBlToTr w="12700" cmpd="sng">
-                      <a:noFill/>
-                      <a:prstDash val="solid"/>
-                    </a:lnBlToTr>
-                    <a:noFill/>
-                  </a:tcPr>
-                </a:tc>
-                <a:tc>
-                  <a:txBody>
-                    <a:bodyPr/>
-                    <a:lstStyle/>
-                    <a:p>
-                      <a:pPr algn="r" fontAlgn="ctr">
-                        <a:buNone/>
-                      </a:pPr>
-                      <a:r>
-                        <a:rPr lang="en-US" sz="750" b="0" i="0" u="none" strike="noStrike">
-                          <a:effectLst/>
-                          <a:latin typeface="Noto Sans" panose="020B0502040504020204" pitchFamily="34" charset="0"/>
-                        </a:rPr>
-                        <a:t>10,508</a:t>
-                      </a:r>
-                    </a:p>
-                  </a:txBody>
-                  <a:tcPr marL="0" marR="0" marT="0" marB="0" anchor="ctr">
-                    <a:lnL w="12700" cmpd="sng">
-                      <a:noFill/>
-                    </a:lnL>
-                    <a:lnR w="12700" cmpd="sng">
-                      <a:noFill/>
-                    </a:lnR>
-                    <a:lnT w="12700" cmpd="sng">
-                      <a:noFill/>
-                    </a:lnT>
-                    <a:lnB w="12700" cmpd="sng">
-                      <a:noFill/>
-                    </a:lnB>
-                    <a:lnTlToBr w="12700" cmpd="sng">
-                      <a:noFill/>
-                      <a:prstDash val="solid"/>
-                    </a:lnTlToBr>
-                    <a:lnBlToTr w="12700" cmpd="sng">
-                      <a:noFill/>
-                      <a:prstDash val="solid"/>
-                    </a:lnBlToTr>
-                    <a:noFill/>
-                  </a:tcPr>
-                </a:tc>
-                <a:tc>
-                  <a:txBody>
-                    <a:bodyPr/>
-                    <a:lstStyle/>
-                    <a:p>
-                      <a:pPr algn="r" fontAlgn="ctr">
-                        <a:buNone/>
-                      </a:pPr>
-                      <a:r>
-                        <a:rPr lang="en-US" sz="750" b="0" i="0" u="none" strike="noStrike">
-                          <a:effectLst/>
-                          <a:latin typeface="Noto Sans" panose="020B0502040504020204" pitchFamily="34" charset="0"/>
-                        </a:rPr>
-                        <a:t>11,079</a:t>
-                      </a:r>
-                    </a:p>
-                  </a:txBody>
-                  <a:tcPr marL="0" marR="0" marT="0" marB="0" anchor="ctr">
-                    <a:lnL w="12700" cmpd="sng">
-                      <a:noFill/>
-                    </a:lnL>
-                    <a:lnR w="12700" cmpd="sng">
-                      <a:noFill/>
-                    </a:lnR>
-                    <a:lnT w="12700" cmpd="sng">
-                      <a:noFill/>
-                    </a:lnT>
-                    <a:lnB w="12700" cmpd="sng">
-                      <a:noFill/>
-                    </a:lnB>
-                    <a:lnTlToBr w="12700" cmpd="sng">
-                      <a:noFill/>
-                      <a:prstDash val="solid"/>
-                    </a:lnTlToBr>
-                    <a:lnBlToTr w="12700" cmpd="sng">
-                      <a:noFill/>
-                      <a:prstDash val="solid"/>
-                    </a:lnBlToTr>
-                    <a:noFill/>
-                  </a:tcPr>
-                </a:tc>
-                <a:tc>
-                  <a:txBody>
-                    <a:bodyPr/>
-                    <a:lstStyle/>
-                    <a:p>
-                      <a:pPr algn="r" fontAlgn="ctr">
-                        <a:buNone/>
-                      </a:pPr>
-                      <a:r>
-                        <a:rPr lang="en-US" sz="750" b="0" i="0" u="none" strike="noStrike">
-                          <a:effectLst/>
-                          <a:latin typeface="Noto Sans" panose="020B0502040504020204" pitchFamily="34" charset="0"/>
-                        </a:rPr>
-                        <a:t>9,807</a:t>
-                      </a:r>
-                    </a:p>
-                  </a:txBody>
-                  <a:tcPr marL="0" marR="0" marT="0" marB="0" anchor="ctr">
-                    <a:lnL w="12700" cmpd="sng">
-                      <a:noFill/>
-                    </a:lnL>
-                    <a:lnR w="12700" cmpd="sng">
-                      <a:noFill/>
-                    </a:lnR>
-                    <a:lnT w="12700" cmpd="sng">
-                      <a:noFill/>
-                    </a:lnT>
-                    <a:lnB w="12700" cmpd="sng">
-                      <a:noFill/>
-                    </a:lnB>
-                    <a:lnTlToBr w="12700" cmpd="sng">
-                      <a:noFill/>
-                      <a:prstDash val="solid"/>
-                    </a:lnTlToBr>
-                    <a:lnBlToTr w="12700" cmpd="sng">
-                      <a:noFill/>
-                      <a:prstDash val="solid"/>
-                    </a:lnBlToTr>
-                    <a:solidFill>
-                      <a:schemeClr val="accent4">
-                        <a:lumMod val="20000"/>
-                        <a:lumOff val="80000"/>
-                      </a:schemeClr>
-                    </a:solidFill>
-                  </a:tcPr>
-                </a:tc>
-                <a:tc>
-                  <a:txBody>
-                    <a:bodyPr/>
-                    <a:lstStyle/>
-                    <a:p>
-                      <a:pPr algn="r" fontAlgn="ctr">
-                        <a:buNone/>
-                      </a:pPr>
-                      <a:r>
-                        <a:rPr lang="en-US" sz="750" b="0" i="0" u="none" strike="noStrike">
-                          <a:effectLst/>
-                          <a:latin typeface="Noto Sans" panose="020B0502040504020204" pitchFamily="34" charset="0"/>
-                        </a:rPr>
-                        <a:t>11,044</a:t>
-                      </a:r>
-                    </a:p>
-                  </a:txBody>
-                  <a:tcPr marL="0" marR="0" marT="0" marB="0" anchor="ctr">
-                    <a:lnL w="12700" cmpd="sng">
-                      <a:noFill/>
-                    </a:lnL>
-                    <a:lnR w="12700" cmpd="sng">
-                      <a:noFill/>
-                    </a:lnR>
-                    <a:lnT w="12700" cmpd="sng">
-                      <a:noFill/>
-                    </a:lnT>
-                    <a:lnB w="12700" cmpd="sng">
-                      <a:noFill/>
-                    </a:lnB>
-                    <a:lnTlToBr w="12700" cmpd="sng">
-                      <a:noFill/>
-                      <a:prstDash val="solid"/>
-                    </a:lnTlToBr>
-                    <a:lnBlToTr w="12700" cmpd="sng">
-                      <a:noFill/>
-                      <a:prstDash val="solid"/>
-                    </a:lnBlToTr>
-                    <a:solidFill>
-                      <a:schemeClr val="bg1"/>
-                    </a:solidFill>
-                  </a:tcPr>
-                </a:tc>
-                <a:tc>
-                  <a:txBody>
-                    <a:bodyPr/>
-                    <a:lstStyle/>
-                    <a:p>
-                      <a:pPr algn="r" fontAlgn="ctr">
-                        <a:buNone/>
-                      </a:pPr>
-                      <a:r>
-                        <a:rPr lang="en-US" sz="750" b="0" i="0" u="none" strike="noStrike">
-                          <a:effectLst/>
-                          <a:latin typeface="Noto Sans" panose="020B0502040504020204" pitchFamily="34" charset="0"/>
-                        </a:rPr>
-                        <a:t>13,053</a:t>
-                      </a:r>
-                    </a:p>
-                  </a:txBody>
-                  <a:tcPr marL="0" marR="0" marT="0" marB="0" anchor="ctr">
-                    <a:lnL w="12700" cmpd="sng">
-                      <a:noFill/>
-                    </a:lnL>
-                    <a:lnR w="12700" cmpd="sng">
-                      <a:noFill/>
-                    </a:lnR>
-                    <a:lnT w="12700" cmpd="sng">
-                      <a:noFill/>
-                    </a:lnT>
-                    <a:lnB w="12700" cmpd="sng">
-                      <a:noFill/>
-                    </a:lnB>
-                    <a:lnTlToBr w="12700" cmpd="sng">
-                      <a:noFill/>
-                      <a:prstDash val="solid"/>
-                    </a:lnTlToBr>
-                    <a:lnBlToTr w="12700" cmpd="sng">
-                      <a:noFill/>
-                      <a:prstDash val="solid"/>
-                    </a:lnBlToTr>
-                    <a:noFill/>
-                  </a:tcPr>
-                </a:tc>
-                <a:extLst>
-                  <a:ext uri="{0D108BD9-81ED-4DB2-BD59-A6C34878D82A}">
-                    <a16:rowId xmlns:a16="http://schemas.microsoft.com/office/drawing/2014/main" val="10002"/>
-                  </a:ext>
-                </a:extLst>
-              </a:tr>
-              <a:tr h="173736">
-                <a:tc>
-                  <a:txBody>
-                    <a:bodyPr/>
-                    <a:lstStyle/>
-                    <a:p>
-                      <a:pPr marL="0" marR="41910" algn="l" latinLnBrk="1" hangingPunct="0">
-                        <a:lnSpc>
-                          <a:spcPts val="950"/>
-                        </a:lnSpc>
-                        <a:spcBef>
-                          <a:spcPts val="0"/>
-                        </a:spcBef>
-                        <a:spcAft>
-                          <a:spcPts val="0"/>
-                        </a:spcAft>
-                      </a:pPr>
-                      <a:r>
-                        <a:rPr lang="en-US" sz="800" b="0" spc="-40" dirty="0">
-                          <a:solidFill>
-                            <a:srgbClr val="000000"/>
-                          </a:solidFill>
-                          <a:effectLst/>
-                          <a:latin typeface="Noto Sans" panose="020B0502040504020204" pitchFamily="34" charset="0"/>
-                          <a:ea typeface="Noto Sans" panose="020B0502040504020204" pitchFamily="34" charset="0"/>
-                          <a:cs typeface="Noto Sans" panose="020B0502040504020204" pitchFamily="34" charset="0"/>
-                        </a:rPr>
-                        <a:t>PBT (VNDbn)</a:t>
-                      </a:r>
-                    </a:p>
-                  </a:txBody>
-                  <a:tcPr marL="0" marR="0" marT="0" marB="0" anchor="ctr">
-                    <a:lnL w="12700" cmpd="sng">
-                      <a:noFill/>
-                    </a:lnL>
-                    <a:lnR w="12700" cmpd="sng">
-                      <a:noFill/>
-                    </a:lnR>
-                    <a:lnT w="12700" cmpd="sng">
-                      <a:noFill/>
-                    </a:lnT>
-                    <a:lnB w="12700" cmpd="sng">
-                      <a:noFill/>
-                    </a:lnB>
-                    <a:lnTlToBr w="12700" cmpd="sng">
-                      <a:noFill/>
-                      <a:prstDash val="solid"/>
-                    </a:lnTlToBr>
-                    <a:lnBlToTr w="12700" cmpd="sng">
-                      <a:noFill/>
-                      <a:prstDash val="solid"/>
-                    </a:lnBlToTr>
-                    <a:noFill/>
-                  </a:tcPr>
-                </a:tc>
-                <a:tc>
-                  <a:txBody>
-                    <a:bodyPr/>
-                    <a:lstStyle/>
-                    <a:p>
-                      <a:pPr algn="r" rtl="0" fontAlgn="ctr">
-                        <a:buNone/>
-                      </a:pPr>
-                      <a:r>
-                        <a:rPr lang="en-US" sz="750" b="0" i="0" u="none" strike="noStrike">
-                          <a:solidFill>
-                            <a:srgbClr val="000000"/>
-                          </a:solidFill>
-                          <a:effectLst/>
-                          <a:latin typeface="Noto Sans" panose="020B0502040504020204" pitchFamily="34" charset="0"/>
-                        </a:rPr>
-                        <a:t>9,203</a:t>
-                      </a:r>
-                    </a:p>
-                  </a:txBody>
-                  <a:tcPr marL="0" marR="0" marT="0" marB="0" anchor="ctr">
-                    <a:lnL w="12700" cmpd="sng">
-                      <a:noFill/>
-                    </a:lnL>
-                    <a:lnR w="12700" cmpd="sng">
-                      <a:noFill/>
-                    </a:lnR>
-                    <a:lnT w="12700" cmpd="sng">
-                      <a:noFill/>
-                    </a:lnT>
-                    <a:lnB w="12700" cmpd="sng">
-                      <a:noFill/>
-                    </a:lnB>
-                    <a:lnTlToBr w="12700" cmpd="sng">
-                      <a:noFill/>
-                      <a:prstDash val="solid"/>
-                    </a:lnTlToBr>
-                    <a:lnBlToTr w="12700" cmpd="sng">
-                      <a:noFill/>
-                      <a:prstDash val="solid"/>
-                    </a:lnBlToTr>
-                    <a:noFill/>
-                  </a:tcPr>
-                </a:tc>
-                <a:tc>
-                  <a:txBody>
-                    <a:bodyPr/>
-                    <a:lstStyle/>
-                    <a:p>
-                      <a:pPr algn="r" rtl="0" fontAlgn="ctr">
-                        <a:buNone/>
-                      </a:pPr>
-                      <a:r>
-                        <a:rPr lang="en-US" sz="750" b="0" i="0" u="none" strike="noStrike">
-                          <a:solidFill>
-                            <a:srgbClr val="000000"/>
-                          </a:solidFill>
-                          <a:effectLst/>
-                          <a:latin typeface="Noto Sans" panose="020B0502040504020204" pitchFamily="34" charset="0"/>
-                        </a:rPr>
-                        <a:t>11,070</a:t>
-                      </a:r>
-                    </a:p>
-                  </a:txBody>
-                  <a:tcPr marL="0" marR="0" marT="0" marB="0" anchor="ctr">
-                    <a:lnL w="12700" cmpd="sng">
-                      <a:noFill/>
-                    </a:lnL>
-                    <a:lnR w="12700" cmpd="sng">
-                      <a:noFill/>
-                    </a:lnR>
-                    <a:lnT w="12700" cmpd="sng">
-                      <a:noFill/>
-                    </a:lnT>
-                    <a:lnB w="12700" cmpd="sng">
-                      <a:noFill/>
-                    </a:lnB>
-                    <a:lnTlToBr w="12700" cmpd="sng">
-                      <a:noFill/>
-                      <a:prstDash val="solid"/>
-                    </a:lnTlToBr>
-                    <a:lnBlToTr w="12700" cmpd="sng">
-                      <a:noFill/>
-                      <a:prstDash val="solid"/>
-                    </a:lnBlToTr>
-                    <a:noFill/>
-                  </a:tcPr>
-                </a:tc>
-                <a:tc>
-                  <a:txBody>
-                    <a:bodyPr/>
-                    <a:lstStyle/>
-                    <a:p>
-                      <a:pPr algn="r" rtl="0" fontAlgn="ctr">
-                        <a:buNone/>
-                      </a:pPr>
-                      <a:r>
-                        <a:rPr lang="en-US" sz="750" b="0" i="0" u="none" strike="noStrike">
-                          <a:solidFill>
-                            <a:srgbClr val="000000"/>
-                          </a:solidFill>
-                          <a:effectLst/>
-                          <a:latin typeface="Noto Sans" panose="020B0502040504020204" pitchFamily="34" charset="0"/>
-                        </a:rPr>
-                        <a:t>13,134</a:t>
-                      </a:r>
-                    </a:p>
-                  </a:txBody>
-                  <a:tcPr marL="0" marR="0" marT="0" marB="0" anchor="ctr">
-                    <a:lnL w="12700" cmpd="sng">
-                      <a:noFill/>
-                    </a:lnL>
-                    <a:lnR w="12700" cmpd="sng">
-                      <a:noFill/>
-                    </a:lnR>
-                    <a:lnT w="12700" cmpd="sng">
-                      <a:noFill/>
-                    </a:lnT>
-                    <a:lnB w="12700" cmpd="sng">
-                      <a:noFill/>
-                    </a:lnB>
-                    <a:lnTlToBr w="12700" cmpd="sng">
-                      <a:noFill/>
-                      <a:prstDash val="solid"/>
-                    </a:lnTlToBr>
-                    <a:lnBlToTr w="12700" cmpd="sng">
-                      <a:noFill/>
-                      <a:prstDash val="solid"/>
-                    </a:lnBlToTr>
-                    <a:noFill/>
-                  </a:tcPr>
-                </a:tc>
-                <a:tc>
-                  <a:txBody>
-                    <a:bodyPr/>
-                    <a:lstStyle/>
-                    <a:p>
-                      <a:pPr algn="r" rtl="0" fontAlgn="ctr">
-                        <a:buNone/>
-                      </a:pPr>
-                      <a:r>
-                        <a:rPr lang="en-US" sz="750" b="0" i="0" u="none" strike="noStrike">
-                          <a:solidFill>
-                            <a:srgbClr val="000000"/>
-                          </a:solidFill>
-                          <a:effectLst/>
-                          <a:latin typeface="Noto Sans" panose="020B0502040504020204" pitchFamily="34" charset="0"/>
-                        </a:rPr>
-                        <a:t>13,070</a:t>
-                      </a:r>
-                    </a:p>
-                  </a:txBody>
-                  <a:tcPr marL="0" marR="0" marT="0" marB="0" anchor="ctr">
-                    <a:lnL w="12700" cmpd="sng">
-                      <a:noFill/>
-                    </a:lnL>
-                    <a:lnR w="12700" cmpd="sng">
-                      <a:noFill/>
-                    </a:lnR>
-                    <a:lnT w="12700" cmpd="sng">
-                      <a:noFill/>
-                    </a:lnT>
-                    <a:lnB w="12700" cmpd="sng">
-                      <a:noFill/>
-                    </a:lnB>
-                    <a:lnTlToBr w="12700" cmpd="sng">
-                      <a:noFill/>
-                      <a:prstDash val="solid"/>
-                    </a:lnTlToBr>
-                    <a:lnBlToTr w="12700" cmpd="sng">
-                      <a:noFill/>
-                      <a:prstDash val="solid"/>
-                    </a:lnBlToTr>
-                    <a:solidFill>
-                      <a:schemeClr val="accent4">
-                        <a:lumMod val="20000"/>
-                        <a:lumOff val="80000"/>
-                      </a:schemeClr>
-                    </a:solidFill>
-                  </a:tcPr>
-                </a:tc>
-                <a:tc>
-                  <a:txBody>
-                    <a:bodyPr/>
-                    <a:lstStyle/>
-                    <a:p>
-                      <a:pPr algn="r" rtl="0" fontAlgn="ctr">
-                        <a:buNone/>
-                      </a:pPr>
-                      <a:r>
-                        <a:rPr lang="en-US" sz="750" b="0" i="0" u="none" strike="noStrike">
-                          <a:solidFill>
-                            <a:srgbClr val="000000"/>
-                          </a:solidFill>
-                          <a:effectLst/>
-                          <a:latin typeface="Noto Sans" panose="020B0502040504020204" pitchFamily="34" charset="0"/>
-                        </a:rPr>
-                        <a:t>15,159</a:t>
-                      </a:r>
-                    </a:p>
-                  </a:txBody>
-                  <a:tcPr marL="0" marR="0" marT="0" marB="0" anchor="ctr">
-                    <a:lnL w="12700" cmpd="sng">
-                      <a:noFill/>
-                    </a:lnL>
-                    <a:lnR w="12700" cmpd="sng">
-                      <a:noFill/>
-                    </a:lnR>
-                    <a:lnT w="12700" cmpd="sng">
-                      <a:noFill/>
-                    </a:lnT>
-                    <a:lnB w="12700" cmpd="sng">
-                      <a:noFill/>
-                    </a:lnB>
-                    <a:lnTlToBr w="12700" cmpd="sng">
-                      <a:noFill/>
-                      <a:prstDash val="solid"/>
-                    </a:lnTlToBr>
-                    <a:lnBlToTr w="12700" cmpd="sng">
-                      <a:noFill/>
-                      <a:prstDash val="solid"/>
-                    </a:lnBlToTr>
-                    <a:solidFill>
-                      <a:schemeClr val="bg1"/>
-                    </a:solidFill>
-                  </a:tcPr>
-                </a:tc>
-                <a:tc>
-                  <a:txBody>
-                    <a:bodyPr/>
-                    <a:lstStyle/>
-                    <a:p>
-                      <a:pPr algn="r" rtl="0" fontAlgn="ctr">
-                        <a:buNone/>
-                      </a:pPr>
-                      <a:r>
-                        <a:rPr lang="en-US" sz="750" b="0" i="0" u="none" strike="noStrike">
-                          <a:solidFill>
-                            <a:srgbClr val="000000"/>
-                          </a:solidFill>
-                          <a:effectLst/>
-                          <a:latin typeface="Noto Sans" panose="020B0502040504020204" pitchFamily="34" charset="0"/>
-                        </a:rPr>
-                        <a:t>17,671</a:t>
-                      </a:r>
-                    </a:p>
-                  </a:txBody>
-                  <a:tcPr marL="0" marR="0" marT="0" marB="0" anchor="ctr">
-                    <a:lnL w="12700" cmpd="sng">
-                      <a:noFill/>
-                    </a:lnL>
-                    <a:lnR w="12700" cmpd="sng">
-                      <a:noFill/>
-                    </a:lnR>
-                    <a:lnT w="12700" cmpd="sng">
-                      <a:noFill/>
-                    </a:lnT>
-                    <a:lnB w="12700" cmpd="sng">
-                      <a:noFill/>
-                    </a:lnB>
-                    <a:lnTlToBr w="12700" cmpd="sng">
-                      <a:noFill/>
-                      <a:prstDash val="solid"/>
-                    </a:lnTlToBr>
-                    <a:lnBlToTr w="12700" cmpd="sng">
-                      <a:noFill/>
-                      <a:prstDash val="solid"/>
-                    </a:lnBlToTr>
-                    <a:noFill/>
-                  </a:tcPr>
-                </a:tc>
-                <a:extLst>
-                  <a:ext uri="{0D108BD9-81ED-4DB2-BD59-A6C34878D82A}">
-                    <a16:rowId xmlns:a16="http://schemas.microsoft.com/office/drawing/2014/main" val="10003"/>
-                  </a:ext>
-                </a:extLst>
-              </a:tr>
-              <a:tr h="173736">
-                <a:tc>
-                  <a:txBody>
-                    <a:bodyPr/>
-                    <a:lstStyle/>
-                    <a:p>
-                      <a:pPr marL="0" marR="0" algn="l" latinLnBrk="1" hangingPunct="0">
-                        <a:lnSpc>
-                          <a:spcPts val="950"/>
-                        </a:lnSpc>
-                        <a:spcBef>
-                          <a:spcPts val="0"/>
-                        </a:spcBef>
-                        <a:spcAft>
-                          <a:spcPts val="0"/>
-                        </a:spcAft>
-                      </a:pPr>
-                      <a:r>
-                        <a:rPr lang="en-US" sz="800" b="0" spc="-40" dirty="0">
-                          <a:solidFill>
-                            <a:srgbClr val="000000"/>
-                          </a:solidFill>
-                          <a:effectLst/>
-                          <a:latin typeface="Noto Sans" panose="020B0502040504020204" pitchFamily="34" charset="0"/>
-                          <a:ea typeface="Noto Sans" panose="020B0502040504020204" pitchFamily="34" charset="0"/>
-                          <a:cs typeface="Noto Sans" panose="020B0502040504020204" pitchFamily="34" charset="0"/>
-                        </a:rPr>
-                        <a:t>NPATMI (VNDbn)</a:t>
-                      </a:r>
-                    </a:p>
-                  </a:txBody>
-                  <a:tcPr marL="0" marR="0" marT="0" marB="0" anchor="ctr">
-                    <a:lnL w="12700" cmpd="sng">
-                      <a:noFill/>
-                    </a:lnL>
-                    <a:lnR w="12700" cmpd="sng">
-                      <a:noFill/>
-                    </a:lnR>
-                    <a:lnT w="12700" cmpd="sng">
-                      <a:noFill/>
-                    </a:lnT>
-                    <a:lnB w="12700" cmpd="sng">
-                      <a:noFill/>
-                    </a:lnB>
-                    <a:lnTlToBr w="12700" cmpd="sng">
-                      <a:noFill/>
-                      <a:prstDash val="solid"/>
-                    </a:lnTlToBr>
-                    <a:lnBlToTr w="12700" cmpd="sng">
-                      <a:noFill/>
-                      <a:prstDash val="solid"/>
-                    </a:lnBlToTr>
-                    <a:noFill/>
-                  </a:tcPr>
-                </a:tc>
-                <a:tc>
-                  <a:txBody>
-                    <a:bodyPr/>
-                    <a:lstStyle/>
-                    <a:p>
-                      <a:pPr algn="r" rtl="0" fontAlgn="ctr">
-                        <a:buNone/>
-                      </a:pPr>
-                      <a:r>
-                        <a:rPr lang="en-US" sz="750" b="0" i="0" u="none" strike="noStrike">
-                          <a:solidFill>
-                            <a:srgbClr val="000000"/>
-                          </a:solidFill>
-                          <a:effectLst/>
-                          <a:latin typeface="Noto Sans" panose="020B0502040504020204" pitchFamily="34" charset="0"/>
-                        </a:rPr>
-                        <a:t>6,465</a:t>
-                      </a:r>
-                    </a:p>
-                  </a:txBody>
-                  <a:tcPr marL="0" marR="0" marT="0" marB="0" anchor="ctr">
-                    <a:lnL w="12700" cmpd="sng">
-                      <a:noFill/>
-                    </a:lnL>
-                    <a:lnR w="12700" cmpd="sng">
-                      <a:noFill/>
-                    </a:lnR>
-                    <a:lnT w="12700" cmpd="sng">
-                      <a:noFill/>
-                    </a:lnT>
-                    <a:lnB w="12700" cmpd="sng">
-                      <a:noFill/>
-                    </a:lnB>
-                    <a:lnTlToBr w="12700" cmpd="sng">
-                      <a:noFill/>
-                      <a:prstDash val="solid"/>
-                    </a:lnTlToBr>
-                    <a:lnBlToTr w="12700" cmpd="sng">
-                      <a:noFill/>
-                      <a:prstDash val="solid"/>
-                    </a:lnBlToTr>
-                    <a:noFill/>
-                  </a:tcPr>
-                </a:tc>
-                <a:tc>
-                  <a:txBody>
-                    <a:bodyPr/>
-                    <a:lstStyle/>
-                    <a:p>
-                      <a:pPr algn="r" rtl="0" fontAlgn="ctr">
-                        <a:buNone/>
-                      </a:pPr>
-                      <a:r>
-                        <a:rPr lang="en-US" sz="750" b="0" i="0" u="none" strike="noStrike">
-                          <a:solidFill>
-                            <a:srgbClr val="000000"/>
-                          </a:solidFill>
-                          <a:effectLst/>
-                          <a:latin typeface="Noto Sans" panose="020B0502040504020204" pitchFamily="34" charset="0"/>
-                        </a:rPr>
-                        <a:t>7,857</a:t>
-                      </a:r>
-                    </a:p>
-                  </a:txBody>
-                  <a:tcPr marL="0" marR="0" marT="0" marB="0" anchor="ctr">
-                    <a:lnL w="12700" cmpd="sng">
-                      <a:noFill/>
-                    </a:lnL>
-                    <a:lnR w="12700" cmpd="sng">
-                      <a:noFill/>
-                    </a:lnR>
-                    <a:lnT w="12700" cmpd="sng">
-                      <a:noFill/>
-                    </a:lnT>
-                    <a:lnB w="12700" cmpd="sng">
-                      <a:noFill/>
-                    </a:lnB>
-                    <a:lnTlToBr w="12700" cmpd="sng">
-                      <a:noFill/>
-                      <a:prstDash val="solid"/>
-                    </a:lnTlToBr>
-                    <a:lnBlToTr w="12700" cmpd="sng">
-                      <a:noFill/>
-                      <a:prstDash val="solid"/>
-                    </a:lnBlToTr>
-                    <a:noFill/>
-                  </a:tcPr>
-                </a:tc>
-                <a:tc>
-                  <a:txBody>
-                    <a:bodyPr/>
-                    <a:lstStyle/>
-                    <a:p>
-                      <a:pPr algn="r" rtl="0" fontAlgn="ctr">
-                        <a:buNone/>
-                      </a:pPr>
-                      <a:r>
-                        <a:rPr lang="en-US" sz="750" b="0" i="0" u="none" strike="noStrike">
-                          <a:solidFill>
-                            <a:srgbClr val="000000"/>
-                          </a:solidFill>
-                          <a:effectLst/>
-                          <a:latin typeface="Noto Sans" panose="020B0502040504020204" pitchFamily="34" charset="0"/>
-                        </a:rPr>
-                        <a:t>9,464</a:t>
-                      </a:r>
-                    </a:p>
-                  </a:txBody>
-                  <a:tcPr marL="0" marR="0" marT="0" marB="0" anchor="ctr">
-                    <a:lnL w="12700" cmpd="sng">
-                      <a:noFill/>
-                    </a:lnL>
-                    <a:lnR w="12700" cmpd="sng">
-                      <a:noFill/>
-                    </a:lnR>
-                    <a:lnT w="12700" cmpd="sng">
-                      <a:noFill/>
-                    </a:lnT>
-                    <a:lnB w="12700" cmpd="sng">
-                      <a:noFill/>
-                    </a:lnB>
-                    <a:lnTlToBr w="12700" cmpd="sng">
-                      <a:noFill/>
-                      <a:prstDash val="solid"/>
-                    </a:lnTlToBr>
-                    <a:lnBlToTr w="12700" cmpd="sng">
-                      <a:noFill/>
-                      <a:prstDash val="solid"/>
-                    </a:lnBlToTr>
-                    <a:noFill/>
-                  </a:tcPr>
-                </a:tc>
-                <a:tc>
-                  <a:txBody>
-                    <a:bodyPr/>
-                    <a:lstStyle/>
-                    <a:p>
-                      <a:pPr algn="r" rtl="0" fontAlgn="ctr">
-                        <a:buNone/>
-                      </a:pPr>
-                      <a:r>
-                        <a:rPr lang="en-US" sz="750" b="0" i="0" u="none" strike="noStrike">
-                          <a:solidFill>
-                            <a:srgbClr val="000000"/>
-                          </a:solidFill>
-                          <a:effectLst/>
-                          <a:latin typeface="Noto Sans" panose="020B0502040504020204" pitchFamily="34" charset="0"/>
-                        </a:rPr>
-                        <a:t>10,944</a:t>
-                      </a:r>
-                    </a:p>
-                  </a:txBody>
-                  <a:tcPr marL="0" marR="0" marT="0" marB="0" anchor="ctr">
-                    <a:lnL w="12700" cmpd="sng">
-                      <a:noFill/>
-                    </a:lnL>
-                    <a:lnR w="12700" cmpd="sng">
-                      <a:noFill/>
-                    </a:lnR>
-                    <a:lnT w="12700" cmpd="sng">
-                      <a:noFill/>
-                    </a:lnT>
-                    <a:lnB w="12700" cmpd="sng">
-                      <a:noFill/>
-                    </a:lnB>
-                    <a:lnTlToBr w="12700" cmpd="sng">
-                      <a:noFill/>
-                      <a:prstDash val="solid"/>
-                    </a:lnTlToBr>
-                    <a:lnBlToTr w="12700" cmpd="sng">
-                      <a:noFill/>
-                      <a:prstDash val="solid"/>
-                    </a:lnBlToTr>
-                    <a:solidFill>
-                      <a:schemeClr val="accent4">
-                        <a:lumMod val="20000"/>
-                        <a:lumOff val="80000"/>
-                      </a:schemeClr>
-                    </a:solidFill>
-                  </a:tcPr>
-                </a:tc>
-                <a:tc>
-                  <a:txBody>
-                    <a:bodyPr/>
-                    <a:lstStyle/>
-                    <a:p>
-                      <a:pPr algn="r" rtl="0" fontAlgn="ctr">
-                        <a:buNone/>
-                      </a:pPr>
-                      <a:r>
-                        <a:rPr lang="en-US" sz="750" b="0" i="0" u="none" strike="noStrike">
-                          <a:solidFill>
-                            <a:srgbClr val="000000"/>
-                          </a:solidFill>
-                          <a:effectLst/>
-                          <a:latin typeface="Noto Sans" panose="020B0502040504020204" pitchFamily="34" charset="0"/>
-                        </a:rPr>
-                        <a:t>12,674</a:t>
-                      </a:r>
-                    </a:p>
-                  </a:txBody>
-                  <a:tcPr marL="0" marR="0" marT="0" marB="0" anchor="ctr">
-                    <a:lnL w="12700" cmpd="sng">
-                      <a:noFill/>
-                    </a:lnL>
-                    <a:lnR w="12700" cmpd="sng">
-                      <a:noFill/>
-                    </a:lnR>
-                    <a:lnT w="12700" cmpd="sng">
-                      <a:noFill/>
-                    </a:lnT>
-                    <a:lnB w="12700" cmpd="sng">
-                      <a:noFill/>
-                    </a:lnB>
-                    <a:lnTlToBr w="12700" cmpd="sng">
-                      <a:noFill/>
-                      <a:prstDash val="solid"/>
-                    </a:lnTlToBr>
-                    <a:lnBlToTr w="12700" cmpd="sng">
-                      <a:noFill/>
-                      <a:prstDash val="solid"/>
-                    </a:lnBlToTr>
-                    <a:solidFill>
-                      <a:schemeClr val="bg1"/>
-                    </a:solidFill>
-                  </a:tcPr>
-                </a:tc>
-                <a:tc>
-                  <a:txBody>
-                    <a:bodyPr/>
-                    <a:lstStyle/>
-                    <a:p>
-                      <a:pPr algn="r" rtl="0" fontAlgn="ctr">
-                        <a:buNone/>
-                      </a:pPr>
-                      <a:r>
-                        <a:rPr lang="en-US" sz="750" b="0" i="0" u="none" strike="noStrike">
-                          <a:solidFill>
-                            <a:srgbClr val="000000"/>
-                          </a:solidFill>
-                          <a:effectLst/>
-                          <a:latin typeface="Noto Sans" panose="020B0502040504020204" pitchFamily="34" charset="0"/>
-                        </a:rPr>
-                        <a:t>14,774</a:t>
-                      </a:r>
-                    </a:p>
-                  </a:txBody>
-                  <a:tcPr marL="0" marR="0" marT="0" marB="0" anchor="ctr">
-                    <a:lnL w="12700" cmpd="sng">
-                      <a:noFill/>
-                    </a:lnL>
-                    <a:lnR w="12700" cmpd="sng">
-                      <a:noFill/>
-                    </a:lnR>
-                    <a:lnT w="12700" cmpd="sng">
-                      <a:noFill/>
-                    </a:lnT>
-                    <a:lnB w="12700" cmpd="sng">
-                      <a:noFill/>
-                    </a:lnB>
-                    <a:lnTlToBr w="12700" cmpd="sng">
-                      <a:noFill/>
-                      <a:prstDash val="solid"/>
-                    </a:lnTlToBr>
-                    <a:lnBlToTr w="12700" cmpd="sng">
-                      <a:noFill/>
-                      <a:prstDash val="solid"/>
-                    </a:lnBlToTr>
-                    <a:noFill/>
-                  </a:tcPr>
-                </a:tc>
-                <a:extLst>
-                  <a:ext uri="{0D108BD9-81ED-4DB2-BD59-A6C34878D82A}">
-                    <a16:rowId xmlns:a16="http://schemas.microsoft.com/office/drawing/2014/main" val="3039360553"/>
-                  </a:ext>
-                </a:extLst>
-              </a:tr>
-              <a:tr h="173736">
-                <a:tc>
-                  <a:txBody>
-                    <a:bodyPr/>
-                    <a:lstStyle/>
-                    <a:p>
-                      <a:pPr marL="0" marR="0" algn="l" latinLnBrk="1" hangingPunct="0">
-                        <a:lnSpc>
-                          <a:spcPts val="950"/>
-                        </a:lnSpc>
-                        <a:spcBef>
-                          <a:spcPts val="0"/>
-                        </a:spcBef>
-                        <a:spcAft>
-                          <a:spcPts val="0"/>
-                        </a:spcAft>
-                      </a:pPr>
-                      <a:r>
-                        <a:rPr lang="en-US" sz="800" b="0" spc="-40" dirty="0">
-                          <a:solidFill>
-                            <a:srgbClr val="000000"/>
-                          </a:solidFill>
-                          <a:effectLst/>
-                          <a:latin typeface="Noto Sans" panose="020B0502040504020204" pitchFamily="34" charset="0"/>
-                          <a:ea typeface="Noto Sans" panose="020B0502040504020204" pitchFamily="34" charset="0"/>
-                          <a:cs typeface="Noto Sans" panose="020B0502040504020204" pitchFamily="34" charset="0"/>
-                        </a:rPr>
-                        <a:t>EPS (VND)</a:t>
-                      </a:r>
-                    </a:p>
-                  </a:txBody>
-                  <a:tcPr marL="0" marR="0" marT="0" marB="0" anchor="ctr">
-                    <a:lnL w="12700" cmpd="sng">
-                      <a:noFill/>
-                    </a:lnL>
-                    <a:lnR w="12700" cmpd="sng">
-                      <a:noFill/>
-                    </a:lnR>
-                    <a:lnT w="12700" cmpd="sng">
-                      <a:noFill/>
-                    </a:lnT>
-                    <a:lnB w="12700" cmpd="sng">
-                      <a:noFill/>
-                    </a:lnB>
-                    <a:lnTlToBr w="12700" cmpd="sng">
-                      <a:noFill/>
-                      <a:prstDash val="solid"/>
-                    </a:lnTlToBr>
-                    <a:lnBlToTr w="12700" cmpd="sng">
-                      <a:noFill/>
-                      <a:prstDash val="solid"/>
-                    </a:lnBlToTr>
-                    <a:noFill/>
-                  </a:tcPr>
-                </a:tc>
-                <a:tc>
-                  <a:txBody>
-                    <a:bodyPr/>
-                    <a:lstStyle/>
-                    <a:p>
-                      <a:pPr algn="r" rtl="0" fontAlgn="ctr">
-                        <a:buNone/>
-                      </a:pPr>
-                      <a:r>
-                        <a:rPr lang="en-US" sz="750" b="0" i="0" u="none" strike="noStrike">
-                          <a:solidFill>
-                            <a:srgbClr val="000000"/>
-                          </a:solidFill>
-                          <a:effectLst/>
-                          <a:latin typeface="Noto Sans" panose="020B0502040504020204" pitchFamily="34" charset="0"/>
-                        </a:rPr>
-                        <a:t>4,648</a:t>
-                      </a:r>
-                    </a:p>
-                  </a:txBody>
-                  <a:tcPr marL="0" marR="0" marT="0" marB="0" anchor="ctr">
-                    <a:lnL w="12700" cmpd="sng">
-                      <a:noFill/>
-                    </a:lnL>
-                    <a:lnR w="12700" cmpd="sng">
-                      <a:noFill/>
-                    </a:lnR>
-                    <a:lnT w="12700" cmpd="sng">
-                      <a:noFill/>
-                    </a:lnT>
-                    <a:lnB w="12700" cmpd="sng">
-                      <a:noFill/>
-                    </a:lnB>
-                    <a:lnTlToBr w="12700" cmpd="sng">
-                      <a:noFill/>
-                      <a:prstDash val="solid"/>
-                    </a:lnTlToBr>
-                    <a:lnBlToTr w="12700" cmpd="sng">
-                      <a:noFill/>
-                      <a:prstDash val="solid"/>
-                    </a:lnBlToTr>
-                    <a:noFill/>
-                  </a:tcPr>
-                </a:tc>
-                <a:tc>
-                  <a:txBody>
-                    <a:bodyPr/>
-                    <a:lstStyle/>
-                    <a:p>
-                      <a:pPr algn="r" rtl="0" fontAlgn="ctr">
-                        <a:buNone/>
-                      </a:pPr>
-                      <a:r>
-                        <a:rPr lang="en-US" sz="750" b="0" i="0" u="none" strike="noStrike">
-                          <a:solidFill>
-                            <a:srgbClr val="000000"/>
-                          </a:solidFill>
-                          <a:effectLst/>
-                          <a:latin typeface="Noto Sans" panose="020B0502040504020204" pitchFamily="34" charset="0"/>
-                        </a:rPr>
-                        <a:t>4,877</a:t>
-                      </a:r>
-                    </a:p>
-                  </a:txBody>
-                  <a:tcPr marL="0" marR="0" marT="0" marB="0" anchor="ctr">
-                    <a:lnL w="12700" cmpd="sng">
-                      <a:noFill/>
-                    </a:lnL>
-                    <a:lnR w="12700" cmpd="sng">
-                      <a:noFill/>
-                    </a:lnR>
-                    <a:lnT w="12700" cmpd="sng">
-                      <a:noFill/>
-                    </a:lnT>
-                    <a:lnB w="12700" cmpd="sng">
-                      <a:noFill/>
-                    </a:lnB>
-                    <a:lnTlToBr w="12700" cmpd="sng">
-                      <a:noFill/>
-                      <a:prstDash val="solid"/>
-                    </a:lnTlToBr>
-                    <a:lnBlToTr w="12700" cmpd="sng">
-                      <a:noFill/>
-                      <a:prstDash val="solid"/>
-                    </a:lnBlToTr>
-                    <a:noFill/>
-                  </a:tcPr>
-                </a:tc>
-                <a:tc>
-                  <a:txBody>
-                    <a:bodyPr/>
-                    <a:lstStyle/>
-                    <a:p>
-                      <a:pPr algn="r" rtl="0" fontAlgn="ctr">
-                        <a:buNone/>
-                      </a:pPr>
-                      <a:r>
-                        <a:rPr lang="en-US" sz="750" b="0" i="0" u="none" strike="noStrike">
-                          <a:solidFill>
-                            <a:srgbClr val="000000"/>
-                          </a:solidFill>
-                          <a:effectLst/>
-                          <a:latin typeface="Noto Sans" panose="020B0502040504020204" pitchFamily="34" charset="0"/>
-                        </a:rPr>
-                        <a:t>5,073</a:t>
-                      </a:r>
-                    </a:p>
-                  </a:txBody>
-                  <a:tcPr marL="0" marR="0" marT="0" marB="0" anchor="ctr">
-                    <a:lnL w="12700" cmpd="sng">
-                      <a:noFill/>
-                    </a:lnL>
-                    <a:lnR w="12700" cmpd="sng">
-                      <a:noFill/>
-                    </a:lnR>
-                    <a:lnT w="12700" cmpd="sng">
-                      <a:noFill/>
-                    </a:lnT>
-                    <a:lnB w="12700" cmpd="sng">
-                      <a:noFill/>
-                    </a:lnB>
-                    <a:lnTlToBr w="12700" cmpd="sng">
-                      <a:noFill/>
-                      <a:prstDash val="solid"/>
-                    </a:lnTlToBr>
-                    <a:lnBlToTr w="12700" cmpd="sng">
-                      <a:noFill/>
-                      <a:prstDash val="solid"/>
-                    </a:lnBlToTr>
-                    <a:noFill/>
-                  </a:tcPr>
-                </a:tc>
-                <a:tc>
-                  <a:txBody>
-                    <a:bodyPr/>
-                    <a:lstStyle/>
-                    <a:p>
-                      <a:pPr algn="r" rtl="0" fontAlgn="ctr">
-                        <a:buNone/>
-                      </a:pPr>
-                      <a:r>
-                        <a:rPr lang="en-US" sz="750" b="0" i="0" u="none" strike="noStrike">
-                          <a:solidFill>
-                            <a:srgbClr val="000000"/>
-                          </a:solidFill>
-                          <a:effectLst/>
-                          <a:latin typeface="Noto Sans" panose="020B0502040504020204" pitchFamily="34" charset="0"/>
-                        </a:rPr>
-                        <a:t>6,424</a:t>
-                      </a:r>
-                    </a:p>
-                  </a:txBody>
-                  <a:tcPr marL="0" marR="0" marT="0" marB="0" anchor="ctr">
-                    <a:lnL w="12700" cmpd="sng">
-                      <a:noFill/>
-                    </a:lnL>
-                    <a:lnR w="12700" cmpd="sng">
-                      <a:noFill/>
-                    </a:lnR>
-                    <a:lnT w="12700" cmpd="sng">
-                      <a:noFill/>
-                    </a:lnT>
-                    <a:lnB w="12700" cmpd="sng">
-                      <a:noFill/>
-                    </a:lnB>
-                    <a:lnTlToBr w="12700" cmpd="sng">
-                      <a:noFill/>
-                      <a:prstDash val="solid"/>
-                    </a:lnTlToBr>
-                    <a:lnBlToTr w="12700" cmpd="sng">
-                      <a:noFill/>
-                      <a:prstDash val="solid"/>
-                    </a:lnBlToTr>
-                    <a:solidFill>
-                      <a:schemeClr val="accent4">
-                        <a:lumMod val="20000"/>
-                        <a:lumOff val="80000"/>
-                      </a:schemeClr>
-                    </a:solidFill>
-                  </a:tcPr>
-                </a:tc>
-                <a:tc>
-                  <a:txBody>
-                    <a:bodyPr/>
-                    <a:lstStyle/>
-                    <a:p>
-                      <a:pPr algn="r" rtl="0" fontAlgn="ctr">
-                        <a:buNone/>
-                      </a:pPr>
-                      <a:r>
-                        <a:rPr lang="en-US" sz="750" b="0" i="0" u="none" strike="noStrike">
-                          <a:solidFill>
-                            <a:srgbClr val="000000"/>
-                          </a:solidFill>
-                          <a:effectLst/>
-                          <a:latin typeface="Noto Sans" panose="020B0502040504020204" pitchFamily="34" charset="0"/>
-                        </a:rPr>
-                        <a:t>7,440</a:t>
-                      </a:r>
-                    </a:p>
-                  </a:txBody>
-                  <a:tcPr marL="0" marR="0" marT="0" marB="0" anchor="ctr">
-                    <a:lnL w="12700" cmpd="sng">
-                      <a:noFill/>
-                    </a:lnL>
-                    <a:lnR w="12700" cmpd="sng">
-                      <a:noFill/>
-                    </a:lnR>
-                    <a:lnT w="12700" cmpd="sng">
-                      <a:noFill/>
-                    </a:lnT>
-                    <a:lnB w="12700" cmpd="sng">
-                      <a:noFill/>
-                    </a:lnB>
-                    <a:lnTlToBr w="12700" cmpd="sng">
-                      <a:noFill/>
-                      <a:prstDash val="solid"/>
-                    </a:lnTlToBr>
-                    <a:lnBlToTr w="12700" cmpd="sng">
-                      <a:noFill/>
-                      <a:prstDash val="solid"/>
-                    </a:lnBlToTr>
-                    <a:solidFill>
-                      <a:schemeClr val="bg1"/>
-                    </a:solidFill>
-                  </a:tcPr>
-                </a:tc>
-                <a:tc>
-                  <a:txBody>
-                    <a:bodyPr/>
-                    <a:lstStyle/>
-                    <a:p>
-                      <a:pPr algn="r" rtl="0" fontAlgn="ctr">
-                        <a:buNone/>
-                      </a:pPr>
-                      <a:r>
-                        <a:rPr lang="en-US" sz="750" b="0" i="0" u="none" strike="noStrike">
-                          <a:solidFill>
-                            <a:srgbClr val="000000"/>
-                          </a:solidFill>
-                          <a:effectLst/>
-                          <a:latin typeface="Noto Sans" panose="020B0502040504020204" pitchFamily="34" charset="0"/>
-                        </a:rPr>
-                        <a:t>8,673</a:t>
-                      </a:r>
-                    </a:p>
-                  </a:txBody>
-                  <a:tcPr marL="0" marR="0" marT="0" marB="0" anchor="ctr">
-                    <a:lnL w="12700" cmpd="sng">
-                      <a:noFill/>
-                    </a:lnL>
-                    <a:lnR w="12700" cmpd="sng">
-                      <a:noFill/>
-                    </a:lnR>
-                    <a:lnT w="12700" cmpd="sng">
-                      <a:noFill/>
-                    </a:lnT>
-                    <a:lnB w="12700" cmpd="sng">
-                      <a:noFill/>
-                    </a:lnB>
-                    <a:lnTlToBr w="12700" cmpd="sng">
-                      <a:noFill/>
-                      <a:prstDash val="solid"/>
-                    </a:lnTlToBr>
-                    <a:lnBlToTr w="12700" cmpd="sng">
-                      <a:noFill/>
-                      <a:prstDash val="solid"/>
-                    </a:lnBlToTr>
-                    <a:noFill/>
-                  </a:tcPr>
-                </a:tc>
-                <a:extLst>
-                  <a:ext uri="{0D108BD9-81ED-4DB2-BD59-A6C34878D82A}">
-                    <a16:rowId xmlns:a16="http://schemas.microsoft.com/office/drawing/2014/main" val="10004"/>
-                  </a:ext>
-                </a:extLst>
-              </a:tr>
-              <a:tr h="173736">
-                <a:tc>
-                  <a:txBody>
-                    <a:bodyPr/>
-                    <a:lstStyle/>
-                    <a:p>
-                      <a:pPr marL="0" marR="0" algn="l" latinLnBrk="1" hangingPunct="0">
-                        <a:lnSpc>
-                          <a:spcPts val="950"/>
-                        </a:lnSpc>
-                        <a:spcBef>
-                          <a:spcPts val="0"/>
-                        </a:spcBef>
-                        <a:spcAft>
-                          <a:spcPts val="0"/>
-                        </a:spcAft>
-                      </a:pPr>
-                      <a:r>
-                        <a:rPr lang="en-US" sz="800" b="0" spc="-40" dirty="0">
-                          <a:solidFill>
-                            <a:srgbClr val="000000"/>
-                          </a:solidFill>
-                          <a:effectLst/>
-                          <a:latin typeface="Noto Sans" panose="020B0502040504020204" pitchFamily="34" charset="0"/>
-                          <a:ea typeface="Noto Sans" panose="020B0502040504020204" pitchFamily="34" charset="0"/>
-                          <a:cs typeface="Noto Sans" panose="020B0502040504020204" pitchFamily="34" charset="0"/>
-                        </a:rPr>
-                        <a:t>ROE (%)</a:t>
-                      </a:r>
-                    </a:p>
-                  </a:txBody>
-                  <a:tcPr marL="0" marR="0" marT="0" marB="0" anchor="ctr">
-                    <a:lnL w="12700" cmpd="sng">
-                      <a:noFill/>
-                    </a:lnL>
-                    <a:lnR w="12700" cmpd="sng">
-                      <a:noFill/>
-                    </a:lnR>
-                    <a:lnT w="12700" cmpd="sng">
-                      <a:noFill/>
-                    </a:lnT>
-                    <a:lnB w="12700" cmpd="sng">
-                      <a:noFill/>
-                    </a:lnB>
-                    <a:lnTlToBr w="12700" cmpd="sng">
-                      <a:noFill/>
-                      <a:prstDash val="solid"/>
-                    </a:lnTlToBr>
-                    <a:lnBlToTr w="12700" cmpd="sng">
-                      <a:noFill/>
-                      <a:prstDash val="solid"/>
-                    </a:lnBlToTr>
-                    <a:noFill/>
-                  </a:tcPr>
-                </a:tc>
-                <a:tc>
-                  <a:txBody>
-                    <a:bodyPr/>
-                    <a:lstStyle/>
-                    <a:p>
-                      <a:pPr algn="r" rtl="0" fontAlgn="ctr">
-                        <a:buNone/>
-                      </a:pPr>
-                      <a:r>
-                        <a:rPr lang="en-US" sz="750" b="0" i="0" u="none" strike="noStrike">
-                          <a:solidFill>
-                            <a:srgbClr val="000000"/>
-                          </a:solidFill>
-                          <a:effectLst/>
-                          <a:latin typeface="Noto Sans" panose="020B0502040504020204" pitchFamily="34" charset="0"/>
-                        </a:rPr>
-                        <a:t>28.1</a:t>
-                      </a:r>
-                    </a:p>
-                  </a:txBody>
-                  <a:tcPr marL="0" marR="0" marT="0" marB="0" anchor="ctr">
-                    <a:lnL w="12700" cmpd="sng">
-                      <a:noFill/>
-                    </a:lnL>
-                    <a:lnR w="12700" cmpd="sng">
-                      <a:noFill/>
-                    </a:lnR>
-                    <a:lnT w="12700" cmpd="sng">
-                      <a:noFill/>
-                    </a:lnT>
-                    <a:lnB w="12700" cmpd="sng">
-                      <a:noFill/>
-                    </a:lnB>
-                    <a:lnTlToBr w="12700" cmpd="sng">
-                      <a:noFill/>
-                      <a:prstDash val="solid"/>
-                    </a:lnTlToBr>
-                    <a:lnBlToTr w="12700" cmpd="sng">
-                      <a:noFill/>
-                      <a:prstDash val="solid"/>
-                    </a:lnBlToTr>
-                    <a:noFill/>
-                  </a:tcPr>
-                </a:tc>
-                <a:tc>
-                  <a:txBody>
-                    <a:bodyPr/>
-                    <a:lstStyle/>
-                    <a:p>
-                      <a:pPr algn="r" rtl="0" fontAlgn="ctr">
-                        <a:buNone/>
-                      </a:pPr>
-                      <a:r>
-                        <a:rPr lang="en-US" sz="750" b="0" i="0" u="none" strike="noStrike">
-                          <a:solidFill>
-                            <a:srgbClr val="000000"/>
-                          </a:solidFill>
-                          <a:effectLst/>
-                          <a:latin typeface="Noto Sans" panose="020B0502040504020204" pitchFamily="34" charset="0"/>
-                        </a:rPr>
-                        <a:t>28.7</a:t>
-                      </a:r>
-                    </a:p>
-                  </a:txBody>
-                  <a:tcPr marL="0" marR="0" marT="0" marB="0" anchor="ctr">
-                    <a:lnL w="12700" cmpd="sng">
-                      <a:noFill/>
-                    </a:lnL>
-                    <a:lnR w="12700" cmpd="sng">
-                      <a:noFill/>
-                    </a:lnR>
-                    <a:lnT w="12700" cmpd="sng">
-                      <a:noFill/>
-                    </a:lnT>
-                    <a:lnB w="12700" cmpd="sng">
-                      <a:noFill/>
-                    </a:lnB>
-                    <a:lnTlToBr w="12700" cmpd="sng">
-                      <a:noFill/>
-                      <a:prstDash val="solid"/>
-                    </a:lnTlToBr>
-                    <a:lnBlToTr w="12700" cmpd="sng">
-                      <a:noFill/>
-                      <a:prstDash val="solid"/>
-                    </a:lnBlToTr>
-                    <a:noFill/>
-                  </a:tcPr>
-                </a:tc>
-                <a:tc>
-                  <a:txBody>
-                    <a:bodyPr/>
-                    <a:lstStyle/>
-                    <a:p>
-                      <a:pPr algn="r" rtl="0" fontAlgn="ctr">
-                        <a:buNone/>
-                      </a:pPr>
-                      <a:r>
-                        <a:rPr lang="en-US" sz="750" b="0" i="0" u="none" strike="noStrike">
-                          <a:solidFill>
-                            <a:srgbClr val="000000"/>
-                          </a:solidFill>
-                          <a:effectLst/>
-                          <a:latin typeface="Noto Sans" panose="020B0502040504020204" pitchFamily="34" charset="0"/>
-                        </a:rPr>
-                        <a:t>28.6</a:t>
-                      </a:r>
-                    </a:p>
-                  </a:txBody>
-                  <a:tcPr marL="0" marR="0" marT="0" marB="0" anchor="ctr">
-                    <a:lnL w="12700" cmpd="sng">
-                      <a:noFill/>
-                    </a:lnL>
-                    <a:lnR w="12700" cmpd="sng">
-                      <a:noFill/>
-                    </a:lnR>
-                    <a:lnT w="12700" cmpd="sng">
-                      <a:noFill/>
-                    </a:lnT>
-                    <a:lnB w="12700" cmpd="sng">
-                      <a:noFill/>
-                    </a:lnB>
-                    <a:lnTlToBr w="12700" cmpd="sng">
-                      <a:noFill/>
-                      <a:prstDash val="solid"/>
-                    </a:lnTlToBr>
-                    <a:lnBlToTr w="12700" cmpd="sng">
-                      <a:noFill/>
-                      <a:prstDash val="solid"/>
-                    </a:lnBlToTr>
-                    <a:noFill/>
-                  </a:tcPr>
-                </a:tc>
-                <a:tc>
-                  <a:txBody>
-                    <a:bodyPr/>
-                    <a:lstStyle/>
-                    <a:p>
-                      <a:pPr algn="r" rtl="0" fontAlgn="ctr">
-                        <a:buNone/>
-                      </a:pPr>
-                      <a:r>
-                        <a:rPr lang="en-US" sz="750" b="0" i="0" u="none" strike="noStrike">
-                          <a:solidFill>
-                            <a:srgbClr val="000000"/>
-                          </a:solidFill>
-                          <a:effectLst/>
-                          <a:latin typeface="Noto Sans" panose="020B0502040504020204" pitchFamily="34" charset="0"/>
-                        </a:rPr>
-                        <a:t>27.6</a:t>
-                      </a:r>
-                    </a:p>
-                  </a:txBody>
-                  <a:tcPr marL="0" marR="0" marT="0" marB="0" anchor="ctr">
-                    <a:lnL w="12700" cmpd="sng">
-                      <a:noFill/>
-                    </a:lnL>
-                    <a:lnR w="12700" cmpd="sng">
-                      <a:noFill/>
-                    </a:lnR>
-                    <a:lnT w="12700" cmpd="sng">
-                      <a:noFill/>
-                    </a:lnT>
-                    <a:lnB w="12700" cmpd="sng">
-                      <a:noFill/>
-                    </a:lnB>
-                    <a:lnTlToBr w="12700" cmpd="sng">
-                      <a:noFill/>
-                      <a:prstDash val="solid"/>
-                    </a:lnTlToBr>
-                    <a:lnBlToTr w="12700" cmpd="sng">
-                      <a:noFill/>
-                      <a:prstDash val="solid"/>
-                    </a:lnBlToTr>
-                    <a:solidFill>
-                      <a:schemeClr val="accent4">
-                        <a:lumMod val="20000"/>
-                        <a:lumOff val="80000"/>
-                      </a:schemeClr>
-                    </a:solidFill>
-                  </a:tcPr>
-                </a:tc>
-                <a:tc>
-                  <a:txBody>
-                    <a:bodyPr/>
-                    <a:lstStyle/>
-                    <a:p>
-                      <a:pPr algn="r" rtl="0" fontAlgn="ctr">
-                        <a:buNone/>
-                      </a:pPr>
-                      <a:r>
-                        <a:rPr lang="en-US" sz="750" b="0" i="0" u="none" strike="noStrike">
-                          <a:solidFill>
-                            <a:srgbClr val="000000"/>
-                          </a:solidFill>
-                          <a:effectLst/>
-                          <a:latin typeface="Noto Sans" panose="020B0502040504020204" pitchFamily="34" charset="0"/>
-                        </a:rPr>
-                        <a:t>27.1</a:t>
-                      </a:r>
-                    </a:p>
-                  </a:txBody>
-                  <a:tcPr marL="0" marR="0" marT="0" marB="0" anchor="ctr">
-                    <a:lnL w="12700" cmpd="sng">
-                      <a:noFill/>
-                    </a:lnL>
-                    <a:lnR w="12700" cmpd="sng">
-                      <a:noFill/>
-                    </a:lnR>
-                    <a:lnT w="12700" cmpd="sng">
-                      <a:noFill/>
-                    </a:lnT>
-                    <a:lnB w="12700" cmpd="sng">
-                      <a:noFill/>
-                    </a:lnB>
-                    <a:lnTlToBr w="12700" cmpd="sng">
-                      <a:noFill/>
-                      <a:prstDash val="solid"/>
-                    </a:lnTlToBr>
-                    <a:lnBlToTr w="12700" cmpd="sng">
-                      <a:noFill/>
-                      <a:prstDash val="solid"/>
-                    </a:lnBlToTr>
-                    <a:solidFill>
-                      <a:schemeClr val="bg1"/>
-                    </a:solidFill>
-                  </a:tcPr>
-                </a:tc>
-                <a:tc>
-                  <a:txBody>
-                    <a:bodyPr/>
-                    <a:lstStyle/>
-                    <a:p>
-                      <a:pPr algn="r" rtl="0" fontAlgn="ctr">
-                        <a:buNone/>
-                      </a:pPr>
-                      <a:r>
-                        <a:rPr lang="en-US" sz="750" b="0" i="0" u="none" strike="noStrike">
-                          <a:solidFill>
-                            <a:srgbClr val="000000"/>
-                          </a:solidFill>
-                          <a:effectLst/>
-                          <a:latin typeface="Noto Sans" panose="020B0502040504020204" pitchFamily="34" charset="0"/>
-                        </a:rPr>
-                        <a:t>26.5</a:t>
-                      </a:r>
-                    </a:p>
-                  </a:txBody>
-                  <a:tcPr marL="0" marR="0" marT="0" marB="0" anchor="ctr">
-                    <a:lnL w="12700" cmpd="sng">
-                      <a:noFill/>
-                    </a:lnL>
-                    <a:lnR w="12700" cmpd="sng">
-                      <a:noFill/>
-                    </a:lnR>
-                    <a:lnT w="12700" cmpd="sng">
-                      <a:noFill/>
-                    </a:lnT>
-                    <a:lnB w="12700" cmpd="sng">
-                      <a:noFill/>
-                    </a:lnB>
-                    <a:lnTlToBr w="12700" cmpd="sng">
-                      <a:noFill/>
-                      <a:prstDash val="solid"/>
-                    </a:lnTlToBr>
-                    <a:lnBlToTr w="12700" cmpd="sng">
-                      <a:noFill/>
-                      <a:prstDash val="solid"/>
-                    </a:lnBlToTr>
-                    <a:noFill/>
-                  </a:tcPr>
-                </a:tc>
-                <a:extLst>
-                  <a:ext uri="{0D108BD9-81ED-4DB2-BD59-A6C34878D82A}">
-                    <a16:rowId xmlns:a16="http://schemas.microsoft.com/office/drawing/2014/main" val="10005"/>
-                  </a:ext>
-                </a:extLst>
-              </a:tr>
-              <a:tr h="173736">
-                <a:tc>
-                  <a:txBody>
-                    <a:bodyPr/>
-                    <a:lstStyle/>
-                    <a:p>
-                      <a:pPr marL="0" marR="0" algn="l" latinLnBrk="1" hangingPunct="0">
-                        <a:lnSpc>
-                          <a:spcPts val="950"/>
-                        </a:lnSpc>
-                        <a:spcBef>
-                          <a:spcPts val="0"/>
-                        </a:spcBef>
-                        <a:spcAft>
-                          <a:spcPts val="0"/>
-                        </a:spcAft>
-                      </a:pPr>
-                      <a:r>
-                        <a:rPr lang="en-US" sz="800" b="0" spc="-40" dirty="0">
-                          <a:solidFill>
-                            <a:srgbClr val="000000"/>
-                          </a:solidFill>
-                          <a:effectLst/>
-                          <a:latin typeface="Noto Sans" panose="020B0502040504020204" pitchFamily="34" charset="0"/>
-                          <a:ea typeface="Noto Sans" panose="020B0502040504020204" pitchFamily="34" charset="0"/>
-                          <a:cs typeface="Noto Sans" panose="020B0502040504020204" pitchFamily="34" charset="0"/>
-                        </a:rPr>
-                        <a:t>P/E (x)</a:t>
-                      </a:r>
-                    </a:p>
-                  </a:txBody>
-                  <a:tcPr marL="0" marR="0" marT="0" marB="0" anchor="ctr">
-                    <a:lnL w="12700" cmpd="sng">
-                      <a:noFill/>
-                    </a:lnL>
-                    <a:lnR w="12700" cmpd="sng">
-                      <a:noFill/>
-                    </a:lnR>
-                    <a:lnT w="12700" cmpd="sng">
-                      <a:noFill/>
-                    </a:lnT>
-                    <a:lnB w="12700" cmpd="sng">
-                      <a:noFill/>
-                    </a:lnB>
-                    <a:lnTlToBr w="12700" cmpd="sng">
-                      <a:noFill/>
-                      <a:prstDash val="solid"/>
-                    </a:lnTlToBr>
-                    <a:lnBlToTr w="12700" cmpd="sng">
-                      <a:noFill/>
-                      <a:prstDash val="solid"/>
-                    </a:lnBlToTr>
-                    <a:noFill/>
-                  </a:tcPr>
-                </a:tc>
-                <a:tc>
-                  <a:txBody>
-                    <a:bodyPr/>
-                    <a:lstStyle/>
-                    <a:p>
-                      <a:pPr algn="r" rtl="0" fontAlgn="ctr">
-                        <a:buNone/>
-                      </a:pPr>
-                      <a:r>
-                        <a:rPr lang="en-US" sz="750" b="0" i="0" u="none" strike="noStrike">
-                          <a:solidFill>
-                            <a:srgbClr val="000000"/>
-                          </a:solidFill>
-                          <a:effectLst/>
-                          <a:latin typeface="Noto Sans" panose="020B0502040504020204" pitchFamily="34" charset="0"/>
-                        </a:rPr>
-                        <a:t>19.7</a:t>
-                      </a:r>
-                    </a:p>
-                  </a:txBody>
-                  <a:tcPr marL="0" marR="0" marT="0" marB="0" anchor="ctr">
-                    <a:lnL w="12700" cmpd="sng">
-                      <a:noFill/>
-                    </a:lnL>
-                    <a:lnR w="12700" cmpd="sng">
-                      <a:noFill/>
-                    </a:lnR>
-                    <a:lnT w="12700" cmpd="sng">
-                      <a:noFill/>
-                    </a:lnT>
-                    <a:lnB w="12700" cmpd="sng">
-                      <a:noFill/>
-                    </a:lnB>
-                    <a:lnTlToBr w="12700" cmpd="sng">
-                      <a:noFill/>
-                      <a:prstDash val="solid"/>
-                    </a:lnTlToBr>
-                    <a:lnBlToTr w="12700" cmpd="sng">
-                      <a:noFill/>
-                      <a:prstDash val="solid"/>
-                    </a:lnBlToTr>
-                    <a:noFill/>
-                  </a:tcPr>
-                </a:tc>
-                <a:tc>
-                  <a:txBody>
-                    <a:bodyPr/>
-                    <a:lstStyle/>
-                    <a:p>
-                      <a:pPr algn="r" rtl="0" fontAlgn="ctr">
-                        <a:buNone/>
-                      </a:pPr>
-                      <a:r>
-                        <a:rPr lang="en-US" sz="750" b="0" i="0" u="none" strike="noStrike">
-                          <a:solidFill>
-                            <a:srgbClr val="000000"/>
-                          </a:solidFill>
-                          <a:effectLst/>
-                          <a:latin typeface="Noto Sans" panose="020B0502040504020204" pitchFamily="34" charset="0"/>
-                        </a:rPr>
-                        <a:t>18.8</a:t>
-                      </a:r>
-                    </a:p>
-                  </a:txBody>
-                  <a:tcPr marL="0" marR="0" marT="0" marB="0" anchor="ctr">
-                    <a:lnL w="12700" cmpd="sng">
-                      <a:noFill/>
-                    </a:lnL>
-                    <a:lnR w="12700" cmpd="sng">
-                      <a:noFill/>
-                    </a:lnR>
-                    <a:lnT w="12700" cmpd="sng">
-                      <a:noFill/>
-                    </a:lnT>
-                    <a:lnB w="12700" cmpd="sng">
-                      <a:noFill/>
-                    </a:lnB>
-                    <a:lnTlToBr w="12700" cmpd="sng">
-                      <a:noFill/>
-                      <a:prstDash val="solid"/>
-                    </a:lnTlToBr>
-                    <a:lnBlToTr w="12700" cmpd="sng">
-                      <a:noFill/>
-                      <a:prstDash val="solid"/>
-                    </a:lnBlToTr>
-                    <a:noFill/>
-                  </a:tcPr>
-                </a:tc>
-                <a:tc>
-                  <a:txBody>
-                    <a:bodyPr/>
-                    <a:lstStyle/>
-                    <a:p>
-                      <a:pPr algn="r" rtl="0" fontAlgn="ctr">
-                        <a:buNone/>
-                      </a:pPr>
-                      <a:r>
-                        <a:rPr lang="en-US" sz="750" b="0" i="0" u="none" strike="noStrike">
-                          <a:solidFill>
-                            <a:srgbClr val="000000"/>
-                          </a:solidFill>
-                          <a:effectLst/>
-                          <a:latin typeface="Noto Sans" panose="020B0502040504020204" pitchFamily="34" charset="0"/>
-                        </a:rPr>
-                        <a:t>18.1</a:t>
-                      </a:r>
-                    </a:p>
-                  </a:txBody>
-                  <a:tcPr marL="0" marR="0" marT="0" marB="0" anchor="ctr">
-                    <a:lnL w="12700" cmpd="sng">
-                      <a:noFill/>
-                    </a:lnL>
-                    <a:lnR w="12700" cmpd="sng">
-                      <a:noFill/>
-                    </a:lnR>
-                    <a:lnT w="12700" cmpd="sng">
-                      <a:noFill/>
-                    </a:lnT>
-                    <a:lnB w="12700" cmpd="sng">
-                      <a:noFill/>
-                    </a:lnB>
-                    <a:lnTlToBr w="12700" cmpd="sng">
-                      <a:noFill/>
-                      <a:prstDash val="solid"/>
-                    </a:lnTlToBr>
-                    <a:lnBlToTr w="12700" cmpd="sng">
-                      <a:noFill/>
-                      <a:prstDash val="solid"/>
-                    </a:lnBlToTr>
-                    <a:noFill/>
-                  </a:tcPr>
-                </a:tc>
-                <a:tc>
-                  <a:txBody>
-                    <a:bodyPr/>
-                    <a:lstStyle/>
-                    <a:p>
-                      <a:pPr algn="r" rtl="0" fontAlgn="ctr">
-                        <a:buNone/>
-                      </a:pPr>
-                      <a:r>
-                        <a:rPr lang="en-US" sz="750" b="0" i="0" u="none" strike="noStrike">
-                          <a:solidFill>
-                            <a:srgbClr val="000000"/>
-                          </a:solidFill>
-                          <a:effectLst/>
-                          <a:latin typeface="Noto Sans" panose="020B0502040504020204" pitchFamily="34" charset="0"/>
-                        </a:rPr>
-                        <a:t>13.7</a:t>
-                      </a:r>
-                    </a:p>
-                  </a:txBody>
-                  <a:tcPr marL="0" marR="0" marT="0" marB="0" anchor="ctr">
-                    <a:lnL w="12700" cmpd="sng">
-                      <a:noFill/>
-                    </a:lnL>
-                    <a:lnR w="12700" cmpd="sng">
-                      <a:noFill/>
-                    </a:lnR>
-                    <a:lnT w="12700" cmpd="sng">
-                      <a:noFill/>
-                    </a:lnT>
-                    <a:lnB w="12700" cmpd="sng">
-                      <a:noFill/>
-                    </a:lnB>
-                    <a:lnTlToBr w="12700" cmpd="sng">
-                      <a:noFill/>
-                      <a:prstDash val="solid"/>
-                    </a:lnTlToBr>
-                    <a:lnBlToTr w="12700" cmpd="sng">
-                      <a:noFill/>
-                      <a:prstDash val="solid"/>
-                    </a:lnBlToTr>
-                    <a:solidFill>
-                      <a:schemeClr val="accent4">
-                        <a:lumMod val="20000"/>
-                        <a:lumOff val="80000"/>
-                      </a:schemeClr>
-                    </a:solidFill>
-                  </a:tcPr>
-                </a:tc>
-                <a:tc>
-                  <a:txBody>
-                    <a:bodyPr/>
-                    <a:lstStyle/>
-                    <a:p>
-                      <a:pPr algn="r" rtl="0" fontAlgn="ctr">
-                        <a:buNone/>
-                      </a:pPr>
-                      <a:r>
-                        <a:rPr lang="en-US" sz="750" b="0" i="0" u="none" strike="noStrike">
-                          <a:solidFill>
-                            <a:srgbClr val="000000"/>
-                          </a:solidFill>
-                          <a:effectLst/>
-                          <a:latin typeface="Noto Sans" panose="020B0502040504020204" pitchFamily="34" charset="0"/>
-                        </a:rPr>
-                        <a:t>11.8</a:t>
-                      </a:r>
-                    </a:p>
-                  </a:txBody>
-                  <a:tcPr marL="0" marR="0" marT="0" marB="0" anchor="ctr">
-                    <a:lnL w="12700" cmpd="sng">
-                      <a:noFill/>
-                    </a:lnL>
-                    <a:lnR w="12700" cmpd="sng">
-                      <a:noFill/>
-                    </a:lnR>
-                    <a:lnT w="12700" cmpd="sng">
-                      <a:noFill/>
-                    </a:lnT>
-                    <a:lnB w="12700" cmpd="sng">
-                      <a:noFill/>
-                    </a:lnB>
-                    <a:lnTlToBr w="12700" cmpd="sng">
-                      <a:noFill/>
-                      <a:prstDash val="solid"/>
-                    </a:lnTlToBr>
-                    <a:lnBlToTr w="12700" cmpd="sng">
-                      <a:noFill/>
-                      <a:prstDash val="solid"/>
-                    </a:lnBlToTr>
-                    <a:solidFill>
-                      <a:schemeClr val="bg1"/>
-                    </a:solidFill>
-                  </a:tcPr>
-                </a:tc>
-                <a:tc>
-                  <a:txBody>
-                    <a:bodyPr/>
-                    <a:lstStyle/>
-                    <a:p>
-                      <a:pPr algn="r" rtl="0" fontAlgn="ctr">
-                        <a:buNone/>
-                      </a:pPr>
-                      <a:r>
-                        <a:rPr lang="en-US" sz="750" b="0" i="0" u="none" strike="noStrike">
-                          <a:solidFill>
-                            <a:srgbClr val="000000"/>
-                          </a:solidFill>
-                          <a:effectLst/>
-                          <a:latin typeface="Noto Sans" panose="020B0502040504020204" pitchFamily="34" charset="0"/>
-                        </a:rPr>
-                        <a:t>10.1</a:t>
-                      </a:r>
-                    </a:p>
-                  </a:txBody>
-                  <a:tcPr marL="0" marR="0" marT="0" marB="0" anchor="ctr">
-                    <a:lnL w="12700" cmpd="sng">
-                      <a:noFill/>
-                    </a:lnL>
-                    <a:lnR w="12700" cmpd="sng">
-                      <a:noFill/>
-                    </a:lnR>
-                    <a:lnT w="12700" cmpd="sng">
-                      <a:noFill/>
-                    </a:lnT>
-                    <a:lnB w="12700" cmpd="sng">
-                      <a:noFill/>
-                    </a:lnB>
-                    <a:lnTlToBr w="12700" cmpd="sng">
-                      <a:noFill/>
-                      <a:prstDash val="solid"/>
-                    </a:lnTlToBr>
-                    <a:lnBlToTr w="12700" cmpd="sng">
-                      <a:noFill/>
-                      <a:prstDash val="solid"/>
-                    </a:lnBlToTr>
-                    <a:noFill/>
-                  </a:tcPr>
-                </a:tc>
-                <a:extLst>
-                  <a:ext uri="{0D108BD9-81ED-4DB2-BD59-A6C34878D82A}">
-                    <a16:rowId xmlns:a16="http://schemas.microsoft.com/office/drawing/2014/main" val="10006"/>
-                  </a:ext>
-                </a:extLst>
-              </a:tr>
-              <a:tr h="173736">
-                <a:tc>
-                  <a:txBody>
-                    <a:bodyPr/>
-                    <a:lstStyle/>
-                    <a:p>
-                      <a:pPr marL="0" marR="0" algn="l" latinLnBrk="1" hangingPunct="0">
-                        <a:lnSpc>
-                          <a:spcPts val="950"/>
-                        </a:lnSpc>
-                        <a:spcBef>
-                          <a:spcPts val="0"/>
-                        </a:spcBef>
-                        <a:spcAft>
-                          <a:spcPts val="0"/>
-                        </a:spcAft>
-                      </a:pPr>
-                      <a:r>
-                        <a:rPr lang="en-US" sz="800" b="0" spc="-40" dirty="0">
-                          <a:solidFill>
-                            <a:srgbClr val="000000"/>
-                          </a:solidFill>
-                          <a:effectLst/>
-                          <a:latin typeface="Noto Sans" panose="020B0502040504020204" pitchFamily="34" charset="0"/>
-                          <a:ea typeface="Noto Sans" panose="020B0502040504020204" pitchFamily="34" charset="0"/>
-                          <a:cs typeface="Noto Sans" panose="020B0502040504020204" pitchFamily="34" charset="0"/>
-                        </a:rPr>
-                        <a:t>P/B (x)</a:t>
-                      </a:r>
-                    </a:p>
-                  </a:txBody>
-                  <a:tcPr marL="0" marR="0" marT="0" marB="0" anchor="ctr">
-                    <a:lnL w="12700" cmpd="sng">
-                      <a:noFill/>
-                    </a:lnL>
-                    <a:lnR w="12700" cmpd="sng">
-                      <a:noFill/>
-                    </a:lnR>
-                    <a:lnT w="12700" cmpd="sng">
-                      <a:noFill/>
-                    </a:lnT>
-                    <a:lnB w="12700" cmpd="sng">
-                      <a:noFill/>
-                    </a:lnB>
-                    <a:lnTlToBr w="12700" cmpd="sng">
-                      <a:noFill/>
-                      <a:prstDash val="solid"/>
-                    </a:lnTlToBr>
-                    <a:lnBlToTr w="12700" cmpd="sng">
-                      <a:noFill/>
-                      <a:prstDash val="solid"/>
-                    </a:lnBlToTr>
-                    <a:noFill/>
-                  </a:tcPr>
-                </a:tc>
-                <a:tc>
-                  <a:txBody>
-                    <a:bodyPr/>
-                    <a:lstStyle/>
-                    <a:p>
-                      <a:pPr algn="r" rtl="0" fontAlgn="ctr">
-                        <a:buNone/>
-                      </a:pPr>
-                      <a:r>
-                        <a:rPr lang="en-US" sz="750" b="0" i="0" u="none" strike="noStrike">
-                          <a:solidFill>
-                            <a:srgbClr val="000000"/>
-                          </a:solidFill>
-                          <a:effectLst/>
-                          <a:latin typeface="Noto Sans" panose="020B0502040504020204" pitchFamily="34" charset="0"/>
-                        </a:rPr>
-                        <a:t>4.7</a:t>
-                      </a:r>
-                    </a:p>
-                  </a:txBody>
-                  <a:tcPr marL="0" marR="0" marT="0" marB="0" anchor="ctr">
-                    <a:lnL w="12700" cmpd="sng">
-                      <a:noFill/>
-                    </a:lnL>
-                    <a:lnR w="12700" cmpd="sng">
-                      <a:noFill/>
-                    </a:lnR>
-                    <a:lnT w="12700" cmpd="sng">
-                      <a:noFill/>
-                    </a:lnT>
-                    <a:lnB w="12700" cmpd="sng">
-                      <a:noFill/>
-                    </a:lnB>
-                    <a:lnTlToBr w="12700" cmpd="sng">
-                      <a:noFill/>
-                      <a:prstDash val="solid"/>
-                    </a:lnTlToBr>
-                    <a:lnBlToTr w="12700" cmpd="sng">
-                      <a:noFill/>
-                      <a:prstDash val="solid"/>
-                    </a:lnBlToTr>
-                    <a:noFill/>
-                  </a:tcPr>
-                </a:tc>
-                <a:tc>
-                  <a:txBody>
-                    <a:bodyPr/>
-                    <a:lstStyle/>
-                    <a:p>
-                      <a:pPr algn="r" rtl="0" fontAlgn="ctr">
-                        <a:buNone/>
-                      </a:pPr>
-                      <a:r>
-                        <a:rPr lang="en-US" sz="750" b="0" i="0" u="none" strike="noStrike">
-                          <a:solidFill>
-                            <a:srgbClr val="000000"/>
-                          </a:solidFill>
-                          <a:effectLst/>
-                          <a:latin typeface="Noto Sans" panose="020B0502040504020204" pitchFamily="34" charset="0"/>
-                        </a:rPr>
-                        <a:t>4.5</a:t>
-                      </a:r>
-                    </a:p>
-                  </a:txBody>
-                  <a:tcPr marL="0" marR="0" marT="0" marB="0" anchor="ctr">
-                    <a:lnL w="12700" cmpd="sng">
-                      <a:noFill/>
-                    </a:lnL>
-                    <a:lnR w="12700" cmpd="sng">
-                      <a:noFill/>
-                    </a:lnR>
-                    <a:lnT w="12700" cmpd="sng">
-                      <a:noFill/>
-                    </a:lnT>
-                    <a:lnB w="12700" cmpd="sng">
-                      <a:noFill/>
-                    </a:lnB>
-                    <a:lnTlToBr w="12700" cmpd="sng">
-                      <a:noFill/>
-                      <a:prstDash val="solid"/>
-                    </a:lnTlToBr>
-                    <a:lnBlToTr w="12700" cmpd="sng">
-                      <a:noFill/>
-                      <a:prstDash val="solid"/>
-                    </a:lnBlToTr>
-                    <a:noFill/>
-                  </a:tcPr>
-                </a:tc>
-                <a:tc>
-                  <a:txBody>
-                    <a:bodyPr/>
-                    <a:lstStyle/>
-                    <a:p>
-                      <a:pPr algn="r" rtl="0" fontAlgn="ctr">
-                        <a:buNone/>
-                      </a:pPr>
-                      <a:r>
-                        <a:rPr lang="en-US" sz="750" b="0" i="0" u="none" strike="noStrike">
-                          <a:solidFill>
-                            <a:srgbClr val="000000"/>
-                          </a:solidFill>
-                          <a:effectLst/>
-                          <a:latin typeface="Noto Sans" panose="020B0502040504020204" pitchFamily="34" charset="0"/>
-                        </a:rPr>
-                        <a:t>4.3</a:t>
-                      </a:r>
-                    </a:p>
-                  </a:txBody>
-                  <a:tcPr marL="0" marR="0" marT="0" marB="0" anchor="ctr">
-                    <a:lnL w="12700" cmpd="sng">
-                      <a:noFill/>
-                    </a:lnL>
-                    <a:lnR w="12700" cmpd="sng">
-                      <a:noFill/>
-                    </a:lnR>
-                    <a:lnT w="12700" cmpd="sng">
-                      <a:noFill/>
-                    </a:lnT>
-                    <a:lnB w="12700" cmpd="sng">
-                      <a:noFill/>
-                    </a:lnB>
-                    <a:lnTlToBr w="12700" cmpd="sng">
-                      <a:noFill/>
-                      <a:prstDash val="solid"/>
-                    </a:lnTlToBr>
-                    <a:lnBlToTr w="12700" cmpd="sng">
-                      <a:noFill/>
-                      <a:prstDash val="solid"/>
-                    </a:lnBlToTr>
-                    <a:noFill/>
-                  </a:tcPr>
-                </a:tc>
-                <a:tc>
-                  <a:txBody>
-                    <a:bodyPr/>
-                    <a:lstStyle/>
-                    <a:p>
-                      <a:pPr algn="r" rtl="0" fontAlgn="ctr">
-                        <a:buNone/>
-                      </a:pPr>
-                      <a:r>
-                        <a:rPr lang="en-US" sz="750" b="0" i="0" u="none" strike="noStrike">
-                          <a:solidFill>
-                            <a:srgbClr val="000000"/>
-                          </a:solidFill>
-                          <a:effectLst/>
-                          <a:latin typeface="Noto Sans" panose="020B0502040504020204" pitchFamily="34" charset="0"/>
-                        </a:rPr>
-                        <a:t>3.5</a:t>
-                      </a:r>
-                    </a:p>
-                  </a:txBody>
-                  <a:tcPr marL="0" marR="0" marT="0" marB="0" anchor="ctr">
-                    <a:lnL w="12700" cmpd="sng">
-                      <a:noFill/>
-                    </a:lnL>
-                    <a:lnR w="12700" cmpd="sng">
-                      <a:noFill/>
-                    </a:lnR>
-                    <a:lnT w="12700" cmpd="sng">
-                      <a:noFill/>
-                    </a:lnT>
-                    <a:lnB w="12700" cmpd="sng">
-                      <a:noFill/>
-                    </a:lnB>
-                    <a:lnTlToBr w="12700" cmpd="sng">
-                      <a:noFill/>
-                      <a:prstDash val="solid"/>
-                    </a:lnTlToBr>
-                    <a:lnBlToTr w="12700" cmpd="sng">
-                      <a:noFill/>
-                      <a:prstDash val="solid"/>
-                    </a:lnBlToTr>
-                    <a:solidFill>
-                      <a:schemeClr val="accent4">
-                        <a:lumMod val="20000"/>
-                        <a:lumOff val="80000"/>
-                      </a:schemeClr>
-                    </a:solidFill>
-                  </a:tcPr>
-                </a:tc>
-                <a:tc>
-                  <a:txBody>
-                    <a:bodyPr/>
-                    <a:lstStyle/>
-                    <a:p>
-                      <a:pPr algn="r" rtl="0" fontAlgn="ctr">
-                        <a:buNone/>
-                      </a:pPr>
-                      <a:r>
-                        <a:rPr lang="en-US" sz="750" b="0" i="0" u="none" strike="noStrike">
-                          <a:solidFill>
-                            <a:srgbClr val="000000"/>
-                          </a:solidFill>
-                          <a:effectLst/>
-                          <a:latin typeface="Noto Sans" panose="020B0502040504020204" pitchFamily="34" charset="0"/>
-                        </a:rPr>
-                        <a:t>3.0</a:t>
-                      </a:r>
-                    </a:p>
-                  </a:txBody>
-                  <a:tcPr marL="0" marR="0" marT="0" marB="0" anchor="ctr">
-                    <a:lnL w="12700" cmpd="sng">
-                      <a:noFill/>
-                    </a:lnL>
-                    <a:lnR w="12700" cmpd="sng">
-                      <a:noFill/>
-                    </a:lnR>
-                    <a:lnT w="12700" cmpd="sng">
-                      <a:noFill/>
-                    </a:lnT>
-                    <a:lnB w="12700" cmpd="sng">
-                      <a:noFill/>
-                    </a:lnB>
-                    <a:lnTlToBr w="12700" cmpd="sng">
-                      <a:noFill/>
-                      <a:prstDash val="solid"/>
-                    </a:lnTlToBr>
-                    <a:lnBlToTr w="12700" cmpd="sng">
-                      <a:noFill/>
-                      <a:prstDash val="solid"/>
-                    </a:lnBlToTr>
-                    <a:solidFill>
-                      <a:schemeClr val="bg1"/>
-                    </a:solidFill>
-                  </a:tcPr>
-                </a:tc>
-                <a:tc>
-                  <a:txBody>
-                    <a:bodyPr/>
-                    <a:lstStyle/>
-                    <a:p>
-                      <a:pPr algn="r" rtl="0" fontAlgn="ctr">
-                        <a:buNone/>
-                      </a:pPr>
-                      <a:r>
-                        <a:rPr lang="en-US" sz="750" b="0" i="0" u="none" strike="noStrike">
-                          <a:solidFill>
-                            <a:srgbClr val="000000"/>
-                          </a:solidFill>
-                          <a:effectLst/>
-                          <a:latin typeface="Noto Sans" panose="020B0502040504020204" pitchFamily="34" charset="0"/>
-                        </a:rPr>
-                        <a:t>2.5</a:t>
-                      </a:r>
-                    </a:p>
-                  </a:txBody>
-                  <a:tcPr marL="0" marR="0" marT="0" marB="0" anchor="ctr">
-                    <a:lnL w="12700" cmpd="sng">
-                      <a:noFill/>
-                    </a:lnL>
-                    <a:lnR w="12700" cmpd="sng">
-                      <a:noFill/>
-                    </a:lnR>
-                    <a:lnT w="12700" cmpd="sng">
-                      <a:noFill/>
-                    </a:lnT>
-                    <a:lnB w="12700" cmpd="sng">
-                      <a:noFill/>
-                    </a:lnB>
-                    <a:lnTlToBr w="12700" cmpd="sng">
-                      <a:noFill/>
-                      <a:prstDash val="solid"/>
-                    </a:lnTlToBr>
-                    <a:lnBlToTr w="12700" cmpd="sng">
-                      <a:noFill/>
-                      <a:prstDash val="solid"/>
-                    </a:lnBlToTr>
-                    <a:noFill/>
-                  </a:tcPr>
-                </a:tc>
-                <a:extLst>
-                  <a:ext uri="{0D108BD9-81ED-4DB2-BD59-A6C34878D82A}">
-                    <a16:rowId xmlns:a16="http://schemas.microsoft.com/office/drawing/2014/main" val="10007"/>
-                  </a:ext>
-                </a:extLst>
-              </a:tr>
-              <a:tr h="173736">
-                <a:tc>
-                  <a:txBody>
-                    <a:bodyPr/>
-                    <a:lstStyle/>
-                    <a:p>
-                      <a:pPr marL="0" marR="0" algn="l" latinLnBrk="1" hangingPunct="0">
-                        <a:lnSpc>
-                          <a:spcPts val="950"/>
-                        </a:lnSpc>
-                        <a:spcBef>
-                          <a:spcPts val="0"/>
-                        </a:spcBef>
-                        <a:spcAft>
-                          <a:spcPts val="0"/>
-                        </a:spcAft>
-                      </a:pPr>
-                      <a:r>
-                        <a:rPr lang="en-US" sz="800" b="0" spc="-40" dirty="0">
-                          <a:solidFill>
-                            <a:srgbClr val="000000"/>
-                          </a:solidFill>
-                          <a:effectLst/>
-                          <a:latin typeface="Noto Sans" panose="020B0502040504020204" pitchFamily="34" charset="0"/>
-                          <a:ea typeface="Noto Sans" panose="020B0502040504020204" pitchFamily="34" charset="0"/>
-                          <a:cs typeface="Noto Sans" panose="020B0502040504020204" pitchFamily="34" charset="0"/>
-                        </a:rPr>
-                        <a:t>Total assets (VNDbn)</a:t>
-                      </a:r>
-                    </a:p>
-                  </a:txBody>
-                  <a:tcPr marL="0" marR="0" marT="0" marB="0" anchor="ctr">
-                    <a:lnL w="12700" cmpd="sng">
-                      <a:noFill/>
-                    </a:lnL>
-                    <a:lnR w="12700" cmpd="sng">
-                      <a:noFill/>
-                    </a:lnR>
-                    <a:lnT w="12700" cmpd="sng">
-                      <a:noFill/>
-                    </a:lnT>
-                    <a:lnB w="6350" cap="flat" cmpd="sng" algn="ctr">
-                      <a:noFill/>
-                      <a:prstDash val="solid"/>
-                      <a:round/>
-                      <a:headEnd type="none" w="med" len="med"/>
-                      <a:tailEnd type="none" w="med" len="med"/>
-                    </a:lnB>
-                    <a:lnTlToBr w="12700" cmpd="sng">
-                      <a:noFill/>
-                      <a:prstDash val="solid"/>
-                    </a:lnTlToBr>
-                    <a:lnBlToTr w="12700" cmpd="sng">
-                      <a:noFill/>
-                      <a:prstDash val="solid"/>
-                    </a:lnBlToTr>
-                    <a:noFill/>
-                  </a:tcPr>
-                </a:tc>
-                <a:tc>
-                  <a:txBody>
-                    <a:bodyPr/>
-                    <a:lstStyle/>
-                    <a:p>
-                      <a:pPr algn="r" rtl="0" fontAlgn="ctr">
-                        <a:buNone/>
-                      </a:pPr>
-                      <a:r>
-                        <a:rPr lang="en-US" sz="750" b="0" i="0" u="none" strike="noStrike">
-                          <a:solidFill>
-                            <a:srgbClr val="000000"/>
-                          </a:solidFill>
-                          <a:effectLst/>
-                          <a:latin typeface="Noto Sans" panose="020B0502040504020204" pitchFamily="34" charset="0"/>
-                        </a:rPr>
-                        <a:t>60,283</a:t>
-                      </a:r>
-                    </a:p>
-                  </a:txBody>
-                  <a:tcPr marL="0" marR="0" marT="0" marB="0" anchor="ctr">
-                    <a:lnL w="12700" cmpd="sng">
-                      <a:noFill/>
-                    </a:lnL>
-                    <a:lnR w="12700" cmpd="sng">
-                      <a:noFill/>
-                    </a:lnR>
-                    <a:lnT w="12700" cmpd="sng">
-                      <a:noFill/>
-                    </a:lnT>
-                    <a:lnB w="6350" cap="flat" cmpd="sng" algn="ctr">
-                      <a:noFill/>
-                      <a:prstDash val="solid"/>
-                      <a:round/>
-                      <a:headEnd type="none" w="med" len="med"/>
-                      <a:tailEnd type="none" w="med" len="med"/>
-                    </a:lnB>
-                    <a:lnTlToBr w="12700" cmpd="sng">
-                      <a:noFill/>
-                      <a:prstDash val="solid"/>
-                    </a:lnTlToBr>
-                    <a:lnBlToTr w="12700" cmpd="sng">
-                      <a:noFill/>
-                      <a:prstDash val="solid"/>
-                    </a:lnBlToTr>
-                    <a:noFill/>
-                  </a:tcPr>
-                </a:tc>
-                <a:tc>
-                  <a:txBody>
-                    <a:bodyPr/>
-                    <a:lstStyle/>
-                    <a:p>
-                      <a:pPr algn="r" rtl="0" fontAlgn="ctr">
-                        <a:buNone/>
-                      </a:pPr>
-                      <a:r>
-                        <a:rPr lang="en-US" sz="750" b="0" i="0" u="none" strike="noStrike">
-                          <a:solidFill>
-                            <a:srgbClr val="000000"/>
-                          </a:solidFill>
-                          <a:effectLst/>
-                          <a:latin typeface="Noto Sans" panose="020B0502040504020204" pitchFamily="34" charset="0"/>
-                        </a:rPr>
-                        <a:t>72,000</a:t>
-                      </a:r>
-                    </a:p>
-                  </a:txBody>
-                  <a:tcPr marL="0" marR="0" marT="0" marB="0" anchor="ctr">
-                    <a:lnL w="12700" cmpd="sng">
-                      <a:noFill/>
-                    </a:lnL>
-                    <a:lnR w="12700" cmpd="sng">
-                      <a:noFill/>
-                    </a:lnR>
-                    <a:lnT w="12700" cmpd="sng">
-                      <a:noFill/>
-                    </a:lnT>
-                    <a:lnB w="6350" cap="flat" cmpd="sng" algn="ctr">
-                      <a:noFill/>
-                      <a:prstDash val="solid"/>
-                      <a:round/>
-                      <a:headEnd type="none" w="med" len="med"/>
-                      <a:tailEnd type="none" w="med" len="med"/>
-                    </a:lnB>
-                    <a:lnTlToBr w="12700" cmpd="sng">
-                      <a:noFill/>
-                      <a:prstDash val="solid"/>
-                    </a:lnTlToBr>
-                    <a:lnBlToTr w="12700" cmpd="sng">
-                      <a:noFill/>
-                      <a:prstDash val="solid"/>
-                    </a:lnBlToTr>
-                    <a:noFill/>
-                  </a:tcPr>
-                </a:tc>
-                <a:tc>
-                  <a:txBody>
-                    <a:bodyPr/>
-                    <a:lstStyle/>
-                    <a:p>
-                      <a:pPr algn="r" rtl="0" fontAlgn="ctr">
-                        <a:buNone/>
-                      </a:pPr>
-                      <a:r>
-                        <a:rPr lang="en-US" sz="750" b="0" i="0" u="none" strike="noStrike">
-                          <a:solidFill>
-                            <a:srgbClr val="000000"/>
-                          </a:solidFill>
-                          <a:effectLst/>
-                          <a:latin typeface="Noto Sans" panose="020B0502040504020204" pitchFamily="34" charset="0"/>
-                        </a:rPr>
-                        <a:t>88,090</a:t>
-                      </a:r>
-                    </a:p>
-                  </a:txBody>
-                  <a:tcPr marL="0" marR="0" marT="0" marB="0" anchor="ctr">
-                    <a:lnL w="12700" cmpd="sng">
-                      <a:noFill/>
-                    </a:lnL>
-                    <a:lnR w="12700" cmpd="sng">
-                      <a:noFill/>
-                    </a:lnR>
-                    <a:lnT w="12700" cmpd="sng">
-                      <a:noFill/>
-                    </a:lnT>
-                    <a:lnB w="6350" cap="flat" cmpd="sng" algn="ctr">
-                      <a:noFill/>
-                      <a:prstDash val="solid"/>
-                      <a:round/>
-                      <a:headEnd type="none" w="med" len="med"/>
-                      <a:tailEnd type="none" w="med" len="med"/>
-                    </a:lnB>
-                    <a:lnTlToBr w="12700" cmpd="sng">
-                      <a:noFill/>
-                      <a:prstDash val="solid"/>
-                    </a:lnTlToBr>
-                    <a:lnBlToTr w="12700" cmpd="sng">
-                      <a:noFill/>
-                      <a:prstDash val="solid"/>
-                    </a:lnBlToTr>
-                    <a:noFill/>
-                  </a:tcPr>
-                </a:tc>
-                <a:tc>
-                  <a:txBody>
-                    <a:bodyPr/>
-                    <a:lstStyle/>
-                    <a:p>
-                      <a:pPr algn="r" rtl="0" fontAlgn="ctr">
-                        <a:buNone/>
-                      </a:pPr>
-                      <a:r>
-                        <a:rPr lang="en-US" sz="750" b="0" i="0" u="none" strike="noStrike">
-                          <a:solidFill>
-                            <a:srgbClr val="000000"/>
-                          </a:solidFill>
-                          <a:effectLst/>
-                          <a:latin typeface="Noto Sans" panose="020B0502040504020204" pitchFamily="34" charset="0"/>
-                        </a:rPr>
-                        <a:t>91,917</a:t>
-                      </a:r>
-                    </a:p>
-                  </a:txBody>
-                  <a:tcPr marL="0" marR="0" marT="0" marB="0" anchor="ctr">
-                    <a:lnL w="12700" cmpd="sng">
-                      <a:noFill/>
-                    </a:lnL>
-                    <a:lnR w="12700" cmpd="sng">
-                      <a:noFill/>
-                    </a:lnR>
-                    <a:lnT w="12700" cmpd="sng">
-                      <a:noFill/>
-                    </a:lnT>
-                    <a:lnB w="6350" cap="flat" cmpd="sng" algn="ctr">
-                      <a:noFill/>
-                      <a:prstDash val="solid"/>
-                      <a:round/>
-                      <a:headEnd type="none" w="med" len="med"/>
-                      <a:tailEnd type="none" w="med" len="med"/>
-                    </a:lnB>
-                    <a:lnTlToBr w="12700" cmpd="sng">
-                      <a:noFill/>
-                      <a:prstDash val="solid"/>
-                    </a:lnTlToBr>
-                    <a:lnBlToTr w="12700" cmpd="sng">
-                      <a:noFill/>
-                      <a:prstDash val="solid"/>
-                    </a:lnBlToTr>
-                    <a:solidFill>
-                      <a:schemeClr val="accent4">
-                        <a:lumMod val="20000"/>
-                        <a:lumOff val="80000"/>
-                      </a:schemeClr>
-                    </a:solidFill>
-                  </a:tcPr>
-                </a:tc>
-                <a:tc>
-                  <a:txBody>
-                    <a:bodyPr/>
-                    <a:lstStyle/>
-                    <a:p>
-                      <a:pPr algn="r" rtl="0" fontAlgn="ctr">
-                        <a:buNone/>
-                      </a:pPr>
-                      <a:r>
-                        <a:rPr lang="en-US" sz="750" b="0" i="0" u="none" strike="noStrike">
-                          <a:solidFill>
-                            <a:srgbClr val="000000"/>
-                          </a:solidFill>
-                          <a:effectLst/>
-                          <a:latin typeface="Noto Sans" panose="020B0502040504020204" pitchFamily="34" charset="0"/>
-                        </a:rPr>
-                        <a:t>102,974</a:t>
-                      </a:r>
-                    </a:p>
-                  </a:txBody>
-                  <a:tcPr marL="0" marR="0" marT="0" marB="0" anchor="ctr">
-                    <a:lnL w="12700" cmpd="sng">
-                      <a:noFill/>
-                    </a:lnL>
-                    <a:lnR w="12700" cmpd="sng">
-                      <a:noFill/>
-                    </a:lnR>
-                    <a:lnT w="12700" cmpd="sng">
-                      <a:noFill/>
-                    </a:lnT>
-                    <a:lnB w="6350" cap="flat" cmpd="sng" algn="ctr">
-                      <a:noFill/>
-                      <a:prstDash val="solid"/>
-                      <a:round/>
-                      <a:headEnd type="none" w="med" len="med"/>
-                      <a:tailEnd type="none" w="med" len="med"/>
-                    </a:lnB>
-                    <a:lnTlToBr w="12700" cmpd="sng">
-                      <a:noFill/>
-                      <a:prstDash val="solid"/>
-                    </a:lnTlToBr>
-                    <a:lnBlToTr w="12700" cmpd="sng">
-                      <a:noFill/>
-                      <a:prstDash val="solid"/>
-                    </a:lnBlToTr>
-                    <a:solidFill>
-                      <a:schemeClr val="bg1"/>
-                    </a:solidFill>
-                  </a:tcPr>
-                </a:tc>
-                <a:tc>
-                  <a:txBody>
-                    <a:bodyPr/>
-                    <a:lstStyle/>
-                    <a:p>
-                      <a:pPr algn="r" rtl="0" fontAlgn="ctr">
-                        <a:buNone/>
-                      </a:pPr>
-                      <a:r>
-                        <a:rPr lang="en-US" sz="750" b="0" i="0" u="none" strike="noStrike">
-                          <a:solidFill>
-                            <a:srgbClr val="000000"/>
-                          </a:solidFill>
-                          <a:effectLst/>
-                          <a:latin typeface="Noto Sans" panose="020B0502040504020204" pitchFamily="34" charset="0"/>
-                        </a:rPr>
-                        <a:t>115,994</a:t>
-                      </a:r>
-                    </a:p>
-                  </a:txBody>
-                  <a:tcPr marL="0" marR="0" marT="0" marB="0" anchor="ctr">
-                    <a:lnL w="12700" cmpd="sng">
-                      <a:noFill/>
-                    </a:lnL>
-                    <a:lnR w="12700" cmpd="sng">
-                      <a:noFill/>
-                    </a:lnR>
-                    <a:lnT w="12700" cmpd="sng">
-                      <a:noFill/>
-                    </a:lnT>
-                    <a:lnB w="6350" cap="flat" cmpd="sng" algn="ctr">
-                      <a:noFill/>
-                      <a:prstDash val="solid"/>
-                      <a:round/>
-                      <a:headEnd type="none" w="med" len="med"/>
-                      <a:tailEnd type="none" w="med" len="med"/>
-                    </a:lnB>
-                    <a:lnTlToBr w="12700" cmpd="sng">
-                      <a:noFill/>
-                      <a:prstDash val="solid"/>
-                    </a:lnTlToBr>
-                    <a:lnBlToTr w="12700" cmpd="sng">
-                      <a:noFill/>
-                      <a:prstDash val="solid"/>
-                    </a:lnBlToTr>
-                    <a:noFill/>
-                  </a:tcPr>
-                </a:tc>
-                <a:extLst>
-                  <a:ext uri="{0D108BD9-81ED-4DB2-BD59-A6C34878D82A}">
-                    <a16:rowId xmlns:a16="http://schemas.microsoft.com/office/drawing/2014/main" val="10008"/>
-                  </a:ext>
-                </a:extLst>
-              </a:tr>
-              <a:tr h="173736">
+              <a:tr h="162000">
                 <a:tc>
                   <a:txBody>
                     <a:bodyPr/>
@@ -33432,7 +30766,7 @@
                           <a:ea typeface="Noto Sans" panose="020B0502040504020204" pitchFamily="34" charset="0"/>
                           <a:cs typeface="Noto Sans" panose="020B0502040504020204" pitchFamily="34" charset="0"/>
                         </a:rPr>
-                        <a:t>Equity (VNDbn)</a:t>
+                        <a:t>   % YoY</a:t>
                       </a:r>
                     </a:p>
                   </a:txBody>
@@ -33443,15 +30777,15 @@
                     <a:lnR w="12700" cmpd="sng">
                       <a:noFill/>
                     </a:lnR>
-                    <a:lnT w="12700" cmpd="sng">
-                      <a:noFill/>
-                    </a:lnT>
-                    <a:lnB w="6350" cap="flat" cmpd="sng" algn="ctr">
+                    <a:lnT w="6350" cap="flat" cmpd="sng" algn="ctr">
                       <a:noFill/>
                       <a:prstDash val="solid"/>
                       <a:round/>
                       <a:headEnd type="none" w="med" len="med"/>
                       <a:tailEnd type="none" w="med" len="med"/>
+                    </a:lnT>
+                    <a:lnB w="12700" cmpd="sng">
+                      <a:noFill/>
                     </a:lnB>
                     <a:lnTlToBr w="12700" cmpd="sng">
                       <a:noFill/>
@@ -33480,7 +30814,7 @@
                           <a:effectLst/>
                           <a:latin typeface="Noto Sans" panose="020B0502040504020204" pitchFamily="34" charset="0"/>
                         </a:rPr>
-                        <a:t>29,883</a:t>
+                        <a:t>—</a:t>
                       </a:r>
                     </a:p>
                   </a:txBody>
@@ -33491,15 +30825,15 @@
                     <a:lnR w="12700" cmpd="sng">
                       <a:noFill/>
                     </a:lnR>
-                    <a:lnT w="12700" cmpd="sng">
-                      <a:noFill/>
-                    </a:lnT>
-                    <a:lnB w="6350" cap="flat" cmpd="sng" algn="ctr">
+                    <a:lnT w="6350" cap="flat" cmpd="sng" algn="ctr">
                       <a:noFill/>
                       <a:prstDash val="solid"/>
                       <a:round/>
                       <a:headEnd type="none" w="med" len="med"/>
                       <a:tailEnd type="none" w="med" len="med"/>
+                    </a:lnT>
+                    <a:lnB w="12700" cmpd="sng">
+                      <a:noFill/>
                     </a:lnB>
                     <a:lnTlToBr w="12700" cmpd="sng">
                       <a:noFill/>
@@ -33528,7 +30862,7 @@
                           <a:effectLst/>
                           <a:latin typeface="Noto Sans" panose="020B0502040504020204" pitchFamily="34" charset="0"/>
                         </a:rPr>
-                        <a:t>35,678</a:t>
+                        <a:t>+19.4%</a:t>
                       </a:r>
                     </a:p>
                   </a:txBody>
@@ -33539,15 +30873,15 @@
                     <a:lnR w="12700" cmpd="sng">
                       <a:noFill/>
                     </a:lnR>
-                    <a:lnT w="12700" cmpd="sng">
-                      <a:noFill/>
-                    </a:lnT>
-                    <a:lnB w="6350" cap="flat" cmpd="sng" algn="ctr">
+                    <a:lnT w="6350" cap="flat" cmpd="sng" algn="ctr">
                       <a:noFill/>
                       <a:prstDash val="solid"/>
                       <a:round/>
                       <a:headEnd type="none" w="med" len="med"/>
                       <a:tailEnd type="none" w="med" len="med"/>
+                    </a:lnT>
+                    <a:lnB w="12700" cmpd="sng">
+                      <a:noFill/>
                     </a:lnB>
                     <a:lnTlToBr w="12700" cmpd="sng">
                       <a:noFill/>
@@ -33576,7 +30910,7 @@
                           <a:effectLst/>
                           <a:latin typeface="Noto Sans" panose="020B0502040504020204" pitchFamily="34" charset="0"/>
                         </a:rPr>
-                        <a:t>43,702</a:t>
+                        <a:t>+11.7%</a:t>
                       </a:r>
                     </a:p>
                   </a:txBody>
@@ -33587,15 +30921,15 @@
                     <a:lnR w="12700" cmpd="sng">
                       <a:noFill/>
                     </a:lnR>
-                    <a:lnT w="12700" cmpd="sng">
-                      <a:noFill/>
-                    </a:lnT>
-                    <a:lnB w="6350" cap="flat" cmpd="sng" algn="ctr">
+                    <a:lnT w="6350" cap="flat" cmpd="sng" algn="ctr">
                       <a:noFill/>
                       <a:prstDash val="solid"/>
                       <a:round/>
                       <a:headEnd type="none" w="med" len="med"/>
                       <a:tailEnd type="none" w="med" len="med"/>
+                    </a:lnT>
+                    <a:lnB w="12700" cmpd="sng">
+                      <a:noFill/>
                     </a:lnB>
                     <a:lnTlToBr w="12700" cmpd="sng">
                       <a:noFill/>
@@ -33624,7 +30958,7 @@
                           <a:effectLst/>
                           <a:latin typeface="Noto Sans" panose="020B0502040504020204" pitchFamily="34" charset="0"/>
                         </a:rPr>
-                        <a:t>50,217</a:t>
+                        <a:t>-18.4%*</a:t>
                       </a:r>
                     </a:p>
                   </a:txBody>
@@ -33635,15 +30969,15 @@
                     <a:lnR w="12700" cmpd="sng">
                       <a:noFill/>
                     </a:lnR>
-                    <a:lnT w="12700" cmpd="sng">
-                      <a:noFill/>
-                    </a:lnT>
-                    <a:lnB w="6350" cap="flat" cmpd="sng" algn="ctr">
+                    <a:lnT w="6350" cap="flat" cmpd="sng" algn="ctr">
                       <a:noFill/>
                       <a:prstDash val="solid"/>
                       <a:round/>
                       <a:headEnd type="none" w="med" len="med"/>
                       <a:tailEnd type="none" w="med" len="med"/>
+                    </a:lnT>
+                    <a:lnB w="12700" cmpd="sng">
+                      <a:noFill/>
                     </a:lnB>
                     <a:lnTlToBr w="12700" cmpd="sng">
                       <a:noFill/>
@@ -33677,7 +31011,7 @@
                           <a:effectLst/>
                           <a:latin typeface="Noto Sans" panose="020B0502040504020204" pitchFamily="34" charset="0"/>
                         </a:rPr>
-                        <a:t>58,356</a:t>
+                        <a:t>+15.3%</a:t>
                       </a:r>
                     </a:p>
                   </a:txBody>
@@ -33688,15 +31022,15 @@
                     <a:lnR w="12700" cmpd="sng">
                       <a:noFill/>
                     </a:lnR>
-                    <a:lnT w="12700" cmpd="sng">
-                      <a:noFill/>
-                    </a:lnT>
-                    <a:lnB w="6350" cap="flat" cmpd="sng" algn="ctr">
+                    <a:lnT w="6350" cap="flat" cmpd="sng" algn="ctr">
                       <a:noFill/>
                       <a:prstDash val="solid"/>
                       <a:round/>
                       <a:headEnd type="none" w="med" len="med"/>
                       <a:tailEnd type="none" w="med" len="med"/>
+                    </a:lnT>
+                    <a:lnB w="12700" cmpd="sng">
+                      <a:noFill/>
                     </a:lnB>
                     <a:lnTlToBr w="12700" cmpd="sng">
                       <a:noFill/>
@@ -33727,7 +31061,7 @@
                           <a:effectLst/>
                           <a:latin typeface="Noto Sans" panose="020B0502040504020204" pitchFamily="34" charset="0"/>
                         </a:rPr>
-                        <a:t>68,507</a:t>
+                        <a:t>+16.1%</a:t>
                       </a:r>
                     </a:p>
                   </a:txBody>
@@ -33738,15 +31072,15 @@
                     <a:lnR w="12700" cmpd="sng">
                       <a:noFill/>
                     </a:lnR>
-                    <a:lnT w="12700" cmpd="sng">
-                      <a:noFill/>
-                    </a:lnT>
-                    <a:lnB w="6350" cap="flat" cmpd="sng" algn="ctr">
+                    <a:lnT w="6350" cap="flat" cmpd="sng" algn="ctr">
                       <a:noFill/>
                       <a:prstDash val="solid"/>
                       <a:round/>
                       <a:headEnd type="none" w="med" len="med"/>
                       <a:tailEnd type="none" w="med" len="med"/>
+                    </a:lnT>
+                    <a:lnB w="12700" cmpd="sng">
+                      <a:noFill/>
                     </a:lnB>
                     <a:lnTlToBr w="12700" cmpd="sng">
                       <a:noFill/>
@@ -33761,11 +31095,657 @@
                 </a:tc>
                 <a:extLst>
                   <a:ext uri="{0D108BD9-81ED-4DB2-BD59-A6C34878D82A}">
-                    <a16:rowId xmlns:a16="http://schemas.microsoft.com/office/drawing/2014/main" val="1105519379"/>
+                    <a16:rowId xmlns:a16="http://schemas.microsoft.com/office/drawing/2014/main" val="10001"/>
                   </a:ext>
                 </a:extLst>
               </a:tr>
-              <a:tr h="173736">
+              <a:tr h="162000">
+                <a:tc>
+                  <a:txBody>
+                    <a:bodyPr/>
+                    <a:lstStyle/>
+                    <a:p>
+                      <a:pPr marL="0" marR="41910" algn="l" latinLnBrk="1" hangingPunct="0">
+                        <a:lnSpc>
+                          <a:spcPts val="950"/>
+                        </a:lnSpc>
+                        <a:spcBef>
+                          <a:spcPts val="0"/>
+                        </a:spcBef>
+                        <a:spcAft>
+                          <a:spcPts val="0"/>
+                        </a:spcAft>
+                      </a:pPr>
+                      <a:r>
+                        <a:rPr lang="en-US" sz="800" b="0" spc="-40" dirty="0">
+                          <a:solidFill>
+                            <a:srgbClr val="000000"/>
+                          </a:solidFill>
+                          <a:effectLst/>
+                          <a:latin typeface="Noto Sans" panose="020B0502040504020204" pitchFamily="34" charset="0"/>
+                          <a:ea typeface="Noto Sans" panose="020B0502040504020204" pitchFamily="34" charset="0"/>
+                          <a:cs typeface="Noto Sans" panose="020B0502040504020204" pitchFamily="34" charset="0"/>
+                        </a:rPr>
+                        <a:t>Operating profit (VNDbn)</a:t>
+                      </a:r>
+                    </a:p>
+                  </a:txBody>
+                  <a:tcPr marL="0" marR="0" marT="0" marB="0" anchor="ctr">
+                    <a:lnL w="12700" cmpd="sng">
+                      <a:noFill/>
+                    </a:lnL>
+                    <a:lnR w="12700" cmpd="sng">
+                      <a:noFill/>
+                    </a:lnR>
+                    <a:lnT w="12700" cmpd="sng">
+                      <a:noFill/>
+                    </a:lnT>
+                    <a:lnB w="12700" cmpd="sng">
+                      <a:noFill/>
+                    </a:lnB>
+                    <a:lnTlToBr w="12700" cmpd="sng">
+                      <a:noFill/>
+                      <a:prstDash val="solid"/>
+                    </a:lnTlToBr>
+                    <a:lnBlToTr w="12700" cmpd="sng">
+                      <a:noFill/>
+                      <a:prstDash val="solid"/>
+                    </a:lnBlToTr>
+                    <a:noFill/>
+                  </a:tcPr>
+                </a:tc>
+                <a:tc>
+                  <a:txBody>
+                    <a:bodyPr/>
+                    <a:lstStyle/>
+                    <a:p>
+                      <a:pPr algn="r" fontAlgn="ctr">
+                        <a:buNone/>
+                      </a:pPr>
+                      <a:r>
+                        <a:rPr lang="en-US" sz="750" b="0" i="0" u="none" strike="noStrike">
+                          <a:effectLst/>
+                          <a:latin typeface="Noto Sans" panose="020B0502040504020204" pitchFamily="34" charset="0"/>
+                        </a:rPr>
+                        <a:t>8,452</a:t>
+                      </a:r>
+                    </a:p>
+                  </a:txBody>
+                  <a:tcPr marL="0" marR="0" marT="0" marB="0" anchor="ctr">
+                    <a:lnL w="12700" cmpd="sng">
+                      <a:noFill/>
+                    </a:lnL>
+                    <a:lnR w="12700" cmpd="sng">
+                      <a:noFill/>
+                    </a:lnR>
+                    <a:lnT w="12700" cmpd="sng">
+                      <a:noFill/>
+                    </a:lnT>
+                    <a:lnB w="12700" cmpd="sng">
+                      <a:noFill/>
+                    </a:lnB>
+                    <a:lnTlToBr w="12700" cmpd="sng">
+                      <a:noFill/>
+                      <a:prstDash val="solid"/>
+                    </a:lnTlToBr>
+                    <a:lnBlToTr w="12700" cmpd="sng">
+                      <a:noFill/>
+                      <a:prstDash val="solid"/>
+                    </a:lnBlToTr>
+                    <a:noFill/>
+                  </a:tcPr>
+                </a:tc>
+                <a:tc>
+                  <a:txBody>
+                    <a:bodyPr/>
+                    <a:lstStyle/>
+                    <a:p>
+                      <a:pPr algn="r" fontAlgn="ctr">
+                        <a:buNone/>
+                      </a:pPr>
+                      <a:r>
+                        <a:rPr lang="en-US" sz="750" b="0" i="0" u="none" strike="noStrike">
+                          <a:effectLst/>
+                          <a:latin typeface="Noto Sans" panose="020B0502040504020204" pitchFamily="34" charset="0"/>
+                        </a:rPr>
+                        <a:t>10,508</a:t>
+                      </a:r>
+                    </a:p>
+                  </a:txBody>
+                  <a:tcPr marL="0" marR="0" marT="0" marB="0" anchor="ctr">
+                    <a:lnL w="12700" cmpd="sng">
+                      <a:noFill/>
+                    </a:lnL>
+                    <a:lnR w="12700" cmpd="sng">
+                      <a:noFill/>
+                    </a:lnR>
+                    <a:lnT w="12700" cmpd="sng">
+                      <a:noFill/>
+                    </a:lnT>
+                    <a:lnB w="12700" cmpd="sng">
+                      <a:noFill/>
+                    </a:lnB>
+                    <a:lnTlToBr w="12700" cmpd="sng">
+                      <a:noFill/>
+                      <a:prstDash val="solid"/>
+                    </a:lnTlToBr>
+                    <a:lnBlToTr w="12700" cmpd="sng">
+                      <a:noFill/>
+                      <a:prstDash val="solid"/>
+                    </a:lnBlToTr>
+                    <a:noFill/>
+                  </a:tcPr>
+                </a:tc>
+                <a:tc>
+                  <a:txBody>
+                    <a:bodyPr/>
+                    <a:lstStyle/>
+                    <a:p>
+                      <a:pPr algn="r" fontAlgn="ctr">
+                        <a:buNone/>
+                      </a:pPr>
+                      <a:r>
+                        <a:rPr lang="en-US" sz="750" b="0" i="0" u="none" strike="noStrike">
+                          <a:effectLst/>
+                          <a:latin typeface="Noto Sans" panose="020B0502040504020204" pitchFamily="34" charset="0"/>
+                        </a:rPr>
+                        <a:t>11,079</a:t>
+                      </a:r>
+                    </a:p>
+                  </a:txBody>
+                  <a:tcPr marL="0" marR="0" marT="0" marB="0" anchor="ctr">
+                    <a:lnL w="12700" cmpd="sng">
+                      <a:noFill/>
+                    </a:lnL>
+                    <a:lnR w="12700" cmpd="sng">
+                      <a:noFill/>
+                    </a:lnR>
+                    <a:lnT w="12700" cmpd="sng">
+                      <a:noFill/>
+                    </a:lnT>
+                    <a:lnB w="12700" cmpd="sng">
+                      <a:noFill/>
+                    </a:lnB>
+                    <a:lnTlToBr w="12700" cmpd="sng">
+                      <a:noFill/>
+                      <a:prstDash val="solid"/>
+                    </a:lnTlToBr>
+                    <a:lnBlToTr w="12700" cmpd="sng">
+                      <a:noFill/>
+                      <a:prstDash val="solid"/>
+                    </a:lnBlToTr>
+                    <a:noFill/>
+                  </a:tcPr>
+                </a:tc>
+                <a:tc>
+                  <a:txBody>
+                    <a:bodyPr/>
+                    <a:lstStyle/>
+                    <a:p>
+                      <a:pPr algn="r" fontAlgn="ctr">
+                        <a:buNone/>
+                      </a:pPr>
+                      <a:r>
+                        <a:rPr lang="en-US" sz="750" b="0" i="0" u="none" strike="noStrike">
+                          <a:effectLst/>
+                          <a:latin typeface="Noto Sans" panose="020B0502040504020204" pitchFamily="34" charset="0"/>
+                        </a:rPr>
+                        <a:t>9,807</a:t>
+                      </a:r>
+                    </a:p>
+                  </a:txBody>
+                  <a:tcPr marL="0" marR="0" marT="0" marB="0" anchor="ctr">
+                    <a:lnL w="12700" cmpd="sng">
+                      <a:noFill/>
+                    </a:lnL>
+                    <a:lnR w="12700" cmpd="sng">
+                      <a:noFill/>
+                    </a:lnR>
+                    <a:lnT w="12700" cmpd="sng">
+                      <a:noFill/>
+                    </a:lnT>
+                    <a:lnB w="12700" cmpd="sng">
+                      <a:noFill/>
+                    </a:lnB>
+                    <a:lnTlToBr w="12700" cmpd="sng">
+                      <a:noFill/>
+                      <a:prstDash val="solid"/>
+                    </a:lnTlToBr>
+                    <a:lnBlToTr w="12700" cmpd="sng">
+                      <a:noFill/>
+                      <a:prstDash val="solid"/>
+                    </a:lnBlToTr>
+                    <a:solidFill>
+                      <a:schemeClr val="accent4">
+                        <a:lumMod val="20000"/>
+                        <a:lumOff val="80000"/>
+                      </a:schemeClr>
+                    </a:solidFill>
+                  </a:tcPr>
+                </a:tc>
+                <a:tc>
+                  <a:txBody>
+                    <a:bodyPr/>
+                    <a:lstStyle/>
+                    <a:p>
+                      <a:pPr algn="r" fontAlgn="ctr">
+                        <a:buNone/>
+                      </a:pPr>
+                      <a:r>
+                        <a:rPr lang="en-US" sz="750" b="0" i="0" u="none" strike="noStrike">
+                          <a:effectLst/>
+                          <a:latin typeface="Noto Sans" panose="020B0502040504020204" pitchFamily="34" charset="0"/>
+                        </a:rPr>
+                        <a:t>11,044</a:t>
+                      </a:r>
+                    </a:p>
+                  </a:txBody>
+                  <a:tcPr marL="0" marR="0" marT="0" marB="0" anchor="ctr">
+                    <a:lnL w="12700" cmpd="sng">
+                      <a:noFill/>
+                    </a:lnL>
+                    <a:lnR w="12700" cmpd="sng">
+                      <a:noFill/>
+                    </a:lnR>
+                    <a:lnT w="12700" cmpd="sng">
+                      <a:noFill/>
+                    </a:lnT>
+                    <a:lnB w="12700" cmpd="sng">
+                      <a:noFill/>
+                    </a:lnB>
+                    <a:lnTlToBr w="12700" cmpd="sng">
+                      <a:noFill/>
+                      <a:prstDash val="solid"/>
+                    </a:lnTlToBr>
+                    <a:lnBlToTr w="12700" cmpd="sng">
+                      <a:noFill/>
+                      <a:prstDash val="solid"/>
+                    </a:lnBlToTr>
+                    <a:solidFill>
+                      <a:schemeClr val="bg1"/>
+                    </a:solidFill>
+                  </a:tcPr>
+                </a:tc>
+                <a:tc>
+                  <a:txBody>
+                    <a:bodyPr/>
+                    <a:lstStyle/>
+                    <a:p>
+                      <a:pPr algn="r" fontAlgn="ctr">
+                        <a:buNone/>
+                      </a:pPr>
+                      <a:r>
+                        <a:rPr lang="en-US" sz="750" b="0" i="0" u="none" strike="noStrike">
+                          <a:effectLst/>
+                          <a:latin typeface="Noto Sans" panose="020B0502040504020204" pitchFamily="34" charset="0"/>
+                        </a:rPr>
+                        <a:t>13,053</a:t>
+                      </a:r>
+                    </a:p>
+                  </a:txBody>
+                  <a:tcPr marL="0" marR="0" marT="0" marB="0" anchor="ctr">
+                    <a:lnL w="12700" cmpd="sng">
+                      <a:noFill/>
+                    </a:lnL>
+                    <a:lnR w="12700" cmpd="sng">
+                      <a:noFill/>
+                    </a:lnR>
+                    <a:lnT w="12700" cmpd="sng">
+                      <a:noFill/>
+                    </a:lnT>
+                    <a:lnB w="12700" cmpd="sng">
+                      <a:noFill/>
+                    </a:lnB>
+                    <a:lnTlToBr w="12700" cmpd="sng">
+                      <a:noFill/>
+                      <a:prstDash val="solid"/>
+                    </a:lnTlToBr>
+                    <a:lnBlToTr w="12700" cmpd="sng">
+                      <a:noFill/>
+                      <a:prstDash val="solid"/>
+                    </a:lnBlToTr>
+                    <a:noFill/>
+                  </a:tcPr>
+                </a:tc>
+                <a:extLst>
+                  <a:ext uri="{0D108BD9-81ED-4DB2-BD59-A6C34878D82A}">
+                    <a16:rowId xmlns:a16="http://schemas.microsoft.com/office/drawing/2014/main" val="10002"/>
+                  </a:ext>
+                </a:extLst>
+              </a:tr>
+              <a:tr h="162000">
+                <a:tc>
+                  <a:txBody>
+                    <a:bodyPr/>
+                    <a:lstStyle/>
+                    <a:p>
+                      <a:pPr marL="0" marR="41910" algn="l" latinLnBrk="1" hangingPunct="0">
+                        <a:lnSpc>
+                          <a:spcPts val="950"/>
+                        </a:lnSpc>
+                        <a:spcBef>
+                          <a:spcPts val="0"/>
+                        </a:spcBef>
+                        <a:spcAft>
+                          <a:spcPts val="0"/>
+                        </a:spcAft>
+                      </a:pPr>
+                      <a:r>
+                        <a:rPr lang="en-US" sz="800" b="0" spc="-40" dirty="0">
+                          <a:solidFill>
+                            <a:srgbClr val="000000"/>
+                          </a:solidFill>
+                          <a:effectLst/>
+                          <a:latin typeface="Noto Sans" panose="020B0502040504020204" pitchFamily="34" charset="0"/>
+                          <a:ea typeface="Noto Sans" panose="020B0502040504020204" pitchFamily="34" charset="0"/>
+                          <a:cs typeface="Noto Sans" panose="020B0502040504020204" pitchFamily="34" charset="0"/>
+                        </a:rPr>
+                        <a:t>PBT (VNDbn)</a:t>
+                      </a:r>
+                    </a:p>
+                  </a:txBody>
+                  <a:tcPr marL="0" marR="0" marT="0" marB="0" anchor="ctr">
+                    <a:lnL w="12700" cmpd="sng">
+                      <a:noFill/>
+                    </a:lnL>
+                    <a:lnR w="12700" cmpd="sng">
+                      <a:noFill/>
+                    </a:lnR>
+                    <a:lnT w="12700" cmpd="sng">
+                      <a:noFill/>
+                    </a:lnT>
+                    <a:lnB w="12700" cmpd="sng">
+                      <a:noFill/>
+                    </a:lnB>
+                    <a:lnTlToBr w="12700" cmpd="sng">
+                      <a:noFill/>
+                      <a:prstDash val="solid"/>
+                    </a:lnTlToBr>
+                    <a:lnBlToTr w="12700" cmpd="sng">
+                      <a:noFill/>
+                      <a:prstDash val="solid"/>
+                    </a:lnBlToTr>
+                    <a:noFill/>
+                  </a:tcPr>
+                </a:tc>
+                <a:tc>
+                  <a:txBody>
+                    <a:bodyPr/>
+                    <a:lstStyle/>
+                    <a:p>
+                      <a:pPr algn="r" rtl="0" fontAlgn="ctr">
+                        <a:buNone/>
+                      </a:pPr>
+                      <a:r>
+                        <a:rPr lang="en-US" sz="750" b="0" i="0" u="none" strike="noStrike">
+                          <a:solidFill>
+                            <a:srgbClr val="000000"/>
+                          </a:solidFill>
+                          <a:effectLst/>
+                          <a:latin typeface="Noto Sans" panose="020B0502040504020204" pitchFamily="34" charset="0"/>
+                        </a:rPr>
+                        <a:t>9,203</a:t>
+                      </a:r>
+                    </a:p>
+                  </a:txBody>
+                  <a:tcPr marL="0" marR="0" marT="0" marB="0" anchor="ctr">
+                    <a:lnL w="12700" cmpd="sng">
+                      <a:noFill/>
+                    </a:lnL>
+                    <a:lnR w="12700" cmpd="sng">
+                      <a:noFill/>
+                    </a:lnR>
+                    <a:lnT w="12700" cmpd="sng">
+                      <a:noFill/>
+                    </a:lnT>
+                    <a:lnB w="12700" cmpd="sng">
+                      <a:noFill/>
+                    </a:lnB>
+                    <a:lnTlToBr w="12700" cmpd="sng">
+                      <a:noFill/>
+                      <a:prstDash val="solid"/>
+                    </a:lnTlToBr>
+                    <a:lnBlToTr w="12700" cmpd="sng">
+                      <a:noFill/>
+                      <a:prstDash val="solid"/>
+                    </a:lnBlToTr>
+                    <a:noFill/>
+                  </a:tcPr>
+                </a:tc>
+                <a:tc>
+                  <a:txBody>
+                    <a:bodyPr/>
+                    <a:lstStyle/>
+                    <a:p>
+                      <a:pPr algn="r" rtl="0" fontAlgn="ctr">
+                        <a:buNone/>
+                      </a:pPr>
+                      <a:r>
+                        <a:rPr lang="en-US" sz="750" b="0" i="0" u="none" strike="noStrike">
+                          <a:solidFill>
+                            <a:srgbClr val="000000"/>
+                          </a:solidFill>
+                          <a:effectLst/>
+                          <a:latin typeface="Noto Sans" panose="020B0502040504020204" pitchFamily="34" charset="0"/>
+                        </a:rPr>
+                        <a:t>11,070</a:t>
+                      </a:r>
+                    </a:p>
+                  </a:txBody>
+                  <a:tcPr marL="0" marR="0" marT="0" marB="0" anchor="ctr">
+                    <a:lnL w="12700" cmpd="sng">
+                      <a:noFill/>
+                    </a:lnL>
+                    <a:lnR w="12700" cmpd="sng">
+                      <a:noFill/>
+                    </a:lnR>
+                    <a:lnT w="12700" cmpd="sng">
+                      <a:noFill/>
+                    </a:lnT>
+                    <a:lnB w="12700" cmpd="sng">
+                      <a:noFill/>
+                    </a:lnB>
+                    <a:lnTlToBr w="12700" cmpd="sng">
+                      <a:noFill/>
+                      <a:prstDash val="solid"/>
+                    </a:lnTlToBr>
+                    <a:lnBlToTr w="12700" cmpd="sng">
+                      <a:noFill/>
+                      <a:prstDash val="solid"/>
+                    </a:lnBlToTr>
+                    <a:noFill/>
+                  </a:tcPr>
+                </a:tc>
+                <a:tc>
+                  <a:txBody>
+                    <a:bodyPr/>
+                    <a:lstStyle/>
+                    <a:p>
+                      <a:pPr algn="r" rtl="0" fontAlgn="ctr">
+                        <a:buNone/>
+                      </a:pPr>
+                      <a:r>
+                        <a:rPr lang="en-US" sz="750" b="0" i="0" u="none" strike="noStrike">
+                          <a:solidFill>
+                            <a:srgbClr val="000000"/>
+                          </a:solidFill>
+                          <a:effectLst/>
+                          <a:latin typeface="Noto Sans" panose="020B0502040504020204" pitchFamily="34" charset="0"/>
+                        </a:rPr>
+                        <a:t>13,134</a:t>
+                      </a:r>
+                    </a:p>
+                  </a:txBody>
+                  <a:tcPr marL="0" marR="0" marT="0" marB="0" anchor="ctr">
+                    <a:lnL w="12700" cmpd="sng">
+                      <a:noFill/>
+                    </a:lnL>
+                    <a:lnR w="12700" cmpd="sng">
+                      <a:noFill/>
+                    </a:lnR>
+                    <a:lnT w="12700" cmpd="sng">
+                      <a:noFill/>
+                    </a:lnT>
+                    <a:lnB w="12700" cmpd="sng">
+                      <a:noFill/>
+                    </a:lnB>
+                    <a:lnTlToBr w="12700" cmpd="sng">
+                      <a:noFill/>
+                      <a:prstDash val="solid"/>
+                    </a:lnTlToBr>
+                    <a:lnBlToTr w="12700" cmpd="sng">
+                      <a:noFill/>
+                      <a:prstDash val="solid"/>
+                    </a:lnBlToTr>
+                    <a:noFill/>
+                  </a:tcPr>
+                </a:tc>
+                <a:tc>
+                  <a:txBody>
+                    <a:bodyPr/>
+                    <a:lstStyle/>
+                    <a:p>
+                      <a:pPr algn="r" rtl="0" fontAlgn="ctr">
+                        <a:buNone/>
+                      </a:pPr>
+                      <a:r>
+                        <a:rPr lang="en-US" sz="750" b="0" i="0" u="none" strike="noStrike">
+                          <a:solidFill>
+                            <a:srgbClr val="000000"/>
+                          </a:solidFill>
+                          <a:effectLst/>
+                          <a:latin typeface="Noto Sans" panose="020B0502040504020204" pitchFamily="34" charset="0"/>
+                        </a:rPr>
+                        <a:t>13,070</a:t>
+                      </a:r>
+                    </a:p>
+                  </a:txBody>
+                  <a:tcPr marL="0" marR="0" marT="0" marB="0" anchor="ctr">
+                    <a:lnL w="12700" cmpd="sng">
+                      <a:noFill/>
+                    </a:lnL>
+                    <a:lnR w="12700" cmpd="sng">
+                      <a:noFill/>
+                    </a:lnR>
+                    <a:lnT w="12700" cmpd="sng">
+                      <a:noFill/>
+                    </a:lnT>
+                    <a:lnB w="12700" cmpd="sng">
+                      <a:noFill/>
+                    </a:lnB>
+                    <a:lnTlToBr w="12700" cmpd="sng">
+                      <a:noFill/>
+                      <a:prstDash val="solid"/>
+                    </a:lnTlToBr>
+                    <a:lnBlToTr w="12700" cmpd="sng">
+                      <a:noFill/>
+                      <a:prstDash val="solid"/>
+                    </a:lnBlToTr>
+                    <a:solidFill>
+                      <a:schemeClr val="accent4">
+                        <a:lumMod val="20000"/>
+                        <a:lumOff val="80000"/>
+                      </a:schemeClr>
+                    </a:solidFill>
+                  </a:tcPr>
+                </a:tc>
+                <a:tc>
+                  <a:txBody>
+                    <a:bodyPr/>
+                    <a:lstStyle/>
+                    <a:p>
+                      <a:pPr algn="r" rtl="0" fontAlgn="ctr">
+                        <a:buNone/>
+                      </a:pPr>
+                      <a:r>
+                        <a:rPr lang="en-US" sz="750" b="0" i="0" u="none" strike="noStrike">
+                          <a:solidFill>
+                            <a:srgbClr val="000000"/>
+                          </a:solidFill>
+                          <a:effectLst/>
+                          <a:latin typeface="Noto Sans" panose="020B0502040504020204" pitchFamily="34" charset="0"/>
+                        </a:rPr>
+                        <a:t>15,159</a:t>
+                      </a:r>
+                    </a:p>
+                  </a:txBody>
+                  <a:tcPr marL="0" marR="0" marT="0" marB="0" anchor="ctr">
+                    <a:lnL w="12700" cmpd="sng">
+                      <a:noFill/>
+                    </a:lnL>
+                    <a:lnR w="12700" cmpd="sng">
+                      <a:noFill/>
+                    </a:lnR>
+                    <a:lnT w="12700" cmpd="sng">
+                      <a:noFill/>
+                    </a:lnT>
+                    <a:lnB w="12700" cmpd="sng">
+                      <a:noFill/>
+                    </a:lnB>
+                    <a:lnTlToBr w="12700" cmpd="sng">
+                      <a:noFill/>
+                      <a:prstDash val="solid"/>
+                    </a:lnTlToBr>
+                    <a:lnBlToTr w="12700" cmpd="sng">
+                      <a:noFill/>
+                      <a:prstDash val="solid"/>
+                    </a:lnBlToTr>
+                    <a:solidFill>
+                      <a:schemeClr val="bg1"/>
+                    </a:solidFill>
+                  </a:tcPr>
+                </a:tc>
+                <a:tc>
+                  <a:txBody>
+                    <a:bodyPr/>
+                    <a:lstStyle/>
+                    <a:p>
+                      <a:pPr algn="r" rtl="0" fontAlgn="ctr">
+                        <a:buNone/>
+                      </a:pPr>
+                      <a:r>
+                        <a:rPr lang="en-US" sz="750" b="0" i="0" u="none" strike="noStrike">
+                          <a:solidFill>
+                            <a:srgbClr val="000000"/>
+                          </a:solidFill>
+                          <a:effectLst/>
+                          <a:latin typeface="Noto Sans" panose="020B0502040504020204" pitchFamily="34" charset="0"/>
+                        </a:rPr>
+                        <a:t>17,671</a:t>
+                      </a:r>
+                    </a:p>
+                  </a:txBody>
+                  <a:tcPr marL="0" marR="0" marT="0" marB="0" anchor="ctr">
+                    <a:lnL w="12700" cmpd="sng">
+                      <a:noFill/>
+                    </a:lnL>
+                    <a:lnR w="12700" cmpd="sng">
+                      <a:noFill/>
+                    </a:lnR>
+                    <a:lnT w="12700" cmpd="sng">
+                      <a:noFill/>
+                    </a:lnT>
+                    <a:lnB w="12700" cmpd="sng">
+                      <a:noFill/>
+                    </a:lnB>
+                    <a:lnTlToBr w="12700" cmpd="sng">
+                      <a:noFill/>
+                      <a:prstDash val="solid"/>
+                    </a:lnTlToBr>
+                    <a:lnBlToTr w="12700" cmpd="sng">
+                      <a:noFill/>
+                      <a:prstDash val="solid"/>
+                    </a:lnBlToTr>
+                    <a:noFill/>
+                  </a:tcPr>
+                </a:tc>
+                <a:extLst>
+                  <a:ext uri="{0D108BD9-81ED-4DB2-BD59-A6C34878D82A}">
+                    <a16:rowId xmlns:a16="http://schemas.microsoft.com/office/drawing/2014/main" val="10003"/>
+                  </a:ext>
+                </a:extLst>
+              </a:tr>
+              <a:tr h="162000">
                 <a:tc>
                   <a:txBody>
                     <a:bodyPr/>
@@ -33783,7 +31763,7 @@
                         </a:spcAft>
                       </a:pPr>
                       <a:r>
-                        <a:rPr lang="en-US" sz="800" b="0" kern="1200" spc="-40" dirty="0">
+                        <a:rPr lang="en-US" sz="800" b="0" spc="-40" dirty="0">
                           <a:solidFill>
                             <a:srgbClr val="000000"/>
                           </a:solidFill>
@@ -33792,7 +31772,7 @@
                           <a:ea typeface="Noto Sans" panose="020B0502040504020204" pitchFamily="34" charset="0"/>
                           <a:cs typeface="Noto Sans" panose="020B0502040504020204" pitchFamily="34" charset="0"/>
                         </a:rPr>
-                        <a:t>BVPS (VND)</a:t>
+                        <a:t>NPATMI (VNDbn)</a:t>
                       </a:r>
                     </a:p>
                   </a:txBody>
@@ -33806,12 +31786,8 @@
                     <a:lnT w="12700" cmpd="sng">
                       <a:noFill/>
                     </a:lnT>
-                    <a:lnB w="6350" cap="flat" cmpd="sng" algn="ctr">
-                      <a:noFill/>
-                      <a:prstDash val="solid"/>
-                      <a:round/>
-                      <a:headEnd type="none" w="med" len="med"/>
-                      <a:tailEnd type="none" w="med" len="med"/>
+                    <a:lnB w="12700" cmpd="sng">
+                      <a:noFill/>
                     </a:lnB>
                     <a:lnTlToBr w="12700" cmpd="sng">
                       <a:noFill/>
@@ -33840,7 +31816,7 @@
                           <a:effectLst/>
                           <a:latin typeface="Noto Sans" panose="020B0502040504020204" pitchFamily="34" charset="0"/>
                         </a:rPr>
-                        <a:t>19,665</a:t>
+                        <a:t>6,465</a:t>
                       </a:r>
                     </a:p>
                   </a:txBody>
@@ -33854,12 +31830,8 @@
                     <a:lnT w="12700" cmpd="sng">
                       <a:noFill/>
                     </a:lnT>
-                    <a:lnB w="6350" cap="flat" cmpd="sng" algn="ctr">
-                      <a:noFill/>
-                      <a:prstDash val="solid"/>
-                      <a:round/>
-                      <a:headEnd type="none" w="med" len="med"/>
-                      <a:tailEnd type="none" w="med" len="med"/>
+                    <a:lnB w="12700" cmpd="sng">
+                      <a:noFill/>
                     </a:lnB>
                     <a:lnTlToBr w="12700" cmpd="sng">
                       <a:noFill/>
@@ -33888,7 +31860,7 @@
                           <a:effectLst/>
                           <a:latin typeface="Noto Sans" panose="020B0502040504020204" pitchFamily="34" charset="0"/>
                         </a:rPr>
-                        <a:t>20,253</a:t>
+                        <a:t>7,857</a:t>
                       </a:r>
                     </a:p>
                   </a:txBody>
@@ -33902,12 +31874,8 @@
                     <a:lnT w="12700" cmpd="sng">
                       <a:noFill/>
                     </a:lnT>
-                    <a:lnB w="6350" cap="flat" cmpd="sng" algn="ctr">
-                      <a:noFill/>
-                      <a:prstDash val="solid"/>
-                      <a:round/>
-                      <a:headEnd type="none" w="med" len="med"/>
-                      <a:tailEnd type="none" w="med" len="med"/>
+                    <a:lnB w="12700" cmpd="sng">
+                      <a:noFill/>
                     </a:lnB>
                     <a:lnTlToBr w="12700" cmpd="sng">
                       <a:noFill/>
@@ -33936,7 +31904,7 @@
                           <a:effectLst/>
                           <a:latin typeface="Noto Sans" panose="020B0502040504020204" pitchFamily="34" charset="0"/>
                         </a:rPr>
-                        <a:t>21,418</a:t>
+                        <a:t>9,464</a:t>
                       </a:r>
                     </a:p>
                   </a:txBody>
@@ -33950,12 +31918,8 @@
                     <a:lnT w="12700" cmpd="sng">
                       <a:noFill/>
                     </a:lnT>
-                    <a:lnB w="6350" cap="flat" cmpd="sng" algn="ctr">
-                      <a:noFill/>
-                      <a:prstDash val="solid"/>
-                      <a:round/>
-                      <a:headEnd type="none" w="med" len="med"/>
-                      <a:tailEnd type="none" w="med" len="med"/>
+                    <a:lnB w="12700" cmpd="sng">
+                      <a:noFill/>
                     </a:lnB>
                     <a:lnTlToBr w="12700" cmpd="sng">
                       <a:noFill/>
@@ -33984,7 +31948,7 @@
                           <a:effectLst/>
                           <a:latin typeface="Noto Sans" panose="020B0502040504020204" pitchFamily="34" charset="0"/>
                         </a:rPr>
-                        <a:t>25,116</a:t>
+                        <a:t>10,944</a:t>
                       </a:r>
                     </a:p>
                   </a:txBody>
@@ -33998,12 +31962,8 @@
                     <a:lnT w="12700" cmpd="sng">
                       <a:noFill/>
                     </a:lnT>
-                    <a:lnB w="6350" cap="flat" cmpd="sng" algn="ctr">
-                      <a:noFill/>
-                      <a:prstDash val="solid"/>
-                      <a:round/>
-                      <a:headEnd type="none" w="med" len="med"/>
-                      <a:tailEnd type="none" w="med" len="med"/>
+                    <a:lnB w="12700" cmpd="sng">
+                      <a:noFill/>
                     </a:lnB>
                     <a:lnTlToBr w="12700" cmpd="sng">
                       <a:noFill/>
@@ -34037,6 +31997,2744 @@
                           <a:effectLst/>
                           <a:latin typeface="Noto Sans" panose="020B0502040504020204" pitchFamily="34" charset="0"/>
                         </a:rPr>
+                        <a:t>12,674</a:t>
+                      </a:r>
+                    </a:p>
+                  </a:txBody>
+                  <a:tcPr marL="0" marR="0" marT="0" marB="0" anchor="ctr">
+                    <a:lnL w="12700" cmpd="sng">
+                      <a:noFill/>
+                    </a:lnL>
+                    <a:lnR w="12700" cmpd="sng">
+                      <a:noFill/>
+                    </a:lnR>
+                    <a:lnT w="12700" cmpd="sng">
+                      <a:noFill/>
+                    </a:lnT>
+                    <a:lnB w="12700" cmpd="sng">
+                      <a:noFill/>
+                    </a:lnB>
+                    <a:lnTlToBr w="12700" cmpd="sng">
+                      <a:noFill/>
+                      <a:prstDash val="solid"/>
+                    </a:lnTlToBr>
+                    <a:lnBlToTr w="12700" cmpd="sng">
+                      <a:noFill/>
+                      <a:prstDash val="solid"/>
+                    </a:lnBlToTr>
+                    <a:solidFill>
+                      <a:schemeClr val="bg1"/>
+                    </a:solidFill>
+                  </a:tcPr>
+                </a:tc>
+                <a:tc>
+                  <a:txBody>
+                    <a:bodyPr/>
+                    <a:lstStyle/>
+                    <a:p>
+                      <a:pPr algn="r" rtl="0" fontAlgn="ctr">
+                        <a:buNone/>
+                      </a:pPr>
+                      <a:r>
+                        <a:rPr lang="en-US" sz="750" b="0" i="0" u="none" strike="noStrike">
+                          <a:solidFill>
+                            <a:srgbClr val="000000"/>
+                          </a:solidFill>
+                          <a:effectLst/>
+                          <a:latin typeface="Noto Sans" panose="020B0502040504020204" pitchFamily="34" charset="0"/>
+                        </a:rPr>
+                        <a:t>14,774</a:t>
+                      </a:r>
+                    </a:p>
+                  </a:txBody>
+                  <a:tcPr marL="0" marR="0" marT="0" marB="0" anchor="ctr">
+                    <a:lnL w="12700" cmpd="sng">
+                      <a:noFill/>
+                    </a:lnL>
+                    <a:lnR w="12700" cmpd="sng">
+                      <a:noFill/>
+                    </a:lnR>
+                    <a:lnT w="12700" cmpd="sng">
+                      <a:noFill/>
+                    </a:lnT>
+                    <a:lnB w="12700" cmpd="sng">
+                      <a:noFill/>
+                    </a:lnB>
+                    <a:lnTlToBr w="12700" cmpd="sng">
+                      <a:noFill/>
+                      <a:prstDash val="solid"/>
+                    </a:lnTlToBr>
+                    <a:lnBlToTr w="12700" cmpd="sng">
+                      <a:noFill/>
+                      <a:prstDash val="solid"/>
+                    </a:lnBlToTr>
+                    <a:noFill/>
+                  </a:tcPr>
+                </a:tc>
+                <a:extLst>
+                  <a:ext uri="{0D108BD9-81ED-4DB2-BD59-A6C34878D82A}">
+                    <a16:rowId xmlns:a16="http://schemas.microsoft.com/office/drawing/2014/main" val="3039360553"/>
+                  </a:ext>
+                </a:extLst>
+              </a:tr>
+              <a:tr h="162000">
+                <a:tc>
+                  <a:txBody>
+                    <a:bodyPr/>
+                    <a:lstStyle/>
+                    <a:p>
+                      <a:pPr marL="0" marR="0" algn="l" latinLnBrk="1" hangingPunct="0">
+                        <a:lnSpc>
+                          <a:spcPts val="950"/>
+                        </a:lnSpc>
+                        <a:spcBef>
+                          <a:spcPts val="0"/>
+                        </a:spcBef>
+                        <a:spcAft>
+                          <a:spcPts val="0"/>
+                        </a:spcAft>
+                      </a:pPr>
+                      <a:r>
+                        <a:rPr lang="en-US" sz="800" b="0" spc="-40" dirty="0">
+                          <a:solidFill>
+                            <a:srgbClr val="000000"/>
+                          </a:solidFill>
+                          <a:effectLst/>
+                          <a:latin typeface="Noto Sans" panose="020B0502040504020204" pitchFamily="34" charset="0"/>
+                          <a:ea typeface="Noto Sans" panose="020B0502040504020204" pitchFamily="34" charset="0"/>
+                          <a:cs typeface="Noto Sans" panose="020B0502040504020204" pitchFamily="34" charset="0"/>
+                        </a:rPr>
+                        <a:t>   % YoY</a:t>
+                      </a:r>
+                    </a:p>
+                  </a:txBody>
+                  <a:tcPr marL="0" marR="0" marT="0" marB="0" anchor="ctr">
+                    <a:lnL w="12700" cmpd="sng">
+                      <a:noFill/>
+                    </a:lnL>
+                    <a:lnR w="12700" cmpd="sng">
+                      <a:noFill/>
+                    </a:lnR>
+                    <a:lnT w="12700" cmpd="sng">
+                      <a:noFill/>
+                    </a:lnT>
+                    <a:lnB w="12700" cmpd="sng">
+                      <a:noFill/>
+                    </a:lnB>
+                    <a:lnTlToBr w="12700" cmpd="sng">
+                      <a:noFill/>
+                      <a:prstDash val="solid"/>
+                    </a:lnTlToBr>
+                    <a:lnBlToTr w="12700" cmpd="sng">
+                      <a:noFill/>
+                      <a:prstDash val="solid"/>
+                    </a:lnBlToTr>
+                    <a:noFill/>
+                  </a:tcPr>
+                </a:tc>
+                <a:tc>
+                  <a:txBody>
+                    <a:bodyPr/>
+                    <a:lstStyle/>
+                    <a:p>
+                      <a:pPr algn="r" rtl="0" fontAlgn="ctr">
+                        <a:buNone/>
+                      </a:pPr>
+                      <a:r>
+                        <a:rPr lang="en-US" sz="750" b="0" i="0" u="none" strike="noStrike">
+                          <a:solidFill>
+                            <a:srgbClr val="000000"/>
+                          </a:solidFill>
+                          <a:effectLst/>
+                          <a:latin typeface="Noto Sans" panose="020B0502040504020204" pitchFamily="34" charset="0"/>
+                        </a:rPr>
+                        <a:t>—</a:t>
+                      </a:r>
+                    </a:p>
+                  </a:txBody>
+                  <a:tcPr marL="0" marR="0" marT="0" marB="0" anchor="ctr">
+                    <a:lnL w="12700" cmpd="sng">
+                      <a:noFill/>
+                    </a:lnL>
+                    <a:lnR w="12700" cmpd="sng">
+                      <a:noFill/>
+                    </a:lnR>
+                    <a:lnT w="12700" cmpd="sng">
+                      <a:noFill/>
+                    </a:lnT>
+                    <a:lnB w="12700" cmpd="sng">
+                      <a:noFill/>
+                    </a:lnB>
+                    <a:lnTlToBr w="12700" cmpd="sng">
+                      <a:noFill/>
+                      <a:prstDash val="solid"/>
+                    </a:lnTlToBr>
+                    <a:lnBlToTr w="12700" cmpd="sng">
+                      <a:noFill/>
+                      <a:prstDash val="solid"/>
+                    </a:lnBlToTr>
+                    <a:noFill/>
+                  </a:tcPr>
+                </a:tc>
+                <a:tc>
+                  <a:txBody>
+                    <a:bodyPr/>
+                    <a:lstStyle/>
+                    <a:p>
+                      <a:pPr algn="r" rtl="0" fontAlgn="ctr">
+                        <a:buNone/>
+                      </a:pPr>
+                      <a:r>
+                        <a:rPr lang="en-US" sz="750" b="0" i="0" u="none" strike="noStrike">
+                          <a:solidFill>
+                            <a:srgbClr val="000000"/>
+                          </a:solidFill>
+                          <a:effectLst/>
+                          <a:latin typeface="Noto Sans" panose="020B0502040504020204" pitchFamily="34" charset="0"/>
+                        </a:rPr>
+                        <a:t>+21.5%</a:t>
+                      </a:r>
+                    </a:p>
+                  </a:txBody>
+                  <a:tcPr marL="0" marR="0" marT="0" marB="0" anchor="ctr">
+                    <a:lnL w="12700" cmpd="sng">
+                      <a:noFill/>
+                    </a:lnL>
+                    <a:lnR w="12700" cmpd="sng">
+                      <a:noFill/>
+                    </a:lnR>
+                    <a:lnT w="12700" cmpd="sng">
+                      <a:noFill/>
+                    </a:lnT>
+                    <a:lnB w="12700" cmpd="sng">
+                      <a:noFill/>
+                    </a:lnB>
+                    <a:lnTlToBr w="12700" cmpd="sng">
+                      <a:noFill/>
+                      <a:prstDash val="solid"/>
+                    </a:lnTlToBr>
+                    <a:lnBlToTr w="12700" cmpd="sng">
+                      <a:noFill/>
+                      <a:prstDash val="solid"/>
+                    </a:lnBlToTr>
+                    <a:noFill/>
+                  </a:tcPr>
+                </a:tc>
+                <a:tc>
+                  <a:txBody>
+                    <a:bodyPr/>
+                    <a:lstStyle/>
+                    <a:p>
+                      <a:pPr algn="r" rtl="0" fontAlgn="ctr">
+                        <a:buNone/>
+                      </a:pPr>
+                      <a:r>
+                        <a:rPr lang="en-US" sz="750" b="0" i="0" u="none" strike="noStrike">
+                          <a:solidFill>
+                            <a:srgbClr val="000000"/>
+                          </a:solidFill>
+                          <a:effectLst/>
+                          <a:latin typeface="Noto Sans" panose="020B0502040504020204" pitchFamily="34" charset="0"/>
+                        </a:rPr>
+                        <a:t>+20.5%</a:t>
+                      </a:r>
+                    </a:p>
+                  </a:txBody>
+                  <a:tcPr marL="0" marR="0" marT="0" marB="0" anchor="ctr">
+                    <a:lnL w="12700" cmpd="sng">
+                      <a:noFill/>
+                    </a:lnL>
+                    <a:lnR w="12700" cmpd="sng">
+                      <a:noFill/>
+                    </a:lnR>
+                    <a:lnT w="12700" cmpd="sng">
+                      <a:noFill/>
+                    </a:lnT>
+                    <a:lnB w="12700" cmpd="sng">
+                      <a:noFill/>
+                    </a:lnB>
+                    <a:lnTlToBr w="12700" cmpd="sng">
+                      <a:noFill/>
+                      <a:prstDash val="solid"/>
+                    </a:lnTlToBr>
+                    <a:lnBlToTr w="12700" cmpd="sng">
+                      <a:noFill/>
+                      <a:prstDash val="solid"/>
+                    </a:lnBlToTr>
+                    <a:noFill/>
+                  </a:tcPr>
+                </a:tc>
+                <a:tc>
+                  <a:txBody>
+                    <a:bodyPr/>
+                    <a:lstStyle/>
+                    <a:p>
+                      <a:pPr algn="r" rtl="0" fontAlgn="ctr">
+                        <a:buNone/>
+                      </a:pPr>
+                      <a:r>
+                        <a:rPr lang="en-US" sz="750" b="0" i="0" u="none" strike="noStrike">
+                          <a:solidFill>
+                            <a:srgbClr val="000000"/>
+                          </a:solidFill>
+                          <a:effectLst/>
+                          <a:latin typeface="Noto Sans" panose="020B0502040504020204" pitchFamily="34" charset="0"/>
+                        </a:rPr>
+                        <a:t>+15.6%</a:t>
+                      </a:r>
+                    </a:p>
+                  </a:txBody>
+                  <a:tcPr marL="0" marR="0" marT="0" marB="0" anchor="ctr">
+                    <a:lnL w="12700" cmpd="sng">
+                      <a:noFill/>
+                    </a:lnL>
+                    <a:lnR w="12700" cmpd="sng">
+                      <a:noFill/>
+                    </a:lnR>
+                    <a:lnT w="12700" cmpd="sng">
+                      <a:noFill/>
+                    </a:lnT>
+                    <a:lnB w="12700" cmpd="sng">
+                      <a:noFill/>
+                    </a:lnB>
+                    <a:lnTlToBr w="12700" cmpd="sng">
+                      <a:noFill/>
+                      <a:prstDash val="solid"/>
+                    </a:lnTlToBr>
+                    <a:lnBlToTr w="12700" cmpd="sng">
+                      <a:noFill/>
+                      <a:prstDash val="solid"/>
+                    </a:lnBlToTr>
+                    <a:solidFill>
+                      <a:schemeClr val="accent4">
+                        <a:lumMod val="20000"/>
+                        <a:lumOff val="80000"/>
+                      </a:schemeClr>
+                    </a:solidFill>
+                  </a:tcPr>
+                </a:tc>
+                <a:tc>
+                  <a:txBody>
+                    <a:bodyPr/>
+                    <a:lstStyle/>
+                    <a:p>
+                      <a:pPr algn="r" rtl="0" fontAlgn="ctr">
+                        <a:buNone/>
+                      </a:pPr>
+                      <a:r>
+                        <a:rPr lang="en-US" sz="750" b="0" i="0" u="none" strike="noStrike">
+                          <a:solidFill>
+                            <a:srgbClr val="000000"/>
+                          </a:solidFill>
+                          <a:effectLst/>
+                          <a:latin typeface="Noto Sans" panose="020B0502040504020204" pitchFamily="34" charset="0"/>
+                        </a:rPr>
+                        <a:t>+15.8%</a:t>
+                      </a:r>
+                    </a:p>
+                  </a:txBody>
+                  <a:tcPr marL="0" marR="0" marT="0" marB="0" anchor="ctr">
+                    <a:lnL w="12700" cmpd="sng">
+                      <a:noFill/>
+                    </a:lnL>
+                    <a:lnR w="12700" cmpd="sng">
+                      <a:noFill/>
+                    </a:lnR>
+                    <a:lnT w="12700" cmpd="sng">
+                      <a:noFill/>
+                    </a:lnT>
+                    <a:lnB w="12700" cmpd="sng">
+                      <a:noFill/>
+                    </a:lnB>
+                    <a:lnTlToBr w="12700" cmpd="sng">
+                      <a:noFill/>
+                      <a:prstDash val="solid"/>
+                    </a:lnTlToBr>
+                    <a:lnBlToTr w="12700" cmpd="sng">
+                      <a:noFill/>
+                      <a:prstDash val="solid"/>
+                    </a:lnBlToTr>
+                    <a:solidFill>
+                      <a:schemeClr val="bg1"/>
+                    </a:solidFill>
+                  </a:tcPr>
+                </a:tc>
+                <a:tc>
+                  <a:txBody>
+                    <a:bodyPr/>
+                    <a:lstStyle/>
+                    <a:p>
+                      <a:pPr algn="r" rtl="0" fontAlgn="ctr">
+                        <a:buNone/>
+                      </a:pPr>
+                      <a:r>
+                        <a:rPr lang="en-US" sz="750" b="0" i="0" u="none" strike="noStrike">
+                          <a:solidFill>
+                            <a:srgbClr val="000000"/>
+                          </a:solidFill>
+                          <a:effectLst/>
+                          <a:latin typeface="Noto Sans" panose="020B0502040504020204" pitchFamily="34" charset="0"/>
+                        </a:rPr>
+                        <a:t>+16.6%</a:t>
+                      </a:r>
+                    </a:p>
+                  </a:txBody>
+                  <a:tcPr marL="0" marR="0" marT="0" marB="0" anchor="ctr">
+                    <a:lnL w="12700" cmpd="sng">
+                      <a:noFill/>
+                    </a:lnL>
+                    <a:lnR w="12700" cmpd="sng">
+                      <a:noFill/>
+                    </a:lnR>
+                    <a:lnT w="12700" cmpd="sng">
+                      <a:noFill/>
+                    </a:lnT>
+                    <a:lnB w="12700" cmpd="sng">
+                      <a:noFill/>
+                    </a:lnB>
+                    <a:lnTlToBr w="12700" cmpd="sng">
+                      <a:noFill/>
+                      <a:prstDash val="solid"/>
+                    </a:lnTlToBr>
+                    <a:lnBlToTr w="12700" cmpd="sng">
+                      <a:noFill/>
+                      <a:prstDash val="solid"/>
+                    </a:lnBlToTr>
+                    <a:noFill/>
+                  </a:tcPr>
+                </a:tc>
+                <a:extLst>
+                  <a:ext uri="{0D108BD9-81ED-4DB2-BD59-A6C34878D82A}">
+                    <a16:rowId xmlns:a16="http://schemas.microsoft.com/office/drawing/2014/main" val="3039360553"/>
+                  </a:ext>
+                </a:extLst>
+              </a:tr>
+              <a:tr h="162000">
+                <a:tc>
+                  <a:txBody>
+                    <a:bodyPr/>
+                    <a:lstStyle/>
+                    <a:p>
+                      <a:pPr marL="0" marR="0" algn="l" latinLnBrk="1" hangingPunct="0">
+                        <a:lnSpc>
+                          <a:spcPts val="950"/>
+                        </a:lnSpc>
+                        <a:spcBef>
+                          <a:spcPts val="0"/>
+                        </a:spcBef>
+                        <a:spcAft>
+                          <a:spcPts val="0"/>
+                        </a:spcAft>
+                      </a:pPr>
+                      <a:r>
+                        <a:rPr lang="en-US" sz="800" b="0" spc="-40" dirty="0">
+                          <a:solidFill>
+                            <a:srgbClr val="000000"/>
+                          </a:solidFill>
+                          <a:effectLst/>
+                          <a:latin typeface="Noto Sans" panose="020B0502040504020204" pitchFamily="34" charset="0"/>
+                          <a:ea typeface="Noto Sans" panose="020B0502040504020204" pitchFamily="34" charset="0"/>
+                          <a:cs typeface="Noto Sans" panose="020B0502040504020204" pitchFamily="34" charset="0"/>
+                        </a:rPr>
+                        <a:t>EPS (VND)</a:t>
+                      </a:r>
+                    </a:p>
+                  </a:txBody>
+                  <a:tcPr marL="0" marR="0" marT="0" marB="0" anchor="ctr">
+                    <a:lnL w="12700" cmpd="sng">
+                      <a:noFill/>
+                    </a:lnL>
+                    <a:lnR w="12700" cmpd="sng">
+                      <a:noFill/>
+                    </a:lnR>
+                    <a:lnT w="12700" cmpd="sng">
+                      <a:noFill/>
+                    </a:lnT>
+                    <a:lnB w="12700" cmpd="sng">
+                      <a:noFill/>
+                    </a:lnB>
+                    <a:lnTlToBr w="12700" cmpd="sng">
+                      <a:noFill/>
+                      <a:prstDash val="solid"/>
+                    </a:lnTlToBr>
+                    <a:lnBlToTr w="12700" cmpd="sng">
+                      <a:noFill/>
+                      <a:prstDash val="solid"/>
+                    </a:lnBlToTr>
+                    <a:noFill/>
+                  </a:tcPr>
+                </a:tc>
+                <a:tc>
+                  <a:txBody>
+                    <a:bodyPr/>
+                    <a:lstStyle/>
+                    <a:p>
+                      <a:pPr algn="r" rtl="0" fontAlgn="ctr">
+                        <a:buNone/>
+                      </a:pPr>
+                      <a:r>
+                        <a:rPr lang="en-US" sz="750" b="0" i="0" u="none" strike="noStrike">
+                          <a:solidFill>
+                            <a:srgbClr val="000000"/>
+                          </a:solidFill>
+                          <a:effectLst/>
+                          <a:latin typeface="Noto Sans" panose="020B0502040504020204" pitchFamily="34" charset="0"/>
+                        </a:rPr>
+                        <a:t>4,648</a:t>
+                      </a:r>
+                    </a:p>
+                  </a:txBody>
+                  <a:tcPr marL="0" marR="0" marT="0" marB="0" anchor="ctr">
+                    <a:lnL w="12700" cmpd="sng">
+                      <a:noFill/>
+                    </a:lnL>
+                    <a:lnR w="12700" cmpd="sng">
+                      <a:noFill/>
+                    </a:lnR>
+                    <a:lnT w="12700" cmpd="sng">
+                      <a:noFill/>
+                    </a:lnT>
+                    <a:lnB w="12700" cmpd="sng">
+                      <a:noFill/>
+                    </a:lnB>
+                    <a:lnTlToBr w="12700" cmpd="sng">
+                      <a:noFill/>
+                      <a:prstDash val="solid"/>
+                    </a:lnTlToBr>
+                    <a:lnBlToTr w="12700" cmpd="sng">
+                      <a:noFill/>
+                      <a:prstDash val="solid"/>
+                    </a:lnBlToTr>
+                    <a:noFill/>
+                  </a:tcPr>
+                </a:tc>
+                <a:tc>
+                  <a:txBody>
+                    <a:bodyPr/>
+                    <a:lstStyle/>
+                    <a:p>
+                      <a:pPr algn="r" rtl="0" fontAlgn="ctr">
+                        <a:buNone/>
+                      </a:pPr>
+                      <a:r>
+                        <a:rPr lang="en-US" sz="750" b="0" i="0" u="none" strike="noStrike">
+                          <a:solidFill>
+                            <a:srgbClr val="000000"/>
+                          </a:solidFill>
+                          <a:effectLst/>
+                          <a:latin typeface="Noto Sans" panose="020B0502040504020204" pitchFamily="34" charset="0"/>
+                        </a:rPr>
+                        <a:t>4,877</a:t>
+                      </a:r>
+                    </a:p>
+                  </a:txBody>
+                  <a:tcPr marL="0" marR="0" marT="0" marB="0" anchor="ctr">
+                    <a:lnL w="12700" cmpd="sng">
+                      <a:noFill/>
+                    </a:lnL>
+                    <a:lnR w="12700" cmpd="sng">
+                      <a:noFill/>
+                    </a:lnR>
+                    <a:lnT w="12700" cmpd="sng">
+                      <a:noFill/>
+                    </a:lnT>
+                    <a:lnB w="12700" cmpd="sng">
+                      <a:noFill/>
+                    </a:lnB>
+                    <a:lnTlToBr w="12700" cmpd="sng">
+                      <a:noFill/>
+                      <a:prstDash val="solid"/>
+                    </a:lnTlToBr>
+                    <a:lnBlToTr w="12700" cmpd="sng">
+                      <a:noFill/>
+                      <a:prstDash val="solid"/>
+                    </a:lnBlToTr>
+                    <a:noFill/>
+                  </a:tcPr>
+                </a:tc>
+                <a:tc>
+                  <a:txBody>
+                    <a:bodyPr/>
+                    <a:lstStyle/>
+                    <a:p>
+                      <a:pPr algn="r" rtl="0" fontAlgn="ctr">
+                        <a:buNone/>
+                      </a:pPr>
+                      <a:r>
+                        <a:rPr lang="en-US" sz="750" b="0" i="0" u="none" strike="noStrike">
+                          <a:solidFill>
+                            <a:srgbClr val="000000"/>
+                          </a:solidFill>
+                          <a:effectLst/>
+                          <a:latin typeface="Noto Sans" panose="020B0502040504020204" pitchFamily="34" charset="0"/>
+                        </a:rPr>
+                        <a:t>5,073</a:t>
+                      </a:r>
+                    </a:p>
+                  </a:txBody>
+                  <a:tcPr marL="0" marR="0" marT="0" marB="0" anchor="ctr">
+                    <a:lnL w="12700" cmpd="sng">
+                      <a:noFill/>
+                    </a:lnL>
+                    <a:lnR w="12700" cmpd="sng">
+                      <a:noFill/>
+                    </a:lnR>
+                    <a:lnT w="12700" cmpd="sng">
+                      <a:noFill/>
+                    </a:lnT>
+                    <a:lnB w="12700" cmpd="sng">
+                      <a:noFill/>
+                    </a:lnB>
+                    <a:lnTlToBr w="12700" cmpd="sng">
+                      <a:noFill/>
+                      <a:prstDash val="solid"/>
+                    </a:lnTlToBr>
+                    <a:lnBlToTr w="12700" cmpd="sng">
+                      <a:noFill/>
+                      <a:prstDash val="solid"/>
+                    </a:lnBlToTr>
+                    <a:noFill/>
+                  </a:tcPr>
+                </a:tc>
+                <a:tc>
+                  <a:txBody>
+                    <a:bodyPr/>
+                    <a:lstStyle/>
+                    <a:p>
+                      <a:pPr algn="r" rtl="0" fontAlgn="ctr">
+                        <a:buNone/>
+                      </a:pPr>
+                      <a:r>
+                        <a:rPr lang="en-US" sz="750" b="0" i="0" u="none" strike="noStrike">
+                          <a:solidFill>
+                            <a:srgbClr val="000000"/>
+                          </a:solidFill>
+                          <a:effectLst/>
+                          <a:latin typeface="Noto Sans" panose="020B0502040504020204" pitchFamily="34" charset="0"/>
+                        </a:rPr>
+                        <a:t>6,424</a:t>
+                      </a:r>
+                    </a:p>
+                  </a:txBody>
+                  <a:tcPr marL="0" marR="0" marT="0" marB="0" anchor="ctr">
+                    <a:lnL w="12700" cmpd="sng">
+                      <a:noFill/>
+                    </a:lnL>
+                    <a:lnR w="12700" cmpd="sng">
+                      <a:noFill/>
+                    </a:lnR>
+                    <a:lnT w="12700" cmpd="sng">
+                      <a:noFill/>
+                    </a:lnT>
+                    <a:lnB w="12700" cmpd="sng">
+                      <a:noFill/>
+                    </a:lnB>
+                    <a:lnTlToBr w="12700" cmpd="sng">
+                      <a:noFill/>
+                      <a:prstDash val="solid"/>
+                    </a:lnTlToBr>
+                    <a:lnBlToTr w="12700" cmpd="sng">
+                      <a:noFill/>
+                      <a:prstDash val="solid"/>
+                    </a:lnBlToTr>
+                    <a:solidFill>
+                      <a:schemeClr val="accent4">
+                        <a:lumMod val="20000"/>
+                        <a:lumOff val="80000"/>
+                      </a:schemeClr>
+                    </a:solidFill>
+                  </a:tcPr>
+                </a:tc>
+                <a:tc>
+                  <a:txBody>
+                    <a:bodyPr/>
+                    <a:lstStyle/>
+                    <a:p>
+                      <a:pPr algn="r" rtl="0" fontAlgn="ctr">
+                        <a:buNone/>
+                      </a:pPr>
+                      <a:r>
+                        <a:rPr lang="en-US" sz="750" b="0" i="0" u="none" strike="noStrike">
+                          <a:solidFill>
+                            <a:srgbClr val="000000"/>
+                          </a:solidFill>
+                          <a:effectLst/>
+                          <a:latin typeface="Noto Sans" panose="020B0502040504020204" pitchFamily="34" charset="0"/>
+                        </a:rPr>
+                        <a:t>7,440</a:t>
+                      </a:r>
+                    </a:p>
+                  </a:txBody>
+                  <a:tcPr marL="0" marR="0" marT="0" marB="0" anchor="ctr">
+                    <a:lnL w="12700" cmpd="sng">
+                      <a:noFill/>
+                    </a:lnL>
+                    <a:lnR w="12700" cmpd="sng">
+                      <a:noFill/>
+                    </a:lnR>
+                    <a:lnT w="12700" cmpd="sng">
+                      <a:noFill/>
+                    </a:lnT>
+                    <a:lnB w="12700" cmpd="sng">
+                      <a:noFill/>
+                    </a:lnB>
+                    <a:lnTlToBr w="12700" cmpd="sng">
+                      <a:noFill/>
+                      <a:prstDash val="solid"/>
+                    </a:lnTlToBr>
+                    <a:lnBlToTr w="12700" cmpd="sng">
+                      <a:noFill/>
+                      <a:prstDash val="solid"/>
+                    </a:lnBlToTr>
+                    <a:solidFill>
+                      <a:schemeClr val="bg1"/>
+                    </a:solidFill>
+                  </a:tcPr>
+                </a:tc>
+                <a:tc>
+                  <a:txBody>
+                    <a:bodyPr/>
+                    <a:lstStyle/>
+                    <a:p>
+                      <a:pPr algn="r" rtl="0" fontAlgn="ctr">
+                        <a:buNone/>
+                      </a:pPr>
+                      <a:r>
+                        <a:rPr lang="en-US" sz="750" b="0" i="0" u="none" strike="noStrike">
+                          <a:solidFill>
+                            <a:srgbClr val="000000"/>
+                          </a:solidFill>
+                          <a:effectLst/>
+                          <a:latin typeface="Noto Sans" panose="020B0502040504020204" pitchFamily="34" charset="0"/>
+                        </a:rPr>
+                        <a:t>8,673</a:t>
+                      </a:r>
+                    </a:p>
+                  </a:txBody>
+                  <a:tcPr marL="0" marR="0" marT="0" marB="0" anchor="ctr">
+                    <a:lnL w="12700" cmpd="sng">
+                      <a:noFill/>
+                    </a:lnL>
+                    <a:lnR w="12700" cmpd="sng">
+                      <a:noFill/>
+                    </a:lnR>
+                    <a:lnT w="12700" cmpd="sng">
+                      <a:noFill/>
+                    </a:lnT>
+                    <a:lnB w="12700" cmpd="sng">
+                      <a:noFill/>
+                    </a:lnB>
+                    <a:lnTlToBr w="12700" cmpd="sng">
+                      <a:noFill/>
+                      <a:prstDash val="solid"/>
+                    </a:lnTlToBr>
+                    <a:lnBlToTr w="12700" cmpd="sng">
+                      <a:noFill/>
+                      <a:prstDash val="solid"/>
+                    </a:lnBlToTr>
+                    <a:noFill/>
+                  </a:tcPr>
+                </a:tc>
+                <a:extLst>
+                  <a:ext uri="{0D108BD9-81ED-4DB2-BD59-A6C34878D82A}">
+                    <a16:rowId xmlns:a16="http://schemas.microsoft.com/office/drawing/2014/main" val="10004"/>
+                  </a:ext>
+                </a:extLst>
+              </a:tr>
+              <a:tr h="162000">
+                <a:tc>
+                  <a:txBody>
+                    <a:bodyPr/>
+                    <a:lstStyle/>
+                    <a:p>
+                      <a:pPr marL="0" marR="0" algn="l" latinLnBrk="1" hangingPunct="0">
+                        <a:lnSpc>
+                          <a:spcPts val="950"/>
+                        </a:lnSpc>
+                        <a:spcBef>
+                          <a:spcPts val="0"/>
+                        </a:spcBef>
+                        <a:spcAft>
+                          <a:spcPts val="0"/>
+                        </a:spcAft>
+                      </a:pPr>
+                      <a:r>
+                        <a:rPr lang="en-US" sz="800" b="0" spc="-40" dirty="0">
+                          <a:solidFill>
+                            <a:srgbClr val="000000"/>
+                          </a:solidFill>
+                          <a:effectLst/>
+                          <a:latin typeface="Noto Sans" panose="020B0502040504020204" pitchFamily="34" charset="0"/>
+                          <a:ea typeface="Noto Sans" panose="020B0502040504020204" pitchFamily="34" charset="0"/>
+                          <a:cs typeface="Noto Sans" panose="020B0502040504020204" pitchFamily="34" charset="0"/>
+                        </a:rPr>
+                        <a:t>ROE (%)</a:t>
+                      </a:r>
+                    </a:p>
+                  </a:txBody>
+                  <a:tcPr marL="0" marR="0" marT="0" marB="0" anchor="ctr">
+                    <a:lnL w="12700" cmpd="sng">
+                      <a:noFill/>
+                    </a:lnL>
+                    <a:lnR w="12700" cmpd="sng">
+                      <a:noFill/>
+                    </a:lnR>
+                    <a:lnT w="12700" cmpd="sng">
+                      <a:noFill/>
+                    </a:lnT>
+                    <a:lnB w="12700" cmpd="sng">
+                      <a:noFill/>
+                    </a:lnB>
+                    <a:lnTlToBr w="12700" cmpd="sng">
+                      <a:noFill/>
+                      <a:prstDash val="solid"/>
+                    </a:lnTlToBr>
+                    <a:lnBlToTr w="12700" cmpd="sng">
+                      <a:noFill/>
+                      <a:prstDash val="solid"/>
+                    </a:lnBlToTr>
+                    <a:noFill/>
+                  </a:tcPr>
+                </a:tc>
+                <a:tc>
+                  <a:txBody>
+                    <a:bodyPr/>
+                    <a:lstStyle/>
+                    <a:p>
+                      <a:pPr algn="r" rtl="0" fontAlgn="ctr">
+                        <a:buNone/>
+                      </a:pPr>
+                      <a:r>
+                        <a:rPr lang="en-US" sz="750" b="0" i="0" u="none" strike="noStrike">
+                          <a:solidFill>
+                            <a:srgbClr val="000000"/>
+                          </a:solidFill>
+                          <a:effectLst/>
+                          <a:latin typeface="Noto Sans" panose="020B0502040504020204" pitchFamily="34" charset="0"/>
+                        </a:rPr>
+                        <a:t>28.1</a:t>
+                      </a:r>
+                    </a:p>
+                  </a:txBody>
+                  <a:tcPr marL="0" marR="0" marT="0" marB="0" anchor="ctr">
+                    <a:lnL w="12700" cmpd="sng">
+                      <a:noFill/>
+                    </a:lnL>
+                    <a:lnR w="12700" cmpd="sng">
+                      <a:noFill/>
+                    </a:lnR>
+                    <a:lnT w="12700" cmpd="sng">
+                      <a:noFill/>
+                    </a:lnT>
+                    <a:lnB w="12700" cmpd="sng">
+                      <a:noFill/>
+                    </a:lnB>
+                    <a:lnTlToBr w="12700" cmpd="sng">
+                      <a:noFill/>
+                      <a:prstDash val="solid"/>
+                    </a:lnTlToBr>
+                    <a:lnBlToTr w="12700" cmpd="sng">
+                      <a:noFill/>
+                      <a:prstDash val="solid"/>
+                    </a:lnBlToTr>
+                    <a:noFill/>
+                  </a:tcPr>
+                </a:tc>
+                <a:tc>
+                  <a:txBody>
+                    <a:bodyPr/>
+                    <a:lstStyle/>
+                    <a:p>
+                      <a:pPr algn="r" rtl="0" fontAlgn="ctr">
+                        <a:buNone/>
+                      </a:pPr>
+                      <a:r>
+                        <a:rPr lang="en-US" sz="750" b="0" i="0" u="none" strike="noStrike">
+                          <a:solidFill>
+                            <a:srgbClr val="000000"/>
+                          </a:solidFill>
+                          <a:effectLst/>
+                          <a:latin typeface="Noto Sans" panose="020B0502040504020204" pitchFamily="34" charset="0"/>
+                        </a:rPr>
+                        <a:t>28.7</a:t>
+                      </a:r>
+                    </a:p>
+                  </a:txBody>
+                  <a:tcPr marL="0" marR="0" marT="0" marB="0" anchor="ctr">
+                    <a:lnL w="12700" cmpd="sng">
+                      <a:noFill/>
+                    </a:lnL>
+                    <a:lnR w="12700" cmpd="sng">
+                      <a:noFill/>
+                    </a:lnR>
+                    <a:lnT w="12700" cmpd="sng">
+                      <a:noFill/>
+                    </a:lnT>
+                    <a:lnB w="12700" cmpd="sng">
+                      <a:noFill/>
+                    </a:lnB>
+                    <a:lnTlToBr w="12700" cmpd="sng">
+                      <a:noFill/>
+                      <a:prstDash val="solid"/>
+                    </a:lnTlToBr>
+                    <a:lnBlToTr w="12700" cmpd="sng">
+                      <a:noFill/>
+                      <a:prstDash val="solid"/>
+                    </a:lnBlToTr>
+                    <a:noFill/>
+                  </a:tcPr>
+                </a:tc>
+                <a:tc>
+                  <a:txBody>
+                    <a:bodyPr/>
+                    <a:lstStyle/>
+                    <a:p>
+                      <a:pPr algn="r" rtl="0" fontAlgn="ctr">
+                        <a:buNone/>
+                      </a:pPr>
+                      <a:r>
+                        <a:rPr lang="en-US" sz="750" b="0" i="0" u="none" strike="noStrike">
+                          <a:solidFill>
+                            <a:srgbClr val="000000"/>
+                          </a:solidFill>
+                          <a:effectLst/>
+                          <a:latin typeface="Noto Sans" panose="020B0502040504020204" pitchFamily="34" charset="0"/>
+                        </a:rPr>
+                        <a:t>28.6</a:t>
+                      </a:r>
+                    </a:p>
+                  </a:txBody>
+                  <a:tcPr marL="0" marR="0" marT="0" marB="0" anchor="ctr">
+                    <a:lnL w="12700" cmpd="sng">
+                      <a:noFill/>
+                    </a:lnL>
+                    <a:lnR w="12700" cmpd="sng">
+                      <a:noFill/>
+                    </a:lnR>
+                    <a:lnT w="12700" cmpd="sng">
+                      <a:noFill/>
+                    </a:lnT>
+                    <a:lnB w="12700" cmpd="sng">
+                      <a:noFill/>
+                    </a:lnB>
+                    <a:lnTlToBr w="12700" cmpd="sng">
+                      <a:noFill/>
+                      <a:prstDash val="solid"/>
+                    </a:lnTlToBr>
+                    <a:lnBlToTr w="12700" cmpd="sng">
+                      <a:noFill/>
+                      <a:prstDash val="solid"/>
+                    </a:lnBlToTr>
+                    <a:noFill/>
+                  </a:tcPr>
+                </a:tc>
+                <a:tc>
+                  <a:txBody>
+                    <a:bodyPr/>
+                    <a:lstStyle/>
+                    <a:p>
+                      <a:pPr algn="r" rtl="0" fontAlgn="ctr">
+                        <a:buNone/>
+                      </a:pPr>
+                      <a:r>
+                        <a:rPr lang="en-US" sz="750" b="0" i="0" u="none" strike="noStrike">
+                          <a:solidFill>
+                            <a:srgbClr val="000000"/>
+                          </a:solidFill>
+                          <a:effectLst/>
+                          <a:latin typeface="Noto Sans" panose="020B0502040504020204" pitchFamily="34" charset="0"/>
+                        </a:rPr>
+                        <a:t>27.6</a:t>
+                      </a:r>
+                    </a:p>
+                  </a:txBody>
+                  <a:tcPr marL="0" marR="0" marT="0" marB="0" anchor="ctr">
+                    <a:lnL w="12700" cmpd="sng">
+                      <a:noFill/>
+                    </a:lnL>
+                    <a:lnR w="12700" cmpd="sng">
+                      <a:noFill/>
+                    </a:lnR>
+                    <a:lnT w="12700" cmpd="sng">
+                      <a:noFill/>
+                    </a:lnT>
+                    <a:lnB w="12700" cmpd="sng">
+                      <a:noFill/>
+                    </a:lnB>
+                    <a:lnTlToBr w="12700" cmpd="sng">
+                      <a:noFill/>
+                      <a:prstDash val="solid"/>
+                    </a:lnTlToBr>
+                    <a:lnBlToTr w="12700" cmpd="sng">
+                      <a:noFill/>
+                      <a:prstDash val="solid"/>
+                    </a:lnBlToTr>
+                    <a:solidFill>
+                      <a:schemeClr val="accent4">
+                        <a:lumMod val="20000"/>
+                        <a:lumOff val="80000"/>
+                      </a:schemeClr>
+                    </a:solidFill>
+                  </a:tcPr>
+                </a:tc>
+                <a:tc>
+                  <a:txBody>
+                    <a:bodyPr/>
+                    <a:lstStyle/>
+                    <a:p>
+                      <a:pPr algn="r" rtl="0" fontAlgn="ctr">
+                        <a:buNone/>
+                      </a:pPr>
+                      <a:r>
+                        <a:rPr lang="en-US" sz="750" b="0" i="0" u="none" strike="noStrike">
+                          <a:solidFill>
+                            <a:srgbClr val="000000"/>
+                          </a:solidFill>
+                          <a:effectLst/>
+                          <a:latin typeface="Noto Sans" panose="020B0502040504020204" pitchFamily="34" charset="0"/>
+                        </a:rPr>
+                        <a:t>27.1</a:t>
+                      </a:r>
+                    </a:p>
+                  </a:txBody>
+                  <a:tcPr marL="0" marR="0" marT="0" marB="0" anchor="ctr">
+                    <a:lnL w="12700" cmpd="sng">
+                      <a:noFill/>
+                    </a:lnL>
+                    <a:lnR w="12700" cmpd="sng">
+                      <a:noFill/>
+                    </a:lnR>
+                    <a:lnT w="12700" cmpd="sng">
+                      <a:noFill/>
+                    </a:lnT>
+                    <a:lnB w="12700" cmpd="sng">
+                      <a:noFill/>
+                    </a:lnB>
+                    <a:lnTlToBr w="12700" cmpd="sng">
+                      <a:noFill/>
+                      <a:prstDash val="solid"/>
+                    </a:lnTlToBr>
+                    <a:lnBlToTr w="12700" cmpd="sng">
+                      <a:noFill/>
+                      <a:prstDash val="solid"/>
+                    </a:lnBlToTr>
+                    <a:solidFill>
+                      <a:schemeClr val="bg1"/>
+                    </a:solidFill>
+                  </a:tcPr>
+                </a:tc>
+                <a:tc>
+                  <a:txBody>
+                    <a:bodyPr/>
+                    <a:lstStyle/>
+                    <a:p>
+                      <a:pPr algn="r" rtl="0" fontAlgn="ctr">
+                        <a:buNone/>
+                      </a:pPr>
+                      <a:r>
+                        <a:rPr lang="en-US" sz="750" b="0" i="0" u="none" strike="noStrike">
+                          <a:solidFill>
+                            <a:srgbClr val="000000"/>
+                          </a:solidFill>
+                          <a:effectLst/>
+                          <a:latin typeface="Noto Sans" panose="020B0502040504020204" pitchFamily="34" charset="0"/>
+                        </a:rPr>
+                        <a:t>26.5</a:t>
+                      </a:r>
+                    </a:p>
+                  </a:txBody>
+                  <a:tcPr marL="0" marR="0" marT="0" marB="0" anchor="ctr">
+                    <a:lnL w="12700" cmpd="sng">
+                      <a:noFill/>
+                    </a:lnL>
+                    <a:lnR w="12700" cmpd="sng">
+                      <a:noFill/>
+                    </a:lnR>
+                    <a:lnT w="12700" cmpd="sng">
+                      <a:noFill/>
+                    </a:lnT>
+                    <a:lnB w="12700" cmpd="sng">
+                      <a:noFill/>
+                    </a:lnB>
+                    <a:lnTlToBr w="12700" cmpd="sng">
+                      <a:noFill/>
+                      <a:prstDash val="solid"/>
+                    </a:lnTlToBr>
+                    <a:lnBlToTr w="12700" cmpd="sng">
+                      <a:noFill/>
+                      <a:prstDash val="solid"/>
+                    </a:lnBlToTr>
+                    <a:noFill/>
+                  </a:tcPr>
+                </a:tc>
+                <a:extLst>
+                  <a:ext uri="{0D108BD9-81ED-4DB2-BD59-A6C34878D82A}">
+                    <a16:rowId xmlns:a16="http://schemas.microsoft.com/office/drawing/2014/main" val="10005"/>
+                  </a:ext>
+                </a:extLst>
+              </a:tr>
+              <a:tr h="162000">
+                <a:tc>
+                  <a:txBody>
+                    <a:bodyPr/>
+                    <a:lstStyle/>
+                    <a:p>
+                      <a:pPr marL="0" marR="0" algn="l" latinLnBrk="1" hangingPunct="0">
+                        <a:lnSpc>
+                          <a:spcPts val="950"/>
+                        </a:lnSpc>
+                        <a:spcBef>
+                          <a:spcPts val="0"/>
+                        </a:spcBef>
+                        <a:spcAft>
+                          <a:spcPts val="0"/>
+                        </a:spcAft>
+                      </a:pPr>
+                      <a:r>
+                        <a:rPr lang="en-US" sz="800" b="0" spc="-40" dirty="0">
+                          <a:solidFill>
+                            <a:srgbClr val="000000"/>
+                          </a:solidFill>
+                          <a:effectLst/>
+                          <a:latin typeface="Noto Sans" panose="020B0502040504020204" pitchFamily="34" charset="0"/>
+                          <a:ea typeface="Noto Sans" panose="020B0502040504020204" pitchFamily="34" charset="0"/>
+                          <a:cs typeface="Noto Sans" panose="020B0502040504020204" pitchFamily="34" charset="0"/>
+                        </a:rPr>
+                        <a:t>P/E (x)</a:t>
+                      </a:r>
+                    </a:p>
+                  </a:txBody>
+                  <a:tcPr marL="0" marR="0" marT="0" marB="0" anchor="ctr">
+                    <a:lnL w="12700" cmpd="sng">
+                      <a:noFill/>
+                    </a:lnL>
+                    <a:lnR w="12700" cmpd="sng">
+                      <a:noFill/>
+                    </a:lnR>
+                    <a:lnT w="12700" cmpd="sng">
+                      <a:noFill/>
+                    </a:lnT>
+                    <a:lnB w="12700" cmpd="sng">
+                      <a:noFill/>
+                    </a:lnB>
+                    <a:lnTlToBr w="12700" cmpd="sng">
+                      <a:noFill/>
+                      <a:prstDash val="solid"/>
+                    </a:lnTlToBr>
+                    <a:lnBlToTr w="12700" cmpd="sng">
+                      <a:noFill/>
+                      <a:prstDash val="solid"/>
+                    </a:lnBlToTr>
+                    <a:noFill/>
+                  </a:tcPr>
+                </a:tc>
+                <a:tc>
+                  <a:txBody>
+                    <a:bodyPr/>
+                    <a:lstStyle/>
+                    <a:p>
+                      <a:pPr algn="r" rtl="0" fontAlgn="ctr">
+                        <a:buNone/>
+                      </a:pPr>
+                      <a:r>
+                        <a:rPr lang="en-US" sz="750" b="0" i="0" u="none" strike="noStrike">
+                          <a:solidFill>
+                            <a:srgbClr val="000000"/>
+                          </a:solidFill>
+                          <a:effectLst/>
+                          <a:latin typeface="Noto Sans" panose="020B0502040504020204" pitchFamily="34" charset="0"/>
+                        </a:rPr>
+                        <a:t>19.7</a:t>
+                      </a:r>
+                    </a:p>
+                  </a:txBody>
+                  <a:tcPr marL="0" marR="0" marT="0" marB="0" anchor="ctr">
+                    <a:lnL w="12700" cmpd="sng">
+                      <a:noFill/>
+                    </a:lnL>
+                    <a:lnR w="12700" cmpd="sng">
+                      <a:noFill/>
+                    </a:lnR>
+                    <a:lnT w="12700" cmpd="sng">
+                      <a:noFill/>
+                    </a:lnT>
+                    <a:lnB w="12700" cmpd="sng">
+                      <a:noFill/>
+                    </a:lnB>
+                    <a:lnTlToBr w="12700" cmpd="sng">
+                      <a:noFill/>
+                      <a:prstDash val="solid"/>
+                    </a:lnTlToBr>
+                    <a:lnBlToTr w="12700" cmpd="sng">
+                      <a:noFill/>
+                      <a:prstDash val="solid"/>
+                    </a:lnBlToTr>
+                    <a:noFill/>
+                  </a:tcPr>
+                </a:tc>
+                <a:tc>
+                  <a:txBody>
+                    <a:bodyPr/>
+                    <a:lstStyle/>
+                    <a:p>
+                      <a:pPr algn="r" rtl="0" fontAlgn="ctr">
+                        <a:buNone/>
+                      </a:pPr>
+                      <a:r>
+                        <a:rPr lang="en-US" sz="750" b="0" i="0" u="none" strike="noStrike">
+                          <a:solidFill>
+                            <a:srgbClr val="000000"/>
+                          </a:solidFill>
+                          <a:effectLst/>
+                          <a:latin typeface="Noto Sans" panose="020B0502040504020204" pitchFamily="34" charset="0"/>
+                        </a:rPr>
+                        <a:t>18.8</a:t>
+                      </a:r>
+                    </a:p>
+                  </a:txBody>
+                  <a:tcPr marL="0" marR="0" marT="0" marB="0" anchor="ctr">
+                    <a:lnL w="12700" cmpd="sng">
+                      <a:noFill/>
+                    </a:lnL>
+                    <a:lnR w="12700" cmpd="sng">
+                      <a:noFill/>
+                    </a:lnR>
+                    <a:lnT w="12700" cmpd="sng">
+                      <a:noFill/>
+                    </a:lnT>
+                    <a:lnB w="12700" cmpd="sng">
+                      <a:noFill/>
+                    </a:lnB>
+                    <a:lnTlToBr w="12700" cmpd="sng">
+                      <a:noFill/>
+                      <a:prstDash val="solid"/>
+                    </a:lnTlToBr>
+                    <a:lnBlToTr w="12700" cmpd="sng">
+                      <a:noFill/>
+                      <a:prstDash val="solid"/>
+                    </a:lnBlToTr>
+                    <a:noFill/>
+                  </a:tcPr>
+                </a:tc>
+                <a:tc>
+                  <a:txBody>
+                    <a:bodyPr/>
+                    <a:lstStyle/>
+                    <a:p>
+                      <a:pPr algn="r" rtl="0" fontAlgn="ctr">
+                        <a:buNone/>
+                      </a:pPr>
+                      <a:r>
+                        <a:rPr lang="en-US" sz="750" b="0" i="0" u="none" strike="noStrike">
+                          <a:solidFill>
+                            <a:srgbClr val="000000"/>
+                          </a:solidFill>
+                          <a:effectLst/>
+                          <a:latin typeface="Noto Sans" panose="020B0502040504020204" pitchFamily="34" charset="0"/>
+                        </a:rPr>
+                        <a:t>18.1</a:t>
+                      </a:r>
+                    </a:p>
+                  </a:txBody>
+                  <a:tcPr marL="0" marR="0" marT="0" marB="0" anchor="ctr">
+                    <a:lnL w="12700" cmpd="sng">
+                      <a:noFill/>
+                    </a:lnL>
+                    <a:lnR w="12700" cmpd="sng">
+                      <a:noFill/>
+                    </a:lnR>
+                    <a:lnT w="12700" cmpd="sng">
+                      <a:noFill/>
+                    </a:lnT>
+                    <a:lnB w="12700" cmpd="sng">
+                      <a:noFill/>
+                    </a:lnB>
+                    <a:lnTlToBr w="12700" cmpd="sng">
+                      <a:noFill/>
+                      <a:prstDash val="solid"/>
+                    </a:lnTlToBr>
+                    <a:lnBlToTr w="12700" cmpd="sng">
+                      <a:noFill/>
+                      <a:prstDash val="solid"/>
+                    </a:lnBlToTr>
+                    <a:noFill/>
+                  </a:tcPr>
+                </a:tc>
+                <a:tc>
+                  <a:txBody>
+                    <a:bodyPr/>
+                    <a:lstStyle/>
+                    <a:p>
+                      <a:pPr algn="r" rtl="0" fontAlgn="ctr">
+                        <a:buNone/>
+                      </a:pPr>
+                      <a:r>
+                        <a:rPr lang="en-US" sz="750" b="0" i="0" u="none" strike="noStrike">
+                          <a:solidFill>
+                            <a:srgbClr val="000000"/>
+                          </a:solidFill>
+                          <a:effectLst/>
+                          <a:latin typeface="Noto Sans" panose="020B0502040504020204" pitchFamily="34" charset="0"/>
+                        </a:rPr>
+                        <a:t>13.7</a:t>
+                      </a:r>
+                    </a:p>
+                  </a:txBody>
+                  <a:tcPr marL="0" marR="0" marT="0" marB="0" anchor="ctr">
+                    <a:lnL w="12700" cmpd="sng">
+                      <a:noFill/>
+                    </a:lnL>
+                    <a:lnR w="12700" cmpd="sng">
+                      <a:noFill/>
+                    </a:lnR>
+                    <a:lnT w="12700" cmpd="sng">
+                      <a:noFill/>
+                    </a:lnT>
+                    <a:lnB w="12700" cmpd="sng">
+                      <a:noFill/>
+                    </a:lnB>
+                    <a:lnTlToBr w="12700" cmpd="sng">
+                      <a:noFill/>
+                      <a:prstDash val="solid"/>
+                    </a:lnTlToBr>
+                    <a:lnBlToTr w="12700" cmpd="sng">
+                      <a:noFill/>
+                      <a:prstDash val="solid"/>
+                    </a:lnBlToTr>
+                    <a:solidFill>
+                      <a:schemeClr val="accent4">
+                        <a:lumMod val="20000"/>
+                        <a:lumOff val="80000"/>
+                      </a:schemeClr>
+                    </a:solidFill>
+                  </a:tcPr>
+                </a:tc>
+                <a:tc>
+                  <a:txBody>
+                    <a:bodyPr/>
+                    <a:lstStyle/>
+                    <a:p>
+                      <a:pPr algn="r" rtl="0" fontAlgn="ctr">
+                        <a:buNone/>
+                      </a:pPr>
+                      <a:r>
+                        <a:rPr lang="en-US" sz="750" b="0" i="0" u="none" strike="noStrike">
+                          <a:solidFill>
+                            <a:srgbClr val="000000"/>
+                          </a:solidFill>
+                          <a:effectLst/>
+                          <a:latin typeface="Noto Sans" panose="020B0502040504020204" pitchFamily="34" charset="0"/>
+                        </a:rPr>
+                        <a:t>11.8</a:t>
+                      </a:r>
+                    </a:p>
+                  </a:txBody>
+                  <a:tcPr marL="0" marR="0" marT="0" marB="0" anchor="ctr">
+                    <a:lnL w="12700" cmpd="sng">
+                      <a:noFill/>
+                    </a:lnL>
+                    <a:lnR w="12700" cmpd="sng">
+                      <a:noFill/>
+                    </a:lnR>
+                    <a:lnT w="12700" cmpd="sng">
+                      <a:noFill/>
+                    </a:lnT>
+                    <a:lnB w="12700" cmpd="sng">
+                      <a:noFill/>
+                    </a:lnB>
+                    <a:lnTlToBr w="12700" cmpd="sng">
+                      <a:noFill/>
+                      <a:prstDash val="solid"/>
+                    </a:lnTlToBr>
+                    <a:lnBlToTr w="12700" cmpd="sng">
+                      <a:noFill/>
+                      <a:prstDash val="solid"/>
+                    </a:lnBlToTr>
+                    <a:solidFill>
+                      <a:schemeClr val="bg1"/>
+                    </a:solidFill>
+                  </a:tcPr>
+                </a:tc>
+                <a:tc>
+                  <a:txBody>
+                    <a:bodyPr/>
+                    <a:lstStyle/>
+                    <a:p>
+                      <a:pPr algn="r" rtl="0" fontAlgn="ctr">
+                        <a:buNone/>
+                      </a:pPr>
+                      <a:r>
+                        <a:rPr lang="en-US" sz="750" b="0" i="0" u="none" strike="noStrike">
+                          <a:solidFill>
+                            <a:srgbClr val="000000"/>
+                          </a:solidFill>
+                          <a:effectLst/>
+                          <a:latin typeface="Noto Sans" panose="020B0502040504020204" pitchFamily="34" charset="0"/>
+                        </a:rPr>
+                        <a:t>10.1</a:t>
+                      </a:r>
+                    </a:p>
+                  </a:txBody>
+                  <a:tcPr marL="0" marR="0" marT="0" marB="0" anchor="ctr">
+                    <a:lnL w="12700" cmpd="sng">
+                      <a:noFill/>
+                    </a:lnL>
+                    <a:lnR w="12700" cmpd="sng">
+                      <a:noFill/>
+                    </a:lnR>
+                    <a:lnT w="12700" cmpd="sng">
+                      <a:noFill/>
+                    </a:lnT>
+                    <a:lnB w="12700" cmpd="sng">
+                      <a:noFill/>
+                    </a:lnB>
+                    <a:lnTlToBr w="12700" cmpd="sng">
+                      <a:noFill/>
+                      <a:prstDash val="solid"/>
+                    </a:lnTlToBr>
+                    <a:lnBlToTr w="12700" cmpd="sng">
+                      <a:noFill/>
+                      <a:prstDash val="solid"/>
+                    </a:lnBlToTr>
+                    <a:noFill/>
+                  </a:tcPr>
+                </a:tc>
+                <a:extLst>
+                  <a:ext uri="{0D108BD9-81ED-4DB2-BD59-A6C34878D82A}">
+                    <a16:rowId xmlns:a16="http://schemas.microsoft.com/office/drawing/2014/main" val="10006"/>
+                  </a:ext>
+                </a:extLst>
+              </a:tr>
+              <a:tr h="162000">
+                <a:tc>
+                  <a:txBody>
+                    <a:bodyPr/>
+                    <a:lstStyle/>
+                    <a:p>
+                      <a:pPr marL="0" marR="0" algn="l" latinLnBrk="1" hangingPunct="0">
+                        <a:lnSpc>
+                          <a:spcPts val="950"/>
+                        </a:lnSpc>
+                        <a:spcBef>
+                          <a:spcPts val="0"/>
+                        </a:spcBef>
+                        <a:spcAft>
+                          <a:spcPts val="0"/>
+                        </a:spcAft>
+                      </a:pPr>
+                      <a:r>
+                        <a:rPr lang="en-US" sz="800" b="0" spc="-40" dirty="0">
+                          <a:solidFill>
+                            <a:srgbClr val="000000"/>
+                          </a:solidFill>
+                          <a:effectLst/>
+                          <a:latin typeface="Noto Sans" panose="020B0502040504020204" pitchFamily="34" charset="0"/>
+                          <a:ea typeface="Noto Sans" panose="020B0502040504020204" pitchFamily="34" charset="0"/>
+                          <a:cs typeface="Noto Sans" panose="020B0502040504020204" pitchFamily="34" charset="0"/>
+                        </a:rPr>
+                        <a:t>P/B (x)</a:t>
+                      </a:r>
+                    </a:p>
+                  </a:txBody>
+                  <a:tcPr marL="0" marR="0" marT="0" marB="0" anchor="ctr">
+                    <a:lnL w="12700" cmpd="sng">
+                      <a:noFill/>
+                    </a:lnL>
+                    <a:lnR w="12700" cmpd="sng">
+                      <a:noFill/>
+                    </a:lnR>
+                    <a:lnT w="12700" cmpd="sng">
+                      <a:noFill/>
+                    </a:lnT>
+                    <a:lnB w="12700" cmpd="sng">
+                      <a:noFill/>
+                    </a:lnB>
+                    <a:lnTlToBr w="12700" cmpd="sng">
+                      <a:noFill/>
+                      <a:prstDash val="solid"/>
+                    </a:lnTlToBr>
+                    <a:lnBlToTr w="12700" cmpd="sng">
+                      <a:noFill/>
+                      <a:prstDash val="solid"/>
+                    </a:lnBlToTr>
+                    <a:noFill/>
+                  </a:tcPr>
+                </a:tc>
+                <a:tc>
+                  <a:txBody>
+                    <a:bodyPr/>
+                    <a:lstStyle/>
+                    <a:p>
+                      <a:pPr algn="r" rtl="0" fontAlgn="ctr">
+                        <a:buNone/>
+                      </a:pPr>
+                      <a:r>
+                        <a:rPr lang="en-US" sz="750" b="0" i="0" u="none" strike="noStrike">
+                          <a:solidFill>
+                            <a:srgbClr val="000000"/>
+                          </a:solidFill>
+                          <a:effectLst/>
+                          <a:latin typeface="Noto Sans" panose="020B0502040504020204" pitchFamily="34" charset="0"/>
+                        </a:rPr>
+                        <a:t>4.7</a:t>
+                      </a:r>
+                    </a:p>
+                  </a:txBody>
+                  <a:tcPr marL="0" marR="0" marT="0" marB="0" anchor="ctr">
+                    <a:lnL w="12700" cmpd="sng">
+                      <a:noFill/>
+                    </a:lnL>
+                    <a:lnR w="12700" cmpd="sng">
+                      <a:noFill/>
+                    </a:lnR>
+                    <a:lnT w="12700" cmpd="sng">
+                      <a:noFill/>
+                    </a:lnT>
+                    <a:lnB w="12700" cmpd="sng">
+                      <a:noFill/>
+                    </a:lnB>
+                    <a:lnTlToBr w="12700" cmpd="sng">
+                      <a:noFill/>
+                      <a:prstDash val="solid"/>
+                    </a:lnTlToBr>
+                    <a:lnBlToTr w="12700" cmpd="sng">
+                      <a:noFill/>
+                      <a:prstDash val="solid"/>
+                    </a:lnBlToTr>
+                    <a:noFill/>
+                  </a:tcPr>
+                </a:tc>
+                <a:tc>
+                  <a:txBody>
+                    <a:bodyPr/>
+                    <a:lstStyle/>
+                    <a:p>
+                      <a:pPr algn="r" rtl="0" fontAlgn="ctr">
+                        <a:buNone/>
+                      </a:pPr>
+                      <a:r>
+                        <a:rPr lang="en-US" sz="750" b="0" i="0" u="none" strike="noStrike">
+                          <a:solidFill>
+                            <a:srgbClr val="000000"/>
+                          </a:solidFill>
+                          <a:effectLst/>
+                          <a:latin typeface="Noto Sans" panose="020B0502040504020204" pitchFamily="34" charset="0"/>
+                        </a:rPr>
+                        <a:t>4.5</a:t>
+                      </a:r>
+                    </a:p>
+                  </a:txBody>
+                  <a:tcPr marL="0" marR="0" marT="0" marB="0" anchor="ctr">
+                    <a:lnL w="12700" cmpd="sng">
+                      <a:noFill/>
+                    </a:lnL>
+                    <a:lnR w="12700" cmpd="sng">
+                      <a:noFill/>
+                    </a:lnR>
+                    <a:lnT w="12700" cmpd="sng">
+                      <a:noFill/>
+                    </a:lnT>
+                    <a:lnB w="12700" cmpd="sng">
+                      <a:noFill/>
+                    </a:lnB>
+                    <a:lnTlToBr w="12700" cmpd="sng">
+                      <a:noFill/>
+                      <a:prstDash val="solid"/>
+                    </a:lnTlToBr>
+                    <a:lnBlToTr w="12700" cmpd="sng">
+                      <a:noFill/>
+                      <a:prstDash val="solid"/>
+                    </a:lnBlToTr>
+                    <a:noFill/>
+                  </a:tcPr>
+                </a:tc>
+                <a:tc>
+                  <a:txBody>
+                    <a:bodyPr/>
+                    <a:lstStyle/>
+                    <a:p>
+                      <a:pPr algn="r" rtl="0" fontAlgn="ctr">
+                        <a:buNone/>
+                      </a:pPr>
+                      <a:r>
+                        <a:rPr lang="en-US" sz="750" b="0" i="0" u="none" strike="noStrike">
+                          <a:solidFill>
+                            <a:srgbClr val="000000"/>
+                          </a:solidFill>
+                          <a:effectLst/>
+                          <a:latin typeface="Noto Sans" panose="020B0502040504020204" pitchFamily="34" charset="0"/>
+                        </a:rPr>
+                        <a:t>4.3</a:t>
+                      </a:r>
+                    </a:p>
+                  </a:txBody>
+                  <a:tcPr marL="0" marR="0" marT="0" marB="0" anchor="ctr">
+                    <a:lnL w="12700" cmpd="sng">
+                      <a:noFill/>
+                    </a:lnL>
+                    <a:lnR w="12700" cmpd="sng">
+                      <a:noFill/>
+                    </a:lnR>
+                    <a:lnT w="12700" cmpd="sng">
+                      <a:noFill/>
+                    </a:lnT>
+                    <a:lnB w="12700" cmpd="sng">
+                      <a:noFill/>
+                    </a:lnB>
+                    <a:lnTlToBr w="12700" cmpd="sng">
+                      <a:noFill/>
+                      <a:prstDash val="solid"/>
+                    </a:lnTlToBr>
+                    <a:lnBlToTr w="12700" cmpd="sng">
+                      <a:noFill/>
+                      <a:prstDash val="solid"/>
+                    </a:lnBlToTr>
+                    <a:noFill/>
+                  </a:tcPr>
+                </a:tc>
+                <a:tc>
+                  <a:txBody>
+                    <a:bodyPr/>
+                    <a:lstStyle/>
+                    <a:p>
+                      <a:pPr algn="r" rtl="0" fontAlgn="ctr">
+                        <a:buNone/>
+                      </a:pPr>
+                      <a:r>
+                        <a:rPr lang="en-US" sz="750" b="0" i="0" u="none" strike="noStrike">
+                          <a:solidFill>
+                            <a:srgbClr val="000000"/>
+                          </a:solidFill>
+                          <a:effectLst/>
+                          <a:latin typeface="Noto Sans" panose="020B0502040504020204" pitchFamily="34" charset="0"/>
+                        </a:rPr>
+                        <a:t>3.5</a:t>
+                      </a:r>
+                    </a:p>
+                  </a:txBody>
+                  <a:tcPr marL="0" marR="0" marT="0" marB="0" anchor="ctr">
+                    <a:lnL w="12700" cmpd="sng">
+                      <a:noFill/>
+                    </a:lnL>
+                    <a:lnR w="12700" cmpd="sng">
+                      <a:noFill/>
+                    </a:lnR>
+                    <a:lnT w="12700" cmpd="sng">
+                      <a:noFill/>
+                    </a:lnT>
+                    <a:lnB w="12700" cmpd="sng">
+                      <a:noFill/>
+                    </a:lnB>
+                    <a:lnTlToBr w="12700" cmpd="sng">
+                      <a:noFill/>
+                      <a:prstDash val="solid"/>
+                    </a:lnTlToBr>
+                    <a:lnBlToTr w="12700" cmpd="sng">
+                      <a:noFill/>
+                      <a:prstDash val="solid"/>
+                    </a:lnBlToTr>
+                    <a:solidFill>
+                      <a:schemeClr val="accent4">
+                        <a:lumMod val="20000"/>
+                        <a:lumOff val="80000"/>
+                      </a:schemeClr>
+                    </a:solidFill>
+                  </a:tcPr>
+                </a:tc>
+                <a:tc>
+                  <a:txBody>
+                    <a:bodyPr/>
+                    <a:lstStyle/>
+                    <a:p>
+                      <a:pPr algn="r" rtl="0" fontAlgn="ctr">
+                        <a:buNone/>
+                      </a:pPr>
+                      <a:r>
+                        <a:rPr lang="en-US" sz="750" b="0" i="0" u="none" strike="noStrike">
+                          <a:solidFill>
+                            <a:srgbClr val="000000"/>
+                          </a:solidFill>
+                          <a:effectLst/>
+                          <a:latin typeface="Noto Sans" panose="020B0502040504020204" pitchFamily="34" charset="0"/>
+                        </a:rPr>
+                        <a:t>3.0</a:t>
+                      </a:r>
+                    </a:p>
+                  </a:txBody>
+                  <a:tcPr marL="0" marR="0" marT="0" marB="0" anchor="ctr">
+                    <a:lnL w="12700" cmpd="sng">
+                      <a:noFill/>
+                    </a:lnL>
+                    <a:lnR w="12700" cmpd="sng">
+                      <a:noFill/>
+                    </a:lnR>
+                    <a:lnT w="12700" cmpd="sng">
+                      <a:noFill/>
+                    </a:lnT>
+                    <a:lnB w="12700" cmpd="sng">
+                      <a:noFill/>
+                    </a:lnB>
+                    <a:lnTlToBr w="12700" cmpd="sng">
+                      <a:noFill/>
+                      <a:prstDash val="solid"/>
+                    </a:lnTlToBr>
+                    <a:lnBlToTr w="12700" cmpd="sng">
+                      <a:noFill/>
+                      <a:prstDash val="solid"/>
+                    </a:lnBlToTr>
+                    <a:solidFill>
+                      <a:schemeClr val="bg1"/>
+                    </a:solidFill>
+                  </a:tcPr>
+                </a:tc>
+                <a:tc>
+                  <a:txBody>
+                    <a:bodyPr/>
+                    <a:lstStyle/>
+                    <a:p>
+                      <a:pPr algn="r" rtl="0" fontAlgn="ctr">
+                        <a:buNone/>
+                      </a:pPr>
+                      <a:r>
+                        <a:rPr lang="en-US" sz="750" b="0" i="0" u="none" strike="noStrike">
+                          <a:solidFill>
+                            <a:srgbClr val="000000"/>
+                          </a:solidFill>
+                          <a:effectLst/>
+                          <a:latin typeface="Noto Sans" panose="020B0502040504020204" pitchFamily="34" charset="0"/>
+                        </a:rPr>
+                        <a:t>2.5</a:t>
+                      </a:r>
+                    </a:p>
+                  </a:txBody>
+                  <a:tcPr marL="0" marR="0" marT="0" marB="0" anchor="ctr">
+                    <a:lnL w="12700" cmpd="sng">
+                      <a:noFill/>
+                    </a:lnL>
+                    <a:lnR w="12700" cmpd="sng">
+                      <a:noFill/>
+                    </a:lnR>
+                    <a:lnT w="12700" cmpd="sng">
+                      <a:noFill/>
+                    </a:lnT>
+                    <a:lnB w="12700" cmpd="sng">
+                      <a:noFill/>
+                    </a:lnB>
+                    <a:lnTlToBr w="12700" cmpd="sng">
+                      <a:noFill/>
+                      <a:prstDash val="solid"/>
+                    </a:lnTlToBr>
+                    <a:lnBlToTr w="12700" cmpd="sng">
+                      <a:noFill/>
+                      <a:prstDash val="solid"/>
+                    </a:lnBlToTr>
+                    <a:noFill/>
+                  </a:tcPr>
+                </a:tc>
+                <a:extLst>
+                  <a:ext uri="{0D108BD9-81ED-4DB2-BD59-A6C34878D82A}">
+                    <a16:rowId xmlns:a16="http://schemas.microsoft.com/office/drawing/2014/main" val="10007"/>
+                  </a:ext>
+                </a:extLst>
+              </a:tr>
+              <a:tr h="162000">
+                <a:tc>
+                  <a:txBody>
+                    <a:bodyPr/>
+                    <a:lstStyle/>
+                    <a:p>
+                      <a:pPr marL="0" marR="0" algn="l" latinLnBrk="1" hangingPunct="0">
+                        <a:lnSpc>
+                          <a:spcPts val="950"/>
+                        </a:lnSpc>
+                        <a:spcBef>
+                          <a:spcPts val="0"/>
+                        </a:spcBef>
+                        <a:spcAft>
+                          <a:spcPts val="0"/>
+                        </a:spcAft>
+                      </a:pPr>
+                      <a:r>
+                        <a:rPr lang="en-US" sz="800" b="0" spc="-40" dirty="0">
+                          <a:solidFill>
+                            <a:srgbClr val="000000"/>
+                          </a:solidFill>
+                          <a:effectLst/>
+                          <a:latin typeface="Noto Sans" panose="020B0502040504020204" pitchFamily="34" charset="0"/>
+                          <a:ea typeface="Noto Sans" panose="020B0502040504020204" pitchFamily="34" charset="0"/>
+                          <a:cs typeface="Noto Sans" panose="020B0502040504020204" pitchFamily="34" charset="0"/>
+                        </a:rPr>
+                        <a:t>Total assets (VNDbn)</a:t>
+                      </a:r>
+                    </a:p>
+                  </a:txBody>
+                  <a:tcPr marL="0" marR="0" marT="0" marB="0" anchor="ctr">
+                    <a:lnL w="12700" cmpd="sng">
+                      <a:noFill/>
+                    </a:lnL>
+                    <a:lnR w="12700" cmpd="sng">
+                      <a:noFill/>
+                    </a:lnR>
+                    <a:lnT w="12700" cmpd="sng">
+                      <a:noFill/>
+                    </a:lnT>
+                    <a:lnB w="6350" cap="flat" cmpd="sng" algn="ctr">
+                      <a:noFill/>
+                      <a:prstDash val="solid"/>
+                      <a:round/>
+                      <a:headEnd type="none" w="med" len="med"/>
+                      <a:tailEnd type="none" w="med" len="med"/>
+                    </a:lnB>
+                    <a:lnTlToBr w="12700" cmpd="sng">
+                      <a:noFill/>
+                      <a:prstDash val="solid"/>
+                    </a:lnTlToBr>
+                    <a:lnBlToTr w="12700" cmpd="sng">
+                      <a:noFill/>
+                      <a:prstDash val="solid"/>
+                    </a:lnBlToTr>
+                    <a:noFill/>
+                  </a:tcPr>
+                </a:tc>
+                <a:tc>
+                  <a:txBody>
+                    <a:bodyPr/>
+                    <a:lstStyle/>
+                    <a:p>
+                      <a:pPr algn="r" rtl="0" fontAlgn="ctr">
+                        <a:buNone/>
+                      </a:pPr>
+                      <a:r>
+                        <a:rPr lang="en-US" sz="750" b="0" i="0" u="none" strike="noStrike">
+                          <a:solidFill>
+                            <a:srgbClr val="000000"/>
+                          </a:solidFill>
+                          <a:effectLst/>
+                          <a:latin typeface="Noto Sans" panose="020B0502040504020204" pitchFamily="34" charset="0"/>
+                        </a:rPr>
+                        <a:t>60,283</a:t>
+                      </a:r>
+                    </a:p>
+                  </a:txBody>
+                  <a:tcPr marL="0" marR="0" marT="0" marB="0" anchor="ctr">
+                    <a:lnL w="12700" cmpd="sng">
+                      <a:noFill/>
+                    </a:lnL>
+                    <a:lnR w="12700" cmpd="sng">
+                      <a:noFill/>
+                    </a:lnR>
+                    <a:lnT w="12700" cmpd="sng">
+                      <a:noFill/>
+                    </a:lnT>
+                    <a:lnB w="6350" cap="flat" cmpd="sng" algn="ctr">
+                      <a:noFill/>
+                      <a:prstDash val="solid"/>
+                      <a:round/>
+                      <a:headEnd type="none" w="med" len="med"/>
+                      <a:tailEnd type="none" w="med" len="med"/>
+                    </a:lnB>
+                    <a:lnTlToBr w="12700" cmpd="sng">
+                      <a:noFill/>
+                      <a:prstDash val="solid"/>
+                    </a:lnTlToBr>
+                    <a:lnBlToTr w="12700" cmpd="sng">
+                      <a:noFill/>
+                      <a:prstDash val="solid"/>
+                    </a:lnBlToTr>
+                    <a:noFill/>
+                  </a:tcPr>
+                </a:tc>
+                <a:tc>
+                  <a:txBody>
+                    <a:bodyPr/>
+                    <a:lstStyle/>
+                    <a:p>
+                      <a:pPr algn="r" rtl="0" fontAlgn="ctr">
+                        <a:buNone/>
+                      </a:pPr>
+                      <a:r>
+                        <a:rPr lang="en-US" sz="750" b="0" i="0" u="none" strike="noStrike">
+                          <a:solidFill>
+                            <a:srgbClr val="000000"/>
+                          </a:solidFill>
+                          <a:effectLst/>
+                          <a:latin typeface="Noto Sans" panose="020B0502040504020204" pitchFamily="34" charset="0"/>
+                        </a:rPr>
+                        <a:t>72,000</a:t>
+                      </a:r>
+                    </a:p>
+                  </a:txBody>
+                  <a:tcPr marL="0" marR="0" marT="0" marB="0" anchor="ctr">
+                    <a:lnL w="12700" cmpd="sng">
+                      <a:noFill/>
+                    </a:lnL>
+                    <a:lnR w="12700" cmpd="sng">
+                      <a:noFill/>
+                    </a:lnR>
+                    <a:lnT w="12700" cmpd="sng">
+                      <a:noFill/>
+                    </a:lnT>
+                    <a:lnB w="6350" cap="flat" cmpd="sng" algn="ctr">
+                      <a:noFill/>
+                      <a:prstDash val="solid"/>
+                      <a:round/>
+                      <a:headEnd type="none" w="med" len="med"/>
+                      <a:tailEnd type="none" w="med" len="med"/>
+                    </a:lnB>
+                    <a:lnTlToBr w="12700" cmpd="sng">
+                      <a:noFill/>
+                      <a:prstDash val="solid"/>
+                    </a:lnTlToBr>
+                    <a:lnBlToTr w="12700" cmpd="sng">
+                      <a:noFill/>
+                      <a:prstDash val="solid"/>
+                    </a:lnBlToTr>
+                    <a:noFill/>
+                  </a:tcPr>
+                </a:tc>
+                <a:tc>
+                  <a:txBody>
+                    <a:bodyPr/>
+                    <a:lstStyle/>
+                    <a:p>
+                      <a:pPr algn="r" rtl="0" fontAlgn="ctr">
+                        <a:buNone/>
+                      </a:pPr>
+                      <a:r>
+                        <a:rPr lang="en-US" sz="750" b="0" i="0" u="none" strike="noStrike">
+                          <a:solidFill>
+                            <a:srgbClr val="000000"/>
+                          </a:solidFill>
+                          <a:effectLst/>
+                          <a:latin typeface="Noto Sans" panose="020B0502040504020204" pitchFamily="34" charset="0"/>
+                        </a:rPr>
+                        <a:t>88,090</a:t>
+                      </a:r>
+                    </a:p>
+                  </a:txBody>
+                  <a:tcPr marL="0" marR="0" marT="0" marB="0" anchor="ctr">
+                    <a:lnL w="12700" cmpd="sng">
+                      <a:noFill/>
+                    </a:lnL>
+                    <a:lnR w="12700" cmpd="sng">
+                      <a:noFill/>
+                    </a:lnR>
+                    <a:lnT w="12700" cmpd="sng">
+                      <a:noFill/>
+                    </a:lnT>
+                    <a:lnB w="6350" cap="flat" cmpd="sng" algn="ctr">
+                      <a:noFill/>
+                      <a:prstDash val="solid"/>
+                      <a:round/>
+                      <a:headEnd type="none" w="med" len="med"/>
+                      <a:tailEnd type="none" w="med" len="med"/>
+                    </a:lnB>
+                    <a:lnTlToBr w="12700" cmpd="sng">
+                      <a:noFill/>
+                      <a:prstDash val="solid"/>
+                    </a:lnTlToBr>
+                    <a:lnBlToTr w="12700" cmpd="sng">
+                      <a:noFill/>
+                      <a:prstDash val="solid"/>
+                    </a:lnBlToTr>
+                    <a:noFill/>
+                  </a:tcPr>
+                </a:tc>
+                <a:tc>
+                  <a:txBody>
+                    <a:bodyPr/>
+                    <a:lstStyle/>
+                    <a:p>
+                      <a:pPr algn="r" rtl="0" fontAlgn="ctr">
+                        <a:buNone/>
+                      </a:pPr>
+                      <a:r>
+                        <a:rPr lang="en-US" sz="750" b="0" i="0" u="none" strike="noStrike">
+                          <a:solidFill>
+                            <a:srgbClr val="000000"/>
+                          </a:solidFill>
+                          <a:effectLst/>
+                          <a:latin typeface="Noto Sans" panose="020B0502040504020204" pitchFamily="34" charset="0"/>
+                        </a:rPr>
+                        <a:t>91,917</a:t>
+                      </a:r>
+                    </a:p>
+                  </a:txBody>
+                  <a:tcPr marL="0" marR="0" marT="0" marB="0" anchor="ctr">
+                    <a:lnL w="12700" cmpd="sng">
+                      <a:noFill/>
+                    </a:lnL>
+                    <a:lnR w="12700" cmpd="sng">
+                      <a:noFill/>
+                    </a:lnR>
+                    <a:lnT w="12700" cmpd="sng">
+                      <a:noFill/>
+                    </a:lnT>
+                    <a:lnB w="6350" cap="flat" cmpd="sng" algn="ctr">
+                      <a:noFill/>
+                      <a:prstDash val="solid"/>
+                      <a:round/>
+                      <a:headEnd type="none" w="med" len="med"/>
+                      <a:tailEnd type="none" w="med" len="med"/>
+                    </a:lnB>
+                    <a:lnTlToBr w="12700" cmpd="sng">
+                      <a:noFill/>
+                      <a:prstDash val="solid"/>
+                    </a:lnTlToBr>
+                    <a:lnBlToTr w="12700" cmpd="sng">
+                      <a:noFill/>
+                      <a:prstDash val="solid"/>
+                    </a:lnBlToTr>
+                    <a:solidFill>
+                      <a:schemeClr val="accent4">
+                        <a:lumMod val="20000"/>
+                        <a:lumOff val="80000"/>
+                      </a:schemeClr>
+                    </a:solidFill>
+                  </a:tcPr>
+                </a:tc>
+                <a:tc>
+                  <a:txBody>
+                    <a:bodyPr/>
+                    <a:lstStyle/>
+                    <a:p>
+                      <a:pPr algn="r" rtl="0" fontAlgn="ctr">
+                        <a:buNone/>
+                      </a:pPr>
+                      <a:r>
+                        <a:rPr lang="en-US" sz="750" b="0" i="0" u="none" strike="noStrike">
+                          <a:solidFill>
+                            <a:srgbClr val="000000"/>
+                          </a:solidFill>
+                          <a:effectLst/>
+                          <a:latin typeface="Noto Sans" panose="020B0502040504020204" pitchFamily="34" charset="0"/>
+                        </a:rPr>
+                        <a:t>102,974</a:t>
+                      </a:r>
+                    </a:p>
+                  </a:txBody>
+                  <a:tcPr marL="0" marR="0" marT="0" marB="0" anchor="ctr">
+                    <a:lnL w="12700" cmpd="sng">
+                      <a:noFill/>
+                    </a:lnL>
+                    <a:lnR w="12700" cmpd="sng">
+                      <a:noFill/>
+                    </a:lnR>
+                    <a:lnT w="12700" cmpd="sng">
+                      <a:noFill/>
+                    </a:lnT>
+                    <a:lnB w="6350" cap="flat" cmpd="sng" algn="ctr">
+                      <a:noFill/>
+                      <a:prstDash val="solid"/>
+                      <a:round/>
+                      <a:headEnd type="none" w="med" len="med"/>
+                      <a:tailEnd type="none" w="med" len="med"/>
+                    </a:lnB>
+                    <a:lnTlToBr w="12700" cmpd="sng">
+                      <a:noFill/>
+                      <a:prstDash val="solid"/>
+                    </a:lnTlToBr>
+                    <a:lnBlToTr w="12700" cmpd="sng">
+                      <a:noFill/>
+                      <a:prstDash val="solid"/>
+                    </a:lnBlToTr>
+                    <a:solidFill>
+                      <a:schemeClr val="bg1"/>
+                    </a:solidFill>
+                  </a:tcPr>
+                </a:tc>
+                <a:tc>
+                  <a:txBody>
+                    <a:bodyPr/>
+                    <a:lstStyle/>
+                    <a:p>
+                      <a:pPr algn="r" rtl="0" fontAlgn="ctr">
+                        <a:buNone/>
+                      </a:pPr>
+                      <a:r>
+                        <a:rPr lang="en-US" sz="750" b="0" i="0" u="none" strike="noStrike">
+                          <a:solidFill>
+                            <a:srgbClr val="000000"/>
+                          </a:solidFill>
+                          <a:effectLst/>
+                          <a:latin typeface="Noto Sans" panose="020B0502040504020204" pitchFamily="34" charset="0"/>
+                        </a:rPr>
+                        <a:t>115,994</a:t>
+                      </a:r>
+                    </a:p>
+                  </a:txBody>
+                  <a:tcPr marL="0" marR="0" marT="0" marB="0" anchor="ctr">
+                    <a:lnL w="12700" cmpd="sng">
+                      <a:noFill/>
+                    </a:lnL>
+                    <a:lnR w="12700" cmpd="sng">
+                      <a:noFill/>
+                    </a:lnR>
+                    <a:lnT w="12700" cmpd="sng">
+                      <a:noFill/>
+                    </a:lnT>
+                    <a:lnB w="6350" cap="flat" cmpd="sng" algn="ctr">
+                      <a:noFill/>
+                      <a:prstDash val="solid"/>
+                      <a:round/>
+                      <a:headEnd type="none" w="med" len="med"/>
+                      <a:tailEnd type="none" w="med" len="med"/>
+                    </a:lnB>
+                    <a:lnTlToBr w="12700" cmpd="sng">
+                      <a:noFill/>
+                      <a:prstDash val="solid"/>
+                    </a:lnTlToBr>
+                    <a:lnBlToTr w="12700" cmpd="sng">
+                      <a:noFill/>
+                      <a:prstDash val="solid"/>
+                    </a:lnBlToTr>
+                    <a:noFill/>
+                  </a:tcPr>
+                </a:tc>
+                <a:extLst>
+                  <a:ext uri="{0D108BD9-81ED-4DB2-BD59-A6C34878D82A}">
+                    <a16:rowId xmlns:a16="http://schemas.microsoft.com/office/drawing/2014/main" val="10008"/>
+                  </a:ext>
+                </a:extLst>
+              </a:tr>
+              <a:tr h="162000">
+                <a:tc>
+                  <a:txBody>
+                    <a:bodyPr/>
+                    <a:lstStyle/>
+                    <a:p>
+                      <a:pPr marL="0" marR="0" lvl="0" indent="0" algn="l" defTabSz="457200" rtl="0" eaLnBrk="1" fontAlgn="auto" latinLnBrk="1" hangingPunct="0">
+                        <a:lnSpc>
+                          <a:spcPts val="950"/>
+                        </a:lnSpc>
+                        <a:spcBef>
+                          <a:spcPts val="0"/>
+                        </a:spcBef>
+                        <a:spcAft>
+                          <a:spcPts val="0"/>
+                        </a:spcAft>
+                        <a:buClrTx/>
+                        <a:buSzTx/>
+                        <a:buFontTx/>
+                        <a:buNone/>
+                        <a:tabLst/>
+                        <a:defRPr/>
+                      </a:pPr>
+                      <a:r>
+                        <a:rPr lang="en-US" sz="800" b="0" kern="1200" spc="-40" dirty="0">
+                          <a:solidFill>
+                            <a:srgbClr val="000000"/>
+                          </a:solidFill>
+                          <a:effectLst/>
+                          <a:latin typeface="Noto Sans" panose="020B0502040504020204" pitchFamily="34" charset="0"/>
+                          <a:ea typeface="Noto Sans" panose="020B0502040504020204" pitchFamily="34" charset="0"/>
+                          <a:cs typeface="Noto Sans" panose="020B0502040504020204" pitchFamily="34" charset="0"/>
+                        </a:rPr>
+                        <a:t>Equity (VNDbn)</a:t>
+                      </a:r>
+                    </a:p>
+                  </a:txBody>
+                  <a:tcPr marL="0" marR="0" marT="0" marB="0" anchor="ctr">
+                    <a:lnL w="12700" cmpd="sng">
+                      <a:noFill/>
+                    </a:lnL>
+                    <a:lnR w="12700" cmpd="sng">
+                      <a:noFill/>
+                    </a:lnR>
+                    <a:lnT w="12700" cmpd="sng">
+                      <a:noFill/>
+                    </a:lnT>
+                    <a:lnB w="6350" cap="flat" cmpd="sng" algn="ctr">
+                      <a:noFill/>
+                      <a:prstDash val="solid"/>
+                      <a:round/>
+                      <a:headEnd type="none" w="med" len="med"/>
+                      <a:tailEnd type="none" w="med" len="med"/>
+                    </a:lnB>
+                    <a:lnTlToBr w="12700" cmpd="sng">
+                      <a:noFill/>
+                      <a:prstDash val="solid"/>
+                    </a:lnTlToBr>
+                    <a:lnBlToTr w="12700" cmpd="sng">
+                      <a:noFill/>
+                      <a:prstDash val="solid"/>
+                    </a:lnBlToTr>
+                    <a:noFill/>
+                  </a:tcPr>
+                </a:tc>
+                <a:tc>
+                  <a:txBody>
+                    <a:bodyPr/>
+                    <a:lstStyle/>
+                    <a:p>
+                      <a:pPr algn="r" rtl="0" fontAlgn="ctr">
+                        <a:buNone/>
+                      </a:pPr>
+                      <a:r>
+                        <a:rPr lang="en-US" sz="750" b="0" i="0" u="none" strike="noStrike">
+                          <a:solidFill>
+                            <a:srgbClr val="000000"/>
+                          </a:solidFill>
+                          <a:effectLst/>
+                          <a:latin typeface="Noto Sans" panose="020B0502040504020204" pitchFamily="34" charset="0"/>
+                        </a:rPr>
+                        <a:t>29,883</a:t>
+                      </a:r>
+                    </a:p>
+                  </a:txBody>
+                  <a:tcPr marL="0" marR="0" marT="0" marB="0" anchor="ctr">
+                    <a:lnL w="12700" cmpd="sng">
+                      <a:noFill/>
+                    </a:lnL>
+                    <a:lnR w="12700" cmpd="sng">
+                      <a:noFill/>
+                    </a:lnR>
+                    <a:lnT w="12700" cmpd="sng">
+                      <a:noFill/>
+                    </a:lnT>
+                    <a:lnB w="6350" cap="flat" cmpd="sng" algn="ctr">
+                      <a:noFill/>
+                      <a:prstDash val="solid"/>
+                      <a:round/>
+                      <a:headEnd type="none" w="med" len="med"/>
+                      <a:tailEnd type="none" w="med" len="med"/>
+                    </a:lnB>
+                    <a:lnTlToBr w="12700" cmpd="sng">
+                      <a:noFill/>
+                      <a:prstDash val="solid"/>
+                    </a:lnTlToBr>
+                    <a:lnBlToTr w="12700" cmpd="sng">
+                      <a:noFill/>
+                      <a:prstDash val="solid"/>
+                    </a:lnBlToTr>
+                    <a:noFill/>
+                  </a:tcPr>
+                </a:tc>
+                <a:tc>
+                  <a:txBody>
+                    <a:bodyPr/>
+                    <a:lstStyle/>
+                    <a:p>
+                      <a:pPr algn="r" rtl="0" fontAlgn="ctr">
+                        <a:buNone/>
+                      </a:pPr>
+                      <a:r>
+                        <a:rPr lang="en-US" sz="750" b="0" i="0" u="none" strike="noStrike">
+                          <a:solidFill>
+                            <a:srgbClr val="000000"/>
+                          </a:solidFill>
+                          <a:effectLst/>
+                          <a:latin typeface="Noto Sans" panose="020B0502040504020204" pitchFamily="34" charset="0"/>
+                        </a:rPr>
+                        <a:t>35,678</a:t>
+                      </a:r>
+                    </a:p>
+                  </a:txBody>
+                  <a:tcPr marL="0" marR="0" marT="0" marB="0" anchor="ctr">
+                    <a:lnL w="12700" cmpd="sng">
+                      <a:noFill/>
+                    </a:lnL>
+                    <a:lnR w="12700" cmpd="sng">
+                      <a:noFill/>
+                    </a:lnR>
+                    <a:lnT w="12700" cmpd="sng">
+                      <a:noFill/>
+                    </a:lnT>
+                    <a:lnB w="6350" cap="flat" cmpd="sng" algn="ctr">
+                      <a:noFill/>
+                      <a:prstDash val="solid"/>
+                      <a:round/>
+                      <a:headEnd type="none" w="med" len="med"/>
+                      <a:tailEnd type="none" w="med" len="med"/>
+                    </a:lnB>
+                    <a:lnTlToBr w="12700" cmpd="sng">
+                      <a:noFill/>
+                      <a:prstDash val="solid"/>
+                    </a:lnTlToBr>
+                    <a:lnBlToTr w="12700" cmpd="sng">
+                      <a:noFill/>
+                      <a:prstDash val="solid"/>
+                    </a:lnBlToTr>
+                    <a:noFill/>
+                  </a:tcPr>
+                </a:tc>
+                <a:tc>
+                  <a:txBody>
+                    <a:bodyPr/>
+                    <a:lstStyle/>
+                    <a:p>
+                      <a:pPr algn="r" rtl="0" fontAlgn="ctr">
+                        <a:buNone/>
+                      </a:pPr>
+                      <a:r>
+                        <a:rPr lang="en-US" sz="750" b="0" i="0" u="none" strike="noStrike">
+                          <a:solidFill>
+                            <a:srgbClr val="000000"/>
+                          </a:solidFill>
+                          <a:effectLst/>
+                          <a:latin typeface="Noto Sans" panose="020B0502040504020204" pitchFamily="34" charset="0"/>
+                        </a:rPr>
+                        <a:t>43,702</a:t>
+                      </a:r>
+                    </a:p>
+                  </a:txBody>
+                  <a:tcPr marL="0" marR="0" marT="0" marB="0" anchor="ctr">
+                    <a:lnL w="12700" cmpd="sng">
+                      <a:noFill/>
+                    </a:lnL>
+                    <a:lnR w="12700" cmpd="sng">
+                      <a:noFill/>
+                    </a:lnR>
+                    <a:lnT w="12700" cmpd="sng">
+                      <a:noFill/>
+                    </a:lnT>
+                    <a:lnB w="6350" cap="flat" cmpd="sng" algn="ctr">
+                      <a:noFill/>
+                      <a:prstDash val="solid"/>
+                      <a:round/>
+                      <a:headEnd type="none" w="med" len="med"/>
+                      <a:tailEnd type="none" w="med" len="med"/>
+                    </a:lnB>
+                    <a:lnTlToBr w="12700" cmpd="sng">
+                      <a:noFill/>
+                      <a:prstDash val="solid"/>
+                    </a:lnTlToBr>
+                    <a:lnBlToTr w="12700" cmpd="sng">
+                      <a:noFill/>
+                      <a:prstDash val="solid"/>
+                    </a:lnBlToTr>
+                    <a:noFill/>
+                  </a:tcPr>
+                </a:tc>
+                <a:tc>
+                  <a:txBody>
+                    <a:bodyPr/>
+                    <a:lstStyle/>
+                    <a:p>
+                      <a:pPr algn="r" rtl="0" fontAlgn="ctr">
+                        <a:buNone/>
+                      </a:pPr>
+                      <a:r>
+                        <a:rPr lang="en-US" sz="750" b="0" i="0" u="none" strike="noStrike">
+                          <a:solidFill>
+                            <a:srgbClr val="000000"/>
+                          </a:solidFill>
+                          <a:effectLst/>
+                          <a:latin typeface="Noto Sans" panose="020B0502040504020204" pitchFamily="34" charset="0"/>
+                        </a:rPr>
+                        <a:t>50,217</a:t>
+                      </a:r>
+                    </a:p>
+                  </a:txBody>
+                  <a:tcPr marL="0" marR="0" marT="0" marB="0" anchor="ctr">
+                    <a:lnL w="12700" cmpd="sng">
+                      <a:noFill/>
+                    </a:lnL>
+                    <a:lnR w="12700" cmpd="sng">
+                      <a:noFill/>
+                    </a:lnR>
+                    <a:lnT w="12700" cmpd="sng">
+                      <a:noFill/>
+                    </a:lnT>
+                    <a:lnB w="6350" cap="flat" cmpd="sng" algn="ctr">
+                      <a:noFill/>
+                      <a:prstDash val="solid"/>
+                      <a:round/>
+                      <a:headEnd type="none" w="med" len="med"/>
+                      <a:tailEnd type="none" w="med" len="med"/>
+                    </a:lnB>
+                    <a:lnTlToBr w="12700" cmpd="sng">
+                      <a:noFill/>
+                      <a:prstDash val="solid"/>
+                    </a:lnTlToBr>
+                    <a:lnBlToTr w="12700" cmpd="sng">
+                      <a:noFill/>
+                      <a:prstDash val="solid"/>
+                    </a:lnBlToTr>
+                    <a:solidFill>
+                      <a:schemeClr val="accent4">
+                        <a:lumMod val="20000"/>
+                        <a:lumOff val="80000"/>
+                      </a:schemeClr>
+                    </a:solidFill>
+                  </a:tcPr>
+                </a:tc>
+                <a:tc>
+                  <a:txBody>
+                    <a:bodyPr/>
+                    <a:lstStyle/>
+                    <a:p>
+                      <a:pPr algn="r" rtl="0" fontAlgn="ctr">
+                        <a:buNone/>
+                      </a:pPr>
+                      <a:r>
+                        <a:rPr lang="en-US" sz="750" b="0" i="0" u="none" strike="noStrike">
+                          <a:solidFill>
+                            <a:srgbClr val="000000"/>
+                          </a:solidFill>
+                          <a:effectLst/>
+                          <a:latin typeface="Noto Sans" panose="020B0502040504020204" pitchFamily="34" charset="0"/>
+                        </a:rPr>
+                        <a:t>58,356</a:t>
+                      </a:r>
+                    </a:p>
+                  </a:txBody>
+                  <a:tcPr marL="0" marR="0" marT="0" marB="0" anchor="ctr">
+                    <a:lnL w="12700" cmpd="sng">
+                      <a:noFill/>
+                    </a:lnL>
+                    <a:lnR w="12700" cmpd="sng">
+                      <a:noFill/>
+                    </a:lnR>
+                    <a:lnT w="12700" cmpd="sng">
+                      <a:noFill/>
+                    </a:lnT>
+                    <a:lnB w="6350" cap="flat" cmpd="sng" algn="ctr">
+                      <a:noFill/>
+                      <a:prstDash val="solid"/>
+                      <a:round/>
+                      <a:headEnd type="none" w="med" len="med"/>
+                      <a:tailEnd type="none" w="med" len="med"/>
+                    </a:lnB>
+                    <a:lnTlToBr w="12700" cmpd="sng">
+                      <a:noFill/>
+                      <a:prstDash val="solid"/>
+                    </a:lnTlToBr>
+                    <a:lnBlToTr w="12700" cmpd="sng">
+                      <a:noFill/>
+                      <a:prstDash val="solid"/>
+                    </a:lnBlToTr>
+                    <a:solidFill>
+                      <a:schemeClr val="bg1"/>
+                    </a:solidFill>
+                  </a:tcPr>
+                </a:tc>
+                <a:tc>
+                  <a:txBody>
+                    <a:bodyPr/>
+                    <a:lstStyle/>
+                    <a:p>
+                      <a:pPr algn="r" rtl="0" fontAlgn="ctr">
+                        <a:buNone/>
+                      </a:pPr>
+                      <a:r>
+                        <a:rPr lang="en-US" sz="750" b="0" i="0" u="none" strike="noStrike">
+                          <a:solidFill>
+                            <a:srgbClr val="000000"/>
+                          </a:solidFill>
+                          <a:effectLst/>
+                          <a:latin typeface="Noto Sans" panose="020B0502040504020204" pitchFamily="34" charset="0"/>
+                        </a:rPr>
+                        <a:t>68,507</a:t>
+                      </a:r>
+                    </a:p>
+                  </a:txBody>
+                  <a:tcPr marL="0" marR="0" marT="0" marB="0" anchor="ctr">
+                    <a:lnL w="12700" cmpd="sng">
+                      <a:noFill/>
+                    </a:lnL>
+                    <a:lnR w="12700" cmpd="sng">
+                      <a:noFill/>
+                    </a:lnR>
+                    <a:lnT w="12700" cmpd="sng">
+                      <a:noFill/>
+                    </a:lnT>
+                    <a:lnB w="6350" cap="flat" cmpd="sng" algn="ctr">
+                      <a:noFill/>
+                      <a:prstDash val="solid"/>
+                      <a:round/>
+                      <a:headEnd type="none" w="med" len="med"/>
+                      <a:tailEnd type="none" w="med" len="med"/>
+                    </a:lnB>
+                    <a:lnTlToBr w="12700" cmpd="sng">
+                      <a:noFill/>
+                      <a:prstDash val="solid"/>
+                    </a:lnTlToBr>
+                    <a:lnBlToTr w="12700" cmpd="sng">
+                      <a:noFill/>
+                      <a:prstDash val="solid"/>
+                    </a:lnBlToTr>
+                    <a:noFill/>
+                  </a:tcPr>
+                </a:tc>
+                <a:extLst>
+                  <a:ext uri="{0D108BD9-81ED-4DB2-BD59-A6C34878D82A}">
+                    <a16:rowId xmlns:a16="http://schemas.microsoft.com/office/drawing/2014/main" val="1105519379"/>
+                  </a:ext>
+                </a:extLst>
+              </a:tr>
+              <a:tr h="162000">
+                <a:tc>
+                  <a:txBody>
+                    <a:bodyPr/>
+                    <a:lstStyle/>
+                    <a:p>
+                      <a:pPr marL="0" marR="0" algn="l" latinLnBrk="1" hangingPunct="0">
+                        <a:lnSpc>
+                          <a:spcPts val="950"/>
+                        </a:lnSpc>
+                        <a:spcBef>
+                          <a:spcPts val="0"/>
+                        </a:spcBef>
+                        <a:spcAft>
+                          <a:spcPts val="0"/>
+                        </a:spcAft>
+                      </a:pPr>
+                      <a:r>
+                        <a:rPr lang="en-US" sz="800" b="0" kern="1200" spc="-40" dirty="0">
+                          <a:solidFill>
+                            <a:srgbClr val="000000"/>
+                          </a:solidFill>
+                          <a:effectLst/>
+                          <a:latin typeface="Noto Sans" panose="020B0502040504020204" pitchFamily="34" charset="0"/>
+                          <a:ea typeface="Noto Sans" panose="020B0502040504020204" pitchFamily="34" charset="0"/>
+                          <a:cs typeface="Noto Sans" panose="020B0502040504020204" pitchFamily="34" charset="0"/>
+                        </a:rPr>
+                        <a:t>BVPS (VND)</a:t>
+                      </a:r>
+                    </a:p>
+                  </a:txBody>
+                  <a:tcPr marL="0" marR="0" marT="0" marB="0" anchor="ctr">
+                    <a:lnL w="12700" cmpd="sng">
+                      <a:noFill/>
+                    </a:lnL>
+                    <a:lnR w="12700" cmpd="sng">
+                      <a:noFill/>
+                    </a:lnR>
+                    <a:lnT w="12700" cmpd="sng">
+                      <a:noFill/>
+                    </a:lnT>
+                    <a:lnB w="6350" cap="flat" cmpd="sng" algn="ctr">
+                      <a:noFill/>
+                      <a:prstDash val="solid"/>
+                      <a:round/>
+                      <a:headEnd type="none" w="med" len="med"/>
+                      <a:tailEnd type="none" w="med" len="med"/>
+                    </a:lnB>
+                    <a:lnTlToBr w="12700" cmpd="sng">
+                      <a:noFill/>
+                      <a:prstDash val="solid"/>
+                    </a:lnTlToBr>
+                    <a:lnBlToTr w="12700" cmpd="sng">
+                      <a:noFill/>
+                      <a:prstDash val="solid"/>
+                    </a:lnBlToTr>
+                    <a:noFill/>
+                  </a:tcPr>
+                </a:tc>
+                <a:tc>
+                  <a:txBody>
+                    <a:bodyPr/>
+                    <a:lstStyle/>
+                    <a:p>
+                      <a:pPr algn="r" rtl="0" fontAlgn="ctr">
+                        <a:buNone/>
+                      </a:pPr>
+                      <a:r>
+                        <a:rPr lang="en-US" sz="750" b="0" i="0" u="none" strike="noStrike">
+                          <a:solidFill>
+                            <a:srgbClr val="000000"/>
+                          </a:solidFill>
+                          <a:effectLst/>
+                          <a:latin typeface="Noto Sans" panose="020B0502040504020204" pitchFamily="34" charset="0"/>
+                        </a:rPr>
+                        <a:t>19,665</a:t>
+                      </a:r>
+                    </a:p>
+                  </a:txBody>
+                  <a:tcPr marL="0" marR="0" marT="0" marB="0" anchor="ctr">
+                    <a:lnL w="12700" cmpd="sng">
+                      <a:noFill/>
+                    </a:lnL>
+                    <a:lnR w="12700" cmpd="sng">
+                      <a:noFill/>
+                    </a:lnR>
+                    <a:lnT w="12700" cmpd="sng">
+                      <a:noFill/>
+                    </a:lnT>
+                    <a:lnB w="6350" cap="flat" cmpd="sng" algn="ctr">
+                      <a:noFill/>
+                      <a:prstDash val="solid"/>
+                      <a:round/>
+                      <a:headEnd type="none" w="med" len="med"/>
+                      <a:tailEnd type="none" w="med" len="med"/>
+                    </a:lnB>
+                    <a:lnTlToBr w="12700" cmpd="sng">
+                      <a:noFill/>
+                      <a:prstDash val="solid"/>
+                    </a:lnTlToBr>
+                    <a:lnBlToTr w="12700" cmpd="sng">
+                      <a:noFill/>
+                      <a:prstDash val="solid"/>
+                    </a:lnBlToTr>
+                    <a:noFill/>
+                  </a:tcPr>
+                </a:tc>
+                <a:tc>
+                  <a:txBody>
+                    <a:bodyPr/>
+                    <a:lstStyle/>
+                    <a:p>
+                      <a:pPr algn="r" rtl="0" fontAlgn="ctr">
+                        <a:buNone/>
+                      </a:pPr>
+                      <a:r>
+                        <a:rPr lang="en-US" sz="750" b="0" i="0" u="none" strike="noStrike">
+                          <a:solidFill>
+                            <a:srgbClr val="000000"/>
+                          </a:solidFill>
+                          <a:effectLst/>
+                          <a:latin typeface="Noto Sans" panose="020B0502040504020204" pitchFamily="34" charset="0"/>
+                        </a:rPr>
+                        <a:t>20,253</a:t>
+                      </a:r>
+                    </a:p>
+                  </a:txBody>
+                  <a:tcPr marL="0" marR="0" marT="0" marB="0" anchor="ctr">
+                    <a:lnL w="12700" cmpd="sng">
+                      <a:noFill/>
+                    </a:lnL>
+                    <a:lnR w="12700" cmpd="sng">
+                      <a:noFill/>
+                    </a:lnR>
+                    <a:lnT w="12700" cmpd="sng">
+                      <a:noFill/>
+                    </a:lnT>
+                    <a:lnB w="6350" cap="flat" cmpd="sng" algn="ctr">
+                      <a:noFill/>
+                      <a:prstDash val="solid"/>
+                      <a:round/>
+                      <a:headEnd type="none" w="med" len="med"/>
+                      <a:tailEnd type="none" w="med" len="med"/>
+                    </a:lnB>
+                    <a:lnTlToBr w="12700" cmpd="sng">
+                      <a:noFill/>
+                      <a:prstDash val="solid"/>
+                    </a:lnTlToBr>
+                    <a:lnBlToTr w="12700" cmpd="sng">
+                      <a:noFill/>
+                      <a:prstDash val="solid"/>
+                    </a:lnBlToTr>
+                    <a:noFill/>
+                  </a:tcPr>
+                </a:tc>
+                <a:tc>
+                  <a:txBody>
+                    <a:bodyPr/>
+                    <a:lstStyle/>
+                    <a:p>
+                      <a:pPr algn="r" rtl="0" fontAlgn="ctr">
+                        <a:buNone/>
+                      </a:pPr>
+                      <a:r>
+                        <a:rPr lang="en-US" sz="750" b="0" i="0" u="none" strike="noStrike">
+                          <a:solidFill>
+                            <a:srgbClr val="000000"/>
+                          </a:solidFill>
+                          <a:effectLst/>
+                          <a:latin typeface="Noto Sans" panose="020B0502040504020204" pitchFamily="34" charset="0"/>
+                        </a:rPr>
+                        <a:t>21,418</a:t>
+                      </a:r>
+                    </a:p>
+                  </a:txBody>
+                  <a:tcPr marL="0" marR="0" marT="0" marB="0" anchor="ctr">
+                    <a:lnL w="12700" cmpd="sng">
+                      <a:noFill/>
+                    </a:lnL>
+                    <a:lnR w="12700" cmpd="sng">
+                      <a:noFill/>
+                    </a:lnR>
+                    <a:lnT w="12700" cmpd="sng">
+                      <a:noFill/>
+                    </a:lnT>
+                    <a:lnB w="6350" cap="flat" cmpd="sng" algn="ctr">
+                      <a:noFill/>
+                      <a:prstDash val="solid"/>
+                      <a:round/>
+                      <a:headEnd type="none" w="med" len="med"/>
+                      <a:tailEnd type="none" w="med" len="med"/>
+                    </a:lnB>
+                    <a:lnTlToBr w="12700" cmpd="sng">
+                      <a:noFill/>
+                      <a:prstDash val="solid"/>
+                    </a:lnTlToBr>
+                    <a:lnBlToTr w="12700" cmpd="sng">
+                      <a:noFill/>
+                      <a:prstDash val="solid"/>
+                    </a:lnBlToTr>
+                    <a:noFill/>
+                  </a:tcPr>
+                </a:tc>
+                <a:tc>
+                  <a:txBody>
+                    <a:bodyPr/>
+                    <a:lstStyle/>
+                    <a:p>
+                      <a:pPr algn="r" rtl="0" fontAlgn="ctr">
+                        <a:buNone/>
+                      </a:pPr>
+                      <a:r>
+                        <a:rPr lang="en-US" sz="750" b="0" i="0" u="none" strike="noStrike">
+                          <a:solidFill>
+                            <a:srgbClr val="000000"/>
+                          </a:solidFill>
+                          <a:effectLst/>
+                          <a:latin typeface="Noto Sans" panose="020B0502040504020204" pitchFamily="34" charset="0"/>
+                        </a:rPr>
+                        <a:t>25,116</a:t>
+                      </a:r>
+                    </a:p>
+                  </a:txBody>
+                  <a:tcPr marL="0" marR="0" marT="0" marB="0" anchor="ctr">
+                    <a:lnL w="12700" cmpd="sng">
+                      <a:noFill/>
+                    </a:lnL>
+                    <a:lnR w="12700" cmpd="sng">
+                      <a:noFill/>
+                    </a:lnR>
+                    <a:lnT w="12700" cmpd="sng">
+                      <a:noFill/>
+                    </a:lnT>
+                    <a:lnB w="6350" cap="flat" cmpd="sng" algn="ctr">
+                      <a:noFill/>
+                      <a:prstDash val="solid"/>
+                      <a:round/>
+                      <a:headEnd type="none" w="med" len="med"/>
+                      <a:tailEnd type="none" w="med" len="med"/>
+                    </a:lnB>
+                    <a:lnTlToBr w="12700" cmpd="sng">
+                      <a:noFill/>
+                      <a:prstDash val="solid"/>
+                    </a:lnTlToBr>
+                    <a:lnBlToTr w="12700" cmpd="sng">
+                      <a:noFill/>
+                      <a:prstDash val="solid"/>
+                    </a:lnBlToTr>
+                    <a:solidFill>
+                      <a:schemeClr val="accent4">
+                        <a:lumMod val="20000"/>
+                        <a:lumOff val="80000"/>
+                      </a:schemeClr>
+                    </a:solidFill>
+                  </a:tcPr>
+                </a:tc>
+                <a:tc>
+                  <a:txBody>
+                    <a:bodyPr/>
+                    <a:lstStyle/>
+                    <a:p>
+                      <a:pPr algn="r" rtl="0" fontAlgn="ctr">
+                        <a:buNone/>
+                      </a:pPr>
+                      <a:r>
+                        <a:rPr lang="en-US" sz="750" b="0" i="0" u="none" strike="noStrike">
+                          <a:solidFill>
+                            <a:srgbClr val="000000"/>
+                          </a:solidFill>
+                          <a:effectLst/>
+                          <a:latin typeface="Noto Sans" panose="020B0502040504020204" pitchFamily="34" charset="0"/>
+                        </a:rPr>
                         <a:t>29,770</a:t>
                       </a:r>
                     </a:p>
@@ -34125,7 +34823,7 @@
                   </a:ext>
                 </a:extLst>
               </a:tr>
-              <a:tr h="173736">
+              <a:tr h="162000">
                 <a:tc gridSpan="7">
                   <a:txBody>
                     <a:bodyPr/>
@@ -34158,7 +34856,7 @@
                           <a:ea typeface="Noto Sans" panose="020B0502040504020204" pitchFamily="34" charset="0"/>
                           <a:cs typeface="Noto Sans" panose="020B0502040504020204" pitchFamily="34" charset="0"/>
                         </a:rPr>
-                        <a:t>Note: FPT Telecom deconsolidated (equity method) from FY26F. Source: Company data, Mirae Asset Vietnam Research</a:t>
+                        <a:t>Note: FPT Telecom equity-accounted from FY26F, consolidated in FY23-25. * against a restated FY25 revenue of VND50,607bn the change is +13.2%; NPATMI is unaffected by the change of basis. Source: Company data, Mirae Asset Vietnam Research</a:t>
                       </a:r>
                     </a:p>
                   </a:txBody>
@@ -38219,7 +38917,7 @@
         </p:nvGraphicFramePr>
         <p:xfrm>
           <a:off x="6010273" y="4182363"/>
-          <a:ext cx="5738041" cy="2258568"/>
+          <a:ext cx="5738041" cy="2430000"/>
         </p:xfrm>
         <a:graphic>
           <a:graphicData uri="http://schemas.openxmlformats.org/drawingml/2006/table">
@@ -38278,7 +38976,7 @@
                   </a:extLst>
                 </a:gridCol>
               </a:tblGrid>
-              <a:tr h="173736">
+              <a:tr h="162000">
                 <a:tc>
                   <a:txBody>
                     <a:bodyPr/>
@@ -38698,7 +39396,7 @@
                   </a:ext>
                 </a:extLst>
               </a:tr>
-              <a:tr h="173736">
+              <a:tr h="162000">
                 <a:tc>
                   <a:txBody>
                     <a:bodyPr/>
@@ -39058,7 +39756,7 @@
                   </a:ext>
                 </a:extLst>
               </a:tr>
-              <a:tr h="173736">
+              <a:tr h="162000">
                 <a:tc>
                   <a:txBody>
                     <a:bodyPr/>
@@ -39085,7 +39783,7 @@
                           <a:ea typeface="Noto Sans" panose="020B0502040504020204" pitchFamily="34" charset="0"/>
                           <a:cs typeface="Noto Sans" panose="020B0502040504020204" pitchFamily="34" charset="0"/>
                         </a:rPr>
-                        <a:t>LN hoạt động (tỷ đồng)</a:t>
+                        <a:t>   % YoY</a:t>
                       </a:r>
                     </a:p>
                   </a:txBody>
@@ -39096,8 +39794,12 @@
                     <a:lnR w="12700" cmpd="sng">
                       <a:noFill/>
                     </a:lnR>
-                    <a:lnT w="12700" cmpd="sng">
-                      <a:noFill/>
+                    <a:lnT w="6350" cap="flat" cmpd="sng" algn="ctr">
+                      <a:noFill/>
+                      <a:prstDash val="solid"/>
+                      <a:round/>
+                      <a:headEnd type="none" w="med" len="med"/>
+                      <a:tailEnd type="none" w="med" len="med"/>
                     </a:lnT>
                     <a:lnB w="12700" cmpd="sng">
                       <a:noFill/>
@@ -39118,15 +39820,18 @@
                     <a:bodyPr/>
                     <a:lstStyle/>
                     <a:p>
-                      <a:pPr algn="r" fontAlgn="ctr">
+                      <a:pPr algn="r" rtl="0" fontAlgn="ctr">
                         <a:buNone/>
                       </a:pPr>
                       <a:r>
                         <a:rPr lang="en-US" sz="800" b="0" i="0" u="none" strike="noStrike" dirty="0">
-                          <a:effectLst/>
-                          <a:latin typeface="Noto Sans" panose="020B0502040504020204" pitchFamily="34" charset="0"/>
-                        </a:rPr>
-                        <a:t>8,452</a:t>
+                          <a:solidFill>
+                            <a:srgbClr val="000000"/>
+                          </a:solidFill>
+                          <a:effectLst/>
+                          <a:latin typeface="Noto Sans" panose="020B0502040504020204" pitchFamily="34" charset="0"/>
+                        </a:rPr>
+                        <a:t>—</a:t>
                       </a:r>
                     </a:p>
                   </a:txBody>
@@ -39137,8 +39842,12 @@
                     <a:lnR w="12700" cmpd="sng">
                       <a:noFill/>
                     </a:lnR>
-                    <a:lnT w="12700" cmpd="sng">
-                      <a:noFill/>
+                    <a:lnT w="6350" cap="flat" cmpd="sng" algn="ctr">
+                      <a:noFill/>
+                      <a:prstDash val="solid"/>
+                      <a:round/>
+                      <a:headEnd type="none" w="med" len="med"/>
+                      <a:tailEnd type="none" w="med" len="med"/>
                     </a:lnT>
                     <a:lnB w="12700" cmpd="sng">
                       <a:noFill/>
@@ -39159,15 +39868,18 @@
                     <a:bodyPr/>
                     <a:lstStyle/>
                     <a:p>
-                      <a:pPr algn="r" fontAlgn="ctr">
+                      <a:pPr algn="r" rtl="0" fontAlgn="ctr">
                         <a:buNone/>
                       </a:pPr>
                       <a:r>
                         <a:rPr lang="en-US" sz="800" b="0" i="0" u="none" strike="noStrike" dirty="0">
-                          <a:effectLst/>
-                          <a:latin typeface="Noto Sans" panose="020B0502040504020204" pitchFamily="34" charset="0"/>
-                        </a:rPr>
-                        <a:t>10,508</a:t>
+                          <a:solidFill>
+                            <a:srgbClr val="000000"/>
+                          </a:solidFill>
+                          <a:effectLst/>
+                          <a:latin typeface="Noto Sans" panose="020B0502040504020204" pitchFamily="34" charset="0"/>
+                        </a:rPr>
+                        <a:t>+19.4%</a:t>
                       </a:r>
                     </a:p>
                   </a:txBody>
@@ -39178,8 +39890,12 @@
                     <a:lnR w="12700" cmpd="sng">
                       <a:noFill/>
                     </a:lnR>
-                    <a:lnT w="12700" cmpd="sng">
-                      <a:noFill/>
+                    <a:lnT w="6350" cap="flat" cmpd="sng" algn="ctr">
+                      <a:noFill/>
+                      <a:prstDash val="solid"/>
+                      <a:round/>
+                      <a:headEnd type="none" w="med" len="med"/>
+                      <a:tailEnd type="none" w="med" len="med"/>
                     </a:lnT>
                     <a:lnB w="12700" cmpd="sng">
                       <a:noFill/>
@@ -39200,15 +39916,18 @@
                     <a:bodyPr/>
                     <a:lstStyle/>
                     <a:p>
-                      <a:pPr algn="r" fontAlgn="ctr">
+                      <a:pPr algn="r" rtl="0" fontAlgn="ctr">
                         <a:buNone/>
                       </a:pPr>
                       <a:r>
                         <a:rPr lang="en-US" sz="800" b="0" i="0" u="none" strike="noStrike" dirty="0">
-                          <a:effectLst/>
-                          <a:latin typeface="Noto Sans" panose="020B0502040504020204" pitchFamily="34" charset="0"/>
-                        </a:rPr>
-                        <a:t>11,079</a:t>
+                          <a:solidFill>
+                            <a:srgbClr val="000000"/>
+                          </a:solidFill>
+                          <a:effectLst/>
+                          <a:latin typeface="Noto Sans" panose="020B0502040504020204" pitchFamily="34" charset="0"/>
+                        </a:rPr>
+                        <a:t>+11.7%</a:t>
                       </a:r>
                     </a:p>
                   </a:txBody>
@@ -39219,8 +39938,12 @@
                     <a:lnR w="12700" cmpd="sng">
                       <a:noFill/>
                     </a:lnR>
-                    <a:lnT w="12700" cmpd="sng">
-                      <a:noFill/>
+                    <a:lnT w="6350" cap="flat" cmpd="sng" algn="ctr">
+                      <a:noFill/>
+                      <a:prstDash val="solid"/>
+                      <a:round/>
+                      <a:headEnd type="none" w="med" len="med"/>
+                      <a:tailEnd type="none" w="med" len="med"/>
                     </a:lnT>
                     <a:lnB w="12700" cmpd="sng">
                       <a:noFill/>
@@ -39241,15 +39964,18 @@
                     <a:bodyPr/>
                     <a:lstStyle/>
                     <a:p>
-                      <a:pPr algn="r" fontAlgn="ctr">
+                      <a:pPr algn="r" rtl="0" fontAlgn="ctr">
                         <a:buNone/>
                       </a:pPr>
                       <a:r>
                         <a:rPr lang="en-US" sz="800" b="0" i="0" u="none" strike="noStrike" dirty="0">
-                          <a:effectLst/>
-                          <a:latin typeface="Noto Sans" panose="020B0502040504020204" pitchFamily="34" charset="0"/>
-                        </a:rPr>
-                        <a:t>9,807</a:t>
+                          <a:solidFill>
+                            <a:srgbClr val="000000"/>
+                          </a:solidFill>
+                          <a:effectLst/>
+                          <a:latin typeface="Noto Sans" panose="020B0502040504020204" pitchFamily="34" charset="0"/>
+                        </a:rPr>
+                        <a:t>-18.4%*</a:t>
                       </a:r>
                     </a:p>
                   </a:txBody>
@@ -39260,8 +39986,12 @@
                     <a:lnR w="12700" cmpd="sng">
                       <a:noFill/>
                     </a:lnR>
-                    <a:lnT w="12700" cmpd="sng">
-                      <a:noFill/>
+                    <a:lnT w="6350" cap="flat" cmpd="sng" algn="ctr">
+                      <a:noFill/>
+                      <a:prstDash val="solid"/>
+                      <a:round/>
+                      <a:headEnd type="none" w="med" len="med"/>
+                      <a:tailEnd type="none" w="med" len="med"/>
                     </a:lnT>
                     <a:lnB w="12700" cmpd="sng">
                       <a:noFill/>
@@ -39287,15 +40017,18 @@
                     <a:bodyPr/>
                     <a:lstStyle/>
                     <a:p>
-                      <a:pPr algn="r" fontAlgn="ctr">
+                      <a:pPr algn="r" rtl="0" fontAlgn="ctr">
                         <a:buNone/>
                       </a:pPr>
                       <a:r>
                         <a:rPr lang="en-US" sz="800" b="0" i="0" u="none" strike="noStrike" dirty="0">
-                          <a:effectLst/>
-                          <a:latin typeface="Noto Sans" panose="020B0502040504020204" pitchFamily="34" charset="0"/>
-                        </a:rPr>
-                        <a:t>11,044</a:t>
+                          <a:solidFill>
+                            <a:srgbClr val="000000"/>
+                          </a:solidFill>
+                          <a:effectLst/>
+                          <a:latin typeface="Noto Sans" panose="020B0502040504020204" pitchFamily="34" charset="0"/>
+                        </a:rPr>
+                        <a:t>+15.3%</a:t>
                       </a:r>
                     </a:p>
                   </a:txBody>
@@ -39306,8 +40039,12 @@
                     <a:lnR w="12700" cmpd="sng">
                       <a:noFill/>
                     </a:lnR>
-                    <a:lnT w="12700" cmpd="sng">
-                      <a:noFill/>
+                    <a:lnT w="6350" cap="flat" cmpd="sng" algn="ctr">
+                      <a:noFill/>
+                      <a:prstDash val="solid"/>
+                      <a:round/>
+                      <a:headEnd type="none" w="med" len="med"/>
+                      <a:tailEnd type="none" w="med" len="med"/>
                     </a:lnT>
                     <a:lnB w="12700" cmpd="sng">
                       <a:noFill/>
@@ -39330,15 +40067,18 @@
                     <a:bodyPr/>
                     <a:lstStyle/>
                     <a:p>
-                      <a:pPr algn="r" fontAlgn="ctr">
+                      <a:pPr algn="r" rtl="0" fontAlgn="ctr">
                         <a:buNone/>
                       </a:pPr>
                       <a:r>
                         <a:rPr lang="en-US" sz="800" b="0" i="0" u="none" strike="noStrike" dirty="0">
-                          <a:effectLst/>
-                          <a:latin typeface="Noto Sans" panose="020B0502040504020204" pitchFamily="34" charset="0"/>
-                        </a:rPr>
-                        <a:t>13,053</a:t>
+                          <a:solidFill>
+                            <a:srgbClr val="000000"/>
+                          </a:solidFill>
+                          <a:effectLst/>
+                          <a:latin typeface="Noto Sans" panose="020B0502040504020204" pitchFamily="34" charset="0"/>
+                        </a:rPr>
+                        <a:t>+16.1%</a:t>
                       </a:r>
                     </a:p>
                   </a:txBody>
@@ -39349,8 +40089,12 @@
                     <a:lnR w="12700" cmpd="sng">
                       <a:noFill/>
                     </a:lnR>
-                    <a:lnT w="12700" cmpd="sng">
-                      <a:noFill/>
+                    <a:lnT w="6350" cap="flat" cmpd="sng" algn="ctr">
+                      <a:noFill/>
+                      <a:prstDash val="solid"/>
+                      <a:round/>
+                      <a:headEnd type="none" w="med" len="med"/>
+                      <a:tailEnd type="none" w="med" len="med"/>
                     </a:lnT>
                     <a:lnB w="12700" cmpd="sng">
                       <a:noFill/>
@@ -39368,11 +40112,11 @@
                 </a:tc>
                 <a:extLst>
                   <a:ext uri="{0D108BD9-81ED-4DB2-BD59-A6C34878D82A}">
-                    <a16:rowId xmlns:a16="http://schemas.microsoft.com/office/drawing/2014/main" val="10002"/>
+                    <a16:rowId xmlns:a16="http://schemas.microsoft.com/office/drawing/2014/main" val="10001"/>
                   </a:ext>
                 </a:extLst>
               </a:tr>
-              <a:tr h="173736">
+              <a:tr h="162000">
                 <a:tc>
                   <a:txBody>
                     <a:bodyPr/>
@@ -39390,7 +40134,7 @@
                         </a:spcAft>
                       </a:pPr>
                       <a:r>
-                        <a:rPr lang="en-US" sz="800" b="0" kern="1200" spc="-40" dirty="0" err="1">
+                        <a:rPr lang="en-US" sz="800" b="0" kern="1200" spc="-40" dirty="0">
                           <a:solidFill>
                             <a:srgbClr val="000000"/>
                           </a:solidFill>
@@ -39399,7 +40143,7 @@
                           <a:ea typeface="Noto Sans" panose="020B0502040504020204" pitchFamily="34" charset="0"/>
                           <a:cs typeface="Noto Sans" panose="020B0502040504020204" pitchFamily="34" charset="0"/>
                         </a:rPr>
-                        <a:t>LNTT (tỷ đồng)</a:t>
+                        <a:t>LN hoạt động (tỷ đồng)</a:t>
                       </a:r>
                     </a:p>
                   </a:txBody>
@@ -39432,18 +40176,15 @@
                     <a:bodyPr/>
                     <a:lstStyle/>
                     <a:p>
-                      <a:pPr algn="r" rtl="0" fontAlgn="ctr">
+                      <a:pPr algn="r" fontAlgn="ctr">
                         <a:buNone/>
                       </a:pPr>
                       <a:r>
                         <a:rPr lang="en-US" sz="800" b="0" i="0" u="none" strike="noStrike" dirty="0">
-                          <a:solidFill>
-                            <a:srgbClr val="000000"/>
-                          </a:solidFill>
-                          <a:effectLst/>
-                          <a:latin typeface="Noto Sans" panose="020B0502040504020204" pitchFamily="34" charset="0"/>
-                        </a:rPr>
-                        <a:t>9,203</a:t>
+                          <a:effectLst/>
+                          <a:latin typeface="Noto Sans" panose="020B0502040504020204" pitchFamily="34" charset="0"/>
+                        </a:rPr>
+                        <a:t>8,452</a:t>
                       </a:r>
                     </a:p>
                   </a:txBody>
@@ -39476,18 +40217,15 @@
                     <a:bodyPr/>
                     <a:lstStyle/>
                     <a:p>
-                      <a:pPr algn="r" rtl="0" fontAlgn="ctr">
+                      <a:pPr algn="r" fontAlgn="ctr">
                         <a:buNone/>
                       </a:pPr>
                       <a:r>
                         <a:rPr lang="en-US" sz="800" b="0" i="0" u="none" strike="noStrike" dirty="0">
-                          <a:solidFill>
-                            <a:srgbClr val="000000"/>
-                          </a:solidFill>
-                          <a:effectLst/>
-                          <a:latin typeface="Noto Sans" panose="020B0502040504020204" pitchFamily="34" charset="0"/>
-                        </a:rPr>
-                        <a:t>11,070</a:t>
+                          <a:effectLst/>
+                          <a:latin typeface="Noto Sans" panose="020B0502040504020204" pitchFamily="34" charset="0"/>
+                        </a:rPr>
+                        <a:t>10,508</a:t>
                       </a:r>
                     </a:p>
                   </a:txBody>
@@ -39520,18 +40258,15 @@
                     <a:bodyPr/>
                     <a:lstStyle/>
                     <a:p>
-                      <a:pPr algn="r" rtl="0" fontAlgn="ctr">
+                      <a:pPr algn="r" fontAlgn="ctr">
                         <a:buNone/>
                       </a:pPr>
                       <a:r>
                         <a:rPr lang="en-US" sz="800" b="0" i="0" u="none" strike="noStrike" dirty="0">
-                          <a:solidFill>
-                            <a:srgbClr val="000000"/>
-                          </a:solidFill>
-                          <a:effectLst/>
-                          <a:latin typeface="Noto Sans" panose="020B0502040504020204" pitchFamily="34" charset="0"/>
-                        </a:rPr>
-                        <a:t>13,134</a:t>
+                          <a:effectLst/>
+                          <a:latin typeface="Noto Sans" panose="020B0502040504020204" pitchFamily="34" charset="0"/>
+                        </a:rPr>
+                        <a:t>11,079</a:t>
                       </a:r>
                     </a:p>
                   </a:txBody>
@@ -39564,18 +40299,15 @@
                     <a:bodyPr/>
                     <a:lstStyle/>
                     <a:p>
-                      <a:pPr algn="r" rtl="0" fontAlgn="ctr">
+                      <a:pPr algn="r" fontAlgn="ctr">
                         <a:buNone/>
                       </a:pPr>
                       <a:r>
                         <a:rPr lang="en-US" sz="800" b="0" i="0" u="none" strike="noStrike" dirty="0">
-                          <a:solidFill>
-                            <a:srgbClr val="000000"/>
-                          </a:solidFill>
-                          <a:effectLst/>
-                          <a:latin typeface="Noto Sans" panose="020B0502040504020204" pitchFamily="34" charset="0"/>
-                        </a:rPr>
-                        <a:t>13,070</a:t>
+                          <a:effectLst/>
+                          <a:latin typeface="Noto Sans" panose="020B0502040504020204" pitchFamily="34" charset="0"/>
+                        </a:rPr>
+                        <a:t>9,807</a:t>
                       </a:r>
                     </a:p>
                   </a:txBody>
@@ -39613,18 +40345,15 @@
                     <a:bodyPr/>
                     <a:lstStyle/>
                     <a:p>
-                      <a:pPr algn="r" rtl="0" fontAlgn="ctr">
+                      <a:pPr algn="r" fontAlgn="ctr">
                         <a:buNone/>
                       </a:pPr>
                       <a:r>
                         <a:rPr lang="en-US" sz="800" b="0" i="0" u="none" strike="noStrike" dirty="0">
-                          <a:solidFill>
-                            <a:srgbClr val="000000"/>
-                          </a:solidFill>
-                          <a:effectLst/>
-                          <a:latin typeface="Noto Sans" panose="020B0502040504020204" pitchFamily="34" charset="0"/>
-                        </a:rPr>
-                        <a:t>15,159</a:t>
+                          <a:effectLst/>
+                          <a:latin typeface="Noto Sans" panose="020B0502040504020204" pitchFamily="34" charset="0"/>
+                        </a:rPr>
+                        <a:t>11,044</a:t>
                       </a:r>
                     </a:p>
                   </a:txBody>
@@ -39659,18 +40388,15 @@
                     <a:bodyPr/>
                     <a:lstStyle/>
                     <a:p>
-                      <a:pPr algn="r" rtl="0" fontAlgn="ctr">
+                      <a:pPr algn="r" fontAlgn="ctr">
                         <a:buNone/>
                       </a:pPr>
                       <a:r>
                         <a:rPr lang="en-US" sz="800" b="0" i="0" u="none" strike="noStrike" dirty="0">
-                          <a:solidFill>
-                            <a:srgbClr val="000000"/>
-                          </a:solidFill>
-                          <a:effectLst/>
-                          <a:latin typeface="Noto Sans" panose="020B0502040504020204" pitchFamily="34" charset="0"/>
-                        </a:rPr>
-                        <a:t>17,671</a:t>
+                          <a:effectLst/>
+                          <a:latin typeface="Noto Sans" panose="020B0502040504020204" pitchFamily="34" charset="0"/>
+                        </a:rPr>
+                        <a:t>13,053</a:t>
                       </a:r>
                     </a:p>
                   </a:txBody>
@@ -39700,11 +40426,11 @@
                 </a:tc>
                 <a:extLst>
                   <a:ext uri="{0D108BD9-81ED-4DB2-BD59-A6C34878D82A}">
-                    <a16:rowId xmlns:a16="http://schemas.microsoft.com/office/drawing/2014/main" val="10003"/>
+                    <a16:rowId xmlns:a16="http://schemas.microsoft.com/office/drawing/2014/main" val="10002"/>
                   </a:ext>
                 </a:extLst>
               </a:tr>
-              <a:tr h="173736">
+              <a:tr h="162000">
                 <a:tc>
                   <a:txBody>
                     <a:bodyPr/>
@@ -39722,7 +40448,7 @@
                         </a:spcAft>
                       </a:pPr>
                       <a:r>
-                        <a:rPr lang="en-US" sz="800" b="0" kern="1200" spc="-40" dirty="0">
+                        <a:rPr lang="en-US" sz="800" b="0" kern="1200" spc="-40" dirty="0" err="1">
                           <a:solidFill>
                             <a:srgbClr val="000000"/>
                           </a:solidFill>
@@ -39731,7 +40457,7 @@
                           <a:ea typeface="Noto Sans" panose="020B0502040504020204" pitchFamily="34" charset="0"/>
                           <a:cs typeface="Noto Sans" panose="020B0502040504020204" pitchFamily="34" charset="0"/>
                         </a:rPr>
-                        <a:t>LNST-CĐTS (tỷ đồng)</a:t>
+                        <a:t>LNTT (tỷ đồng)</a:t>
                       </a:r>
                     </a:p>
                   </a:txBody>
@@ -39775,7 +40501,7 @@
                           <a:effectLst/>
                           <a:latin typeface="Noto Sans" panose="020B0502040504020204" pitchFamily="34" charset="0"/>
                         </a:rPr>
-                        <a:t>6,465</a:t>
+                        <a:t>9,203</a:t>
                       </a:r>
                     </a:p>
                   </a:txBody>
@@ -39819,7 +40545,7 @@
                           <a:effectLst/>
                           <a:latin typeface="Noto Sans" panose="020B0502040504020204" pitchFamily="34" charset="0"/>
                         </a:rPr>
-                        <a:t>7,857</a:t>
+                        <a:t>11,070</a:t>
                       </a:r>
                     </a:p>
                   </a:txBody>
@@ -39863,7 +40589,7 @@
                           <a:effectLst/>
                           <a:latin typeface="Noto Sans" panose="020B0502040504020204" pitchFamily="34" charset="0"/>
                         </a:rPr>
-                        <a:t>9,464</a:t>
+                        <a:t>13,134</a:t>
                       </a:r>
                     </a:p>
                   </a:txBody>
@@ -39907,7 +40633,7 @@
                           <a:effectLst/>
                           <a:latin typeface="Noto Sans" panose="020B0502040504020204" pitchFamily="34" charset="0"/>
                         </a:rPr>
-                        <a:t>10,944</a:t>
+                        <a:t>13,070</a:t>
                       </a:r>
                     </a:p>
                   </a:txBody>
@@ -39956,6 +40682,338 @@
                           <a:effectLst/>
                           <a:latin typeface="Noto Sans" panose="020B0502040504020204" pitchFamily="34" charset="0"/>
                         </a:rPr>
+                        <a:t>15,159</a:t>
+                      </a:r>
+                    </a:p>
+                  </a:txBody>
+                  <a:tcPr marL="0" marR="0" marT="0" marB="0" anchor="ctr">
+                    <a:lnL w="12700" cmpd="sng">
+                      <a:noFill/>
+                    </a:lnL>
+                    <a:lnR w="12700" cmpd="sng">
+                      <a:noFill/>
+                    </a:lnR>
+                    <a:lnT w="12700" cmpd="sng">
+                      <a:noFill/>
+                    </a:lnT>
+                    <a:lnB w="12700" cmpd="sng">
+                      <a:noFill/>
+                    </a:lnB>
+                    <a:lnTlToBr w="12700" cmpd="sng">
+                      <a:noFill/>
+                      <a:prstDash val="solid"/>
+                    </a:lnTlToBr>
+                    <a:lnBlToTr w="12700" cmpd="sng">
+                      <a:noFill/>
+                      <a:prstDash val="solid"/>
+                    </a:lnBlToTr>
+                    <a:solidFill>
+                      <a:schemeClr val="bg1"/>
+                    </a:solidFill>
+                  </a:tcPr>
+                </a:tc>
+                <a:tc>
+                  <a:txBody>
+                    <a:bodyPr/>
+                    <a:lstStyle/>
+                    <a:p>
+                      <a:pPr algn="r" rtl="0" fontAlgn="ctr">
+                        <a:buNone/>
+                      </a:pPr>
+                      <a:r>
+                        <a:rPr lang="en-US" sz="800" b="0" i="0" u="none" strike="noStrike" dirty="0">
+                          <a:solidFill>
+                            <a:srgbClr val="000000"/>
+                          </a:solidFill>
+                          <a:effectLst/>
+                          <a:latin typeface="Noto Sans" panose="020B0502040504020204" pitchFamily="34" charset="0"/>
+                        </a:rPr>
+                        <a:t>17,671</a:t>
+                      </a:r>
+                    </a:p>
+                  </a:txBody>
+                  <a:tcPr marL="0" marR="0" marT="0" marB="0" anchor="ctr">
+                    <a:lnL w="12700" cmpd="sng">
+                      <a:noFill/>
+                    </a:lnL>
+                    <a:lnR w="12700" cmpd="sng">
+                      <a:noFill/>
+                    </a:lnR>
+                    <a:lnT w="12700" cmpd="sng">
+                      <a:noFill/>
+                    </a:lnT>
+                    <a:lnB w="12700" cmpd="sng">
+                      <a:noFill/>
+                    </a:lnB>
+                    <a:lnTlToBr w="12700" cmpd="sng">
+                      <a:noFill/>
+                      <a:prstDash val="solid"/>
+                    </a:lnTlToBr>
+                    <a:lnBlToTr w="12700" cmpd="sng">
+                      <a:noFill/>
+                      <a:prstDash val="solid"/>
+                    </a:lnBlToTr>
+                    <a:noFill/>
+                  </a:tcPr>
+                </a:tc>
+                <a:extLst>
+                  <a:ext uri="{0D108BD9-81ED-4DB2-BD59-A6C34878D82A}">
+                    <a16:rowId xmlns:a16="http://schemas.microsoft.com/office/drawing/2014/main" val="10003"/>
+                  </a:ext>
+                </a:extLst>
+              </a:tr>
+              <a:tr h="162000">
+                <a:tc>
+                  <a:txBody>
+                    <a:bodyPr/>
+                    <a:lstStyle/>
+                    <a:p>
+                      <a:pPr marL="0" marR="41910" algn="l" latinLnBrk="1" hangingPunct="0">
+                        <a:lnSpc>
+                          <a:spcPts val="950"/>
+                        </a:lnSpc>
+                        <a:spcBef>
+                          <a:spcPts val="0"/>
+                        </a:spcBef>
+                        <a:spcAft>
+                          <a:spcPts val="0"/>
+                        </a:spcAft>
+                      </a:pPr>
+                      <a:r>
+                        <a:rPr lang="en-US" sz="800" b="0" kern="1200" spc="-40" dirty="0">
+                          <a:solidFill>
+                            <a:srgbClr val="000000"/>
+                          </a:solidFill>
+                          <a:effectLst/>
+                          <a:latin typeface="+mj-lt"/>
+                          <a:ea typeface="Noto Sans" panose="020B0502040504020204" pitchFamily="34" charset="0"/>
+                          <a:cs typeface="Noto Sans" panose="020B0502040504020204" pitchFamily="34" charset="0"/>
+                        </a:rPr>
+                        <a:t>LNST-CĐTS (tỷ đồng)</a:t>
+                      </a:r>
+                    </a:p>
+                  </a:txBody>
+                  <a:tcPr marL="0" marR="0" marT="0" marB="0" anchor="ctr">
+                    <a:lnL w="12700" cmpd="sng">
+                      <a:noFill/>
+                    </a:lnL>
+                    <a:lnR w="12700" cmpd="sng">
+                      <a:noFill/>
+                    </a:lnR>
+                    <a:lnT w="12700" cmpd="sng">
+                      <a:noFill/>
+                    </a:lnT>
+                    <a:lnB w="12700" cmpd="sng">
+                      <a:noFill/>
+                    </a:lnB>
+                    <a:lnTlToBr w="12700" cmpd="sng">
+                      <a:noFill/>
+                      <a:prstDash val="solid"/>
+                    </a:lnTlToBr>
+                    <a:lnBlToTr w="12700" cmpd="sng">
+                      <a:noFill/>
+                      <a:prstDash val="solid"/>
+                    </a:lnBlToTr>
+                    <a:noFill/>
+                  </a:tcPr>
+                </a:tc>
+                <a:tc>
+                  <a:txBody>
+                    <a:bodyPr/>
+                    <a:lstStyle/>
+                    <a:p>
+                      <a:pPr algn="r" rtl="0" fontAlgn="ctr">
+                        <a:buNone/>
+                      </a:pPr>
+                      <a:r>
+                        <a:rPr lang="en-US" sz="800" b="0" i="0" u="none" strike="noStrike" dirty="0">
+                          <a:solidFill>
+                            <a:srgbClr val="000000"/>
+                          </a:solidFill>
+                          <a:effectLst/>
+                          <a:latin typeface="Noto Sans" panose="020B0502040504020204" pitchFamily="34" charset="0"/>
+                        </a:rPr>
+                        <a:t>6,465</a:t>
+                      </a:r>
+                    </a:p>
+                  </a:txBody>
+                  <a:tcPr marL="0" marR="0" marT="0" marB="0" anchor="ctr">
+                    <a:lnL w="12700" cmpd="sng">
+                      <a:noFill/>
+                    </a:lnL>
+                    <a:lnR w="12700" cmpd="sng">
+                      <a:noFill/>
+                    </a:lnR>
+                    <a:lnT w="12700" cmpd="sng">
+                      <a:noFill/>
+                    </a:lnT>
+                    <a:lnB w="12700" cmpd="sng">
+                      <a:noFill/>
+                    </a:lnB>
+                    <a:lnTlToBr w="12700" cmpd="sng">
+                      <a:noFill/>
+                      <a:prstDash val="solid"/>
+                    </a:lnTlToBr>
+                    <a:lnBlToTr w="12700" cmpd="sng">
+                      <a:noFill/>
+                      <a:prstDash val="solid"/>
+                    </a:lnBlToTr>
+                    <a:noFill/>
+                  </a:tcPr>
+                </a:tc>
+                <a:tc>
+                  <a:txBody>
+                    <a:bodyPr/>
+                    <a:lstStyle/>
+                    <a:p>
+                      <a:pPr algn="r" rtl="0" fontAlgn="ctr">
+                        <a:buNone/>
+                      </a:pPr>
+                      <a:r>
+                        <a:rPr lang="en-US" sz="800" b="0" i="0" u="none" strike="noStrike" dirty="0">
+                          <a:solidFill>
+                            <a:srgbClr val="000000"/>
+                          </a:solidFill>
+                          <a:effectLst/>
+                          <a:latin typeface="Noto Sans" panose="020B0502040504020204" pitchFamily="34" charset="0"/>
+                        </a:rPr>
+                        <a:t>7,857</a:t>
+                      </a:r>
+                    </a:p>
+                  </a:txBody>
+                  <a:tcPr marL="0" marR="0" marT="0" marB="0" anchor="ctr">
+                    <a:lnL w="12700" cmpd="sng">
+                      <a:noFill/>
+                    </a:lnL>
+                    <a:lnR w="12700" cmpd="sng">
+                      <a:noFill/>
+                    </a:lnR>
+                    <a:lnT w="12700" cmpd="sng">
+                      <a:noFill/>
+                    </a:lnT>
+                    <a:lnB w="12700" cmpd="sng">
+                      <a:noFill/>
+                    </a:lnB>
+                    <a:lnTlToBr w="12700" cmpd="sng">
+                      <a:noFill/>
+                      <a:prstDash val="solid"/>
+                    </a:lnTlToBr>
+                    <a:lnBlToTr w="12700" cmpd="sng">
+                      <a:noFill/>
+                      <a:prstDash val="solid"/>
+                    </a:lnBlToTr>
+                    <a:noFill/>
+                  </a:tcPr>
+                </a:tc>
+                <a:tc>
+                  <a:txBody>
+                    <a:bodyPr/>
+                    <a:lstStyle/>
+                    <a:p>
+                      <a:pPr algn="r" rtl="0" fontAlgn="ctr">
+                        <a:buNone/>
+                      </a:pPr>
+                      <a:r>
+                        <a:rPr lang="en-US" sz="800" b="0" i="0" u="none" strike="noStrike" dirty="0">
+                          <a:solidFill>
+                            <a:srgbClr val="000000"/>
+                          </a:solidFill>
+                          <a:effectLst/>
+                          <a:latin typeface="Noto Sans" panose="020B0502040504020204" pitchFamily="34" charset="0"/>
+                        </a:rPr>
+                        <a:t>9,464</a:t>
+                      </a:r>
+                    </a:p>
+                  </a:txBody>
+                  <a:tcPr marL="0" marR="0" marT="0" marB="0" anchor="ctr">
+                    <a:lnL w="12700" cmpd="sng">
+                      <a:noFill/>
+                    </a:lnL>
+                    <a:lnR w="12700" cmpd="sng">
+                      <a:noFill/>
+                    </a:lnR>
+                    <a:lnT w="12700" cmpd="sng">
+                      <a:noFill/>
+                    </a:lnT>
+                    <a:lnB w="12700" cmpd="sng">
+                      <a:noFill/>
+                    </a:lnB>
+                    <a:lnTlToBr w="12700" cmpd="sng">
+                      <a:noFill/>
+                      <a:prstDash val="solid"/>
+                    </a:lnTlToBr>
+                    <a:lnBlToTr w="12700" cmpd="sng">
+                      <a:noFill/>
+                      <a:prstDash val="solid"/>
+                    </a:lnBlToTr>
+                    <a:noFill/>
+                  </a:tcPr>
+                </a:tc>
+                <a:tc>
+                  <a:txBody>
+                    <a:bodyPr/>
+                    <a:lstStyle/>
+                    <a:p>
+                      <a:pPr algn="r" rtl="0" fontAlgn="ctr">
+                        <a:buNone/>
+                      </a:pPr>
+                      <a:r>
+                        <a:rPr lang="en-US" sz="800" b="0" i="0" u="none" strike="noStrike" dirty="0">
+                          <a:solidFill>
+                            <a:srgbClr val="000000"/>
+                          </a:solidFill>
+                          <a:effectLst/>
+                          <a:latin typeface="Noto Sans" panose="020B0502040504020204" pitchFamily="34" charset="0"/>
+                        </a:rPr>
+                        <a:t>10,944</a:t>
+                      </a:r>
+                    </a:p>
+                  </a:txBody>
+                  <a:tcPr marL="0" marR="0" marT="0" marB="0" anchor="ctr">
+                    <a:lnL w="12700" cmpd="sng">
+                      <a:noFill/>
+                    </a:lnL>
+                    <a:lnR w="12700" cmpd="sng">
+                      <a:noFill/>
+                    </a:lnR>
+                    <a:lnT w="12700" cmpd="sng">
+                      <a:noFill/>
+                    </a:lnT>
+                    <a:lnB w="12700" cmpd="sng">
+                      <a:noFill/>
+                    </a:lnB>
+                    <a:lnTlToBr w="12700" cmpd="sng">
+                      <a:noFill/>
+                      <a:prstDash val="solid"/>
+                    </a:lnTlToBr>
+                    <a:lnBlToTr w="12700" cmpd="sng">
+                      <a:noFill/>
+                      <a:prstDash val="solid"/>
+                    </a:lnBlToTr>
+                    <a:solidFill>
+                      <a:schemeClr val="accent4">
+                        <a:lumMod val="20000"/>
+                        <a:lumOff val="80000"/>
+                      </a:schemeClr>
+                    </a:solidFill>
+                  </a:tcPr>
+                </a:tc>
+                <a:tc>
+                  <a:txBody>
+                    <a:bodyPr/>
+                    <a:lstStyle/>
+                    <a:p>
+                      <a:pPr algn="r" rtl="0" fontAlgn="ctr">
+                        <a:buNone/>
+                      </a:pPr>
+                      <a:r>
+                        <a:rPr lang="en-US" sz="800" b="0" i="0" u="none" strike="noStrike" dirty="0">
+                          <a:solidFill>
+                            <a:srgbClr val="000000"/>
+                          </a:solidFill>
+                          <a:effectLst/>
+                          <a:latin typeface="Noto Sans" panose="020B0502040504020204" pitchFamily="34" charset="0"/>
+                        </a:rPr>
                         <a:t>12,674</a:t>
                       </a:r>
                     </a:p>
@@ -40036,7 +41094,339 @@
                   </a:ext>
                 </a:extLst>
               </a:tr>
-              <a:tr h="173736">
+              <a:tr h="162000">
+                <a:tc>
+                  <a:txBody>
+                    <a:bodyPr/>
+                    <a:lstStyle/>
+                    <a:p>
+                      <a:pPr marL="0" marR="41910" algn="l" latinLnBrk="1" hangingPunct="0">
+                        <a:lnSpc>
+                          <a:spcPts val="950"/>
+                        </a:lnSpc>
+                        <a:spcBef>
+                          <a:spcPts val="0"/>
+                        </a:spcBef>
+                        <a:spcAft>
+                          <a:spcPts val="0"/>
+                        </a:spcAft>
+                      </a:pPr>
+                      <a:r>
+                        <a:rPr lang="en-US" sz="800" b="0" kern="1200" spc="-40" dirty="0">
+                          <a:solidFill>
+                            <a:srgbClr val="000000"/>
+                          </a:solidFill>
+                          <a:effectLst/>
+                          <a:latin typeface="+mj-lt"/>
+                          <a:ea typeface="Noto Sans" panose="020B0502040504020204" pitchFamily="34" charset="0"/>
+                          <a:cs typeface="Noto Sans" panose="020B0502040504020204" pitchFamily="34" charset="0"/>
+                        </a:rPr>
+                        <a:t>   % YoY</a:t>
+                      </a:r>
+                    </a:p>
+                  </a:txBody>
+                  <a:tcPr marL="0" marR="0" marT="0" marB="0" anchor="ctr">
+                    <a:lnL w="12700" cmpd="sng">
+                      <a:noFill/>
+                    </a:lnL>
+                    <a:lnR w="12700" cmpd="sng">
+                      <a:noFill/>
+                    </a:lnR>
+                    <a:lnT w="12700" cmpd="sng">
+                      <a:noFill/>
+                    </a:lnT>
+                    <a:lnB w="12700" cmpd="sng">
+                      <a:noFill/>
+                    </a:lnB>
+                    <a:lnTlToBr w="12700" cmpd="sng">
+                      <a:noFill/>
+                      <a:prstDash val="solid"/>
+                    </a:lnTlToBr>
+                    <a:lnBlToTr w="12700" cmpd="sng">
+                      <a:noFill/>
+                      <a:prstDash val="solid"/>
+                    </a:lnBlToTr>
+                    <a:noFill/>
+                  </a:tcPr>
+                </a:tc>
+                <a:tc>
+                  <a:txBody>
+                    <a:bodyPr/>
+                    <a:lstStyle/>
+                    <a:p>
+                      <a:pPr algn="r" rtl="0" fontAlgn="ctr">
+                        <a:buNone/>
+                      </a:pPr>
+                      <a:r>
+                        <a:rPr lang="en-US" sz="800" b="0" i="0" u="none" strike="noStrike" dirty="0">
+                          <a:solidFill>
+                            <a:srgbClr val="000000"/>
+                          </a:solidFill>
+                          <a:effectLst/>
+                          <a:latin typeface="Noto Sans" panose="020B0502040504020204" pitchFamily="34" charset="0"/>
+                        </a:rPr>
+                        <a:t>—</a:t>
+                      </a:r>
+                    </a:p>
+                  </a:txBody>
+                  <a:tcPr marL="0" marR="0" marT="0" marB="0" anchor="ctr">
+                    <a:lnL w="12700" cmpd="sng">
+                      <a:noFill/>
+                    </a:lnL>
+                    <a:lnR w="12700" cmpd="sng">
+                      <a:noFill/>
+                    </a:lnR>
+                    <a:lnT w="12700" cmpd="sng">
+                      <a:noFill/>
+                    </a:lnT>
+                    <a:lnB w="12700" cmpd="sng">
+                      <a:noFill/>
+                    </a:lnB>
+                    <a:lnTlToBr w="12700" cmpd="sng">
+                      <a:noFill/>
+                      <a:prstDash val="solid"/>
+                    </a:lnTlToBr>
+                    <a:lnBlToTr w="12700" cmpd="sng">
+                      <a:noFill/>
+                      <a:prstDash val="solid"/>
+                    </a:lnBlToTr>
+                    <a:noFill/>
+                  </a:tcPr>
+                </a:tc>
+                <a:tc>
+                  <a:txBody>
+                    <a:bodyPr/>
+                    <a:lstStyle/>
+                    <a:p>
+                      <a:pPr algn="r" rtl="0" fontAlgn="ctr">
+                        <a:buNone/>
+                      </a:pPr>
+                      <a:r>
+                        <a:rPr lang="en-US" sz="800" b="0" i="0" u="none" strike="noStrike" dirty="0">
+                          <a:solidFill>
+                            <a:srgbClr val="000000"/>
+                          </a:solidFill>
+                          <a:effectLst/>
+                          <a:latin typeface="Noto Sans" panose="020B0502040504020204" pitchFamily="34" charset="0"/>
+                        </a:rPr>
+                        <a:t>+21.5%</a:t>
+                      </a:r>
+                    </a:p>
+                  </a:txBody>
+                  <a:tcPr marL="0" marR="0" marT="0" marB="0" anchor="ctr">
+                    <a:lnL w="12700" cmpd="sng">
+                      <a:noFill/>
+                    </a:lnL>
+                    <a:lnR w="12700" cmpd="sng">
+                      <a:noFill/>
+                    </a:lnR>
+                    <a:lnT w="12700" cmpd="sng">
+                      <a:noFill/>
+                    </a:lnT>
+                    <a:lnB w="12700" cmpd="sng">
+                      <a:noFill/>
+                    </a:lnB>
+                    <a:lnTlToBr w="12700" cmpd="sng">
+                      <a:noFill/>
+                      <a:prstDash val="solid"/>
+                    </a:lnTlToBr>
+                    <a:lnBlToTr w="12700" cmpd="sng">
+                      <a:noFill/>
+                      <a:prstDash val="solid"/>
+                    </a:lnBlToTr>
+                    <a:noFill/>
+                  </a:tcPr>
+                </a:tc>
+                <a:tc>
+                  <a:txBody>
+                    <a:bodyPr/>
+                    <a:lstStyle/>
+                    <a:p>
+                      <a:pPr algn="r" rtl="0" fontAlgn="ctr">
+                        <a:buNone/>
+                      </a:pPr>
+                      <a:r>
+                        <a:rPr lang="en-US" sz="800" b="0" i="0" u="none" strike="noStrike" dirty="0">
+                          <a:solidFill>
+                            <a:srgbClr val="000000"/>
+                          </a:solidFill>
+                          <a:effectLst/>
+                          <a:latin typeface="Noto Sans" panose="020B0502040504020204" pitchFamily="34" charset="0"/>
+                        </a:rPr>
+                        <a:t>+20.5%</a:t>
+                      </a:r>
+                    </a:p>
+                  </a:txBody>
+                  <a:tcPr marL="0" marR="0" marT="0" marB="0" anchor="ctr">
+                    <a:lnL w="12700" cmpd="sng">
+                      <a:noFill/>
+                    </a:lnL>
+                    <a:lnR w="12700" cmpd="sng">
+                      <a:noFill/>
+                    </a:lnR>
+                    <a:lnT w="12700" cmpd="sng">
+                      <a:noFill/>
+                    </a:lnT>
+                    <a:lnB w="12700" cmpd="sng">
+                      <a:noFill/>
+                    </a:lnB>
+                    <a:lnTlToBr w="12700" cmpd="sng">
+                      <a:noFill/>
+                      <a:prstDash val="solid"/>
+                    </a:lnTlToBr>
+                    <a:lnBlToTr w="12700" cmpd="sng">
+                      <a:noFill/>
+                      <a:prstDash val="solid"/>
+                    </a:lnBlToTr>
+                    <a:noFill/>
+                  </a:tcPr>
+                </a:tc>
+                <a:tc>
+                  <a:txBody>
+                    <a:bodyPr/>
+                    <a:lstStyle/>
+                    <a:p>
+                      <a:pPr algn="r" rtl="0" fontAlgn="ctr">
+                        <a:buNone/>
+                      </a:pPr>
+                      <a:r>
+                        <a:rPr lang="en-US" sz="800" b="0" i="0" u="none" strike="noStrike" dirty="0">
+                          <a:solidFill>
+                            <a:srgbClr val="000000"/>
+                          </a:solidFill>
+                          <a:effectLst/>
+                          <a:latin typeface="Noto Sans" panose="020B0502040504020204" pitchFamily="34" charset="0"/>
+                        </a:rPr>
+                        <a:t>+15.6%</a:t>
+                      </a:r>
+                    </a:p>
+                  </a:txBody>
+                  <a:tcPr marL="0" marR="0" marT="0" marB="0" anchor="ctr">
+                    <a:lnL w="12700" cmpd="sng">
+                      <a:noFill/>
+                    </a:lnL>
+                    <a:lnR w="12700" cmpd="sng">
+                      <a:noFill/>
+                    </a:lnR>
+                    <a:lnT w="12700" cmpd="sng">
+                      <a:noFill/>
+                    </a:lnT>
+                    <a:lnB w="12700" cmpd="sng">
+                      <a:noFill/>
+                    </a:lnB>
+                    <a:lnTlToBr w="12700" cmpd="sng">
+                      <a:noFill/>
+                      <a:prstDash val="solid"/>
+                    </a:lnTlToBr>
+                    <a:lnBlToTr w="12700" cmpd="sng">
+                      <a:noFill/>
+                      <a:prstDash val="solid"/>
+                    </a:lnBlToTr>
+                    <a:solidFill>
+                      <a:schemeClr val="accent4">
+                        <a:lumMod val="20000"/>
+                        <a:lumOff val="80000"/>
+                      </a:schemeClr>
+                    </a:solidFill>
+                  </a:tcPr>
+                </a:tc>
+                <a:tc>
+                  <a:txBody>
+                    <a:bodyPr/>
+                    <a:lstStyle/>
+                    <a:p>
+                      <a:pPr algn="r" rtl="0" fontAlgn="ctr">
+                        <a:buNone/>
+                      </a:pPr>
+                      <a:r>
+                        <a:rPr lang="en-US" sz="800" b="0" i="0" u="none" strike="noStrike" dirty="0">
+                          <a:solidFill>
+                            <a:srgbClr val="000000"/>
+                          </a:solidFill>
+                          <a:effectLst/>
+                          <a:latin typeface="Noto Sans" panose="020B0502040504020204" pitchFamily="34" charset="0"/>
+                        </a:rPr>
+                        <a:t>+15.8%</a:t>
+                      </a:r>
+                    </a:p>
+                  </a:txBody>
+                  <a:tcPr marL="0" marR="0" marT="0" marB="0" anchor="ctr">
+                    <a:lnL w="12700" cmpd="sng">
+                      <a:noFill/>
+                    </a:lnL>
+                    <a:lnR w="12700" cmpd="sng">
+                      <a:noFill/>
+                    </a:lnR>
+                    <a:lnT w="12700" cmpd="sng">
+                      <a:noFill/>
+                    </a:lnT>
+                    <a:lnB w="12700" cmpd="sng">
+                      <a:noFill/>
+                    </a:lnB>
+                    <a:lnTlToBr w="12700" cmpd="sng">
+                      <a:noFill/>
+                      <a:prstDash val="solid"/>
+                    </a:lnTlToBr>
+                    <a:lnBlToTr w="12700" cmpd="sng">
+                      <a:noFill/>
+                      <a:prstDash val="solid"/>
+                    </a:lnBlToTr>
+                    <a:solidFill>
+                      <a:schemeClr val="bg1"/>
+                    </a:solidFill>
+                  </a:tcPr>
+                </a:tc>
+                <a:tc>
+                  <a:txBody>
+                    <a:bodyPr/>
+                    <a:lstStyle/>
+                    <a:p>
+                      <a:pPr algn="r" rtl="0" fontAlgn="ctr">
+                        <a:buNone/>
+                      </a:pPr>
+                      <a:r>
+                        <a:rPr lang="en-US" sz="800" b="0" i="0" u="none" strike="noStrike" dirty="0">
+                          <a:solidFill>
+                            <a:srgbClr val="000000"/>
+                          </a:solidFill>
+                          <a:effectLst/>
+                          <a:latin typeface="Noto Sans" panose="020B0502040504020204" pitchFamily="34" charset="0"/>
+                        </a:rPr>
+                        <a:t>+16.6%</a:t>
+                      </a:r>
+                    </a:p>
+                  </a:txBody>
+                  <a:tcPr marL="0" marR="0" marT="0" marB="0" anchor="ctr">
+                    <a:lnL w="12700" cmpd="sng">
+                      <a:noFill/>
+                    </a:lnL>
+                    <a:lnR w="12700" cmpd="sng">
+                      <a:noFill/>
+                    </a:lnR>
+                    <a:lnT w="12700" cmpd="sng">
+                      <a:noFill/>
+                    </a:lnT>
+                    <a:lnB w="12700" cmpd="sng">
+                      <a:noFill/>
+                    </a:lnB>
+                    <a:lnTlToBr w="12700" cmpd="sng">
+                      <a:noFill/>
+                      <a:prstDash val="solid"/>
+                    </a:lnTlToBr>
+                    <a:lnBlToTr w="12700" cmpd="sng">
+                      <a:noFill/>
+                      <a:prstDash val="solid"/>
+                    </a:lnBlToTr>
+                    <a:noFill/>
+                  </a:tcPr>
+                </a:tc>
+                <a:extLst>
+                  <a:ext uri="{0D108BD9-81ED-4DB2-BD59-A6C34878D82A}">
+                    <a16:rowId xmlns:a16="http://schemas.microsoft.com/office/drawing/2014/main" val="3039360553"/>
+                  </a:ext>
+                </a:extLst>
+              </a:tr>
+              <a:tr h="162000">
                 <a:tc>
                   <a:txBody>
                     <a:bodyPr/>
@@ -40368,7 +41758,7 @@
                   </a:ext>
                 </a:extLst>
               </a:tr>
-              <a:tr h="173736">
+              <a:tr h="162000">
                 <a:tc>
                   <a:txBody>
                     <a:bodyPr/>
@@ -40700,7 +42090,7 @@
                   </a:ext>
                 </a:extLst>
               </a:tr>
-              <a:tr h="173736">
+              <a:tr h="162000">
                 <a:tc>
                   <a:txBody>
                     <a:bodyPr/>
@@ -41032,7 +42422,7 @@
                   </a:ext>
                 </a:extLst>
               </a:tr>
-              <a:tr h="173736">
+              <a:tr h="162000">
                 <a:tc>
                   <a:txBody>
                     <a:bodyPr/>
@@ -41364,7 +42754,7 @@
                   </a:ext>
                 </a:extLst>
               </a:tr>
-              <a:tr h="173736">
+              <a:tr h="162000">
                 <a:tc>
                   <a:txBody>
                     <a:bodyPr/>
@@ -41733,7 +43123,7 @@
                   </a:ext>
                 </a:extLst>
               </a:tr>
-              <a:tr h="173736">
+              <a:tr h="162000">
                 <a:tc>
                   <a:txBody>
                     <a:bodyPr/>
@@ -42102,7 +43492,7 @@
                   </a:ext>
                 </a:extLst>
               </a:tr>
-              <a:tr h="173736">
+              <a:tr h="162000">
                 <a:tc>
                   <a:txBody>
                     <a:bodyPr/>
@@ -42462,7 +43852,7 @@
                   </a:ext>
                 </a:extLst>
               </a:tr>
-              <a:tr h="173736">
+              <a:tr h="162000">
                 <a:tc gridSpan="7">
                   <a:txBody>
                     <a:bodyPr/>
@@ -42495,7 +43885,7 @@
                           <a:ea typeface="Noto Sans" panose="020B0502040504020204" pitchFamily="34" charset="0"/>
                           <a:cs typeface="Arial" panose="020B0604020202020204" pitchFamily="34" charset="0"/>
                         </a:rPr>
-                        <a:t>Ghi chú: FPT Telecom hợp nhất theo phương pháp VCSH từ FY26F. Nguồn: Dữ liệu công ty, Mirae Asset Vietnam Research</a:t>
+                        <a:t>Ghi chú: FPT Telecom hợp nhất theo phương pháp VCSH từ FY26F, hợp nhất toàn bộ giai đoạn FY23-25. * so với doanh thu FY25 tính lại 50,607 tỷ đồng, mức tăng là +13.2%; LNST-CĐTS không đổi khi chuyển phương pháp. Nguồn: Dữ liệu công ty, Mirae Asset Vietnam Research</a:t>
                       </a:r>
                     </a:p>
                   </a:txBody>

--- a/MASVN_RS_WM_2H26_outlook_Equity_VN_2026_STBFPT_31July2026.pptx
+++ b/MASVN_RS_WM_2H26_outlook_Equity_VN_2026_STBFPT_31July2026.pptx
@@ -29788,7 +29788,7 @@
                 <a:ea typeface="Noto Sans" panose="020B0502040504020204" pitchFamily="34" charset="0"/>
                 <a:cs typeface="Noto Sans" panose="020B0502040504020204" pitchFamily="34" charset="0"/>
               </a:rPr>
-              <a:t>The de-rating reflects the AI debate: demand expansion versus compression of headcount-based pricing. Infosys guides FY27 to 1.5-3.0%; FPT’s Global IT grew 13.4%.</a:t>
+              <a:t>The AI debate — demand expansion versus compression of headcount-based pricing — is answered in FPT's own numbers. AI and data analytics revenue reached VND1,842bn in 1H26, +54% YoY against +15% for Technology, lifting its share of the segment to 8.0% from 5.9% and contributing a fifth of Technology's growth; ex-AI the segment grew 12.5%. Both AI Factories, in Vietnam and Japan, ran above 90% utilisation and turned profitable in 2Q26, about a year after launch. Infosys, for contrast, guides FY27 to 1.5-3.0%.</a:t>
             </a:r>
             <a:r>
               <a:rPr kumimoji="1" lang="en-US" altLang="ko-KR" sz="800" dirty="0">
@@ -29825,7 +29825,7 @@
                 <a:ea typeface="Noto Sans" panose="020B0502040504020204" pitchFamily="34" charset="0"/>
                 <a:cs typeface="Noto Sans" panose="020B0502040504020204" pitchFamily="34" charset="0"/>
               </a:rPr>
-              <a:t>Projection and valuation: we forecast FY26F NPATMI of VND10,944bn (+15.6% YoY), FY27F VND12,674bn (+15.8%) and FY28F VND14,774bn (+16.6%). Associate income — FPT Telecom (45.66%), equity-accounted from FY26, with FPT Retail, Synnex FPT and FPT Online — rises to VND2,608bn in FY26F and VND3,449bn by FY28F, and grew 40.8% YoY in 1H26. Operating leverage carries the rest: SG&amp;A falls from 17.6% of sales to 16.5% by FY28F, gross margin unchanged. ROE holds near 27% on net cash of around 60% of equity and a maintained DPS of VND2,000. We raise our DCF (FCFF) target price to VND87,950 from VND78,750, cutting the assumed cost of debt to 9.0% from 11.5% — FPT's realised funding cost in 1H26 was 4.0% — which lowers WACC to 11.4%; the equity risk premium stays at 8.97% and long-term growth at 1.5% to carry the risk that AI lowers IT services pricing. At VND71,700 the stock trades at 11.2x FY26F earnings against a five-year median above 18x; at the target price, 13.7x FY26F and 11.8x FY27F, implying 23% upside (BUY). AI newsflow remains supportive: an expanded Microsoft partnership across ASEAN, Japan and Korea, and data-intermediary certification with the National Data Centre. Risks: (1) AI-driven price deflation outpacing our long-term growth assumption (2) subdued US and global IT spending and tariff-related contract delays (3) JPY/USD volatility.</a:t>
+              <a:t>Projection and valuation: we forecast FY26F NPATMI of VND10,944bn (+15.6% YoY), FY27F VND12,674bn (+15.8%) and FY28F VND14,774bn (+16.6%). Associate income — FPT Telecom (45.66%), equity-accounted from FY26, with FPT Retail, Synnex FPT and FPT Online — rises to VND2,608bn in FY26F and VND3,449bn by FY28F, and grew 40.8% YoY in 1H26. Operating leverage carries the rest: SG&amp;A falls from 17.6% of sales to 16.5% by FY28F, gross margin unchanged. ROE holds near 27% on net cash of around 60% of equity and a maintained DPS of VND2,000. We raise our DCF (FCFF) target price to VND87,950 from VND78,750, cutting the assumed cost of debt to 9.0% from 11.5% — FPT's realised funding cost in 1H26 was 4.0% — which lowers WACC to 11.4%; the equity risk premium stays at 8.97% and long-term growth at 1.5% to carry the risk that AI lowers IT services pricing. At VND71,700 the stock trades at 11.2x FY26F earnings against a five-year median above 18x; at the target price, 13.7x FY26F and 11.8x FY27F, implying 23% upside (BUY). AI newsflow remains supportive: expanded partnerships with Microsoft and Intel, AI programmes with CPF, SCG, UOB, Sembcorp, SATS and ComfortDelGro, and data-intermediary certification with the National Data Centre. Risks: (1) AI-driven price deflation outpacing our long-term growth assumption (2) subdued US and global IT spending and tariff-related contract delays (3) JPY/USD volatility.</a:t>
             </a:r>
             <a:r>
               <a:rPr kumimoji="1" lang="en-US" altLang="ko-KR" sz="800" dirty="0">
@@ -38806,7 +38806,7 @@
                 <a:ea typeface="Noto Sans" panose="020B0502040504020204" pitchFamily="34" charset="0"/>
                 <a:cs typeface="Noto Sans" panose="020B0502040504020204" pitchFamily="34" charset="0"/>
               </a:rPr>
-              <a:t>Số hóa khu vực công là nền tảng danh mục trong nước: CNTT trong nước tăng nhanh nhất 6T26, đạt 4,236 tỷ đồng (+22.5% CK), LNTT mảng tăng gấp đôi lên 308 tỷ nhờ trúng thầu chuyển đổi số quốc gia — nguồn việc nhiều năm, ngoài chu kỳ CNTT toàn cầu, tuy biên 7.3% làm loãng biên chung. Doanh thu ký mới CNTT nước ngoài đạt 26,338 tỷ trong 1H26 (+32.3% CK), gồm 14 dự án trên 10 triệu USD — tỷ lệ ký mới/doanh thu 1.39 lần so với 1.07-1.22 lần FY21-25. Trên cơ sở đó, dự phóng CNTT nước ngoài tăng lên +16.7% FY27F và +17.7% FY28F, từ +14.7% FY26F và +13.4% của 1H26; Mỹ hạ về +5.9%.</a:t>
+              <a:t>Số hóa khu vực công là nền tảng danh mục trong nước: CNTT trong nước tăng nhanh nhất 6T26, đạt 4,236 tỷ đồng (+22.5% CK), LNTT mảng tăng gấp đôi lên 308 tỷ nhờ trúng thầu chuyển đổi số quốc gia — nguồn việc nhiều năm, ngoài chu kỳ CNTT toàn cầu, tuy biên 7.3% làm loãng biên. Doanh thu ký mới CNTT nước ngoài đạt 26,338 tỷ trong 1H26 (+32.3% CK), gồm 14 dự án trên 10 triệu USD — tỷ lệ ký mới/doanh thu 1.39 lần so với 1.07-1.22 lần FY21-25. Trên cơ sở đó, dự phóng CNTT nước ngoài tăng lên +16.7% FY27F và +17.7% FY28F, từ +14.7% FY26F và +13.4% của 1H26; Mỹ hạ về +5.9%.</a:t>
             </a:r>
             <a:r>
               <a:rPr kumimoji="1" lang="vi-VN" altLang="ko-KR" sz="800" b="0" dirty="0">
@@ -38843,7 +38843,7 @@
                 <a:ea typeface="Noto Sans" panose="020B0502040504020204" pitchFamily="34" charset="0"/>
                 <a:cs typeface="Noto Sans" panose="020B0502040504020204" pitchFamily="34" charset="0"/>
               </a:rPr>
-              <a:t>Mức chiết khấu phản ánh tranh luận về AI: mở rộng nhu cầu hay thu hẹp mô hình định giá theo nhân sự. Infosys dự báo FY27 chỉ 1.5-3.0%; CNTT nước ngoài của FPT tăng 13.4%.</a:t>
+              <a:t>Tranh luận về AI — mở rộng nhu cầu hay thu hẹp định giá theo nhân sự — được trả lời bằng số liệu của chính FPT: doanh thu Dịch vụ AI &amp; Data Analytics đạt 1,842 tỷ đồng trong 1H26, tăng 54% CK so với +15% của mảng Công nghệ, nâng tỷ trọng lên 8.0% từ 5.9% và đóng góp một phần năm mức tăng của mảng; loại AI, Công nghệ chỉ tăng 12.5%. Hai cụm AI Factory tại Việt Nam và Nhật Bản đạt hiệu suất trên 90% và có lãi từ Q2/2026. Infosys dự báo FY27 chỉ 1.5-3.0%.</a:t>
             </a:r>
             <a:r>
               <a:rPr kumimoji="1" lang="vi-VN" altLang="ko-KR" sz="800" b="0" dirty="0">
@@ -38885,7 +38885,7 @@
                 <a:ea typeface="Noto Sans" panose="020B0502040504020204" pitchFamily="34" charset="0"/>
                 <a:cs typeface="Noto Sans" panose="020B0502040504020204" pitchFamily="34" charset="0"/>
               </a:rPr>
-              <a:t>Dự phóng và định giá: LNST-CĐTS FY26F đạt 10,944 tỷ đồng (+15.6% CK), FY27F 12,674 tỷ (+15.8%) và FY28F 14,774 tỷ (+16.6%). Lợi nhuận công ty liên kết — FPT Telecom (45.66%, theo phương pháp VCSH từ FY26), FPT Retail, Synnex FPT và FPT Online — tăng lên 2,608 tỷ FY26F và 3,449 tỷ FY28F, đã tăng 40.8% CK trong 1H26. Đòn bẩy hoạt động: chi phí bán hàng và quản lý giảm từ 17.6% doanh thu xuống 16.5% vào FY28F, biên gộp giữ nguyên. ROE quanh 27% nhờ tiền ròng khoảng 60% VCSH và cổ tức 2,000 đồng/cp. Nâng giá mục tiêu DCF (FCFF) lên 87,950 đồng từ 78,750 đồng, hạ chi phí nợ vay về 9.0% từ 11.5% (thực tế 1H26: 4.0%), đưa WACC xuống 11.4%; phần bù rủi ro vốn cổ phần giữ 8.97% và tăng trưởng dài hạn 1.5%, phản ánh rủi ro AI làm giảm giá dịch vụ CNTT. Tại 71,700 đồng, cổ phiếu ở 11.2x P/E FY26F so với trung vị 5 năm trên 18x; tại giá mục tiêu là 13.7x FY26F và 11.8x FY27F, tiềm năng tăng 23% (MUA). Thông tin AI vẫn tích cực: mở rộng hợp tác với Microsoft tại ASEAN, Nhật Bản, Hàn Quốc và chứng nhận trung gian dữ liệu quốc gia. Rủi ro: (1) giảm phát giá do AI nhanh hơn giả định tăng trưởng dài hạn (2) chi tiêu CNTT tại Mỹ và toàn cầu thấp, hợp đồng trì hoãn do thuế quan (3) biến động tỷ giá JPY/USD.</a:t>
+              <a:t>Dự phóng và định giá: LNST-CĐTS FY26F đạt 10,944 tỷ đồng (+15.6% CK), FY27F 12,674 tỷ (+15.8%) và FY28F 14,774 tỷ (+16.6%). Lợi nhuận công ty liên kết — FPT Telecom (45.66%, phương pháp VCSH từ FY26), FPT Retail, Synnex FPT, FPT Online — lên 2,608 tỷ FY26F và 3,449 tỷ FY28F, đã tăng 40.8% CK trong 1H26. Đòn bẩy hoạt động: chi phí bán hàng và quản lý giảm từ 17.6% doanh thu xuống 16.5% vào FY28F, biên gộp giữ nguyên. ROE quanh 27% nhờ tiền ròng khoảng 60% VCSH và cổ tức 2,000 đồng/cp. Nâng giá mục tiêu DCF (FCFF) lên 87,950 đồng từ 78,750 đồng, hạ chi phí nợ vay về 9.0% từ 11.5% (thực tế 1H26: 4.0%), đưa WACC xuống 11.4%; phần bù rủi ro vốn cổ phần giữ 8.97% và tăng trưởng dài hạn 1.5%, phản ánh rủi ro AI làm giảm giá dịch vụ CNTT. Tại 71,700 đồng, cổ phiếu ở 11.2x P/E FY26F so với trung vị 5 năm trên 18x; tại giá mục tiêu là 13.7x FY26F và 11.8x FY27F, tiềm năng tăng 23% (MUA). Thông tin AI vẫn tích cực: mở rộng hợp tác với Microsoft tại ASEAN, Nhật Bản, Hàn Quốc và Intel, cùng các tập đoàn CPF, SCG, UOB, Sembcorp, SATS, ComfortDelGro. Rủi ro: (1) giảm phát giá do AI nhanh hơn giả định tăng trưởng dài hạn (2) chi tiêu CNTT tại Mỹ và toàn cầu thấp, hợp đồng trì hoãn do thuế quan (3) biến động tỷ giá JPY/USD.</a:t>
             </a:r>
             <a:r>
               <a:rPr kumimoji="1" lang="vi-VN" altLang="ko-KR" sz="800" b="0" dirty="0">

--- a/MASVN_RS_WM_2H26_outlook_Equity_VN_2026_STBFPT_31July2026.pptx
+++ b/MASVN_RS_WM_2H26_outlook_Equity_VN_2026_STBFPT_31July2026.pptx
@@ -10211,7 +10211,7 @@
                           <a:ea typeface="Noto Sans" panose="020B0502040504020204" pitchFamily="34" charset="0"/>
                           <a:cs typeface="Noto Sans" panose="020B0502040504020204" pitchFamily="34" charset="0"/>
                         </a:rPr>
-                        <a:t>6,583</a:t>
+                        <a:t>6,177</a:t>
                       </a:r>
                     </a:p>
                   </a:txBody>
@@ -10376,7 +10376,7 @@
                           <a:ea typeface="Noto Sans" panose="020B0502040504020204" pitchFamily="34" charset="0"/>
                           <a:cs typeface="Noto Sans" panose="020B0502040504020204" pitchFamily="34" charset="0"/>
                         </a:rPr>
-                        <a:t>10.8</a:t>
+                        <a:t>4.0</a:t>
                       </a:r>
                     </a:p>
                   </a:txBody>
@@ -10472,7 +10472,7 @@
                           <a:ea typeface="Noto Sans" panose="020B0502040504020204" pitchFamily="34" charset="0"/>
                           <a:cs typeface="Noto Sans" panose="020B0502040504020204" pitchFamily="34" charset="0"/>
                         </a:rPr>
-                        <a:t>24.3</a:t>
+                        <a:t>26.0</a:t>
                       </a:r>
                     </a:p>
                   </a:txBody>
@@ -11861,7 +11861,7 @@
                 <a:ea typeface="Noto Sans" panose="020B0502040504020204" pitchFamily="34" charset="0"/>
                 <a:cs typeface="Noto Sans" panose="020B0502040504020204" pitchFamily="34" charset="0"/>
               </a:rPr>
-              <a:t>The NPL ratio reached 7.54% at end-2Q26, up 1.13%p from the beginning of the year and the highest in the system, against management guidance of approximately 5.6%. Group 3-5 balances increased by approximately VND7,800bn year-to-date and VND6,500bn quarter-on-quarter to VND47,957bn, of which around 67% (approximately VND32,000bn) is classified as Group 5, while Group 4 more than doubled (+156%). Our FY26F assumption of an NPL ratio below 4.5% is no longer attainable without a substantial acceleration in write-offs, FY26F provisioning of VND10.4tn (-8.9% YoY) is close to the 1H26 run-rate; the weaker assumption is FY27F, which implies a credit cost of roughly 0.8% while the NPL ratio is still above 7%. Both are under review, together with the HOLD rating and the VND77,800 target price (2.4x FY26F P/B).</a:t>
+              <a:t>The NPL ratio reached 7.54% at end-2Q26, up 1.13%p from the beginning of the year and the highest in the system, against management guidance of approximately 5.6%. Group 3-5 balances rose approximately VND7,800bn year-to-date to VND47,957bn, of which around 67% (approximately VND32,000bn) is Group 5, while Group 4 more than doubled (+156%). We move our FY26F NPL assumption to 5.9% from below 4.5%, and FY27F to 4.0% from 3.1%. The revision costs nothing at the P&amp;L: existing reserves of about VND21.6tn plus the unchanged FY26F provisioning charge of VND10.9tn fund write-offs of roughly VND8.9tn in 2H26 — 28% of the Group 5 balance — which is what takes 7.54% to 5.9% while holding coverage at 45%. The former 4.5% assumption required some VND18tn of write-offs the reserve stock cannot support.</a:t>
             </a:r>
           </a:p>
           <a:p>
@@ -11915,7 +11915,7 @@
                 <a:ea typeface="Noto Sans" panose="020B0502040504020204" pitchFamily="34" charset="0"/>
                 <a:cs typeface="Noto Sans" panose="020B0502040504020204" pitchFamily="34" charset="0"/>
               </a:rPr>
-              <a:t>STB recorded VND7,331bn of PBT in 1H25 but only VND297bn in 2H25, as 4Q25 registered a pre-tax loss of approximately VND3,360bn on a provisioning charge of around VND9,232bn. Our FY26F PBT forecast of VND8,455bn (+10.8% YoY) therefore requires 2H26 PBT of approximately VND4,319bn — around 14x the 2H25 base, but only 4% above the 1H26 level. Other FY26F assumptions are unchanged: NII of VND27,010bn (+1.2% YoY) on 11.7% loan growth, NIM of 2.94% (-38bps YoY), CIR of 42.7% (+2.0%p YoY) and NOI of VND1,327bn (+5% YoY). Separately, STB has taken possession of 507 land-use right certificates at LDG’s Viva City project in Dong Nai against overdue principal of nearly VND350bn and more than VND82bn of accrued overdue interest; the exposure is immaterial to the overall portfolio but illustrates the collateral-resolution channel on which the 2H26 recovery depends.</a:t>
+              <a:t>STB recorded VND7,331bn of PBT in 1H25 but only VND297bn in 2H25, as 4Q25 registered a pre-tax loss of approximately VND3,360bn on a provisioning charge of around VND9,232bn. Our FY26F PBT forecast of VND7,934bn (+4.0% YoY) requires 2H26 PBT of approximately VND3,798bn — around 13x the 2H25 base, and 8% below the 1H26 level. Other FY26F assumptions: NII of VND27,010bn (+1.2% YoY), NIM of 2.94% (-38bps YoY) and CIR of 42.7% (+2.0%p YoY); we flag that 1H26 loan growth of 1.5% sits well below the 11.7% carried for the full year. Separately, STB has taken possession of 507 land-use right certificates at LDG's Viva City project in Dong Nai against overdue principal of nearly VND350bn; the exposure is immaterial to the portfolio but illustrates the collateral-resolution channel the 2H26 write-off programme depends on.</a:t>
             </a:r>
           </a:p>
           <a:p>
@@ -12771,7 +12771,7 @@
                           <a:effectLst/>
                           <a:latin typeface="Noto Sans" panose="020B0502040504020204" pitchFamily="34" charset="0"/>
                         </a:rPr>
-                        <a:t>30,212</a:t>
+                        <a:t>30,200</a:t>
                       </a:r>
                     </a:p>
                   </a:txBody>
@@ -12818,7 +12818,7 @@
                           <a:effectLst/>
                           <a:latin typeface="Noto Sans" panose="020B0502040504020204" pitchFamily="34" charset="0"/>
                         </a:rPr>
-                        <a:t>35,478</a:t>
+                        <a:t>34,640</a:t>
                       </a:r>
                     </a:p>
                   </a:txBody>
@@ -13095,7 +13095,7 @@
                           <a:effectLst/>
                           <a:latin typeface="Noto Sans" panose="020B0502040504020204" pitchFamily="34" charset="0"/>
                         </a:rPr>
-                        <a:t>6,344</a:t>
+                        <a:t>6,408</a:t>
                       </a:r>
                     </a:p>
                   </a:txBody>
@@ -13138,7 +13138,7 @@
                           <a:effectLst/>
                           <a:latin typeface="Noto Sans" panose="020B0502040504020204" pitchFamily="34" charset="0"/>
                         </a:rPr>
-                        <a:t>7,039</a:t>
+                        <a:t>8,038</a:t>
                       </a:r>
                     </a:p>
                   </a:txBody>
@@ -13365,7 +13365,7 @@
                           <a:effectLst/>
                           <a:latin typeface="Noto Sans" panose="020B0502040504020204" pitchFamily="34" charset="0"/>
                         </a:rPr>
-                        <a:t>8,455</a:t>
+                        <a:t>7,934</a:t>
                       </a:r>
                     </a:p>
                   </a:txBody>
@@ -13411,7 +13411,7 @@
                           <a:effectLst/>
                           <a:latin typeface="Noto Sans" panose="020B0502040504020204" pitchFamily="34" charset="0"/>
                         </a:rPr>
-                        <a:t>15,811</a:t>
+                        <a:t>12,700</a:t>
                       </a:r>
                     </a:p>
                   </a:txBody>
@@ -13454,7 +13454,7 @@
                           <a:effectLst/>
                           <a:latin typeface="Noto Sans" panose="020B0502040504020204" pitchFamily="34" charset="0"/>
                         </a:rPr>
-                        <a:t>19,437</a:t>
+                        <a:t>19,600</a:t>
                       </a:r>
                     </a:p>
                   </a:txBody>
@@ -13681,7 +13681,7 @@
                           <a:effectLst/>
                           <a:latin typeface="Noto Sans" panose="020B0502040504020204" pitchFamily="34" charset="0"/>
                         </a:rPr>
-                        <a:t>6,583</a:t>
+                        <a:t>6,177</a:t>
                       </a:r>
                     </a:p>
                   </a:txBody>
@@ -13727,7 +13727,7 @@
                           <a:effectLst/>
                           <a:latin typeface="Noto Sans" panose="020B0502040504020204" pitchFamily="34" charset="0"/>
                         </a:rPr>
-                        <a:t>12,311</a:t>
+                        <a:t>9,890</a:t>
                       </a:r>
                     </a:p>
                   </a:txBody>
@@ -13770,7 +13770,7 @@
                           <a:effectLst/>
                           <a:latin typeface="Noto Sans" panose="020B0502040504020204" pitchFamily="34" charset="0"/>
                         </a:rPr>
-                        <a:t>15,134</a:t>
+                        <a:t>15,260</a:t>
                       </a:r>
                     </a:p>
                   </a:txBody>
@@ -13997,7 +13997,7 @@
                           <a:effectLst/>
                           <a:latin typeface="Noto Sans" panose="020B0502040504020204" pitchFamily="34" charset="0"/>
                         </a:rPr>
-                        <a:t>         3,195 </a:t>
+                        <a:t>2,998</a:t>
                       </a:r>
                     </a:p>
                   </a:txBody>
@@ -14043,7 +14043,7 @@
                           <a:effectLst/>
                           <a:latin typeface="Noto Sans" panose="020B0502040504020204" pitchFamily="34" charset="0"/>
                         </a:rPr>
-                        <a:t>        5,976 </a:t>
+                        <a:t>4,801</a:t>
                       </a:r>
                     </a:p>
                   </a:txBody>
@@ -14086,7 +14086,7 @@
                           <a:effectLst/>
                           <a:latin typeface="Noto Sans" panose="020B0502040504020204" pitchFamily="34" charset="0"/>
                         </a:rPr>
-                        <a:t>        7,346 </a:t>
+                        <a:t>7,409</a:t>
                       </a:r>
                     </a:p>
                   </a:txBody>
@@ -14313,7 +14313,7 @@
                           <a:effectLst/>
                           <a:latin typeface="Noto Sans" panose="020B0502040504020204" pitchFamily="34" charset="0"/>
                         </a:rPr>
-                        <a:t>9.9</a:t>
+                        <a:t>9.3</a:t>
                       </a:r>
                     </a:p>
                   </a:txBody>
@@ -14359,7 +14359,7 @@
                           <a:effectLst/>
                           <a:latin typeface="Noto Sans" panose="020B0502040504020204" pitchFamily="34" charset="0"/>
                         </a:rPr>
-                        <a:t>16.9</a:t>
+                        <a:t>13.9</a:t>
                       </a:r>
                     </a:p>
                   </a:txBody>
@@ -14402,7 +14402,7 @@
                           <a:effectLst/>
                           <a:latin typeface="Noto Sans" panose="020B0502040504020204" pitchFamily="34" charset="0"/>
                         </a:rPr>
-                        <a:t>17.5</a:t>
+                        <a:t>18.2</a:t>
                       </a:r>
                     </a:p>
                   </a:txBody>
@@ -14629,7 +14629,7 @@
                           <a:effectLst/>
                           <a:latin typeface="Noto Sans" panose="020B0502040504020204" pitchFamily="34" charset="0"/>
                         </a:rPr>
-                        <a:t>24.3</a:t>
+                        <a:t>26.0</a:t>
                       </a:r>
                     </a:p>
                   </a:txBody>
@@ -14675,7 +14675,7 @@
                           <a:effectLst/>
                           <a:latin typeface="Noto Sans" panose="020B0502040504020204" pitchFamily="34" charset="0"/>
                         </a:rPr>
-                        <a:t>13.0</a:t>
+                        <a:t>16.2</a:t>
                       </a:r>
                     </a:p>
                   </a:txBody>
@@ -14718,7 +14718,7 @@
                           <a:effectLst/>
                           <a:latin typeface="Noto Sans" panose="020B0502040504020204" pitchFamily="34" charset="0"/>
                         </a:rPr>
-                        <a:t>10.6</a:t>
+                        <a:t>10.5</a:t>
                       </a:r>
                     </a:p>
                   </a:txBody>
@@ -14991,7 +14991,7 @@
                           <a:effectLst/>
                           <a:latin typeface="Noto Sans" panose="020B0502040504020204" pitchFamily="34" charset="0"/>
                         </a:rPr>
-                        <a:t>2.0</a:t>
+                        <a:t>2.1</a:t>
                       </a:r>
                     </a:p>
                   </a:txBody>
@@ -15034,7 +15034,7 @@
                           <a:effectLst/>
                           <a:latin typeface="Noto Sans" panose="020B0502040504020204" pitchFamily="34" charset="0"/>
                         </a:rPr>
-                        <a:t>1.7</a:t>
+                        <a:t>1.8</a:t>
                       </a:r>
                     </a:p>
                   </a:txBody>
@@ -15261,7 +15261,7 @@
                           <a:effectLst/>
                           <a:latin typeface="Noto Sans" panose="020B0502040504020204" pitchFamily="34" charset="0"/>
                         </a:rPr>
-                        <a:t>1,014,328</a:t>
+                        <a:t>1,013,264</a:t>
                       </a:r>
                     </a:p>
                   </a:txBody>
@@ -15307,7 +15307,7 @@
                           <a:effectLst/>
                           <a:latin typeface="Noto Sans" panose="020B0502040504020204" pitchFamily="34" charset="0"/>
                         </a:rPr>
-                        <a:t>1,130,794</a:t>
+                        <a:t>1,145,118</a:t>
                       </a:r>
                     </a:p>
                   </a:txBody>
@@ -15350,7 +15350,7 @@
                           <a:effectLst/>
                           <a:latin typeface="Noto Sans" panose="020B0502040504020204" pitchFamily="34" charset="0"/>
                         </a:rPr>
-                        <a:t>1,271,286</a:t>
+                        <a:t>1,307,669</a:t>
                       </a:r>
                     </a:p>
                   </a:txBody>
@@ -15583,7 +15583,7 @@
                           <a:effectLst/>
                           <a:latin typeface="Noto Sans" panose="020B0502040504020204" pitchFamily="34" charset="0"/>
                         </a:rPr>
-                        <a:t>66,503</a:t>
+                        <a:t>66,097</a:t>
                       </a:r>
                     </a:p>
                   </a:txBody>
@@ -15629,7 +15629,7 @@
                           <a:effectLst/>
                           <a:latin typeface="Noto Sans" panose="020B0502040504020204" pitchFamily="34" charset="0"/>
                         </a:rPr>
-                        <a:t>78,814</a:t>
+                        <a:t>75,987</a:t>
                       </a:r>
                     </a:p>
                   </a:txBody>
@@ -15672,7 +15672,7 @@
                           <a:effectLst/>
                           <a:latin typeface="Noto Sans" panose="020B0502040504020204" pitchFamily="34" charset="0"/>
                         </a:rPr>
-                        <a:t>93,947</a:t>
+                        <a:t>91,254</a:t>
                       </a:r>
                     </a:p>
                   </a:txBody>
@@ -15915,7 +15915,7 @@
                           <a:effectLst/>
                           <a:latin typeface="Noto Sans" panose="020B0502040504020204" pitchFamily="34" charset="0"/>
                         </a:rPr>
-                        <a:t> 32,281 </a:t>
+                        <a:t>32,080</a:t>
                       </a:r>
                     </a:p>
                   </a:txBody>
@@ -15965,7 +15965,7 @@
                           <a:effectLst/>
                           <a:latin typeface="Noto Sans" panose="020B0502040504020204" pitchFamily="34" charset="0"/>
                         </a:rPr>
-                        <a:t> 38,256 </a:t>
+                        <a:t>36,880</a:t>
                       </a:r>
                     </a:p>
                   </a:txBody>
@@ -16012,7 +16012,7 @@
                           <a:effectLst/>
                           <a:latin typeface="Noto Sans" panose="020B0502040504020204" pitchFamily="34" charset="0"/>
                         </a:rPr>
-                        <a:t> 45,602 </a:t>
+                        <a:t>44,290</a:t>
                       </a:r>
                     </a:p>
                   </a:txBody>
@@ -17895,7 +17895,7 @@
                           <a:ea typeface="Noto Sans" panose="020B0502040504020204" pitchFamily="34" charset="0"/>
                           <a:cs typeface="Noto Sans" panose="020B0502040504020204" pitchFamily="34" charset="0"/>
                         </a:rPr>
-                        <a:t>6,583</a:t>
+                        <a:t>6,177</a:t>
                       </a:r>
                     </a:p>
                   </a:txBody>
@@ -18252,7 +18252,7 @@
                           <a:ea typeface="Noto Sans" panose="020B0502040504020204" pitchFamily="34" charset="0"/>
                           <a:cs typeface="Noto Sans" panose="020B0502040504020204" pitchFamily="34" charset="0"/>
                         </a:rPr>
-                        <a:t>10.8</a:t>
+                        <a:t>4.0</a:t>
                       </a:r>
                     </a:p>
                   </a:txBody>
@@ -18348,7 +18348,7 @@
                           <a:ea typeface="Noto Sans" panose="020B0502040504020204" pitchFamily="34" charset="0"/>
                           <a:cs typeface="Noto Sans" panose="020B0502040504020204" pitchFamily="34" charset="0"/>
                         </a:rPr>
-                        <a:t>24.3</a:t>
+                        <a:t>26.0</a:t>
                       </a:r>
                     </a:p>
                   </a:txBody>
@@ -20539,7 +20539,7 @@
                 <a:ea typeface="Noto Sans" panose="020B0502040504020204" pitchFamily="34" charset="0"/>
                 <a:cs typeface="Noto Sans" panose="020B0502040504020204" pitchFamily="34" charset="0"/>
               </a:rPr>
-              <a:t>Chất lượng tài sản suy giảm vượt mức ban lãnh đạo dự kiến: tỷ lệ nợ xấu đạt 7.54% cuối Q2/2026, tăng 1.13%p so với đầu năm và cao nhất hệ thống, so với ước tính khoảng 5.6% của ban lãnh đạo. Dư nợ nhóm 3-5 tăng khoảng 7,800 tỷ đồng so với đầu năm và 6,500 tỷ đồng so với quý trước, lên 47,957 tỷ đồng, trong đó khoảng 67% (32,000 tỷ đồng) xếp nhóm 5, nợ nhóm 4 tăng hơn gấp đôi (+156%). Giả định nợ xấu FY26F dưới 4.5% không còn khả thi nếu không đẩy mạnh xóa nợ. Chi phí dự phòng FY26F 10.4 nghìn tỷ đồng (-8.9% CK) sát nhịp thực hiện 1H26; điểm yếu hơn nằm ở FY27F, hàm ý chi phí tín dụng chỉ khoảng 0.8% trong khi nợ xấu vẫn trên 7%. Cả hai đang được rà soát, cùng khuyến nghị NẮM GIỮ và giá mục tiêu 77,800 đồng (2.4x P/B FY26F).</a:t>
+              <a:t>Chất lượng tài sản suy giảm vượt mức ban lãnh đạo dự kiến: tỷ lệ nợ xấu đạt 7.54% cuối Q2/2026, tăng 1.13%p so với đầu năm và cao nhất hệ thống, so với ước tính khoảng 5.6% của ban lãnh đạo. Dư nợ nhóm 3-5 tăng khoảng 7,800 tỷ đồng so với đầu năm, lên 47,957 tỷ đồng, trong đó khoảng 67% (32,000 tỷ đồng) xếp nhóm 5, nợ nhóm 4 tăng hơn gấp đôi (+156%). Chúng tôi nâng giả định nợ xấu FY26F lên 5.9% từ mức dưới 4.5%, và FY27F lên 4.0% từ 3.1%. Việc điều chỉnh không làm giảm lợi nhuận: dự phòng đã trích khoảng 21.6 nghìn tỷ đồng cùng chi phí dự phòng FY26F giữ nguyên 10.9 nghìn tỷ đồng đủ để xóa khoảng 8.9 nghìn tỷ đồng trong 2H26 — tương đương 28% dư nợ nhóm 5 — đưa tỷ lệ nợ xấu từ 7.54% về 5.9% với tỷ lệ bao phủ giữ ở 45%. Giả định 4.5% trước đây cần tới khoảng 18 nghìn tỷ đồng xóa nợ, vượt quá nguồn dự phòng hiện có.</a:t>
             </a:r>
             <a:endParaRPr kumimoji="1" lang="en-US" altLang="ko-KR" sz="800" b="0" dirty="0">
               <a:solidFill>
@@ -20634,7 +20634,7 @@
                 <a:ea typeface="Noto Sans" panose="020B0502040504020204" pitchFamily="34" charset="0"/>
                 <a:cs typeface="Noto Sans" panose="020B0502040504020204" pitchFamily="34" charset="0"/>
               </a:rPr>
-              <a:t>STB ghi nhận 7,331 tỷ đồng LNTT trong 1H25 nhưng chỉ 297 tỷ đồng trong 2H25, do Q4/2025 lỗ trước thuế khoảng 3,360 tỷ đồng với chi phí dự phòng khoảng 9,232 tỷ đồng. Dự phóng LNTT FY26F 8,455 tỷ đồng (+10.8% CK) do đó cần 2H26 đạt khoảng 4,319 tỷ đồng — tương đương khoảng 14 lần nền 2H25, nhưng chỉ cao hơn 4% so với mức của 1H26.</a:t>
+              <a:t>STB ghi nhận 7,331 tỷ đồng LNTT trong 1H25 nhưng chỉ 297 tỷ đồng trong 2H25, do Q4/2025 lỗ trước thuế khoảng 3,360 tỷ đồng với chi phí dự phòng khoảng 9,232 tỷ đồng. Dự phóng LNTT FY26F 7,934 tỷ đồng (+4.0% CK) do đó cần 2H26 đạt khoảng 3,798 tỷ đồng — tương đương khoảng 13 lần nền 2H25, và thấp hơn 8% so với mức của 1H26.</a:t>
             </a:r>
             <a:endParaRPr lang="en-US" altLang="ko-KR" sz="800" b="0" dirty="0">
               <a:solidFill>
@@ -20671,7 +20671,7 @@
                 <a:ea typeface="Noto Sans" panose="020B0502040504020204" pitchFamily="34" charset="0"/>
                 <a:cs typeface="Noto Sans" panose="020B0502040504020204" pitchFamily="34" charset="0"/>
               </a:rPr>
-              <a:t>Các giả định FY26F còn lại giữ nguyên: NII 27,010 tỷ đồng (+1.2% CK) với tăng trưởng tín dụng 11.7%, NIM 2.94% (-38bps CK), CIR 42.7% (+2.0%p CK) và thu nhập khác 1,327 tỷ đồng (+5% CK); dự phóng LNTT FY26F vẫn cao hơn kế hoạch 8,100 tỷ đồng đã được ĐHĐCĐ thông qua. Ở diễn biến khác, Sacombank đã thu giữ 507 giấy chứng nhận quyền sử dụng đất thuộc dự án Viva City (Đồng Nai) đối với dư nợ gốc quá hạn gần 350 tỷ đồng; quy mô chưa trọng yếu nhưng thể hiện kênh xử lý tài sản đảm bảo mà đà hồi phục 2H26 phụ thuộc vào.</a:t>
+              <a:t>Các giả định FY26F khác: NII 27,010 tỷ đồng (+1.2% CK), NIM 2.94% (-38bps CK) và CIR 42.7% (+2.0%p CK); lưu ý tăng trưởng tín dụng 1H26 chỉ đạt 1.5%, thấp hơn nhiều so với mức 11.7% dự phóng cả năm. Ở diễn biến khác, Sacombank đã thu giữ 507 giấy chứng nhận quyền sử dụng đất thuộc dự án Viva City (Đồng Nai) đối với dư nợ gốc quá hạn gần 350 tỷ đồng; quy mô chưa trọng yếu nhưng thể hiện kênh xử lý tài sản đảm bảo mà đà hồi phục 2H26 phụ thuộc vào.</a:t>
             </a:r>
             <a:r>
               <a:rPr kumimoji="1" lang="en-US" altLang="ko-KR" sz="800" b="1" i="0" u="none" strike="noStrike" kern="1200" cap="none" spc="0" normalizeH="0" baseline="0" noProof="0" dirty="0">
@@ -22568,7 +22568,7 @@
                           <a:effectLst/>
                           <a:latin typeface="Noto Sans" panose="020B0502040504020204" pitchFamily="34" charset="0"/>
                         </a:rPr>
-                        <a:t>30,212</a:t>
+                        <a:t>30,200</a:t>
                       </a:r>
                     </a:p>
                   </a:txBody>
@@ -22615,7 +22615,7 @@
                           <a:effectLst/>
                           <a:latin typeface="Noto Sans" panose="020B0502040504020204" pitchFamily="34" charset="0"/>
                         </a:rPr>
-                        <a:t>35,478</a:t>
+                        <a:t>34,640</a:t>
                       </a:r>
                     </a:p>
                   </a:txBody>
@@ -23012,7 +23012,7 @@
                           <a:effectLst/>
                           <a:latin typeface="Noto Sans" panose="020B0502040504020204" pitchFamily="34" charset="0"/>
                         </a:rPr>
-                        <a:t>6,344</a:t>
+                        <a:t>6,408</a:t>
                       </a:r>
                     </a:p>
                   </a:txBody>
@@ -23055,7 +23055,7 @@
                           <a:effectLst/>
                           <a:latin typeface="Noto Sans" panose="020B0502040504020204" pitchFamily="34" charset="0"/>
                         </a:rPr>
-                        <a:t>7,039</a:t>
+                        <a:t>8,038</a:t>
                       </a:r>
                     </a:p>
                   </a:txBody>
@@ -23414,7 +23414,7 @@
                           <a:effectLst/>
                           <a:latin typeface="Noto Sans" panose="020B0502040504020204" pitchFamily="34" charset="0"/>
                         </a:rPr>
-                        <a:t>8,455</a:t>
+                        <a:t>7,934</a:t>
                       </a:r>
                     </a:p>
                   </a:txBody>
@@ -23460,7 +23460,7 @@
                           <a:effectLst/>
                           <a:latin typeface="Noto Sans" panose="020B0502040504020204" pitchFamily="34" charset="0"/>
                         </a:rPr>
-                        <a:t>15,811</a:t>
+                        <a:t>12,700</a:t>
                       </a:r>
                     </a:p>
                   </a:txBody>
@@ -23503,7 +23503,7 @@
                           <a:effectLst/>
                           <a:latin typeface="Noto Sans" panose="020B0502040504020204" pitchFamily="34" charset="0"/>
                         </a:rPr>
-                        <a:t>19,437</a:t>
+                        <a:t>19,600</a:t>
                       </a:r>
                     </a:p>
                   </a:txBody>
@@ -23778,7 +23778,7 @@
                           <a:effectLst/>
                           <a:latin typeface="Noto Sans" panose="020B0502040504020204" pitchFamily="34" charset="0"/>
                         </a:rPr>
-                        <a:t>6,583</a:t>
+                        <a:t>6,177</a:t>
                       </a:r>
                     </a:p>
                   </a:txBody>
@@ -23824,7 +23824,7 @@
                           <a:effectLst/>
                           <a:latin typeface="Noto Sans" panose="020B0502040504020204" pitchFamily="34" charset="0"/>
                         </a:rPr>
-                        <a:t>12,311</a:t>
+                        <a:t>9,890</a:t>
                       </a:r>
                     </a:p>
                   </a:txBody>
@@ -23867,7 +23867,7 @@
                           <a:effectLst/>
                           <a:latin typeface="Noto Sans" panose="020B0502040504020204" pitchFamily="34" charset="0"/>
                         </a:rPr>
-                        <a:t>15,134</a:t>
+                        <a:t>15,260</a:t>
                       </a:r>
                     </a:p>
                   </a:txBody>
@@ -24118,7 +24118,7 @@
                           <a:effectLst/>
                           <a:latin typeface="Noto Sans" panose="020B0502040504020204" pitchFamily="34" charset="0"/>
                         </a:rPr>
-                        <a:t>         3,195 </a:t>
+                        <a:t>2,998</a:t>
                       </a:r>
                     </a:p>
                   </a:txBody>
@@ -24164,7 +24164,7 @@
                           <a:effectLst/>
                           <a:latin typeface="Noto Sans" panose="020B0502040504020204" pitchFamily="34" charset="0"/>
                         </a:rPr>
-                        <a:t>        5,976 </a:t>
+                        <a:t>4,801</a:t>
                       </a:r>
                     </a:p>
                   </a:txBody>
@@ -24207,7 +24207,7 @@
                           <a:effectLst/>
                           <a:latin typeface="Noto Sans" panose="020B0502040504020204" pitchFamily="34" charset="0"/>
                         </a:rPr>
-                        <a:t>        7,346 </a:t>
+                        <a:t>7,409</a:t>
                       </a:r>
                     </a:p>
                   </a:txBody>
@@ -24434,7 +24434,7 @@
                           <a:effectLst/>
                           <a:latin typeface="Noto Sans" panose="020B0502040504020204" pitchFamily="34" charset="0"/>
                         </a:rPr>
-                        <a:t>9.9</a:t>
+                        <a:t>9.3</a:t>
                       </a:r>
                     </a:p>
                   </a:txBody>
@@ -24480,7 +24480,7 @@
                           <a:effectLst/>
                           <a:latin typeface="Noto Sans" panose="020B0502040504020204" pitchFamily="34" charset="0"/>
                         </a:rPr>
-                        <a:t>16.9</a:t>
+                        <a:t>13.9</a:t>
                       </a:r>
                     </a:p>
                   </a:txBody>
@@ -24523,7 +24523,7 @@
                           <a:effectLst/>
                           <a:latin typeface="Noto Sans" panose="020B0502040504020204" pitchFamily="34" charset="0"/>
                         </a:rPr>
-                        <a:t>17.5</a:t>
+                        <a:t>18.2</a:t>
                       </a:r>
                     </a:p>
                   </a:txBody>
@@ -24750,7 +24750,7 @@
                           <a:effectLst/>
                           <a:latin typeface="Noto Sans" panose="020B0502040504020204" pitchFamily="34" charset="0"/>
                         </a:rPr>
-                        <a:t>24.3</a:t>
+                        <a:t>26.0</a:t>
                       </a:r>
                     </a:p>
                   </a:txBody>
@@ -24796,7 +24796,7 @@
                           <a:effectLst/>
                           <a:latin typeface="Noto Sans" panose="020B0502040504020204" pitchFamily="34" charset="0"/>
                         </a:rPr>
-                        <a:t>13.0</a:t>
+                        <a:t>16.2</a:t>
                       </a:r>
                     </a:p>
                   </a:txBody>
@@ -24839,7 +24839,7 @@
                           <a:effectLst/>
                           <a:latin typeface="Noto Sans" panose="020B0502040504020204" pitchFamily="34" charset="0"/>
                         </a:rPr>
-                        <a:t>10.6</a:t>
+                        <a:t>10.5</a:t>
                       </a:r>
                     </a:p>
                   </a:txBody>
@@ -25112,7 +25112,7 @@
                           <a:effectLst/>
                           <a:latin typeface="Noto Sans" panose="020B0502040504020204" pitchFamily="34" charset="0"/>
                         </a:rPr>
-                        <a:t>2.0</a:t>
+                        <a:t>2.1</a:t>
                       </a:r>
                     </a:p>
                   </a:txBody>
@@ -25155,7 +25155,7 @@
                           <a:effectLst/>
                           <a:latin typeface="Noto Sans" panose="020B0502040504020204" pitchFamily="34" charset="0"/>
                         </a:rPr>
-                        <a:t>1.7</a:t>
+                        <a:t>1.8</a:t>
                       </a:r>
                     </a:p>
                   </a:txBody>
@@ -25511,7 +25511,7 @@
                           <a:effectLst/>
                           <a:latin typeface="Noto Sans" panose="020B0502040504020204" pitchFamily="34" charset="0"/>
                         </a:rPr>
-                        <a:t>1,014,328</a:t>
+                        <a:t>1,013,264</a:t>
                       </a:r>
                     </a:p>
                   </a:txBody>
@@ -25557,7 +25557,7 @@
                           <a:effectLst/>
                           <a:latin typeface="Noto Sans" panose="020B0502040504020204" pitchFamily="34" charset="0"/>
                         </a:rPr>
-                        <a:t>1,130,794</a:t>
+                        <a:t>1,145,118</a:t>
                       </a:r>
                     </a:p>
                   </a:txBody>
@@ -25600,7 +25600,7 @@
                           <a:effectLst/>
                           <a:latin typeface="Noto Sans" panose="020B0502040504020204" pitchFamily="34" charset="0"/>
                         </a:rPr>
-                        <a:t>1,271,286</a:t>
+                        <a:t>1,307,669</a:t>
                       </a:r>
                     </a:p>
                   </a:txBody>
@@ -25896,7 +25896,7 @@
                           <a:effectLst/>
                           <a:latin typeface="Noto Sans" panose="020B0502040504020204" pitchFamily="34" charset="0"/>
                         </a:rPr>
-                        <a:t>66,503</a:t>
+                        <a:t>66,097</a:t>
                       </a:r>
                     </a:p>
                   </a:txBody>
@@ -25942,7 +25942,7 @@
                           <a:effectLst/>
                           <a:latin typeface="Noto Sans" panose="020B0502040504020204" pitchFamily="34" charset="0"/>
                         </a:rPr>
-                        <a:t>78,814</a:t>
+                        <a:t>75,987</a:t>
                       </a:r>
                     </a:p>
                   </a:txBody>
@@ -25985,7 +25985,7 @@
                           <a:effectLst/>
                           <a:latin typeface="Noto Sans" panose="020B0502040504020204" pitchFamily="34" charset="0"/>
                         </a:rPr>
-                        <a:t>93,947</a:t>
+                        <a:t>91,254</a:t>
                       </a:r>
                     </a:p>
                   </a:txBody>
@@ -26336,7 +26336,7 @@
                           <a:effectLst/>
                           <a:latin typeface="Noto Sans" panose="020B0502040504020204" pitchFamily="34" charset="0"/>
                         </a:rPr>
-                        <a:t> 32,281 </a:t>
+                        <a:t>32,080</a:t>
                       </a:r>
                     </a:p>
                   </a:txBody>
@@ -26386,7 +26386,7 @@
                           <a:effectLst/>
                           <a:latin typeface="Noto Sans" panose="020B0502040504020204" pitchFamily="34" charset="0"/>
                         </a:rPr>
-                        <a:t> 38,256 </a:t>
+                        <a:t>36,880</a:t>
                       </a:r>
                     </a:p>
                   </a:txBody>
@@ -26433,7 +26433,7 @@
                           <a:effectLst/>
                           <a:latin typeface="Noto Sans" panose="020B0502040504020204" pitchFamily="34" charset="0"/>
                         </a:rPr>
-                        <a:t> 45,602 </a:t>
+                        <a:t>44,290</a:t>
                       </a:r>
                     </a:p>
                   </a:txBody>

--- a/MASVN_RS_WM_2H26_outlook_Equity_VN_2026_STBFPT_31July2026.pptx
+++ b/MASVN_RS_WM_2H26_outlook_Equity_VN_2026_STBFPT_31July2026.pptx
@@ -10211,7 +10211,7 @@
                           <a:ea typeface="Noto Sans" panose="020B0502040504020204" pitchFamily="34" charset="0"/>
                           <a:cs typeface="Noto Sans" panose="020B0502040504020204" pitchFamily="34" charset="0"/>
                         </a:rPr>
-                        <a:t>6,177</a:t>
+                        <a:t>6,786</a:t>
                       </a:r>
                     </a:p>
                   </a:txBody>
@@ -10376,7 +10376,7 @@
                           <a:ea typeface="Noto Sans" panose="020B0502040504020204" pitchFamily="34" charset="0"/>
                           <a:cs typeface="Noto Sans" panose="020B0502040504020204" pitchFamily="34" charset="0"/>
                         </a:rPr>
-                        <a:t>4.0</a:t>
+                        <a:t>14.3</a:t>
                       </a:r>
                     </a:p>
                   </a:txBody>
@@ -10472,7 +10472,7 @@
                           <a:ea typeface="Noto Sans" panose="020B0502040504020204" pitchFamily="34" charset="0"/>
                           <a:cs typeface="Noto Sans" panose="020B0502040504020204" pitchFamily="34" charset="0"/>
                         </a:rPr>
-                        <a:t>26.0</a:t>
+                        <a:t>23.6</a:t>
                       </a:r>
                     </a:p>
                   </a:txBody>
@@ -11861,7 +11861,7 @@
                 <a:ea typeface="Noto Sans" panose="020B0502040504020204" pitchFamily="34" charset="0"/>
                 <a:cs typeface="Noto Sans" panose="020B0502040504020204" pitchFamily="34" charset="0"/>
               </a:rPr>
-              <a:t>The NPL ratio reached 7.54% at end-2Q26, up 1.13%p from the beginning of the year and the highest in the system, against management guidance of approximately 5.6%. Group 3-5 balances rose approximately VND7,800bn year-to-date to VND47,957bn, of which around 67% (approximately VND32,000bn) is Group 5, while Group 4 more than doubled (+156%). We move our FY26F NPL assumption to 5.9% from below 4.5%, and FY27F to 4.0% from 3.1%. The revision costs nothing at the P&amp;L: existing reserves of about VND21.6tn plus the unchanged FY26F provisioning charge of VND10.9tn fund write-offs of roughly VND8.9tn in 2H26 — 28% of the Group 5 balance — which is what takes 7.54% to 5.9% while holding coverage at 45%. The former 4.5% assumption required some VND18tn of write-offs the reserve stock cannot support.</a:t>
+              <a:t>The NPL ratio reached 7.54% at end-2Q26, up 1.13%p from the beginning of the year and the highest in the system, against management guidance of approximately 5.6%. Group 3-5 balances rose approximately VND7,800bn year-to-date to VND47,957bn, of which around 67% (approximately VND32,000bn) is Group 5, while Group 4 more than doubled (+156%). We set FY26F NPL at 5.5%, from below 4.5%, and FY27F at 4.0% from 3.1%. The clean-up is funded from the reserve stock rather than the P&amp;L: reserves reached VND27.2tn at end-2Q26 — 56.7% coverage, up from 50.0% at end-FY25 — after VND7.1tn of 1H26 charges and almost no write-offs. A further VND4.0tn charge in 2H26 funds write-offs of VND11.8tn, or 37% of the Group 5 balance, leaving reserves at VND19.0tn and coverage back at 50.0%. Holding coverage at 50% is what caps the improvement at 5.5%, and it also requires 2H26 NPL formation to slow to roughly a quarter of the 1H26 pace. The former 4.5% assumption needed some VND18tn of write-offs the reserve stock cannot support.</a:t>
             </a:r>
           </a:p>
           <a:p>
@@ -11887,7 +11887,7 @@
                 <a:ea typeface="Noto Sans" panose="020B0502040504020204" pitchFamily="34" charset="0"/>
                 <a:cs typeface="Noto Sans" panose="020B0502040504020204" pitchFamily="34" charset="0"/>
               </a:rPr>
-              <a:t>FY26F PBT remains attainable on a low 2H25 base: </a:t>
+              <a:t>FY26F PBT lifted on the cost line, against a low 2H25 base: </a:t>
             </a:r>
           </a:p>
           <a:p>
@@ -11915,7 +11915,7 @@
                 <a:ea typeface="Noto Sans" panose="020B0502040504020204" pitchFamily="34" charset="0"/>
                 <a:cs typeface="Noto Sans" panose="020B0502040504020204" pitchFamily="34" charset="0"/>
               </a:rPr>
-              <a:t>STB recorded VND7,331bn of PBT in 1H25 but only VND297bn in 2H25, as 4Q25 registered a pre-tax loss of approximately VND3,360bn on a provisioning charge of around VND9,232bn. Our FY26F PBT forecast of VND7,934bn (+4.0% YoY) requires 2H26 PBT of approximately VND3,798bn — around 13x the 2H25 base, and 8% below the 1H26 level. Other FY26F assumptions: NII of VND27,010bn (+1.2% YoY), NIM of 2.94% (-38bps YoY) and CIR of 42.7% (+2.0%p YoY); we flag that 1H26 loan growth of 1.5% sits well below the 11.7% carried for the full year. Separately, STB has taken possession of 507 land-use right certificates at LDG's Viva City project in Dong Nai against overdue principal of nearly VND350bn; the exposure is immaterial to the portfolio but illustrates the collateral-resolution channel the 2H26 write-off programme depends on.</a:t>
+              <a:t>STB recorded VND7,331bn of PBT in 1H25 but only VND297bn in 2H25, as 4Q25 registered a pre-tax loss of approximately VND3,360bn on a provisioning charge of around VND9,232bn. We raise FY26F PBT to VND8,716bn (+14.3% YoY) from VND7,934bn, entirely on the cost line: 1H26 CIR came in at 35.6% against the 42.9% previously carried for the full year, and we now assume 39.9% (-0.8%p YoY), which still allows 2H26 operating expense to run 10.9% above 1H26. That implies 2H26 PBT of approximately VND4,580bn — around 15x the 2H25 base and 10.7% above the 1H26 level. Other FY26F assumptions: NII of VND27,010bn (+1.2% YoY), NIM of 2.94% (-38bps YoY) and a provisioning charge of VND11.1tn (-2.6% YoY); we flag that 1H26 loan growth of 1.5% sits well below the 11.7% carried for the full year. Separately, STB has taken possession of 507 land-use right certificates at LDG's Viva City project in Dong Nai against overdue principal of nearly VND350bn; the exposure is immaterial to the portfolio but illustrates the collateral-resolution channel the 2H26 write-off programme depends on.</a:t>
             </a:r>
           </a:p>
           <a:p>
@@ -13365,7 +13365,7 @@
                           <a:effectLst/>
                           <a:latin typeface="Noto Sans" panose="020B0502040504020204" pitchFamily="34" charset="0"/>
                         </a:rPr>
-                        <a:t>7,934</a:t>
+                        <a:t>8,716</a:t>
                       </a:r>
                     </a:p>
                   </a:txBody>
@@ -13411,7 +13411,7 @@
                           <a:effectLst/>
                           <a:latin typeface="Noto Sans" panose="020B0502040504020204" pitchFamily="34" charset="0"/>
                         </a:rPr>
-                        <a:t>12,700</a:t>
+                        <a:t>13,734</a:t>
                       </a:r>
                     </a:p>
                   </a:txBody>
@@ -13454,7 +13454,7 @@
                           <a:effectLst/>
                           <a:latin typeface="Noto Sans" panose="020B0502040504020204" pitchFamily="34" charset="0"/>
                         </a:rPr>
-                        <a:t>19,600</a:t>
+                        <a:t>20,596</a:t>
                       </a:r>
                     </a:p>
                   </a:txBody>
@@ -13681,7 +13681,7 @@
                           <a:effectLst/>
                           <a:latin typeface="Noto Sans" panose="020B0502040504020204" pitchFamily="34" charset="0"/>
                         </a:rPr>
-                        <a:t>6,177</a:t>
+                        <a:t>6,786</a:t>
                       </a:r>
                     </a:p>
                   </a:txBody>
@@ -13727,7 +13727,7 @@
                           <a:effectLst/>
                           <a:latin typeface="Noto Sans" panose="020B0502040504020204" pitchFamily="34" charset="0"/>
                         </a:rPr>
-                        <a:t>9,890</a:t>
+                        <a:t>10,693</a:t>
                       </a:r>
                     </a:p>
                   </a:txBody>
@@ -13770,7 +13770,7 @@
                           <a:effectLst/>
                           <a:latin typeface="Noto Sans" panose="020B0502040504020204" pitchFamily="34" charset="0"/>
                         </a:rPr>
-                        <a:t>15,260</a:t>
+                        <a:t>16,036</a:t>
                       </a:r>
                     </a:p>
                   </a:txBody>
@@ -13997,7 +13997,7 @@
                           <a:effectLst/>
                           <a:latin typeface="Noto Sans" panose="020B0502040504020204" pitchFamily="34" charset="0"/>
                         </a:rPr>
-                        <a:t>2,998</a:t>
+                        <a:t>3,294</a:t>
                       </a:r>
                     </a:p>
                   </a:txBody>
@@ -14043,7 +14043,7 @@
                           <a:effectLst/>
                           <a:latin typeface="Noto Sans" panose="020B0502040504020204" pitchFamily="34" charset="0"/>
                         </a:rPr>
-                        <a:t>4,801</a:t>
+                        <a:t>5,191</a:t>
                       </a:r>
                     </a:p>
                   </a:txBody>
@@ -14086,7 +14086,7 @@
                           <a:effectLst/>
                           <a:latin typeface="Noto Sans" panose="020B0502040504020204" pitchFamily="34" charset="0"/>
                         </a:rPr>
-                        <a:t>7,409</a:t>
+                        <a:t>7,784</a:t>
                       </a:r>
                     </a:p>
                   </a:txBody>
@@ -14313,7 +14313,7 @@
                           <a:effectLst/>
                           <a:latin typeface="Noto Sans" panose="020B0502040504020204" pitchFamily="34" charset="0"/>
                         </a:rPr>
-                        <a:t>9.3</a:t>
+                        <a:t>10.2</a:t>
                       </a:r>
                     </a:p>
                   </a:txBody>
@@ -14359,7 +14359,7 @@
                           <a:effectLst/>
                           <a:latin typeface="Noto Sans" panose="020B0502040504020204" pitchFamily="34" charset="0"/>
                         </a:rPr>
-                        <a:t>13.9</a:t>
+                        <a:t>14.8</a:t>
                       </a:r>
                     </a:p>
                   </a:txBody>
@@ -14402,7 +14402,7 @@
                           <a:effectLst/>
                           <a:latin typeface="Noto Sans" panose="020B0502040504020204" pitchFamily="34" charset="0"/>
                         </a:rPr>
-                        <a:t>18.2</a:t>
+                        <a:t>18.8</a:t>
                       </a:r>
                     </a:p>
                   </a:txBody>
@@ -14629,7 +14629,7 @@
                           <a:effectLst/>
                           <a:latin typeface="Noto Sans" panose="020B0502040504020204" pitchFamily="34" charset="0"/>
                         </a:rPr>
-                        <a:t>26.0</a:t>
+                        <a:t>23.6</a:t>
                       </a:r>
                     </a:p>
                   </a:txBody>
@@ -14675,7 +14675,7 @@
                           <a:effectLst/>
                           <a:latin typeface="Noto Sans" panose="020B0502040504020204" pitchFamily="34" charset="0"/>
                         </a:rPr>
-                        <a:t>16.2</a:t>
+                        <a:t>15.0</a:t>
                       </a:r>
                     </a:p>
                   </a:txBody>
@@ -14718,7 +14718,7 @@
                           <a:effectLst/>
                           <a:latin typeface="Noto Sans" panose="020B0502040504020204" pitchFamily="34" charset="0"/>
                         </a:rPr>
-                        <a:t>10.5</a:t>
+                        <a:t>10.0</a:t>
                       </a:r>
                     </a:p>
                   </a:txBody>
@@ -15034,7 +15034,7 @@
                           <a:effectLst/>
                           <a:latin typeface="Noto Sans" panose="020B0502040504020204" pitchFamily="34" charset="0"/>
                         </a:rPr>
-                        <a:t>1.8</a:t>
+                        <a:t>1.7</a:t>
                       </a:r>
                     </a:p>
                   </a:txBody>
@@ -15261,7 +15261,7 @@
                           <a:effectLst/>
                           <a:latin typeface="Noto Sans" panose="020B0502040504020204" pitchFamily="34" charset="0"/>
                         </a:rPr>
-                        <a:t>1,013,264</a:t>
+                        <a:t>1,007,118</a:t>
                       </a:r>
                     </a:p>
                   </a:txBody>
@@ -15307,7 +15307,7 @@
                           <a:effectLst/>
                           <a:latin typeface="Noto Sans" panose="020B0502040504020204" pitchFamily="34" charset="0"/>
                         </a:rPr>
-                        <a:t>1,145,118</a:t>
+                        <a:t>1,139,005</a:t>
                       </a:r>
                     </a:p>
                   </a:txBody>
@@ -15350,7 +15350,7 @@
                           <a:effectLst/>
                           <a:latin typeface="Noto Sans" panose="020B0502040504020204" pitchFamily="34" charset="0"/>
                         </a:rPr>
-                        <a:t>1,307,669</a:t>
+                        <a:t>1,301,528</a:t>
                       </a:r>
                     </a:p>
                   </a:txBody>
@@ -15583,7 +15583,7 @@
                           <a:effectLst/>
                           <a:latin typeface="Noto Sans" panose="020B0502040504020204" pitchFamily="34" charset="0"/>
                         </a:rPr>
-                        <a:t>66,097</a:t>
+                        <a:t>66,706</a:t>
                       </a:r>
                     </a:p>
                   </a:txBody>
@@ -15629,7 +15629,7 @@
                           <a:effectLst/>
                           <a:latin typeface="Noto Sans" panose="020B0502040504020204" pitchFamily="34" charset="0"/>
                         </a:rPr>
-                        <a:t>75,987</a:t>
+                        <a:t>77,400</a:t>
                       </a:r>
                     </a:p>
                   </a:txBody>
@@ -15672,7 +15672,7 @@
                           <a:effectLst/>
                           <a:latin typeface="Noto Sans" panose="020B0502040504020204" pitchFamily="34" charset="0"/>
                         </a:rPr>
-                        <a:t>91,254</a:t>
+                        <a:t>93,436</a:t>
                       </a:r>
                     </a:p>
                   </a:txBody>
@@ -15915,7 +15915,7 @@
                           <a:effectLst/>
                           <a:latin typeface="Noto Sans" panose="020B0502040504020204" pitchFamily="34" charset="0"/>
                         </a:rPr>
-                        <a:t>32,080</a:t>
+                        <a:t>32,379</a:t>
                       </a:r>
                     </a:p>
                   </a:txBody>
@@ -15965,7 +15965,7 @@
                           <a:effectLst/>
                           <a:latin typeface="Noto Sans" panose="020B0502040504020204" pitchFamily="34" charset="0"/>
                         </a:rPr>
-                        <a:t>36,880</a:t>
+                        <a:t>37,570</a:t>
                       </a:r>
                     </a:p>
                   </a:txBody>
@@ -16012,7 +16012,7 @@
                           <a:effectLst/>
                           <a:latin typeface="Noto Sans" panose="020B0502040504020204" pitchFamily="34" charset="0"/>
                         </a:rPr>
-                        <a:t>44,290</a:t>
+                        <a:t>45,354</a:t>
                       </a:r>
                     </a:p>
                   </a:txBody>
@@ -17895,7 +17895,7 @@
                           <a:ea typeface="Noto Sans" panose="020B0502040504020204" pitchFamily="34" charset="0"/>
                           <a:cs typeface="Noto Sans" panose="020B0502040504020204" pitchFamily="34" charset="0"/>
                         </a:rPr>
-                        <a:t>6,177</a:t>
+                        <a:t>6,786</a:t>
                       </a:r>
                     </a:p>
                   </a:txBody>
@@ -18252,7 +18252,7 @@
                           <a:ea typeface="Noto Sans" panose="020B0502040504020204" pitchFamily="34" charset="0"/>
                           <a:cs typeface="Noto Sans" panose="020B0502040504020204" pitchFamily="34" charset="0"/>
                         </a:rPr>
-                        <a:t>4.0</a:t>
+                        <a:t>14.3</a:t>
                       </a:r>
                     </a:p>
                   </a:txBody>
@@ -18348,7 +18348,7 @@
                           <a:ea typeface="Noto Sans" panose="020B0502040504020204" pitchFamily="34" charset="0"/>
                           <a:cs typeface="Noto Sans" panose="020B0502040504020204" pitchFamily="34" charset="0"/>
                         </a:rPr>
-                        <a:t>26.0</a:t>
+                        <a:t>23.6</a:t>
                       </a:r>
                     </a:p>
                   </a:txBody>
@@ -20539,7 +20539,7 @@
                 <a:ea typeface="Noto Sans" panose="020B0502040504020204" pitchFamily="34" charset="0"/>
                 <a:cs typeface="Noto Sans" panose="020B0502040504020204" pitchFamily="34" charset="0"/>
               </a:rPr>
-              <a:t>Chất lượng tài sản suy giảm vượt mức ban lãnh đạo dự kiến: tỷ lệ nợ xấu đạt 7.54% cuối Q2/2026, tăng 1.13%p so với đầu năm và cao nhất hệ thống, so với ước tính khoảng 5.6% của ban lãnh đạo. Dư nợ nhóm 3-5 tăng khoảng 7,800 tỷ đồng so với đầu năm, lên 47,957 tỷ đồng, trong đó khoảng 67% (32,000 tỷ đồng) xếp nhóm 5, nợ nhóm 4 tăng hơn gấp đôi (+156%). Chúng tôi nâng giả định nợ xấu FY26F lên 5.9% từ mức dưới 4.5%, và FY27F lên 4.0% từ 3.1%. Việc điều chỉnh không làm giảm lợi nhuận: dự phòng đã trích khoảng 21.6 nghìn tỷ đồng cùng chi phí dự phòng FY26F giữ nguyên 10.9 nghìn tỷ đồng đủ để xóa khoảng 8.9 nghìn tỷ đồng trong 2H26 — tương đương 28% dư nợ nhóm 5 — đưa tỷ lệ nợ xấu từ 7.54% về 5.9% với tỷ lệ bao phủ giữ ở 45%. Giả định 4.5% trước đây cần tới khoảng 18 nghìn tỷ đồng xóa nợ, vượt quá nguồn dự phòng hiện có.</a:t>
+              <a:t>Chất lượng tài sản suy giảm vượt mức ban lãnh đạo dự kiến: tỷ lệ nợ xấu đạt 7.54% cuối Q2/2026, tăng 1.13%p so với đầu năm và cao nhất hệ thống, so với ước tính khoảng 5.6% của ban lãnh đạo. Dư nợ nhóm 3-5 tăng khoảng 7,800 tỷ đồng so với đầu năm, lên 47,957 tỷ đồng, trong đó khoảng 67% (32,000 tỷ đồng) xếp nhóm 5, nợ nhóm 4 tăng hơn gấp đôi (+156%). Chúng tôi đặt giả định nợ xấu FY26F ở 5.5% (từ dưới 4.5%) và FY27F ở 4.0% (từ 3.1%). Quá trình xử lý được tài trợ từ nguồn dự phòng đã trích, không phải từ lợi nhuận: dự phòng đạt 27.2 nghìn tỷ đồng cuối Q2/2026 — bao phủ 56.7%, tăng từ 50.0% cuối 2025 — sau khi trích 7.1 nghìn tỷ đồng trong 1H26 và gần như chưa xóa nợ. Trích thêm 4.0 nghìn tỷ đồng trong 2H26 đủ để xóa 11.8 nghìn tỷ đồng, tương đương 37% dư nợ nhóm 5, đưa dự phòng còn 19.0 nghìn tỷ đồng và bao phủ về 50.0%. Chính việc giữ bao phủ ở 50% giới hạn mức cải thiện ở 5.5%, đồng thời cần nợ xấu phát sinh mới trong 2H26 chậm lại còn khoảng một phần tư nhịp 1H26. Giả định 4.5% trước đây cần tới khoảng 18 nghìn tỷ đồng xóa nợ, vượt quá nguồn dự phòng hiện có.</a:t>
             </a:r>
             <a:endParaRPr kumimoji="1" lang="en-US" altLang="ko-KR" sz="800" b="0" dirty="0">
               <a:solidFill>
@@ -20570,7 +20570,7 @@
                 <a:ea typeface="Noto Sans" panose="020B0502040504020204" pitchFamily="34" charset="0"/>
                 <a:cs typeface="Noto Sans" panose="020B0502040504020204" pitchFamily="34" charset="0"/>
               </a:rPr>
-              <a:t>Dự phóng LNTT FY26F vẫn khả thi nhờ nền 2H25 thấp: </a:t>
+              <a:t>Nâng dự phóng LNTT FY26F nhờ chi phí hoạt động, trên nền 2H25 thấp: </a:t>
             </a:r>
             <a:r>
               <a:rPr lang="en-US" altLang="ko-KR" sz="800" b="1" dirty="0" err="1">
@@ -20634,7 +20634,7 @@
                 <a:ea typeface="Noto Sans" panose="020B0502040504020204" pitchFamily="34" charset="0"/>
                 <a:cs typeface="Noto Sans" panose="020B0502040504020204" pitchFamily="34" charset="0"/>
               </a:rPr>
-              <a:t>STB ghi nhận 7,331 tỷ đồng LNTT trong 1H25 nhưng chỉ 297 tỷ đồng trong 2H25, do Q4/2025 lỗ trước thuế khoảng 3,360 tỷ đồng với chi phí dự phòng khoảng 9,232 tỷ đồng. Dự phóng LNTT FY26F 7,934 tỷ đồng (+4.0% CK) do đó cần 2H26 đạt khoảng 3,798 tỷ đồng — tương đương khoảng 13 lần nền 2H25, và thấp hơn 8% so với mức của 1H26.</a:t>
+              <a:t>STB ghi nhận 7,331 tỷ đồng LNTT trong 1H25 nhưng chỉ 297 tỷ đồng trong 2H25, do Q4/2025 lỗ trước thuế khoảng 3,360 tỷ đồng với chi phí dự phòng khoảng 9,232 tỷ đồng. Chúng tôi nâng dự phóng LNTT FY26F lên 8,716 tỷ đồng (+14.3% CK) từ 7,934 tỷ đồng, hoàn toàn nhờ chi phí hoạt động: CIR 1H26 chỉ 35.6% so với 42.9% dự phóng cả năm trước đây, và chúng tôi điều chỉnh về 39.9% (-0.8%p CK), vẫn cho phép chi phí hoạt động 2H26 cao hơn 1H26 10.9%. Mức này hàm ý LNTT 2H26 khoảng 4,580 tỷ đồng — tương đương khoảng 15 lần nền 2H25 và cao hơn 1H26 10.7%.</a:t>
             </a:r>
             <a:endParaRPr lang="en-US" altLang="ko-KR" sz="800" b="0" dirty="0">
               <a:solidFill>
@@ -20671,7 +20671,7 @@
                 <a:ea typeface="Noto Sans" panose="020B0502040504020204" pitchFamily="34" charset="0"/>
                 <a:cs typeface="Noto Sans" panose="020B0502040504020204" pitchFamily="34" charset="0"/>
               </a:rPr>
-              <a:t>Các giả định FY26F khác: NII 27,010 tỷ đồng (+1.2% CK), NIM 2.94% (-38bps CK) và CIR 42.7% (+2.0%p CK); lưu ý tăng trưởng tín dụng 1H26 chỉ đạt 1.5%, thấp hơn nhiều so với mức 11.7% dự phóng cả năm. Ở diễn biến khác, Sacombank đã thu giữ 507 giấy chứng nhận quyền sử dụng đất thuộc dự án Viva City (Đồng Nai) đối với dư nợ gốc quá hạn gần 350 tỷ đồng; quy mô chưa trọng yếu nhưng thể hiện kênh xử lý tài sản đảm bảo mà đà hồi phục 2H26 phụ thuộc vào.</a:t>
+              <a:t>Các giả định FY26F khác: NII 27,010 tỷ đồng (+1.2% CK), NIM 2.94% (-38bps CK) và chi phí dự phòng 11.1 nghìn tỷ đồng (-2.6% CK); lưu ý tăng trưởng tín dụng 1H26 chỉ đạt 1.5%, thấp hơn nhiều so với mức 11.7% dự phóng cả năm. Ở diễn biến khác, Sacombank đã thu giữ 507 giấy chứng nhận quyền sử dụng đất thuộc dự án Viva City (Đồng Nai) đối với dư nợ gốc quá hạn gần 350 tỷ đồng; quy mô chưa trọng yếu nhưng thể hiện kênh xử lý tài sản đảm bảo mà đà hồi phục 2H26 phụ thuộc vào.</a:t>
             </a:r>
             <a:r>
               <a:rPr kumimoji="1" lang="en-US" altLang="ko-KR" sz="800" b="1" i="0" u="none" strike="noStrike" kern="1200" cap="none" spc="0" normalizeH="0" baseline="0" noProof="0" dirty="0">
@@ -23414,7 +23414,7 @@
                           <a:effectLst/>
                           <a:latin typeface="Noto Sans" panose="020B0502040504020204" pitchFamily="34" charset="0"/>
                         </a:rPr>
-                        <a:t>7,934</a:t>
+                        <a:t>8,716</a:t>
                       </a:r>
                     </a:p>
                   </a:txBody>
@@ -23460,7 +23460,7 @@
                           <a:effectLst/>
                           <a:latin typeface="Noto Sans" panose="020B0502040504020204" pitchFamily="34" charset="0"/>
                         </a:rPr>
-                        <a:t>12,700</a:t>
+                        <a:t>13,734</a:t>
                       </a:r>
                     </a:p>
                   </a:txBody>
@@ -23503,7 +23503,7 @@
                           <a:effectLst/>
                           <a:latin typeface="Noto Sans" panose="020B0502040504020204" pitchFamily="34" charset="0"/>
                         </a:rPr>
-                        <a:t>19,600</a:t>
+                        <a:t>20,596</a:t>
                       </a:r>
                     </a:p>
                   </a:txBody>
@@ -23778,7 +23778,7 @@
                           <a:effectLst/>
                           <a:latin typeface="Noto Sans" panose="020B0502040504020204" pitchFamily="34" charset="0"/>
                         </a:rPr>
-                        <a:t>6,177</a:t>
+                        <a:t>6,786</a:t>
                       </a:r>
                     </a:p>
                   </a:txBody>
@@ -23824,7 +23824,7 @@
                           <a:effectLst/>
                           <a:latin typeface="Noto Sans" panose="020B0502040504020204" pitchFamily="34" charset="0"/>
                         </a:rPr>
-                        <a:t>9,890</a:t>
+                        <a:t>10,693</a:t>
                       </a:r>
                     </a:p>
                   </a:txBody>
@@ -23867,7 +23867,7 @@
                           <a:effectLst/>
                           <a:latin typeface="Noto Sans" panose="020B0502040504020204" pitchFamily="34" charset="0"/>
                         </a:rPr>
-                        <a:t>15,260</a:t>
+                        <a:t>16,036</a:t>
                       </a:r>
                     </a:p>
                   </a:txBody>
@@ -24118,7 +24118,7 @@
                           <a:effectLst/>
                           <a:latin typeface="Noto Sans" panose="020B0502040504020204" pitchFamily="34" charset="0"/>
                         </a:rPr>
-                        <a:t>2,998</a:t>
+                        <a:t>3,294</a:t>
                       </a:r>
                     </a:p>
                   </a:txBody>
@@ -24164,7 +24164,7 @@
                           <a:effectLst/>
                           <a:latin typeface="Noto Sans" panose="020B0502040504020204" pitchFamily="34" charset="0"/>
                         </a:rPr>
-                        <a:t>4,801</a:t>
+                        <a:t>5,191</a:t>
                       </a:r>
                     </a:p>
                   </a:txBody>
@@ -24207,7 +24207,7 @@
                           <a:effectLst/>
                           <a:latin typeface="Noto Sans" panose="020B0502040504020204" pitchFamily="34" charset="0"/>
                         </a:rPr>
-                        <a:t>7,409</a:t>
+                        <a:t>7,784</a:t>
                       </a:r>
                     </a:p>
                   </a:txBody>
@@ -24434,7 +24434,7 @@
                           <a:effectLst/>
                           <a:latin typeface="Noto Sans" panose="020B0502040504020204" pitchFamily="34" charset="0"/>
                         </a:rPr>
-                        <a:t>9.3</a:t>
+                        <a:t>10.2</a:t>
                       </a:r>
                     </a:p>
                   </a:txBody>
@@ -24480,7 +24480,7 @@
                           <a:effectLst/>
                           <a:latin typeface="Noto Sans" panose="020B0502040504020204" pitchFamily="34" charset="0"/>
                         </a:rPr>
-                        <a:t>13.9</a:t>
+                        <a:t>14.8</a:t>
                       </a:r>
                     </a:p>
                   </a:txBody>
@@ -24523,7 +24523,7 @@
                           <a:effectLst/>
                           <a:latin typeface="Noto Sans" panose="020B0502040504020204" pitchFamily="34" charset="0"/>
                         </a:rPr>
-                        <a:t>18.2</a:t>
+                        <a:t>18.8</a:t>
                       </a:r>
                     </a:p>
                   </a:txBody>
@@ -24750,7 +24750,7 @@
                           <a:effectLst/>
                           <a:latin typeface="Noto Sans" panose="020B0502040504020204" pitchFamily="34" charset="0"/>
                         </a:rPr>
-                        <a:t>26.0</a:t>
+                        <a:t>23.6</a:t>
                       </a:r>
                     </a:p>
                   </a:txBody>
@@ -24796,7 +24796,7 @@
                           <a:effectLst/>
                           <a:latin typeface="Noto Sans" panose="020B0502040504020204" pitchFamily="34" charset="0"/>
                         </a:rPr>
-                        <a:t>16.2</a:t>
+                        <a:t>15.0</a:t>
                       </a:r>
                     </a:p>
                   </a:txBody>
@@ -24839,7 +24839,7 @@
                           <a:effectLst/>
                           <a:latin typeface="Noto Sans" panose="020B0502040504020204" pitchFamily="34" charset="0"/>
                         </a:rPr>
-                        <a:t>10.5</a:t>
+                        <a:t>10.0</a:t>
                       </a:r>
                     </a:p>
                   </a:txBody>
@@ -25155,7 +25155,7 @@
                           <a:effectLst/>
                           <a:latin typeface="Noto Sans" panose="020B0502040504020204" pitchFamily="34" charset="0"/>
                         </a:rPr>
-                        <a:t>1.8</a:t>
+                        <a:t>1.7</a:t>
                       </a:r>
                     </a:p>
                   </a:txBody>
@@ -25511,7 +25511,7 @@
                           <a:effectLst/>
                           <a:latin typeface="Noto Sans" panose="020B0502040504020204" pitchFamily="34" charset="0"/>
                         </a:rPr>
-                        <a:t>1,013,264</a:t>
+                        <a:t>1,007,118</a:t>
                       </a:r>
                     </a:p>
                   </a:txBody>
@@ -25557,7 +25557,7 @@
                           <a:effectLst/>
                           <a:latin typeface="Noto Sans" panose="020B0502040504020204" pitchFamily="34" charset="0"/>
                         </a:rPr>
-                        <a:t>1,145,118</a:t>
+                        <a:t>1,139,005</a:t>
                       </a:r>
                     </a:p>
                   </a:txBody>
@@ -25600,7 +25600,7 @@
                           <a:effectLst/>
                           <a:latin typeface="Noto Sans" panose="020B0502040504020204" pitchFamily="34" charset="0"/>
                         </a:rPr>
-                        <a:t>1,307,669</a:t>
+                        <a:t>1,301,528</a:t>
                       </a:r>
                     </a:p>
                   </a:txBody>
@@ -25896,7 +25896,7 @@
                           <a:effectLst/>
                           <a:latin typeface="Noto Sans" panose="020B0502040504020204" pitchFamily="34" charset="0"/>
                         </a:rPr>
-                        <a:t>66,097</a:t>
+                        <a:t>66,706</a:t>
                       </a:r>
                     </a:p>
                   </a:txBody>
@@ -25942,7 +25942,7 @@
                           <a:effectLst/>
                           <a:latin typeface="Noto Sans" panose="020B0502040504020204" pitchFamily="34" charset="0"/>
                         </a:rPr>
-                        <a:t>75,987</a:t>
+                        <a:t>77,400</a:t>
                       </a:r>
                     </a:p>
                   </a:txBody>
@@ -25985,7 +25985,7 @@
                           <a:effectLst/>
                           <a:latin typeface="Noto Sans" panose="020B0502040504020204" pitchFamily="34" charset="0"/>
                         </a:rPr>
-                        <a:t>91,254</a:t>
+                        <a:t>93,436</a:t>
                       </a:r>
                     </a:p>
                   </a:txBody>
@@ -26336,7 +26336,7 @@
                           <a:effectLst/>
                           <a:latin typeface="Noto Sans" panose="020B0502040504020204" pitchFamily="34" charset="0"/>
                         </a:rPr>
-                        <a:t>32,080</a:t>
+                        <a:t>32,379</a:t>
                       </a:r>
                     </a:p>
                   </a:txBody>
@@ -26386,7 +26386,7 @@
                           <a:effectLst/>
                           <a:latin typeface="Noto Sans" panose="020B0502040504020204" pitchFamily="34" charset="0"/>
                         </a:rPr>
-                        <a:t>36,880</a:t>
+                        <a:t>37,570</a:t>
                       </a:r>
                     </a:p>
                   </a:txBody>
@@ -26433,7 +26433,7 @@
                           <a:effectLst/>
                           <a:latin typeface="Noto Sans" panose="020B0502040504020204" pitchFamily="34" charset="0"/>
                         </a:rPr>
-                        <a:t>44,290</a:t>
+                        <a:t>45,354</a:t>
                       </a:r>
                     </a:p>
                   </a:txBody>

--- a/MASVN_RS_WM_2H26_outlook_Equity_VN_2026_STBFPT_31July2026.pptx
+++ b/MASVN_RS_WM_2H26_outlook_Equity_VN_2026_STBFPT_31July2026.pptx
@@ -10211,7 +10211,7 @@
                           <a:ea typeface="Noto Sans" panose="020B0502040504020204" pitchFamily="34" charset="0"/>
                           <a:cs typeface="Noto Sans" panose="020B0502040504020204" pitchFamily="34" charset="0"/>
                         </a:rPr>
-                        <a:t>6,786</a:t>
+                        <a:t>6,761</a:t>
                       </a:r>
                     </a:p>
                   </a:txBody>
@@ -10376,7 +10376,7 @@
                           <a:ea typeface="Noto Sans" panose="020B0502040504020204" pitchFamily="34" charset="0"/>
                           <a:cs typeface="Noto Sans" panose="020B0502040504020204" pitchFamily="34" charset="0"/>
                         </a:rPr>
-                        <a:t>14.3</a:t>
+                        <a:t>13.8</a:t>
                       </a:r>
                     </a:p>
                   </a:txBody>
@@ -10472,7 +10472,7 @@
                           <a:ea typeface="Noto Sans" panose="020B0502040504020204" pitchFamily="34" charset="0"/>
                           <a:cs typeface="Noto Sans" panose="020B0502040504020204" pitchFamily="34" charset="0"/>
                         </a:rPr>
-                        <a:t>23.6</a:t>
+                        <a:t>23.7</a:t>
                       </a:r>
                     </a:p>
                   </a:txBody>
@@ -11915,7 +11915,7 @@
                 <a:ea typeface="Noto Sans" panose="020B0502040504020204" pitchFamily="34" charset="0"/>
                 <a:cs typeface="Noto Sans" panose="020B0502040504020204" pitchFamily="34" charset="0"/>
               </a:rPr>
-              <a:t>STB recorded VND7,331bn of PBT in 1H25 but only VND297bn in 2H25, as 4Q25 registered a pre-tax loss of approximately VND3,360bn on a provisioning charge of around VND9,232bn. We raise FY26F PBT to VND8,716bn (+14.3% YoY) from VND7,934bn, entirely on the cost line: 1H26 CIR came in at 35.6% against the 42.9% previously carried for the full year, and we now assume 39.9% (-0.8%p YoY), which still allows 2H26 operating expense to run 10.9% above 1H26. That implies 2H26 PBT of approximately VND4,580bn — around 15x the 2H25 base and 10.7% above the 1H26 level. Other FY26F assumptions: NII of VND27,010bn (+1.2% YoY), NIM of 2.94% (-38bps YoY) and a provisioning charge of VND11.1tn (-2.6% YoY); we flag that 1H26 loan growth of 1.5% sits well below the 11.7% carried for the full year. Separately, STB has taken possession of 507 land-use right certificates at LDG's Viva City project in Dong Nai against overdue principal of nearly VND350bn; the exposure is immaterial to the portfolio but illustrates the collateral-resolution channel the 2H26 write-off programme depends on.</a:t>
+              <a:t>STB recorded VND7,331bn of PBT in 1H25 but only VND297bn in 2H25, as 4Q25 registered a pre-tax loss of approximately VND3,360bn on a provisioning charge of around VND9,232bn. We raise FY26F PBT to VND8,683bn (+13.8% YoY) from VND7,934bn, entirely on the cost line: 1H26 CIR came in at 35.6% against the 42.9% previously carried for the full year, and we now assume 40.0% (-0.7%p YoY), easing to 38.0% in FY27F and 36.0% in FY28F. That still allows 2H26 operating expense to run 11.5% above 1H26, and implies 2H26 PBT of approximately VND4,547bn — around 15x the 2H25 base and 9.9% above the 1H26 level. Other FY26F assumptions: NII of VND27,010bn (+1.2% YoY), NIM of 2.94% (-38bps YoY) and a provisioning charge of VND11.1tn (-2.6% YoY); we flag that 1H26 loan growth of 1.5% sits well below the 11.7% carried for the full year. Separately, STB has taken possession of 507 land-use right certificates at LDG's Viva City project in Dong Nai against overdue principal of nearly VND350bn; the exposure is immaterial to the portfolio but illustrates the collateral-resolution channel the 2H26 write-off programme depends on.</a:t>
             </a:r>
           </a:p>
           <a:p>
@@ -13365,7 +13365,7 @@
                           <a:effectLst/>
                           <a:latin typeface="Noto Sans" panose="020B0502040504020204" pitchFamily="34" charset="0"/>
                         </a:rPr>
-                        <a:t>8,716</a:t>
+                        <a:t>8,683</a:t>
                       </a:r>
                     </a:p>
                   </a:txBody>
@@ -13411,7 +13411,7 @@
                           <a:effectLst/>
                           <a:latin typeface="Noto Sans" panose="020B0502040504020204" pitchFamily="34" charset="0"/>
                         </a:rPr>
-                        <a:t>13,734</a:t>
+                        <a:t>14,434</a:t>
                       </a:r>
                     </a:p>
                   </a:txBody>
@@ -13454,7 +13454,7 @@
                           <a:effectLst/>
                           <a:latin typeface="Noto Sans" panose="020B0502040504020204" pitchFamily="34" charset="0"/>
                         </a:rPr>
-                        <a:t>20,596</a:t>
+                        <a:t>21,483</a:t>
                       </a:r>
                     </a:p>
                   </a:txBody>
@@ -13681,7 +13681,7 @@
                           <a:effectLst/>
                           <a:latin typeface="Noto Sans" panose="020B0502040504020204" pitchFamily="34" charset="0"/>
                         </a:rPr>
-                        <a:t>6,786</a:t>
+                        <a:t>6,761</a:t>
                       </a:r>
                     </a:p>
                   </a:txBody>
@@ -13727,7 +13727,7 @@
                           <a:effectLst/>
                           <a:latin typeface="Noto Sans" panose="020B0502040504020204" pitchFamily="34" charset="0"/>
                         </a:rPr>
-                        <a:t>10,693</a:t>
+                        <a:t>11,238</a:t>
                       </a:r>
                     </a:p>
                   </a:txBody>
@@ -13770,7 +13770,7 @@
                           <a:effectLst/>
                           <a:latin typeface="Noto Sans" panose="020B0502040504020204" pitchFamily="34" charset="0"/>
                         </a:rPr>
-                        <a:t>16,036</a:t>
+                        <a:t>16,727</a:t>
                       </a:r>
                     </a:p>
                   </a:txBody>
@@ -13997,7 +13997,7 @@
                           <a:effectLst/>
                           <a:latin typeface="Noto Sans" panose="020B0502040504020204" pitchFamily="34" charset="0"/>
                         </a:rPr>
-                        <a:t>3,294</a:t>
+                        <a:t>3,282</a:t>
                       </a:r>
                     </a:p>
                   </a:txBody>
@@ -14043,7 +14043,7 @@
                           <a:effectLst/>
                           <a:latin typeface="Noto Sans" panose="020B0502040504020204" pitchFamily="34" charset="0"/>
                         </a:rPr>
-                        <a:t>5,191</a:t>
+                        <a:t>5,455</a:t>
                       </a:r>
                     </a:p>
                   </a:txBody>
@@ -14086,7 +14086,7 @@
                           <a:effectLst/>
                           <a:latin typeface="Noto Sans" panose="020B0502040504020204" pitchFamily="34" charset="0"/>
                         </a:rPr>
-                        <a:t>7,784</a:t>
+                        <a:t>8,119</a:t>
                       </a:r>
                     </a:p>
                   </a:txBody>
@@ -14313,7 +14313,7 @@
                           <a:effectLst/>
                           <a:latin typeface="Noto Sans" panose="020B0502040504020204" pitchFamily="34" charset="0"/>
                         </a:rPr>
-                        <a:t>10.2</a:t>
+                        <a:t>10.1</a:t>
                       </a:r>
                     </a:p>
                   </a:txBody>
@@ -14359,7 +14359,7 @@
                           <a:effectLst/>
                           <a:latin typeface="Noto Sans" panose="020B0502040504020204" pitchFamily="34" charset="0"/>
                         </a:rPr>
-                        <a:t>14.8</a:t>
+                        <a:t>15.5</a:t>
                       </a:r>
                     </a:p>
                   </a:txBody>
@@ -14402,7 +14402,7 @@
                           <a:effectLst/>
                           <a:latin typeface="Noto Sans" panose="020B0502040504020204" pitchFamily="34" charset="0"/>
                         </a:rPr>
-                        <a:t>18.8</a:t>
+                        <a:t>19.4</a:t>
                       </a:r>
                     </a:p>
                   </a:txBody>
@@ -14629,7 +14629,7 @@
                           <a:effectLst/>
                           <a:latin typeface="Noto Sans" panose="020B0502040504020204" pitchFamily="34" charset="0"/>
                         </a:rPr>
-                        <a:t>23.6</a:t>
+                        <a:t>23.7</a:t>
                       </a:r>
                     </a:p>
                   </a:txBody>
@@ -14675,7 +14675,7 @@
                           <a:effectLst/>
                           <a:latin typeface="Noto Sans" panose="020B0502040504020204" pitchFamily="34" charset="0"/>
                         </a:rPr>
-                        <a:t>15.0</a:t>
+                        <a:t>14.3</a:t>
                       </a:r>
                     </a:p>
                   </a:txBody>
@@ -14718,7 +14718,7 @@
                           <a:effectLst/>
                           <a:latin typeface="Noto Sans" panose="020B0502040504020204" pitchFamily="34" charset="0"/>
                         </a:rPr>
-                        <a:t>10.0</a:t>
+                        <a:t>9.6</a:t>
                       </a:r>
                     </a:p>
                   </a:txBody>
@@ -15583,7 +15583,7 @@
                           <a:effectLst/>
                           <a:latin typeface="Noto Sans" panose="020B0502040504020204" pitchFamily="34" charset="0"/>
                         </a:rPr>
-                        <a:t>66,706</a:t>
+                        <a:t>66,681</a:t>
                       </a:r>
                     </a:p>
                   </a:txBody>
@@ -15629,7 +15629,7 @@
                           <a:effectLst/>
                           <a:latin typeface="Noto Sans" panose="020B0502040504020204" pitchFamily="34" charset="0"/>
                         </a:rPr>
-                        <a:t>77,400</a:t>
+                        <a:t>77,919</a:t>
                       </a:r>
                     </a:p>
                   </a:txBody>
@@ -15672,7 +15672,7 @@
                           <a:effectLst/>
                           <a:latin typeface="Noto Sans" panose="020B0502040504020204" pitchFamily="34" charset="0"/>
                         </a:rPr>
-                        <a:t>93,436</a:t>
+                        <a:t>94,645</a:t>
                       </a:r>
                     </a:p>
                   </a:txBody>
@@ -15915,7 +15915,7 @@
                           <a:effectLst/>
                           <a:latin typeface="Noto Sans" panose="020B0502040504020204" pitchFamily="34" charset="0"/>
                         </a:rPr>
-                        <a:t>32,379</a:t>
+                        <a:t>32,367</a:t>
                       </a:r>
                     </a:p>
                   </a:txBody>
@@ -15965,7 +15965,7 @@
                           <a:effectLst/>
                           <a:latin typeface="Noto Sans" panose="020B0502040504020204" pitchFamily="34" charset="0"/>
                         </a:rPr>
-                        <a:t>37,570</a:t>
+                        <a:t>37,822</a:t>
                       </a:r>
                     </a:p>
                   </a:txBody>
@@ -16012,7 +16012,7 @@
                           <a:effectLst/>
                           <a:latin typeface="Noto Sans" panose="020B0502040504020204" pitchFamily="34" charset="0"/>
                         </a:rPr>
-                        <a:t>45,354</a:t>
+                        <a:t>45,941</a:t>
                       </a:r>
                     </a:p>
                   </a:txBody>
@@ -17895,7 +17895,7 @@
                           <a:ea typeface="Noto Sans" panose="020B0502040504020204" pitchFamily="34" charset="0"/>
                           <a:cs typeface="Noto Sans" panose="020B0502040504020204" pitchFamily="34" charset="0"/>
                         </a:rPr>
-                        <a:t>6,786</a:t>
+                        <a:t>6,761</a:t>
                       </a:r>
                     </a:p>
                   </a:txBody>
@@ -18252,7 +18252,7 @@
                           <a:ea typeface="Noto Sans" panose="020B0502040504020204" pitchFamily="34" charset="0"/>
                           <a:cs typeface="Noto Sans" panose="020B0502040504020204" pitchFamily="34" charset="0"/>
                         </a:rPr>
-                        <a:t>14.3</a:t>
+                        <a:t>13.8</a:t>
                       </a:r>
                     </a:p>
                   </a:txBody>
@@ -18348,7 +18348,7 @@
                           <a:ea typeface="Noto Sans" panose="020B0502040504020204" pitchFamily="34" charset="0"/>
                           <a:cs typeface="Noto Sans" panose="020B0502040504020204" pitchFamily="34" charset="0"/>
                         </a:rPr>
-                        <a:t>23.6</a:t>
+                        <a:t>23.7</a:t>
                       </a:r>
                     </a:p>
                   </a:txBody>
@@ -20634,7 +20634,7 @@
                 <a:ea typeface="Noto Sans" panose="020B0502040504020204" pitchFamily="34" charset="0"/>
                 <a:cs typeface="Noto Sans" panose="020B0502040504020204" pitchFamily="34" charset="0"/>
               </a:rPr>
-              <a:t>STB ghi nhận 7,331 tỷ đồng LNTT trong 1H25 nhưng chỉ 297 tỷ đồng trong 2H25, do Q4/2025 lỗ trước thuế khoảng 3,360 tỷ đồng với chi phí dự phòng khoảng 9,232 tỷ đồng. Chúng tôi nâng dự phóng LNTT FY26F lên 8,716 tỷ đồng (+14.3% CK) từ 7,934 tỷ đồng, hoàn toàn nhờ chi phí hoạt động: CIR 1H26 chỉ 35.6% so với 42.9% dự phóng cả năm trước đây, và chúng tôi điều chỉnh về 39.9% (-0.8%p CK), vẫn cho phép chi phí hoạt động 2H26 cao hơn 1H26 10.9%. Mức này hàm ý LNTT 2H26 khoảng 4,580 tỷ đồng — tương đương khoảng 15 lần nền 2H25 và cao hơn 1H26 10.7%.</a:t>
+              <a:t>STB ghi nhận 7,331 tỷ đồng LNTT trong 1H25 nhưng chỉ 297 tỷ đồng trong 2H25, do Q4/2025 lỗ trước thuế khoảng 3,360 tỷ đồng với chi phí dự phòng khoảng 9,232 tỷ đồng. Chúng tôi nâng dự phóng LNTT FY26F lên 8,683 tỷ đồng (+13.8% CK) từ 7,934 tỷ đồng, hoàn toàn nhờ chi phí hoạt động: CIR 1H26 chỉ 35.6% so với 42.9% dự phóng cả năm trước đây, và chúng tôi điều chỉnh về 40.0% (-0.7%p CK), giảm dần về 38.0% năm FY27F và 36.0% năm FY28F. Mức này vẫn cho phép chi phí hoạt động 2H26 cao hơn 1H26 11.5%, và hàm ý LNTT 2H26 khoảng 4,547 tỷ đồng — tương đương khoảng 15 lần nền 2H25 và cao hơn 1H26 9.9%.</a:t>
             </a:r>
             <a:endParaRPr lang="en-US" altLang="ko-KR" sz="800" b="0" dirty="0">
               <a:solidFill>
@@ -23414,7 +23414,7 @@
                           <a:effectLst/>
                           <a:latin typeface="Noto Sans" panose="020B0502040504020204" pitchFamily="34" charset="0"/>
                         </a:rPr>
-                        <a:t>8,716</a:t>
+                        <a:t>8,683</a:t>
                       </a:r>
                     </a:p>
                   </a:txBody>
@@ -23460,7 +23460,7 @@
                           <a:effectLst/>
                           <a:latin typeface="Noto Sans" panose="020B0502040504020204" pitchFamily="34" charset="0"/>
                         </a:rPr>
-                        <a:t>13,734</a:t>
+                        <a:t>14,434</a:t>
                       </a:r>
                     </a:p>
                   </a:txBody>
@@ -23503,7 +23503,7 @@
                           <a:effectLst/>
                           <a:latin typeface="Noto Sans" panose="020B0502040504020204" pitchFamily="34" charset="0"/>
                         </a:rPr>
-                        <a:t>20,596</a:t>
+                        <a:t>21,483</a:t>
                       </a:r>
                     </a:p>
                   </a:txBody>
@@ -23778,7 +23778,7 @@
                           <a:effectLst/>
                           <a:latin typeface="Noto Sans" panose="020B0502040504020204" pitchFamily="34" charset="0"/>
                         </a:rPr>
-                        <a:t>6,786</a:t>
+                        <a:t>6,761</a:t>
                       </a:r>
                     </a:p>
                   </a:txBody>
@@ -23824,7 +23824,7 @@
                           <a:effectLst/>
                           <a:latin typeface="Noto Sans" panose="020B0502040504020204" pitchFamily="34" charset="0"/>
                         </a:rPr>
-                        <a:t>10,693</a:t>
+                        <a:t>11,238</a:t>
                       </a:r>
                     </a:p>
                   </a:txBody>
@@ -23867,7 +23867,7 @@
                           <a:effectLst/>
                           <a:latin typeface="Noto Sans" panose="020B0502040504020204" pitchFamily="34" charset="0"/>
                         </a:rPr>
-                        <a:t>16,036</a:t>
+                        <a:t>16,727</a:t>
                       </a:r>
                     </a:p>
                   </a:txBody>
@@ -24118,7 +24118,7 @@
                           <a:effectLst/>
                           <a:latin typeface="Noto Sans" panose="020B0502040504020204" pitchFamily="34" charset="0"/>
                         </a:rPr>
-                        <a:t>3,294</a:t>
+                        <a:t>3,282</a:t>
                       </a:r>
                     </a:p>
                   </a:txBody>
@@ -24164,7 +24164,7 @@
                           <a:effectLst/>
                           <a:latin typeface="Noto Sans" panose="020B0502040504020204" pitchFamily="34" charset="0"/>
                         </a:rPr>
-                        <a:t>5,191</a:t>
+                        <a:t>5,455</a:t>
                       </a:r>
                     </a:p>
                   </a:txBody>
@@ -24207,7 +24207,7 @@
                           <a:effectLst/>
                           <a:latin typeface="Noto Sans" panose="020B0502040504020204" pitchFamily="34" charset="0"/>
                         </a:rPr>
-                        <a:t>7,784</a:t>
+                        <a:t>8,119</a:t>
                       </a:r>
                     </a:p>
                   </a:txBody>
@@ -24434,7 +24434,7 @@
                           <a:effectLst/>
                           <a:latin typeface="Noto Sans" panose="020B0502040504020204" pitchFamily="34" charset="0"/>
                         </a:rPr>
-                        <a:t>10.2</a:t>
+                        <a:t>10.1</a:t>
                       </a:r>
                     </a:p>
                   </a:txBody>
@@ -24480,7 +24480,7 @@
                           <a:effectLst/>
                           <a:latin typeface="Noto Sans" panose="020B0502040504020204" pitchFamily="34" charset="0"/>
                         </a:rPr>
-                        <a:t>14.8</a:t>
+                        <a:t>15.5</a:t>
                       </a:r>
                     </a:p>
                   </a:txBody>
@@ -24523,7 +24523,7 @@
                           <a:effectLst/>
                           <a:latin typeface="Noto Sans" panose="020B0502040504020204" pitchFamily="34" charset="0"/>
                         </a:rPr>
-                        <a:t>18.8</a:t>
+                        <a:t>19.4</a:t>
                       </a:r>
                     </a:p>
                   </a:txBody>
@@ -24750,7 +24750,7 @@
                           <a:effectLst/>
                           <a:latin typeface="Noto Sans" panose="020B0502040504020204" pitchFamily="34" charset="0"/>
                         </a:rPr>
-                        <a:t>23.6</a:t>
+                        <a:t>23.7</a:t>
                       </a:r>
                     </a:p>
                   </a:txBody>
@@ -24796,7 +24796,7 @@
                           <a:effectLst/>
                           <a:latin typeface="Noto Sans" panose="020B0502040504020204" pitchFamily="34" charset="0"/>
                         </a:rPr>
-                        <a:t>15.0</a:t>
+                        <a:t>14.3</a:t>
                       </a:r>
                     </a:p>
                   </a:txBody>
@@ -24839,7 +24839,7 @@
                           <a:effectLst/>
                           <a:latin typeface="Noto Sans" panose="020B0502040504020204" pitchFamily="34" charset="0"/>
                         </a:rPr>
-                        <a:t>10.0</a:t>
+                        <a:t>9.6</a:t>
                       </a:r>
                     </a:p>
                   </a:txBody>
@@ -25896,7 +25896,7 @@
                           <a:effectLst/>
                           <a:latin typeface="Noto Sans" panose="020B0502040504020204" pitchFamily="34" charset="0"/>
                         </a:rPr>
-                        <a:t>66,706</a:t>
+                        <a:t>66,681</a:t>
                       </a:r>
                     </a:p>
                   </a:txBody>
@@ -25942,7 +25942,7 @@
                           <a:effectLst/>
                           <a:latin typeface="Noto Sans" panose="020B0502040504020204" pitchFamily="34" charset="0"/>
                         </a:rPr>
-                        <a:t>77,400</a:t>
+                        <a:t>77,919</a:t>
                       </a:r>
                     </a:p>
                   </a:txBody>
@@ -25985,7 +25985,7 @@
                           <a:effectLst/>
                           <a:latin typeface="Noto Sans" panose="020B0502040504020204" pitchFamily="34" charset="0"/>
                         </a:rPr>
-                        <a:t>93,436</a:t>
+                        <a:t>94,645</a:t>
                       </a:r>
                     </a:p>
                   </a:txBody>
@@ -26336,7 +26336,7 @@
                           <a:effectLst/>
                           <a:latin typeface="Noto Sans" panose="020B0502040504020204" pitchFamily="34" charset="0"/>
                         </a:rPr>
-                        <a:t>32,379</a:t>
+                        <a:t>32,367</a:t>
                       </a:r>
                     </a:p>
                   </a:txBody>
@@ -26386,7 +26386,7 @@
                           <a:effectLst/>
                           <a:latin typeface="Noto Sans" panose="020B0502040504020204" pitchFamily="34" charset="0"/>
                         </a:rPr>
-                        <a:t>37,570</a:t>
+                        <a:t>37,822</a:t>
                       </a:r>
                     </a:p>
                   </a:txBody>
@@ -26433,7 +26433,7 @@
                           <a:effectLst/>
                           <a:latin typeface="Noto Sans" panose="020B0502040504020204" pitchFamily="34" charset="0"/>
                         </a:rPr>
-                        <a:t>45,354</a:t>
+                        <a:t>45,941</a:t>
                       </a:r>
                     </a:p>
                   </a:txBody>

--- a/MASVN_RS_WM_2H26_outlook_Equity_VN_2026_STBFPT_31July2026.pptx
+++ b/MASVN_RS_WM_2H26_outlook_Equity_VN_2026_STBFPT_31July2026.pptx
@@ -11785,7 +11785,7 @@
                 <a:ea typeface="Noto Sans" panose="020B0502040504020204" pitchFamily="34" charset="0"/>
                 <a:cs typeface="Noto Sans" panose="020B0502040504020204" pitchFamily="34" charset="0"/>
               </a:rPr>
-              <a:t>1H26 PBT reached VND4,136bn (-43.6% YoY), completing 51% of the VND8,100bn FY26 plan. With VND2,106bn recorded in 1Q26, 2Q26 PBT is implied at approximately VND2,030bn. The shortfall stems from continued NIM compression amid intense deposit competition and from a materially heavier provisioning charge, following VND2,024bn in 1Q26 and more than VND11,300bn for FY25 as a whole.</a:t>
+              <a:t>1H26 PBT reached VND4,136bn (-43.6% YoY), 51% of the VND8,100bn FY26 plan, of which VND2,106bn came in 1Q26. The shortfall stems from NIM compression amid deposit competition and a heavier provisioning charge.</a:t>
             </a:r>
             <a:r>
               <a:rPr kumimoji="1" lang="en-US" altLang="ko-KR" sz="800" dirty="0">
@@ -11861,7 +11861,7 @@
                 <a:ea typeface="Noto Sans" panose="020B0502040504020204" pitchFamily="34" charset="0"/>
                 <a:cs typeface="Noto Sans" panose="020B0502040504020204" pitchFamily="34" charset="0"/>
               </a:rPr>
-              <a:t>The NPL ratio reached 7.54% at end-2Q26, up 1.13%p from the beginning of the year and the highest in the system, against management guidance of approximately 5.6%. Group 3-5 balances rose approximately VND7,800bn year-to-date to VND47,957bn, of which around 67% (approximately VND32,000bn) is Group 5, while Group 4 more than doubled (+156%). We set FY26F NPL at 5.5%, from below 4.5%, and FY27F at 4.0% from 3.1%. The clean-up is funded from the reserve stock rather than the P&amp;L: reserves reached VND27.2tn at end-2Q26 — 56.7% coverage, up from 50.0% at end-FY25 — after VND7.1tn of 1H26 charges and almost no write-offs. A further VND4.0tn charge in 2H26 funds write-offs of VND11.8tn, or 37% of the Group 5 balance, leaving reserves at VND19.0tn and coverage back at 50.0%. Holding coverage at 50% is what caps the improvement at 5.5%, and it also requires 2H26 NPL formation to slow to roughly a quarter of the 1H26 pace. The former 4.5% assumption needed some VND18tn of write-offs the reserve stock cannot support.</a:t>
+              <a:t>The NPL ratio reached 7.54% at end-2Q26, up 1.13%p year-to-date and the highest in the system, against management guidance of approximately 5.6%. Group 3-5 balances rose approximately VND7,800bn to VND47,957bn, of which about 67% (VND32,000bn) is Group 5, while Group 4 more than doubled (+156%). We set FY26F NPL at 5.5%, from below 4.5%, and FY27F at 4.0% from 3.1%. The clean-up is reserve-funded, not P&amp;L-funded: reserves reached VND27.2tn at end-2Q26 — 56.7% coverage, up from 50.0% at end-FY25 — after VND7.1tn of 1H26 charges and almost no write-offs. A further VND4.0tn charge in 2H26 funds write-offs of VND11.8tn, or 37% of the Group 5 balance, leaving coverage back at 50.0%. Holding coverage at 50% is what caps the improvement at 5.5%, and it needs 2H26 NPL formation at roughly a quarter of the 1H26 pace.</a:t>
             </a:r>
           </a:p>
           <a:p>
@@ -11915,7 +11915,7 @@
                 <a:ea typeface="Noto Sans" panose="020B0502040504020204" pitchFamily="34" charset="0"/>
                 <a:cs typeface="Noto Sans" panose="020B0502040504020204" pitchFamily="34" charset="0"/>
               </a:rPr>
-              <a:t>STB recorded VND7,331bn of PBT in 1H25 but only VND297bn in 2H25, as 4Q25 registered a pre-tax loss of approximately VND3,360bn on a provisioning charge of around VND9,232bn. We raise FY26F PBT to VND8,683bn (+13.8% YoY) from VND7,934bn, entirely on the cost line: 1H26 CIR came in at 35.6% against the 42.9% previously carried for the full year, and we now assume 40.0% (-0.7%p YoY), easing to 38.0% in FY27F and 36.0% in FY28F. That still allows 2H26 operating expense to run 11.5% above 1H26, and implies 2H26 PBT of approximately VND4,547bn — around 15x the 2H25 base and 9.9% above the 1H26 level. Other FY26F assumptions: NII of VND27,010bn (+1.2% YoY), NIM of 2.94% (-38bps YoY) and a provisioning charge of VND11.1tn (-2.6% YoY); we flag that 1H26 loan growth of 1.5% sits well below the 11.7% carried for the full year. Separately, STB has taken possession of 507 land-use right certificates at LDG's Viva City project in Dong Nai against overdue principal of nearly VND350bn; the exposure is immaterial to the portfolio but illustrates the collateral-resolution channel the 2H26 write-off programme depends on.</a:t>
+              <a:t>STB recorded VND7,331bn of PBT in 1H25 but only VND297bn in 2H25, as 4Q25 registered a pre-tax loss of VND3,360bn. We raise FY26F PBT to VND8,683bn (+13.8% YoY) from VND7,934bn, entirely on the cost line: 1H26 CIR came in at 35.6% against the 42.9% previously carried, and we now assume 40.0% (-0.7%p YoY), 38.0% in FY27F and 36.0% in FY28F. That still allows 2H26 opex 11.5% above 1H26, and implies 2H26 PBT of VND4,547bn — around 15x the 2H25 base. Other FY26F assumptions: NII of VND27,010bn (+1.2% YoY), NIM of 2.94% (-38bps YoY) and provisioning of VND11.1tn (-2.6% YoY); we flag 1H26 loan growth of 1.5% against the 11.7% carried for the full year. Separately, STB's seizure of 507 land-use right certificates at LDG's Viva City against VND350bn of overdue principal is immaterial in size but shows the collateral channel the write-off programme depends on.</a:t>
             </a:r>
           </a:p>
           <a:p>
@@ -20514,7 +20514,7 @@
                 <a:ea typeface="Noto Sans" panose="020B0502040504020204" pitchFamily="34" charset="0"/>
                 <a:cs typeface="Noto Sans" panose="020B0502040504020204" pitchFamily="34" charset="0"/>
               </a:rPr>
-              <a:t>LNTT 1H26 đạt 4,136 tỷ đồng (-43.6% CK), hoàn thành 51% kế hoạch năm 8,100 tỷ đồng. Với 2,106 tỷ đồng ghi nhận trong Q1/2026, LNTT Q2/2026 ước tính khoảng 2,030 tỷ đồng. Mức sụt giảm đến từ việc NIM tiếp tục thu hẹp trong bối cảnh cạnh tranh huy động gay gắt và từ chi phí dự phòng tăng đáng kể, sau mức 2,024 tỷ đồng của Q1/2026 và hơn 11,300 tỷ đồng của cả năm 2025.</a:t>
+              <a:t>LNTT 1H26 đạt 4,136 tỷ đồng (-43.6% CK), hoàn thành 51% kế hoạch năm 8,100 tỷ đồng, trong đó Q1/2026 đóng góp 2,106 tỷ đồng. Mức sụt giảm đến từ NIM thu hẹp trong bối cảnh cạnh tranh huy động gay gắt và chi phí dự phòng tăng đáng kể.</a:t>
             </a:r>
           </a:p>
           <a:p>
@@ -20539,7 +20539,7 @@
                 <a:ea typeface="Noto Sans" panose="020B0502040504020204" pitchFamily="34" charset="0"/>
                 <a:cs typeface="Noto Sans" panose="020B0502040504020204" pitchFamily="34" charset="0"/>
               </a:rPr>
-              <a:t>Chất lượng tài sản suy giảm vượt mức ban lãnh đạo dự kiến: tỷ lệ nợ xấu đạt 7.54% cuối Q2/2026, tăng 1.13%p so với đầu năm và cao nhất hệ thống, so với ước tính khoảng 5.6% của ban lãnh đạo. Dư nợ nhóm 3-5 tăng khoảng 7,800 tỷ đồng so với đầu năm, lên 47,957 tỷ đồng, trong đó khoảng 67% (32,000 tỷ đồng) xếp nhóm 5, nợ nhóm 4 tăng hơn gấp đôi (+156%). Chúng tôi đặt giả định nợ xấu FY26F ở 5.5% (từ dưới 4.5%) và FY27F ở 4.0% (từ 3.1%). Quá trình xử lý được tài trợ từ nguồn dự phòng đã trích, không phải từ lợi nhuận: dự phòng đạt 27.2 nghìn tỷ đồng cuối Q2/2026 — bao phủ 56.7%, tăng từ 50.0% cuối 2025 — sau khi trích 7.1 nghìn tỷ đồng trong 1H26 và gần như chưa xóa nợ. Trích thêm 4.0 nghìn tỷ đồng trong 2H26 đủ để xóa 11.8 nghìn tỷ đồng, tương đương 37% dư nợ nhóm 5, đưa dự phòng còn 19.0 nghìn tỷ đồng và bao phủ về 50.0%. Chính việc giữ bao phủ ở 50% giới hạn mức cải thiện ở 5.5%, đồng thời cần nợ xấu phát sinh mới trong 2H26 chậm lại còn khoảng một phần tư nhịp 1H26. Giả định 4.5% trước đây cần tới khoảng 18 nghìn tỷ đồng xóa nợ, vượt quá nguồn dự phòng hiện có.</a:t>
+              <a:t>Chất lượng tài sản suy giảm vượt mức ban lãnh đạo dự kiến: tỷ lệ nợ xấu đạt 7.54% cuối Q2/2026, tăng 1.13%p so với đầu năm và cao nhất hệ thống, so với ước tính khoảng 5.6% của ban lãnh đạo. Dư nợ nhóm 3-5 tăng khoảng 7,800 tỷ đồng lên 47,957 tỷ đồng, trong đó khoảng 67% (32,000 tỷ đồng) xếp nhóm 5, nợ nhóm 4 tăng hơn gấp đôi (+156%). Chúng tôi đặt giả định nợ xấu FY26F ở 5.5% (từ dưới 4.5%) và FY27F ở 4.0% (từ 3.1%). Quá trình xử lý tài trợ từ nguồn dự phòng đã trích, không phải từ lợi nhuận: dự phòng đạt 27.2 nghìn tỷ đồng cuối Q2/2026 — bao phủ 56.7%, tăng từ 50.0% cuối 2025 — sau khi trích 7.1 nghìn tỷ đồng trong 1H26 và gần như chưa xóa nợ. Trích thêm 4.0 nghìn tỷ đồng trong 2H26 đủ để xóa 11.8 nghìn tỷ đồng, tương đương 37% dư nợ nhóm 5, đưa bao phủ về 50.0%. Việc giữ bao phủ ở 50% giới hạn mức cải thiện ở 5.5%, đồng thời cần nợ xấu phát sinh mới 2H26 chỉ bằng khoảng một phần tư nhịp 1H26.</a:t>
             </a:r>
             <a:endParaRPr kumimoji="1" lang="en-US" altLang="ko-KR" sz="800" b="0" dirty="0">
               <a:solidFill>
@@ -20634,7 +20634,7 @@
                 <a:ea typeface="Noto Sans" panose="020B0502040504020204" pitchFamily="34" charset="0"/>
                 <a:cs typeface="Noto Sans" panose="020B0502040504020204" pitchFamily="34" charset="0"/>
               </a:rPr>
-              <a:t>STB ghi nhận 7,331 tỷ đồng LNTT trong 1H25 nhưng chỉ 297 tỷ đồng trong 2H25, do Q4/2025 lỗ trước thuế khoảng 3,360 tỷ đồng với chi phí dự phòng khoảng 9,232 tỷ đồng. Chúng tôi nâng dự phóng LNTT FY26F lên 8,683 tỷ đồng (+13.8% CK) từ 7,934 tỷ đồng, hoàn toàn nhờ chi phí hoạt động: CIR 1H26 chỉ 35.6% so với 42.9% dự phóng cả năm trước đây, và chúng tôi điều chỉnh về 40.0% (-0.7%p CK), giảm dần về 38.0% năm FY27F và 36.0% năm FY28F. Mức này vẫn cho phép chi phí hoạt động 2H26 cao hơn 1H26 11.5%, và hàm ý LNTT 2H26 khoảng 4,547 tỷ đồng — tương đương khoảng 15 lần nền 2H25 và cao hơn 1H26 9.9%.</a:t>
+              <a:t>STB ghi nhận 7,331 tỷ đồng LNTT trong 1H25 nhưng chỉ 297 tỷ đồng trong 2H25, do Q4/2025 lỗ trước thuế 3,360 tỷ đồng. Chúng tôi nâng dự phóng LNTT FY26F lên 8,683 tỷ đồng (+13.8% CK) từ 7,934 tỷ đồng, hoàn toàn nhờ chi phí hoạt động: CIR 1H26 chỉ 35.6% so với 42.9% dự phóng trước đây, và chúng tôi điều chỉnh về 40.0% (-0.7%p CK), 38.0% FY27F và 36.0% FY28F. Mức này vẫn cho phép chi phí hoạt động 2H26 cao hơn 1H26 11.5%, hàm ý LNTT 2H26 khoảng 4,547 tỷ đồng — khoảng 15 lần nền 2H25.</a:t>
             </a:r>
             <a:endParaRPr lang="en-US" altLang="ko-KR" sz="800" b="0" dirty="0">
               <a:solidFill>
@@ -20671,7 +20671,7 @@
                 <a:ea typeface="Noto Sans" panose="020B0502040504020204" pitchFamily="34" charset="0"/>
                 <a:cs typeface="Noto Sans" panose="020B0502040504020204" pitchFamily="34" charset="0"/>
               </a:rPr>
-              <a:t>Các giả định FY26F khác: NII 27,010 tỷ đồng (+1.2% CK), NIM 2.94% (-38bps CK) và chi phí dự phòng 11.1 nghìn tỷ đồng (-2.6% CK); lưu ý tăng trưởng tín dụng 1H26 chỉ đạt 1.5%, thấp hơn nhiều so với mức 11.7% dự phóng cả năm. Ở diễn biến khác, Sacombank đã thu giữ 507 giấy chứng nhận quyền sử dụng đất thuộc dự án Viva City (Đồng Nai) đối với dư nợ gốc quá hạn gần 350 tỷ đồng; quy mô chưa trọng yếu nhưng thể hiện kênh xử lý tài sản đảm bảo mà đà hồi phục 2H26 phụ thuộc vào.</a:t>
+              <a:t>Các giả định FY26F khác: NII 27,010 tỷ đồng (+1.2% CK), NIM 2.94% (-38bps CK) và chi phí dự phòng 11.1 nghìn tỷ đồng (-2.6% CK); lưu ý tăng trưởng tín dụng 1H26 chỉ 1.5% so với 11.7% dự phóng cả năm. Ở diễn biến khác, việc Sacombank thu giữ 507 giấy chứng nhận quyền sử dụng đất tại dự án Viva City đối với 350 tỷ đồng dư nợ gốc quá hạn tuy chưa trọng yếu nhưng cho thấy kênh xử lý tài sản đảm bảo mà chương trình xóa nợ 2H26 phụ thuộc vào.</a:t>
             </a:r>
             <a:r>
               <a:rPr kumimoji="1" lang="en-US" altLang="ko-KR" sz="800" b="1" i="0" u="none" strike="noStrike" kern="1200" cap="none" spc="0" normalizeH="0" baseline="0" noProof="0" dirty="0">

--- a/MASVN_RS_WM_2H26_outlook_Equity_VN_2026_STBFPT_31July2026.pptx
+++ b/MASVN_RS_WM_2H26_outlook_Equity_VN_2026_STBFPT_31July2026.pptx
@@ -10211,7 +10211,7 @@
                           <a:ea typeface="Noto Sans" panose="020B0502040504020204" pitchFamily="34" charset="0"/>
                           <a:cs typeface="Noto Sans" panose="020B0502040504020204" pitchFamily="34" charset="0"/>
                         </a:rPr>
-                        <a:t>6,761</a:t>
+                        <a:t>6,623</a:t>
                       </a:r>
                     </a:p>
                   </a:txBody>
@@ -10376,7 +10376,7 @@
                           <a:ea typeface="Noto Sans" panose="020B0502040504020204" pitchFamily="34" charset="0"/>
                           <a:cs typeface="Noto Sans" panose="020B0502040504020204" pitchFamily="34" charset="0"/>
                         </a:rPr>
-                        <a:t>13.8</a:t>
+                        <a:t>11.5</a:t>
                       </a:r>
                     </a:p>
                   </a:txBody>
@@ -10472,7 +10472,7 @@
                           <a:ea typeface="Noto Sans" panose="020B0502040504020204" pitchFamily="34" charset="0"/>
                           <a:cs typeface="Noto Sans" panose="020B0502040504020204" pitchFamily="34" charset="0"/>
                         </a:rPr>
-                        <a:t>23.7</a:t>
+                        <a:t>24.2</a:t>
                       </a:r>
                     </a:p>
                   </a:txBody>
@@ -11915,7 +11915,7 @@
                 <a:ea typeface="Noto Sans" panose="020B0502040504020204" pitchFamily="34" charset="0"/>
                 <a:cs typeface="Noto Sans" panose="020B0502040504020204" pitchFamily="34" charset="0"/>
               </a:rPr>
-              <a:t>STB recorded VND7,331bn of PBT in 1H25 but only VND297bn in 2H25, as 4Q25 registered a pre-tax loss of VND3,360bn. We raise FY26F PBT to VND8,683bn (+13.8% YoY) from VND7,934bn, entirely on the cost line: 1H26 CIR came in at 35.6% against the 42.9% previously carried, and we now assume 40.0% (-0.7%p YoY), 38.0% in FY27F and 36.0% in FY28F. That still allows 2H26 opex 11.5% above 1H26, and implies 2H26 PBT of VND4,547bn — around 15x the 2H25 base. Other FY26F assumptions: NII of VND27,010bn (+1.2% YoY), NIM of 2.94% (-38bps YoY) and provisioning of VND11.1tn (-2.6% YoY); we flag 1H26 loan growth of 1.5% against the 11.7% carried for the full year. Separately, STB's seizure of 507 land-use right certificates at LDG's Viva City against VND350bn of overdue principal is immaterial in size but shows the collateral channel the write-off programme depends on.</a:t>
+              <a:t>STB recorded VND7,331bn of PBT in 1H25 but only VND297bn in 2H25, as 4Q25 registered a pre-tax loss of VND3,360bn. We raise FY26F PBT to VND8,507bn (+11.5% YoY) from VND7,934bn, entirely on the cost line: 1H26 CIR came in at 35.6% against the 42.9% previously carried, and we now assume 40.0% (-0.7%p YoY), 38.0% in FY27F and 36.0% in FY28F. That still allows 2H26 opex 9.6% above 1H26, and implies 2H26 PBT of VND4,371bn — around 15x the 2H25 base. Other FY26F assumptions: NII of VND26,712bn (+0.1% YoY), NIM of 2.92% (-40bps YoY) and provisioning of VND11.1tn (-2.6% YoY); we flag 1H26 loan growth of 1.5% against the 11.7% carried for the full year. Separately, STB's seizure of 507 land-use right certificates at LDG's Viva City against VND350bn of overdue principal is immaterial in size but shows the collateral channel the write-off programme depends on.</a:t>
             </a:r>
           </a:p>
           <a:p>
@@ -12721,7 +12721,7 @@
                           <a:effectLst/>
                           <a:latin typeface="Noto Sans" panose="020B0502040504020204" pitchFamily="34" charset="0"/>
                         </a:rPr>
-                        <a:t>27,010</a:t>
+                        <a:t>26,712</a:t>
                       </a:r>
                     </a:p>
                   </a:txBody>
@@ -12771,7 +12771,7 @@
                           <a:effectLst/>
                           <a:latin typeface="Noto Sans" panose="020B0502040504020204" pitchFamily="34" charset="0"/>
                         </a:rPr>
-                        <a:t>30,200</a:t>
+                        <a:t>29,560</a:t>
                       </a:r>
                     </a:p>
                   </a:txBody>
@@ -12818,7 +12818,7 @@
                           <a:effectLst/>
                           <a:latin typeface="Noto Sans" panose="020B0502040504020204" pitchFamily="34" charset="0"/>
                         </a:rPr>
-                        <a:t>34,640</a:t>
+                        <a:t>34,095</a:t>
                       </a:r>
                     </a:p>
                   </a:txBody>
@@ -13095,7 +13095,7 @@
                           <a:effectLst/>
                           <a:latin typeface="Noto Sans" panose="020B0502040504020204" pitchFamily="34" charset="0"/>
                         </a:rPr>
-                        <a:t>6,408</a:t>
+                        <a:t>7,382</a:t>
                       </a:r>
                     </a:p>
                   </a:txBody>
@@ -13138,7 +13138,7 @@
                           <a:effectLst/>
                           <a:latin typeface="Noto Sans" panose="020B0502040504020204" pitchFamily="34" charset="0"/>
                         </a:rPr>
-                        <a:t>8,038</a:t>
+                        <a:t>8,031</a:t>
                       </a:r>
                     </a:p>
                   </a:txBody>
@@ -13365,7 +13365,7 @@
                           <a:effectLst/>
                           <a:latin typeface="Noto Sans" panose="020B0502040504020204" pitchFamily="34" charset="0"/>
                         </a:rPr>
-                        <a:t>8,683</a:t>
+                        <a:t>8,507</a:t>
                       </a:r>
                     </a:p>
                   </a:txBody>
@@ -13411,7 +13411,7 @@
                           <a:effectLst/>
                           <a:latin typeface="Noto Sans" panose="020B0502040504020204" pitchFamily="34" charset="0"/>
                         </a:rPr>
-                        <a:t>14,434</a:t>
+                        <a:t>14,676</a:t>
                       </a:r>
                     </a:p>
                   </a:txBody>
@@ -13454,7 +13454,7 @@
                           <a:effectLst/>
                           <a:latin typeface="Noto Sans" panose="020B0502040504020204" pitchFamily="34" charset="0"/>
                         </a:rPr>
-                        <a:t>21,483</a:t>
+                        <a:t>21,145</a:t>
                       </a:r>
                     </a:p>
                   </a:txBody>
@@ -13681,7 +13681,7 @@
                           <a:effectLst/>
                           <a:latin typeface="Noto Sans" panose="020B0502040504020204" pitchFamily="34" charset="0"/>
                         </a:rPr>
-                        <a:t>6,761</a:t>
+                        <a:t>6,623</a:t>
                       </a:r>
                     </a:p>
                   </a:txBody>
@@ -13727,7 +13727,7 @@
                           <a:effectLst/>
                           <a:latin typeface="Noto Sans" panose="020B0502040504020204" pitchFamily="34" charset="0"/>
                         </a:rPr>
-                        <a:t>11,238</a:t>
+                        <a:t>11,427</a:t>
                       </a:r>
                     </a:p>
                   </a:txBody>
@@ -13770,7 +13770,7 @@
                           <a:effectLst/>
                           <a:latin typeface="Noto Sans" panose="020B0502040504020204" pitchFamily="34" charset="0"/>
                         </a:rPr>
-                        <a:t>16,727</a:t>
+                        <a:t>16,463</a:t>
                       </a:r>
                     </a:p>
                   </a:txBody>
@@ -13997,7 +13997,7 @@
                           <a:effectLst/>
                           <a:latin typeface="Noto Sans" panose="020B0502040504020204" pitchFamily="34" charset="0"/>
                         </a:rPr>
-                        <a:t>3,282</a:t>
+                        <a:t>3,215</a:t>
                       </a:r>
                     </a:p>
                   </a:txBody>
@@ -14043,7 +14043,7 @@
                           <a:effectLst/>
                           <a:latin typeface="Noto Sans" panose="020B0502040504020204" pitchFamily="34" charset="0"/>
                         </a:rPr>
-                        <a:t>5,455</a:t>
+                        <a:t>5,546</a:t>
                       </a:r>
                     </a:p>
                   </a:txBody>
@@ -14086,7 +14086,7 @@
                           <a:effectLst/>
                           <a:latin typeface="Noto Sans" panose="020B0502040504020204" pitchFamily="34" charset="0"/>
                         </a:rPr>
-                        <a:t>8,119</a:t>
+                        <a:t>7,991</a:t>
                       </a:r>
                     </a:p>
                   </a:txBody>
@@ -14313,7 +14313,7 @@
                           <a:effectLst/>
                           <a:latin typeface="Noto Sans" panose="020B0502040504020204" pitchFamily="34" charset="0"/>
                         </a:rPr>
-                        <a:t>10.1</a:t>
+                        <a:t>10.0</a:t>
                       </a:r>
                     </a:p>
                   </a:txBody>
@@ -14359,7 +14359,7 @@
                           <a:effectLst/>
                           <a:latin typeface="Noto Sans" panose="020B0502040504020204" pitchFamily="34" charset="0"/>
                         </a:rPr>
-                        <a:t>15.5</a:t>
+                        <a:t>15.8</a:t>
                       </a:r>
                     </a:p>
                   </a:txBody>
@@ -14402,7 +14402,7 @@
                           <a:effectLst/>
                           <a:latin typeface="Noto Sans" panose="020B0502040504020204" pitchFamily="34" charset="0"/>
                         </a:rPr>
-                        <a:t>19.4</a:t>
+                        <a:t>19.1</a:t>
                       </a:r>
                     </a:p>
                   </a:txBody>
@@ -14629,7 +14629,7 @@
                           <a:effectLst/>
                           <a:latin typeface="Noto Sans" panose="020B0502040504020204" pitchFamily="34" charset="0"/>
                         </a:rPr>
-                        <a:t>23.7</a:t>
+                        <a:t>24.2</a:t>
                       </a:r>
                     </a:p>
                   </a:txBody>
@@ -14675,7 +14675,7 @@
                           <a:effectLst/>
                           <a:latin typeface="Noto Sans" panose="020B0502040504020204" pitchFamily="34" charset="0"/>
                         </a:rPr>
-                        <a:t>14.3</a:t>
+                        <a:t>14.0</a:t>
                       </a:r>
                     </a:p>
                   </a:txBody>
@@ -14718,7 +14718,7 @@
                           <a:effectLst/>
                           <a:latin typeface="Noto Sans" panose="020B0502040504020204" pitchFamily="34" charset="0"/>
                         </a:rPr>
-                        <a:t>9.6</a:t>
+                        <a:t>9.7</a:t>
                       </a:r>
                     </a:p>
                   </a:txBody>
@@ -15261,7 +15261,7 @@
                           <a:effectLst/>
                           <a:latin typeface="Noto Sans" panose="020B0502040504020204" pitchFamily="34" charset="0"/>
                         </a:rPr>
-                        <a:t>1,007,118</a:t>
+                        <a:t>1,014,277</a:t>
                       </a:r>
                     </a:p>
                   </a:txBody>
@@ -15307,7 +15307,7 @@
                           <a:effectLst/>
                           <a:latin typeface="Noto Sans" panose="020B0502040504020204" pitchFamily="34" charset="0"/>
                         </a:rPr>
-                        <a:t>1,139,005</a:t>
+                        <a:t>1,129,957</a:t>
                       </a:r>
                     </a:p>
                   </a:txBody>
@@ -15350,7 +15350,7 @@
                           <a:effectLst/>
                           <a:latin typeface="Noto Sans" panose="020B0502040504020204" pitchFamily="34" charset="0"/>
                         </a:rPr>
-                        <a:t>1,301,528</a:t>
+                        <a:t>1,271,622</a:t>
                       </a:r>
                     </a:p>
                   </a:txBody>
@@ -15583,7 +15583,7 @@
                           <a:effectLst/>
                           <a:latin typeface="Noto Sans" panose="020B0502040504020204" pitchFamily="34" charset="0"/>
                         </a:rPr>
-                        <a:t>66,681</a:t>
+                        <a:t>66,544</a:t>
                       </a:r>
                     </a:p>
                   </a:txBody>
@@ -15629,7 +15629,7 @@
                           <a:effectLst/>
                           <a:latin typeface="Noto Sans" panose="020B0502040504020204" pitchFamily="34" charset="0"/>
                         </a:rPr>
-                        <a:t>77,919</a:t>
+                        <a:t>77,970</a:t>
                       </a:r>
                     </a:p>
                   </a:txBody>
@@ -15672,7 +15672,7 @@
                           <a:effectLst/>
                           <a:latin typeface="Noto Sans" panose="020B0502040504020204" pitchFamily="34" charset="0"/>
                         </a:rPr>
-                        <a:t>94,645</a:t>
+                        <a:t>94,434</a:t>
                       </a:r>
                     </a:p>
                   </a:txBody>
@@ -15915,7 +15915,7 @@
                           <a:effectLst/>
                           <a:latin typeface="Noto Sans" panose="020B0502040504020204" pitchFamily="34" charset="0"/>
                         </a:rPr>
-                        <a:t>32,367</a:t>
+                        <a:t>32,300</a:t>
                       </a:r>
                     </a:p>
                   </a:txBody>
@@ -15965,7 +15965,7 @@
                           <a:effectLst/>
                           <a:latin typeface="Noto Sans" panose="020B0502040504020204" pitchFamily="34" charset="0"/>
                         </a:rPr>
-                        <a:t>37,822</a:t>
+                        <a:t>37,847</a:t>
                       </a:r>
                     </a:p>
                   </a:txBody>
@@ -16012,7 +16012,7 @@
                           <a:effectLst/>
                           <a:latin typeface="Noto Sans" panose="020B0502040504020204" pitchFamily="34" charset="0"/>
                         </a:rPr>
-                        <a:t>45,941</a:t>
+                        <a:t>45,838</a:t>
                       </a:r>
                     </a:p>
                   </a:txBody>
@@ -17895,7 +17895,7 @@
                           <a:ea typeface="Noto Sans" panose="020B0502040504020204" pitchFamily="34" charset="0"/>
                           <a:cs typeface="Noto Sans" panose="020B0502040504020204" pitchFamily="34" charset="0"/>
                         </a:rPr>
-                        <a:t>6,761</a:t>
+                        <a:t>6,623</a:t>
                       </a:r>
                     </a:p>
                   </a:txBody>
@@ -18252,7 +18252,7 @@
                           <a:ea typeface="Noto Sans" panose="020B0502040504020204" pitchFamily="34" charset="0"/>
                           <a:cs typeface="Noto Sans" panose="020B0502040504020204" pitchFamily="34" charset="0"/>
                         </a:rPr>
-                        <a:t>13.8</a:t>
+                        <a:t>11.5</a:t>
                       </a:r>
                     </a:p>
                   </a:txBody>
@@ -18348,7 +18348,7 @@
                           <a:ea typeface="Noto Sans" panose="020B0502040504020204" pitchFamily="34" charset="0"/>
                           <a:cs typeface="Noto Sans" panose="020B0502040504020204" pitchFamily="34" charset="0"/>
                         </a:rPr>
-                        <a:t>23.7</a:t>
+                        <a:t>24.2</a:t>
                       </a:r>
                     </a:p>
                   </a:txBody>
@@ -20634,7 +20634,7 @@
                 <a:ea typeface="Noto Sans" panose="020B0502040504020204" pitchFamily="34" charset="0"/>
                 <a:cs typeface="Noto Sans" panose="020B0502040504020204" pitchFamily="34" charset="0"/>
               </a:rPr>
-              <a:t>STB ghi nhận 7,331 tỷ đồng LNTT trong 1H25 nhưng chỉ 297 tỷ đồng trong 2H25, do Q4/2025 lỗ trước thuế 3,360 tỷ đồng. Chúng tôi nâng dự phóng LNTT FY26F lên 8,683 tỷ đồng (+13.8% CK) từ 7,934 tỷ đồng, hoàn toàn nhờ chi phí hoạt động: CIR 1H26 chỉ 35.6% so với 42.9% dự phóng trước đây, và chúng tôi điều chỉnh về 40.0% (-0.7%p CK), 38.0% FY27F và 36.0% FY28F. Mức này vẫn cho phép chi phí hoạt động 2H26 cao hơn 1H26 11.5%, hàm ý LNTT 2H26 khoảng 4,547 tỷ đồng — khoảng 15 lần nền 2H25.</a:t>
+              <a:t>STB ghi nhận 7,331 tỷ đồng LNTT trong 1H25 nhưng chỉ 297 tỷ đồng trong 2H25, do Q4/2025 lỗ trước thuế 3,360 tỷ đồng. Chúng tôi nâng dự phóng LNTT FY26F lên 8,507 tỷ đồng (+11.5% CK) từ 7,934 tỷ đồng, hoàn toàn nhờ chi phí hoạt động: CIR 1H26 chỉ 35.6% so với 42.9% dự phóng trước đây, và chúng tôi điều chỉnh về 40.0% (-0.7%p CK), 38.0% FY27F và 36.0% FY28F. Mức này vẫn cho phép chi phí hoạt động 2H26 cao hơn 1H26 9.6%, hàm ý LNTT 2H26 khoảng 4,371 tỷ đồng — khoảng 15 lần nền 2H25.</a:t>
             </a:r>
             <a:endParaRPr lang="en-US" altLang="ko-KR" sz="800" b="0" dirty="0">
               <a:solidFill>
@@ -20671,7 +20671,7 @@
                 <a:ea typeface="Noto Sans" panose="020B0502040504020204" pitchFamily="34" charset="0"/>
                 <a:cs typeface="Noto Sans" panose="020B0502040504020204" pitchFamily="34" charset="0"/>
               </a:rPr>
-              <a:t>Các giả định FY26F khác: NII 27,010 tỷ đồng (+1.2% CK), NIM 2.94% (-38bps CK) và chi phí dự phòng 11.1 nghìn tỷ đồng (-2.6% CK); lưu ý tăng trưởng tín dụng 1H26 chỉ 1.5% so với 11.7% dự phóng cả năm. Ở diễn biến khác, việc Sacombank thu giữ 507 giấy chứng nhận quyền sử dụng đất tại dự án Viva City đối với 350 tỷ đồng dư nợ gốc quá hạn tuy chưa trọng yếu nhưng cho thấy kênh xử lý tài sản đảm bảo mà chương trình xóa nợ 2H26 phụ thuộc vào.</a:t>
+              <a:t>Các giả định FY26F khác: NII 26,712 tỷ đồng (+0.1% CK), NIM 2.92% (-40bps CK) và chi phí dự phòng 11.1 nghìn tỷ đồng (-2.6% CK); lưu ý tăng trưởng tín dụng 1H26 chỉ 1.5% so với 11.7% dự phóng cả năm. Ở diễn biến khác, việc Sacombank thu giữ 507 giấy chứng nhận quyền sử dụng đất tại dự án Viva City đối với 350 tỷ đồng dư nợ gốc quá hạn tuy chưa trọng yếu nhưng cho thấy kênh xử lý tài sản đảm bảo mà chương trình xóa nợ 2H26 phụ thuộc vào.</a:t>
             </a:r>
             <a:r>
               <a:rPr kumimoji="1" lang="en-US" altLang="ko-KR" sz="800" b="1" i="0" u="none" strike="noStrike" kern="1200" cap="none" spc="0" normalizeH="0" baseline="0" noProof="0" dirty="0">
@@ -22518,7 +22518,7 @@
                           <a:effectLst/>
                           <a:latin typeface="Noto Sans" panose="020B0502040504020204" pitchFamily="34" charset="0"/>
                         </a:rPr>
-                        <a:t>27,010</a:t>
+                        <a:t>26,712</a:t>
                       </a:r>
                     </a:p>
                   </a:txBody>
@@ -22568,7 +22568,7 @@
                           <a:effectLst/>
                           <a:latin typeface="Noto Sans" panose="020B0502040504020204" pitchFamily="34" charset="0"/>
                         </a:rPr>
-                        <a:t>30,200</a:t>
+                        <a:t>29,560</a:t>
                       </a:r>
                     </a:p>
                   </a:txBody>
@@ -22615,7 +22615,7 @@
                           <a:effectLst/>
                           <a:latin typeface="Noto Sans" panose="020B0502040504020204" pitchFamily="34" charset="0"/>
                         </a:rPr>
-                        <a:t>34,640</a:t>
+                        <a:t>34,095</a:t>
                       </a:r>
                     </a:p>
                   </a:txBody>
@@ -23012,7 +23012,7 @@
                           <a:effectLst/>
                           <a:latin typeface="Noto Sans" panose="020B0502040504020204" pitchFamily="34" charset="0"/>
                         </a:rPr>
-                        <a:t>6,408</a:t>
+                        <a:t>7,382</a:t>
                       </a:r>
                     </a:p>
                   </a:txBody>
@@ -23055,7 +23055,7 @@
                           <a:effectLst/>
                           <a:latin typeface="Noto Sans" panose="020B0502040504020204" pitchFamily="34" charset="0"/>
                         </a:rPr>
-                        <a:t>8,038</a:t>
+                        <a:t>8,031</a:t>
                       </a:r>
                     </a:p>
                   </a:txBody>
@@ -23414,7 +23414,7 @@
                           <a:effectLst/>
                           <a:latin typeface="Noto Sans" panose="020B0502040504020204" pitchFamily="34" charset="0"/>
                         </a:rPr>
-                        <a:t>8,683</a:t>
+                        <a:t>8,507</a:t>
                       </a:r>
                     </a:p>
                   </a:txBody>
@@ -23460,7 +23460,7 @@
                           <a:effectLst/>
                           <a:latin typeface="Noto Sans" panose="020B0502040504020204" pitchFamily="34" charset="0"/>
                         </a:rPr>
-                        <a:t>14,434</a:t>
+                        <a:t>14,676</a:t>
                       </a:r>
                     </a:p>
                   </a:txBody>
@@ -23503,7 +23503,7 @@
                           <a:effectLst/>
                           <a:latin typeface="Noto Sans" panose="020B0502040504020204" pitchFamily="34" charset="0"/>
                         </a:rPr>
-                        <a:t>21,483</a:t>
+                        <a:t>21,145</a:t>
                       </a:r>
                     </a:p>
                   </a:txBody>
@@ -23778,7 +23778,7 @@
                           <a:effectLst/>
                           <a:latin typeface="Noto Sans" panose="020B0502040504020204" pitchFamily="34" charset="0"/>
                         </a:rPr>
-                        <a:t>6,761</a:t>
+                        <a:t>6,623</a:t>
                       </a:r>
                     </a:p>
                   </a:txBody>
@@ -23824,7 +23824,7 @@
                           <a:effectLst/>
                           <a:latin typeface="Noto Sans" panose="020B0502040504020204" pitchFamily="34" charset="0"/>
                         </a:rPr>
-                        <a:t>11,238</a:t>
+                        <a:t>11,427</a:t>
                       </a:r>
                     </a:p>
                   </a:txBody>
@@ -23867,7 +23867,7 @@
                           <a:effectLst/>
                           <a:latin typeface="Noto Sans" panose="020B0502040504020204" pitchFamily="34" charset="0"/>
                         </a:rPr>
-                        <a:t>16,727</a:t>
+                        <a:t>16,463</a:t>
                       </a:r>
                     </a:p>
                   </a:txBody>
@@ -24118,7 +24118,7 @@
                           <a:effectLst/>
                           <a:latin typeface="Noto Sans" panose="020B0502040504020204" pitchFamily="34" charset="0"/>
                         </a:rPr>
-                        <a:t>3,282</a:t>
+                        <a:t>3,215</a:t>
                       </a:r>
                     </a:p>
                   </a:txBody>
@@ -24164,7 +24164,7 @@
                           <a:effectLst/>
                           <a:latin typeface="Noto Sans" panose="020B0502040504020204" pitchFamily="34" charset="0"/>
                         </a:rPr>
-                        <a:t>5,455</a:t>
+                        <a:t>5,546</a:t>
                       </a:r>
                     </a:p>
                   </a:txBody>
@@ -24207,7 +24207,7 @@
                           <a:effectLst/>
                           <a:latin typeface="Noto Sans" panose="020B0502040504020204" pitchFamily="34" charset="0"/>
                         </a:rPr>
-                        <a:t>8,119</a:t>
+                        <a:t>7,991</a:t>
                       </a:r>
                     </a:p>
                   </a:txBody>
@@ -24434,7 +24434,7 @@
                           <a:effectLst/>
                           <a:latin typeface="Noto Sans" panose="020B0502040504020204" pitchFamily="34" charset="0"/>
                         </a:rPr>
-                        <a:t>10.1</a:t>
+                        <a:t>10.0</a:t>
                       </a:r>
                     </a:p>
                   </a:txBody>
@@ -24480,7 +24480,7 @@
                           <a:effectLst/>
                           <a:latin typeface="Noto Sans" panose="020B0502040504020204" pitchFamily="34" charset="0"/>
                         </a:rPr>
-                        <a:t>15.5</a:t>
+                        <a:t>15.8</a:t>
                       </a:r>
                     </a:p>
                   </a:txBody>
@@ -24523,7 +24523,7 @@
                           <a:effectLst/>
                           <a:latin typeface="Noto Sans" panose="020B0502040504020204" pitchFamily="34" charset="0"/>
                         </a:rPr>
-                        <a:t>19.4</a:t>
+                        <a:t>19.1</a:t>
                       </a:r>
                     </a:p>
                   </a:txBody>
@@ -24750,7 +24750,7 @@
                           <a:effectLst/>
                           <a:latin typeface="Noto Sans" panose="020B0502040504020204" pitchFamily="34" charset="0"/>
                         </a:rPr>
-                        <a:t>23.7</a:t>
+                        <a:t>24.2</a:t>
                       </a:r>
                     </a:p>
                   </a:txBody>
@@ -24796,7 +24796,7 @@
                           <a:effectLst/>
                           <a:latin typeface="Noto Sans" panose="020B0502040504020204" pitchFamily="34" charset="0"/>
                         </a:rPr>
-                        <a:t>14.3</a:t>
+                        <a:t>14.0</a:t>
                       </a:r>
                     </a:p>
                   </a:txBody>
@@ -24839,7 +24839,7 @@
                           <a:effectLst/>
                           <a:latin typeface="Noto Sans" panose="020B0502040504020204" pitchFamily="34" charset="0"/>
                         </a:rPr>
-                        <a:t>9.6</a:t>
+                        <a:t>9.7</a:t>
                       </a:r>
                     </a:p>
                   </a:txBody>
@@ -25511,7 +25511,7 @@
                           <a:effectLst/>
                           <a:latin typeface="Noto Sans" panose="020B0502040504020204" pitchFamily="34" charset="0"/>
                         </a:rPr>
-                        <a:t>1,007,118</a:t>
+                        <a:t>1,014,277</a:t>
                       </a:r>
                     </a:p>
                   </a:txBody>
@@ -25557,7 +25557,7 @@
                           <a:effectLst/>
                           <a:latin typeface="Noto Sans" panose="020B0502040504020204" pitchFamily="34" charset="0"/>
                         </a:rPr>
-                        <a:t>1,139,005</a:t>
+                        <a:t>1,129,957</a:t>
                       </a:r>
                     </a:p>
                   </a:txBody>
@@ -25600,7 +25600,7 @@
                           <a:effectLst/>
                           <a:latin typeface="Noto Sans" panose="020B0502040504020204" pitchFamily="34" charset="0"/>
                         </a:rPr>
-                        <a:t>1,301,528</a:t>
+                        <a:t>1,271,622</a:t>
                       </a:r>
                     </a:p>
                   </a:txBody>
@@ -25896,7 +25896,7 @@
                           <a:effectLst/>
                           <a:latin typeface="Noto Sans" panose="020B0502040504020204" pitchFamily="34" charset="0"/>
                         </a:rPr>
-                        <a:t>66,681</a:t>
+                        <a:t>66,544</a:t>
                       </a:r>
                     </a:p>
                   </a:txBody>
@@ -25942,7 +25942,7 @@
                           <a:effectLst/>
                           <a:latin typeface="Noto Sans" panose="020B0502040504020204" pitchFamily="34" charset="0"/>
                         </a:rPr>
-                        <a:t>77,919</a:t>
+                        <a:t>77,970</a:t>
                       </a:r>
                     </a:p>
                   </a:txBody>
@@ -25985,7 +25985,7 @@
                           <a:effectLst/>
                           <a:latin typeface="Noto Sans" panose="020B0502040504020204" pitchFamily="34" charset="0"/>
                         </a:rPr>
-                        <a:t>94,645</a:t>
+                        <a:t>94,434</a:t>
                       </a:r>
                     </a:p>
                   </a:txBody>
@@ -26336,7 +26336,7 @@
                           <a:effectLst/>
                           <a:latin typeface="Noto Sans" panose="020B0502040504020204" pitchFamily="34" charset="0"/>
                         </a:rPr>
-                        <a:t>32,367</a:t>
+                        <a:t>32,300</a:t>
                       </a:r>
                     </a:p>
                   </a:txBody>
@@ -26386,7 +26386,7 @@
                           <a:effectLst/>
                           <a:latin typeface="Noto Sans" panose="020B0502040504020204" pitchFamily="34" charset="0"/>
                         </a:rPr>
-                        <a:t>37,822</a:t>
+                        <a:t>37,847</a:t>
                       </a:r>
                     </a:p>
                   </a:txBody>
@@ -26433,7 +26433,7 @@
                           <a:effectLst/>
                           <a:latin typeface="Noto Sans" panose="020B0502040504020204" pitchFamily="34" charset="0"/>
                         </a:rPr>
-                        <a:t>45,941</a:t>
+                        <a:t>45,838</a:t>
                       </a:r>
                     </a:p>
                   </a:txBody>

--- a/MASVN_RS_WM_2H26_outlook_Equity_VN_2026_STBFPT_31July2026.pptx
+++ b/MASVN_RS_WM_2H26_outlook_Equity_VN_2026_STBFPT_31July2026.pptx
@@ -10211,7 +10211,7 @@
                           <a:ea typeface="Noto Sans" panose="020B0502040504020204" pitchFamily="34" charset="0"/>
                           <a:cs typeface="Noto Sans" panose="020B0502040504020204" pitchFamily="34" charset="0"/>
                         </a:rPr>
-                        <a:t>6,623</a:t>
+                        <a:t>6,307</a:t>
                       </a:r>
                     </a:p>
                   </a:txBody>
@@ -10376,7 +10376,7 @@
                           <a:ea typeface="Noto Sans" panose="020B0502040504020204" pitchFamily="34" charset="0"/>
                           <a:cs typeface="Noto Sans" panose="020B0502040504020204" pitchFamily="34" charset="0"/>
                         </a:rPr>
-                        <a:t>11.5</a:t>
+                        <a:t>6.2</a:t>
                       </a:r>
                     </a:p>
                   </a:txBody>
@@ -10472,7 +10472,7 @@
                           <a:ea typeface="Noto Sans" panose="020B0502040504020204" pitchFamily="34" charset="0"/>
                           <a:cs typeface="Noto Sans" panose="020B0502040504020204" pitchFamily="34" charset="0"/>
                         </a:rPr>
-                        <a:t>24.2</a:t>
+                        <a:t>25.4</a:t>
                       </a:r>
                     </a:p>
                   </a:txBody>
@@ -11861,7 +11861,7 @@
                 <a:ea typeface="Noto Sans" panose="020B0502040504020204" pitchFamily="34" charset="0"/>
                 <a:cs typeface="Noto Sans" panose="020B0502040504020204" pitchFamily="34" charset="0"/>
               </a:rPr>
-              <a:t>The NPL ratio reached 7.54% at end-2Q26, up 1.13%p year-to-date and the highest in the system, against management guidance of approximately 5.6%. Group 3-5 balances rose approximately VND7,800bn to VND47,957bn, of which about 67% (VND32,000bn) is Group 5, while Group 4 more than doubled (+156%). We set FY26F NPL at 5.5%, from below 4.5%, and FY27F at 4.0% from 3.1%. The clean-up is reserve-funded, not P&amp;L-funded: reserves reached VND27.2tn at end-2Q26 — 56.7% coverage, up from 50.0% at end-FY25 — after VND7.1tn of 1H26 charges and almost no write-offs. A further VND4.0tn charge in 2H26 funds write-offs of VND11.8tn, or 37% of the Group 5 balance, leaving coverage back at 50.0%. Holding coverage at 50% is what caps the improvement at 5.5%, and it needs 2H26 NPL formation at roughly a quarter of the 1H26 pace.</a:t>
+              <a:t>The NPL ratio reached 7.54% at end-2Q26, up 1.13%p year-to-date and the highest in the system, against management guidance of approximately 5.6%. Group 3-5 balances rose approximately VND7,800bn to VND47,957bn, of which about 67% (VND32,000bn) is Group 5, while Group 4 more than doubled (+156%). We set FY26F NPL at 5.5%, from below 4.5%, and FY27F at 4.0% from 3.1%. The clean-up is reserve-funded, not P&amp;L-funded: reserves reached VND27.2tn at end-2Q26 — 56.7% coverage, up from 50.0% at end-FY25 — after VND7.1tn of 1H26 charges and almost no write-offs. A further VND4.0tn charge in 2H26 funds write-offs of VND11.8tn, or 37% of the Group 5 balance, leaving coverage at 51.1%. Holding coverage near 50% is what caps the improvement at 5.5%, and it needs 2H26 NPL formation at roughly a quarter of the 1H26 pace.</a:t>
             </a:r>
           </a:p>
           <a:p>
@@ -11915,7 +11915,7 @@
                 <a:ea typeface="Noto Sans" panose="020B0502040504020204" pitchFamily="34" charset="0"/>
                 <a:cs typeface="Noto Sans" panose="020B0502040504020204" pitchFamily="34" charset="0"/>
               </a:rPr>
-              <a:t>STB recorded VND7,331bn of PBT in 1H25 but only VND297bn in 2H25, as 4Q25 registered a pre-tax loss of VND3,360bn. We raise FY26F PBT to VND8,507bn (+11.5% YoY) from VND7,934bn, entirely on the cost line: 1H26 CIR came in at 35.6% against the 42.9% previously carried, and we now assume 40.0% (-0.7%p YoY), 38.0% in FY27F and 36.0% in FY28F. That still allows 2H26 opex 9.6% above 1H26, and implies 2H26 PBT of VND4,371bn — around 15x the 2H25 base. Other FY26F assumptions: NII of VND26,712bn (+0.1% YoY), NIM of 2.92% (-40bps YoY) and provisioning of VND11.1tn (-2.6% YoY); we flag 1H26 loan growth of 1.5% against the 11.7% carried for the full year. Separately, STB's seizure of 507 land-use right certificates at LDG's Viva City against VND350bn of overdue principal is immaterial in size but shows the collateral channel the write-off programme depends on.</a:t>
+              <a:t>STB recorded VND7,331bn of PBT in 1H25 but only VND297bn in 2H25, as 4Q25 registered a pre-tax loss of VND3,360bn. We set FY26F PBT at VND8,100bn (+6.2% YoY), in line with the board-approved plan. The cost line does the lifting — 1H26 CIR came in at 35.6% against the 42.9% previously carried, and we now assume 40.0% (-0.7%p YoY), 38.0% in FY27F and 36.0% in FY28F — with the balance taken back in provisioning. That implies 2H26 PBT of VND3,964bn, around 13x the 2H25 base. Other FY26F assumptions: NII of VND26,712bn (+0.1% YoY), NIM of 2.92% (-40bps YoY) and provisioning of VND11.5tn (+1.0% YoY); we flag 1H26 loan growth of 1.5% against the 11.7% carried for the full year. Separately, STB's seizure of 507 land-use right certificates at LDG's Viva City against VND350bn of overdue principal is immaterial in size but shows the collateral channel the write-off programme depends on.</a:t>
             </a:r>
           </a:p>
           <a:p>
@@ -13365,7 +13365,7 @@
                           <a:effectLst/>
                           <a:latin typeface="Noto Sans" panose="020B0502040504020204" pitchFamily="34" charset="0"/>
                         </a:rPr>
-                        <a:t>8,507</a:t>
+                        <a:t>8,100</a:t>
                       </a:r>
                     </a:p>
                   </a:txBody>
@@ -13681,7 +13681,7 @@
                           <a:effectLst/>
                           <a:latin typeface="Noto Sans" panose="020B0502040504020204" pitchFamily="34" charset="0"/>
                         </a:rPr>
-                        <a:t>6,623</a:t>
+                        <a:t>6,307</a:t>
                       </a:r>
                     </a:p>
                   </a:txBody>
@@ -13997,7 +13997,7 @@
                           <a:effectLst/>
                           <a:latin typeface="Noto Sans" panose="020B0502040504020204" pitchFamily="34" charset="0"/>
                         </a:rPr>
-                        <a:t>3,215</a:t>
+                        <a:t>3,061</a:t>
                       </a:r>
                     </a:p>
                   </a:txBody>
@@ -14313,7 +14313,7 @@
                           <a:effectLst/>
                           <a:latin typeface="Noto Sans" panose="020B0502040504020204" pitchFamily="34" charset="0"/>
                         </a:rPr>
-                        <a:t>10.0</a:t>
+                        <a:t>9.5</a:t>
                       </a:r>
                     </a:p>
                   </a:txBody>
@@ -14359,7 +14359,7 @@
                           <a:effectLst/>
                           <a:latin typeface="Noto Sans" panose="020B0502040504020204" pitchFamily="34" charset="0"/>
                         </a:rPr>
-                        <a:t>15.8</a:t>
+                        <a:t>15.9</a:t>
                       </a:r>
                     </a:p>
                   </a:txBody>
@@ -14402,7 +14402,7 @@
                           <a:effectLst/>
                           <a:latin typeface="Noto Sans" panose="020B0502040504020204" pitchFamily="34" charset="0"/>
                         </a:rPr>
-                        <a:t>19.1</a:t>
+                        <a:t>19.2</a:t>
                       </a:r>
                     </a:p>
                   </a:txBody>
@@ -14629,7 +14629,7 @@
                           <a:effectLst/>
                           <a:latin typeface="Noto Sans" panose="020B0502040504020204" pitchFamily="34" charset="0"/>
                         </a:rPr>
-                        <a:t>24.2</a:t>
+                        <a:t>25.4</a:t>
                       </a:r>
                     </a:p>
                   </a:txBody>
@@ -15583,7 +15583,7 @@
                           <a:effectLst/>
                           <a:latin typeface="Noto Sans" panose="020B0502040504020204" pitchFamily="34" charset="0"/>
                         </a:rPr>
-                        <a:t>66,544</a:t>
+                        <a:t>66,227</a:t>
                       </a:r>
                     </a:p>
                   </a:txBody>
@@ -15629,7 +15629,7 @@
                           <a:effectLst/>
                           <a:latin typeface="Noto Sans" panose="020B0502040504020204" pitchFamily="34" charset="0"/>
                         </a:rPr>
-                        <a:t>77,970</a:t>
+                        <a:t>77,653</a:t>
                       </a:r>
                     </a:p>
                   </a:txBody>
@@ -15672,7 +15672,7 @@
                           <a:effectLst/>
                           <a:latin typeface="Noto Sans" panose="020B0502040504020204" pitchFamily="34" charset="0"/>
                         </a:rPr>
-                        <a:t>94,434</a:t>
+                        <a:t>94,117</a:t>
                       </a:r>
                     </a:p>
                   </a:txBody>
@@ -15915,7 +15915,7 @@
                           <a:effectLst/>
                           <a:latin typeface="Noto Sans" panose="020B0502040504020204" pitchFamily="34" charset="0"/>
                         </a:rPr>
-                        <a:t>32,300</a:t>
+                        <a:t>32,146</a:t>
                       </a:r>
                     </a:p>
                   </a:txBody>
@@ -15965,7 +15965,7 @@
                           <a:effectLst/>
                           <a:latin typeface="Noto Sans" panose="020B0502040504020204" pitchFamily="34" charset="0"/>
                         </a:rPr>
-                        <a:t>37,847</a:t>
+                        <a:t>37,693</a:t>
                       </a:r>
                     </a:p>
                   </a:txBody>
@@ -16012,7 +16012,7 @@
                           <a:effectLst/>
                           <a:latin typeface="Noto Sans" panose="020B0502040504020204" pitchFamily="34" charset="0"/>
                         </a:rPr>
-                        <a:t>45,838</a:t>
+                        <a:t>45,684</a:t>
                       </a:r>
                     </a:p>
                   </a:txBody>
@@ -17895,7 +17895,7 @@
                           <a:ea typeface="Noto Sans" panose="020B0502040504020204" pitchFamily="34" charset="0"/>
                           <a:cs typeface="Noto Sans" panose="020B0502040504020204" pitchFamily="34" charset="0"/>
                         </a:rPr>
-                        <a:t>6,623</a:t>
+                        <a:t>6,307</a:t>
                       </a:r>
                     </a:p>
                   </a:txBody>
@@ -18252,7 +18252,7 @@
                           <a:ea typeface="Noto Sans" panose="020B0502040504020204" pitchFamily="34" charset="0"/>
                           <a:cs typeface="Noto Sans" panose="020B0502040504020204" pitchFamily="34" charset="0"/>
                         </a:rPr>
-                        <a:t>11.5</a:t>
+                        <a:t>6.2</a:t>
                       </a:r>
                     </a:p>
                   </a:txBody>
@@ -18348,7 +18348,7 @@
                           <a:ea typeface="Noto Sans" panose="020B0502040504020204" pitchFamily="34" charset="0"/>
                           <a:cs typeface="Noto Sans" panose="020B0502040504020204" pitchFamily="34" charset="0"/>
                         </a:rPr>
-                        <a:t>24.2</a:t>
+                        <a:t>25.4</a:t>
                       </a:r>
                     </a:p>
                   </a:txBody>
@@ -20539,7 +20539,7 @@
                 <a:ea typeface="Noto Sans" panose="020B0502040504020204" pitchFamily="34" charset="0"/>
                 <a:cs typeface="Noto Sans" panose="020B0502040504020204" pitchFamily="34" charset="0"/>
               </a:rPr>
-              <a:t>Chất lượng tài sản suy giảm vượt mức ban lãnh đạo dự kiến: tỷ lệ nợ xấu đạt 7.54% cuối Q2/2026, tăng 1.13%p so với đầu năm và cao nhất hệ thống, so với ước tính khoảng 5.6% của ban lãnh đạo. Dư nợ nhóm 3-5 tăng khoảng 7,800 tỷ đồng lên 47,957 tỷ đồng, trong đó khoảng 67% (32,000 tỷ đồng) xếp nhóm 5, nợ nhóm 4 tăng hơn gấp đôi (+156%). Chúng tôi đặt giả định nợ xấu FY26F ở 5.5% (từ dưới 4.5%) và FY27F ở 4.0% (từ 3.1%). Quá trình xử lý tài trợ từ nguồn dự phòng đã trích, không phải từ lợi nhuận: dự phòng đạt 27.2 nghìn tỷ đồng cuối Q2/2026 — bao phủ 56.7%, tăng từ 50.0% cuối 2025 — sau khi trích 7.1 nghìn tỷ đồng trong 1H26 và gần như chưa xóa nợ. Trích thêm 4.0 nghìn tỷ đồng trong 2H26 đủ để xóa 11.8 nghìn tỷ đồng, tương đương 37% dư nợ nhóm 5, đưa bao phủ về 50.0%. Việc giữ bao phủ ở 50% giới hạn mức cải thiện ở 5.5%, đồng thời cần nợ xấu phát sinh mới 2H26 chỉ bằng khoảng một phần tư nhịp 1H26.</a:t>
+              <a:t>Chất lượng tài sản suy giảm vượt mức ban lãnh đạo dự kiến: tỷ lệ nợ xấu đạt 7.54% cuối Q2/2026, tăng 1.13%p so với đầu năm và cao nhất hệ thống, so với ước tính khoảng 5.6% của ban lãnh đạo. Dư nợ nhóm 3-5 tăng khoảng 7,800 tỷ đồng lên 47,957 tỷ đồng, trong đó khoảng 67% (32,000 tỷ đồng) xếp nhóm 5, nợ nhóm 4 tăng hơn gấp đôi (+156%). Chúng tôi đặt giả định nợ xấu FY26F ở 5.5% (từ dưới 4.5%) và FY27F ở 4.0% (từ 3.1%). Quá trình xử lý tài trợ từ nguồn dự phòng đã trích, không phải từ lợi nhuận: dự phòng đạt 27.2 nghìn tỷ đồng cuối Q2/2026 — bao phủ 56.7%, tăng từ 50.0% cuối 2025 — sau khi trích 7.1 nghìn tỷ đồng trong 1H26 và gần như chưa xóa nợ. Trích thêm 4.0 nghìn tỷ đồng trong 2H26 đủ để xóa 11.8 nghìn tỷ đồng, tương đương 37% dư nợ nhóm 5, đưa bao phủ về 51.1%. Việc giữ bao phủ quanh 50% giới hạn mức cải thiện ở 5.5%, đồng thời cần nợ xấu phát sinh mới 2H26 chỉ bằng khoảng một phần tư nhịp 1H26.</a:t>
             </a:r>
             <a:endParaRPr kumimoji="1" lang="en-US" altLang="ko-KR" sz="800" b="0" dirty="0">
               <a:solidFill>
@@ -20634,7 +20634,7 @@
                 <a:ea typeface="Noto Sans" panose="020B0502040504020204" pitchFamily="34" charset="0"/>
                 <a:cs typeface="Noto Sans" panose="020B0502040504020204" pitchFamily="34" charset="0"/>
               </a:rPr>
-              <a:t>STB ghi nhận 7,331 tỷ đồng LNTT trong 1H25 nhưng chỉ 297 tỷ đồng trong 2H25, do Q4/2025 lỗ trước thuế 3,360 tỷ đồng. Chúng tôi nâng dự phóng LNTT FY26F lên 8,507 tỷ đồng (+11.5% CK) từ 7,934 tỷ đồng, hoàn toàn nhờ chi phí hoạt động: CIR 1H26 chỉ 35.6% so với 42.9% dự phóng trước đây, và chúng tôi điều chỉnh về 40.0% (-0.7%p CK), 38.0% FY27F và 36.0% FY28F. Mức này vẫn cho phép chi phí hoạt động 2H26 cao hơn 1H26 9.6%, hàm ý LNTT 2H26 khoảng 4,371 tỷ đồng — khoảng 15 lần nền 2H25.</a:t>
+              <a:t>STB ghi nhận 7,331 tỷ đồng LNTT trong 1H25 nhưng chỉ 297 tỷ đồng trong 2H25, do Q4/2025 lỗ trước thuế 3,360 tỷ đồng. Chúng tôi đặt dự phóng LNTT FY26F ở 8,100 tỷ đồng (+6.2% CK), ngang kế hoạch đã được ĐHĐCĐ thông qua. Chi phí hoạt động là động lực chính — CIR 1H26 chỉ 35.6% so với 42.9% dự phóng trước đây, và chúng tôi điều chỉnh về 40.0% (-0.7%p CK), 38.0% FY27F và 36.0% FY28F — phần chênh còn lại đưa vào chi phí dự phòng. Mức này hàm ý LNTT 2H26 khoảng 3,964 tỷ đồng, tương đương khoảng 13 lần nền 2H25.</a:t>
             </a:r>
             <a:endParaRPr lang="en-US" altLang="ko-KR" sz="800" b="0" dirty="0">
               <a:solidFill>
@@ -20671,7 +20671,7 @@
                 <a:ea typeface="Noto Sans" panose="020B0502040504020204" pitchFamily="34" charset="0"/>
                 <a:cs typeface="Noto Sans" panose="020B0502040504020204" pitchFamily="34" charset="0"/>
               </a:rPr>
-              <a:t>Các giả định FY26F khác: NII 26,712 tỷ đồng (+0.1% CK), NIM 2.92% (-40bps CK) và chi phí dự phòng 11.1 nghìn tỷ đồng (-2.6% CK); lưu ý tăng trưởng tín dụng 1H26 chỉ 1.5% so với 11.7% dự phóng cả năm. Ở diễn biến khác, việc Sacombank thu giữ 507 giấy chứng nhận quyền sử dụng đất tại dự án Viva City đối với 350 tỷ đồng dư nợ gốc quá hạn tuy chưa trọng yếu nhưng cho thấy kênh xử lý tài sản đảm bảo mà chương trình xóa nợ 2H26 phụ thuộc vào.</a:t>
+              <a:t>Các giả định FY26F khác: NII 26,712 tỷ đồng (+0.1% CK), NIM 2.92% (-40bps CK) và chi phí dự phòng 11.5 nghìn tỷ đồng (+1.0% CK); lưu ý tăng trưởng tín dụng 1H26 chỉ 1.5% so với 11.7% dự phóng cả năm. Ở diễn biến khác, việc Sacombank thu giữ 507 giấy chứng nhận quyền sử dụng đất tại dự án Viva City đối với 350 tỷ đồng dư nợ gốc quá hạn tuy chưa trọng yếu nhưng cho thấy kênh xử lý tài sản đảm bảo mà chương trình xóa nợ 2H26 phụ thuộc vào.</a:t>
             </a:r>
             <a:r>
               <a:rPr kumimoji="1" lang="en-US" altLang="ko-KR" sz="800" b="1" i="0" u="none" strike="noStrike" kern="1200" cap="none" spc="0" normalizeH="0" baseline="0" noProof="0" dirty="0">
@@ -23414,7 +23414,7 @@
                           <a:effectLst/>
                           <a:latin typeface="Noto Sans" panose="020B0502040504020204" pitchFamily="34" charset="0"/>
                         </a:rPr>
-                        <a:t>8,507</a:t>
+                        <a:t>8,100</a:t>
                       </a:r>
                     </a:p>
                   </a:txBody>
@@ -23778,7 +23778,7 @@
                           <a:effectLst/>
                           <a:latin typeface="Noto Sans" panose="020B0502040504020204" pitchFamily="34" charset="0"/>
                         </a:rPr>
-                        <a:t>6,623</a:t>
+                        <a:t>6,307</a:t>
                       </a:r>
                     </a:p>
                   </a:txBody>
@@ -24118,7 +24118,7 @@
                           <a:effectLst/>
                           <a:latin typeface="Noto Sans" panose="020B0502040504020204" pitchFamily="34" charset="0"/>
                         </a:rPr>
-                        <a:t>3,215</a:t>
+                        <a:t>3,061</a:t>
                       </a:r>
                     </a:p>
                   </a:txBody>
@@ -24434,7 +24434,7 @@
                           <a:effectLst/>
                           <a:latin typeface="Noto Sans" panose="020B0502040504020204" pitchFamily="34" charset="0"/>
                         </a:rPr>
-                        <a:t>10.0</a:t>
+                        <a:t>9.5</a:t>
                       </a:r>
                     </a:p>
                   </a:txBody>
@@ -24480,7 +24480,7 @@
                           <a:effectLst/>
                           <a:latin typeface="Noto Sans" panose="020B0502040504020204" pitchFamily="34" charset="0"/>
                         </a:rPr>
-                        <a:t>15.8</a:t>
+                        <a:t>15.9</a:t>
                       </a:r>
                     </a:p>
                   </a:txBody>
@@ -24523,7 +24523,7 @@
                           <a:effectLst/>
                           <a:latin typeface="Noto Sans" panose="020B0502040504020204" pitchFamily="34" charset="0"/>
                         </a:rPr>
-                        <a:t>19.1</a:t>
+                        <a:t>19.2</a:t>
                       </a:r>
                     </a:p>
                   </a:txBody>
@@ -24750,7 +24750,7 @@
                           <a:effectLst/>
                           <a:latin typeface="Noto Sans" panose="020B0502040504020204" pitchFamily="34" charset="0"/>
                         </a:rPr>
-                        <a:t>24.2</a:t>
+                        <a:t>25.4</a:t>
                       </a:r>
                     </a:p>
                   </a:txBody>
@@ -25896,7 +25896,7 @@
                           <a:effectLst/>
                           <a:latin typeface="Noto Sans" panose="020B0502040504020204" pitchFamily="34" charset="0"/>
                         </a:rPr>
-                        <a:t>66,544</a:t>
+                        <a:t>66,227</a:t>
                       </a:r>
                     </a:p>
                   </a:txBody>
@@ -25942,7 +25942,7 @@
                           <a:effectLst/>
                           <a:latin typeface="Noto Sans" panose="020B0502040504020204" pitchFamily="34" charset="0"/>
                         </a:rPr>
-                        <a:t>77,970</a:t>
+                        <a:t>77,653</a:t>
                       </a:r>
                     </a:p>
                   </a:txBody>
@@ -25985,7 +25985,7 @@
                           <a:effectLst/>
                           <a:latin typeface="Noto Sans" panose="020B0502040504020204" pitchFamily="34" charset="0"/>
                         </a:rPr>
-                        <a:t>94,434</a:t>
+                        <a:t>94,117</a:t>
                       </a:r>
                     </a:p>
                   </a:txBody>
@@ -26336,7 +26336,7 @@
                           <a:effectLst/>
                           <a:latin typeface="Noto Sans" panose="020B0502040504020204" pitchFamily="34" charset="0"/>
                         </a:rPr>
-                        <a:t>32,300</a:t>
+                        <a:t>32,146</a:t>
                       </a:r>
                     </a:p>
                   </a:txBody>
@@ -26386,7 +26386,7 @@
                           <a:effectLst/>
                           <a:latin typeface="Noto Sans" panose="020B0502040504020204" pitchFamily="34" charset="0"/>
                         </a:rPr>
-                        <a:t>37,847</a:t>
+                        <a:t>37,693</a:t>
                       </a:r>
                     </a:p>
                   </a:txBody>
@@ -26433,7 +26433,7 @@
                           <a:effectLst/>
                           <a:latin typeface="Noto Sans" panose="020B0502040504020204" pitchFamily="34" charset="0"/>
                         </a:rPr>
-                        <a:t>45,838</a:t>
+                        <a:t>45,684</a:t>
                       </a:r>
                     </a:p>
                   </a:txBody>

--- a/MASVN_RS_WM_2H26_outlook_Equity_VN_2026_STBFPT_31July2026.pptx
+++ b/MASVN_RS_WM_2H26_outlook_Equity_VN_2026_STBFPT_31July2026.pptx
@@ -10211,7 +10211,7 @@
                           <a:ea typeface="Noto Sans" panose="020B0502040504020204" pitchFamily="34" charset="0"/>
                           <a:cs typeface="Noto Sans" panose="020B0502040504020204" pitchFamily="34" charset="0"/>
                         </a:rPr>
-                        <a:t>6,307</a:t>
+                        <a:t>6,623</a:t>
                       </a:r>
                     </a:p>
                   </a:txBody>
@@ -10376,7 +10376,7 @@
                           <a:ea typeface="Noto Sans" panose="020B0502040504020204" pitchFamily="34" charset="0"/>
                           <a:cs typeface="Noto Sans" panose="020B0502040504020204" pitchFamily="34" charset="0"/>
                         </a:rPr>
-                        <a:t>6.2</a:t>
+                        <a:t>11.5</a:t>
                       </a:r>
                     </a:p>
                   </a:txBody>
@@ -10472,7 +10472,7 @@
                           <a:ea typeface="Noto Sans" panose="020B0502040504020204" pitchFamily="34" charset="0"/>
                           <a:cs typeface="Noto Sans" panose="020B0502040504020204" pitchFamily="34" charset="0"/>
                         </a:rPr>
-                        <a:t>25.4</a:t>
+                        <a:t>24.2</a:t>
                       </a:r>
                     </a:p>
                   </a:txBody>
@@ -11861,7 +11861,7 @@
                 <a:ea typeface="Noto Sans" panose="020B0502040504020204" pitchFamily="34" charset="0"/>
                 <a:cs typeface="Noto Sans" panose="020B0502040504020204" pitchFamily="34" charset="0"/>
               </a:rPr>
-              <a:t>The NPL ratio reached 7.54% at end-2Q26, up 1.13%p year-to-date and the highest in the system, against management guidance of approximately 5.6%. Group 3-5 balances rose approximately VND7,800bn to VND47,957bn, of which about 67% (VND32,000bn) is Group 5, while Group 4 more than doubled (+156%). We set FY26F NPL at 5.5%, from below 4.5%, and FY27F at 4.0% from 3.1%. The clean-up is reserve-funded, not P&amp;L-funded: reserves reached VND27.2tn at end-2Q26 — 56.7% coverage, up from 50.0% at end-FY25 — after VND7.1tn of 1H26 charges and almost no write-offs. A further VND4.0tn charge in 2H26 funds write-offs of VND11.8tn, or 37% of the Group 5 balance, leaving coverage at 51.1%. Holding coverage near 50% is what caps the improvement at 5.5%, and it needs 2H26 NPL formation at roughly a quarter of the 1H26 pace.</a:t>
+              <a:t>The NPL ratio reached 7.54% at end-2Q26, up 1.13%p year-to-date and the highest in the system, against management guidance of approximately 5.6%. Group 3-5 balances rose approximately VND7,800bn to VND47,957bn, of which about 67% (VND32,000bn) is Group 5, while Group 4 more than doubled (+156%). We set FY26F NPL at 5.5%, from below 4.5%, and FY27F at 4.0% from 3.1%. The clean-up is reserve-funded, not P&amp;L-funded: reserves reached VND27.2tn at end-2Q26 — 56.7% coverage, up from 50.0% at end-FY25 — after VND7.1tn of 1H26 charges and almost no write-offs. A further VND4.0tn charge in 2H26 funds write-offs of VND11.8tn, or 37% of the Group 5 balance, leaving coverage at 50.0%. Holding coverage at 50% is what caps the improvement at 5.5%, and it needs 2H26 NPL formation at roughly a quarter of the 1H26 pace.</a:t>
             </a:r>
           </a:p>
           <a:p>
@@ -11915,7 +11915,7 @@
                 <a:ea typeface="Noto Sans" panose="020B0502040504020204" pitchFamily="34" charset="0"/>
                 <a:cs typeface="Noto Sans" panose="020B0502040504020204" pitchFamily="34" charset="0"/>
               </a:rPr>
-              <a:t>STB recorded VND7,331bn of PBT in 1H25 but only VND297bn in 2H25, as 4Q25 registered a pre-tax loss of VND3,360bn. We set FY26F PBT at VND8,100bn (+6.2% YoY), in line with the board-approved plan. The cost line does the lifting — 1H26 CIR came in at 35.6% against the 42.9% previously carried, and we now assume 40.0% (-0.7%p YoY), 38.0% in FY27F and 36.0% in FY28F — with the balance taken back in provisioning. That implies 2H26 PBT of VND3,964bn, around 13x the 2H25 base. Other FY26F assumptions: NII of VND26,712bn (+0.1% YoY), NIM of 2.92% (-40bps YoY) and provisioning of VND11.5tn (+1.0% YoY); we flag 1H26 loan growth of 1.5% against the 11.7% carried for the full year. Separately, STB's seizure of 507 land-use right certificates at LDG's Viva City against VND350bn of overdue principal is immaterial in size but shows the collateral channel the write-off programme depends on.</a:t>
+              <a:t>STB recorded VND7,331bn of PBT in 1H25 but only VND297bn in 2H25, as 4Q25 registered a pre-tax loss of VND3,360bn. We set FY26F PBT at VND8,507bn (+11.5% YoY), 5% above the board-approved plan of VND8,100bn. The cost line does the lifting — 1H26 CIR came in at 35.6% against the 42.9% previously carried, and we now assume 40.0% (-0.7%p YoY), 38.0% in FY27F and 36.0% in FY28F. That still allows 2H26 opex 9.6% above 1H26, and implies 2H26 PBT of VND4,371bn, around 15x the 2H25 base. Other FY26F assumptions: NII of VND26,712bn (+0.1% YoY), NIM of 2.92% (-40bps YoY) and provisioning of VND11.1tn (-2.6% YoY); we flag 1H26 loan growth of 1.5% against the 11.7% carried for the full year. Separately, STB's seizure of 507 land-use right certificates at LDG's Viva City against VND350bn of overdue principal is immaterial in size but shows the collateral channel the write-off programme depends on.</a:t>
             </a:r>
           </a:p>
           <a:p>
@@ -13365,7 +13365,7 @@
                           <a:effectLst/>
                           <a:latin typeface="Noto Sans" panose="020B0502040504020204" pitchFamily="34" charset="0"/>
                         </a:rPr>
-                        <a:t>8,100</a:t>
+                        <a:t>8,507</a:t>
                       </a:r>
                     </a:p>
                   </a:txBody>
@@ -13681,7 +13681,7 @@
                           <a:effectLst/>
                           <a:latin typeface="Noto Sans" panose="020B0502040504020204" pitchFamily="34" charset="0"/>
                         </a:rPr>
-                        <a:t>6,307</a:t>
+                        <a:t>6,623</a:t>
                       </a:r>
                     </a:p>
                   </a:txBody>
@@ -13997,7 +13997,7 @@
                           <a:effectLst/>
                           <a:latin typeface="Noto Sans" panose="020B0502040504020204" pitchFamily="34" charset="0"/>
                         </a:rPr>
-                        <a:t>3,061</a:t>
+                        <a:t>3,215</a:t>
                       </a:r>
                     </a:p>
                   </a:txBody>
@@ -14313,7 +14313,7 @@
                           <a:effectLst/>
                           <a:latin typeface="Noto Sans" panose="020B0502040504020204" pitchFamily="34" charset="0"/>
                         </a:rPr>
-                        <a:t>9.5</a:t>
+                        <a:t>10.0</a:t>
                       </a:r>
                     </a:p>
                   </a:txBody>
@@ -14359,7 +14359,7 @@
                           <a:effectLst/>
                           <a:latin typeface="Noto Sans" panose="020B0502040504020204" pitchFamily="34" charset="0"/>
                         </a:rPr>
-                        <a:t>15.9</a:t>
+                        <a:t>15.8</a:t>
                       </a:r>
                     </a:p>
                   </a:txBody>
@@ -14402,7 +14402,7 @@
                           <a:effectLst/>
                           <a:latin typeface="Noto Sans" panose="020B0502040504020204" pitchFamily="34" charset="0"/>
                         </a:rPr>
-                        <a:t>19.2</a:t>
+                        <a:t>19.1</a:t>
                       </a:r>
                     </a:p>
                   </a:txBody>
@@ -14629,7 +14629,7 @@
                           <a:effectLst/>
                           <a:latin typeface="Noto Sans" panose="020B0502040504020204" pitchFamily="34" charset="0"/>
                         </a:rPr>
-                        <a:t>25.4</a:t>
+                        <a:t>24.2</a:t>
                       </a:r>
                     </a:p>
                   </a:txBody>
@@ -15583,7 +15583,7 @@
                           <a:effectLst/>
                           <a:latin typeface="Noto Sans" panose="020B0502040504020204" pitchFamily="34" charset="0"/>
                         </a:rPr>
-                        <a:t>66,227</a:t>
+                        <a:t>66,544</a:t>
                       </a:r>
                     </a:p>
                   </a:txBody>
@@ -15629,7 +15629,7 @@
                           <a:effectLst/>
                           <a:latin typeface="Noto Sans" panose="020B0502040504020204" pitchFamily="34" charset="0"/>
                         </a:rPr>
-                        <a:t>77,653</a:t>
+                        <a:t>77,970</a:t>
                       </a:r>
                     </a:p>
                   </a:txBody>
@@ -15672,7 +15672,7 @@
                           <a:effectLst/>
                           <a:latin typeface="Noto Sans" panose="020B0502040504020204" pitchFamily="34" charset="0"/>
                         </a:rPr>
-                        <a:t>94,117</a:t>
+                        <a:t>94,434</a:t>
                       </a:r>
                     </a:p>
                   </a:txBody>
@@ -15915,7 +15915,7 @@
                           <a:effectLst/>
                           <a:latin typeface="Noto Sans" panose="020B0502040504020204" pitchFamily="34" charset="0"/>
                         </a:rPr>
-                        <a:t>32,146</a:t>
+                        <a:t>32,300</a:t>
                       </a:r>
                     </a:p>
                   </a:txBody>
@@ -15965,7 +15965,7 @@
                           <a:effectLst/>
                           <a:latin typeface="Noto Sans" panose="020B0502040504020204" pitchFamily="34" charset="0"/>
                         </a:rPr>
-                        <a:t>37,693</a:t>
+                        <a:t>37,847</a:t>
                       </a:r>
                     </a:p>
                   </a:txBody>
@@ -16012,7 +16012,7 @@
                           <a:effectLst/>
                           <a:latin typeface="Noto Sans" panose="020B0502040504020204" pitchFamily="34" charset="0"/>
                         </a:rPr>
-                        <a:t>45,684</a:t>
+                        <a:t>45,838</a:t>
                       </a:r>
                     </a:p>
                   </a:txBody>
@@ -17895,7 +17895,7 @@
                           <a:ea typeface="Noto Sans" panose="020B0502040504020204" pitchFamily="34" charset="0"/>
                           <a:cs typeface="Noto Sans" panose="020B0502040504020204" pitchFamily="34" charset="0"/>
                         </a:rPr>
-                        <a:t>6,307</a:t>
+                        <a:t>6,623</a:t>
                       </a:r>
                     </a:p>
                   </a:txBody>
@@ -18252,7 +18252,7 @@
                           <a:ea typeface="Noto Sans" panose="020B0502040504020204" pitchFamily="34" charset="0"/>
                           <a:cs typeface="Noto Sans" panose="020B0502040504020204" pitchFamily="34" charset="0"/>
                         </a:rPr>
-                        <a:t>6.2</a:t>
+                        <a:t>11.5</a:t>
                       </a:r>
                     </a:p>
                   </a:txBody>
@@ -18348,7 +18348,7 @@
                           <a:ea typeface="Noto Sans" panose="020B0502040504020204" pitchFamily="34" charset="0"/>
                           <a:cs typeface="Noto Sans" panose="020B0502040504020204" pitchFamily="34" charset="0"/>
                         </a:rPr>
-                        <a:t>25.4</a:t>
+                        <a:t>24.2</a:t>
                       </a:r>
                     </a:p>
                   </a:txBody>
@@ -20539,7 +20539,7 @@
                 <a:ea typeface="Noto Sans" panose="020B0502040504020204" pitchFamily="34" charset="0"/>
                 <a:cs typeface="Noto Sans" panose="020B0502040504020204" pitchFamily="34" charset="0"/>
               </a:rPr>
-              <a:t>Chất lượng tài sản suy giảm vượt mức ban lãnh đạo dự kiến: tỷ lệ nợ xấu đạt 7.54% cuối Q2/2026, tăng 1.13%p so với đầu năm và cao nhất hệ thống, so với ước tính khoảng 5.6% của ban lãnh đạo. Dư nợ nhóm 3-5 tăng khoảng 7,800 tỷ đồng lên 47,957 tỷ đồng, trong đó khoảng 67% (32,000 tỷ đồng) xếp nhóm 5, nợ nhóm 4 tăng hơn gấp đôi (+156%). Chúng tôi đặt giả định nợ xấu FY26F ở 5.5% (từ dưới 4.5%) và FY27F ở 4.0% (từ 3.1%). Quá trình xử lý tài trợ từ nguồn dự phòng đã trích, không phải từ lợi nhuận: dự phòng đạt 27.2 nghìn tỷ đồng cuối Q2/2026 — bao phủ 56.7%, tăng từ 50.0% cuối 2025 — sau khi trích 7.1 nghìn tỷ đồng trong 1H26 và gần như chưa xóa nợ. Trích thêm 4.0 nghìn tỷ đồng trong 2H26 đủ để xóa 11.8 nghìn tỷ đồng, tương đương 37% dư nợ nhóm 5, đưa bao phủ về 51.1%. Việc giữ bao phủ quanh 50% giới hạn mức cải thiện ở 5.5%, đồng thời cần nợ xấu phát sinh mới 2H26 chỉ bằng khoảng một phần tư nhịp 1H26.</a:t>
+              <a:t>Chất lượng tài sản suy giảm vượt mức ban lãnh đạo dự kiến: tỷ lệ nợ xấu đạt 7.54% cuối Q2/2026, tăng 1.13%p so với đầu năm và cao nhất hệ thống, so với ước tính khoảng 5.6% của ban lãnh đạo. Dư nợ nhóm 3-5 tăng khoảng 7,800 tỷ đồng lên 47,957 tỷ đồng, trong đó khoảng 67% (32,000 tỷ đồng) xếp nhóm 5, nợ nhóm 4 tăng hơn gấp đôi (+156%). Chúng tôi đặt giả định nợ xấu FY26F ở 5.5% (từ dưới 4.5%) và FY27F ở 4.0% (từ 3.1%). Quá trình xử lý tài trợ từ nguồn dự phòng đã trích, không phải từ lợi nhuận: dự phòng đạt 27.2 nghìn tỷ đồng cuối Q2/2026 — bao phủ 56.7%, tăng từ 50.0% cuối 2025 — sau khi trích 7.1 nghìn tỷ đồng trong 1H26 và gần như chưa xóa nợ. Trích thêm 4.0 nghìn tỷ đồng trong 2H26 đủ để xóa 11.8 nghìn tỷ đồng, tương đương 37% dư nợ nhóm 5, đưa bao phủ về 50.0%. Việc giữ bao phủ ở 50% giới hạn mức cải thiện ở 5.5%, đồng thời cần nợ xấu phát sinh mới 2H26 chỉ bằng khoảng một phần tư nhịp 1H26.</a:t>
             </a:r>
             <a:endParaRPr kumimoji="1" lang="en-US" altLang="ko-KR" sz="800" b="0" dirty="0">
               <a:solidFill>
@@ -20634,7 +20634,7 @@
                 <a:ea typeface="Noto Sans" panose="020B0502040504020204" pitchFamily="34" charset="0"/>
                 <a:cs typeface="Noto Sans" panose="020B0502040504020204" pitchFamily="34" charset="0"/>
               </a:rPr>
-              <a:t>STB ghi nhận 7,331 tỷ đồng LNTT trong 1H25 nhưng chỉ 297 tỷ đồng trong 2H25, do Q4/2025 lỗ trước thuế 3,360 tỷ đồng. Chúng tôi đặt dự phóng LNTT FY26F ở 8,100 tỷ đồng (+6.2% CK), ngang kế hoạch đã được ĐHĐCĐ thông qua. Chi phí hoạt động là động lực chính — CIR 1H26 chỉ 35.6% so với 42.9% dự phóng trước đây, và chúng tôi điều chỉnh về 40.0% (-0.7%p CK), 38.0% FY27F và 36.0% FY28F — phần chênh còn lại đưa vào chi phí dự phòng. Mức này hàm ý LNTT 2H26 khoảng 3,964 tỷ đồng, tương đương khoảng 13 lần nền 2H25.</a:t>
+              <a:t>STB ghi nhận 7,331 tỷ đồng LNTT trong 1H25 nhưng chỉ 297 tỷ đồng trong 2H25, do Q4/2025 lỗ trước thuế 3,360 tỷ đồng. Chúng tôi đặt dự phóng LNTT FY26F ở 8,507 tỷ đồng (+11.5% CK), cao hơn 5% so với kế hoạch 8,100 tỷ đồng đã được ĐHĐCĐ thông qua. Chi phí hoạt động là động lực chính — CIR 1H26 chỉ 35.6% so với 42.9% dự phóng trước đây, và chúng tôi điều chỉnh về 40.0% (-0.7%p CK), 38.0% FY27F và 36.0% FY28F. Mức này vẫn cho phép chi phí hoạt động 2H26 cao hơn 1H26 9.6%, hàm ý LNTT 2H26 khoảng 4,371 tỷ đồng, tương đương khoảng 15 lần nền 2H25.</a:t>
             </a:r>
             <a:endParaRPr lang="en-US" altLang="ko-KR" sz="800" b="0" dirty="0">
               <a:solidFill>
@@ -20671,7 +20671,7 @@
                 <a:ea typeface="Noto Sans" panose="020B0502040504020204" pitchFamily="34" charset="0"/>
                 <a:cs typeface="Noto Sans" panose="020B0502040504020204" pitchFamily="34" charset="0"/>
               </a:rPr>
-              <a:t>Các giả định FY26F khác: NII 26,712 tỷ đồng (+0.1% CK), NIM 2.92% (-40bps CK) và chi phí dự phòng 11.5 nghìn tỷ đồng (+1.0% CK); lưu ý tăng trưởng tín dụng 1H26 chỉ 1.5% so với 11.7% dự phóng cả năm. Ở diễn biến khác, việc Sacombank thu giữ 507 giấy chứng nhận quyền sử dụng đất tại dự án Viva City đối với 350 tỷ đồng dư nợ gốc quá hạn tuy chưa trọng yếu nhưng cho thấy kênh xử lý tài sản đảm bảo mà chương trình xóa nợ 2H26 phụ thuộc vào.</a:t>
+              <a:t>Các giả định FY26F khác: NII 26,712 tỷ đồng (+0.1% CK), NIM 2.92% (-40bps CK) và chi phí dự phòng 11.1 nghìn tỷ đồng (-2.6% CK); lưu ý tăng trưởng tín dụng 1H26 chỉ 1.5% so với 11.7% dự phóng cả năm. Ở diễn biến khác, việc Sacombank thu giữ 507 giấy chứng nhận quyền sử dụng đất tại dự án Viva City đối với 350 tỷ đồng dư nợ gốc quá hạn tuy chưa trọng yếu nhưng cho thấy kênh xử lý tài sản đảm bảo mà chương trình xóa nợ 2H26 phụ thuộc vào.</a:t>
             </a:r>
             <a:r>
               <a:rPr kumimoji="1" lang="en-US" altLang="ko-KR" sz="800" b="1" i="0" u="none" strike="noStrike" kern="1200" cap="none" spc="0" normalizeH="0" baseline="0" noProof="0" dirty="0">
@@ -23414,7 +23414,7 @@
                           <a:effectLst/>
                           <a:latin typeface="Noto Sans" panose="020B0502040504020204" pitchFamily="34" charset="0"/>
                         </a:rPr>
-                        <a:t>8,100</a:t>
+                        <a:t>8,507</a:t>
                       </a:r>
                     </a:p>
                   </a:txBody>
@@ -23778,7 +23778,7 @@
                           <a:effectLst/>
                           <a:latin typeface="Noto Sans" panose="020B0502040504020204" pitchFamily="34" charset="0"/>
                         </a:rPr>
-                        <a:t>6,307</a:t>
+                        <a:t>6,623</a:t>
                       </a:r>
                     </a:p>
                   </a:txBody>
@@ -24118,7 +24118,7 @@
                           <a:effectLst/>
                           <a:latin typeface="Noto Sans" panose="020B0502040504020204" pitchFamily="34" charset="0"/>
                         </a:rPr>
-                        <a:t>3,061</a:t>
+                        <a:t>3,215</a:t>
                       </a:r>
                     </a:p>
                   </a:txBody>
@@ -24434,7 +24434,7 @@
                           <a:effectLst/>
                           <a:latin typeface="Noto Sans" panose="020B0502040504020204" pitchFamily="34" charset="0"/>
                         </a:rPr>
-                        <a:t>9.5</a:t>
+                        <a:t>10.0</a:t>
                       </a:r>
                     </a:p>
                   </a:txBody>
@@ -24480,7 +24480,7 @@
                           <a:effectLst/>
                           <a:latin typeface="Noto Sans" panose="020B0502040504020204" pitchFamily="34" charset="0"/>
                         </a:rPr>
-                        <a:t>15.9</a:t>
+                        <a:t>15.8</a:t>
                       </a:r>
                     </a:p>
                   </a:txBody>
@@ -24523,7 +24523,7 @@
                           <a:effectLst/>
                           <a:latin typeface="Noto Sans" panose="020B0502040504020204" pitchFamily="34" charset="0"/>
                         </a:rPr>
-                        <a:t>19.2</a:t>
+                        <a:t>19.1</a:t>
                       </a:r>
                     </a:p>
                   </a:txBody>
@@ -24750,7 +24750,7 @@
                           <a:effectLst/>
                           <a:latin typeface="Noto Sans" panose="020B0502040504020204" pitchFamily="34" charset="0"/>
                         </a:rPr>
-                        <a:t>25.4</a:t>
+                        <a:t>24.2</a:t>
                       </a:r>
                     </a:p>
                   </a:txBody>
@@ -25896,7 +25896,7 @@
                           <a:effectLst/>
                           <a:latin typeface="Noto Sans" panose="020B0502040504020204" pitchFamily="34" charset="0"/>
                         </a:rPr>
-                        <a:t>66,227</a:t>
+                        <a:t>66,544</a:t>
                       </a:r>
                     </a:p>
                   </a:txBody>
@@ -25942,7 +25942,7 @@
                           <a:effectLst/>
                           <a:latin typeface="Noto Sans" panose="020B0502040504020204" pitchFamily="34" charset="0"/>
                         </a:rPr>
-                        <a:t>77,653</a:t>
+                        <a:t>77,970</a:t>
                       </a:r>
                     </a:p>
                   </a:txBody>
@@ -25985,7 +25985,7 @@
                           <a:effectLst/>
                           <a:latin typeface="Noto Sans" panose="020B0502040504020204" pitchFamily="34" charset="0"/>
                         </a:rPr>
-                        <a:t>94,117</a:t>
+                        <a:t>94,434</a:t>
                       </a:r>
                     </a:p>
                   </a:txBody>
@@ -26336,7 +26336,7 @@
                           <a:effectLst/>
                           <a:latin typeface="Noto Sans" panose="020B0502040504020204" pitchFamily="34" charset="0"/>
                         </a:rPr>
-                        <a:t>32,146</a:t>
+                        <a:t>32,300</a:t>
                       </a:r>
                     </a:p>
                   </a:txBody>
@@ -26386,7 +26386,7 @@
                           <a:effectLst/>
                           <a:latin typeface="Noto Sans" panose="020B0502040504020204" pitchFamily="34" charset="0"/>
                         </a:rPr>
-                        <a:t>37,693</a:t>
+                        <a:t>37,847</a:t>
                       </a:r>
                     </a:p>
                   </a:txBody>
@@ -26433,7 +26433,7 @@
                           <a:effectLst/>
                           <a:latin typeface="Noto Sans" panose="020B0502040504020204" pitchFamily="34" charset="0"/>
                         </a:rPr>
-                        <a:t>45,684</a:t>
+                        <a:t>45,838</a:t>
                       </a:r>
                     </a:p>
                   </a:txBody>

--- a/MASVN_RS_WM_2H26_outlook_Equity_VN_2026_STBFPT_31July2026.pptx
+++ b/MASVN_RS_WM_2H26_outlook_Equity_VN_2026_STBFPT_31July2026.pptx
@@ -10211,7 +10211,7 @@
                           <a:ea typeface="Noto Sans" panose="020B0502040504020204" pitchFamily="34" charset="0"/>
                           <a:cs typeface="Noto Sans" panose="020B0502040504020204" pitchFamily="34" charset="0"/>
                         </a:rPr>
-                        <a:t>6,623</a:t>
+                        <a:t>6,346</a:t>
                       </a:r>
                     </a:p>
                   </a:txBody>
@@ -10376,7 +10376,7 @@
                           <a:ea typeface="Noto Sans" panose="020B0502040504020204" pitchFamily="34" charset="0"/>
                           <a:cs typeface="Noto Sans" panose="020B0502040504020204" pitchFamily="34" charset="0"/>
                         </a:rPr>
-                        <a:t>11.5</a:t>
+                        <a:t>6.9</a:t>
                       </a:r>
                     </a:p>
                   </a:txBody>
@@ -10472,7 +10472,7 @@
                           <a:ea typeface="Noto Sans" panose="020B0502040504020204" pitchFamily="34" charset="0"/>
                           <a:cs typeface="Noto Sans" panose="020B0502040504020204" pitchFamily="34" charset="0"/>
                         </a:rPr>
-                        <a:t>24.2</a:t>
+                        <a:t>25.3</a:t>
                       </a:r>
                     </a:p>
                   </a:txBody>
@@ -11861,7 +11861,7 @@
                 <a:ea typeface="Noto Sans" panose="020B0502040504020204" pitchFamily="34" charset="0"/>
                 <a:cs typeface="Noto Sans" panose="020B0502040504020204" pitchFamily="34" charset="0"/>
               </a:rPr>
-              <a:t>The NPL ratio reached 7.54% at end-2Q26, up 1.13%p year-to-date and the highest in the system, against management guidance of approximately 5.6%. Group 3-5 balances rose approximately VND7,800bn to VND47,957bn, of which about 67% (VND32,000bn) is Group 5, while Group 4 more than doubled (+156%). We set FY26F NPL at 5.5%, from below 4.5%, and FY27F at 4.0% from 3.1%. The clean-up is reserve-funded, not P&amp;L-funded: reserves reached VND27.2tn at end-2Q26 — 56.7% coverage, up from 50.0% at end-FY25 — after VND7.1tn of 1H26 charges and almost no write-offs. A further VND4.0tn charge in 2H26 funds write-offs of VND11.8tn, or 37% of the Group 5 balance, leaving coverage at 50.0%. Holding coverage at 50% is what caps the improvement at 5.5%, and it needs 2H26 NPL formation at roughly a quarter of the 1H26 pace.</a:t>
+              <a:t>The NPL ratio reached 7.54% at end-2Q26, up 1.13%p year-to-date and the highest in the system, against management guidance of approximately 5.6%. Group 3-5 balances rose approximately VND7,800bn to VND47,957bn, of which about 67% (VND32,000bn) is Group 5, while Group 4 more than doubled (+156%). We set FY26F NPL at 5.5%, from below 4.5%, and FY27F at 4.0% from 3.1%. The clean-up is reserve-funded, not P&amp;L-funded: reserves reached VND27.2tn at end-2Q26 — 56.7% coverage, up from 50.0% at end-FY25 — after VND7.1tn of 1H26 charges and almost no write-offs. A further VND4.0tn charge in 2H26 funds write-offs of VND11.8tn, or 37% of the Group 5 balance, leaving coverage at 51.0%. Holding coverage near 50% is what caps the improvement at 5.5%, and it needs 2H26 NPL formation at roughly a quarter of the 1H26 pace.</a:t>
             </a:r>
           </a:p>
           <a:p>
@@ -11915,7 +11915,7 @@
                 <a:ea typeface="Noto Sans" panose="020B0502040504020204" pitchFamily="34" charset="0"/>
                 <a:cs typeface="Noto Sans" panose="020B0502040504020204" pitchFamily="34" charset="0"/>
               </a:rPr>
-              <a:t>STB recorded VND7,331bn of PBT in 1H25 but only VND297bn in 2H25, as 4Q25 registered a pre-tax loss of VND3,360bn. We set FY26F PBT at VND8,507bn (+11.5% YoY), 5% above the board-approved plan of VND8,100bn. The cost line does the lifting — 1H26 CIR came in at 35.6% against the 42.9% previously carried, and we now assume 40.0% (-0.7%p YoY), 38.0% in FY27F and 36.0% in FY28F. That still allows 2H26 opex 9.6% above 1H26, and implies 2H26 PBT of VND4,371bn, around 15x the 2H25 base. Other FY26F assumptions: NII of VND26,712bn (+0.1% YoY), NIM of 2.92% (-40bps YoY) and provisioning of VND11.1tn (-2.6% YoY); we flag 1H26 loan growth of 1.5% against the 11.7% carried for the full year. Separately, STB's seizure of 507 land-use right certificates at LDG's Viva City against VND350bn of overdue principal is immaterial in size but shows the collateral channel the write-off programme depends on.</a:t>
+              <a:t>STB recorded VND7,331bn of PBT in 1H25 but only VND297bn in 2H25, as 4Q25 registered a pre-tax loss of VND3,360bn. We set FY26F PBT at VND8,150bn (+6.9% YoY), marginally above the board-approved plan of VND8,100bn. The cost line does the lifting — 1H26 CIR came in at 35.6% against the 42.9% previously carried, and we now assume 40.0% (-0.7%p YoY), 38.0% in FY27F and 36.0% in FY28F — with the balance taken back in provisioning. That implies 2H26 PBT of VND4,014bn, around 14x the 2H25 base. Other FY26F assumptions: NII of VND26,712bn (+0.1% YoY), NIM of 2.92% (-40bps YoY) and provisioning of VND11.4tn (+0.6% YoY); we flag 1H26 loan growth of 1.5% against the 11.7% carried for the full year. Separately, STB's seizure of 507 land-use right certificates at LDG's Viva City against VND350bn of overdue principal is immaterial in size but shows the collateral channel the write-off programme depends on.</a:t>
             </a:r>
           </a:p>
           <a:p>
@@ -13365,7 +13365,7 @@
                           <a:effectLst/>
                           <a:latin typeface="Noto Sans" panose="020B0502040504020204" pitchFamily="34" charset="0"/>
                         </a:rPr>
-                        <a:t>8,507</a:t>
+                        <a:t>8,151</a:t>
                       </a:r>
                     </a:p>
                   </a:txBody>
@@ -13681,7 +13681,7 @@
                           <a:effectLst/>
                           <a:latin typeface="Noto Sans" panose="020B0502040504020204" pitchFamily="34" charset="0"/>
                         </a:rPr>
-                        <a:t>6,623</a:t>
+                        <a:t>6,346</a:t>
                       </a:r>
                     </a:p>
                   </a:txBody>
@@ -13997,7 +13997,7 @@
                           <a:effectLst/>
                           <a:latin typeface="Noto Sans" panose="020B0502040504020204" pitchFamily="34" charset="0"/>
                         </a:rPr>
-                        <a:t>3,215</a:t>
+                        <a:t>3,080</a:t>
                       </a:r>
                     </a:p>
                   </a:txBody>
@@ -14313,7 +14313,7 @@
                           <a:effectLst/>
                           <a:latin typeface="Noto Sans" panose="020B0502040504020204" pitchFamily="34" charset="0"/>
                         </a:rPr>
-                        <a:t>10.0</a:t>
+                        <a:t>9.6</a:t>
                       </a:r>
                     </a:p>
                   </a:txBody>
@@ -14359,7 +14359,7 @@
                           <a:effectLst/>
                           <a:latin typeface="Noto Sans" panose="020B0502040504020204" pitchFamily="34" charset="0"/>
                         </a:rPr>
-                        <a:t>15.8</a:t>
+                        <a:t>15.9</a:t>
                       </a:r>
                     </a:p>
                   </a:txBody>
@@ -14402,7 +14402,7 @@
                           <a:effectLst/>
                           <a:latin typeface="Noto Sans" panose="020B0502040504020204" pitchFamily="34" charset="0"/>
                         </a:rPr>
-                        <a:t>19.1</a:t>
+                        <a:t>19.2</a:t>
                       </a:r>
                     </a:p>
                   </a:txBody>
@@ -14629,7 +14629,7 @@
                           <a:effectLst/>
                           <a:latin typeface="Noto Sans" panose="020B0502040504020204" pitchFamily="34" charset="0"/>
                         </a:rPr>
-                        <a:t>24.2</a:t>
+                        <a:t>25.3</a:t>
                       </a:r>
                     </a:p>
                   </a:txBody>
@@ -15583,7 +15583,7 @@
                           <a:effectLst/>
                           <a:latin typeface="Noto Sans" panose="020B0502040504020204" pitchFamily="34" charset="0"/>
                         </a:rPr>
-                        <a:t>66,544</a:t>
+                        <a:t>66,266</a:t>
                       </a:r>
                     </a:p>
                   </a:txBody>
@@ -15629,7 +15629,7 @@
                           <a:effectLst/>
                           <a:latin typeface="Noto Sans" panose="020B0502040504020204" pitchFamily="34" charset="0"/>
                         </a:rPr>
-                        <a:t>77,970</a:t>
+                        <a:t>77,693</a:t>
                       </a:r>
                     </a:p>
                   </a:txBody>
@@ -15672,7 +15672,7 @@
                           <a:effectLst/>
                           <a:latin typeface="Noto Sans" panose="020B0502040504020204" pitchFamily="34" charset="0"/>
                         </a:rPr>
-                        <a:t>94,434</a:t>
+                        <a:t>94,156</a:t>
                       </a:r>
                     </a:p>
                   </a:txBody>
@@ -15915,7 +15915,7 @@
                           <a:effectLst/>
                           <a:latin typeface="Noto Sans" panose="020B0502040504020204" pitchFamily="34" charset="0"/>
                         </a:rPr>
-                        <a:t>32,300</a:t>
+                        <a:t>32,166</a:t>
                       </a:r>
                     </a:p>
                   </a:txBody>
@@ -15965,7 +15965,7 @@
                           <a:effectLst/>
                           <a:latin typeface="Noto Sans" panose="020B0502040504020204" pitchFamily="34" charset="0"/>
                         </a:rPr>
-                        <a:t>37,847</a:t>
+                        <a:t>37,712</a:t>
                       </a:r>
                     </a:p>
                   </a:txBody>
@@ -16012,7 +16012,7 @@
                           <a:effectLst/>
                           <a:latin typeface="Noto Sans" panose="020B0502040504020204" pitchFamily="34" charset="0"/>
                         </a:rPr>
-                        <a:t>45,838</a:t>
+                        <a:t>45,703</a:t>
                       </a:r>
                     </a:p>
                   </a:txBody>
@@ -17895,7 +17895,7 @@
                           <a:ea typeface="Noto Sans" panose="020B0502040504020204" pitchFamily="34" charset="0"/>
                           <a:cs typeface="Noto Sans" panose="020B0502040504020204" pitchFamily="34" charset="0"/>
                         </a:rPr>
-                        <a:t>6,623</a:t>
+                        <a:t>6,346</a:t>
                       </a:r>
                     </a:p>
                   </a:txBody>
@@ -18252,7 +18252,7 @@
                           <a:ea typeface="Noto Sans" panose="020B0502040504020204" pitchFamily="34" charset="0"/>
                           <a:cs typeface="Noto Sans" panose="020B0502040504020204" pitchFamily="34" charset="0"/>
                         </a:rPr>
-                        <a:t>11.5</a:t>
+                        <a:t>6.9</a:t>
                       </a:r>
                     </a:p>
                   </a:txBody>
@@ -18348,7 +18348,7 @@
                           <a:ea typeface="Noto Sans" panose="020B0502040504020204" pitchFamily="34" charset="0"/>
                           <a:cs typeface="Noto Sans" panose="020B0502040504020204" pitchFamily="34" charset="0"/>
                         </a:rPr>
-                        <a:t>24.2</a:t>
+                        <a:t>25.3</a:t>
                       </a:r>
                     </a:p>
                   </a:txBody>
@@ -20539,7 +20539,7 @@
                 <a:ea typeface="Noto Sans" panose="020B0502040504020204" pitchFamily="34" charset="0"/>
                 <a:cs typeface="Noto Sans" panose="020B0502040504020204" pitchFamily="34" charset="0"/>
               </a:rPr>
-              <a:t>Chất lượng tài sản suy giảm vượt mức ban lãnh đạo dự kiến: tỷ lệ nợ xấu đạt 7.54% cuối Q2/2026, tăng 1.13%p so với đầu năm và cao nhất hệ thống, so với ước tính khoảng 5.6% của ban lãnh đạo. Dư nợ nhóm 3-5 tăng khoảng 7,800 tỷ đồng lên 47,957 tỷ đồng, trong đó khoảng 67% (32,000 tỷ đồng) xếp nhóm 5, nợ nhóm 4 tăng hơn gấp đôi (+156%). Chúng tôi đặt giả định nợ xấu FY26F ở 5.5% (từ dưới 4.5%) và FY27F ở 4.0% (từ 3.1%). Quá trình xử lý tài trợ từ nguồn dự phòng đã trích, không phải từ lợi nhuận: dự phòng đạt 27.2 nghìn tỷ đồng cuối Q2/2026 — bao phủ 56.7%, tăng từ 50.0% cuối 2025 — sau khi trích 7.1 nghìn tỷ đồng trong 1H26 và gần như chưa xóa nợ. Trích thêm 4.0 nghìn tỷ đồng trong 2H26 đủ để xóa 11.8 nghìn tỷ đồng, tương đương 37% dư nợ nhóm 5, đưa bao phủ về 50.0%. Việc giữ bao phủ ở 50% giới hạn mức cải thiện ở 5.5%, đồng thời cần nợ xấu phát sinh mới 2H26 chỉ bằng khoảng một phần tư nhịp 1H26.</a:t>
+              <a:t>Chất lượng tài sản suy giảm vượt mức ban lãnh đạo dự kiến: tỷ lệ nợ xấu đạt 7.54% cuối Q2/2026, tăng 1.13%p so với đầu năm và cao nhất hệ thống, so với ước tính khoảng 5.6% của ban lãnh đạo. Dư nợ nhóm 3-5 tăng khoảng 7,800 tỷ đồng lên 47,957 tỷ đồng, trong đó khoảng 67% (32,000 tỷ đồng) xếp nhóm 5, nợ nhóm 4 tăng hơn gấp đôi (+156%). Chúng tôi đặt giả định nợ xấu FY26F ở 5.5% (từ dưới 4.5%) và FY27F ở 4.0% (từ 3.1%). Quá trình xử lý tài trợ từ nguồn dự phòng đã trích, không phải từ lợi nhuận: dự phòng đạt 27.2 nghìn tỷ đồng cuối Q2/2026 — bao phủ 56.7%, tăng từ 50.0% cuối 2025 — sau khi trích 7.1 nghìn tỷ đồng trong 1H26 và gần như chưa xóa nợ. Trích thêm 4.0 nghìn tỷ đồng trong 2H26 đủ để xóa 11.8 nghìn tỷ đồng, tương đương 37% dư nợ nhóm 5, đưa bao phủ về 51.0%. Việc giữ bao phủ quanh 50% giới hạn mức cải thiện ở 5.5%, đồng thời cần nợ xấu phát sinh mới 2H26 chỉ bằng khoảng một phần tư nhịp 1H26.</a:t>
             </a:r>
             <a:endParaRPr kumimoji="1" lang="en-US" altLang="ko-KR" sz="800" b="0" dirty="0">
               <a:solidFill>
@@ -20634,7 +20634,7 @@
                 <a:ea typeface="Noto Sans" panose="020B0502040504020204" pitchFamily="34" charset="0"/>
                 <a:cs typeface="Noto Sans" panose="020B0502040504020204" pitchFamily="34" charset="0"/>
               </a:rPr>
-              <a:t>STB ghi nhận 7,331 tỷ đồng LNTT trong 1H25 nhưng chỉ 297 tỷ đồng trong 2H25, do Q4/2025 lỗ trước thuế 3,360 tỷ đồng. Chúng tôi đặt dự phóng LNTT FY26F ở 8,507 tỷ đồng (+11.5% CK), cao hơn 5% so với kế hoạch 8,100 tỷ đồng đã được ĐHĐCĐ thông qua. Chi phí hoạt động là động lực chính — CIR 1H26 chỉ 35.6% so với 42.9% dự phóng trước đây, và chúng tôi điều chỉnh về 40.0% (-0.7%p CK), 38.0% FY27F và 36.0% FY28F. Mức này vẫn cho phép chi phí hoạt động 2H26 cao hơn 1H26 9.6%, hàm ý LNTT 2H26 khoảng 4,371 tỷ đồng, tương đương khoảng 15 lần nền 2H25.</a:t>
+              <a:t>STB ghi nhận 7,331 tỷ đồng LNTT trong 1H25 nhưng chỉ 297 tỷ đồng trong 2H25, do Q4/2025 lỗ trước thuế 3,360 tỷ đồng. Chúng tôi đặt dự phóng LNTT FY26F ở 8,150 tỷ đồng (+6.9% CK), nhỉnh hơn kế hoạch 8,100 tỷ đồng đã được ĐHĐCĐ thông qua. Chi phí hoạt động là động lực chính — CIR 1H26 chỉ 35.6% so với 42.9% dự phóng trước đây, và chúng tôi điều chỉnh về 40.0% (-0.7%p CK), 38.0% FY27F và 36.0% FY28F — phần chênh còn lại đưa vào chi phí dự phòng. Mức này hàm ý LNTT 2H26 khoảng 4,014 tỷ đồng, tương đương khoảng 14 lần nền 2H25.</a:t>
             </a:r>
             <a:endParaRPr lang="en-US" altLang="ko-KR" sz="800" b="0" dirty="0">
               <a:solidFill>
@@ -20671,7 +20671,7 @@
                 <a:ea typeface="Noto Sans" panose="020B0502040504020204" pitchFamily="34" charset="0"/>
                 <a:cs typeface="Noto Sans" panose="020B0502040504020204" pitchFamily="34" charset="0"/>
               </a:rPr>
-              <a:t>Các giả định FY26F khác: NII 26,712 tỷ đồng (+0.1% CK), NIM 2.92% (-40bps CK) và chi phí dự phòng 11.1 nghìn tỷ đồng (-2.6% CK); lưu ý tăng trưởng tín dụng 1H26 chỉ 1.5% so với 11.7% dự phóng cả năm. Ở diễn biến khác, việc Sacombank thu giữ 507 giấy chứng nhận quyền sử dụng đất tại dự án Viva City đối với 350 tỷ đồng dư nợ gốc quá hạn tuy chưa trọng yếu nhưng cho thấy kênh xử lý tài sản đảm bảo mà chương trình xóa nợ 2H26 phụ thuộc vào.</a:t>
+              <a:t>Các giả định FY26F khác: NII 26,712 tỷ đồng (+0.1% CK), NIM 2.92% (-40bps CK) và chi phí dự phòng 11.4 nghìn tỷ đồng (+0.6% CK); lưu ý tăng trưởng tín dụng 1H26 chỉ 1.5% so với 11.7% dự phóng cả năm. Ở diễn biến khác, việc Sacombank thu giữ 507 giấy chứng nhận quyền sử dụng đất tại dự án Viva City đối với 350 tỷ đồng dư nợ gốc quá hạn tuy chưa trọng yếu nhưng cho thấy kênh xử lý tài sản đảm bảo mà chương trình xóa nợ 2H26 phụ thuộc vào.</a:t>
             </a:r>
             <a:r>
               <a:rPr kumimoji="1" lang="en-US" altLang="ko-KR" sz="800" b="1" i="0" u="none" strike="noStrike" kern="1200" cap="none" spc="0" normalizeH="0" baseline="0" noProof="0" dirty="0">
@@ -23414,7 +23414,7 @@
                           <a:effectLst/>
                           <a:latin typeface="Noto Sans" panose="020B0502040504020204" pitchFamily="34" charset="0"/>
                         </a:rPr>
-                        <a:t>8,507</a:t>
+                        <a:t>8,151</a:t>
                       </a:r>
                     </a:p>
                   </a:txBody>
@@ -23778,7 +23778,7 @@
                           <a:effectLst/>
                           <a:latin typeface="Noto Sans" panose="020B0502040504020204" pitchFamily="34" charset="0"/>
                         </a:rPr>
-                        <a:t>6,623</a:t>
+                        <a:t>6,346</a:t>
                       </a:r>
                     </a:p>
                   </a:txBody>
@@ -24118,7 +24118,7 @@
                           <a:effectLst/>
                           <a:latin typeface="Noto Sans" panose="020B0502040504020204" pitchFamily="34" charset="0"/>
                         </a:rPr>
-                        <a:t>3,215</a:t>
+                        <a:t>3,080</a:t>
                       </a:r>
                     </a:p>
                   </a:txBody>
@@ -24434,7 +24434,7 @@
                           <a:effectLst/>
                           <a:latin typeface="Noto Sans" panose="020B0502040504020204" pitchFamily="34" charset="0"/>
                         </a:rPr>
-                        <a:t>10.0</a:t>
+                        <a:t>9.6</a:t>
                       </a:r>
                     </a:p>
                   </a:txBody>
@@ -24480,7 +24480,7 @@
                           <a:effectLst/>
                           <a:latin typeface="Noto Sans" panose="020B0502040504020204" pitchFamily="34" charset="0"/>
                         </a:rPr>
-                        <a:t>15.8</a:t>
+                        <a:t>15.9</a:t>
                       </a:r>
                     </a:p>
                   </a:txBody>
@@ -24523,7 +24523,7 @@
                           <a:effectLst/>
                           <a:latin typeface="Noto Sans" panose="020B0502040504020204" pitchFamily="34" charset="0"/>
                         </a:rPr>
-                        <a:t>19.1</a:t>
+                        <a:t>19.2</a:t>
                       </a:r>
                     </a:p>
                   </a:txBody>
@@ -24750,7 +24750,7 @@
                           <a:effectLst/>
                           <a:latin typeface="Noto Sans" panose="020B0502040504020204" pitchFamily="34" charset="0"/>
                         </a:rPr>
-                        <a:t>24.2</a:t>
+                        <a:t>25.3</a:t>
                       </a:r>
                     </a:p>
                   </a:txBody>
@@ -25896,7 +25896,7 @@
                           <a:effectLst/>
                           <a:latin typeface="Noto Sans" panose="020B0502040504020204" pitchFamily="34" charset="0"/>
                         </a:rPr>
-                        <a:t>66,544</a:t>
+                        <a:t>66,266</a:t>
                       </a:r>
                     </a:p>
                   </a:txBody>
@@ -25942,7 +25942,7 @@
                           <a:effectLst/>
                           <a:latin typeface="Noto Sans" panose="020B0502040504020204" pitchFamily="34" charset="0"/>
                         </a:rPr>
-                        <a:t>77,970</a:t>
+                        <a:t>77,693</a:t>
                       </a:r>
                     </a:p>
                   </a:txBody>
@@ -25985,7 +25985,7 @@
                           <a:effectLst/>
                           <a:latin typeface="Noto Sans" panose="020B0502040504020204" pitchFamily="34" charset="0"/>
                         </a:rPr>
-                        <a:t>94,434</a:t>
+                        <a:t>94,156</a:t>
                       </a:r>
                     </a:p>
                   </a:txBody>
@@ -26336,7 +26336,7 @@
                           <a:effectLst/>
                           <a:latin typeface="Noto Sans" panose="020B0502040504020204" pitchFamily="34" charset="0"/>
                         </a:rPr>
-                        <a:t>32,300</a:t>
+                        <a:t>32,166</a:t>
                       </a:r>
                     </a:p>
                   </a:txBody>
@@ -26386,7 +26386,7 @@
                           <a:effectLst/>
                           <a:latin typeface="Noto Sans" panose="020B0502040504020204" pitchFamily="34" charset="0"/>
                         </a:rPr>
-                        <a:t>37,847</a:t>
+                        <a:t>37,712</a:t>
                       </a:r>
                     </a:p>
                   </a:txBody>
@@ -26433,7 +26433,7 @@
                           <a:effectLst/>
                           <a:latin typeface="Noto Sans" panose="020B0502040504020204" pitchFamily="34" charset="0"/>
                         </a:rPr>
-                        <a:t>45,838</a:t>
+                        <a:t>45,703</a:t>
                       </a:r>
                     </a:p>
                   </a:txBody>
